--- a/docs/Sem_4/FINAL_PRESENTATION_VishalSingh_2020AA05641.pptx
+++ b/docs/Sem_4/FINAL_PRESENTATION_VishalSingh_2020AA05641.pptx
@@ -24854,7 +24854,7 @@
                   <a:srgbClr val="FFFFFF"/>
                 </a:solidFill>
               </a:rPr>
-              <a:t>Smart Reply  —  Worked Example</a:t>
+              <a:t>Smart Reply  —  Worked Example  (real post from our benchmark)</a:t>
             </a:r>
           </a:p>
         </p:txBody>
@@ -24888,7 +24888,7 @@
                   <a:srgbClr val="E8F4FD"/>
                 </a:solidFill>
               </a:rPr>
-              <a:t>One real complaint  →  three drafts  →  analyst picks &amp; posts</a:t>
+              <a:t>id = 1nn7hjxx  ·  r/samsclub  ·  data/benchmark_real_200.jsonl</a:t>
             </a:r>
           </a:p>
         </p:txBody>
@@ -25012,7 +25012,7 @@
                   <a:srgbClr val="D97706"/>
                 </a:solidFill>
               </a:rPr>
-              <a:t>Customer complaint  —  r/walmart  ·  aspects: product_quality, returns</a:t>
+              <a:t>Customer complaint  —  r/samsclub  ·  aspects: product_quality, store_experience  ·  trust 0.62  ·  P2</a:t>
             </a:r>
           </a:p>
         </p:txBody>
@@ -25041,12 +25041,12 @@
           <a:p>
             <a:pPr algn="l"/>
             <a:r>
-              <a:rPr sz="1100" b="0">
+              <a:rPr sz="1000" b="0">
                 <a:solidFill>
                   <a:srgbClr val="333333"/>
                 </a:solidFill>
               </a:rPr>
-              <a:t>u/hangry_shopper : “Bought a 2-lb strawberry pack from OGP pickup last night and half of them are mouldy today. Store said returns close at 9pm and refused to help. Second time this month — is this the new normal?”</a:t>
+              <a:t>u/hangry_shopper : "Why do you guys sell whole pizzas made hours ago to customers?  The very few times I've gotten a whole pie, it'll be stuff premade and left in the hot case for like an hour 30mins before it's in my hand. How can I tell? They put a sticker with the date and the pizza looks and taste hours old. Pizza is meant to be made to order and waited for."</a:t>
             </a:r>
           </a:p>
         </p:txBody>
@@ -25199,12 +25199,12 @@
           <a:p>
             <a:pPr algn="l"/>
             <a:r>
-              <a:rPr sz="1000" b="0">
+              <a:rPr sz="900" b="0">
                 <a:solidFill>
                   <a:srgbClr val="333333"/>
                 </a:solidFill>
               </a:rPr>
-              <a:t>Really sorry to see mouldy berries twice in one month — that's not the pickup quality we want you to have. Please DM the order number and I'll get produce ops to look at that store's chill-chain and cover the refund for you. — Ravi (Walmart Care)</a:t>
+              <a:t>Really sorry the pizza's been sitting in the hot case that long — that's not the fresh pie experience the club is supposed to deliver. DM me the club number and the day/time of your last visit and I'll flag it to the bakery-café team so the make-to-order flow gets reinforced. — Ravi (Sam's Club Care)</a:t>
             </a:r>
           </a:p>
         </p:txBody>
@@ -25357,12 +25357,12 @@
           <a:p>
             <a:pPr algn="l"/>
             <a:r>
-              <a:rPr sz="1000" b="0">
+              <a:rPr sz="900" b="0">
                 <a:solidFill>
                   <a:srgbClr val="333333"/>
                 </a:solidFill>
               </a:rPr>
-              <a:t>That's genuinely frustrating — nobody expects two bad pickups in a row. Send me a DM with the order # and I'll route it to the store manager and produce ops so we can dig into the chill chain and refund you today. — Priya</a:t>
+              <a:t>Totally fair callout — a whole pie that's been in the hot case for 90 minutes isn't the deal. DM me your club number and I'll get the bakery lead to look at their bake-off schedule so the pies you buy are made to order like they should be. — Priya</a:t>
             </a:r>
           </a:p>
         </p:txBody>
@@ -25515,12 +25515,12 @@
           <a:p>
             <a:pPr algn="l"/>
             <a:r>
-              <a:rPr sz="1000" b="0">
+              <a:rPr sz="900" b="0">
                 <a:solidFill>
                   <a:srgbClr val="333333"/>
                 </a:solidFill>
               </a:rPr>
-              <a:t>Hi hangry_shopper, we're sorry about the quality of what you received on your pickup — returns closing at 9pm shouldn't leave you without a refund. Please DM us your order details and we'll get the produce team on it. — Walmart Care</a:t>
+              <a:t>Hi hangry_shopper, we're really sorry about the quality of what you received on your last visit — a pizza that's been sitting for that long isn't the standard. Please DM us the club number and the day you bought it and we'll get the bakery team on it. — Sam's Club Care</a:t>
             </a:r>
           </a:p>
         </p:txBody>
@@ -25600,7 +25600,7 @@
                   <a:srgbClr val="333333"/>
                 </a:solidFill>
               </a:rPr>
-              <a:t>Analyst picks a draft, edits inline, clicks  Save &amp; Open Reddit  →  posted reply is written to  feedback  →  becomes a future few-shot example (Draft A / B pool grows).</a:t>
+              <a:t>Analyst picks a draft, edits inline, clicks  Save &amp; Open Reddit  →  posted reply is written to  feedback  (kind = auto_reply_posted)  →  becomes the next post's top few-shot example. See docs/Sem_4/SMART_REPLY_COMPOSER.md</a:t>
             </a:r>
           </a:p>
         </p:txBody>
@@ -25798,7 +25798,7 @@
                   <a:srgbClr val="E8F4FD"/>
                 </a:solidFill>
               </a:rPr>
-              <a:t>HITL corrections + posted replies become the next training set</a:t>
+              <a:t>Every human action becomes a training signal  —  hot loop (live) + warm loop (monthly)</a:t>
             </a:r>
           </a:p>
         </p:txBody>
@@ -25855,8 +25855,482 @@
         </p:nvSpPr>
         <p:spPr>
           <a:xfrm>
-            <a:off x="365760" y="1234440"/>
-            <a:ext cx="2743200" cy="2194560"/>
+            <a:off x="365760" y="960120"/>
+            <a:ext cx="2788920" cy="1051560"/>
+          </a:xfrm>
+          <a:prstGeom prst="rect">
+            <a:avLst/>
+          </a:prstGeom>
+          <a:solidFill>
+            <a:srgbClr val="F5F5F5"/>
+          </a:solidFill>
+          <a:ln>
+            <a:solidFill>
+              <a:srgbClr val="0071DC"/>
+            </a:solidFill>
+          </a:ln>
+          <a:effectLst/>
+        </p:spPr>
+        <p:style>
+          <a:lnRef idx="1">
+            <a:schemeClr val="accent1"/>
+          </a:lnRef>
+          <a:fillRef idx="3">
+            <a:schemeClr val="accent1"/>
+          </a:fillRef>
+          <a:effectRef idx="2">
+            <a:schemeClr val="accent1"/>
+          </a:effectRef>
+          <a:fontRef idx="minor">
+            <a:schemeClr val="lt1"/>
+          </a:fontRef>
+        </p:style>
+        <p:txBody>
+          <a:bodyPr rtlCol="0" anchor="ctr"/>
+          <a:lstStyle/>
+          <a:p>
+            <a:pPr algn="ctr"/>
+          </a:p>
+        </p:txBody>
+      </p:sp>
+      <p:sp>
+        <p:nvSpPr>
+          <p:cNvPr id="7" name="Rectangle 6"/>
+          <p:cNvSpPr/>
+          <p:nvPr/>
+        </p:nvSpPr>
+        <p:spPr>
+          <a:xfrm>
+            <a:off x="365760" y="960120"/>
+            <a:ext cx="2788920" cy="320040"/>
+          </a:xfrm>
+          <a:prstGeom prst="rect">
+            <a:avLst/>
+          </a:prstGeom>
+          <a:solidFill>
+            <a:srgbClr val="0071DC"/>
+          </a:solidFill>
+          <a:ln>
+            <a:noFill/>
+          </a:ln>
+          <a:effectLst/>
+        </p:spPr>
+        <p:style>
+          <a:lnRef idx="1">
+            <a:schemeClr val="accent1"/>
+          </a:lnRef>
+          <a:fillRef idx="3">
+            <a:schemeClr val="accent1"/>
+          </a:fillRef>
+          <a:effectRef idx="2">
+            <a:schemeClr val="accent1"/>
+          </a:effectRef>
+          <a:fontRef idx="minor">
+            <a:schemeClr val="lt1"/>
+          </a:fontRef>
+        </p:style>
+        <p:txBody>
+          <a:bodyPr rtlCol="0" anchor="ctr"/>
+          <a:lstStyle/>
+          <a:p>
+            <a:pPr algn="ctr"/>
+          </a:p>
+        </p:txBody>
+      </p:sp>
+      <p:sp>
+        <p:nvSpPr>
+          <p:cNvPr id="8" name="TextBox 7"/>
+          <p:cNvSpPr txBox="1"/>
+          <p:nvPr/>
+        </p:nvSpPr>
+        <p:spPr>
+          <a:xfrm>
+            <a:off x="365760" y="1005840"/>
+            <a:ext cx="2788920" cy="274320"/>
+          </a:xfrm>
+          <a:prstGeom prst="rect">
+            <a:avLst/>
+          </a:prstGeom>
+          <a:noFill/>
+        </p:spPr>
+        <p:txBody>
+          <a:bodyPr wrap="square" anchor="t">
+            <a:spAutoFit/>
+          </a:bodyPr>
+          <a:lstStyle/>
+          <a:p>
+            <a:pPr algn="ctr"/>
+            <a:r>
+              <a:rPr sz="1100" b="1">
+                <a:solidFill>
+                  <a:srgbClr val="FFFFFF"/>
+                </a:solidFill>
+              </a:rPr>
+              <a:t>Label / aspect correction</a:t>
+            </a:r>
+          </a:p>
+        </p:txBody>
+      </p:sp>
+      <p:sp>
+        <p:nvSpPr>
+          <p:cNvPr id="9" name="TextBox 8"/>
+          <p:cNvSpPr txBox="1"/>
+          <p:nvPr/>
+        </p:nvSpPr>
+        <p:spPr>
+          <a:xfrm>
+            <a:off x="365760" y="1417320"/>
+            <a:ext cx="2788920" cy="594360"/>
+          </a:xfrm>
+          <a:prstGeom prst="rect">
+            <a:avLst/>
+          </a:prstGeom>
+          <a:noFill/>
+        </p:spPr>
+        <p:txBody>
+          <a:bodyPr wrap="square" anchor="ctr">
+            <a:spAutoFit/>
+          </a:bodyPr>
+          <a:lstStyle/>
+          <a:p>
+            <a:pPr algn="ctr"/>
+            <a:r>
+              <a:rPr sz="1100" b="0">
+                <a:solidFill>
+                  <a:srgbClr val="333333"/>
+                </a:solidFill>
+              </a:rPr>
+              <a:t>Review &amp; Validate</a:t>
+            </a:r>
+          </a:p>
+        </p:txBody>
+      </p:sp>
+      <p:sp>
+        <p:nvSpPr>
+          <p:cNvPr id="10" name="Rectangle 9"/>
+          <p:cNvSpPr/>
+          <p:nvPr/>
+        </p:nvSpPr>
+        <p:spPr>
+          <a:xfrm>
+            <a:off x="3291840" y="960120"/>
+            <a:ext cx="2788920" cy="1051560"/>
+          </a:xfrm>
+          <a:prstGeom prst="rect">
+            <a:avLst/>
+          </a:prstGeom>
+          <a:solidFill>
+            <a:srgbClr val="F5F5F5"/>
+          </a:solidFill>
+          <a:ln>
+            <a:solidFill>
+              <a:srgbClr val="7C3AED"/>
+            </a:solidFill>
+          </a:ln>
+          <a:effectLst/>
+        </p:spPr>
+        <p:style>
+          <a:lnRef idx="1">
+            <a:schemeClr val="accent1"/>
+          </a:lnRef>
+          <a:fillRef idx="3">
+            <a:schemeClr val="accent1"/>
+          </a:fillRef>
+          <a:effectRef idx="2">
+            <a:schemeClr val="accent1"/>
+          </a:effectRef>
+          <a:fontRef idx="minor">
+            <a:schemeClr val="lt1"/>
+          </a:fontRef>
+        </p:style>
+        <p:txBody>
+          <a:bodyPr rtlCol="0" anchor="ctr"/>
+          <a:lstStyle/>
+          <a:p>
+            <a:pPr algn="ctr"/>
+          </a:p>
+        </p:txBody>
+      </p:sp>
+      <p:sp>
+        <p:nvSpPr>
+          <p:cNvPr id="11" name="Rectangle 10"/>
+          <p:cNvSpPr/>
+          <p:nvPr/>
+        </p:nvSpPr>
+        <p:spPr>
+          <a:xfrm>
+            <a:off x="3291840" y="960120"/>
+            <a:ext cx="2788920" cy="320040"/>
+          </a:xfrm>
+          <a:prstGeom prst="rect">
+            <a:avLst/>
+          </a:prstGeom>
+          <a:solidFill>
+            <a:srgbClr val="7C3AED"/>
+          </a:solidFill>
+          <a:ln>
+            <a:noFill/>
+          </a:ln>
+          <a:effectLst/>
+        </p:spPr>
+        <p:style>
+          <a:lnRef idx="1">
+            <a:schemeClr val="accent1"/>
+          </a:lnRef>
+          <a:fillRef idx="3">
+            <a:schemeClr val="accent1"/>
+          </a:fillRef>
+          <a:effectRef idx="2">
+            <a:schemeClr val="accent1"/>
+          </a:effectRef>
+          <a:fontRef idx="minor">
+            <a:schemeClr val="lt1"/>
+          </a:fontRef>
+        </p:style>
+        <p:txBody>
+          <a:bodyPr rtlCol="0" anchor="ctr"/>
+          <a:lstStyle/>
+          <a:p>
+            <a:pPr algn="ctr"/>
+          </a:p>
+        </p:txBody>
+      </p:sp>
+      <p:sp>
+        <p:nvSpPr>
+          <p:cNvPr id="12" name="TextBox 11"/>
+          <p:cNvSpPr txBox="1"/>
+          <p:nvPr/>
+        </p:nvSpPr>
+        <p:spPr>
+          <a:xfrm>
+            <a:off x="3291840" y="1005840"/>
+            <a:ext cx="2788920" cy="274320"/>
+          </a:xfrm>
+          <a:prstGeom prst="rect">
+            <a:avLst/>
+          </a:prstGeom>
+          <a:noFill/>
+        </p:spPr>
+        <p:txBody>
+          <a:bodyPr wrap="square" anchor="t">
+            <a:spAutoFit/>
+          </a:bodyPr>
+          <a:lstStyle/>
+          <a:p>
+            <a:pPr algn="ctr"/>
+            <a:r>
+              <a:rPr sz="1100" b="1">
+                <a:solidFill>
+                  <a:srgbClr val="FFFFFF"/>
+                </a:solidFill>
+              </a:rPr>
+              <a:t>Trust-score override</a:t>
+            </a:r>
+          </a:p>
+        </p:txBody>
+      </p:sp>
+      <p:sp>
+        <p:nvSpPr>
+          <p:cNvPr id="13" name="TextBox 12"/>
+          <p:cNvSpPr txBox="1"/>
+          <p:nvPr/>
+        </p:nvSpPr>
+        <p:spPr>
+          <a:xfrm>
+            <a:off x="3291840" y="1417320"/>
+            <a:ext cx="2788920" cy="594360"/>
+          </a:xfrm>
+          <a:prstGeom prst="rect">
+            <a:avLst/>
+          </a:prstGeom>
+          <a:noFill/>
+        </p:spPr>
+        <p:txBody>
+          <a:bodyPr wrap="square" anchor="ctr">
+            <a:spAutoFit/>
+          </a:bodyPr>
+          <a:lstStyle/>
+          <a:p>
+            <a:pPr algn="ctr"/>
+            <a:r>
+              <a:rPr sz="1100" b="0">
+                <a:solidFill>
+                  <a:srgbClr val="333333"/>
+                </a:solidFill>
+              </a:rPr>
+              <a:t>Review &amp; Validate</a:t>
+            </a:r>
+          </a:p>
+        </p:txBody>
+      </p:sp>
+      <p:sp>
+        <p:nvSpPr>
+          <p:cNvPr id="14" name="Rectangle 13"/>
+          <p:cNvSpPr/>
+          <p:nvPr/>
+        </p:nvSpPr>
+        <p:spPr>
+          <a:xfrm>
+            <a:off x="6217920" y="960120"/>
+            <a:ext cx="2788920" cy="1051560"/>
+          </a:xfrm>
+          <a:prstGeom prst="rect">
+            <a:avLst/>
+          </a:prstGeom>
+          <a:solidFill>
+            <a:srgbClr val="F5F5F5"/>
+          </a:solidFill>
+          <a:ln>
+            <a:solidFill>
+              <a:srgbClr val="10B981"/>
+            </a:solidFill>
+          </a:ln>
+          <a:effectLst/>
+        </p:spPr>
+        <p:style>
+          <a:lnRef idx="1">
+            <a:schemeClr val="accent1"/>
+          </a:lnRef>
+          <a:fillRef idx="3">
+            <a:schemeClr val="accent1"/>
+          </a:fillRef>
+          <a:effectRef idx="2">
+            <a:schemeClr val="accent1"/>
+          </a:effectRef>
+          <a:fontRef idx="minor">
+            <a:schemeClr val="lt1"/>
+          </a:fontRef>
+        </p:style>
+        <p:txBody>
+          <a:bodyPr rtlCol="0" anchor="ctr"/>
+          <a:lstStyle/>
+          <a:p>
+            <a:pPr algn="ctr"/>
+          </a:p>
+        </p:txBody>
+      </p:sp>
+      <p:sp>
+        <p:nvSpPr>
+          <p:cNvPr id="15" name="Rectangle 14"/>
+          <p:cNvSpPr/>
+          <p:nvPr/>
+        </p:nvSpPr>
+        <p:spPr>
+          <a:xfrm>
+            <a:off x="6217920" y="960120"/>
+            <a:ext cx="2788920" cy="320040"/>
+          </a:xfrm>
+          <a:prstGeom prst="rect">
+            <a:avLst/>
+          </a:prstGeom>
+          <a:solidFill>
+            <a:srgbClr val="10B981"/>
+          </a:solidFill>
+          <a:ln>
+            <a:noFill/>
+          </a:ln>
+          <a:effectLst/>
+        </p:spPr>
+        <p:style>
+          <a:lnRef idx="1">
+            <a:schemeClr val="accent1"/>
+          </a:lnRef>
+          <a:fillRef idx="3">
+            <a:schemeClr val="accent1"/>
+          </a:fillRef>
+          <a:effectRef idx="2">
+            <a:schemeClr val="accent1"/>
+          </a:effectRef>
+          <a:fontRef idx="minor">
+            <a:schemeClr val="lt1"/>
+          </a:fontRef>
+        </p:style>
+        <p:txBody>
+          <a:bodyPr rtlCol="0" anchor="ctr"/>
+          <a:lstStyle/>
+          <a:p>
+            <a:pPr algn="ctr"/>
+          </a:p>
+        </p:txBody>
+      </p:sp>
+      <p:sp>
+        <p:nvSpPr>
+          <p:cNvPr id="16" name="TextBox 15"/>
+          <p:cNvSpPr txBox="1"/>
+          <p:nvPr/>
+        </p:nvSpPr>
+        <p:spPr>
+          <a:xfrm>
+            <a:off x="6217920" y="1005840"/>
+            <a:ext cx="2788920" cy="274320"/>
+          </a:xfrm>
+          <a:prstGeom prst="rect">
+            <a:avLst/>
+          </a:prstGeom>
+          <a:noFill/>
+        </p:spPr>
+        <p:txBody>
+          <a:bodyPr wrap="square" anchor="t">
+            <a:spAutoFit/>
+          </a:bodyPr>
+          <a:lstStyle/>
+          <a:p>
+            <a:pPr algn="ctr"/>
+            <a:r>
+              <a:rPr sz="1100" b="1">
+                <a:solidFill>
+                  <a:srgbClr val="FFFFFF"/>
+                </a:solidFill>
+              </a:rPr>
+              <a:t>Posted reply</a:t>
+            </a:r>
+          </a:p>
+        </p:txBody>
+      </p:sp>
+      <p:sp>
+        <p:nvSpPr>
+          <p:cNvPr id="17" name="TextBox 16"/>
+          <p:cNvSpPr txBox="1"/>
+          <p:nvPr/>
+        </p:nvSpPr>
+        <p:spPr>
+          <a:xfrm>
+            <a:off x="6217920" y="1417320"/>
+            <a:ext cx="2788920" cy="594360"/>
+          </a:xfrm>
+          <a:prstGeom prst="rect">
+            <a:avLst/>
+          </a:prstGeom>
+          <a:noFill/>
+        </p:spPr>
+        <p:txBody>
+          <a:bodyPr wrap="square" anchor="ctr">
+            <a:spAutoFit/>
+          </a:bodyPr>
+          <a:lstStyle/>
+          <a:p>
+            <a:pPr algn="ctr"/>
+            <a:r>
+              <a:rPr sz="1100" b="0">
+                <a:solidFill>
+                  <a:srgbClr val="333333"/>
+                </a:solidFill>
+              </a:rPr>
+              <a:t>Smart Reply Composer</a:t>
+            </a:r>
+          </a:p>
+        </p:txBody>
+      </p:sp>
+      <p:sp>
+        <p:nvSpPr>
+          <p:cNvPr id="18" name="Rectangle 17"/>
+          <p:cNvSpPr/>
+          <p:nvPr/>
+        </p:nvSpPr>
+        <p:spPr>
+          <a:xfrm>
+            <a:off x="9144000" y="960120"/>
+            <a:ext cx="2788920" cy="1051560"/>
           </a:xfrm>
           <a:prstGeom prst="rect">
             <a:avLst/>
@@ -25895,14 +26369,14 @@
       </p:sp>
       <p:sp>
         <p:nvSpPr>
-          <p:cNvPr id="7" name="Rectangle 6"/>
+          <p:cNvPr id="19" name="Rectangle 18"/>
           <p:cNvSpPr/>
           <p:nvPr/>
         </p:nvSpPr>
         <p:spPr>
           <a:xfrm>
-            <a:off x="365760" y="1234440"/>
-            <a:ext cx="2743200" cy="411480"/>
+            <a:off x="9144000" y="960120"/>
+            <a:ext cx="2788920" cy="320040"/>
           </a:xfrm>
           <a:prstGeom prst="rect">
             <a:avLst/>
@@ -25939,14 +26413,14 @@
       </p:sp>
       <p:sp>
         <p:nvSpPr>
-          <p:cNvPr id="8" name="TextBox 7"/>
-          <p:cNvSpPr txBox="1"/>
-          <p:nvPr/>
-        </p:nvSpPr>
-        <p:spPr>
-          <a:xfrm>
-            <a:off x="365760" y="1280160"/>
-            <a:ext cx="2743200" cy="320040"/>
+          <p:cNvPr id="20" name="TextBox 19"/>
+          <p:cNvSpPr txBox="1"/>
+          <p:nvPr/>
+        </p:nvSpPr>
+        <p:spPr>
+          <a:xfrm>
+            <a:off x="9144000" y="1005840"/>
+            <a:ext cx="2788920" cy="274320"/>
           </a:xfrm>
           <a:prstGeom prst="rect">
             <a:avLst/>
@@ -25966,63 +26440,29 @@
                   <a:srgbClr val="FFFFFF"/>
                 </a:solidFill>
               </a:rPr>
-              <a:t>STEP 1</a:t>
-            </a:r>
-          </a:p>
-        </p:txBody>
-      </p:sp>
-      <p:sp>
-        <p:nvSpPr>
-          <p:cNvPr id="9" name="TextBox 8"/>
-          <p:cNvSpPr txBox="1"/>
-          <p:nvPr/>
-        </p:nvSpPr>
-        <p:spPr>
-          <a:xfrm>
-            <a:off x="365760" y="1737360"/>
-            <a:ext cx="2743200" cy="365760"/>
-          </a:xfrm>
-          <a:prstGeom prst="rect">
-            <a:avLst/>
-          </a:prstGeom>
-          <a:noFill/>
-        </p:spPr>
-        <p:txBody>
-          <a:bodyPr wrap="square" anchor="t">
-            <a:spAutoFit/>
-          </a:bodyPr>
-          <a:lstStyle/>
-          <a:p>
-            <a:pPr algn="ctr"/>
-            <a:r>
-              <a:rPr sz="1300" b="1">
-                <a:solidFill>
-                  <a:srgbClr val="041E42"/>
-                </a:solidFill>
-              </a:rPr>
-              <a:t>CAPTURE</a:t>
-            </a:r>
-          </a:p>
-        </p:txBody>
-      </p:sp>
-      <p:sp>
-        <p:nvSpPr>
-          <p:cNvPr id="10" name="TextBox 9"/>
-          <p:cNvSpPr txBox="1"/>
-          <p:nvPr/>
-        </p:nvSpPr>
-        <p:spPr>
-          <a:xfrm>
-            <a:off x="365760" y="2148840"/>
-            <a:ext cx="2743200" cy="1234440"/>
-          </a:xfrm>
-          <a:prstGeom prst="rect">
-            <a:avLst/>
-          </a:prstGeom>
-          <a:noFill/>
-        </p:spPr>
-        <p:txBody>
-          <a:bodyPr wrap="square" anchor="t">
+              <a:t>Lifecycle transition</a:t>
+            </a:r>
+          </a:p>
+        </p:txBody>
+      </p:sp>
+      <p:sp>
+        <p:nvSpPr>
+          <p:cNvPr id="21" name="TextBox 20"/>
+          <p:cNvSpPr txBox="1"/>
+          <p:nvPr/>
+        </p:nvSpPr>
+        <p:spPr>
+          <a:xfrm>
+            <a:off x="9144000" y="1417320"/>
+            <a:ext cx="2788920" cy="594360"/>
+          </a:xfrm>
+          <a:prstGeom prst="rect">
+            <a:avLst/>
+          </a:prstGeom>
+          <a:noFill/>
+        </p:spPr>
+        <p:txBody>
+          <a:bodyPr wrap="square" anchor="ctr">
             <a:spAutoFit/>
           </a:bodyPr>
           <a:lstStyle/>
@@ -26034,42 +26474,34 @@
                   <a:srgbClr val="333333"/>
                 </a:solidFill>
               </a:rPr>
-              <a:t>analyst overrides sentiment</a:t>
-            </a:r>
-          </a:p>
-          <a:p>
-            <a:pPr algn="ctr"/>
-            <a:r>
-              <a:rPr sz="1100" b="0">
-                <a:solidFill>
-                  <a:srgbClr val="333333"/>
-                </a:solidFill>
-              </a:rPr>
-              <a:t>and aspect tags</a:t>
-            </a:r>
-          </a:p>
-        </p:txBody>
-      </p:sp>
-      <p:sp>
-        <p:nvSpPr>
-          <p:cNvPr id="11" name="Right Arrow 10"/>
+              <a:t>Kanban board</a:t>
+            </a:r>
+          </a:p>
+        </p:txBody>
+      </p:sp>
+      <p:sp>
+        <p:nvSpPr>
+          <p:cNvPr id="22" name="Rectangle 21"/>
           <p:cNvSpPr/>
           <p:nvPr/>
         </p:nvSpPr>
         <p:spPr>
           <a:xfrm>
-            <a:off x="3113532" y="2057400"/>
-            <a:ext cx="164592" cy="365760"/>
-          </a:xfrm>
-          <a:prstGeom prst="rightArrow">
+            <a:off x="457200" y="2286000"/>
+            <a:ext cx="11247120" cy="640080"/>
+          </a:xfrm>
+          <a:prstGeom prst="rect">
             <a:avLst/>
           </a:prstGeom>
           <a:solidFill>
-            <a:srgbClr val="FFC220"/>
+            <a:srgbClr val="041E42"/>
           </a:solidFill>
           <a:ln>
-            <a:noFill/>
+            <a:solidFill>
+              <a:srgbClr val="041E42"/>
+            </a:solidFill>
           </a:ln>
+          <a:effectLst/>
         </p:spPr>
         <p:style>
           <a:lnRef idx="1">
@@ -26095,20 +26527,410 @@
       </p:sp>
       <p:sp>
         <p:nvSpPr>
-          <p:cNvPr id="12" name="Rectangle 11"/>
+          <p:cNvPr id="23" name="TextBox 22"/>
+          <p:cNvSpPr txBox="1"/>
+          <p:nvPr/>
+        </p:nvSpPr>
+        <p:spPr>
+          <a:xfrm>
+            <a:off x="640080" y="2331720"/>
+            <a:ext cx="10972800" cy="548640"/>
+          </a:xfrm>
+          <a:prstGeom prst="rect">
+            <a:avLst/>
+          </a:prstGeom>
+          <a:noFill/>
+        </p:spPr>
+        <p:txBody>
+          <a:bodyPr wrap="square" anchor="ctr">
+            <a:spAutoFit/>
+          </a:bodyPr>
+          <a:lstStyle/>
+          <a:p>
+            <a:pPr algn="ctr"/>
+            <a:r>
+              <a:rPr sz="1200" b="1">
+                <a:solidFill>
+                  <a:srgbClr val="FFFFFF"/>
+                </a:solidFill>
+              </a:rPr>
+              <a:t>feedback  table  (SQLite / Cosmos DB)  —  one row per human action, JSON payload, partition_key = analyst_id</a:t>
+            </a:r>
+          </a:p>
+        </p:txBody>
+      </p:sp>
+      <p:sp>
+        <p:nvSpPr>
+          <p:cNvPr id="24" name="Rectangle 23"/>
           <p:cNvSpPr/>
           <p:nvPr/>
         </p:nvSpPr>
         <p:spPr>
           <a:xfrm>
-            <a:off x="3246120" y="1234440"/>
-            <a:ext cx="2743200" cy="2194560"/>
+            <a:off x="457200" y="3108960"/>
+            <a:ext cx="5532120" cy="2286000"/>
           </a:xfrm>
           <a:prstGeom prst="rect">
             <a:avLst/>
           </a:prstGeom>
           <a:solidFill>
-            <a:srgbClr val="F5F5F5"/>
+            <a:srgbClr val="DCFCE7"/>
+          </a:solidFill>
+          <a:ln>
+            <a:solidFill>
+              <a:srgbClr val="10B981"/>
+            </a:solidFill>
+          </a:ln>
+          <a:effectLst/>
+        </p:spPr>
+        <p:style>
+          <a:lnRef idx="1">
+            <a:schemeClr val="accent1"/>
+          </a:lnRef>
+          <a:fillRef idx="3">
+            <a:schemeClr val="accent1"/>
+          </a:fillRef>
+          <a:effectRef idx="2">
+            <a:schemeClr val="accent1"/>
+          </a:effectRef>
+          <a:fontRef idx="minor">
+            <a:schemeClr val="lt1"/>
+          </a:fontRef>
+        </p:style>
+        <p:txBody>
+          <a:bodyPr rtlCol="0" anchor="ctr"/>
+          <a:lstStyle/>
+          <a:p>
+            <a:pPr algn="ctr"/>
+          </a:p>
+        </p:txBody>
+      </p:sp>
+      <p:sp>
+        <p:nvSpPr>
+          <p:cNvPr id="25" name="TextBox 24"/>
+          <p:cNvSpPr txBox="1"/>
+          <p:nvPr/>
+        </p:nvSpPr>
+        <p:spPr>
+          <a:xfrm>
+            <a:off x="640080" y="3200400"/>
+            <a:ext cx="5212080" cy="320040"/>
+          </a:xfrm>
+          <a:prstGeom prst="rect">
+            <a:avLst/>
+          </a:prstGeom>
+          <a:noFill/>
+        </p:spPr>
+        <p:txBody>
+          <a:bodyPr wrap="square" anchor="t">
+            <a:spAutoFit/>
+          </a:bodyPr>
+          <a:lstStyle/>
+          <a:p>
+            <a:pPr algn="l"/>
+            <a:r>
+              <a:rPr sz="1300" b="1">
+                <a:solidFill>
+                  <a:srgbClr val="10B981"/>
+                </a:solidFill>
+              </a:rPr>
+              <a:t>HOT LOOP  ·  in-context, live</a:t>
+            </a:r>
+          </a:p>
+        </p:txBody>
+      </p:sp>
+      <p:sp>
+        <p:nvSpPr>
+          <p:cNvPr id="26" name="TextBox 25"/>
+          <p:cNvSpPr txBox="1"/>
+          <p:nvPr/>
+        </p:nvSpPr>
+        <p:spPr>
+          <a:xfrm>
+            <a:off x="640080" y="3566160"/>
+            <a:ext cx="5212080" cy="1783080"/>
+          </a:xfrm>
+          <a:prstGeom prst="rect">
+            <a:avLst/>
+          </a:prstGeom>
+          <a:noFill/>
+        </p:spPr>
+        <p:txBody>
+          <a:bodyPr wrap="square">
+            <a:spAutoFit/>
+          </a:bodyPr>
+          <a:lstStyle/>
+          <a:p>
+            <a:pPr>
+              <a:spcAft>
+                <a:spcPts val="400"/>
+              </a:spcAft>
+            </a:pPr>
+            <a:r>
+              <a:rPr sz="1100" b="0">
+                <a:solidFill>
+                  <a:srgbClr val="333333"/>
+                </a:solidFill>
+              </a:rPr>
+              <a:t>•  Every Generate Drafts click queries feedback</a:t>
+            </a:r>
+          </a:p>
+          <a:p>
+            <a:pPr>
+              <a:spcAft>
+                <a:spcPts val="400"/>
+              </a:spcAft>
+            </a:pPr>
+            <a:r>
+              <a:rPr sz="1100" b="0">
+                <a:solidFill>
+                  <a:srgbClr val="333333"/>
+                </a:solidFill>
+              </a:rPr>
+              <a:t>•  SELECT … WHERE kind = 'auto_reply_posted'</a:t>
+            </a:r>
+          </a:p>
+          <a:p>
+            <a:pPr>
+              <a:spcAft>
+                <a:spcPts val="400"/>
+              </a:spcAft>
+            </a:pPr>
+            <a:r>
+              <a:rPr sz="1100" b="0">
+                <a:solidFill>
+                  <a:srgbClr val="333333"/>
+                </a:solidFill>
+              </a:rPr>
+              <a:t>•  ORDER BY created_at DESC LIMIT 5  →  top 3 pairs</a:t>
+            </a:r>
+          </a:p>
+          <a:p>
+            <a:pPr>
+              <a:spcAft>
+                <a:spcPts val="400"/>
+              </a:spcAft>
+            </a:pPr>
+            <a:r>
+              <a:rPr sz="1100" b="0">
+                <a:solidFill>
+                  <a:srgbClr val="333333"/>
+                </a:solidFill>
+              </a:rPr>
+              <a:t>•  Injected into the prompt as few-shot examples</a:t>
+            </a:r>
+          </a:p>
+          <a:p>
+            <a:pPr>
+              <a:spcAft>
+                <a:spcPts val="400"/>
+              </a:spcAft>
+            </a:pPr>
+            <a:r>
+              <a:rPr sz="1100" b="0">
+                <a:solidFill>
+                  <a:srgbClr val="333333"/>
+                </a:solidFill>
+              </a:rPr>
+              <a:t>•  Effect visible on the next reply  —  no training</a:t>
+            </a:r>
+          </a:p>
+        </p:txBody>
+      </p:sp>
+      <p:sp>
+        <p:nvSpPr>
+          <p:cNvPr id="27" name="Rectangle 26"/>
+          <p:cNvSpPr/>
+          <p:nvPr/>
+        </p:nvSpPr>
+        <p:spPr>
+          <a:xfrm>
+            <a:off x="6172200" y="3108960"/>
+            <a:ext cx="5532120" cy="2286000"/>
+          </a:xfrm>
+          <a:prstGeom prst="rect">
+            <a:avLst/>
+          </a:prstGeom>
+          <a:solidFill>
+            <a:srgbClr val="EDE9FE"/>
+          </a:solidFill>
+          <a:ln>
+            <a:solidFill>
+              <a:srgbClr val="7C3AED"/>
+            </a:solidFill>
+          </a:ln>
+          <a:effectLst/>
+        </p:spPr>
+        <p:style>
+          <a:lnRef idx="1">
+            <a:schemeClr val="accent1"/>
+          </a:lnRef>
+          <a:fillRef idx="3">
+            <a:schemeClr val="accent1"/>
+          </a:fillRef>
+          <a:effectRef idx="2">
+            <a:schemeClr val="accent1"/>
+          </a:effectRef>
+          <a:fontRef idx="minor">
+            <a:schemeClr val="lt1"/>
+          </a:fontRef>
+        </p:style>
+        <p:txBody>
+          <a:bodyPr rtlCol="0" anchor="ctr"/>
+          <a:lstStyle/>
+          <a:p>
+            <a:pPr algn="ctr"/>
+          </a:p>
+        </p:txBody>
+      </p:sp>
+      <p:sp>
+        <p:nvSpPr>
+          <p:cNvPr id="28" name="TextBox 27"/>
+          <p:cNvSpPr txBox="1"/>
+          <p:nvPr/>
+        </p:nvSpPr>
+        <p:spPr>
+          <a:xfrm>
+            <a:off x="6355080" y="3200400"/>
+            <a:ext cx="5212080" cy="320040"/>
+          </a:xfrm>
+          <a:prstGeom prst="rect">
+            <a:avLst/>
+          </a:prstGeom>
+          <a:noFill/>
+        </p:spPr>
+        <p:txBody>
+          <a:bodyPr wrap="square" anchor="t">
+            <a:spAutoFit/>
+          </a:bodyPr>
+          <a:lstStyle/>
+          <a:p>
+            <a:pPr algn="l"/>
+            <a:r>
+              <a:rPr sz="1300" b="1">
+                <a:solidFill>
+                  <a:srgbClr val="7C3AED"/>
+                </a:solidFill>
+              </a:rPr>
+              <a:t>WARM LOOP  ·  supervised, monthly</a:t>
+            </a:r>
+          </a:p>
+        </p:txBody>
+      </p:sp>
+      <p:sp>
+        <p:nvSpPr>
+          <p:cNvPr id="29" name="TextBox 28"/>
+          <p:cNvSpPr txBox="1"/>
+          <p:nvPr/>
+        </p:nvSpPr>
+        <p:spPr>
+          <a:xfrm>
+            <a:off x="6355080" y="3566160"/>
+            <a:ext cx="5212080" cy="1783080"/>
+          </a:xfrm>
+          <a:prstGeom prst="rect">
+            <a:avLst/>
+          </a:prstGeom>
+          <a:noFill/>
+        </p:spPr>
+        <p:txBody>
+          <a:bodyPr wrap="square">
+            <a:spAutoFit/>
+          </a:bodyPr>
+          <a:lstStyle/>
+          <a:p>
+            <a:pPr>
+              <a:spcAft>
+                <a:spcPts val="400"/>
+              </a:spcAft>
+            </a:pPr>
+            <a:r>
+              <a:rPr sz="1100" b="0">
+                <a:solidFill>
+                  <a:srgbClr val="333333"/>
+                </a:solidFill>
+              </a:rPr>
+              <a:t>•  Export corrections since last train date</a:t>
+            </a:r>
+          </a:p>
+          <a:p>
+            <a:pPr>
+              <a:spcAft>
+                <a:spcPts val="400"/>
+              </a:spcAft>
+            </a:pPr>
+            <a:r>
+              <a:rPr sz="1100" b="0">
+                <a:solidFill>
+                  <a:srgbClr val="333333"/>
+                </a:solidFill>
+              </a:rPr>
+              <a:t>•  Append to Walmart-200  →  Walmart-N (augmented)</a:t>
+            </a:r>
+          </a:p>
+          <a:p>
+            <a:pPr>
+              <a:spcAft>
+                <a:spcPts val="400"/>
+              </a:spcAft>
+            </a:pPr>
+            <a:r>
+              <a:rPr sz="1100" b="0">
+                <a:solidFill>
+                  <a:srgbClr val="333333"/>
+                </a:solidFill>
+              </a:rPr>
+              <a:t>•  Rerun ModernBERT Stage-3 with 5-fold OOF CV</a:t>
+            </a:r>
+          </a:p>
+          <a:p>
+            <a:pPr>
+              <a:spcAft>
+                <a:spcPts val="400"/>
+              </a:spcAft>
+            </a:pPr>
+            <a:r>
+              <a:rPr sz="1100" b="0">
+                <a:solidFill>
+                  <a:srgbClr val="333333"/>
+                </a:solidFill>
+              </a:rPr>
+              <a:t>•  New checkpoint wins only if OOF F1 improves</a:t>
+            </a:r>
+          </a:p>
+          <a:p>
+            <a:pPr>
+              <a:spcAft>
+                <a:spcPts val="400"/>
+              </a:spcAft>
+            </a:pPr>
+            <a:r>
+              <a:rPr sz="1100" b="0">
+                <a:solidFill>
+                  <a:srgbClr val="333333"/>
+                </a:solidFill>
+              </a:rPr>
+              <a:t>•  Symlink flipped in config/models.yaml</a:t>
+            </a:r>
+          </a:p>
+        </p:txBody>
+      </p:sp>
+      <p:sp>
+        <p:nvSpPr>
+          <p:cNvPr id="30" name="Rectangle 29"/>
+          <p:cNvSpPr/>
+          <p:nvPr/>
+        </p:nvSpPr>
+        <p:spPr>
+          <a:xfrm>
+            <a:off x="457200" y="5532120"/>
+            <a:ext cx="11247120" cy="777240"/>
+          </a:xfrm>
+          <a:prstGeom prst="rect">
+            <a:avLst/>
+          </a:prstGeom>
+          <a:solidFill>
+            <a:srgbClr val="E8F4FD"/>
           </a:solidFill>
           <a:ln>
             <a:solidFill>
@@ -26141,58 +26963,14 @@
       </p:sp>
       <p:sp>
         <p:nvSpPr>
-          <p:cNvPr id="13" name="Rectangle 12"/>
-          <p:cNvSpPr/>
-          <p:nvPr/>
-        </p:nvSpPr>
-        <p:spPr>
-          <a:xfrm>
-            <a:off x="3246120" y="1234440"/>
-            <a:ext cx="2743200" cy="411480"/>
-          </a:xfrm>
-          <a:prstGeom prst="rect">
-            <a:avLst/>
-          </a:prstGeom>
-          <a:solidFill>
-            <a:srgbClr val="0071DC"/>
-          </a:solidFill>
-          <a:ln>
-            <a:noFill/>
-          </a:ln>
-          <a:effectLst/>
-        </p:spPr>
-        <p:style>
-          <a:lnRef idx="1">
-            <a:schemeClr val="accent1"/>
-          </a:lnRef>
-          <a:fillRef idx="3">
-            <a:schemeClr val="accent1"/>
-          </a:fillRef>
-          <a:effectRef idx="2">
-            <a:schemeClr val="accent1"/>
-          </a:effectRef>
-          <a:fontRef idx="minor">
-            <a:schemeClr val="lt1"/>
-          </a:fontRef>
-        </p:style>
-        <p:txBody>
-          <a:bodyPr rtlCol="0" anchor="ctr"/>
-          <a:lstStyle/>
-          <a:p>
-            <a:pPr algn="ctr"/>
-          </a:p>
-        </p:txBody>
-      </p:sp>
-      <p:sp>
-        <p:nvSpPr>
-          <p:cNvPr id="14" name="TextBox 13"/>
-          <p:cNvSpPr txBox="1"/>
-          <p:nvPr/>
-        </p:nvSpPr>
-        <p:spPr>
-          <a:xfrm>
-            <a:off x="3246120" y="1280160"/>
-            <a:ext cx="2743200" cy="320040"/>
+          <p:cNvPr id="31" name="TextBox 30"/>
+          <p:cNvSpPr txBox="1"/>
+          <p:nvPr/>
+        </p:nvSpPr>
+        <p:spPr>
+          <a:xfrm>
+            <a:off x="640080" y="5623560"/>
+            <a:ext cx="10972800" cy="320040"/>
           </a:xfrm>
           <a:prstGeom prst="rect">
             <a:avLst/>
@@ -26205,28 +26983,28 @@
           </a:bodyPr>
           <a:lstStyle/>
           <a:p>
-            <a:pPr algn="ctr"/>
-            <a:r>
-              <a:rPr sz="1100" b="1">
-                <a:solidFill>
-                  <a:srgbClr val="FFFFFF"/>
-                </a:solidFill>
-              </a:rPr>
-              <a:t>STEP 2</a:t>
-            </a:r>
-          </a:p>
-        </p:txBody>
-      </p:sp>
-      <p:sp>
-        <p:nvSpPr>
-          <p:cNvPr id="15" name="TextBox 14"/>
-          <p:cNvSpPr txBox="1"/>
-          <p:nvPr/>
-        </p:nvSpPr>
-        <p:spPr>
-          <a:xfrm>
-            <a:off x="3246120" y="1737360"/>
-            <a:ext cx="2743200" cy="365760"/>
+            <a:pPr algn="l"/>
+            <a:r>
+              <a:rPr sz="1200" b="1">
+                <a:solidFill>
+                  <a:srgbClr val="0071DC"/>
+                </a:solidFill>
+              </a:rPr>
+              <a:t>Two failure modes eliminated by design</a:t>
+            </a:r>
+          </a:p>
+        </p:txBody>
+      </p:sp>
+      <p:sp>
+        <p:nvSpPr>
+          <p:cNvPr id="32" name="TextBox 31"/>
+          <p:cNvSpPr txBox="1"/>
+          <p:nvPr/>
+        </p:nvSpPr>
+        <p:spPr>
+          <a:xfrm>
+            <a:off x="640080" y="5943600"/>
+            <a:ext cx="10972800" cy="320040"/>
           </a:xfrm>
           <a:prstGeom prst="rect">
             <a:avLst/>
@@ -26239,901 +27017,21 @@
           </a:bodyPr>
           <a:lstStyle/>
           <a:p>
-            <a:pPr algn="ctr"/>
-            <a:r>
-              <a:rPr sz="1300" b="1">
-                <a:solidFill>
-                  <a:srgbClr val="041E42"/>
-                </a:solidFill>
-              </a:rPr>
-              <a:t>STORE</a:t>
-            </a:r>
-          </a:p>
-        </p:txBody>
-      </p:sp>
-      <p:sp>
-        <p:nvSpPr>
-          <p:cNvPr id="16" name="TextBox 15"/>
-          <p:cNvSpPr txBox="1"/>
-          <p:nvPr/>
-        </p:nvSpPr>
-        <p:spPr>
-          <a:xfrm>
-            <a:off x="3246120" y="2148840"/>
-            <a:ext cx="2743200" cy="1234440"/>
-          </a:xfrm>
-          <a:prstGeom prst="rect">
-            <a:avLst/>
-          </a:prstGeom>
-          <a:noFill/>
-        </p:spPr>
-        <p:txBody>
-          <a:bodyPr wrap="square" anchor="t">
-            <a:spAutoFit/>
-          </a:bodyPr>
-          <a:lstStyle/>
-          <a:p>
-            <a:pPr algn="ctr"/>
+            <a:pPr algn="l"/>
             <a:r>
               <a:rPr sz="1100" b="0">
                 <a:solidFill>
                   <a:srgbClr val="333333"/>
                 </a:solidFill>
               </a:rPr>
-              <a:t>feedback(post_id,</a:t>
-            </a:r>
-          </a:p>
-          <a:p>
-            <a:pPr algn="ctr"/>
-            <a:r>
-              <a:rPr sz="1100" b="0">
-                <a:solidFill>
-                  <a:srgbClr val="333333"/>
-                </a:solidFill>
-              </a:rPr>
-              <a:t>old, new, analyst_id, ts)</a:t>
-            </a:r>
-          </a:p>
-        </p:txBody>
-      </p:sp>
-      <p:sp>
-        <p:nvSpPr>
-          <p:cNvPr id="17" name="Right Arrow 16"/>
-          <p:cNvSpPr/>
-          <p:nvPr/>
-        </p:nvSpPr>
-        <p:spPr>
-          <a:xfrm>
-            <a:off x="5993892" y="2057400"/>
-            <a:ext cx="164592" cy="365760"/>
-          </a:xfrm>
-          <a:prstGeom prst="rightArrow">
-            <a:avLst/>
-          </a:prstGeom>
-          <a:solidFill>
-            <a:srgbClr val="FFC220"/>
-          </a:solidFill>
-          <a:ln>
-            <a:noFill/>
-          </a:ln>
-        </p:spPr>
-        <p:style>
-          <a:lnRef idx="1">
-            <a:schemeClr val="accent1"/>
-          </a:lnRef>
-          <a:fillRef idx="3">
-            <a:schemeClr val="accent1"/>
-          </a:fillRef>
-          <a:effectRef idx="2">
-            <a:schemeClr val="accent1"/>
-          </a:effectRef>
-          <a:fontRef idx="minor">
-            <a:schemeClr val="lt1"/>
-          </a:fontRef>
-        </p:style>
-        <p:txBody>
-          <a:bodyPr rtlCol="0" anchor="ctr"/>
-          <a:lstStyle/>
-          <a:p>
-            <a:pPr algn="ctr"/>
-          </a:p>
-        </p:txBody>
-      </p:sp>
-      <p:sp>
-        <p:nvSpPr>
-          <p:cNvPr id="18" name="Rectangle 17"/>
-          <p:cNvSpPr/>
-          <p:nvPr/>
-        </p:nvSpPr>
-        <p:spPr>
-          <a:xfrm>
-            <a:off x="6126480" y="1234440"/>
-            <a:ext cx="2743200" cy="2194560"/>
-          </a:xfrm>
-          <a:prstGeom prst="rect">
-            <a:avLst/>
-          </a:prstGeom>
-          <a:solidFill>
-            <a:srgbClr val="F5F5F5"/>
-          </a:solidFill>
-          <a:ln>
-            <a:solidFill>
-              <a:srgbClr val="7C3AED"/>
-            </a:solidFill>
-          </a:ln>
-          <a:effectLst/>
-        </p:spPr>
-        <p:style>
-          <a:lnRef idx="1">
-            <a:schemeClr val="accent1"/>
-          </a:lnRef>
-          <a:fillRef idx="3">
-            <a:schemeClr val="accent1"/>
-          </a:fillRef>
-          <a:effectRef idx="2">
-            <a:schemeClr val="accent1"/>
-          </a:effectRef>
-          <a:fontRef idx="minor">
-            <a:schemeClr val="lt1"/>
-          </a:fontRef>
-        </p:style>
-        <p:txBody>
-          <a:bodyPr rtlCol="0" anchor="ctr"/>
-          <a:lstStyle/>
-          <a:p>
-            <a:pPr algn="ctr"/>
-          </a:p>
-        </p:txBody>
-      </p:sp>
-      <p:sp>
-        <p:nvSpPr>
-          <p:cNvPr id="19" name="Rectangle 18"/>
-          <p:cNvSpPr/>
-          <p:nvPr/>
-        </p:nvSpPr>
-        <p:spPr>
-          <a:xfrm>
-            <a:off x="6126480" y="1234440"/>
-            <a:ext cx="2743200" cy="411480"/>
-          </a:xfrm>
-          <a:prstGeom prst="rect">
-            <a:avLst/>
-          </a:prstGeom>
-          <a:solidFill>
-            <a:srgbClr val="7C3AED"/>
-          </a:solidFill>
-          <a:ln>
-            <a:noFill/>
-          </a:ln>
-          <a:effectLst/>
-        </p:spPr>
-        <p:style>
-          <a:lnRef idx="1">
-            <a:schemeClr val="accent1"/>
-          </a:lnRef>
-          <a:fillRef idx="3">
-            <a:schemeClr val="accent1"/>
-          </a:fillRef>
-          <a:effectRef idx="2">
-            <a:schemeClr val="accent1"/>
-          </a:effectRef>
-          <a:fontRef idx="minor">
-            <a:schemeClr val="lt1"/>
-          </a:fontRef>
-        </p:style>
-        <p:txBody>
-          <a:bodyPr rtlCol="0" anchor="ctr"/>
-          <a:lstStyle/>
-          <a:p>
-            <a:pPr algn="ctr"/>
-          </a:p>
-        </p:txBody>
-      </p:sp>
-      <p:sp>
-        <p:nvSpPr>
-          <p:cNvPr id="20" name="TextBox 19"/>
-          <p:cNvSpPr txBox="1"/>
-          <p:nvPr/>
-        </p:nvSpPr>
-        <p:spPr>
-          <a:xfrm>
-            <a:off x="6126480" y="1280160"/>
-            <a:ext cx="2743200" cy="320040"/>
-          </a:xfrm>
-          <a:prstGeom prst="rect">
-            <a:avLst/>
-          </a:prstGeom>
-          <a:noFill/>
-        </p:spPr>
-        <p:txBody>
-          <a:bodyPr wrap="square" anchor="t">
-            <a:spAutoFit/>
-          </a:bodyPr>
-          <a:lstStyle/>
-          <a:p>
-            <a:pPr algn="ctr"/>
-            <a:r>
-              <a:rPr sz="1100" b="1">
-                <a:solidFill>
-                  <a:srgbClr val="FFFFFF"/>
-                </a:solidFill>
-              </a:rPr>
-              <a:t>STEP 3</a:t>
-            </a:r>
-          </a:p>
-        </p:txBody>
-      </p:sp>
-      <p:sp>
-        <p:nvSpPr>
-          <p:cNvPr id="21" name="TextBox 20"/>
-          <p:cNvSpPr txBox="1"/>
-          <p:nvPr/>
-        </p:nvSpPr>
-        <p:spPr>
-          <a:xfrm>
-            <a:off x="6126480" y="1737360"/>
-            <a:ext cx="2743200" cy="365760"/>
-          </a:xfrm>
-          <a:prstGeom prst="rect">
-            <a:avLst/>
-          </a:prstGeom>
-          <a:noFill/>
-        </p:spPr>
-        <p:txBody>
-          <a:bodyPr wrap="square" anchor="t">
-            <a:spAutoFit/>
-          </a:bodyPr>
-          <a:lstStyle/>
-          <a:p>
-            <a:pPr algn="ctr"/>
-            <a:r>
-              <a:rPr sz="1300" b="1">
-                <a:solidFill>
-                  <a:srgbClr val="041E42"/>
-                </a:solidFill>
-              </a:rPr>
-              <a:t>CURATE</a:t>
-            </a:r>
-          </a:p>
-        </p:txBody>
-      </p:sp>
-      <p:sp>
-        <p:nvSpPr>
-          <p:cNvPr id="22" name="TextBox 21"/>
-          <p:cNvSpPr txBox="1"/>
-          <p:nvPr/>
-        </p:nvSpPr>
-        <p:spPr>
-          <a:xfrm>
-            <a:off x="6126480" y="2148840"/>
-            <a:ext cx="2743200" cy="1234440"/>
-          </a:xfrm>
-          <a:prstGeom prst="rect">
-            <a:avLst/>
-          </a:prstGeom>
-          <a:noFill/>
-        </p:spPr>
-        <p:txBody>
-          <a:bodyPr wrap="square" anchor="t">
-            <a:spAutoFit/>
-          </a:bodyPr>
-          <a:lstStyle/>
-          <a:p>
-            <a:pPr algn="ctr"/>
-            <a:r>
-              <a:rPr sz="1100" b="0">
-                <a:solidFill>
-                  <a:srgbClr val="333333"/>
-                </a:solidFill>
-              </a:rPr>
-              <a:t>weekly export of</a:t>
-            </a:r>
-          </a:p>
-          <a:p>
-            <a:pPr algn="ctr"/>
-            <a:r>
-              <a:rPr sz="1100" b="0">
-                <a:solidFill>
-                  <a:srgbClr val="333333"/>
-                </a:solidFill>
-              </a:rPr>
-              <a:t>disagreements</a:t>
-            </a:r>
-          </a:p>
-          <a:p>
-            <a:pPr algn="ctr"/>
-            <a:r>
-              <a:rPr sz="1100" b="0">
-                <a:solidFill>
-                  <a:srgbClr val="333333"/>
-                </a:solidFill>
-              </a:rPr>
-              <a:t>(model ≠ analyst)</a:t>
-            </a:r>
-          </a:p>
-        </p:txBody>
-      </p:sp>
-      <p:sp>
-        <p:nvSpPr>
-          <p:cNvPr id="23" name="Right Arrow 22"/>
-          <p:cNvSpPr/>
-          <p:nvPr/>
-        </p:nvSpPr>
-        <p:spPr>
-          <a:xfrm>
-            <a:off x="8874252" y="2057400"/>
-            <a:ext cx="164592" cy="365760"/>
-          </a:xfrm>
-          <a:prstGeom prst="rightArrow">
-            <a:avLst/>
-          </a:prstGeom>
-          <a:solidFill>
-            <a:srgbClr val="FFC220"/>
-          </a:solidFill>
-          <a:ln>
-            <a:noFill/>
-          </a:ln>
-        </p:spPr>
-        <p:style>
-          <a:lnRef idx="1">
-            <a:schemeClr val="accent1"/>
-          </a:lnRef>
-          <a:fillRef idx="3">
-            <a:schemeClr val="accent1"/>
-          </a:fillRef>
-          <a:effectRef idx="2">
-            <a:schemeClr val="accent1"/>
-          </a:effectRef>
-          <a:fontRef idx="minor">
-            <a:schemeClr val="lt1"/>
-          </a:fontRef>
-        </p:style>
-        <p:txBody>
-          <a:bodyPr rtlCol="0" anchor="ctr"/>
-          <a:lstStyle/>
-          <a:p>
-            <a:pPr algn="ctr"/>
-          </a:p>
-        </p:txBody>
-      </p:sp>
-      <p:sp>
-        <p:nvSpPr>
-          <p:cNvPr id="24" name="Rectangle 23"/>
-          <p:cNvSpPr/>
-          <p:nvPr/>
-        </p:nvSpPr>
-        <p:spPr>
-          <a:xfrm>
-            <a:off x="9006840" y="1234440"/>
-            <a:ext cx="2743200" cy="2194560"/>
-          </a:xfrm>
-          <a:prstGeom prst="rect">
-            <a:avLst/>
-          </a:prstGeom>
-          <a:solidFill>
-            <a:srgbClr val="F5F5F5"/>
-          </a:solidFill>
-          <a:ln>
-            <a:solidFill>
-              <a:srgbClr val="10B981"/>
-            </a:solidFill>
-          </a:ln>
-          <a:effectLst/>
-        </p:spPr>
-        <p:style>
-          <a:lnRef idx="1">
-            <a:schemeClr val="accent1"/>
-          </a:lnRef>
-          <a:fillRef idx="3">
-            <a:schemeClr val="accent1"/>
-          </a:fillRef>
-          <a:effectRef idx="2">
-            <a:schemeClr val="accent1"/>
-          </a:effectRef>
-          <a:fontRef idx="minor">
-            <a:schemeClr val="lt1"/>
-          </a:fontRef>
-        </p:style>
-        <p:txBody>
-          <a:bodyPr rtlCol="0" anchor="ctr"/>
-          <a:lstStyle/>
-          <a:p>
-            <a:pPr algn="ctr"/>
-          </a:p>
-        </p:txBody>
-      </p:sp>
-      <p:sp>
-        <p:nvSpPr>
-          <p:cNvPr id="25" name="Rectangle 24"/>
-          <p:cNvSpPr/>
-          <p:nvPr/>
-        </p:nvSpPr>
-        <p:spPr>
-          <a:xfrm>
-            <a:off x="9006840" y="1234440"/>
-            <a:ext cx="2743200" cy="411480"/>
-          </a:xfrm>
-          <a:prstGeom prst="rect">
-            <a:avLst/>
-          </a:prstGeom>
-          <a:solidFill>
-            <a:srgbClr val="10B981"/>
-          </a:solidFill>
-          <a:ln>
-            <a:noFill/>
-          </a:ln>
-          <a:effectLst/>
-        </p:spPr>
-        <p:style>
-          <a:lnRef idx="1">
-            <a:schemeClr val="accent1"/>
-          </a:lnRef>
-          <a:fillRef idx="3">
-            <a:schemeClr val="accent1"/>
-          </a:fillRef>
-          <a:effectRef idx="2">
-            <a:schemeClr val="accent1"/>
-          </a:effectRef>
-          <a:fontRef idx="minor">
-            <a:schemeClr val="lt1"/>
-          </a:fontRef>
-        </p:style>
-        <p:txBody>
-          <a:bodyPr rtlCol="0" anchor="ctr"/>
-          <a:lstStyle/>
-          <a:p>
-            <a:pPr algn="ctr"/>
-          </a:p>
-        </p:txBody>
-      </p:sp>
-      <p:sp>
-        <p:nvSpPr>
-          <p:cNvPr id="26" name="TextBox 25"/>
-          <p:cNvSpPr txBox="1"/>
-          <p:nvPr/>
-        </p:nvSpPr>
-        <p:spPr>
-          <a:xfrm>
-            <a:off x="9006840" y="1280160"/>
-            <a:ext cx="2743200" cy="320040"/>
-          </a:xfrm>
-          <a:prstGeom prst="rect">
-            <a:avLst/>
-          </a:prstGeom>
-          <a:noFill/>
-        </p:spPr>
-        <p:txBody>
-          <a:bodyPr wrap="square" anchor="t">
-            <a:spAutoFit/>
-          </a:bodyPr>
-          <a:lstStyle/>
-          <a:p>
-            <a:pPr algn="ctr"/>
-            <a:r>
-              <a:rPr sz="1100" b="1">
-                <a:solidFill>
-                  <a:srgbClr val="FFFFFF"/>
-                </a:solidFill>
-              </a:rPr>
-              <a:t>STEP 4</a:t>
-            </a:r>
-          </a:p>
-        </p:txBody>
-      </p:sp>
-      <p:sp>
-        <p:nvSpPr>
-          <p:cNvPr id="27" name="TextBox 26"/>
-          <p:cNvSpPr txBox="1"/>
-          <p:nvPr/>
-        </p:nvSpPr>
-        <p:spPr>
-          <a:xfrm>
-            <a:off x="9006840" y="1737360"/>
-            <a:ext cx="2743200" cy="365760"/>
-          </a:xfrm>
-          <a:prstGeom prst="rect">
-            <a:avLst/>
-          </a:prstGeom>
-          <a:noFill/>
-        </p:spPr>
-        <p:txBody>
-          <a:bodyPr wrap="square" anchor="t">
-            <a:spAutoFit/>
-          </a:bodyPr>
-          <a:lstStyle/>
-          <a:p>
-            <a:pPr algn="ctr"/>
-            <a:r>
-              <a:rPr sz="1300" b="1">
-                <a:solidFill>
-                  <a:srgbClr val="041E42"/>
-                </a:solidFill>
-              </a:rPr>
-              <a:t>RETRAIN</a:t>
-            </a:r>
-          </a:p>
-        </p:txBody>
-      </p:sp>
-      <p:sp>
-        <p:nvSpPr>
-          <p:cNvPr id="28" name="TextBox 27"/>
-          <p:cNvSpPr txBox="1"/>
-          <p:nvPr/>
-        </p:nvSpPr>
-        <p:spPr>
-          <a:xfrm>
-            <a:off x="9006840" y="2148840"/>
-            <a:ext cx="2743200" cy="1234440"/>
-          </a:xfrm>
-          <a:prstGeom prst="rect">
-            <a:avLst/>
-          </a:prstGeom>
-          <a:noFill/>
-        </p:spPr>
-        <p:txBody>
-          <a:bodyPr wrap="square" anchor="t">
-            <a:spAutoFit/>
-          </a:bodyPr>
-          <a:lstStyle/>
-          <a:p>
-            <a:pPr algn="ctr"/>
-            <a:r>
-              <a:rPr sz="1100" b="0">
-                <a:solidFill>
-                  <a:srgbClr val="333333"/>
-                </a:solidFill>
-              </a:rPr>
-              <a:t>add to Stage-3</a:t>
-            </a:r>
-          </a:p>
-          <a:p>
-            <a:pPr algn="ctr"/>
-            <a:r>
-              <a:rPr sz="1100" b="0">
-                <a:solidFill>
-                  <a:srgbClr val="333333"/>
-                </a:solidFill>
-              </a:rPr>
-              <a:t>fine-tune set,</a:t>
-            </a:r>
-          </a:p>
-          <a:p>
-            <a:pPr algn="ctr"/>
-            <a:r>
-              <a:rPr sz="1100" b="0">
-                <a:solidFill>
-                  <a:srgbClr val="333333"/>
-                </a:solidFill>
-              </a:rPr>
-              <a:t>rerun 5-fold CV</a:t>
-            </a:r>
-          </a:p>
-        </p:txBody>
-      </p:sp>
-      <p:sp>
-        <p:nvSpPr>
-          <p:cNvPr id="29" name="TextBox 28"/>
-          <p:cNvSpPr txBox="1"/>
-          <p:nvPr/>
-        </p:nvSpPr>
-        <p:spPr>
-          <a:xfrm>
-            <a:off x="457200" y="3749039"/>
-            <a:ext cx="11247120" cy="365760"/>
-          </a:xfrm>
-          <a:prstGeom prst="rect">
-            <a:avLst/>
-          </a:prstGeom>
-          <a:noFill/>
-        </p:spPr>
-        <p:txBody>
-          <a:bodyPr wrap="square" anchor="t">
-            <a:spAutoFit/>
-          </a:bodyPr>
-          <a:lstStyle/>
-          <a:p>
-            <a:pPr algn="l"/>
-            <a:r>
-              <a:rPr sz="1300" b="1">
-                <a:solidFill>
-                  <a:srgbClr val="041E42"/>
-                </a:solidFill>
-              </a:rPr>
-              <a:t>Two signals feed the loop</a:t>
-            </a:r>
-          </a:p>
-        </p:txBody>
-      </p:sp>
-      <p:graphicFrame>
-        <p:nvGraphicFramePr>
-          <p:cNvPr id="30" name="Table 29"/>
-          <p:cNvGraphicFramePr>
-            <a:graphicFrameLocks noGrp="1"/>
-          </p:cNvGraphicFramePr>
-          <p:nvPr/>
-        </p:nvGraphicFramePr>
-        <p:xfrm>
-          <a:off x="457200" y="4160520"/>
-          <a:ext cx="11247120" cy="1874519"/>
-        </p:xfrm>
-        <a:graphic>
-          <a:graphicData uri="http://schemas.openxmlformats.org/drawingml/2006/table">
-            <a:tbl>
-              <a:tblPr firstRow="1" bandRow="1">
-                <a:tableStyleId>{5C22544A-7EE6-4342-B048-85BDC9FD1C3A}</a:tableStyleId>
-              </a:tblPr>
-              <a:tblGrid>
-                <a:gridCol w="3749040"/>
-                <a:gridCol w="3749040"/>
-                <a:gridCol w="3749040"/>
-              </a:tblGrid>
-              <a:tr h="468629">
-                <a:tc>
-                  <a:txBody>
-                    <a:bodyPr/>
-                    <a:lstStyle/>
-                    <a:p>
-                      <a:r>
-                        <a:rPr sz="1100" b="1">
-                          <a:solidFill>
-                            <a:srgbClr val="FFFFFF"/>
-                          </a:solidFill>
-                        </a:rPr>
-                        <a:t>Signal</a:t>
-                      </a:r>
-                    </a:p>
-                  </a:txBody>
-                  <a:tcPr>
-                    <a:solidFill>
-                      <a:srgbClr val="041E42"/>
-                    </a:solidFill>
-                  </a:tcPr>
-                </a:tc>
-                <a:tc>
-                  <a:txBody>
-                    <a:bodyPr/>
-                    <a:lstStyle/>
-                    <a:p>
-                      <a:r>
-                        <a:rPr sz="1100" b="1">
-                          <a:solidFill>
-                            <a:srgbClr val="FFFFFF"/>
-                          </a:solidFill>
-                        </a:rPr>
-                        <a:t>Table</a:t>
-                      </a:r>
-                    </a:p>
-                  </a:txBody>
-                  <a:tcPr>
-                    <a:solidFill>
-                      <a:srgbClr val="041E42"/>
-                    </a:solidFill>
-                  </a:tcPr>
-                </a:tc>
-                <a:tc>
-                  <a:txBody>
-                    <a:bodyPr/>
-                    <a:lstStyle/>
-                    <a:p>
-                      <a:r>
-                        <a:rPr sz="1100" b="1">
-                          <a:solidFill>
-                            <a:srgbClr val="FFFFFF"/>
-                          </a:solidFill>
-                        </a:rPr>
-                        <a:t>Downstream use</a:t>
-                      </a:r>
-                    </a:p>
-                  </a:txBody>
-                  <a:tcPr>
-                    <a:solidFill>
-                      <a:srgbClr val="041E42"/>
-                    </a:solidFill>
-                  </a:tcPr>
-                </a:tc>
-              </a:tr>
-              <a:tr h="468629">
-                <a:tc>
-                  <a:txBody>
-                    <a:bodyPr/>
-                    <a:lstStyle/>
-                    <a:p>
-                      <a:r>
-                        <a:rPr sz="1100" b="1">
-                          <a:solidFill>
-                            <a:srgbClr val="333333"/>
-                          </a:solidFill>
-                        </a:rPr>
-                        <a:t>Label corrections</a:t>
-                      </a:r>
-                    </a:p>
-                  </a:txBody>
-                  <a:tcPr>
-                    <a:solidFill>
-                      <a:srgbClr val="FFFFFF"/>
-                    </a:solidFill>
-                  </a:tcPr>
-                </a:tc>
-                <a:tc>
-                  <a:txBody>
-                    <a:bodyPr/>
-                    <a:lstStyle/>
-                    <a:p>
-                      <a:r>
-                        <a:rPr sz="1100">
-                          <a:solidFill>
-                            <a:srgbClr val="333333"/>
-                          </a:solidFill>
-                        </a:rPr>
-                        <a:t>feedback (sentiment / aspect)</a:t>
-                      </a:r>
-                    </a:p>
-                  </a:txBody>
-                  <a:tcPr>
-                    <a:solidFill>
-                      <a:srgbClr val="FFFFFF"/>
-                    </a:solidFill>
-                  </a:tcPr>
-                </a:tc>
-                <a:tc>
-                  <a:txBody>
-                    <a:bodyPr/>
-                    <a:lstStyle/>
-                    <a:p>
-                      <a:r>
-                        <a:rPr sz="1100">
-                          <a:solidFill>
-                            <a:srgbClr val="333333"/>
-                          </a:solidFill>
-                        </a:rPr>
-                        <a:t>ModernBERT Stage-3 augmentation</a:t>
-                      </a:r>
-                    </a:p>
-                  </a:txBody>
-                  <a:tcPr>
-                    <a:solidFill>
-                      <a:srgbClr val="FFFFFF"/>
-                    </a:solidFill>
-                  </a:tcPr>
-                </a:tc>
-              </a:tr>
-              <a:tr h="468629">
-                <a:tc>
-                  <a:txBody>
-                    <a:bodyPr/>
-                    <a:lstStyle/>
-                    <a:p>
-                      <a:r>
-                        <a:rPr sz="1100" b="1">
-                          <a:solidFill>
-                            <a:srgbClr val="333333"/>
-                          </a:solidFill>
-                        </a:rPr>
-                        <a:t>Posted replies</a:t>
-                      </a:r>
-                    </a:p>
-                  </a:txBody>
-                  <a:tcPr>
-                    <a:solidFill>
-                      <a:srgbClr val="F5F5F5"/>
-                    </a:solidFill>
-                  </a:tcPr>
-                </a:tc>
-                <a:tc>
-                  <a:txBody>
-                    <a:bodyPr/>
-                    <a:lstStyle/>
-                    <a:p>
-                      <a:r>
-                        <a:rPr sz="1100">
-                          <a:solidFill>
-                            <a:srgbClr val="333333"/>
-                          </a:solidFill>
-                        </a:rPr>
-                        <a:t>feedback (reply_text)</a:t>
-                      </a:r>
-                    </a:p>
-                  </a:txBody>
-                  <a:tcPr>
-                    <a:solidFill>
-                      <a:srgbClr val="F5F5F5"/>
-                    </a:solidFill>
-                  </a:tcPr>
-                </a:tc>
-                <a:tc>
-                  <a:txBody>
-                    <a:bodyPr/>
-                    <a:lstStyle/>
-                    <a:p>
-                      <a:r>
-                        <a:rPr sz="1100">
-                          <a:solidFill>
-                            <a:srgbClr val="333333"/>
-                          </a:solidFill>
-                        </a:rPr>
-                        <a:t>FLAN-T5 few-shot pool</a:t>
-                      </a:r>
-                    </a:p>
-                  </a:txBody>
-                  <a:tcPr>
-                    <a:solidFill>
-                      <a:srgbClr val="F5F5F5"/>
-                    </a:solidFill>
-                  </a:tcPr>
-                </a:tc>
-              </a:tr>
-              <a:tr h="468632">
-                <a:tc>
-                  <a:txBody>
-                    <a:bodyPr/>
-                    <a:lstStyle/>
-                    <a:p>
-                      <a:r>
-                        <a:rPr sz="1100" b="1">
-                          <a:solidFill>
-                            <a:srgbClr val="333333"/>
-                          </a:solidFill>
-                        </a:rPr>
-                        <a:t>Trust-tier overrides</a:t>
-                      </a:r>
-                    </a:p>
-                  </a:txBody>
-                  <a:tcPr>
-                    <a:solidFill>
-                      <a:srgbClr val="FFFFFF"/>
-                    </a:solidFill>
-                  </a:tcPr>
-                </a:tc>
-                <a:tc>
-                  <a:txBody>
-                    <a:bodyPr/>
-                    <a:lstStyle/>
-                    <a:p>
-                      <a:r>
-                        <a:rPr sz="1100">
-                          <a:solidFill>
-                            <a:srgbClr val="333333"/>
-                          </a:solidFill>
-                        </a:rPr>
-                        <a:t>feedback (trust_override)</a:t>
-                      </a:r>
-                    </a:p>
-                  </a:txBody>
-                  <a:tcPr>
-                    <a:solidFill>
-                      <a:srgbClr val="FFFFFF"/>
-                    </a:solidFill>
-                  </a:tcPr>
-                </a:tc>
-                <a:tc>
-                  <a:txBody>
-                    <a:bodyPr/>
-                    <a:lstStyle/>
-                    <a:p>
-                      <a:r>
-                        <a:rPr sz="1100">
-                          <a:solidFill>
-                            <a:srgbClr val="333333"/>
-                          </a:solidFill>
-                        </a:rPr>
-                        <a:t>Trust-score threshold calibration</a:t>
-                      </a:r>
-                    </a:p>
-                  </a:txBody>
-                  <a:tcPr>
-                    <a:solidFill>
-                      <a:srgbClr val="FFFFFF"/>
-                    </a:solidFill>
-                  </a:tcPr>
-                </a:tc>
-              </a:tr>
-            </a:tbl>
-          </a:graphicData>
-        </a:graphic>
-      </p:graphicFrame>
-      <p:sp>
-        <p:nvSpPr>
-          <p:cNvPr id="31" name="TextBox 30"/>
+              <a:t>(1)  hot loop uses in-context learning  —  no retrain, no catastrophic forgetting.   (2)  warm loop uses 5-fold OOF CV  —  no leakage between train and eval sets.</a:t>
+            </a:r>
+          </a:p>
+        </p:txBody>
+      </p:sp>
+      <p:sp>
+        <p:nvSpPr>
+          <p:cNvPr id="33" name="TextBox 32"/>
           <p:cNvSpPr txBox="1"/>
           <p:nvPr/>
         </p:nvSpPr>
@@ -27167,7 +27065,7 @@
       </p:sp>
       <p:sp>
         <p:nvSpPr>
-          <p:cNvPr id="32" name="TextBox 31"/>
+          <p:cNvPr id="34" name="TextBox 33"/>
           <p:cNvSpPr txBox="1"/>
           <p:nvPr/>
         </p:nvSpPr>

--- a/docs/Sem_4/FINAL_PRESENTATION_VishalSingh_2020AA05641.pptx
+++ b/docs/Sem_4/FINAL_PRESENTATION_VishalSingh_2020AA05641.pptx
@@ -24854,7 +24854,7 @@
                   <a:srgbClr val="FFFFFF"/>
                 </a:solidFill>
               </a:rPr>
-              <a:t>Smart Reply  —  Worked Example  (real post from our benchmark)</a:t>
+              <a:t>Smart Reply  —  Worked Example  (real post, real drafts, real DB)</a:t>
             </a:r>
           </a:p>
         </p:txBody>
@@ -24888,7 +24888,7 @@
                   <a:srgbClr val="E8F4FD"/>
                 </a:solidFill>
               </a:rPr>
-              <a:t>id = 1nn7hjxx  ·  r/samsclub  ·  data/benchmark_real_200.jsonl</a:t>
+              <a:t>raw_posts.id = reddit_1u2bgdw  ·  r/samsclub  ·  captured live from data/local.db</a:t>
             </a:r>
           </a:p>
         </p:txBody>
@@ -25007,12 +25007,12 @@
           <a:p>
             <a:pPr algn="l"/>
             <a:r>
-              <a:rPr sz="1100" b="1">
+              <a:rPr sz="1000" b="1">
                 <a:solidFill>
                   <a:srgbClr val="D97706"/>
                 </a:solidFill>
               </a:rPr>
-              <a:t>Customer complaint  —  r/samsclub  ·  aspects: product_quality, store_experience  ·  trust 0.62  ·  P2</a:t>
+              <a:t>Customer complaint  —  r/samsclub  ·  ModernBERT: negative 0.9999997  ·  aspects: customer service, product quality, store experience  ·  trust 0.66</a:t>
             </a:r>
           </a:p>
         </p:txBody>
@@ -25046,7 +25046,7 @@
                   <a:srgbClr val="333333"/>
                 </a:solidFill>
               </a:rPr>
-              <a:t>u/hangry_shopper : "Why do you guys sell whole pizzas made hours ago to customers?  The very few times I've gotten a whole pie, it'll be stuff premade and left in the hot case for like an hour 30mins before it's in my hand. How can I tell? They put a sticker with the date and the pizza looks and taste hours old. Pizza is meant to be made to order and waited for."</a:t>
+              <a:t>"Why do you guys sell whole pizzas made hours ago to customers?  The very few times I've gotten a whole pie, it'll be stuff premade and left in the hot case for like an hour 30mins before it's in my hand. How can I tell? They put a sticker with the date and the pizza looks and taste hours old. Pizza is meant to be made to order and waited for."</a:t>
             </a:r>
           </a:p>
         </p:txBody>
@@ -25165,12 +25165,12 @@
           <a:p>
             <a:pPr algn="ctr"/>
             <a:r>
-              <a:rPr sz="1200" b="1">
+              <a:rPr sz="1100" b="1">
                 <a:solidFill>
                   <a:srgbClr val="FFFFFF"/>
                 </a:solidFill>
               </a:rPr>
-              <a:t>Draft A · GPT-4o</a:t>
+              <a:t>Draft A · GPT-4o  (Walmart Gateway  ✓)</a:t>
             </a:r>
           </a:p>
         </p:txBody>
@@ -25204,7 +25204,7 @@
                   <a:srgbClr val="333333"/>
                 </a:solidFill>
               </a:rPr>
-              <a:t>Really sorry the pizza's been sitting in the hot case that long — that's not the fresh pie experience the club is supposed to deliver. DM me the club number and the day/time of your last visit and I'll flag it to the bakery-café team so the make-to-order flow gets reinforced. — Ravi (Sam's Club Care)</a:t>
+              <a:t>Hi u/there, I'm sorry to hear about your experience with the pizzas — it sounds really disappointing. Our goal is to provide fresh and enjoyable food, and I understand how frustrating it must be to receive something that feels old. If you'd like, feel free to DM me the store location so I can share your feedback directly with the team and look into it further.  — [Your Name]</a:t>
             </a:r>
           </a:p>
         </p:txBody>
@@ -25323,12 +25323,12 @@
           <a:p>
             <a:pPr algn="ctr"/>
             <a:r>
-              <a:rPr sz="1200" b="1">
+              <a:rPr sz="1100" b="1">
                 <a:solidFill>
                   <a:srgbClr val="FFFFFF"/>
                 </a:solidFill>
               </a:rPr>
-              <a:t>Draft B · Mistral 7B</a:t>
+              <a:t>Draft B · Mistral 7B  [offline fallback]</a:t>
             </a:r>
           </a:p>
         </p:txBody>
@@ -25362,7 +25362,21 @@
                   <a:srgbClr val="333333"/>
                 </a:solidFill>
               </a:rPr>
-              <a:t>Totally fair callout — a whole pie that's been in the hot case for 90 minutes isn't the deal. DM me your club number and I'll get the bakery lead to look at their bake-off schedule so the pies you buy are made to order like they should be. — Priya</a:t>
+              <a:t>Hi u/there — thanks for flagging this. that's not the experience we want anyone to have with your order. DM us the details when you have a moment and we'll start looking into the specifics.  — The Walmart Care team</a:t>
+            </a:r>
+          </a:p>
+          <a:p>
+            <a:pPr algn="l"/>
+          </a:p>
+          <a:p>
+            <a:pPr algn="l"/>
+            <a:r>
+              <a:rPr sz="900" b="0">
+                <a:solidFill>
+                  <a:srgbClr val="333333"/>
+                </a:solidFill>
+              </a:rPr>
+              <a:t>(Ollama not running on localhost:11434 → system fell back to Smart Composer and badged the slot [offline fallback] in the UI.)</a:t>
             </a:r>
           </a:p>
         </p:txBody>
@@ -25481,12 +25495,12 @@
           <a:p>
             <a:pPr algn="ctr"/>
             <a:r>
-              <a:rPr sz="1200" b="1">
+              <a:rPr sz="1100" b="1">
                 <a:solidFill>
                   <a:srgbClr val="FFFFFF"/>
                 </a:solidFill>
               </a:rPr>
-              <a:t>Draft C · Smart Composer</a:t>
+              <a:t>Draft C · Smart Composer  (deterministic)</a:t>
             </a:r>
           </a:p>
         </p:txBody>
@@ -25520,7 +25534,7 @@
                   <a:srgbClr val="333333"/>
                 </a:solidFill>
               </a:rPr>
-              <a:t>Hi hangry_shopper, we're really sorry about the quality of what you received on your last visit — a pizza that's been sitting for that long isn't the standard. Please DM us the club number and the day you bought it and we'll get the bakery team on it. — Sam's Club Care</a:t>
+              <a:t>Hi u/there, Your order like this absolutely shouldn't happen. DM us the details when you have a moment and we'll start looking into the specifics.  — Walmart Care 💙</a:t>
             </a:r>
           </a:p>
         </p:txBody>
@@ -25595,12 +25609,12 @@
           <a:p>
             <a:pPr algn="l"/>
             <a:r>
-              <a:rPr sz="1100" b="0">
+              <a:rPr sz="1000" b="0">
                 <a:solidFill>
                   <a:srgbClr val="333333"/>
                 </a:solidFill>
               </a:rPr>
-              <a:t>Analyst picks a draft, edits inline, clicks  Save &amp; Open Reddit  →  posted reply is written to  feedback  (kind = auto_reply_posted)  →  becomes the next post's top few-shot example. See docs/Sem_4/SMART_REPLY_COMPOSER.md</a:t>
+              <a:t>Live capture — GPT-4o gateway reached (gateway_available=True); Ollama refused connection so slot B fell back to Smart Composer; Smart Composer always produces slot C. Few-shot: 3 real posted replies from feedback (top-3 by created_at DESC).</a:t>
             </a:r>
           </a:p>
         </p:txBody>

--- a/docs/Sem_4/FINAL_PRESENTATION_VishalSingh_2020AA05641.pptx
+++ b/docs/Sem_4/FINAL_PRESENTATION_VishalSingh_2020AA05641.pptx
@@ -24854,7 +24854,7 @@
                   <a:srgbClr val="FFFFFF"/>
                 </a:solidFill>
               </a:rPr>
-              <a:t>Smart Reply  —  Worked Example  (real post, real drafts, real DB)</a:t>
+              <a:t>Smart Reply  —  Worked Example  (all three drafts real, live-captured)</a:t>
             </a:r>
           </a:p>
         </p:txBody>
@@ -24888,7 +24888,7 @@
                   <a:srgbClr val="E8F4FD"/>
                 </a:solidFill>
               </a:rPr>
-              <a:t>raw_posts.id = reddit_1u2bgdw  ·  r/samsclub  ·  captured live from data/local.db</a:t>
+              <a:t>raw_posts.id = reddit_1u2bgdw  ·  r/samsclub  ·  gateway ✓  ·  Ollama ✓  ·  Smart Composer ✓</a:t>
             </a:r>
           </a:p>
         </p:txBody>
@@ -24945,8 +24945,8 @@
         </p:nvSpPr>
         <p:spPr>
           <a:xfrm>
-            <a:off x="457200" y="960120"/>
-            <a:ext cx="11247120" cy="1417320"/>
+            <a:off x="457200" y="914400"/>
+            <a:ext cx="11247120" cy="1874519"/>
           </a:xfrm>
           <a:prstGeom prst="rect">
             <a:avLst/>
@@ -24991,7 +24991,7 @@
         </p:nvSpPr>
         <p:spPr>
           <a:xfrm>
-            <a:off x="640080" y="1051560"/>
+            <a:off x="640080" y="987552"/>
             <a:ext cx="10972800" cy="320040"/>
           </a:xfrm>
           <a:prstGeom prst="rect">
@@ -25007,12 +25007,12 @@
           <a:p>
             <a:pPr algn="l"/>
             <a:r>
-              <a:rPr sz="1000" b="1">
+              <a:rPr sz="1100" b="1">
                 <a:solidFill>
                   <a:srgbClr val="D97706"/>
                 </a:solidFill>
               </a:rPr>
-              <a:t>Customer complaint  —  r/samsclub  ·  ModernBERT: negative 0.9999997  ·  aspects: customer service, product quality, store experience  ·  trust 0.66</a:t>
+              <a:t>CUSTOMER COMPLAINT  ·  r/samsclub</a:t>
             </a:r>
           </a:p>
         </p:txBody>
@@ -25025,8 +25025,8 @@
         </p:nvSpPr>
         <p:spPr>
           <a:xfrm>
-            <a:off x="640080" y="1371600"/>
-            <a:ext cx="10972800" cy="960120"/>
+            <a:off x="640080" y="1280160"/>
+            <a:ext cx="10972800" cy="292608"/>
           </a:xfrm>
           <a:prstGeom prst="rect">
             <a:avLst/>
@@ -25041,25 +25041,128 @@
           <a:p>
             <a:pPr algn="l"/>
             <a:r>
+              <a:rPr sz="1200" b="1">
+                <a:solidFill>
+                  <a:srgbClr val="041E42"/>
+                </a:solidFill>
+              </a:rPr>
+              <a:t>Why do you guys sell whole pizzas made hours ago to customers?</a:t>
+            </a:r>
+          </a:p>
+        </p:txBody>
+      </p:sp>
+      <p:sp>
+        <p:nvSpPr>
+          <p:cNvPr id="9" name="TextBox 8"/>
+          <p:cNvSpPr txBox="1"/>
+          <p:nvPr/>
+        </p:nvSpPr>
+        <p:spPr>
+          <a:xfrm>
+            <a:off x="640080" y="1572768"/>
+            <a:ext cx="10972800" cy="822960"/>
+          </a:xfrm>
+          <a:prstGeom prst="rect">
+            <a:avLst/>
+          </a:prstGeom>
+          <a:noFill/>
+        </p:spPr>
+        <p:txBody>
+          <a:bodyPr wrap="square" anchor="t">
+            <a:spAutoFit/>
+          </a:bodyPr>
+          <a:lstStyle/>
+          <a:p>
+            <a:pPr algn="l"/>
+            <a:r>
               <a:rPr sz="1000" b="0">
                 <a:solidFill>
                   <a:srgbClr val="333333"/>
                 </a:solidFill>
               </a:rPr>
-              <a:t>"Why do you guys sell whole pizzas made hours ago to customers?  The very few times I've gotten a whole pie, it'll be stuff premade and left in the hot case for like an hour 30mins before it's in my hand. How can I tell? They put a sticker with the date and the pizza looks and taste hours old. Pizza is meant to be made to order and waited for."</a:t>
-            </a:r>
-          </a:p>
-        </p:txBody>
-      </p:sp>
-      <p:sp>
-        <p:nvSpPr>
-          <p:cNvPr id="9" name="Rectangle 8"/>
+              <a:t>"The very few times I've gotten a whole pie, it'll be stuff premade and left in the hot case for like an hour 30mins before it's in my hand. How can I tell? They put a sticker with the date and the pizza looks and taste hours old. Pizza is meant to be made to order and waited for."</a:t>
+            </a:r>
+          </a:p>
+        </p:txBody>
+      </p:sp>
+      <p:sp>
+        <p:nvSpPr>
+          <p:cNvPr id="10" name="TextBox 9"/>
+          <p:cNvSpPr txBox="1"/>
+          <p:nvPr/>
+        </p:nvSpPr>
+        <p:spPr>
+          <a:xfrm>
+            <a:off x="640080" y="2377440"/>
+            <a:ext cx="7772400" cy="256032"/>
+          </a:xfrm>
+          <a:prstGeom prst="rect">
+            <a:avLst/>
+          </a:prstGeom>
+          <a:noFill/>
+        </p:spPr>
+        <p:txBody>
+          <a:bodyPr wrap="square" anchor="t">
+            <a:spAutoFit/>
+          </a:bodyPr>
+          <a:lstStyle/>
+          <a:p>
+            <a:pPr algn="l"/>
+            <a:r>
+              <a:rPr sz="900" b="0">
+                <a:solidFill>
+                  <a:srgbClr val="666666"/>
+                </a:solidFill>
+              </a:rPr>
+              <a:t>ModernBERT: negative (conf 0.9999997)  ·  aspects: customer service · product quality · store experience  ·  trust 0.66</a:t>
+            </a:r>
+          </a:p>
+        </p:txBody>
+      </p:sp>
+      <p:sp>
+        <p:nvSpPr>
+          <p:cNvPr id="11" name="TextBox 10"/>
+          <p:cNvSpPr txBox="1"/>
+          <p:nvPr/>
+        </p:nvSpPr>
+        <p:spPr>
+          <a:xfrm>
+            <a:off x="8458200" y="2377440"/>
+            <a:ext cx="3200400" cy="256032"/>
+          </a:xfrm>
+          <a:prstGeom prst="rect">
+            <a:avLst/>
+          </a:prstGeom>
+          <a:noFill/>
+        </p:spPr>
+        <p:txBody>
+          <a:bodyPr wrap="square">
+            <a:spAutoFit/>
+          </a:bodyPr>
+          <a:lstStyle/>
+          <a:p>
+            <a:pPr algn="r"/>
+            <a:r>
+              <a:rPr sz="900" b="1" u="sng">
+                <a:solidFill>
+                  <a:srgbClr val="0071DC"/>
+                </a:solidFill>
+                <a:hlinkClick r:id="rId2"/>
+              </a:rPr>
+              <a:t>🔗 Open original on Reddit</a:t>
+            </a:r>
+          </a:p>
+        </p:txBody>
+      </p:sp>
+      <p:sp>
+        <p:nvSpPr>
+          <p:cNvPr id="12" name="Rectangle 11"/>
           <p:cNvSpPr/>
           <p:nvPr/>
         </p:nvSpPr>
         <p:spPr>
           <a:xfrm>
-            <a:off x="365760" y="2514600"/>
+            <a:off x="365760" y="2788920"/>
             <a:ext cx="3794760" cy="2880360"/>
           </a:xfrm>
           <a:prstGeom prst="rect">
@@ -25099,13 +25202,13 @@
       </p:sp>
       <p:sp>
         <p:nvSpPr>
-          <p:cNvPr id="10" name="Rectangle 9"/>
+          <p:cNvPr id="13" name="Rectangle 12"/>
           <p:cNvSpPr/>
           <p:nvPr/>
         </p:nvSpPr>
         <p:spPr>
           <a:xfrm>
-            <a:off x="365760" y="2514600"/>
+            <a:off x="365760" y="2788920"/>
             <a:ext cx="3794760" cy="384048"/>
           </a:xfrm>
           <a:prstGeom prst="rect">
@@ -25143,13 +25246,13 @@
       </p:sp>
       <p:sp>
         <p:nvSpPr>
-          <p:cNvPr id="11" name="TextBox 10"/>
-          <p:cNvSpPr txBox="1"/>
-          <p:nvPr/>
-        </p:nvSpPr>
-        <p:spPr>
-          <a:xfrm>
-            <a:off x="365760" y="2560320"/>
+          <p:cNvPr id="14" name="TextBox 13"/>
+          <p:cNvSpPr txBox="1"/>
+          <p:nvPr/>
+        </p:nvSpPr>
+        <p:spPr>
+          <a:xfrm>
+            <a:off x="365760" y="2834640"/>
             <a:ext cx="3794760" cy="320040"/>
           </a:xfrm>
           <a:prstGeom prst="rect">
@@ -25170,21 +25273,21 @@
                   <a:srgbClr val="FFFFFF"/>
                 </a:solidFill>
               </a:rPr>
-              <a:t>Draft A · GPT-4o  (Walmart Gateway  ✓)</a:t>
-            </a:r>
-          </a:p>
-        </p:txBody>
-      </p:sp>
-      <p:sp>
-        <p:nvSpPr>
-          <p:cNvPr id="12" name="TextBox 11"/>
-          <p:cNvSpPr txBox="1"/>
-          <p:nvPr/>
-        </p:nvSpPr>
-        <p:spPr>
-          <a:xfrm>
-            <a:off x="502920" y="3017520"/>
-            <a:ext cx="3520440" cy="2286000"/>
+              <a:t>A · GPT-4o  (Walmart Gateway)</a:t>
+            </a:r>
+          </a:p>
+        </p:txBody>
+      </p:sp>
+      <p:sp>
+        <p:nvSpPr>
+          <p:cNvPr id="15" name="TextBox 14"/>
+          <p:cNvSpPr txBox="1"/>
+          <p:nvPr/>
+        </p:nvSpPr>
+        <p:spPr>
+          <a:xfrm>
+            <a:off x="502920" y="3246120"/>
+            <a:ext cx="3520440" cy="2331720"/>
           </a:xfrm>
           <a:prstGeom prst="rect">
             <a:avLst/>
@@ -25204,20 +25307,20 @@
                   <a:srgbClr val="333333"/>
                 </a:solidFill>
               </a:rPr>
-              <a:t>Hi u/there, I'm sorry to hear about your experience with the pizzas — it sounds really disappointing. Our goal is to provide fresh and enjoyable food, and I understand how frustrating it must be to receive something that feels old. If you'd like, feel free to DM me the store location so I can share your feedback directly with the team and look into it further.  — [Your Name]</a:t>
-            </a:r>
-          </a:p>
-        </p:txBody>
-      </p:sp>
-      <p:sp>
-        <p:nvSpPr>
-          <p:cNvPr id="13" name="Rectangle 12"/>
+              <a:t>Hi u/there, I'm sorry to hear about your experience with the pizzas. I understand how disappointing it must be to get something that feels less fresh than expected. While the hot case is meant to provide convenience, I agree that quality should never be sacrificed. If you'd like, feel free to DM me with the details of your store location so we can look into this and address it properly. – [Your Name]</a:t>
+            </a:r>
+          </a:p>
+        </p:txBody>
+      </p:sp>
+      <p:sp>
+        <p:nvSpPr>
+          <p:cNvPr id="16" name="Rectangle 15"/>
           <p:cNvSpPr/>
           <p:nvPr/>
         </p:nvSpPr>
         <p:spPr>
           <a:xfrm>
-            <a:off x="4297680" y="2514600"/>
+            <a:off x="4297680" y="2788920"/>
             <a:ext cx="3794760" cy="2880360"/>
           </a:xfrm>
           <a:prstGeom prst="rect">
@@ -25257,13 +25360,13 @@
       </p:sp>
       <p:sp>
         <p:nvSpPr>
-          <p:cNvPr id="14" name="Rectangle 13"/>
+          <p:cNvPr id="17" name="Rectangle 16"/>
           <p:cNvSpPr/>
           <p:nvPr/>
         </p:nvSpPr>
         <p:spPr>
           <a:xfrm>
-            <a:off x="4297680" y="2514600"/>
+            <a:off x="4297680" y="2788920"/>
             <a:ext cx="3794760" cy="384048"/>
           </a:xfrm>
           <a:prstGeom prst="rect">
@@ -25301,13 +25404,13 @@
       </p:sp>
       <p:sp>
         <p:nvSpPr>
-          <p:cNvPr id="15" name="TextBox 14"/>
-          <p:cNvSpPr txBox="1"/>
-          <p:nvPr/>
-        </p:nvSpPr>
-        <p:spPr>
-          <a:xfrm>
-            <a:off x="4297680" y="2560320"/>
+          <p:cNvPr id="18" name="TextBox 17"/>
+          <p:cNvSpPr txBox="1"/>
+          <p:nvPr/>
+        </p:nvSpPr>
+        <p:spPr>
+          <a:xfrm>
+            <a:off x="4297680" y="2834640"/>
             <a:ext cx="3794760" cy="320040"/>
           </a:xfrm>
           <a:prstGeom prst="rect">
@@ -25328,21 +25431,21 @@
                   <a:srgbClr val="FFFFFF"/>
                 </a:solidFill>
               </a:rPr>
-              <a:t>Draft B · Mistral 7B  [offline fallback]</a:t>
-            </a:r>
-          </a:p>
-        </p:txBody>
-      </p:sp>
-      <p:sp>
-        <p:nvSpPr>
-          <p:cNvPr id="16" name="TextBox 15"/>
-          <p:cNvSpPr txBox="1"/>
-          <p:nvPr/>
-        </p:nvSpPr>
-        <p:spPr>
-          <a:xfrm>
-            <a:off x="4434840" y="3017520"/>
-            <a:ext cx="3520440" cy="2286000"/>
+              <a:t>B · Mistral 7B  (local Ollama)</a:t>
+            </a:r>
+          </a:p>
+        </p:txBody>
+      </p:sp>
+      <p:sp>
+        <p:nvSpPr>
+          <p:cNvPr id="19" name="TextBox 18"/>
+          <p:cNvSpPr txBox="1"/>
+          <p:nvPr/>
+        </p:nvSpPr>
+        <p:spPr>
+          <a:xfrm>
+            <a:off x="4434840" y="3246120"/>
+            <a:ext cx="3520440" cy="2331720"/>
           </a:xfrm>
           <a:prstGeom prst="rect">
             <a:avLst/>
@@ -25362,34 +25465,20 @@
                   <a:srgbClr val="333333"/>
                 </a:solidFill>
               </a:rPr>
-              <a:t>Hi u/there — thanks for flagging this. that's not the experience we want anyone to have with your order. DM us the details when you have a moment and we'll start looking into the specifics.  — The Walmart Care team</a:t>
-            </a:r>
-          </a:p>
-          <a:p>
-            <a:pPr algn="l"/>
-          </a:p>
-          <a:p>
-            <a:pPr algn="l"/>
-            <a:r>
-              <a:rPr sz="900" b="0">
-                <a:solidFill>
-                  <a:srgbClr val="333333"/>
-                </a:solidFill>
-              </a:rPr>
-              <a:t>(Ollama not running on localhost:11434 → system fell back to Smart Composer and badged the slot [offline fallback] in the UI.)</a:t>
-            </a:r>
-          </a:p>
-        </p:txBody>
-      </p:sp>
-      <p:sp>
-        <p:nvSpPr>
-          <p:cNvPr id="17" name="Rectangle 16"/>
+              <a:t>Hi u/there, I appreciate your concern about the quality of our prepared pizzas. It's important to us that our customers receive fresh and delicious food. The stickers with dates are there to help us manage the rotation of our products, ensuring they are consumed before they become stale. If you ever encounter a pizza that doesn't meet your expectations, please feel free to DM me the details of your order so I can look into it further. Thank you for taking the time to share your feedback.</a:t>
+            </a:r>
+          </a:p>
+        </p:txBody>
+      </p:sp>
+      <p:sp>
+        <p:nvSpPr>
+          <p:cNvPr id="20" name="Rectangle 19"/>
           <p:cNvSpPr/>
           <p:nvPr/>
         </p:nvSpPr>
         <p:spPr>
           <a:xfrm>
-            <a:off x="8229600" y="2514600"/>
+            <a:off x="8229600" y="2788920"/>
             <a:ext cx="3794760" cy="2880360"/>
           </a:xfrm>
           <a:prstGeom prst="rect">
@@ -25429,13 +25518,13 @@
       </p:sp>
       <p:sp>
         <p:nvSpPr>
-          <p:cNvPr id="18" name="Rectangle 17"/>
+          <p:cNvPr id="21" name="Rectangle 20"/>
           <p:cNvSpPr/>
           <p:nvPr/>
         </p:nvSpPr>
         <p:spPr>
           <a:xfrm>
-            <a:off x="8229600" y="2514600"/>
+            <a:off x="8229600" y="2788920"/>
             <a:ext cx="3794760" cy="384048"/>
           </a:xfrm>
           <a:prstGeom prst="rect">
@@ -25473,13 +25562,13 @@
       </p:sp>
       <p:sp>
         <p:nvSpPr>
-          <p:cNvPr id="19" name="TextBox 18"/>
-          <p:cNvSpPr txBox="1"/>
-          <p:nvPr/>
-        </p:nvSpPr>
-        <p:spPr>
-          <a:xfrm>
-            <a:off x="8229600" y="2560320"/>
+          <p:cNvPr id="22" name="TextBox 21"/>
+          <p:cNvSpPr txBox="1"/>
+          <p:nvPr/>
+        </p:nvSpPr>
+        <p:spPr>
+          <a:xfrm>
+            <a:off x="8229600" y="2834640"/>
             <a:ext cx="3794760" cy="320040"/>
           </a:xfrm>
           <a:prstGeom prst="rect">
@@ -25500,21 +25589,21 @@
                   <a:srgbClr val="FFFFFF"/>
                 </a:solidFill>
               </a:rPr>
-              <a:t>Draft C · Smart Composer  (deterministic)</a:t>
-            </a:r>
-          </a:p>
-        </p:txBody>
-      </p:sp>
-      <p:sp>
-        <p:nvSpPr>
-          <p:cNvPr id="20" name="TextBox 19"/>
-          <p:cNvSpPr txBox="1"/>
-          <p:nvPr/>
-        </p:nvSpPr>
-        <p:spPr>
-          <a:xfrm>
-            <a:off x="8366760" y="3017520"/>
-            <a:ext cx="3520440" cy="2286000"/>
+              <a:t>C · Smart Composer  (no-LLM)</a:t>
+            </a:r>
+          </a:p>
+        </p:txBody>
+      </p:sp>
+      <p:sp>
+        <p:nvSpPr>
+          <p:cNvPr id="23" name="TextBox 22"/>
+          <p:cNvSpPr txBox="1"/>
+          <p:nvPr/>
+        </p:nvSpPr>
+        <p:spPr>
+          <a:xfrm>
+            <a:off x="8366760" y="3246120"/>
+            <a:ext cx="3520440" cy="2331720"/>
           </a:xfrm>
           <a:prstGeom prst="rect">
             <a:avLst/>
@@ -25534,21 +25623,21 @@
                   <a:srgbClr val="333333"/>
                 </a:solidFill>
               </a:rPr>
-              <a:t>Hi u/there, Your order like this absolutely shouldn't happen. DM us the details when you have a moment and we'll start looking into the specifics.  — Walmart Care 💙</a:t>
-            </a:r>
-          </a:p>
-        </p:txBody>
-      </p:sp>
-      <p:sp>
-        <p:nvSpPr>
-          <p:cNvPr id="21" name="Rectangle 20"/>
+              <a:t>Hi u/there — thanks for flagging this. completely understand the frustration around your order. Drop us a private message with the order # or store info and we'll take it from here. — Walmart Care</a:t>
+            </a:r>
+          </a:p>
+        </p:txBody>
+      </p:sp>
+      <p:sp>
+        <p:nvSpPr>
+          <p:cNvPr id="24" name="Rectangle 23"/>
           <p:cNvSpPr/>
           <p:nvPr/>
         </p:nvSpPr>
         <p:spPr>
           <a:xfrm>
-            <a:off x="457200" y="5532120"/>
-            <a:ext cx="11247120" cy="777240"/>
+            <a:off x="457200" y="5806440"/>
+            <a:ext cx="11247120" cy="548640"/>
           </a:xfrm>
           <a:prstGeom prst="rect">
             <a:avLst/>
@@ -25587,14 +25676,14 @@
       </p:sp>
       <p:sp>
         <p:nvSpPr>
-          <p:cNvPr id="22" name="TextBox 21"/>
-          <p:cNvSpPr txBox="1"/>
-          <p:nvPr/>
-        </p:nvSpPr>
-        <p:spPr>
-          <a:xfrm>
-            <a:off x="640080" y="5623560"/>
-            <a:ext cx="10972800" cy="640080"/>
+          <p:cNvPr id="25" name="TextBox 24"/>
+          <p:cNvSpPr txBox="1"/>
+          <p:nvPr/>
+        </p:nvSpPr>
+        <p:spPr>
+          <a:xfrm>
+            <a:off x="640080" y="5852160"/>
+            <a:ext cx="10972800" cy="457200"/>
           </a:xfrm>
           <a:prstGeom prst="rect">
             <a:avLst/>
@@ -25614,14 +25703,14 @@
                   <a:srgbClr val="333333"/>
                 </a:solidFill>
               </a:rPr>
-              <a:t>Live capture — GPT-4o gateway reached (gateway_available=True); Ollama refused connection so slot B fell back to Smart Composer; Smart Composer always produces slot C. Few-shot: 3 real posted replies from feedback (top-3 by created_at DESC).</a:t>
-            </a:r>
-          </a:p>
-        </p:txBody>
-      </p:sp>
-      <p:sp>
-        <p:nvSpPr>
-          <p:cNvPr id="23" name="TextBox 22"/>
+              <a:t>One prompt fed to all three engines.  Analyst picks the best draft, edits inline, clicks Save &amp; Open Reddit  →  the posted reply is written to  feedback  and becomes the next post's top few-shot example.</a:t>
+            </a:r>
+          </a:p>
+        </p:txBody>
+      </p:sp>
+      <p:sp>
+        <p:nvSpPr>
+          <p:cNvPr id="26" name="TextBox 25"/>
           <p:cNvSpPr txBox="1"/>
           <p:nvPr/>
         </p:nvSpPr>
@@ -25655,7 +25744,7 @@
       </p:sp>
       <p:sp>
         <p:nvSpPr>
-          <p:cNvPr id="24" name="TextBox 23"/>
+          <p:cNvPr id="27" name="TextBox 26"/>
           <p:cNvSpPr txBox="1"/>
           <p:nvPr/>
         </p:nvSpPr>

--- a/docs/Sem_4/FINAL_PRESENTATION_VishalSingh_2020AA05641.pptx
+++ b/docs/Sem_4/FINAL_PRESENTATION_VishalSingh_2020AA05641.pptx
@@ -27,9 +27,6 @@
     <p:sldId id="275" r:id="rId26"/>
     <p:sldId id="276" r:id="rId27"/>
     <p:sldId id="277" r:id="rId28"/>
-    <p:sldId id="278" r:id="rId29"/>
-    <p:sldId id="279" r:id="rId30"/>
-    <p:sldId id="280" r:id="rId31"/>
   </p:sldIdLst>
   <p:sldSz cx="12191695" cy="6858000" type="screen4x3"/>
   <p:notesSz cx="6858000" cy="9144000"/>
@@ -3128,7 +3125,7 @@
         </p:nvSpPr>
         <p:spPr>
           <a:xfrm>
-            <a:off x="0" y="2286000"/>
+            <a:off x="0" y="2103120"/>
             <a:ext cx="365760" cy="2468880"/>
           </a:xfrm>
           <a:prstGeom prst="rect">
@@ -3172,7 +3169,7 @@
         </p:nvSpPr>
         <p:spPr>
           <a:xfrm>
-            <a:off x="822960" y="1097280"/>
+            <a:off x="822960" y="777240"/>
             <a:ext cx="10515600" cy="822960"/>
           </a:xfrm>
           <a:prstGeom prst="rect">
@@ -3188,7 +3185,7 @@
           <a:p>
             <a:pPr algn="l"/>
             <a:r>
-              <a:rPr sz="4400" b="1">
+              <a:rPr sz="3800" b="1">
                 <a:solidFill>
                   <a:srgbClr val="FFFFFF"/>
                 </a:solidFill>
@@ -3206,8 +3203,8 @@
         </p:nvSpPr>
         <p:spPr>
           <a:xfrm>
-            <a:off x="822960" y="1965960"/>
-            <a:ext cx="10515600" cy="548640"/>
+            <a:off x="822960" y="1600200"/>
+            <a:ext cx="10515600" cy="1280160"/>
           </a:xfrm>
           <a:prstGeom prst="rect">
             <a:avLst/>
@@ -3222,12 +3219,23 @@
           <a:p>
             <a:pPr algn="l"/>
             <a:r>
-              <a:rPr sz="2000" b="0">
+              <a:rPr sz="1800" b="0">
                 <a:solidFill>
                   <a:srgbClr val="FFC220"/>
                 </a:solidFill>
               </a:rPr>
-              <a:t>Trust-Aware Sentiment Analysis of Retail Feedback using LLMs</a:t>
+              <a:t>Real-Time Social Media Mining and Trust-Aware Sentiment Analysis</a:t>
+            </a:r>
+          </a:p>
+          <a:p>
+            <a:pPr algn="l"/>
+            <a:r>
+              <a:rPr sz="1800" b="0">
+                <a:solidFill>
+                  <a:srgbClr val="FFC220"/>
+                </a:solidFill>
+              </a:rPr>
+              <a:t>Using Large Language Models for Retail Feedback Optimization</a:t>
             </a:r>
           </a:p>
         </p:txBody>
@@ -3240,7 +3248,7 @@
         </p:nvSpPr>
         <p:spPr>
           <a:xfrm>
-            <a:off x="822960" y="2697480"/>
+            <a:off x="822960" y="2880360"/>
             <a:ext cx="10515600" cy="365760"/>
           </a:xfrm>
           <a:prstGeom prst="rect">
@@ -3274,7 +3282,7 @@
         </p:nvSpPr>
         <p:spPr>
           <a:xfrm>
-            <a:off x="822960" y="3566160"/>
+            <a:off x="822960" y="3794760"/>
             <a:ext cx="10515600" cy="365760"/>
           </a:xfrm>
           <a:prstGeom prst="rect">
@@ -3290,12 +3298,12 @@
           <a:p>
             <a:pPr algn="l"/>
             <a:r>
-              <a:rPr sz="1800" b="1">
+              <a:rPr sz="1500" b="1">
                 <a:solidFill>
                   <a:srgbClr val="FFFFFF"/>
                 </a:solidFill>
               </a:rPr>
-              <a:t>Vishal Singh   ·   ID No. 2020AA05641</a:t>
+              <a:t>Faculty Mentor:   Ms. Pradnya Kashikar</a:t>
             </a:r>
           </a:p>
         </p:txBody>
@@ -3308,7 +3316,7 @@
         </p:nvSpPr>
         <p:spPr>
           <a:xfrm>
-            <a:off x="822960" y="3977639"/>
+            <a:off x="822960" y="4206240"/>
             <a:ext cx="10515600" cy="365760"/>
           </a:xfrm>
           <a:prstGeom prst="rect">
@@ -3324,12 +3332,12 @@
           <a:p>
             <a:pPr algn="l"/>
             <a:r>
-              <a:rPr sz="1400" b="0">
+              <a:rPr sz="1200" b="0">
                 <a:solidFill>
                   <a:srgbClr val="E8F4FD"/>
                 </a:solidFill>
               </a:rPr>
-              <a:t>M.Tech (Artificial Intelligence &amp; Machine Learning)</a:t>
+              <a:t>BITS Pilani (WILP)</a:t>
             </a:r>
           </a:p>
         </p:txBody>
@@ -3342,7 +3350,7 @@
         </p:nvSpPr>
         <p:spPr>
           <a:xfrm>
-            <a:off x="822960" y="4297680"/>
+            <a:off x="822960" y="4709160"/>
             <a:ext cx="10515600" cy="365760"/>
           </a:xfrm>
           <a:prstGeom prst="rect">
@@ -3358,25 +3366,59 @@
           <a:p>
             <a:pPr algn="l"/>
             <a:r>
-              <a:rPr sz="1400" b="0">
+              <a:rPr sz="1500" b="1">
+                <a:solidFill>
+                  <a:srgbClr val="FFFFFF"/>
+                </a:solidFill>
+              </a:rPr>
+              <a:t>Supervisor:   Mr. Varunendra Pratap Singh</a:t>
+            </a:r>
+          </a:p>
+        </p:txBody>
+      </p:sp>
+      <p:sp>
+        <p:nvSpPr>
+          <p:cNvPr id="9" name="TextBox 8"/>
+          <p:cNvSpPr txBox="1"/>
+          <p:nvPr/>
+        </p:nvSpPr>
+        <p:spPr>
+          <a:xfrm>
+            <a:off x="822960" y="5120640"/>
+            <a:ext cx="10515600" cy="365760"/>
+          </a:xfrm>
+          <a:prstGeom prst="rect">
+            <a:avLst/>
+          </a:prstGeom>
+          <a:noFill/>
+        </p:spPr>
+        <p:txBody>
+          <a:bodyPr wrap="square" anchor="t">
+            <a:spAutoFit/>
+          </a:bodyPr>
+          <a:lstStyle/>
+          <a:p>
+            <a:pPr algn="l"/>
+            <a:r>
+              <a:rPr sz="1200" b="0">
                 <a:solidFill>
                   <a:srgbClr val="E8F4FD"/>
                 </a:solidFill>
               </a:rPr>
-              <a:t>Birla Institute of Technology &amp; Science, Pilani  (WILP)</a:t>
-            </a:r>
-          </a:p>
-        </p:txBody>
-      </p:sp>
-      <p:sp>
-        <p:nvSpPr>
-          <p:cNvPr id="9" name="TextBox 8"/>
-          <p:cNvSpPr txBox="1"/>
-          <p:nvPr/>
-        </p:nvSpPr>
-        <p:spPr>
-          <a:xfrm>
-            <a:off x="822960" y="5029200"/>
+              <a:t>Principal Software Engineer  ·  Walmart Global Tech, Bengaluru</a:t>
+            </a:r>
+          </a:p>
+        </p:txBody>
+      </p:sp>
+      <p:sp>
+        <p:nvSpPr>
+          <p:cNvPr id="10" name="TextBox 9"/>
+          <p:cNvSpPr txBox="1"/>
+          <p:nvPr/>
+        </p:nvSpPr>
+        <p:spPr>
+          <a:xfrm>
+            <a:off x="822960" y="5623560"/>
             <a:ext cx="10515600" cy="365760"/>
           </a:xfrm>
           <a:prstGeom prst="rect">
@@ -3392,26 +3434,60 @@
           <a:p>
             <a:pPr algn="l"/>
             <a:r>
+              <a:rPr sz="1500" b="1">
+                <a:solidFill>
+                  <a:srgbClr val="FFFFFF"/>
+                </a:solidFill>
+              </a:rPr>
+              <a:t>Candidate:   Vishal Singh   ·   2020AA05641</a:t>
+            </a:r>
+          </a:p>
+        </p:txBody>
+      </p:sp>
+      <p:sp>
+        <p:nvSpPr>
+          <p:cNvPr id="11" name="TextBox 10"/>
+          <p:cNvSpPr txBox="1"/>
+          <p:nvPr/>
+        </p:nvSpPr>
+        <p:spPr>
+          <a:xfrm>
+            <a:off x="822960" y="6035040"/>
+            <a:ext cx="10515600" cy="365760"/>
+          </a:xfrm>
+          <a:prstGeom prst="rect">
+            <a:avLst/>
+          </a:prstGeom>
+          <a:noFill/>
+        </p:spPr>
+        <p:txBody>
+          <a:bodyPr wrap="square" anchor="t">
+            <a:spAutoFit/>
+          </a:bodyPr>
+          <a:lstStyle/>
+          <a:p>
+            <a:pPr algn="l"/>
+            <a:r>
               <a:rPr sz="1200" b="0">
                 <a:solidFill>
-                  <a:srgbClr val="FFFFFF"/>
-                </a:solidFill>
-              </a:rPr>
-              <a:t>Dissertation work at  Walmart Global Tech, Bengaluru</a:t>
-            </a:r>
-          </a:p>
-        </p:txBody>
-      </p:sp>
-      <p:sp>
-        <p:nvSpPr>
-          <p:cNvPr id="10" name="TextBox 9"/>
-          <p:cNvSpPr txBox="1"/>
-          <p:nvPr/>
-        </p:nvSpPr>
-        <p:spPr>
-          <a:xfrm>
-            <a:off x="822960" y="5349240"/>
-            <a:ext cx="10515600" cy="365760"/>
+                  <a:srgbClr val="E8F4FD"/>
+                </a:solidFill>
+              </a:rPr>
+              <a:t>M.Tech (AI &amp; ML)  ·  Birla Institute of Technology &amp; Science, Pilani (WILP)</a:t>
+            </a:r>
+          </a:p>
+        </p:txBody>
+      </p:sp>
+      <p:sp>
+        <p:nvSpPr>
+          <p:cNvPr id="12" name="TextBox 11"/>
+          <p:cNvSpPr txBox="1"/>
+          <p:nvPr/>
+        </p:nvSpPr>
+        <p:spPr>
+          <a:xfrm>
+            <a:off x="822960" y="6446520"/>
+            <a:ext cx="10515600" cy="274320"/>
           </a:xfrm>
           <a:prstGeom prst="rect">
             <a:avLst/>
@@ -3426,75 +3502,7 @@
           <a:p>
             <a:pPr algn="l"/>
             <a:r>
-              <a:rPr sz="1200" b="0">
-                <a:solidFill>
-                  <a:srgbClr val="FFFFFF"/>
-                </a:solidFill>
-              </a:rPr>
-              <a:t>Supervisor:  Mr. Varunendra Pratap Singh  —  Principal Software Engineer, Walmart Global Tech</a:t>
-            </a:r>
-          </a:p>
-        </p:txBody>
-      </p:sp>
-      <p:sp>
-        <p:nvSpPr>
-          <p:cNvPr id="11" name="TextBox 10"/>
-          <p:cNvSpPr txBox="1"/>
-          <p:nvPr/>
-        </p:nvSpPr>
-        <p:spPr>
-          <a:xfrm>
-            <a:off x="822960" y="5669280"/>
-            <a:ext cx="10515600" cy="365760"/>
-          </a:xfrm>
-          <a:prstGeom prst="rect">
-            <a:avLst/>
-          </a:prstGeom>
-          <a:noFill/>
-        </p:spPr>
-        <p:txBody>
-          <a:bodyPr wrap="square" anchor="t">
-            <a:spAutoFit/>
-          </a:bodyPr>
-          <a:lstStyle/>
-          <a:p>
-            <a:pPr algn="l"/>
-            <a:r>
-              <a:rPr sz="1200" b="0">
-                <a:solidFill>
-                  <a:srgbClr val="FFFFFF"/>
-                </a:solidFill>
-              </a:rPr>
-              <a:t>Additional Examiner:  Ms. Pradnya Kashikar  —  BITS Pilani</a:t>
-            </a:r>
-          </a:p>
-        </p:txBody>
-      </p:sp>
-      <p:sp>
-        <p:nvSpPr>
-          <p:cNvPr id="12" name="TextBox 11"/>
-          <p:cNvSpPr txBox="1"/>
-          <p:nvPr/>
-        </p:nvSpPr>
-        <p:spPr>
-          <a:xfrm>
-            <a:off x="822960" y="6263640"/>
-            <a:ext cx="10515600" cy="365760"/>
-          </a:xfrm>
-          <a:prstGeom prst="rect">
-            <a:avLst/>
-          </a:prstGeom>
-          <a:noFill/>
-        </p:spPr>
-        <p:txBody>
-          <a:bodyPr wrap="square" anchor="t">
-            <a:spAutoFit/>
-          </a:bodyPr>
-          <a:lstStyle/>
-          <a:p>
-            <a:pPr algn="l"/>
-            <a:r>
-              <a:rPr sz="1100" b="0">
+              <a:rPr sz="1000" b="0">
                 <a:solidFill>
                   <a:srgbClr val="666666"/>
                 </a:solidFill>
@@ -4748,7 +4756,7 @@
                   <a:srgbClr val="666666"/>
                 </a:solidFill>
               </a:rPr>
-              <a:t>10 / 25</a:t>
+              <a:t>10 / 22</a:t>
             </a:r>
           </a:p>
         </p:txBody>
@@ -5733,7 +5741,7 @@
                   <a:srgbClr val="666666"/>
                 </a:solidFill>
               </a:rPr>
-              <a:t>11 / 25</a:t>
+              <a:t>11 / 22</a:t>
             </a:r>
           </a:p>
         </p:txBody>
@@ -6233,7 +6241,7 @@
                   <a:srgbClr val="666666"/>
                 </a:solidFill>
               </a:rPr>
-              <a:t>12 / 25</a:t>
+              <a:t>12 / 22</a:t>
             </a:r>
           </a:p>
         </p:txBody>
@@ -7715,7 +7723,7 @@
                   <a:srgbClr val="666666"/>
                 </a:solidFill>
               </a:rPr>
-              <a:t>13 / 25</a:t>
+              <a:t>13 / 22</a:t>
             </a:r>
           </a:p>
         </p:txBody>
@@ -9520,7 +9528,7 @@
                   <a:srgbClr val="666666"/>
                 </a:solidFill>
               </a:rPr>
-              <a:t>14 / 25</a:t>
+              <a:t>14 / 22</a:t>
             </a:r>
           </a:p>
         </p:txBody>
@@ -10332,7 +10340,7 @@
                   <a:srgbClr val="666666"/>
                 </a:solidFill>
               </a:rPr>
-              <a:t>15 / 25</a:t>
+              <a:t>15 / 22</a:t>
             </a:r>
           </a:p>
         </p:txBody>
@@ -10346,1204 +10354,6 @@
 </file>
 
 <file path=ppt/slides/slide16.xml><?xml version="1.0" encoding="utf-8"?>
-<p:sld xmlns:a="http://schemas.openxmlformats.org/drawingml/2006/main" xmlns:p="http://schemas.openxmlformats.org/presentationml/2006/main" xmlns:r="http://schemas.openxmlformats.org/officeDocument/2006/relationships">
-  <p:cSld>
-    <p:spTree>
-      <p:nvGrpSpPr>
-        <p:cNvPr id="1" name=""/>
-        <p:cNvGrpSpPr/>
-        <p:nvPr/>
-      </p:nvGrpSpPr>
-      <p:grpSpPr/>
-      <p:sp>
-        <p:nvSpPr>
-          <p:cNvPr id="2" name="Rectangle 1"/>
-          <p:cNvSpPr/>
-          <p:nvPr/>
-        </p:nvSpPr>
-        <p:spPr>
-          <a:xfrm>
-            <a:off x="0" y="0"/>
-            <a:ext cx="12191695" cy="777240"/>
-          </a:xfrm>
-          <a:prstGeom prst="rect">
-            <a:avLst/>
-          </a:prstGeom>
-          <a:solidFill>
-            <a:srgbClr val="041E42"/>
-          </a:solidFill>
-          <a:ln>
-            <a:noFill/>
-          </a:ln>
-          <a:effectLst/>
-        </p:spPr>
-        <p:style>
-          <a:lnRef idx="1">
-            <a:schemeClr val="accent1"/>
-          </a:lnRef>
-          <a:fillRef idx="3">
-            <a:schemeClr val="accent1"/>
-          </a:fillRef>
-          <a:effectRef idx="2">
-            <a:schemeClr val="accent1"/>
-          </a:effectRef>
-          <a:fontRef idx="minor">
-            <a:schemeClr val="lt1"/>
-          </a:fontRef>
-        </p:style>
-        <p:txBody>
-          <a:bodyPr rtlCol="0" anchor="ctr"/>
-          <a:lstStyle/>
-          <a:p>
-            <a:pPr algn="ctr"/>
-          </a:p>
-        </p:txBody>
-      </p:sp>
-      <p:sp>
-        <p:nvSpPr>
-          <p:cNvPr id="3" name="TextBox 2"/>
-          <p:cNvSpPr txBox="1"/>
-          <p:nvPr/>
-        </p:nvSpPr>
-        <p:spPr>
-          <a:xfrm>
-            <a:off x="365760" y="109728"/>
-            <a:ext cx="11430000" cy="457200"/>
-          </a:xfrm>
-          <a:prstGeom prst="rect">
-            <a:avLst/>
-          </a:prstGeom>
-          <a:noFill/>
-        </p:spPr>
-        <p:txBody>
-          <a:bodyPr wrap="square" anchor="t">
-            <a:spAutoFit/>
-          </a:bodyPr>
-          <a:lstStyle/>
-          <a:p>
-            <a:pPr algn="l"/>
-            <a:r>
-              <a:rPr sz="2600" b="1">
-                <a:solidFill>
-                  <a:srgbClr val="FFFFFF"/>
-                </a:solidFill>
-              </a:rPr>
-              <a:t>Storage  —  SQLite → Cosmos DB Lift-and-Shift</a:t>
-            </a:r>
-          </a:p>
-        </p:txBody>
-      </p:sp>
-      <p:sp>
-        <p:nvSpPr>
-          <p:cNvPr id="4" name="TextBox 3"/>
-          <p:cNvSpPr txBox="1"/>
-          <p:nvPr/>
-        </p:nvSpPr>
-        <p:spPr>
-          <a:xfrm>
-            <a:off x="365760" y="457200"/>
-            <a:ext cx="11430000" cy="320040"/>
-          </a:xfrm>
-          <a:prstGeom prst="rect">
-            <a:avLst/>
-          </a:prstGeom>
-          <a:noFill/>
-        </p:spPr>
-        <p:txBody>
-          <a:bodyPr wrap="square" anchor="t">
-            <a:spAutoFit/>
-          </a:bodyPr>
-          <a:lstStyle/>
-          <a:p>
-            <a:pPr algn="l"/>
-            <a:r>
-              <a:rPr sz="1200" b="0">
-                <a:solidFill>
-                  <a:srgbClr val="E8F4FD"/>
-                </a:solidFill>
-              </a:rPr>
-              <a:t>Same schema, same partition keys, no calling-code change</a:t>
-            </a:r>
-          </a:p>
-        </p:txBody>
-      </p:sp>
-      <p:sp>
-        <p:nvSpPr>
-          <p:cNvPr id="5" name="Rectangle 4"/>
-          <p:cNvSpPr/>
-          <p:nvPr/>
-        </p:nvSpPr>
-        <p:spPr>
-          <a:xfrm>
-            <a:off x="0" y="777240"/>
-            <a:ext cx="12191695" cy="45720"/>
-          </a:xfrm>
-          <a:prstGeom prst="rect">
-            <a:avLst/>
-          </a:prstGeom>
-          <a:solidFill>
-            <a:srgbClr val="FFC220"/>
-          </a:solidFill>
-          <a:ln>
-            <a:noFill/>
-          </a:ln>
-          <a:effectLst/>
-        </p:spPr>
-        <p:style>
-          <a:lnRef idx="1">
-            <a:schemeClr val="accent1"/>
-          </a:lnRef>
-          <a:fillRef idx="3">
-            <a:schemeClr val="accent1"/>
-          </a:fillRef>
-          <a:effectRef idx="2">
-            <a:schemeClr val="accent1"/>
-          </a:effectRef>
-          <a:fontRef idx="minor">
-            <a:schemeClr val="lt1"/>
-          </a:fontRef>
-        </p:style>
-        <p:txBody>
-          <a:bodyPr rtlCol="0" anchor="ctr"/>
-          <a:lstStyle/>
-          <a:p>
-            <a:pPr algn="ctr"/>
-          </a:p>
-        </p:txBody>
-      </p:sp>
-      <p:graphicFrame>
-        <p:nvGraphicFramePr>
-          <p:cNvPr id="6" name="Table 5"/>
-          <p:cNvGraphicFramePr>
-            <a:graphicFrameLocks noGrp="1"/>
-          </p:cNvGraphicFramePr>
-          <p:nvPr/>
-        </p:nvGraphicFramePr>
-        <p:xfrm>
-          <a:off x="457200" y="960120"/>
-          <a:ext cx="11247120" cy="3108960"/>
-        </p:xfrm>
-        <a:graphic>
-          <a:graphicData uri="http://schemas.openxmlformats.org/drawingml/2006/table">
-            <a:tbl>
-              <a:tblPr firstRow="1" bandRow="1">
-                <a:tableStyleId>{5C22544A-7EE6-4342-B048-85BDC9FD1C3A}</a:tableStyleId>
-              </a:tblPr>
-              <a:tblGrid>
-                <a:gridCol w="2811780"/>
-                <a:gridCol w="2811780"/>
-                <a:gridCol w="2811780"/>
-                <a:gridCol w="2811780"/>
-              </a:tblGrid>
-              <a:tr h="444137">
-                <a:tc>
-                  <a:txBody>
-                    <a:bodyPr/>
-                    <a:lstStyle/>
-                    <a:p>
-                      <a:r>
-                        <a:rPr sz="1000" b="1">
-                          <a:solidFill>
-                            <a:srgbClr val="FFFFFF"/>
-                          </a:solidFill>
-                        </a:rPr>
-                        <a:t>Container</a:t>
-                      </a:r>
-                    </a:p>
-                  </a:txBody>
-                  <a:tcPr>
-                    <a:solidFill>
-                      <a:srgbClr val="041E42"/>
-                    </a:solidFill>
-                  </a:tcPr>
-                </a:tc>
-                <a:tc>
-                  <a:txBody>
-                    <a:bodyPr/>
-                    <a:lstStyle/>
-                    <a:p>
-                      <a:r>
-                        <a:rPr sz="1000" b="1">
-                          <a:solidFill>
-                            <a:srgbClr val="FFFFFF"/>
-                          </a:solidFill>
-                        </a:rPr>
-                        <a:t>Partition Key</a:t>
-                      </a:r>
-                    </a:p>
-                  </a:txBody>
-                  <a:tcPr>
-                    <a:solidFill>
-                      <a:srgbClr val="041E42"/>
-                    </a:solidFill>
-                  </a:tcPr>
-                </a:tc>
-                <a:tc>
-                  <a:txBody>
-                    <a:bodyPr/>
-                    <a:lstStyle/>
-                    <a:p>
-                      <a:r>
-                        <a:rPr sz="1000" b="1">
-                          <a:solidFill>
-                            <a:srgbClr val="FFFFFF"/>
-                          </a:solidFill>
-                        </a:rPr>
-                        <a:t>Key Fields</a:t>
-                      </a:r>
-                    </a:p>
-                  </a:txBody>
-                  <a:tcPr>
-                    <a:solidFill>
-                      <a:srgbClr val="041E42"/>
-                    </a:solidFill>
-                  </a:tcPr>
-                </a:tc>
-                <a:tc>
-                  <a:txBody>
-                    <a:bodyPr/>
-                    <a:lstStyle/>
-                    <a:p>
-                      <a:r>
-                        <a:rPr sz="1000" b="1">
-                          <a:solidFill>
-                            <a:srgbClr val="FFFFFF"/>
-                          </a:solidFill>
-                        </a:rPr>
-                        <a:t>Purpose</a:t>
-                      </a:r>
-                    </a:p>
-                  </a:txBody>
-                  <a:tcPr>
-                    <a:solidFill>
-                      <a:srgbClr val="041E42"/>
-                    </a:solidFill>
-                  </a:tcPr>
-                </a:tc>
-              </a:tr>
-              <a:tr h="444137">
-                <a:tc>
-                  <a:txBody>
-                    <a:bodyPr/>
-                    <a:lstStyle/>
-                    <a:p>
-                      <a:r>
-                        <a:rPr sz="1000" b="1">
-                          <a:solidFill>
-                            <a:srgbClr val="333333"/>
-                          </a:solidFill>
-                        </a:rPr>
-                        <a:t>raw_posts</a:t>
-                      </a:r>
-                    </a:p>
-                  </a:txBody>
-                  <a:tcPr>
-                    <a:solidFill>
-                      <a:srgbClr val="FFFFFF"/>
-                    </a:solidFill>
-                  </a:tcPr>
-                </a:tc>
-                <a:tc>
-                  <a:txBody>
-                    <a:bodyPr/>
-                    <a:lstStyle/>
-                    <a:p>
-                      <a:r>
-                        <a:rPr sz="1000">
-                          <a:solidFill>
-                            <a:srgbClr val="333333"/>
-                          </a:solidFill>
-                        </a:rPr>
-                        <a:t>/subreddit</a:t>
-                      </a:r>
-                    </a:p>
-                  </a:txBody>
-                  <a:tcPr>
-                    <a:solidFill>
-                      <a:srgbClr val="FFFFFF"/>
-                    </a:solidFill>
-                  </a:tcPr>
-                </a:tc>
-                <a:tc>
-                  <a:txBody>
-                    <a:bodyPr/>
-                    <a:lstStyle/>
-                    <a:p>
-                      <a:r>
-                        <a:rPr sz="1000">
-                          <a:solidFill>
-                            <a:srgbClr val="333333"/>
-                          </a:solidFill>
-                        </a:rPr>
-                        <a:t>id, title, body, author_hash, created_utc</a:t>
-                      </a:r>
-                    </a:p>
-                  </a:txBody>
-                  <a:tcPr>
-                    <a:solidFill>
-                      <a:srgbClr val="FFFFFF"/>
-                    </a:solidFill>
-                  </a:tcPr>
-                </a:tc>
-                <a:tc>
-                  <a:txBody>
-                    <a:bodyPr/>
-                    <a:lstStyle/>
-                    <a:p>
-                      <a:r>
-                        <a:rPr sz="1000">
-                          <a:solidFill>
-                            <a:srgbClr val="333333"/>
-                          </a:solidFill>
-                        </a:rPr>
-                        <a:t>Ingested (privacy-safe)</a:t>
-                      </a:r>
-                    </a:p>
-                  </a:txBody>
-                  <a:tcPr>
-                    <a:solidFill>
-                      <a:srgbClr val="FFFFFF"/>
-                    </a:solidFill>
-                  </a:tcPr>
-                </a:tc>
-              </a:tr>
-              <a:tr h="444137">
-                <a:tc>
-                  <a:txBody>
-                    <a:bodyPr/>
-                    <a:lstStyle/>
-                    <a:p>
-                      <a:r>
-                        <a:rPr sz="1000" b="1">
-                          <a:solidFill>
-                            <a:srgbClr val="333333"/>
-                          </a:solidFill>
-                        </a:rPr>
-                        <a:t>analyses</a:t>
-                      </a:r>
-                    </a:p>
-                  </a:txBody>
-                  <a:tcPr>
-                    <a:solidFill>
-                      <a:srgbClr val="F5F5F5"/>
-                    </a:solidFill>
-                  </a:tcPr>
-                </a:tc>
-                <a:tc>
-                  <a:txBody>
-                    <a:bodyPr/>
-                    <a:lstStyle/>
-                    <a:p>
-                      <a:r>
-                        <a:rPr sz="1000">
-                          <a:solidFill>
-                            <a:srgbClr val="333333"/>
-                          </a:solidFill>
-                        </a:rPr>
-                        <a:t>/subreddit</a:t>
-                      </a:r>
-                    </a:p>
-                  </a:txBody>
-                  <a:tcPr>
-                    <a:solidFill>
-                      <a:srgbClr val="F5F5F5"/>
-                    </a:solidFill>
-                  </a:tcPr>
-                </a:tc>
-                <a:tc>
-                  <a:txBody>
-                    <a:bodyPr/>
-                    <a:lstStyle/>
-                    <a:p>
-                      <a:r>
-                        <a:rPr sz="1000">
-                          <a:solidFill>
-                            <a:srgbClr val="333333"/>
-                          </a:solidFill>
-                        </a:rPr>
-                        <a:t>post_id, sentiment, confidence, aspects, trust</a:t>
-                      </a:r>
-                    </a:p>
-                  </a:txBody>
-                  <a:tcPr>
-                    <a:solidFill>
-                      <a:srgbClr val="F5F5F5"/>
-                    </a:solidFill>
-                  </a:tcPr>
-                </a:tc>
-                <a:tc>
-                  <a:txBody>
-                    <a:bodyPr/>
-                    <a:lstStyle/>
-                    <a:p>
-                      <a:r>
-                        <a:rPr sz="1000">
-                          <a:solidFill>
-                            <a:srgbClr val="333333"/>
-                          </a:solidFill>
-                        </a:rPr>
-                        <a:t>AI analysis results</a:t>
-                      </a:r>
-                    </a:p>
-                  </a:txBody>
-                  <a:tcPr>
-                    <a:solidFill>
-                      <a:srgbClr val="F5F5F5"/>
-                    </a:solidFill>
-                  </a:tcPr>
-                </a:tc>
-              </a:tr>
-              <a:tr h="444137">
-                <a:tc>
-                  <a:txBody>
-                    <a:bodyPr/>
-                    <a:lstStyle/>
-                    <a:p>
-                      <a:r>
-                        <a:rPr sz="1000" b="1">
-                          <a:solidFill>
-                            <a:srgbClr val="333333"/>
-                          </a:solidFill>
-                        </a:rPr>
-                        <a:t>aggregates</a:t>
-                      </a:r>
-                    </a:p>
-                  </a:txBody>
-                  <a:tcPr>
-                    <a:solidFill>
-                      <a:srgbClr val="FFFFFF"/>
-                    </a:solidFill>
-                  </a:tcPr>
-                </a:tc>
-                <a:tc>
-                  <a:txBody>
-                    <a:bodyPr/>
-                    <a:lstStyle/>
-                    <a:p>
-                      <a:r>
-                        <a:rPr sz="1000">
-                          <a:solidFill>
-                            <a:srgbClr val="333333"/>
-                          </a:solidFill>
-                        </a:rPr>
-                        <a:t>/time_window</a:t>
-                      </a:r>
-                    </a:p>
-                  </a:txBody>
-                  <a:tcPr>
-                    <a:solidFill>
-                      <a:srgbClr val="FFFFFF"/>
-                    </a:solidFill>
-                  </a:tcPr>
-                </a:tc>
-                <a:tc>
-                  <a:txBody>
-                    <a:bodyPr/>
-                    <a:lstStyle/>
-                    <a:p>
-                      <a:r>
-                        <a:rPr sz="1000">
-                          <a:solidFill>
-                            <a:srgbClr val="333333"/>
-                          </a:solidFill>
-                        </a:rPr>
-                        <a:t>subreddit, window, metrics_json</a:t>
-                      </a:r>
-                    </a:p>
-                  </a:txBody>
-                  <a:tcPr>
-                    <a:solidFill>
-                      <a:srgbClr val="FFFFFF"/>
-                    </a:solidFill>
-                  </a:tcPr>
-                </a:tc>
-                <a:tc>
-                  <a:txBody>
-                    <a:bodyPr/>
-                    <a:lstStyle/>
-                    <a:p>
-                      <a:r>
-                        <a:rPr sz="1000">
-                          <a:solidFill>
-                            <a:srgbClr val="333333"/>
-                          </a:solidFill>
-                        </a:rPr>
-                        <a:t>Pre-computed KPIs</a:t>
-                      </a:r>
-                    </a:p>
-                  </a:txBody>
-                  <a:tcPr>
-                    <a:solidFill>
-                      <a:srgbClr val="FFFFFF"/>
-                    </a:solidFill>
-                  </a:tcPr>
-                </a:tc>
-              </a:tr>
-              <a:tr h="444137">
-                <a:tc>
-                  <a:txBody>
-                    <a:bodyPr/>
-                    <a:lstStyle/>
-                    <a:p>
-                      <a:r>
-                        <a:rPr sz="1000" b="1">
-                          <a:solidFill>
-                            <a:srgbClr val="333333"/>
-                          </a:solidFill>
-                        </a:rPr>
-                        <a:t>alerts</a:t>
-                      </a:r>
-                    </a:p>
-                  </a:txBody>
-                  <a:tcPr>
-                    <a:solidFill>
-                      <a:srgbClr val="F5F5F5"/>
-                    </a:solidFill>
-                  </a:tcPr>
-                </a:tc>
-                <a:tc>
-                  <a:txBody>
-                    <a:bodyPr/>
-                    <a:lstStyle/>
-                    <a:p>
-                      <a:r>
-                        <a:rPr sz="1000">
-                          <a:solidFill>
-                            <a:srgbClr val="333333"/>
-                          </a:solidFill>
-                        </a:rPr>
-                        <a:t>/severity</a:t>
-                      </a:r>
-                    </a:p>
-                  </a:txBody>
-                  <a:tcPr>
-                    <a:solidFill>
-                      <a:srgbClr val="F5F5F5"/>
-                    </a:solidFill>
-                  </a:tcPr>
-                </a:tc>
-                <a:tc>
-                  <a:txBody>
-                    <a:bodyPr/>
-                    <a:lstStyle/>
-                    <a:p>
-                      <a:r>
-                        <a:rPr sz="1000">
-                          <a:solidFill>
-                            <a:srgbClr val="333333"/>
-                          </a:solidFill>
-                        </a:rPr>
-                        <a:t>type, aspect, threshold_breached</a:t>
-                      </a:r>
-                    </a:p>
-                  </a:txBody>
-                  <a:tcPr>
-                    <a:solidFill>
-                      <a:srgbClr val="F5F5F5"/>
-                    </a:solidFill>
-                  </a:tcPr>
-                </a:tc>
-                <a:tc>
-                  <a:txBody>
-                    <a:bodyPr/>
-                    <a:lstStyle/>
-                    <a:p>
-                      <a:r>
-                        <a:rPr sz="1000">
-                          <a:solidFill>
-                            <a:srgbClr val="333333"/>
-                          </a:solidFill>
-                        </a:rPr>
-                        <a:t>Triggered anomalies</a:t>
-                      </a:r>
-                    </a:p>
-                  </a:txBody>
-                  <a:tcPr>
-                    <a:solidFill>
-                      <a:srgbClr val="F5F5F5"/>
-                    </a:solidFill>
-                  </a:tcPr>
-                </a:tc>
-              </a:tr>
-              <a:tr h="444137">
-                <a:tc>
-                  <a:txBody>
-                    <a:bodyPr/>
-                    <a:lstStyle/>
-                    <a:p>
-                      <a:r>
-                        <a:rPr sz="1000" b="1">
-                          <a:solidFill>
-                            <a:srgbClr val="333333"/>
-                          </a:solidFill>
-                        </a:rPr>
-                        <a:t>feedback</a:t>
-                      </a:r>
-                    </a:p>
-                  </a:txBody>
-                  <a:tcPr>
-                    <a:solidFill>
-                      <a:srgbClr val="FFFFFF"/>
-                    </a:solidFill>
-                  </a:tcPr>
-                </a:tc>
-                <a:tc>
-                  <a:txBody>
-                    <a:bodyPr/>
-                    <a:lstStyle/>
-                    <a:p>
-                      <a:r>
-                        <a:rPr sz="1000">
-                          <a:solidFill>
-                            <a:srgbClr val="333333"/>
-                          </a:solidFill>
-                        </a:rPr>
-                        <a:t>/analyst_id</a:t>
-                      </a:r>
-                    </a:p>
-                  </a:txBody>
-                  <a:tcPr>
-                    <a:solidFill>
-                      <a:srgbClr val="FFFFFF"/>
-                    </a:solidFill>
-                  </a:tcPr>
-                </a:tc>
-                <a:tc>
-                  <a:txBody>
-                    <a:bodyPr/>
-                    <a:lstStyle/>
-                    <a:p>
-                      <a:r>
-                        <a:rPr sz="1000">
-                          <a:solidFill>
-                            <a:srgbClr val="333333"/>
-                          </a:solidFill>
-                        </a:rPr>
-                        <a:t>post_id, correction, reply_text</a:t>
-                      </a:r>
-                    </a:p>
-                  </a:txBody>
-                  <a:tcPr>
-                    <a:solidFill>
-                      <a:srgbClr val="FFFFFF"/>
-                    </a:solidFill>
-                  </a:tcPr>
-                </a:tc>
-                <a:tc>
-                  <a:txBody>
-                    <a:bodyPr/>
-                    <a:lstStyle/>
-                    <a:p>
-                      <a:r>
-                        <a:rPr sz="1000">
-                          <a:solidFill>
-                            <a:srgbClr val="333333"/>
-                          </a:solidFill>
-                        </a:rPr>
-                        <a:t>HITL corrections + replies</a:t>
-                      </a:r>
-                    </a:p>
-                  </a:txBody>
-                  <a:tcPr>
-                    <a:solidFill>
-                      <a:srgbClr val="FFFFFF"/>
-                    </a:solidFill>
-                  </a:tcPr>
-                </a:tc>
-              </a:tr>
-              <a:tr h="444138">
-                <a:tc>
-                  <a:txBody>
-                    <a:bodyPr/>
-                    <a:lstStyle/>
-                    <a:p>
-                      <a:r>
-                        <a:rPr sz="1000" b="1">
-                          <a:solidFill>
-                            <a:srgbClr val="333333"/>
-                          </a:solidFill>
-                        </a:rPr>
-                        <a:t>notification_log</a:t>
-                      </a:r>
-                    </a:p>
-                  </a:txBody>
-                  <a:tcPr>
-                    <a:solidFill>
-                      <a:srgbClr val="F5F5F5"/>
-                    </a:solidFill>
-                  </a:tcPr>
-                </a:tc>
-                <a:tc>
-                  <a:txBody>
-                    <a:bodyPr/>
-                    <a:lstStyle/>
-                    <a:p>
-                      <a:r>
-                        <a:rPr sz="1000">
-                          <a:solidFill>
-                            <a:srgbClr val="333333"/>
-                          </a:solidFill>
-                        </a:rPr>
-                        <a:t>/group_id</a:t>
-                      </a:r>
-                    </a:p>
-                  </a:txBody>
-                  <a:tcPr>
-                    <a:solidFill>
-                      <a:srgbClr val="F5F5F5"/>
-                    </a:solidFill>
-                  </a:tcPr>
-                </a:tc>
-                <a:tc>
-                  <a:txBody>
-                    <a:bodyPr/>
-                    <a:lstStyle/>
-                    <a:p>
-                      <a:r>
-                        <a:rPr sz="1000">
-                          <a:solidFill>
-                            <a:srgbClr val="333333"/>
-                          </a:solidFill>
-                        </a:rPr>
-                        <a:t>post_id, channel, status, sent_at</a:t>
-                      </a:r>
-                    </a:p>
-                  </a:txBody>
-                  <a:tcPr>
-                    <a:solidFill>
-                      <a:srgbClr val="F5F5F5"/>
-                    </a:solidFill>
-                  </a:tcPr>
-                </a:tc>
-                <a:tc>
-                  <a:txBody>
-                    <a:bodyPr/>
-                    <a:lstStyle/>
-                    <a:p>
-                      <a:r>
-                        <a:rPr sz="1000">
-                          <a:solidFill>
-                            <a:srgbClr val="333333"/>
-                          </a:solidFill>
-                        </a:rPr>
-                        <a:t>Delivery audit trail</a:t>
-                      </a:r>
-                    </a:p>
-                  </a:txBody>
-                  <a:tcPr>
-                    <a:solidFill>
-                      <a:srgbClr val="F5F5F5"/>
-                    </a:solidFill>
-                  </a:tcPr>
-                </a:tc>
-              </a:tr>
-            </a:tbl>
-          </a:graphicData>
-        </a:graphic>
-      </p:graphicFrame>
-      <p:sp>
-        <p:nvSpPr>
-          <p:cNvPr id="7" name="Rectangle 6"/>
-          <p:cNvSpPr/>
-          <p:nvPr/>
-        </p:nvSpPr>
-        <p:spPr>
-          <a:xfrm>
-            <a:off x="457200" y="4206240"/>
-            <a:ext cx="5486400" cy="2103120"/>
-          </a:xfrm>
-          <a:prstGeom prst="rect">
-            <a:avLst/>
-          </a:prstGeom>
-          <a:solidFill>
-            <a:srgbClr val="E8F4FD"/>
-          </a:solidFill>
-          <a:ln>
-            <a:solidFill>
-              <a:srgbClr val="0071DC"/>
-            </a:solidFill>
-          </a:ln>
-          <a:effectLst/>
-        </p:spPr>
-        <p:style>
-          <a:lnRef idx="1">
-            <a:schemeClr val="accent1"/>
-          </a:lnRef>
-          <a:fillRef idx="3">
-            <a:schemeClr val="accent1"/>
-          </a:fillRef>
-          <a:effectRef idx="2">
-            <a:schemeClr val="accent1"/>
-          </a:effectRef>
-          <a:fontRef idx="minor">
-            <a:schemeClr val="lt1"/>
-          </a:fontRef>
-        </p:style>
-        <p:txBody>
-          <a:bodyPr rtlCol="0" anchor="ctr"/>
-          <a:lstStyle/>
-          <a:p>
-            <a:pPr algn="ctr"/>
-          </a:p>
-        </p:txBody>
-      </p:sp>
-      <p:sp>
-        <p:nvSpPr>
-          <p:cNvPr id="8" name="TextBox 7"/>
-          <p:cNvSpPr txBox="1"/>
-          <p:nvPr/>
-        </p:nvSpPr>
-        <p:spPr>
-          <a:xfrm>
-            <a:off x="640080" y="4343400"/>
-            <a:ext cx="5120640" cy="320040"/>
-          </a:xfrm>
-          <a:prstGeom prst="rect">
-            <a:avLst/>
-          </a:prstGeom>
-          <a:noFill/>
-        </p:spPr>
-        <p:txBody>
-          <a:bodyPr wrap="square" anchor="t">
-            <a:spAutoFit/>
-          </a:bodyPr>
-          <a:lstStyle/>
-          <a:p>
-            <a:pPr algn="l"/>
-            <a:r>
-              <a:rPr sz="1200" b="1">
-                <a:solidFill>
-                  <a:srgbClr val="0071DC"/>
-                </a:solidFill>
-              </a:rPr>
-              <a:t>Design choices</a:t>
-            </a:r>
-          </a:p>
-        </p:txBody>
-      </p:sp>
-      <p:sp>
-        <p:nvSpPr>
-          <p:cNvPr id="9" name="TextBox 8"/>
-          <p:cNvSpPr txBox="1"/>
-          <p:nvPr/>
-        </p:nvSpPr>
-        <p:spPr>
-          <a:xfrm>
-            <a:off x="640080" y="4663440"/>
-            <a:ext cx="5120640" cy="1554480"/>
-          </a:xfrm>
-          <a:prstGeom prst="rect">
-            <a:avLst/>
-          </a:prstGeom>
-          <a:noFill/>
-        </p:spPr>
-        <p:txBody>
-          <a:bodyPr wrap="square">
-            <a:spAutoFit/>
-          </a:bodyPr>
-          <a:lstStyle/>
-          <a:p>
-            <a:pPr>
-              <a:spcAft>
-                <a:spcPts val="400"/>
-              </a:spcAft>
-            </a:pPr>
-            <a:r>
-              <a:rPr sz="1100" b="0">
-                <a:solidFill>
-                  <a:srgbClr val="333333"/>
-                </a:solidFill>
-              </a:rPr>
-              <a:t>•  SQLite in WAL mode for hot dev data</a:t>
-            </a:r>
-          </a:p>
-          <a:p>
-            <a:pPr>
-              <a:spcAft>
-                <a:spcPts val="400"/>
-              </a:spcAft>
-            </a:pPr>
-            <a:r>
-              <a:rPr sz="1100" b="0">
-                <a:solidFill>
-                  <a:srgbClr val="333333"/>
-                </a:solidFill>
-              </a:rPr>
-              <a:t>•  data JSON column mirrors Cosmos doc</a:t>
-            </a:r>
-          </a:p>
-          <a:p>
-            <a:pPr>
-              <a:spcAft>
-                <a:spcPts val="400"/>
-              </a:spcAft>
-            </a:pPr>
-            <a:r>
-              <a:rPr sz="1100" b="0">
-                <a:solidFill>
-                  <a:srgbClr val="333333"/>
-                </a:solidFill>
-              </a:rPr>
-              <a:t>•  Pluggable StorageBackend interface</a:t>
-            </a:r>
-          </a:p>
-          <a:p>
-            <a:pPr>
-              <a:spcAft>
-                <a:spcPts val="400"/>
-              </a:spcAft>
-            </a:pPr>
-            <a:r>
-              <a:rPr sz="1100" b="0">
-                <a:solidFill>
-                  <a:srgbClr val="333333"/>
-                </a:solidFill>
-              </a:rPr>
-              <a:t>•  Nightly backup + JSONL cost ledger</a:t>
-            </a:r>
-          </a:p>
-        </p:txBody>
-      </p:sp>
-      <p:sp>
-        <p:nvSpPr>
-          <p:cNvPr id="10" name="Rectangle 9"/>
-          <p:cNvSpPr/>
-          <p:nvPr/>
-        </p:nvSpPr>
-        <p:spPr>
-          <a:xfrm>
-            <a:off x="6172200" y="4206240"/>
-            <a:ext cx="5532120" cy="2103120"/>
-          </a:xfrm>
-          <a:prstGeom prst="rect">
-            <a:avLst/>
-          </a:prstGeom>
-          <a:solidFill>
-            <a:srgbClr val="DCFCE7"/>
-          </a:solidFill>
-          <a:ln>
-            <a:solidFill>
-              <a:srgbClr val="10B981"/>
-            </a:solidFill>
-          </a:ln>
-          <a:effectLst/>
-        </p:spPr>
-        <p:style>
-          <a:lnRef idx="1">
-            <a:schemeClr val="accent1"/>
-          </a:lnRef>
-          <a:fillRef idx="3">
-            <a:schemeClr val="accent1"/>
-          </a:fillRef>
-          <a:effectRef idx="2">
-            <a:schemeClr val="accent1"/>
-          </a:effectRef>
-          <a:fontRef idx="minor">
-            <a:schemeClr val="lt1"/>
-          </a:fontRef>
-        </p:style>
-        <p:txBody>
-          <a:bodyPr rtlCol="0" anchor="ctr"/>
-          <a:lstStyle/>
-          <a:p>
-            <a:pPr algn="ctr"/>
-          </a:p>
-        </p:txBody>
-      </p:sp>
-      <p:sp>
-        <p:nvSpPr>
-          <p:cNvPr id="11" name="TextBox 10"/>
-          <p:cNvSpPr txBox="1"/>
-          <p:nvPr/>
-        </p:nvSpPr>
-        <p:spPr>
-          <a:xfrm>
-            <a:off x="6355080" y="4343400"/>
-            <a:ext cx="5212080" cy="320040"/>
-          </a:xfrm>
-          <a:prstGeom prst="rect">
-            <a:avLst/>
-          </a:prstGeom>
-          <a:noFill/>
-        </p:spPr>
-        <p:txBody>
-          <a:bodyPr wrap="square" anchor="t">
-            <a:spAutoFit/>
-          </a:bodyPr>
-          <a:lstStyle/>
-          <a:p>
-            <a:pPr algn="l"/>
-            <a:r>
-              <a:rPr sz="1200" b="1">
-                <a:solidFill>
-                  <a:srgbClr val="10B981"/>
-                </a:solidFill>
-              </a:rPr>
-              <a:t>Migration story</a:t>
-            </a:r>
-          </a:p>
-        </p:txBody>
-      </p:sp>
-      <p:sp>
-        <p:nvSpPr>
-          <p:cNvPr id="12" name="TextBox 11"/>
-          <p:cNvSpPr txBox="1"/>
-          <p:nvPr/>
-        </p:nvSpPr>
-        <p:spPr>
-          <a:xfrm>
-            <a:off x="6355080" y="4663440"/>
-            <a:ext cx="5212080" cy="1554480"/>
-          </a:xfrm>
-          <a:prstGeom prst="rect">
-            <a:avLst/>
-          </a:prstGeom>
-          <a:noFill/>
-        </p:spPr>
-        <p:txBody>
-          <a:bodyPr wrap="square">
-            <a:spAutoFit/>
-          </a:bodyPr>
-          <a:lstStyle/>
-          <a:p>
-            <a:pPr>
-              <a:spcAft>
-                <a:spcPts val="400"/>
-              </a:spcAft>
-            </a:pPr>
-            <a:r>
-              <a:rPr sz="1100" b="0">
-                <a:solidFill>
-                  <a:srgbClr val="333333"/>
-                </a:solidFill>
-              </a:rPr>
-              <a:t>•  Swap SQLiteBackend → CosmosBackend</a:t>
-            </a:r>
-          </a:p>
-          <a:p>
-            <a:pPr>
-              <a:spcAft>
-                <a:spcPts val="400"/>
-              </a:spcAft>
-            </a:pPr>
-            <a:r>
-              <a:rPr sz="1100" b="0">
-                <a:solidFill>
-                  <a:srgbClr val="333333"/>
-                </a:solidFill>
-              </a:rPr>
-              <a:t>•  Same CREATE TABLE mapped to container spec</a:t>
-            </a:r>
-          </a:p>
-          <a:p>
-            <a:pPr>
-              <a:spcAft>
-                <a:spcPts val="400"/>
-              </a:spcAft>
-            </a:pPr>
-            <a:r>
-              <a:rPr sz="1100" b="0">
-                <a:solidFill>
-                  <a:srgbClr val="333333"/>
-                </a:solidFill>
-              </a:rPr>
-              <a:t>•  Partition keys already match production</a:t>
-            </a:r>
-          </a:p>
-          <a:p>
-            <a:pPr>
-              <a:spcAft>
-                <a:spcPts val="400"/>
-              </a:spcAft>
-            </a:pPr>
-            <a:r>
-              <a:rPr sz="1100" b="0">
-                <a:solidFill>
-                  <a:srgbClr val="333333"/>
-                </a:solidFill>
-              </a:rPr>
-              <a:t>•  Zero change to pipeline / dashboard code</a:t>
-            </a:r>
-          </a:p>
-        </p:txBody>
-      </p:sp>
-      <p:sp>
-        <p:nvSpPr>
-          <p:cNvPr id="13" name="TextBox 12"/>
-          <p:cNvSpPr txBox="1"/>
-          <p:nvPr/>
-        </p:nvSpPr>
-        <p:spPr>
-          <a:xfrm>
-            <a:off x="365760" y="6537960"/>
-            <a:ext cx="8229600" cy="274320"/>
-          </a:xfrm>
-          <a:prstGeom prst="rect">
-            <a:avLst/>
-          </a:prstGeom>
-          <a:noFill/>
-        </p:spPr>
-        <p:txBody>
-          <a:bodyPr wrap="square" anchor="t">
-            <a:spAutoFit/>
-          </a:bodyPr>
-          <a:lstStyle/>
-          <a:p>
-            <a:pPr algn="l"/>
-            <a:r>
-              <a:rPr sz="900" b="0">
-                <a:solidFill>
-                  <a:srgbClr val="666666"/>
-                </a:solidFill>
-              </a:rPr>
-              <a:t>Retail Sentiment Intelligence  ·  BITS ZG628T Dissertation  ·  Vishal Singh  ·  Post Mid-Semester Presentation</a:t>
-            </a:r>
-          </a:p>
-        </p:txBody>
-      </p:sp>
-      <p:sp>
-        <p:nvSpPr>
-          <p:cNvPr id="14" name="TextBox 13"/>
-          <p:cNvSpPr txBox="1"/>
-          <p:nvPr/>
-        </p:nvSpPr>
-        <p:spPr>
-          <a:xfrm>
-            <a:off x="10972800" y="6537960"/>
-            <a:ext cx="1097280" cy="274320"/>
-          </a:xfrm>
-          <a:prstGeom prst="rect">
-            <a:avLst/>
-          </a:prstGeom>
-          <a:noFill/>
-        </p:spPr>
-        <p:txBody>
-          <a:bodyPr wrap="square" anchor="t">
-            <a:spAutoFit/>
-          </a:bodyPr>
-          <a:lstStyle/>
-          <a:p>
-            <a:pPr algn="r"/>
-            <a:r>
-              <a:rPr sz="900" b="0">
-                <a:solidFill>
-                  <a:srgbClr val="666666"/>
-                </a:solidFill>
-              </a:rPr>
-              <a:t>16 / 25</a:t>
-            </a:r>
-          </a:p>
-        </p:txBody>
-      </p:sp>
-    </p:spTree>
-  </p:cSld>
-  <p:clrMapOvr>
-    <a:masterClrMapping/>
-  </p:clrMapOvr>
-</p:sld>
-</file>
-
-<file path=ppt/slides/slide17.xml><?xml version="1.0" encoding="utf-8"?>
 <p:sld xmlns:a="http://schemas.openxmlformats.org/drawingml/2006/main" xmlns:p="http://schemas.openxmlformats.org/presentationml/2006/main" xmlns:r="http://schemas.openxmlformats.org/officeDocument/2006/relationships">
   <p:cSld>
     <p:spTree>
@@ -12832,7 +11642,1209 @@
                   <a:srgbClr val="666666"/>
                 </a:solidFill>
               </a:rPr>
-              <a:t>17 / 25</a:t>
+              <a:t>16 / 22</a:t>
+            </a:r>
+          </a:p>
+        </p:txBody>
+      </p:sp>
+    </p:spTree>
+  </p:cSld>
+  <p:clrMapOvr>
+    <a:masterClrMapping/>
+  </p:clrMapOvr>
+</p:sld>
+</file>
+
+<file path=ppt/slides/slide17.xml><?xml version="1.0" encoding="utf-8"?>
+<p:sld xmlns:a="http://schemas.openxmlformats.org/drawingml/2006/main" xmlns:p="http://schemas.openxmlformats.org/presentationml/2006/main" xmlns:r="http://schemas.openxmlformats.org/officeDocument/2006/relationships">
+  <p:cSld>
+    <p:spTree>
+      <p:nvGrpSpPr>
+        <p:cNvPr id="1" name=""/>
+        <p:cNvGrpSpPr/>
+        <p:nvPr/>
+      </p:nvGrpSpPr>
+      <p:grpSpPr/>
+      <p:sp>
+        <p:nvSpPr>
+          <p:cNvPr id="2" name="Rectangle 1"/>
+          <p:cNvSpPr/>
+          <p:nvPr/>
+        </p:nvSpPr>
+        <p:spPr>
+          <a:xfrm>
+            <a:off x="0" y="0"/>
+            <a:ext cx="12191695" cy="777240"/>
+          </a:xfrm>
+          <a:prstGeom prst="rect">
+            <a:avLst/>
+          </a:prstGeom>
+          <a:solidFill>
+            <a:srgbClr val="041E42"/>
+          </a:solidFill>
+          <a:ln>
+            <a:noFill/>
+          </a:ln>
+          <a:effectLst/>
+        </p:spPr>
+        <p:style>
+          <a:lnRef idx="1">
+            <a:schemeClr val="accent1"/>
+          </a:lnRef>
+          <a:fillRef idx="3">
+            <a:schemeClr val="accent1"/>
+          </a:fillRef>
+          <a:effectRef idx="2">
+            <a:schemeClr val="accent1"/>
+          </a:effectRef>
+          <a:fontRef idx="minor">
+            <a:schemeClr val="lt1"/>
+          </a:fontRef>
+        </p:style>
+        <p:txBody>
+          <a:bodyPr rtlCol="0" anchor="ctr"/>
+          <a:lstStyle/>
+          <a:p>
+            <a:pPr algn="ctr"/>
+          </a:p>
+        </p:txBody>
+      </p:sp>
+      <p:sp>
+        <p:nvSpPr>
+          <p:cNvPr id="3" name="TextBox 2"/>
+          <p:cNvSpPr txBox="1"/>
+          <p:nvPr/>
+        </p:nvSpPr>
+        <p:spPr>
+          <a:xfrm>
+            <a:off x="365760" y="109728"/>
+            <a:ext cx="11430000" cy="457200"/>
+          </a:xfrm>
+          <a:prstGeom prst="rect">
+            <a:avLst/>
+          </a:prstGeom>
+          <a:noFill/>
+        </p:spPr>
+        <p:txBody>
+          <a:bodyPr wrap="square" anchor="t">
+            <a:spAutoFit/>
+          </a:bodyPr>
+          <a:lstStyle/>
+          <a:p>
+            <a:pPr algn="l"/>
+            <a:r>
+              <a:rPr sz="2600" b="1">
+                <a:solidFill>
+                  <a:srgbClr val="FFFFFF"/>
+                </a:solidFill>
+              </a:rPr>
+              <a:t>Principal Contributions</a:t>
+            </a:r>
+          </a:p>
+        </p:txBody>
+      </p:sp>
+      <p:sp>
+        <p:nvSpPr>
+          <p:cNvPr id="4" name="TextBox 3"/>
+          <p:cNvSpPr txBox="1"/>
+          <p:nvPr/>
+        </p:nvSpPr>
+        <p:spPr>
+          <a:xfrm>
+            <a:off x="365760" y="457200"/>
+            <a:ext cx="11430000" cy="320040"/>
+          </a:xfrm>
+          <a:prstGeom prst="rect">
+            <a:avLst/>
+          </a:prstGeom>
+          <a:noFill/>
+        </p:spPr>
+        <p:txBody>
+          <a:bodyPr wrap="square" anchor="t">
+            <a:spAutoFit/>
+          </a:bodyPr>
+          <a:lstStyle/>
+          <a:p>
+            <a:pPr algn="l"/>
+            <a:r>
+              <a:rPr sz="1200" b="0">
+                <a:solidFill>
+                  <a:srgbClr val="E8F4FD"/>
+                </a:solidFill>
+              </a:rPr>
+              <a:t>What this dissertation delivered — end to end</a:t>
+            </a:r>
+          </a:p>
+        </p:txBody>
+      </p:sp>
+      <p:sp>
+        <p:nvSpPr>
+          <p:cNvPr id="5" name="Rectangle 4"/>
+          <p:cNvSpPr/>
+          <p:nvPr/>
+        </p:nvSpPr>
+        <p:spPr>
+          <a:xfrm>
+            <a:off x="0" y="777240"/>
+            <a:ext cx="12191695" cy="45720"/>
+          </a:xfrm>
+          <a:prstGeom prst="rect">
+            <a:avLst/>
+          </a:prstGeom>
+          <a:solidFill>
+            <a:srgbClr val="FFC220"/>
+          </a:solidFill>
+          <a:ln>
+            <a:noFill/>
+          </a:ln>
+          <a:effectLst/>
+        </p:spPr>
+        <p:style>
+          <a:lnRef idx="1">
+            <a:schemeClr val="accent1"/>
+          </a:lnRef>
+          <a:fillRef idx="3">
+            <a:schemeClr val="accent1"/>
+          </a:fillRef>
+          <a:effectRef idx="2">
+            <a:schemeClr val="accent1"/>
+          </a:effectRef>
+          <a:fontRef idx="minor">
+            <a:schemeClr val="lt1"/>
+          </a:fontRef>
+        </p:style>
+        <p:txBody>
+          <a:bodyPr rtlCol="0" anchor="ctr"/>
+          <a:lstStyle/>
+          <a:p>
+            <a:pPr algn="ctr"/>
+          </a:p>
+        </p:txBody>
+      </p:sp>
+      <p:sp>
+        <p:nvSpPr>
+          <p:cNvPr id="6" name="Rectangle 5"/>
+          <p:cNvSpPr/>
+          <p:nvPr/>
+        </p:nvSpPr>
+        <p:spPr>
+          <a:xfrm>
+            <a:off x="457200" y="960120"/>
+            <a:ext cx="11247120" cy="960120"/>
+          </a:xfrm>
+          <a:prstGeom prst="rect">
+            <a:avLst/>
+          </a:prstGeom>
+          <a:solidFill>
+            <a:srgbClr val="F5F5F5"/>
+          </a:solidFill>
+          <a:ln>
+            <a:solidFill>
+              <a:srgbClr val="0071DC"/>
+            </a:solidFill>
+          </a:ln>
+          <a:effectLst/>
+        </p:spPr>
+        <p:style>
+          <a:lnRef idx="1">
+            <a:schemeClr val="accent1"/>
+          </a:lnRef>
+          <a:fillRef idx="3">
+            <a:schemeClr val="accent1"/>
+          </a:fillRef>
+          <a:effectRef idx="2">
+            <a:schemeClr val="accent1"/>
+          </a:effectRef>
+          <a:fontRef idx="minor">
+            <a:schemeClr val="lt1"/>
+          </a:fontRef>
+        </p:style>
+        <p:txBody>
+          <a:bodyPr rtlCol="0" anchor="ctr"/>
+          <a:lstStyle/>
+          <a:p>
+            <a:pPr algn="ctr"/>
+          </a:p>
+        </p:txBody>
+      </p:sp>
+      <p:sp>
+        <p:nvSpPr>
+          <p:cNvPr id="7" name="Rectangle 6"/>
+          <p:cNvSpPr/>
+          <p:nvPr/>
+        </p:nvSpPr>
+        <p:spPr>
+          <a:xfrm>
+            <a:off x="457200" y="960120"/>
+            <a:ext cx="822960" cy="960120"/>
+          </a:xfrm>
+          <a:prstGeom prst="rect">
+            <a:avLst/>
+          </a:prstGeom>
+          <a:solidFill>
+            <a:srgbClr val="0071DC"/>
+          </a:solidFill>
+          <a:ln>
+            <a:noFill/>
+          </a:ln>
+          <a:effectLst/>
+        </p:spPr>
+        <p:style>
+          <a:lnRef idx="1">
+            <a:schemeClr val="accent1"/>
+          </a:lnRef>
+          <a:fillRef idx="3">
+            <a:schemeClr val="accent1"/>
+          </a:fillRef>
+          <a:effectRef idx="2">
+            <a:schemeClr val="accent1"/>
+          </a:effectRef>
+          <a:fontRef idx="minor">
+            <a:schemeClr val="lt1"/>
+          </a:fontRef>
+        </p:style>
+        <p:txBody>
+          <a:bodyPr rtlCol="0" anchor="ctr"/>
+          <a:lstStyle/>
+          <a:p>
+            <a:pPr algn="ctr"/>
+          </a:p>
+        </p:txBody>
+      </p:sp>
+      <p:sp>
+        <p:nvSpPr>
+          <p:cNvPr id="8" name="TextBox 7"/>
+          <p:cNvSpPr txBox="1"/>
+          <p:nvPr/>
+        </p:nvSpPr>
+        <p:spPr>
+          <a:xfrm>
+            <a:off x="457200" y="960120"/>
+            <a:ext cx="822960" cy="960120"/>
+          </a:xfrm>
+          <a:prstGeom prst="rect">
+            <a:avLst/>
+          </a:prstGeom>
+          <a:noFill/>
+        </p:spPr>
+        <p:txBody>
+          <a:bodyPr wrap="square" anchor="ctr">
+            <a:spAutoFit/>
+          </a:bodyPr>
+          <a:lstStyle/>
+          <a:p>
+            <a:pPr algn="ctr"/>
+            <a:r>
+              <a:rPr sz="2000" b="1">
+                <a:solidFill>
+                  <a:srgbClr val="FFFFFF"/>
+                </a:solidFill>
+              </a:rPr>
+              <a:t>C1</a:t>
+            </a:r>
+          </a:p>
+        </p:txBody>
+      </p:sp>
+      <p:sp>
+        <p:nvSpPr>
+          <p:cNvPr id="9" name="TextBox 8"/>
+          <p:cNvSpPr txBox="1"/>
+          <p:nvPr/>
+        </p:nvSpPr>
+        <p:spPr>
+          <a:xfrm>
+            <a:off x="1417320" y="1005840"/>
+            <a:ext cx="10058400" cy="320040"/>
+          </a:xfrm>
+          <a:prstGeom prst="rect">
+            <a:avLst/>
+          </a:prstGeom>
+          <a:noFill/>
+        </p:spPr>
+        <p:txBody>
+          <a:bodyPr wrap="square" anchor="t">
+            <a:spAutoFit/>
+          </a:bodyPr>
+          <a:lstStyle/>
+          <a:p>
+            <a:pPr algn="l"/>
+            <a:r>
+              <a:rPr sz="1300" b="1">
+                <a:solidFill>
+                  <a:srgbClr val="041E42"/>
+                </a:solidFill>
+              </a:rPr>
+              <a:t>Offline-first RSI pipeline</a:t>
+            </a:r>
+          </a:p>
+        </p:txBody>
+      </p:sp>
+      <p:sp>
+        <p:nvSpPr>
+          <p:cNvPr id="10" name="TextBox 9"/>
+          <p:cNvSpPr txBox="1"/>
+          <p:nvPr/>
+        </p:nvSpPr>
+        <p:spPr>
+          <a:xfrm>
+            <a:off x="1417320" y="1325880"/>
+            <a:ext cx="10058400" cy="594360"/>
+          </a:xfrm>
+          <a:prstGeom prst="rect">
+            <a:avLst/>
+          </a:prstGeom>
+          <a:noFill/>
+        </p:spPr>
+        <p:txBody>
+          <a:bodyPr wrap="square" anchor="t">
+            <a:spAutoFit/>
+          </a:bodyPr>
+          <a:lstStyle/>
+          <a:p>
+            <a:pPr algn="l"/>
+            <a:r>
+              <a:rPr sz="1100" b="0">
+                <a:solidFill>
+                  <a:srgbClr val="333333"/>
+                </a:solidFill>
+              </a:rPr>
+              <a:t>Ingestion → trust → sentiment → aspects → vision → aggregation → alerts → dashboard.  Zero API cost, modular, deployable to Azure.</a:t>
+            </a:r>
+          </a:p>
+        </p:txBody>
+      </p:sp>
+      <p:sp>
+        <p:nvSpPr>
+          <p:cNvPr id="11" name="Rectangle 10"/>
+          <p:cNvSpPr/>
+          <p:nvPr/>
+        </p:nvSpPr>
+        <p:spPr>
+          <a:xfrm>
+            <a:off x="457200" y="2002535"/>
+            <a:ext cx="11247120" cy="960120"/>
+          </a:xfrm>
+          <a:prstGeom prst="rect">
+            <a:avLst/>
+          </a:prstGeom>
+          <a:solidFill>
+            <a:srgbClr val="F5F5F5"/>
+          </a:solidFill>
+          <a:ln>
+            <a:solidFill>
+              <a:srgbClr val="0071DC"/>
+            </a:solidFill>
+          </a:ln>
+          <a:effectLst/>
+        </p:spPr>
+        <p:style>
+          <a:lnRef idx="1">
+            <a:schemeClr val="accent1"/>
+          </a:lnRef>
+          <a:fillRef idx="3">
+            <a:schemeClr val="accent1"/>
+          </a:fillRef>
+          <a:effectRef idx="2">
+            <a:schemeClr val="accent1"/>
+          </a:effectRef>
+          <a:fontRef idx="minor">
+            <a:schemeClr val="lt1"/>
+          </a:fontRef>
+        </p:style>
+        <p:txBody>
+          <a:bodyPr rtlCol="0" anchor="ctr"/>
+          <a:lstStyle/>
+          <a:p>
+            <a:pPr algn="ctr"/>
+          </a:p>
+        </p:txBody>
+      </p:sp>
+      <p:sp>
+        <p:nvSpPr>
+          <p:cNvPr id="12" name="Rectangle 11"/>
+          <p:cNvSpPr/>
+          <p:nvPr/>
+        </p:nvSpPr>
+        <p:spPr>
+          <a:xfrm>
+            <a:off x="457200" y="2002535"/>
+            <a:ext cx="822960" cy="960120"/>
+          </a:xfrm>
+          <a:prstGeom prst="rect">
+            <a:avLst/>
+          </a:prstGeom>
+          <a:solidFill>
+            <a:srgbClr val="0071DC"/>
+          </a:solidFill>
+          <a:ln>
+            <a:noFill/>
+          </a:ln>
+          <a:effectLst/>
+        </p:spPr>
+        <p:style>
+          <a:lnRef idx="1">
+            <a:schemeClr val="accent1"/>
+          </a:lnRef>
+          <a:fillRef idx="3">
+            <a:schemeClr val="accent1"/>
+          </a:fillRef>
+          <a:effectRef idx="2">
+            <a:schemeClr val="accent1"/>
+          </a:effectRef>
+          <a:fontRef idx="minor">
+            <a:schemeClr val="lt1"/>
+          </a:fontRef>
+        </p:style>
+        <p:txBody>
+          <a:bodyPr rtlCol="0" anchor="ctr"/>
+          <a:lstStyle/>
+          <a:p>
+            <a:pPr algn="ctr"/>
+          </a:p>
+        </p:txBody>
+      </p:sp>
+      <p:sp>
+        <p:nvSpPr>
+          <p:cNvPr id="13" name="TextBox 12"/>
+          <p:cNvSpPr txBox="1"/>
+          <p:nvPr/>
+        </p:nvSpPr>
+        <p:spPr>
+          <a:xfrm>
+            <a:off x="457200" y="2002535"/>
+            <a:ext cx="822960" cy="960120"/>
+          </a:xfrm>
+          <a:prstGeom prst="rect">
+            <a:avLst/>
+          </a:prstGeom>
+          <a:noFill/>
+        </p:spPr>
+        <p:txBody>
+          <a:bodyPr wrap="square" anchor="ctr">
+            <a:spAutoFit/>
+          </a:bodyPr>
+          <a:lstStyle/>
+          <a:p>
+            <a:pPr algn="ctr"/>
+            <a:r>
+              <a:rPr sz="2000" b="1">
+                <a:solidFill>
+                  <a:srgbClr val="FFFFFF"/>
+                </a:solidFill>
+              </a:rPr>
+              <a:t>C2</a:t>
+            </a:r>
+          </a:p>
+        </p:txBody>
+      </p:sp>
+      <p:sp>
+        <p:nvSpPr>
+          <p:cNvPr id="14" name="TextBox 13"/>
+          <p:cNvSpPr txBox="1"/>
+          <p:nvPr/>
+        </p:nvSpPr>
+        <p:spPr>
+          <a:xfrm>
+            <a:off x="1417320" y="2048255"/>
+            <a:ext cx="10058400" cy="320040"/>
+          </a:xfrm>
+          <a:prstGeom prst="rect">
+            <a:avLst/>
+          </a:prstGeom>
+          <a:noFill/>
+        </p:spPr>
+        <p:txBody>
+          <a:bodyPr wrap="square" anchor="t">
+            <a:spAutoFit/>
+          </a:bodyPr>
+          <a:lstStyle/>
+          <a:p>
+            <a:pPr algn="l"/>
+            <a:r>
+              <a:rPr sz="1300" b="1">
+                <a:solidFill>
+                  <a:srgbClr val="041E42"/>
+                </a:solidFill>
+              </a:rPr>
+              <a:t>Fine-tuned ModernBERT (3-stage curriculum)</a:t>
+            </a:r>
+          </a:p>
+        </p:txBody>
+      </p:sp>
+      <p:sp>
+        <p:nvSpPr>
+          <p:cNvPr id="15" name="TextBox 14"/>
+          <p:cNvSpPr txBox="1"/>
+          <p:nvPr/>
+        </p:nvSpPr>
+        <p:spPr>
+          <a:xfrm>
+            <a:off x="1417320" y="2368295"/>
+            <a:ext cx="10058400" cy="594360"/>
+          </a:xfrm>
+          <a:prstGeom prst="rect">
+            <a:avLst/>
+          </a:prstGeom>
+          <a:noFill/>
+        </p:spPr>
+        <p:txBody>
+          <a:bodyPr wrap="square" anchor="t">
+            <a:spAutoFit/>
+          </a:bodyPr>
+          <a:lstStyle/>
+          <a:p>
+            <a:pPr algn="l"/>
+            <a:r>
+              <a:rPr sz="1100" b="0">
+                <a:solidFill>
+                  <a:srgbClr val="333333"/>
+                </a:solidFill>
+              </a:rPr>
+              <a:t>Macro-F1 0.6272 → 0.7642 overall; 0.28 → 1.00 on long posts.  5-fold OOF cross-validation, offline training.</a:t>
+            </a:r>
+          </a:p>
+        </p:txBody>
+      </p:sp>
+      <p:sp>
+        <p:nvSpPr>
+          <p:cNvPr id="16" name="Rectangle 15"/>
+          <p:cNvSpPr/>
+          <p:nvPr/>
+        </p:nvSpPr>
+        <p:spPr>
+          <a:xfrm>
+            <a:off x="457200" y="3044950"/>
+            <a:ext cx="11247120" cy="960120"/>
+          </a:xfrm>
+          <a:prstGeom prst="rect">
+            <a:avLst/>
+          </a:prstGeom>
+          <a:solidFill>
+            <a:srgbClr val="F5F5F5"/>
+          </a:solidFill>
+          <a:ln>
+            <a:solidFill>
+              <a:srgbClr val="0071DC"/>
+            </a:solidFill>
+          </a:ln>
+          <a:effectLst/>
+        </p:spPr>
+        <p:style>
+          <a:lnRef idx="1">
+            <a:schemeClr val="accent1"/>
+          </a:lnRef>
+          <a:fillRef idx="3">
+            <a:schemeClr val="accent1"/>
+          </a:fillRef>
+          <a:effectRef idx="2">
+            <a:schemeClr val="accent1"/>
+          </a:effectRef>
+          <a:fontRef idx="minor">
+            <a:schemeClr val="lt1"/>
+          </a:fontRef>
+        </p:style>
+        <p:txBody>
+          <a:bodyPr rtlCol="0" anchor="ctr"/>
+          <a:lstStyle/>
+          <a:p>
+            <a:pPr algn="ctr"/>
+          </a:p>
+        </p:txBody>
+      </p:sp>
+      <p:sp>
+        <p:nvSpPr>
+          <p:cNvPr id="17" name="Rectangle 16"/>
+          <p:cNvSpPr/>
+          <p:nvPr/>
+        </p:nvSpPr>
+        <p:spPr>
+          <a:xfrm>
+            <a:off x="457200" y="3044950"/>
+            <a:ext cx="822960" cy="960120"/>
+          </a:xfrm>
+          <a:prstGeom prst="rect">
+            <a:avLst/>
+          </a:prstGeom>
+          <a:solidFill>
+            <a:srgbClr val="0071DC"/>
+          </a:solidFill>
+          <a:ln>
+            <a:noFill/>
+          </a:ln>
+          <a:effectLst/>
+        </p:spPr>
+        <p:style>
+          <a:lnRef idx="1">
+            <a:schemeClr val="accent1"/>
+          </a:lnRef>
+          <a:fillRef idx="3">
+            <a:schemeClr val="accent1"/>
+          </a:fillRef>
+          <a:effectRef idx="2">
+            <a:schemeClr val="accent1"/>
+          </a:effectRef>
+          <a:fontRef idx="minor">
+            <a:schemeClr val="lt1"/>
+          </a:fontRef>
+        </p:style>
+        <p:txBody>
+          <a:bodyPr rtlCol="0" anchor="ctr"/>
+          <a:lstStyle/>
+          <a:p>
+            <a:pPr algn="ctr"/>
+          </a:p>
+        </p:txBody>
+      </p:sp>
+      <p:sp>
+        <p:nvSpPr>
+          <p:cNvPr id="18" name="TextBox 17"/>
+          <p:cNvSpPr txBox="1"/>
+          <p:nvPr/>
+        </p:nvSpPr>
+        <p:spPr>
+          <a:xfrm>
+            <a:off x="457200" y="3044950"/>
+            <a:ext cx="822960" cy="960120"/>
+          </a:xfrm>
+          <a:prstGeom prst="rect">
+            <a:avLst/>
+          </a:prstGeom>
+          <a:noFill/>
+        </p:spPr>
+        <p:txBody>
+          <a:bodyPr wrap="square" anchor="ctr">
+            <a:spAutoFit/>
+          </a:bodyPr>
+          <a:lstStyle/>
+          <a:p>
+            <a:pPr algn="ctr"/>
+            <a:r>
+              <a:rPr sz="2000" b="1">
+                <a:solidFill>
+                  <a:srgbClr val="FFFFFF"/>
+                </a:solidFill>
+              </a:rPr>
+              <a:t>C3</a:t>
+            </a:r>
+          </a:p>
+        </p:txBody>
+      </p:sp>
+      <p:sp>
+        <p:nvSpPr>
+          <p:cNvPr id="19" name="TextBox 18"/>
+          <p:cNvSpPr txBox="1"/>
+          <p:nvPr/>
+        </p:nvSpPr>
+        <p:spPr>
+          <a:xfrm>
+            <a:off x="1417320" y="3090670"/>
+            <a:ext cx="10058400" cy="320040"/>
+          </a:xfrm>
+          <a:prstGeom prst="rect">
+            <a:avLst/>
+          </a:prstGeom>
+          <a:noFill/>
+        </p:spPr>
+        <p:txBody>
+          <a:bodyPr wrap="square" anchor="t">
+            <a:spAutoFit/>
+          </a:bodyPr>
+          <a:lstStyle/>
+          <a:p>
+            <a:pPr algn="l"/>
+            <a:r>
+              <a:rPr sz="1300" b="1">
+                <a:solidFill>
+                  <a:srgbClr val="041E42"/>
+                </a:solidFill>
+              </a:rPr>
+              <a:t>Multi-pass vision technique on Gemma 3 4B</a:t>
+            </a:r>
+          </a:p>
+        </p:txBody>
+      </p:sp>
+      <p:sp>
+        <p:nvSpPr>
+          <p:cNvPr id="20" name="TextBox 19"/>
+          <p:cNvSpPr txBox="1"/>
+          <p:nvPr/>
+        </p:nvSpPr>
+        <p:spPr>
+          <a:xfrm>
+            <a:off x="1417320" y="3410710"/>
+            <a:ext cx="10058400" cy="594360"/>
+          </a:xfrm>
+          <a:prstGeom prst="rect">
+            <a:avLst/>
+          </a:prstGeom>
+          <a:noFill/>
+        </p:spPr>
+        <p:txBody>
+          <a:bodyPr wrap="square" anchor="t">
+            <a:spAutoFit/>
+          </a:bodyPr>
+          <a:lstStyle/>
+          <a:p>
+            <a:pPr algn="l"/>
+            <a:r>
+              <a:rPr sz="1100" b="0">
+                <a:solidFill>
+                  <a:srgbClr val="333333"/>
+                </a:solidFill>
+              </a:rPr>
+              <a:t>Hallucination 50 % → 0 %,  extraction 25 % → 75 %.  Adapts techniques from 5 recent VLM papers without vendor-blocked models.</a:t>
+            </a:r>
+          </a:p>
+        </p:txBody>
+      </p:sp>
+      <p:sp>
+        <p:nvSpPr>
+          <p:cNvPr id="21" name="Rectangle 20"/>
+          <p:cNvSpPr/>
+          <p:nvPr/>
+        </p:nvSpPr>
+        <p:spPr>
+          <a:xfrm>
+            <a:off x="457200" y="4087365"/>
+            <a:ext cx="11247120" cy="960120"/>
+          </a:xfrm>
+          <a:prstGeom prst="rect">
+            <a:avLst/>
+          </a:prstGeom>
+          <a:solidFill>
+            <a:srgbClr val="F5F5F5"/>
+          </a:solidFill>
+          <a:ln>
+            <a:solidFill>
+              <a:srgbClr val="0071DC"/>
+            </a:solidFill>
+          </a:ln>
+          <a:effectLst/>
+        </p:spPr>
+        <p:style>
+          <a:lnRef idx="1">
+            <a:schemeClr val="accent1"/>
+          </a:lnRef>
+          <a:fillRef idx="3">
+            <a:schemeClr val="accent1"/>
+          </a:fillRef>
+          <a:effectRef idx="2">
+            <a:schemeClr val="accent1"/>
+          </a:effectRef>
+          <a:fontRef idx="minor">
+            <a:schemeClr val="lt1"/>
+          </a:fontRef>
+        </p:style>
+        <p:txBody>
+          <a:bodyPr rtlCol="0" anchor="ctr"/>
+          <a:lstStyle/>
+          <a:p>
+            <a:pPr algn="ctr"/>
+          </a:p>
+        </p:txBody>
+      </p:sp>
+      <p:sp>
+        <p:nvSpPr>
+          <p:cNvPr id="22" name="Rectangle 21"/>
+          <p:cNvSpPr/>
+          <p:nvPr/>
+        </p:nvSpPr>
+        <p:spPr>
+          <a:xfrm>
+            <a:off x="457200" y="4087365"/>
+            <a:ext cx="822960" cy="960120"/>
+          </a:xfrm>
+          <a:prstGeom prst="rect">
+            <a:avLst/>
+          </a:prstGeom>
+          <a:solidFill>
+            <a:srgbClr val="0071DC"/>
+          </a:solidFill>
+          <a:ln>
+            <a:noFill/>
+          </a:ln>
+          <a:effectLst/>
+        </p:spPr>
+        <p:style>
+          <a:lnRef idx="1">
+            <a:schemeClr val="accent1"/>
+          </a:lnRef>
+          <a:fillRef idx="3">
+            <a:schemeClr val="accent1"/>
+          </a:fillRef>
+          <a:effectRef idx="2">
+            <a:schemeClr val="accent1"/>
+          </a:effectRef>
+          <a:fontRef idx="minor">
+            <a:schemeClr val="lt1"/>
+          </a:fontRef>
+        </p:style>
+        <p:txBody>
+          <a:bodyPr rtlCol="0" anchor="ctr"/>
+          <a:lstStyle/>
+          <a:p>
+            <a:pPr algn="ctr"/>
+          </a:p>
+        </p:txBody>
+      </p:sp>
+      <p:sp>
+        <p:nvSpPr>
+          <p:cNvPr id="23" name="TextBox 22"/>
+          <p:cNvSpPr txBox="1"/>
+          <p:nvPr/>
+        </p:nvSpPr>
+        <p:spPr>
+          <a:xfrm>
+            <a:off x="457200" y="4087365"/>
+            <a:ext cx="822960" cy="960120"/>
+          </a:xfrm>
+          <a:prstGeom prst="rect">
+            <a:avLst/>
+          </a:prstGeom>
+          <a:noFill/>
+        </p:spPr>
+        <p:txBody>
+          <a:bodyPr wrap="square" anchor="ctr">
+            <a:spAutoFit/>
+          </a:bodyPr>
+          <a:lstStyle/>
+          <a:p>
+            <a:pPr algn="ctr"/>
+            <a:r>
+              <a:rPr sz="2000" b="1">
+                <a:solidFill>
+                  <a:srgbClr val="FFFFFF"/>
+                </a:solidFill>
+              </a:rPr>
+              <a:t>C4</a:t>
+            </a:r>
+          </a:p>
+        </p:txBody>
+      </p:sp>
+      <p:sp>
+        <p:nvSpPr>
+          <p:cNvPr id="24" name="TextBox 23"/>
+          <p:cNvSpPr txBox="1"/>
+          <p:nvPr/>
+        </p:nvSpPr>
+        <p:spPr>
+          <a:xfrm>
+            <a:off x="1417320" y="4133085"/>
+            <a:ext cx="10058400" cy="320040"/>
+          </a:xfrm>
+          <a:prstGeom prst="rect">
+            <a:avLst/>
+          </a:prstGeom>
+          <a:noFill/>
+        </p:spPr>
+        <p:txBody>
+          <a:bodyPr wrap="square" anchor="t">
+            <a:spAutoFit/>
+          </a:bodyPr>
+          <a:lstStyle/>
+          <a:p>
+            <a:pPr algn="l"/>
+            <a:r>
+              <a:rPr sz="1300" b="1">
+                <a:solidFill>
+                  <a:srgbClr val="041E42"/>
+                </a:solidFill>
+              </a:rPr>
+              <a:t>Interpretable trust score + admission gate</a:t>
+            </a:r>
+          </a:p>
+        </p:txBody>
+      </p:sp>
+      <p:sp>
+        <p:nvSpPr>
+          <p:cNvPr id="25" name="TextBox 24"/>
+          <p:cNvSpPr txBox="1"/>
+          <p:nvPr/>
+        </p:nvSpPr>
+        <p:spPr>
+          <a:xfrm>
+            <a:off x="1417320" y="4453125"/>
+            <a:ext cx="10058400" cy="594360"/>
+          </a:xfrm>
+          <a:prstGeom prst="rect">
+            <a:avLst/>
+          </a:prstGeom>
+          <a:noFill/>
+        </p:spPr>
+        <p:txBody>
+          <a:bodyPr wrap="square" anchor="t">
+            <a:spAutoFit/>
+          </a:bodyPr>
+          <a:lstStyle/>
+          <a:p>
+            <a:pPr algn="l"/>
+            <a:r>
+              <a:rPr sz="1100" b="0">
+                <a:solidFill>
+                  <a:srgbClr val="333333"/>
+                </a:solidFill>
+              </a:rPr>
+              <a:t>trust × confidence gate flags rather than drops low-credibility posts.  Every constant traceable to English rationale in config.</a:t>
+            </a:r>
+          </a:p>
+        </p:txBody>
+      </p:sp>
+      <p:sp>
+        <p:nvSpPr>
+          <p:cNvPr id="26" name="Rectangle 25"/>
+          <p:cNvSpPr/>
+          <p:nvPr/>
+        </p:nvSpPr>
+        <p:spPr>
+          <a:xfrm>
+            <a:off x="457200" y="5129780"/>
+            <a:ext cx="11247120" cy="960120"/>
+          </a:xfrm>
+          <a:prstGeom prst="rect">
+            <a:avLst/>
+          </a:prstGeom>
+          <a:solidFill>
+            <a:srgbClr val="F5F5F5"/>
+          </a:solidFill>
+          <a:ln>
+            <a:solidFill>
+              <a:srgbClr val="0071DC"/>
+            </a:solidFill>
+          </a:ln>
+          <a:effectLst/>
+        </p:spPr>
+        <p:style>
+          <a:lnRef idx="1">
+            <a:schemeClr val="accent1"/>
+          </a:lnRef>
+          <a:fillRef idx="3">
+            <a:schemeClr val="accent1"/>
+          </a:fillRef>
+          <a:effectRef idx="2">
+            <a:schemeClr val="accent1"/>
+          </a:effectRef>
+          <a:fontRef idx="minor">
+            <a:schemeClr val="lt1"/>
+          </a:fontRef>
+        </p:style>
+        <p:txBody>
+          <a:bodyPr rtlCol="0" anchor="ctr"/>
+          <a:lstStyle/>
+          <a:p>
+            <a:pPr algn="ctr"/>
+          </a:p>
+        </p:txBody>
+      </p:sp>
+      <p:sp>
+        <p:nvSpPr>
+          <p:cNvPr id="27" name="Rectangle 26"/>
+          <p:cNvSpPr/>
+          <p:nvPr/>
+        </p:nvSpPr>
+        <p:spPr>
+          <a:xfrm>
+            <a:off x="457200" y="5129780"/>
+            <a:ext cx="822960" cy="960120"/>
+          </a:xfrm>
+          <a:prstGeom prst="rect">
+            <a:avLst/>
+          </a:prstGeom>
+          <a:solidFill>
+            <a:srgbClr val="0071DC"/>
+          </a:solidFill>
+          <a:ln>
+            <a:noFill/>
+          </a:ln>
+          <a:effectLst/>
+        </p:spPr>
+        <p:style>
+          <a:lnRef idx="1">
+            <a:schemeClr val="accent1"/>
+          </a:lnRef>
+          <a:fillRef idx="3">
+            <a:schemeClr val="accent1"/>
+          </a:fillRef>
+          <a:effectRef idx="2">
+            <a:schemeClr val="accent1"/>
+          </a:effectRef>
+          <a:fontRef idx="minor">
+            <a:schemeClr val="lt1"/>
+          </a:fontRef>
+        </p:style>
+        <p:txBody>
+          <a:bodyPr rtlCol="0" anchor="ctr"/>
+          <a:lstStyle/>
+          <a:p>
+            <a:pPr algn="ctr"/>
+          </a:p>
+        </p:txBody>
+      </p:sp>
+      <p:sp>
+        <p:nvSpPr>
+          <p:cNvPr id="28" name="TextBox 27"/>
+          <p:cNvSpPr txBox="1"/>
+          <p:nvPr/>
+        </p:nvSpPr>
+        <p:spPr>
+          <a:xfrm>
+            <a:off x="457200" y="5129780"/>
+            <a:ext cx="822960" cy="960120"/>
+          </a:xfrm>
+          <a:prstGeom prst="rect">
+            <a:avLst/>
+          </a:prstGeom>
+          <a:noFill/>
+        </p:spPr>
+        <p:txBody>
+          <a:bodyPr wrap="square" anchor="ctr">
+            <a:spAutoFit/>
+          </a:bodyPr>
+          <a:lstStyle/>
+          <a:p>
+            <a:pPr algn="ctr"/>
+            <a:r>
+              <a:rPr sz="2000" b="1">
+                <a:solidFill>
+                  <a:srgbClr val="FFFFFF"/>
+                </a:solidFill>
+              </a:rPr>
+              <a:t>C5</a:t>
+            </a:r>
+          </a:p>
+        </p:txBody>
+      </p:sp>
+      <p:sp>
+        <p:nvSpPr>
+          <p:cNvPr id="29" name="TextBox 28"/>
+          <p:cNvSpPr txBox="1"/>
+          <p:nvPr/>
+        </p:nvSpPr>
+        <p:spPr>
+          <a:xfrm>
+            <a:off x="1417320" y="5175500"/>
+            <a:ext cx="10058400" cy="320040"/>
+          </a:xfrm>
+          <a:prstGeom prst="rect">
+            <a:avLst/>
+          </a:prstGeom>
+          <a:noFill/>
+        </p:spPr>
+        <p:txBody>
+          <a:bodyPr wrap="square" anchor="t">
+            <a:spAutoFit/>
+          </a:bodyPr>
+          <a:lstStyle/>
+          <a:p>
+            <a:pPr algn="l"/>
+            <a:r>
+              <a:rPr sz="1300" b="1">
+                <a:solidFill>
+                  <a:srgbClr val="041E42"/>
+                </a:solidFill>
+              </a:rPr>
+              <a:t>HITL learning-loop dashboard</a:t>
+            </a:r>
+          </a:p>
+        </p:txBody>
+      </p:sp>
+      <p:sp>
+        <p:nvSpPr>
+          <p:cNvPr id="30" name="TextBox 29"/>
+          <p:cNvSpPr txBox="1"/>
+          <p:nvPr/>
+        </p:nvSpPr>
+        <p:spPr>
+          <a:xfrm>
+            <a:off x="1417320" y="5495540"/>
+            <a:ext cx="10058400" cy="594360"/>
+          </a:xfrm>
+          <a:prstGeom prst="rect">
+            <a:avLst/>
+          </a:prstGeom>
+          <a:noFill/>
+        </p:spPr>
+        <p:txBody>
+          <a:bodyPr wrap="square" anchor="t">
+            <a:spAutoFit/>
+          </a:bodyPr>
+          <a:lstStyle/>
+          <a:p>
+            <a:pPr algn="l"/>
+            <a:r>
+              <a:rPr sz="1100" b="0">
+                <a:solidFill>
+                  <a:srgbClr val="333333"/>
+                </a:solidFill>
+              </a:rPr>
+              <a:t>Review &amp; Validate, Lifecycle Kanban, Insights, Notification centre.  Corrections &amp; posted replies feed few-shot reply generation and future retraining.</a:t>
+            </a:r>
+          </a:p>
+        </p:txBody>
+      </p:sp>
+      <p:sp>
+        <p:nvSpPr>
+          <p:cNvPr id="31" name="TextBox 30"/>
+          <p:cNvSpPr txBox="1"/>
+          <p:nvPr/>
+        </p:nvSpPr>
+        <p:spPr>
+          <a:xfrm>
+            <a:off x="365760" y="6537960"/>
+            <a:ext cx="8229600" cy="274320"/>
+          </a:xfrm>
+          <a:prstGeom prst="rect">
+            <a:avLst/>
+          </a:prstGeom>
+          <a:noFill/>
+        </p:spPr>
+        <p:txBody>
+          <a:bodyPr wrap="square" anchor="t">
+            <a:spAutoFit/>
+          </a:bodyPr>
+          <a:lstStyle/>
+          <a:p>
+            <a:pPr algn="l"/>
+            <a:r>
+              <a:rPr sz="900" b="0">
+                <a:solidFill>
+                  <a:srgbClr val="666666"/>
+                </a:solidFill>
+              </a:rPr>
+              <a:t>Retail Sentiment Intelligence  ·  BITS ZG628T Dissertation  ·  Vishal Singh  ·  Post Mid-Semester Presentation</a:t>
+            </a:r>
+          </a:p>
+        </p:txBody>
+      </p:sp>
+      <p:sp>
+        <p:nvSpPr>
+          <p:cNvPr id="32" name="TextBox 31"/>
+          <p:cNvSpPr txBox="1"/>
+          <p:nvPr/>
+        </p:nvSpPr>
+        <p:spPr>
+          <a:xfrm>
+            <a:off x="10972800" y="6537960"/>
+            <a:ext cx="1097280" cy="274320"/>
+          </a:xfrm>
+          <a:prstGeom prst="rect">
+            <a:avLst/>
+          </a:prstGeom>
+          <a:noFill/>
+        </p:spPr>
+        <p:txBody>
+          <a:bodyPr wrap="square" anchor="t">
+            <a:spAutoFit/>
+          </a:bodyPr>
+          <a:lstStyle/>
+          <a:p>
+            <a:pPr algn="r"/>
+            <a:r>
+              <a:rPr sz="900" b="0">
+                <a:solidFill>
+                  <a:srgbClr val="666666"/>
+                </a:solidFill>
+              </a:rPr>
+              <a:t>17 / 22</a:t>
             </a:r>
           </a:p>
         </p:txBody>
@@ -12928,7 +12940,7 @@
                   <a:srgbClr val="FFFFFF"/>
                 </a:solidFill>
               </a:rPr>
-              <a:t>Principal Contributions</a:t>
+              <a:t>Live Demo  —  Dashboard Walkthrough</a:t>
             </a:r>
           </a:p>
         </p:txBody>
@@ -12962,7 +12974,7 @@
                   <a:srgbClr val="E8F4FD"/>
                 </a:solidFill>
               </a:rPr>
-              <a:t>What this dissertation delivered — end to end</a:t>
+              <a:t>One post → alert → review → reply → lifecycle → resolved</a:t>
             </a:r>
           </a:p>
         </p:txBody>
@@ -13011,130 +13023,88 @@
           </a:p>
         </p:txBody>
       </p:sp>
-      <p:sp>
-        <p:nvSpPr>
-          <p:cNvPr id="6" name="Rectangle 5"/>
-          <p:cNvSpPr/>
-          <p:nvPr/>
-        </p:nvSpPr>
-        <p:spPr>
-          <a:xfrm>
-            <a:off x="457200" y="960120"/>
-            <a:ext cx="11247120" cy="960120"/>
-          </a:xfrm>
-          <a:prstGeom prst="rect">
-            <a:avLst/>
-          </a:prstGeom>
-          <a:solidFill>
-            <a:srgbClr val="F5F5F5"/>
-          </a:solidFill>
-          <a:ln>
-            <a:solidFill>
-              <a:srgbClr val="0071DC"/>
-            </a:solidFill>
-          </a:ln>
-          <a:effectLst/>
-        </p:spPr>
-        <p:style>
-          <a:lnRef idx="1">
-            <a:schemeClr val="accent1"/>
-          </a:lnRef>
-          <a:fillRef idx="3">
-            <a:schemeClr val="accent1"/>
-          </a:fillRef>
-          <a:effectRef idx="2">
-            <a:schemeClr val="accent1"/>
-          </a:effectRef>
-          <a:fontRef idx="minor">
-            <a:schemeClr val="lt1"/>
-          </a:fontRef>
-        </p:style>
-        <p:txBody>
-          <a:bodyPr rtlCol="0" anchor="ctr"/>
-          <a:lstStyle/>
-          <a:p>
-            <a:pPr algn="ctr"/>
-          </a:p>
-        </p:txBody>
-      </p:sp>
-      <p:sp>
-        <p:nvSpPr>
-          <p:cNvPr id="7" name="Rectangle 6"/>
-          <p:cNvSpPr/>
-          <p:nvPr/>
-        </p:nvSpPr>
-        <p:spPr>
-          <a:xfrm>
-            <a:off x="457200" y="960120"/>
-            <a:ext cx="822960" cy="960120"/>
-          </a:xfrm>
-          <a:prstGeom prst="rect">
-            <a:avLst/>
-          </a:prstGeom>
-          <a:solidFill>
-            <a:srgbClr val="0071DC"/>
-          </a:solidFill>
-          <a:ln>
-            <a:noFill/>
-          </a:ln>
-          <a:effectLst/>
-        </p:spPr>
-        <p:style>
-          <a:lnRef idx="1">
-            <a:schemeClr val="accent1"/>
-          </a:lnRef>
-          <a:fillRef idx="3">
-            <a:schemeClr val="accent1"/>
-          </a:fillRef>
-          <a:effectRef idx="2">
-            <a:schemeClr val="accent1"/>
-          </a:effectRef>
-          <a:fontRef idx="minor">
-            <a:schemeClr val="lt1"/>
-          </a:fontRef>
-        </p:style>
-        <p:txBody>
-          <a:bodyPr rtlCol="0" anchor="ctr"/>
-          <a:lstStyle/>
-          <a:p>
-            <a:pPr algn="ctr"/>
-          </a:p>
-        </p:txBody>
-      </p:sp>
-      <p:sp>
-        <p:nvSpPr>
-          <p:cNvPr id="8" name="TextBox 7"/>
-          <p:cNvSpPr txBox="1"/>
-          <p:nvPr/>
-        </p:nvSpPr>
-        <p:spPr>
-          <a:xfrm>
-            <a:off x="457200" y="960120"/>
-            <a:ext cx="822960" cy="960120"/>
-          </a:xfrm>
-          <a:prstGeom prst="rect">
-            <a:avLst/>
-          </a:prstGeom>
-          <a:noFill/>
-        </p:spPr>
-        <p:txBody>
-          <a:bodyPr wrap="square" anchor="ctr">
-            <a:spAutoFit/>
-          </a:bodyPr>
-          <a:lstStyle/>
-          <a:p>
-            <a:pPr algn="ctr"/>
-            <a:r>
-              <a:rPr sz="2000" b="1">
-                <a:solidFill>
-                  <a:srgbClr val="FFFFFF"/>
-                </a:solidFill>
-              </a:rPr>
-              <a:t>C1</a:t>
-            </a:r>
-          </a:p>
-        </p:txBody>
-      </p:sp>
+      <p:pic>
+        <p:nvPicPr>
+          <p:cNvPr id="6" name="Picture 5" descr="brand_health.png"/>
+          <p:cNvPicPr>
+            <a:picLocks noChangeAspect="1"/>
+          </p:cNvPicPr>
+          <p:nvPr/>
+        </p:nvPicPr>
+        <p:blipFill>
+          <a:blip r:embed="rId2"/>
+          <a:stretch>
+            <a:fillRect/>
+          </a:stretch>
+        </p:blipFill>
+        <p:spPr>
+          <a:xfrm>
+            <a:off x="320040" y="960120"/>
+            <a:ext cx="3794760" cy="2331720"/>
+          </a:xfrm>
+          <a:prstGeom prst="rect">
+            <a:avLst/>
+          </a:prstGeom>
+        </p:spPr>
+      </p:pic>
+      <p:sp>
+        <p:nvSpPr>
+          <p:cNvPr id="7" name="TextBox 6"/>
+          <p:cNvSpPr txBox="1"/>
+          <p:nvPr/>
+        </p:nvSpPr>
+        <p:spPr>
+          <a:xfrm>
+            <a:off x="320040" y="3310128"/>
+            <a:ext cx="3794760" cy="228600"/>
+          </a:xfrm>
+          <a:prstGeom prst="rect">
+            <a:avLst/>
+          </a:prstGeom>
+          <a:noFill/>
+        </p:spPr>
+        <p:txBody>
+          <a:bodyPr wrap="square" anchor="t">
+            <a:spAutoFit/>
+          </a:bodyPr>
+          <a:lstStyle/>
+          <a:p>
+            <a:pPr algn="ctr"/>
+            <a:r>
+              <a:rPr sz="1100" b="1">
+                <a:solidFill>
+                  <a:srgbClr val="041E42"/>
+                </a:solidFill>
+              </a:rPr>
+              <a:t>Brand Health</a:t>
+            </a:r>
+          </a:p>
+        </p:txBody>
+      </p:sp>
+      <p:pic>
+        <p:nvPicPr>
+          <p:cNvPr id="8" name="Picture 7" descr="alert_feed.png"/>
+          <p:cNvPicPr>
+            <a:picLocks noChangeAspect="1"/>
+          </p:cNvPicPr>
+          <p:nvPr/>
+        </p:nvPicPr>
+        <p:blipFill>
+          <a:blip r:embed="rId3"/>
+          <a:stretch>
+            <a:fillRect/>
+          </a:stretch>
+        </p:blipFill>
+        <p:spPr>
+          <a:xfrm>
+            <a:off x="4206240" y="960120"/>
+            <a:ext cx="3794760" cy="2331720"/>
+          </a:xfrm>
+          <a:prstGeom prst="rect">
+            <a:avLst/>
+          </a:prstGeom>
+        </p:spPr>
+      </p:pic>
       <p:sp>
         <p:nvSpPr>
           <p:cNvPr id="9" name="TextBox 8"/>
@@ -13143,8 +13113,8 @@
         </p:nvSpPr>
         <p:spPr>
           <a:xfrm>
-            <a:off x="1417320" y="1005840"/>
-            <a:ext cx="10058400" cy="320040"/>
+            <a:off x="4206240" y="3310128"/>
+            <a:ext cx="3794760" cy="228600"/>
           </a:xfrm>
           <a:prstGeom prst="rect">
             <a:avLst/>
@@ -13157,28 +13127,52 @@
           </a:bodyPr>
           <a:lstStyle/>
           <a:p>
-            <a:pPr algn="l"/>
-            <a:r>
-              <a:rPr sz="1300" b="1">
+            <a:pPr algn="ctr"/>
+            <a:r>
+              <a:rPr sz="1100" b="1">
                 <a:solidFill>
                   <a:srgbClr val="041E42"/>
                 </a:solidFill>
               </a:rPr>
-              <a:t>Offline-first RSI pipeline</a:t>
-            </a:r>
-          </a:p>
-        </p:txBody>
-      </p:sp>
-      <p:sp>
-        <p:nvSpPr>
-          <p:cNvPr id="10" name="TextBox 9"/>
-          <p:cNvSpPr txBox="1"/>
-          <p:nvPr/>
-        </p:nvSpPr>
-        <p:spPr>
-          <a:xfrm>
-            <a:off x="1417320" y="1325880"/>
-            <a:ext cx="10058400" cy="594360"/>
+              <a:t>Alert Feed</a:t>
+            </a:r>
+          </a:p>
+        </p:txBody>
+      </p:sp>
+      <p:pic>
+        <p:nvPicPr>
+          <p:cNvPr id="10" name="Picture 9" descr="post_explorer.png"/>
+          <p:cNvPicPr>
+            <a:picLocks noChangeAspect="1"/>
+          </p:cNvPicPr>
+          <p:nvPr/>
+        </p:nvPicPr>
+        <p:blipFill>
+          <a:blip r:embed="rId4"/>
+          <a:stretch>
+            <a:fillRect/>
+          </a:stretch>
+        </p:blipFill>
+        <p:spPr>
+          <a:xfrm>
+            <a:off x="8092440" y="960120"/>
+            <a:ext cx="3794760" cy="2331720"/>
+          </a:xfrm>
+          <a:prstGeom prst="rect">
+            <a:avLst/>
+          </a:prstGeom>
+        </p:spPr>
+      </p:pic>
+      <p:sp>
+        <p:nvSpPr>
+          <p:cNvPr id="11" name="TextBox 10"/>
+          <p:cNvSpPr txBox="1"/>
+          <p:nvPr/>
+        </p:nvSpPr>
+        <p:spPr>
+          <a:xfrm>
+            <a:off x="8092440" y="3310128"/>
+            <a:ext cx="3794760" cy="228600"/>
           </a:xfrm>
           <a:prstGeom prst="rect">
             <a:avLst/>
@@ -13191,108 +13185,42 @@
           </a:bodyPr>
           <a:lstStyle/>
           <a:p>
-            <a:pPr algn="l"/>
-            <a:r>
-              <a:rPr sz="1100" b="0">
-                <a:solidFill>
-                  <a:srgbClr val="333333"/>
-                </a:solidFill>
-              </a:rPr>
-              <a:t>Ingestion → trust → sentiment → aspects → vision → aggregation → alerts → dashboard.  Zero API cost, modular, deployable to Azure.</a:t>
-            </a:r>
-          </a:p>
-        </p:txBody>
-      </p:sp>
-      <p:sp>
-        <p:nvSpPr>
-          <p:cNvPr id="11" name="Rectangle 10"/>
-          <p:cNvSpPr/>
-          <p:nvPr/>
-        </p:nvSpPr>
-        <p:spPr>
-          <a:xfrm>
-            <a:off x="457200" y="2002535"/>
-            <a:ext cx="11247120" cy="960120"/>
-          </a:xfrm>
-          <a:prstGeom prst="rect">
-            <a:avLst/>
-          </a:prstGeom>
-          <a:solidFill>
-            <a:srgbClr val="F5F5F5"/>
-          </a:solidFill>
-          <a:ln>
-            <a:solidFill>
-              <a:srgbClr val="0071DC"/>
-            </a:solidFill>
-          </a:ln>
-          <a:effectLst/>
-        </p:spPr>
-        <p:style>
-          <a:lnRef idx="1">
-            <a:schemeClr val="accent1"/>
-          </a:lnRef>
-          <a:fillRef idx="3">
-            <a:schemeClr val="accent1"/>
-          </a:fillRef>
-          <a:effectRef idx="2">
-            <a:schemeClr val="accent1"/>
-          </a:effectRef>
-          <a:fontRef idx="minor">
-            <a:schemeClr val="lt1"/>
-          </a:fontRef>
-        </p:style>
-        <p:txBody>
-          <a:bodyPr rtlCol="0" anchor="ctr"/>
-          <a:lstStyle/>
-          <a:p>
-            <a:pPr algn="ctr"/>
-          </a:p>
-        </p:txBody>
-      </p:sp>
-      <p:sp>
-        <p:nvSpPr>
-          <p:cNvPr id="12" name="Rectangle 11"/>
-          <p:cNvSpPr/>
-          <p:nvPr/>
-        </p:nvSpPr>
-        <p:spPr>
-          <a:xfrm>
-            <a:off x="457200" y="2002535"/>
-            <a:ext cx="822960" cy="960120"/>
-          </a:xfrm>
-          <a:prstGeom prst="rect">
-            <a:avLst/>
-          </a:prstGeom>
-          <a:solidFill>
-            <a:srgbClr val="0071DC"/>
-          </a:solidFill>
-          <a:ln>
-            <a:noFill/>
-          </a:ln>
-          <a:effectLst/>
-        </p:spPr>
-        <p:style>
-          <a:lnRef idx="1">
-            <a:schemeClr val="accent1"/>
-          </a:lnRef>
-          <a:fillRef idx="3">
-            <a:schemeClr val="accent1"/>
-          </a:fillRef>
-          <a:effectRef idx="2">
-            <a:schemeClr val="accent1"/>
-          </a:effectRef>
-          <a:fontRef idx="minor">
-            <a:schemeClr val="lt1"/>
-          </a:fontRef>
-        </p:style>
-        <p:txBody>
-          <a:bodyPr rtlCol="0" anchor="ctr"/>
-          <a:lstStyle/>
-          <a:p>
-            <a:pPr algn="ctr"/>
-          </a:p>
-        </p:txBody>
-      </p:sp>
+            <a:pPr algn="ctr"/>
+            <a:r>
+              <a:rPr sz="1100" b="1">
+                <a:solidFill>
+                  <a:srgbClr val="041E42"/>
+                </a:solidFill>
+              </a:rPr>
+              <a:t>Post Explorer</a:t>
+            </a:r>
+          </a:p>
+        </p:txBody>
+      </p:sp>
+      <p:pic>
+        <p:nvPicPr>
+          <p:cNvPr id="12" name="Picture 11" descr="review_validate.png"/>
+          <p:cNvPicPr>
+            <a:picLocks noChangeAspect="1"/>
+          </p:cNvPicPr>
+          <p:nvPr/>
+        </p:nvPicPr>
+        <p:blipFill>
+          <a:blip r:embed="rId5"/>
+          <a:stretch>
+            <a:fillRect/>
+          </a:stretch>
+        </p:blipFill>
+        <p:spPr>
+          <a:xfrm>
+            <a:off x="320040" y="3566160"/>
+            <a:ext cx="3794760" cy="2331720"/>
+          </a:xfrm>
+          <a:prstGeom prst="rect">
+            <a:avLst/>
+          </a:prstGeom>
+        </p:spPr>
+      </p:pic>
       <p:sp>
         <p:nvSpPr>
           <p:cNvPr id="13" name="TextBox 12"/>
@@ -13301,42 +13229,8 @@
         </p:nvSpPr>
         <p:spPr>
           <a:xfrm>
-            <a:off x="457200" y="2002535"/>
-            <a:ext cx="822960" cy="960120"/>
-          </a:xfrm>
-          <a:prstGeom prst="rect">
-            <a:avLst/>
-          </a:prstGeom>
-          <a:noFill/>
-        </p:spPr>
-        <p:txBody>
-          <a:bodyPr wrap="square" anchor="ctr">
-            <a:spAutoFit/>
-          </a:bodyPr>
-          <a:lstStyle/>
-          <a:p>
-            <a:pPr algn="ctr"/>
-            <a:r>
-              <a:rPr sz="2000" b="1">
-                <a:solidFill>
-                  <a:srgbClr val="FFFFFF"/>
-                </a:solidFill>
-              </a:rPr>
-              <a:t>C2</a:t>
-            </a:r>
-          </a:p>
-        </p:txBody>
-      </p:sp>
-      <p:sp>
-        <p:nvSpPr>
-          <p:cNvPr id="14" name="TextBox 13"/>
-          <p:cNvSpPr txBox="1"/>
-          <p:nvPr/>
-        </p:nvSpPr>
-        <p:spPr>
-          <a:xfrm>
-            <a:off x="1417320" y="2048255"/>
-            <a:ext cx="10058400" cy="320040"/>
+            <a:off x="320040" y="5916168"/>
+            <a:ext cx="3794760" cy="228600"/>
           </a:xfrm>
           <a:prstGeom prst="rect">
             <a:avLst/>
@@ -13349,18 +13243,42 @@
           </a:bodyPr>
           <a:lstStyle/>
           <a:p>
-            <a:pPr algn="l"/>
-            <a:r>
-              <a:rPr sz="1300" b="1">
+            <a:pPr algn="ctr"/>
+            <a:r>
+              <a:rPr sz="1100" b="1">
                 <a:solidFill>
                   <a:srgbClr val="041E42"/>
                 </a:solidFill>
               </a:rPr>
-              <a:t>Fine-tuned ModernBERT (3-stage curriculum)</a:t>
-            </a:r>
-          </a:p>
-        </p:txBody>
-      </p:sp>
+              <a:t>Review &amp; Validate</a:t>
+            </a:r>
+          </a:p>
+        </p:txBody>
+      </p:sp>
+      <p:pic>
+        <p:nvPicPr>
+          <p:cNvPr id="14" name="Picture 13" descr="lifecycle_kanban.png"/>
+          <p:cNvPicPr>
+            <a:picLocks noChangeAspect="1"/>
+          </p:cNvPicPr>
+          <p:nvPr/>
+        </p:nvPicPr>
+        <p:blipFill>
+          <a:blip r:embed="rId6"/>
+          <a:stretch>
+            <a:fillRect/>
+          </a:stretch>
+        </p:blipFill>
+        <p:spPr>
+          <a:xfrm>
+            <a:off x="4206240" y="3566160"/>
+            <a:ext cx="3794760" cy="2331720"/>
+          </a:xfrm>
+          <a:prstGeom prst="rect">
+            <a:avLst/>
+          </a:prstGeom>
+        </p:spPr>
+      </p:pic>
       <p:sp>
         <p:nvSpPr>
           <p:cNvPr id="15" name="TextBox 14"/>
@@ -13369,8 +13287,8 @@
         </p:nvSpPr>
         <p:spPr>
           <a:xfrm>
-            <a:off x="1417320" y="2368295"/>
-            <a:ext cx="10058400" cy="594360"/>
+            <a:off x="4206240" y="5916168"/>
+            <a:ext cx="3794760" cy="228600"/>
           </a:xfrm>
           <a:prstGeom prst="rect">
             <a:avLst/>
@@ -13383,597 +13301,79 @@
           </a:bodyPr>
           <a:lstStyle/>
           <a:p>
-            <a:pPr algn="l"/>
-            <a:r>
-              <a:rPr sz="1100" b="0">
-                <a:solidFill>
-                  <a:srgbClr val="333333"/>
-                </a:solidFill>
-              </a:rPr>
-              <a:t>Macro-F1 0.6272 → 0.7642 overall; 0.28 → 1.00 on long posts.  5-fold OOF cross-validation, offline training.</a:t>
-            </a:r>
-          </a:p>
-        </p:txBody>
-      </p:sp>
-      <p:sp>
-        <p:nvSpPr>
-          <p:cNvPr id="16" name="Rectangle 15"/>
-          <p:cNvSpPr/>
-          <p:nvPr/>
-        </p:nvSpPr>
-        <p:spPr>
-          <a:xfrm>
-            <a:off x="457200" y="3044950"/>
-            <a:ext cx="11247120" cy="960120"/>
-          </a:xfrm>
-          <a:prstGeom prst="rect">
-            <a:avLst/>
-          </a:prstGeom>
-          <a:solidFill>
-            <a:srgbClr val="F5F5F5"/>
-          </a:solidFill>
-          <a:ln>
-            <a:solidFill>
-              <a:srgbClr val="0071DC"/>
-            </a:solidFill>
-          </a:ln>
-          <a:effectLst/>
-        </p:spPr>
-        <p:style>
-          <a:lnRef idx="1">
-            <a:schemeClr val="accent1"/>
-          </a:lnRef>
-          <a:fillRef idx="3">
-            <a:schemeClr val="accent1"/>
-          </a:fillRef>
-          <a:effectRef idx="2">
-            <a:schemeClr val="accent1"/>
-          </a:effectRef>
-          <a:fontRef idx="minor">
-            <a:schemeClr val="lt1"/>
-          </a:fontRef>
-        </p:style>
-        <p:txBody>
-          <a:bodyPr rtlCol="0" anchor="ctr"/>
-          <a:lstStyle/>
-          <a:p>
-            <a:pPr algn="ctr"/>
-          </a:p>
-        </p:txBody>
-      </p:sp>
-      <p:sp>
-        <p:nvSpPr>
-          <p:cNvPr id="17" name="Rectangle 16"/>
-          <p:cNvSpPr/>
-          <p:nvPr/>
-        </p:nvSpPr>
-        <p:spPr>
-          <a:xfrm>
-            <a:off x="457200" y="3044950"/>
-            <a:ext cx="822960" cy="960120"/>
-          </a:xfrm>
-          <a:prstGeom prst="rect">
-            <a:avLst/>
-          </a:prstGeom>
-          <a:solidFill>
-            <a:srgbClr val="0071DC"/>
-          </a:solidFill>
-          <a:ln>
-            <a:noFill/>
-          </a:ln>
-          <a:effectLst/>
-        </p:spPr>
-        <p:style>
-          <a:lnRef idx="1">
-            <a:schemeClr val="accent1"/>
-          </a:lnRef>
-          <a:fillRef idx="3">
-            <a:schemeClr val="accent1"/>
-          </a:fillRef>
-          <a:effectRef idx="2">
-            <a:schemeClr val="accent1"/>
-          </a:effectRef>
-          <a:fontRef idx="minor">
-            <a:schemeClr val="lt1"/>
-          </a:fontRef>
-        </p:style>
-        <p:txBody>
-          <a:bodyPr rtlCol="0" anchor="ctr"/>
-          <a:lstStyle/>
-          <a:p>
-            <a:pPr algn="ctr"/>
+            <a:pPr algn="ctr"/>
+            <a:r>
+              <a:rPr sz="1100" b="1">
+                <a:solidFill>
+                  <a:srgbClr val="041E42"/>
+                </a:solidFill>
+              </a:rPr>
+              <a:t>Lifecycle Kanban</a:t>
+            </a:r>
+          </a:p>
+        </p:txBody>
+      </p:sp>
+      <p:pic>
+        <p:nvPicPr>
+          <p:cNvPr id="16" name="Picture 15" descr="insights_competitor.png"/>
+          <p:cNvPicPr>
+            <a:picLocks noChangeAspect="1"/>
+          </p:cNvPicPr>
+          <p:nvPr/>
+        </p:nvPicPr>
+        <p:blipFill>
+          <a:blip r:embed="rId7"/>
+          <a:stretch>
+            <a:fillRect/>
+          </a:stretch>
+        </p:blipFill>
+        <p:spPr>
+          <a:xfrm>
+            <a:off x="8092440" y="3566160"/>
+            <a:ext cx="3794760" cy="2331720"/>
+          </a:xfrm>
+          <a:prstGeom prst="rect">
+            <a:avLst/>
+          </a:prstGeom>
+        </p:spPr>
+      </p:pic>
+      <p:sp>
+        <p:nvSpPr>
+          <p:cNvPr id="17" name="TextBox 16"/>
+          <p:cNvSpPr txBox="1"/>
+          <p:nvPr/>
+        </p:nvSpPr>
+        <p:spPr>
+          <a:xfrm>
+            <a:off x="8092440" y="5916168"/>
+            <a:ext cx="3794760" cy="228600"/>
+          </a:xfrm>
+          <a:prstGeom prst="rect">
+            <a:avLst/>
+          </a:prstGeom>
+          <a:noFill/>
+        </p:spPr>
+        <p:txBody>
+          <a:bodyPr wrap="square" anchor="t">
+            <a:spAutoFit/>
+          </a:bodyPr>
+          <a:lstStyle/>
+          <a:p>
+            <a:pPr algn="ctr"/>
+            <a:r>
+              <a:rPr sz="1100" b="1">
+                <a:solidFill>
+                  <a:srgbClr val="041E42"/>
+                </a:solidFill>
+              </a:rPr>
+              <a:t>Insights</a:t>
+            </a:r>
           </a:p>
         </p:txBody>
       </p:sp>
       <p:sp>
         <p:nvSpPr>
           <p:cNvPr id="18" name="TextBox 17"/>
-          <p:cNvSpPr txBox="1"/>
-          <p:nvPr/>
-        </p:nvSpPr>
-        <p:spPr>
-          <a:xfrm>
-            <a:off x="457200" y="3044950"/>
-            <a:ext cx="822960" cy="960120"/>
-          </a:xfrm>
-          <a:prstGeom prst="rect">
-            <a:avLst/>
-          </a:prstGeom>
-          <a:noFill/>
-        </p:spPr>
-        <p:txBody>
-          <a:bodyPr wrap="square" anchor="ctr">
-            <a:spAutoFit/>
-          </a:bodyPr>
-          <a:lstStyle/>
-          <a:p>
-            <a:pPr algn="ctr"/>
-            <a:r>
-              <a:rPr sz="2000" b="1">
-                <a:solidFill>
-                  <a:srgbClr val="FFFFFF"/>
-                </a:solidFill>
-              </a:rPr>
-              <a:t>C3</a:t>
-            </a:r>
-          </a:p>
-        </p:txBody>
-      </p:sp>
-      <p:sp>
-        <p:nvSpPr>
-          <p:cNvPr id="19" name="TextBox 18"/>
-          <p:cNvSpPr txBox="1"/>
-          <p:nvPr/>
-        </p:nvSpPr>
-        <p:spPr>
-          <a:xfrm>
-            <a:off x="1417320" y="3090670"/>
-            <a:ext cx="10058400" cy="320040"/>
-          </a:xfrm>
-          <a:prstGeom prst="rect">
-            <a:avLst/>
-          </a:prstGeom>
-          <a:noFill/>
-        </p:spPr>
-        <p:txBody>
-          <a:bodyPr wrap="square" anchor="t">
-            <a:spAutoFit/>
-          </a:bodyPr>
-          <a:lstStyle/>
-          <a:p>
-            <a:pPr algn="l"/>
-            <a:r>
-              <a:rPr sz="1300" b="1">
-                <a:solidFill>
-                  <a:srgbClr val="041E42"/>
-                </a:solidFill>
-              </a:rPr>
-              <a:t>Multi-pass vision technique on Gemma 3 4B</a:t>
-            </a:r>
-          </a:p>
-        </p:txBody>
-      </p:sp>
-      <p:sp>
-        <p:nvSpPr>
-          <p:cNvPr id="20" name="TextBox 19"/>
-          <p:cNvSpPr txBox="1"/>
-          <p:nvPr/>
-        </p:nvSpPr>
-        <p:spPr>
-          <a:xfrm>
-            <a:off x="1417320" y="3410710"/>
-            <a:ext cx="10058400" cy="594360"/>
-          </a:xfrm>
-          <a:prstGeom prst="rect">
-            <a:avLst/>
-          </a:prstGeom>
-          <a:noFill/>
-        </p:spPr>
-        <p:txBody>
-          <a:bodyPr wrap="square" anchor="t">
-            <a:spAutoFit/>
-          </a:bodyPr>
-          <a:lstStyle/>
-          <a:p>
-            <a:pPr algn="l"/>
-            <a:r>
-              <a:rPr sz="1100" b="0">
-                <a:solidFill>
-                  <a:srgbClr val="333333"/>
-                </a:solidFill>
-              </a:rPr>
-              <a:t>Hallucination 50 % → 0 %,  extraction 25 % → 75 %.  Adapts techniques from 5 recent VLM papers without vendor-blocked models.</a:t>
-            </a:r>
-          </a:p>
-        </p:txBody>
-      </p:sp>
-      <p:sp>
-        <p:nvSpPr>
-          <p:cNvPr id="21" name="Rectangle 20"/>
-          <p:cNvSpPr/>
-          <p:nvPr/>
-        </p:nvSpPr>
-        <p:spPr>
-          <a:xfrm>
-            <a:off x="457200" y="4087365"/>
-            <a:ext cx="11247120" cy="960120"/>
-          </a:xfrm>
-          <a:prstGeom prst="rect">
-            <a:avLst/>
-          </a:prstGeom>
-          <a:solidFill>
-            <a:srgbClr val="F5F5F5"/>
-          </a:solidFill>
-          <a:ln>
-            <a:solidFill>
-              <a:srgbClr val="0071DC"/>
-            </a:solidFill>
-          </a:ln>
-          <a:effectLst/>
-        </p:spPr>
-        <p:style>
-          <a:lnRef idx="1">
-            <a:schemeClr val="accent1"/>
-          </a:lnRef>
-          <a:fillRef idx="3">
-            <a:schemeClr val="accent1"/>
-          </a:fillRef>
-          <a:effectRef idx="2">
-            <a:schemeClr val="accent1"/>
-          </a:effectRef>
-          <a:fontRef idx="minor">
-            <a:schemeClr val="lt1"/>
-          </a:fontRef>
-        </p:style>
-        <p:txBody>
-          <a:bodyPr rtlCol="0" anchor="ctr"/>
-          <a:lstStyle/>
-          <a:p>
-            <a:pPr algn="ctr"/>
-          </a:p>
-        </p:txBody>
-      </p:sp>
-      <p:sp>
-        <p:nvSpPr>
-          <p:cNvPr id="22" name="Rectangle 21"/>
-          <p:cNvSpPr/>
-          <p:nvPr/>
-        </p:nvSpPr>
-        <p:spPr>
-          <a:xfrm>
-            <a:off x="457200" y="4087365"/>
-            <a:ext cx="822960" cy="960120"/>
-          </a:xfrm>
-          <a:prstGeom prst="rect">
-            <a:avLst/>
-          </a:prstGeom>
-          <a:solidFill>
-            <a:srgbClr val="0071DC"/>
-          </a:solidFill>
-          <a:ln>
-            <a:noFill/>
-          </a:ln>
-          <a:effectLst/>
-        </p:spPr>
-        <p:style>
-          <a:lnRef idx="1">
-            <a:schemeClr val="accent1"/>
-          </a:lnRef>
-          <a:fillRef idx="3">
-            <a:schemeClr val="accent1"/>
-          </a:fillRef>
-          <a:effectRef idx="2">
-            <a:schemeClr val="accent1"/>
-          </a:effectRef>
-          <a:fontRef idx="minor">
-            <a:schemeClr val="lt1"/>
-          </a:fontRef>
-        </p:style>
-        <p:txBody>
-          <a:bodyPr rtlCol="0" anchor="ctr"/>
-          <a:lstStyle/>
-          <a:p>
-            <a:pPr algn="ctr"/>
-          </a:p>
-        </p:txBody>
-      </p:sp>
-      <p:sp>
-        <p:nvSpPr>
-          <p:cNvPr id="23" name="TextBox 22"/>
-          <p:cNvSpPr txBox="1"/>
-          <p:nvPr/>
-        </p:nvSpPr>
-        <p:spPr>
-          <a:xfrm>
-            <a:off x="457200" y="4087365"/>
-            <a:ext cx="822960" cy="960120"/>
-          </a:xfrm>
-          <a:prstGeom prst="rect">
-            <a:avLst/>
-          </a:prstGeom>
-          <a:noFill/>
-        </p:spPr>
-        <p:txBody>
-          <a:bodyPr wrap="square" anchor="ctr">
-            <a:spAutoFit/>
-          </a:bodyPr>
-          <a:lstStyle/>
-          <a:p>
-            <a:pPr algn="ctr"/>
-            <a:r>
-              <a:rPr sz="2000" b="1">
-                <a:solidFill>
-                  <a:srgbClr val="FFFFFF"/>
-                </a:solidFill>
-              </a:rPr>
-              <a:t>C4</a:t>
-            </a:r>
-          </a:p>
-        </p:txBody>
-      </p:sp>
-      <p:sp>
-        <p:nvSpPr>
-          <p:cNvPr id="24" name="TextBox 23"/>
-          <p:cNvSpPr txBox="1"/>
-          <p:nvPr/>
-        </p:nvSpPr>
-        <p:spPr>
-          <a:xfrm>
-            <a:off x="1417320" y="4133085"/>
-            <a:ext cx="10058400" cy="320040"/>
-          </a:xfrm>
-          <a:prstGeom prst="rect">
-            <a:avLst/>
-          </a:prstGeom>
-          <a:noFill/>
-        </p:spPr>
-        <p:txBody>
-          <a:bodyPr wrap="square" anchor="t">
-            <a:spAutoFit/>
-          </a:bodyPr>
-          <a:lstStyle/>
-          <a:p>
-            <a:pPr algn="l"/>
-            <a:r>
-              <a:rPr sz="1300" b="1">
-                <a:solidFill>
-                  <a:srgbClr val="041E42"/>
-                </a:solidFill>
-              </a:rPr>
-              <a:t>Interpretable trust score + admission gate</a:t>
-            </a:r>
-          </a:p>
-        </p:txBody>
-      </p:sp>
-      <p:sp>
-        <p:nvSpPr>
-          <p:cNvPr id="25" name="TextBox 24"/>
-          <p:cNvSpPr txBox="1"/>
-          <p:nvPr/>
-        </p:nvSpPr>
-        <p:spPr>
-          <a:xfrm>
-            <a:off x="1417320" y="4453125"/>
-            <a:ext cx="10058400" cy="594360"/>
-          </a:xfrm>
-          <a:prstGeom prst="rect">
-            <a:avLst/>
-          </a:prstGeom>
-          <a:noFill/>
-        </p:spPr>
-        <p:txBody>
-          <a:bodyPr wrap="square" anchor="t">
-            <a:spAutoFit/>
-          </a:bodyPr>
-          <a:lstStyle/>
-          <a:p>
-            <a:pPr algn="l"/>
-            <a:r>
-              <a:rPr sz="1100" b="0">
-                <a:solidFill>
-                  <a:srgbClr val="333333"/>
-                </a:solidFill>
-              </a:rPr>
-              <a:t>trust × confidence gate flags rather than drops low-credibility posts.  Every constant traceable to English rationale in config.</a:t>
-            </a:r>
-          </a:p>
-        </p:txBody>
-      </p:sp>
-      <p:sp>
-        <p:nvSpPr>
-          <p:cNvPr id="26" name="Rectangle 25"/>
-          <p:cNvSpPr/>
-          <p:nvPr/>
-        </p:nvSpPr>
-        <p:spPr>
-          <a:xfrm>
-            <a:off x="457200" y="5129780"/>
-            <a:ext cx="11247120" cy="960120"/>
-          </a:xfrm>
-          <a:prstGeom prst="rect">
-            <a:avLst/>
-          </a:prstGeom>
-          <a:solidFill>
-            <a:srgbClr val="F5F5F5"/>
-          </a:solidFill>
-          <a:ln>
-            <a:solidFill>
-              <a:srgbClr val="0071DC"/>
-            </a:solidFill>
-          </a:ln>
-          <a:effectLst/>
-        </p:spPr>
-        <p:style>
-          <a:lnRef idx="1">
-            <a:schemeClr val="accent1"/>
-          </a:lnRef>
-          <a:fillRef idx="3">
-            <a:schemeClr val="accent1"/>
-          </a:fillRef>
-          <a:effectRef idx="2">
-            <a:schemeClr val="accent1"/>
-          </a:effectRef>
-          <a:fontRef idx="minor">
-            <a:schemeClr val="lt1"/>
-          </a:fontRef>
-        </p:style>
-        <p:txBody>
-          <a:bodyPr rtlCol="0" anchor="ctr"/>
-          <a:lstStyle/>
-          <a:p>
-            <a:pPr algn="ctr"/>
-          </a:p>
-        </p:txBody>
-      </p:sp>
-      <p:sp>
-        <p:nvSpPr>
-          <p:cNvPr id="27" name="Rectangle 26"/>
-          <p:cNvSpPr/>
-          <p:nvPr/>
-        </p:nvSpPr>
-        <p:spPr>
-          <a:xfrm>
-            <a:off x="457200" y="5129780"/>
-            <a:ext cx="822960" cy="960120"/>
-          </a:xfrm>
-          <a:prstGeom prst="rect">
-            <a:avLst/>
-          </a:prstGeom>
-          <a:solidFill>
-            <a:srgbClr val="0071DC"/>
-          </a:solidFill>
-          <a:ln>
-            <a:noFill/>
-          </a:ln>
-          <a:effectLst/>
-        </p:spPr>
-        <p:style>
-          <a:lnRef idx="1">
-            <a:schemeClr val="accent1"/>
-          </a:lnRef>
-          <a:fillRef idx="3">
-            <a:schemeClr val="accent1"/>
-          </a:fillRef>
-          <a:effectRef idx="2">
-            <a:schemeClr val="accent1"/>
-          </a:effectRef>
-          <a:fontRef idx="minor">
-            <a:schemeClr val="lt1"/>
-          </a:fontRef>
-        </p:style>
-        <p:txBody>
-          <a:bodyPr rtlCol="0" anchor="ctr"/>
-          <a:lstStyle/>
-          <a:p>
-            <a:pPr algn="ctr"/>
-          </a:p>
-        </p:txBody>
-      </p:sp>
-      <p:sp>
-        <p:nvSpPr>
-          <p:cNvPr id="28" name="TextBox 27"/>
-          <p:cNvSpPr txBox="1"/>
-          <p:nvPr/>
-        </p:nvSpPr>
-        <p:spPr>
-          <a:xfrm>
-            <a:off x="457200" y="5129780"/>
-            <a:ext cx="822960" cy="960120"/>
-          </a:xfrm>
-          <a:prstGeom prst="rect">
-            <a:avLst/>
-          </a:prstGeom>
-          <a:noFill/>
-        </p:spPr>
-        <p:txBody>
-          <a:bodyPr wrap="square" anchor="ctr">
-            <a:spAutoFit/>
-          </a:bodyPr>
-          <a:lstStyle/>
-          <a:p>
-            <a:pPr algn="ctr"/>
-            <a:r>
-              <a:rPr sz="2000" b="1">
-                <a:solidFill>
-                  <a:srgbClr val="FFFFFF"/>
-                </a:solidFill>
-              </a:rPr>
-              <a:t>C5</a:t>
-            </a:r>
-          </a:p>
-        </p:txBody>
-      </p:sp>
-      <p:sp>
-        <p:nvSpPr>
-          <p:cNvPr id="29" name="TextBox 28"/>
-          <p:cNvSpPr txBox="1"/>
-          <p:nvPr/>
-        </p:nvSpPr>
-        <p:spPr>
-          <a:xfrm>
-            <a:off x="1417320" y="5175500"/>
-            <a:ext cx="10058400" cy="320040"/>
-          </a:xfrm>
-          <a:prstGeom prst="rect">
-            <a:avLst/>
-          </a:prstGeom>
-          <a:noFill/>
-        </p:spPr>
-        <p:txBody>
-          <a:bodyPr wrap="square" anchor="t">
-            <a:spAutoFit/>
-          </a:bodyPr>
-          <a:lstStyle/>
-          <a:p>
-            <a:pPr algn="l"/>
-            <a:r>
-              <a:rPr sz="1300" b="1">
-                <a:solidFill>
-                  <a:srgbClr val="041E42"/>
-                </a:solidFill>
-              </a:rPr>
-              <a:t>HITL learning-loop dashboard</a:t>
-            </a:r>
-          </a:p>
-        </p:txBody>
-      </p:sp>
-      <p:sp>
-        <p:nvSpPr>
-          <p:cNvPr id="30" name="TextBox 29"/>
-          <p:cNvSpPr txBox="1"/>
-          <p:nvPr/>
-        </p:nvSpPr>
-        <p:spPr>
-          <a:xfrm>
-            <a:off x="1417320" y="5495540"/>
-            <a:ext cx="10058400" cy="594360"/>
-          </a:xfrm>
-          <a:prstGeom prst="rect">
-            <a:avLst/>
-          </a:prstGeom>
-          <a:noFill/>
-        </p:spPr>
-        <p:txBody>
-          <a:bodyPr wrap="square" anchor="t">
-            <a:spAutoFit/>
-          </a:bodyPr>
-          <a:lstStyle/>
-          <a:p>
-            <a:pPr algn="l"/>
-            <a:r>
-              <a:rPr sz="1100" b="0">
-                <a:solidFill>
-                  <a:srgbClr val="333333"/>
-                </a:solidFill>
-              </a:rPr>
-              <a:t>Review &amp; Validate, Lifecycle Kanban, Insights, Notification centre.  Corrections &amp; posted replies feed few-shot reply generation and future retraining.</a:t>
-            </a:r>
-          </a:p>
-        </p:txBody>
-      </p:sp>
-      <p:sp>
-        <p:nvSpPr>
-          <p:cNvPr id="31" name="TextBox 30"/>
           <p:cNvSpPr txBox="1"/>
           <p:nvPr/>
         </p:nvSpPr>
@@ -14007,7 +13407,7 @@
       </p:sp>
       <p:sp>
         <p:nvSpPr>
-          <p:cNvPr id="32" name="TextBox 31"/>
+          <p:cNvPr id="19" name="TextBox 18"/>
           <p:cNvSpPr txBox="1"/>
           <p:nvPr/>
         </p:nvSpPr>
@@ -14034,7 +13434,7 @@
                   <a:srgbClr val="666666"/>
                 </a:solidFill>
               </a:rPr>
-              <a:t>18 / 25</a:t>
+              <a:t>18 / 22</a:t>
             </a:r>
           </a:p>
         </p:txBody>
@@ -14130,7 +13530,7 @@
                   <a:srgbClr val="FFFFFF"/>
                 </a:solidFill>
               </a:rPr>
-              <a:t>Live Demo  —  Dashboard Walkthrough</a:t>
+              <a:t>Conclusions  —  What Worked, What's Still Open</a:t>
             </a:r>
           </a:p>
         </p:txBody>
@@ -14164,7 +13564,7 @@
                   <a:srgbClr val="E8F4FD"/>
                 </a:solidFill>
               </a:rPr>
-              <a:t>One post → alert → review → reply → lifecycle → resolved</a:t>
+              <a:t>Honest read on 5 months of post-midsem work</a:t>
             </a:r>
           </a:p>
         </p:txBody>
@@ -14213,30 +13613,52 @@
           </a:p>
         </p:txBody>
       </p:sp>
-      <p:pic>
-        <p:nvPicPr>
-          <p:cNvPr id="6" name="Picture 5" descr="brand_health.png"/>
-          <p:cNvPicPr>
-            <a:picLocks noChangeAspect="1"/>
-          </p:cNvPicPr>
-          <p:nvPr/>
-        </p:nvPicPr>
-        <p:blipFill>
-          <a:blip r:embed="rId2"/>
-          <a:stretch>
-            <a:fillRect/>
-          </a:stretch>
-        </p:blipFill>
-        <p:spPr>
-          <a:xfrm>
-            <a:off x="320040" y="960120"/>
-            <a:ext cx="3794760" cy="2331720"/>
-          </a:xfrm>
-          <a:prstGeom prst="rect">
-            <a:avLst/>
-          </a:prstGeom>
-        </p:spPr>
-      </p:pic>
+      <p:sp>
+        <p:nvSpPr>
+          <p:cNvPr id="6" name="Rectangle 5"/>
+          <p:cNvSpPr/>
+          <p:nvPr/>
+        </p:nvSpPr>
+        <p:spPr>
+          <a:xfrm>
+            <a:off x="457200" y="960120"/>
+            <a:ext cx="5532120" cy="5257800"/>
+          </a:xfrm>
+          <a:prstGeom prst="rect">
+            <a:avLst/>
+          </a:prstGeom>
+          <a:solidFill>
+            <a:srgbClr val="DCFCE7"/>
+          </a:solidFill>
+          <a:ln>
+            <a:solidFill>
+              <a:srgbClr val="10B981"/>
+            </a:solidFill>
+          </a:ln>
+          <a:effectLst/>
+        </p:spPr>
+        <p:style>
+          <a:lnRef idx="1">
+            <a:schemeClr val="accent1"/>
+          </a:lnRef>
+          <a:fillRef idx="3">
+            <a:schemeClr val="accent1"/>
+          </a:fillRef>
+          <a:effectRef idx="2">
+            <a:schemeClr val="accent1"/>
+          </a:effectRef>
+          <a:fontRef idx="minor">
+            <a:schemeClr val="lt1"/>
+          </a:fontRef>
+        </p:style>
+        <p:txBody>
+          <a:bodyPr rtlCol="0" anchor="ctr"/>
+          <a:lstStyle/>
+          <a:p>
+            <a:pPr algn="ctr"/>
+          </a:p>
+        </p:txBody>
+      </p:sp>
       <p:sp>
         <p:nvSpPr>
           <p:cNvPr id="7" name="TextBox 6"/>
@@ -14245,8 +13667,8 @@
         </p:nvSpPr>
         <p:spPr>
           <a:xfrm>
-            <a:off x="320040" y="3310128"/>
-            <a:ext cx="3794760" cy="228600"/>
+            <a:off x="640080" y="1097280"/>
+            <a:ext cx="5212080" cy="365760"/>
           </a:xfrm>
           <a:prstGeom prst="rect">
             <a:avLst/>
@@ -14259,52 +13681,172 @@
           </a:bodyPr>
           <a:lstStyle/>
           <a:p>
-            <a:pPr algn="ctr"/>
-            <a:r>
-              <a:rPr sz="1100" b="1">
-                <a:solidFill>
-                  <a:srgbClr val="041E42"/>
-                </a:solidFill>
-              </a:rPr>
-              <a:t>Brand Health</a:t>
-            </a:r>
-          </a:p>
-        </p:txBody>
-      </p:sp>
-      <p:pic>
-        <p:nvPicPr>
-          <p:cNvPr id="8" name="Picture 7" descr="alert_feed.png"/>
-          <p:cNvPicPr>
-            <a:picLocks noChangeAspect="1"/>
-          </p:cNvPicPr>
-          <p:nvPr/>
-        </p:nvPicPr>
-        <p:blipFill>
-          <a:blip r:embed="rId3"/>
-          <a:stretch>
-            <a:fillRect/>
-          </a:stretch>
-        </p:blipFill>
-        <p:spPr>
-          <a:xfrm>
-            <a:off x="4206240" y="960120"/>
-            <a:ext cx="3794760" cy="2331720"/>
-          </a:xfrm>
-          <a:prstGeom prst="rect">
-            <a:avLst/>
-          </a:prstGeom>
-        </p:spPr>
-      </p:pic>
-      <p:sp>
-        <p:nvSpPr>
-          <p:cNvPr id="9" name="TextBox 8"/>
-          <p:cNvSpPr txBox="1"/>
-          <p:nvPr/>
-        </p:nvSpPr>
-        <p:spPr>
-          <a:xfrm>
-            <a:off x="4206240" y="3310128"/>
-            <a:ext cx="3794760" cy="228600"/>
+            <a:pPr algn="l"/>
+            <a:r>
+              <a:rPr sz="1500" b="1">
+                <a:solidFill>
+                  <a:srgbClr val="10B981"/>
+                </a:solidFill>
+              </a:rPr>
+              <a:t>What worked</a:t>
+            </a:r>
+          </a:p>
+        </p:txBody>
+      </p:sp>
+      <p:sp>
+        <p:nvSpPr>
+          <p:cNvPr id="8" name="TextBox 7"/>
+          <p:cNvSpPr txBox="1"/>
+          <p:nvPr/>
+        </p:nvSpPr>
+        <p:spPr>
+          <a:xfrm>
+            <a:off x="640080" y="1508760"/>
+            <a:ext cx="5212080" cy="4572000"/>
+          </a:xfrm>
+          <a:prstGeom prst="rect">
+            <a:avLst/>
+          </a:prstGeom>
+          <a:noFill/>
+        </p:spPr>
+        <p:txBody>
+          <a:bodyPr wrap="square">
+            <a:spAutoFit/>
+          </a:bodyPr>
+          <a:lstStyle/>
+          <a:p>
+            <a:pPr>
+              <a:spcAft>
+                <a:spcPts val="400"/>
+              </a:spcAft>
+            </a:pPr>
+            <a:r>
+              <a:rPr sz="1100" b="0">
+                <a:solidFill>
+                  <a:srgbClr val="333333"/>
+                </a:solidFill>
+              </a:rPr>
+              <a:t>•  3-stage ModernBERT curriculum landed the sentiment win we set out for  (Macro-F1 0.62 → 0.76 on 5-fold OOF).</a:t>
+            </a:r>
+          </a:p>
+          <a:p>
+            <a:pPr>
+              <a:spcAft>
+                <a:spcPts val="400"/>
+              </a:spcAft>
+            </a:pPr>
+            <a:r>
+              <a:rPr sz="1100" b="0">
+                <a:solidFill>
+                  <a:srgbClr val="333333"/>
+                </a:solidFill>
+              </a:rPr>
+              <a:t>•  Long-post recovery  (0.28 → 1.00)  came for free once we switched off truncation.</a:t>
+            </a:r>
+          </a:p>
+          <a:p>
+            <a:pPr>
+              <a:spcAft>
+                <a:spcPts val="400"/>
+              </a:spcAft>
+            </a:pPr>
+            <a:r>
+              <a:rPr sz="1100" b="0">
+                <a:solidFill>
+                  <a:srgbClr val="333333"/>
+                </a:solidFill>
+              </a:rPr>
+              <a:t>•  Removing the image on the final vision merge step ended the 50 % hallucination problem  —  the mechanism, not just the number, is what makes it credible.</a:t>
+            </a:r>
+          </a:p>
+          <a:p>
+            <a:pPr>
+              <a:spcAft>
+                <a:spcPts val="400"/>
+              </a:spcAft>
+            </a:pPr>
+            <a:r>
+              <a:rPr sz="1100" b="0">
+                <a:solidFill>
+                  <a:srgbClr val="333333"/>
+                </a:solidFill>
+              </a:rPr>
+              <a:t>•  Trust score as flag-not-drop  matched the human annotator on 12 / 15 low-trust posts. Analysts trust it because they can override it.</a:t>
+            </a:r>
+          </a:p>
+          <a:p>
+            <a:pPr>
+              <a:spcAft>
+                <a:spcPts val="400"/>
+              </a:spcAft>
+            </a:pPr>
+            <a:r>
+              <a:rPr sz="1100" b="0">
+                <a:solidFill>
+                  <a:srgbClr val="333333"/>
+                </a:solidFill>
+              </a:rPr>
+              <a:t>•  HITL feedback table quietly turned into the most useful piece of infrastructure  —  drives few-shot on every click today, retraining tomorrow.</a:t>
+            </a:r>
+          </a:p>
+        </p:txBody>
+      </p:sp>
+      <p:sp>
+        <p:nvSpPr>
+          <p:cNvPr id="9" name="Rectangle 8"/>
+          <p:cNvSpPr/>
+          <p:nvPr/>
+        </p:nvSpPr>
+        <p:spPr>
+          <a:xfrm>
+            <a:off x="6172200" y="960120"/>
+            <a:ext cx="5532120" cy="5257800"/>
+          </a:xfrm>
+          <a:prstGeom prst="rect">
+            <a:avLst/>
+          </a:prstGeom>
+          <a:solidFill>
+            <a:srgbClr val="FEF3C7"/>
+          </a:solidFill>
+          <a:ln>
+            <a:solidFill>
+              <a:srgbClr val="D97706"/>
+            </a:solidFill>
+          </a:ln>
+          <a:effectLst/>
+        </p:spPr>
+        <p:style>
+          <a:lnRef idx="1">
+            <a:schemeClr val="accent1"/>
+          </a:lnRef>
+          <a:fillRef idx="3">
+            <a:schemeClr val="accent1"/>
+          </a:fillRef>
+          <a:effectRef idx="2">
+            <a:schemeClr val="accent1"/>
+          </a:effectRef>
+          <a:fontRef idx="minor">
+            <a:schemeClr val="lt1"/>
+          </a:fontRef>
+        </p:style>
+        <p:txBody>
+          <a:bodyPr rtlCol="0" anchor="ctr"/>
+          <a:lstStyle/>
+          <a:p>
+            <a:pPr algn="ctr"/>
+          </a:p>
+        </p:txBody>
+      </p:sp>
+      <p:sp>
+        <p:nvSpPr>
+          <p:cNvPr id="10" name="TextBox 9"/>
+          <p:cNvSpPr txBox="1"/>
+          <p:nvPr/>
+        </p:nvSpPr>
+        <p:spPr>
+          <a:xfrm>
+            <a:off x="6355080" y="1097280"/>
+            <a:ext cx="5212080" cy="365760"/>
           </a:xfrm>
           <a:prstGeom prst="rect">
             <a:avLst/>
@@ -14317,42 +13859,18 @@
           </a:bodyPr>
           <a:lstStyle/>
           <a:p>
-            <a:pPr algn="ctr"/>
-            <a:r>
-              <a:rPr sz="1100" b="1">
-                <a:solidFill>
-                  <a:srgbClr val="041E42"/>
-                </a:solidFill>
-              </a:rPr>
-              <a:t>Alert Feed</a:t>
-            </a:r>
-          </a:p>
-        </p:txBody>
-      </p:sp>
-      <p:pic>
-        <p:nvPicPr>
-          <p:cNvPr id="10" name="Picture 9" descr="post_explorer.png"/>
-          <p:cNvPicPr>
-            <a:picLocks noChangeAspect="1"/>
-          </p:cNvPicPr>
-          <p:nvPr/>
-        </p:nvPicPr>
-        <p:blipFill>
-          <a:blip r:embed="rId4"/>
-          <a:stretch>
-            <a:fillRect/>
-          </a:stretch>
-        </p:blipFill>
-        <p:spPr>
-          <a:xfrm>
-            <a:off x="8092440" y="960120"/>
-            <a:ext cx="3794760" cy="2331720"/>
-          </a:xfrm>
-          <a:prstGeom prst="rect">
-            <a:avLst/>
-          </a:prstGeom>
-        </p:spPr>
-      </p:pic>
+            <a:pPr algn="l"/>
+            <a:r>
+              <a:rPr sz="1500" b="1">
+                <a:solidFill>
+                  <a:srgbClr val="D97706"/>
+                </a:solidFill>
+              </a:rPr>
+              <a:t>What's still open (honest)</a:t>
+            </a:r>
+          </a:p>
+        </p:txBody>
+      </p:sp>
       <p:sp>
         <p:nvSpPr>
           <p:cNvPr id="11" name="TextBox 10"/>
@@ -14361,209 +13879,99 @@
         </p:nvSpPr>
         <p:spPr>
           <a:xfrm>
-            <a:off x="8092440" y="3310128"/>
-            <a:ext cx="3794760" cy="228600"/>
-          </a:xfrm>
-          <a:prstGeom prst="rect">
-            <a:avLst/>
-          </a:prstGeom>
-          <a:noFill/>
-        </p:spPr>
-        <p:txBody>
-          <a:bodyPr wrap="square" anchor="t">
-            <a:spAutoFit/>
-          </a:bodyPr>
-          <a:lstStyle/>
-          <a:p>
-            <a:pPr algn="ctr"/>
-            <a:r>
-              <a:rPr sz="1100" b="1">
-                <a:solidFill>
-                  <a:srgbClr val="041E42"/>
-                </a:solidFill>
-              </a:rPr>
-              <a:t>Post Explorer</a:t>
-            </a:r>
-          </a:p>
-        </p:txBody>
-      </p:sp>
-      <p:pic>
-        <p:nvPicPr>
-          <p:cNvPr id="12" name="Picture 11" descr="review_validate.png"/>
-          <p:cNvPicPr>
-            <a:picLocks noChangeAspect="1"/>
-          </p:cNvPicPr>
-          <p:nvPr/>
-        </p:nvPicPr>
-        <p:blipFill>
-          <a:blip r:embed="rId5"/>
-          <a:stretch>
-            <a:fillRect/>
-          </a:stretch>
-        </p:blipFill>
-        <p:spPr>
-          <a:xfrm>
-            <a:off x="320040" y="3566160"/>
-            <a:ext cx="3794760" cy="2331720"/>
-          </a:xfrm>
-          <a:prstGeom prst="rect">
-            <a:avLst/>
-          </a:prstGeom>
-        </p:spPr>
-      </p:pic>
-      <p:sp>
-        <p:nvSpPr>
-          <p:cNvPr id="13" name="TextBox 12"/>
-          <p:cNvSpPr txBox="1"/>
-          <p:nvPr/>
-        </p:nvSpPr>
-        <p:spPr>
-          <a:xfrm>
-            <a:off x="320040" y="5916168"/>
-            <a:ext cx="3794760" cy="228600"/>
-          </a:xfrm>
-          <a:prstGeom prst="rect">
-            <a:avLst/>
-          </a:prstGeom>
-          <a:noFill/>
-        </p:spPr>
-        <p:txBody>
-          <a:bodyPr wrap="square" anchor="t">
-            <a:spAutoFit/>
-          </a:bodyPr>
-          <a:lstStyle/>
-          <a:p>
-            <a:pPr algn="ctr"/>
-            <a:r>
-              <a:rPr sz="1100" b="1">
-                <a:solidFill>
-                  <a:srgbClr val="041E42"/>
-                </a:solidFill>
-              </a:rPr>
-              <a:t>Review &amp; Validate</a:t>
-            </a:r>
-          </a:p>
-        </p:txBody>
-      </p:sp>
-      <p:pic>
-        <p:nvPicPr>
-          <p:cNvPr id="14" name="Picture 13" descr="lifecycle_kanban.png"/>
-          <p:cNvPicPr>
-            <a:picLocks noChangeAspect="1"/>
-          </p:cNvPicPr>
-          <p:nvPr/>
-        </p:nvPicPr>
-        <p:blipFill>
-          <a:blip r:embed="rId6"/>
-          <a:stretch>
-            <a:fillRect/>
-          </a:stretch>
-        </p:blipFill>
-        <p:spPr>
-          <a:xfrm>
-            <a:off x="4206240" y="3566160"/>
-            <a:ext cx="3794760" cy="2331720"/>
-          </a:xfrm>
-          <a:prstGeom prst="rect">
-            <a:avLst/>
-          </a:prstGeom>
-        </p:spPr>
-      </p:pic>
-      <p:sp>
-        <p:nvSpPr>
-          <p:cNvPr id="15" name="TextBox 14"/>
-          <p:cNvSpPr txBox="1"/>
-          <p:nvPr/>
-        </p:nvSpPr>
-        <p:spPr>
-          <a:xfrm>
-            <a:off x="4206240" y="5916168"/>
-            <a:ext cx="3794760" cy="228600"/>
-          </a:xfrm>
-          <a:prstGeom prst="rect">
-            <a:avLst/>
-          </a:prstGeom>
-          <a:noFill/>
-        </p:spPr>
-        <p:txBody>
-          <a:bodyPr wrap="square" anchor="t">
-            <a:spAutoFit/>
-          </a:bodyPr>
-          <a:lstStyle/>
-          <a:p>
-            <a:pPr algn="ctr"/>
-            <a:r>
-              <a:rPr sz="1100" b="1">
-                <a:solidFill>
-                  <a:srgbClr val="041E42"/>
-                </a:solidFill>
-              </a:rPr>
-              <a:t>Lifecycle Kanban</a:t>
-            </a:r>
-          </a:p>
-        </p:txBody>
-      </p:sp>
-      <p:pic>
-        <p:nvPicPr>
-          <p:cNvPr id="16" name="Picture 15" descr="insights_competitor.png"/>
-          <p:cNvPicPr>
-            <a:picLocks noChangeAspect="1"/>
-          </p:cNvPicPr>
-          <p:nvPr/>
-        </p:nvPicPr>
-        <p:blipFill>
-          <a:blip r:embed="rId7"/>
-          <a:stretch>
-            <a:fillRect/>
-          </a:stretch>
-        </p:blipFill>
-        <p:spPr>
-          <a:xfrm>
-            <a:off x="8092440" y="3566160"/>
-            <a:ext cx="3794760" cy="2331720"/>
-          </a:xfrm>
-          <a:prstGeom prst="rect">
-            <a:avLst/>
-          </a:prstGeom>
-        </p:spPr>
-      </p:pic>
-      <p:sp>
-        <p:nvSpPr>
-          <p:cNvPr id="17" name="TextBox 16"/>
-          <p:cNvSpPr txBox="1"/>
-          <p:nvPr/>
-        </p:nvSpPr>
-        <p:spPr>
-          <a:xfrm>
-            <a:off x="8092440" y="5916168"/>
-            <a:ext cx="3794760" cy="228600"/>
-          </a:xfrm>
-          <a:prstGeom prst="rect">
-            <a:avLst/>
-          </a:prstGeom>
-          <a:noFill/>
-        </p:spPr>
-        <p:txBody>
-          <a:bodyPr wrap="square" anchor="t">
-            <a:spAutoFit/>
-          </a:bodyPr>
-          <a:lstStyle/>
-          <a:p>
-            <a:pPr algn="ctr"/>
-            <a:r>
-              <a:rPr sz="1100" b="1">
-                <a:solidFill>
-                  <a:srgbClr val="041E42"/>
-                </a:solidFill>
-              </a:rPr>
-              <a:t>Insights</a:t>
-            </a:r>
-          </a:p>
-        </p:txBody>
-      </p:sp>
-      <p:sp>
-        <p:nvSpPr>
-          <p:cNvPr id="18" name="TextBox 17"/>
+            <a:off x="6355080" y="1508760"/>
+            <a:ext cx="5212080" cy="4572000"/>
+          </a:xfrm>
+          <a:prstGeom prst="rect">
+            <a:avLst/>
+          </a:prstGeom>
+          <a:noFill/>
+        </p:spPr>
+        <p:txBody>
+          <a:bodyPr wrap="square">
+            <a:spAutoFit/>
+          </a:bodyPr>
+          <a:lstStyle/>
+          <a:p>
+            <a:pPr>
+              <a:spcAft>
+                <a:spcPts val="400"/>
+              </a:spcAft>
+            </a:pPr>
+            <a:r>
+              <a:rPr sz="1100" b="0">
+                <a:solidFill>
+                  <a:srgbClr val="333333"/>
+                </a:solidFill>
+              </a:rPr>
+              <a:t>•  200-post gold set is small.  Numbers are OOF-CV, but a bigger blind held-out set is needed before I'd claim generalisation.</a:t>
+            </a:r>
+          </a:p>
+          <a:p>
+            <a:pPr>
+              <a:spcAft>
+                <a:spcPts val="400"/>
+              </a:spcAft>
+            </a:pPr>
+            <a:r>
+              <a:rPr sz="1100" b="0">
+                <a:solidFill>
+                  <a:srgbClr val="333333"/>
+                </a:solidFill>
+              </a:rPr>
+              <a:t>•  Vision eval is 32 images  —  enough to sanity-check the mechanism, not enough to claim production-grade quality.</a:t>
+            </a:r>
+          </a:p>
+          <a:p>
+            <a:pPr>
+              <a:spcAft>
+                <a:spcPts val="400"/>
+              </a:spcAft>
+            </a:pPr>
+            <a:r>
+              <a:rPr sz="1100" b="0">
+                <a:solidFill>
+                  <a:srgbClr val="333333"/>
+                </a:solidFill>
+              </a:rPr>
+              <a:t>•  Long-post F1 of 1.00 is on 7 posts  —  read it as evidence the truncation ceiling is gone, not that the model is perfect on long text.</a:t>
+            </a:r>
+          </a:p>
+          <a:p>
+            <a:pPr>
+              <a:spcAft>
+                <a:spcPts val="400"/>
+              </a:spcAft>
+            </a:pPr>
+            <a:r>
+              <a:rPr sz="1100" b="0">
+                <a:solidFill>
+                  <a:srgbClr val="333333"/>
+                </a:solidFill>
+              </a:rPr>
+              <a:t>•  Reply drafts still need an analyst edit  —  we track edit-distance but haven't shown it dropping consistently yet.</a:t>
+            </a:r>
+          </a:p>
+          <a:p>
+            <a:pPr>
+              <a:spcAft>
+                <a:spcPts val="400"/>
+              </a:spcAft>
+            </a:pPr>
+            <a:r>
+              <a:rPr sz="1100" b="0">
+                <a:solidFill>
+                  <a:srgbClr val="333333"/>
+                </a:solidFill>
+              </a:rPr>
+              <a:t>•  Everything runs on one Mac. Multi-analyst concurrency and retraining automation aren't done  —  they're in the roadmap on the next slide.</a:t>
+            </a:r>
+          </a:p>
+        </p:txBody>
+      </p:sp>
+      <p:sp>
+        <p:nvSpPr>
+          <p:cNvPr id="12" name="TextBox 11"/>
           <p:cNvSpPr txBox="1"/>
           <p:nvPr/>
         </p:nvSpPr>
@@ -14597,7 +14005,7 @@
       </p:sp>
       <p:sp>
         <p:nvSpPr>
-          <p:cNvPr id="19" name="TextBox 18"/>
+          <p:cNvPr id="13" name="TextBox 12"/>
           <p:cNvSpPr txBox="1"/>
           <p:nvPr/>
         </p:nvSpPr>
@@ -14624,7 +14032,7 @@
                   <a:srgbClr val="666666"/>
                 </a:solidFill>
               </a:rPr>
-              <a:t>19 / 25</a:t>
+              <a:t>19 / 22</a:t>
             </a:r>
           </a:p>
         </p:txBody>
@@ -16836,7 +16244,7 @@
                   <a:srgbClr val="041E42"/>
                 </a:solidFill>
               </a:rPr>
-              <a:t>Storage — SQLite → Cosmos DB</a:t>
+              <a:t>Live Demo</a:t>
             </a:r>
           </a:p>
         </p:txBody>
@@ -16870,7 +16278,7 @@
                   <a:srgbClr val="666666"/>
                 </a:solidFill>
               </a:rPr>
-              <a:t>Lift-and-shift ready</a:t>
+              <a:t>Dashboard walkthrough (screenshots)</a:t>
             </a:r>
           </a:p>
         </p:txBody>
@@ -16984,7 +16392,7 @@
                   <a:srgbClr val="041E42"/>
                 </a:solidFill>
               </a:rPr>
-              <a:t>Live Demo</a:t>
+              <a:t>Conclusions &amp; Future Work</a:t>
             </a:r>
           </a:p>
         </p:txBody>
@@ -17018,162 +16426,14 @@
                   <a:srgbClr val="666666"/>
                 </a:solidFill>
               </a:rPr>
-              <a:t>Dashboard walkthrough (screenshots)</a:t>
-            </a:r>
-          </a:p>
-        </p:txBody>
-      </p:sp>
-      <p:sp>
-        <p:nvSpPr>
-          <p:cNvPr id="66" name="Rectangle 65"/>
-          <p:cNvSpPr/>
-          <p:nvPr/>
-        </p:nvSpPr>
-        <p:spPr>
-          <a:xfrm>
-            <a:off x="6217920" y="3986784"/>
-            <a:ext cx="5623560" cy="347472"/>
-          </a:xfrm>
-          <a:prstGeom prst="rect">
-            <a:avLst/>
-          </a:prstGeom>
-          <a:solidFill>
-            <a:srgbClr val="E8F4FD"/>
-          </a:solidFill>
-          <a:ln>
-            <a:solidFill>
-              <a:srgbClr val="0071DC"/>
-            </a:solidFill>
-          </a:ln>
-          <a:effectLst/>
-        </p:spPr>
-        <p:style>
-          <a:lnRef idx="1">
-            <a:schemeClr val="accent1"/>
-          </a:lnRef>
-          <a:fillRef idx="3">
-            <a:schemeClr val="accent1"/>
-          </a:fillRef>
-          <a:effectRef idx="2">
-            <a:schemeClr val="accent1"/>
-          </a:effectRef>
-          <a:fontRef idx="minor">
-            <a:schemeClr val="lt1"/>
-          </a:fontRef>
-        </p:style>
-        <p:txBody>
-          <a:bodyPr rtlCol="0" anchor="ctr"/>
-          <a:lstStyle/>
-          <a:p>
-            <a:pPr algn="ctr"/>
-          </a:p>
-        </p:txBody>
-      </p:sp>
-      <p:sp>
-        <p:nvSpPr>
-          <p:cNvPr id="67" name="TextBox 66"/>
-          <p:cNvSpPr txBox="1"/>
-          <p:nvPr/>
-        </p:nvSpPr>
-        <p:spPr>
-          <a:xfrm>
-            <a:off x="6309360" y="4032504"/>
-            <a:ext cx="502920" cy="256032"/>
-          </a:xfrm>
-          <a:prstGeom prst="rect">
-            <a:avLst/>
-          </a:prstGeom>
-          <a:noFill/>
-        </p:spPr>
-        <p:txBody>
-          <a:bodyPr wrap="square" anchor="t">
-            <a:spAutoFit/>
-          </a:bodyPr>
-          <a:lstStyle/>
-          <a:p>
-            <a:pPr algn="l"/>
-            <a:r>
-              <a:rPr sz="1200" b="1">
-                <a:solidFill>
-                  <a:srgbClr val="0071DC"/>
-                </a:solidFill>
-              </a:rPr>
-              <a:t>16</a:t>
-            </a:r>
-          </a:p>
-        </p:txBody>
-      </p:sp>
-      <p:sp>
-        <p:nvSpPr>
-          <p:cNvPr id="68" name="TextBox 67"/>
-          <p:cNvSpPr txBox="1"/>
-          <p:nvPr/>
-        </p:nvSpPr>
-        <p:spPr>
-          <a:xfrm>
-            <a:off x="6858000" y="4014216"/>
-            <a:ext cx="4892040" cy="182880"/>
-          </a:xfrm>
-          <a:prstGeom prst="rect">
-            <a:avLst/>
-          </a:prstGeom>
-          <a:noFill/>
-        </p:spPr>
-        <p:txBody>
-          <a:bodyPr wrap="square" anchor="t">
-            <a:spAutoFit/>
-          </a:bodyPr>
-          <a:lstStyle/>
-          <a:p>
-            <a:pPr algn="l"/>
-            <a:r>
-              <a:rPr sz="1100" b="1">
-                <a:solidFill>
-                  <a:srgbClr val="041E42"/>
-                </a:solidFill>
-              </a:rPr>
-              <a:t>Conclusions &amp; Future Work</a:t>
-            </a:r>
-          </a:p>
-        </p:txBody>
-      </p:sp>
-      <p:sp>
-        <p:nvSpPr>
-          <p:cNvPr id="69" name="TextBox 68"/>
-          <p:cNvSpPr txBox="1"/>
-          <p:nvPr/>
-        </p:nvSpPr>
-        <p:spPr>
-          <a:xfrm>
-            <a:off x="6858000" y="4169664"/>
-            <a:ext cx="4892040" cy="182880"/>
-          </a:xfrm>
-          <a:prstGeom prst="rect">
-            <a:avLst/>
-          </a:prstGeom>
-          <a:noFill/>
-        </p:spPr>
-        <p:txBody>
-          <a:bodyPr wrap="square" anchor="t">
-            <a:spAutoFit/>
-          </a:bodyPr>
-          <a:lstStyle/>
-          <a:p>
-            <a:pPr algn="l"/>
-            <a:r>
-              <a:rPr sz="900" b="0">
-                <a:solidFill>
-                  <a:srgbClr val="666666"/>
-                </a:solidFill>
-              </a:rPr>
-              <a:t>RQ1–RQ4 outcomes + roadmap</a:t>
-            </a:r>
-          </a:p>
-        </p:txBody>
-      </p:sp>
-      <p:sp>
-        <p:nvSpPr>
-          <p:cNvPr id="70" name="TextBox 69"/>
+              <a:t>RQ1–RQ4 outcomes + realistic roadmap</a:t>
+            </a:r>
+          </a:p>
+        </p:txBody>
+      </p:sp>
+      <p:sp>
+        <p:nvSpPr>
+          <p:cNvPr id="66" name="TextBox 65"/>
           <p:cNvSpPr txBox="1"/>
           <p:nvPr/>
         </p:nvSpPr>
@@ -17207,7 +16467,7 @@
       </p:sp>
       <p:sp>
         <p:nvSpPr>
-          <p:cNvPr id="71" name="TextBox 70"/>
+          <p:cNvPr id="67" name="TextBox 66"/>
           <p:cNvSpPr txBox="1"/>
           <p:nvPr/>
         </p:nvSpPr>
@@ -17234,7 +16494,7 @@
                   <a:srgbClr val="666666"/>
                 </a:solidFill>
               </a:rPr>
-              <a:t>2 / 25</a:t>
+              <a:t>2 / 22</a:t>
             </a:r>
           </a:p>
         </p:txBody>
@@ -17330,14 +16590,48 @@
                   <a:srgbClr val="FFFFFF"/>
                 </a:solidFill>
               </a:rPr>
-              <a:t>Conclusions  —  Research Questions Answered</a:t>
-            </a:r>
-          </a:p>
-        </p:txBody>
-      </p:sp>
-      <p:sp>
-        <p:nvSpPr>
-          <p:cNvPr id="4" name="Rectangle 3"/>
+              <a:t>Future Work  —  Grounded 3-Horizon Roadmap</a:t>
+            </a:r>
+          </a:p>
+        </p:txBody>
+      </p:sp>
+      <p:sp>
+        <p:nvSpPr>
+          <p:cNvPr id="4" name="TextBox 3"/>
+          <p:cNvSpPr txBox="1"/>
+          <p:nvPr/>
+        </p:nvSpPr>
+        <p:spPr>
+          <a:xfrm>
+            <a:off x="365760" y="457200"/>
+            <a:ext cx="11430000" cy="320040"/>
+          </a:xfrm>
+          <a:prstGeom prst="rect">
+            <a:avLst/>
+          </a:prstGeom>
+          <a:noFill/>
+        </p:spPr>
+        <p:txBody>
+          <a:bodyPr wrap="square" anchor="t">
+            <a:spAutoFit/>
+          </a:bodyPr>
+          <a:lstStyle/>
+          <a:p>
+            <a:pPr algn="l"/>
+            <a:r>
+              <a:rPr sz="1200" b="0">
+                <a:solidFill>
+                  <a:srgbClr val="E8F4FD"/>
+                </a:solidFill>
+              </a:rPr>
+              <a:t>Only items with clear next steps; not a wishlist</a:t>
+            </a:r>
+          </a:p>
+        </p:txBody>
+      </p:sp>
+      <p:sp>
+        <p:nvSpPr>
+          <p:cNvPr id="5" name="Rectangle 4"/>
           <p:cNvSpPr/>
           <p:nvPr/>
         </p:nvSpPr>
@@ -17381,14 +16675,14 @@
       </p:sp>
       <p:sp>
         <p:nvSpPr>
-          <p:cNvPr id="5" name="Rectangle 4"/>
+          <p:cNvPr id="6" name="Rectangle 5"/>
           <p:cNvSpPr/>
           <p:nvPr/>
         </p:nvSpPr>
         <p:spPr>
           <a:xfrm>
-            <a:off x="457200" y="960120"/>
-            <a:ext cx="11247120" cy="1234440"/>
+            <a:off x="457200" y="1051560"/>
+            <a:ext cx="11247120" cy="1463040"/>
           </a:xfrm>
           <a:prstGeom prst="rect">
             <a:avLst/>
@@ -17427,14 +16721,14 @@
       </p:sp>
       <p:sp>
         <p:nvSpPr>
-          <p:cNvPr id="6" name="Rectangle 5"/>
+          <p:cNvPr id="7" name="Rectangle 6"/>
           <p:cNvSpPr/>
           <p:nvPr/>
         </p:nvSpPr>
         <p:spPr>
           <a:xfrm>
-            <a:off x="457200" y="960120"/>
-            <a:ext cx="822960" cy="1234440"/>
+            <a:off x="457200" y="1051560"/>
+            <a:ext cx="228600" cy="1463040"/>
           </a:xfrm>
           <a:prstGeom prst="rect">
             <a:avLst/>
@@ -17471,48 +16765,14 @@
       </p:sp>
       <p:sp>
         <p:nvSpPr>
-          <p:cNvPr id="7" name="TextBox 6"/>
-          <p:cNvSpPr txBox="1"/>
-          <p:nvPr/>
-        </p:nvSpPr>
-        <p:spPr>
-          <a:xfrm>
-            <a:off x="457200" y="960120"/>
-            <a:ext cx="822960" cy="1234440"/>
-          </a:xfrm>
-          <a:prstGeom prst="rect">
-            <a:avLst/>
-          </a:prstGeom>
-          <a:noFill/>
-        </p:spPr>
-        <p:txBody>
-          <a:bodyPr wrap="square" anchor="ctr">
-            <a:spAutoFit/>
-          </a:bodyPr>
-          <a:lstStyle/>
-          <a:p>
-            <a:pPr algn="ctr"/>
-            <a:r>
-              <a:rPr sz="1800" b="1">
-                <a:solidFill>
-                  <a:srgbClr val="FFFFFF"/>
-                </a:solidFill>
-              </a:rPr>
-              <a:t>RQ1</a:t>
-            </a:r>
-          </a:p>
-        </p:txBody>
-      </p:sp>
-      <p:sp>
-        <p:nvSpPr>
           <p:cNvPr id="8" name="TextBox 7"/>
           <p:cNvSpPr txBox="1"/>
           <p:nvPr/>
         </p:nvSpPr>
         <p:spPr>
           <a:xfrm>
-            <a:off x="1417320" y="1033272"/>
-            <a:ext cx="10058400" cy="365760"/>
+            <a:off x="822960" y="1188720"/>
+            <a:ext cx="10424160" cy="365760"/>
           </a:xfrm>
           <a:prstGeom prst="rect">
             <a:avLst/>
@@ -17527,12 +16787,12 @@
           <a:p>
             <a:pPr algn="l"/>
             <a:r>
-              <a:rPr sz="1200" b="1">
+              <a:rPr sz="1500" b="1">
                 <a:solidFill>
                   <a:srgbClr val="041E42"/>
                 </a:solidFill>
               </a:rPr>
-              <a:t>Can a fine-tuned encoder beat baselines on Reddit retail sentiment?</a:t>
+              <a:t>Now → 1 month</a:t>
             </a:r>
           </a:p>
         </p:txBody>
@@ -17545,8 +16805,8 @@
         </p:nvSpPr>
         <p:spPr>
           <a:xfrm>
-            <a:off x="1417320" y="1417320"/>
-            <a:ext cx="10058400" cy="777240"/>
+            <a:off x="822960" y="1645920"/>
+            <a:ext cx="10424160" cy="822960"/>
           </a:xfrm>
           <a:prstGeom prst="rect">
             <a:avLst/>
@@ -17561,12 +16821,12 @@
           <a:p>
             <a:pPr algn="l"/>
             <a:r>
-              <a:rPr sz="1100" b="0">
+              <a:rPr sz="1200" b="0">
                 <a:solidFill>
                   <a:srgbClr val="333333"/>
                 </a:solidFill>
               </a:rPr>
-              <a:t>YES  —  ModernBERT 3-stage curriculum raised Macro-F1 from 0.6272 → 0.7642 overall  and from 0.2778 → 1.0000 on long posts.</a:t>
+              <a:t>Grow the gold set to ~500 posts using the HITL feedback the team is already producing; rerun 5-fold OOF and check the F1 delta.</a:t>
             </a:r>
           </a:p>
         </p:txBody>
@@ -17579,8 +16839,8 @@
         </p:nvSpPr>
         <p:spPr>
           <a:xfrm>
-            <a:off x="457200" y="2276856"/>
-            <a:ext cx="11247120" cy="1234440"/>
+            <a:off x="457200" y="2651760"/>
+            <a:ext cx="11247120" cy="1463040"/>
           </a:xfrm>
           <a:prstGeom prst="rect">
             <a:avLst/>
@@ -17590,7 +16850,7 @@
           </a:solidFill>
           <a:ln>
             <a:solidFill>
-              <a:srgbClr val="10B981"/>
+              <a:srgbClr val="0071DC"/>
             </a:solidFill>
           </a:ln>
           <a:effectLst/>
@@ -17625,14 +16885,14 @@
         </p:nvSpPr>
         <p:spPr>
           <a:xfrm>
-            <a:off x="457200" y="2276856"/>
-            <a:ext cx="822960" cy="1234440"/>
+            <a:off x="457200" y="2651760"/>
+            <a:ext cx="228600" cy="1463040"/>
           </a:xfrm>
           <a:prstGeom prst="rect">
             <a:avLst/>
           </a:prstGeom>
           <a:solidFill>
-            <a:srgbClr val="10B981"/>
+            <a:srgbClr val="0071DC"/>
           </a:solidFill>
           <a:ln>
             <a:noFill/>
@@ -17669,28 +16929,28 @@
         </p:nvSpPr>
         <p:spPr>
           <a:xfrm>
-            <a:off x="457200" y="2276856"/>
-            <a:ext cx="822960" cy="1234440"/>
-          </a:xfrm>
-          <a:prstGeom prst="rect">
-            <a:avLst/>
-          </a:prstGeom>
-          <a:noFill/>
-        </p:spPr>
-        <p:txBody>
-          <a:bodyPr wrap="square" anchor="ctr">
-            <a:spAutoFit/>
-          </a:bodyPr>
-          <a:lstStyle/>
-          <a:p>
-            <a:pPr algn="ctr"/>
-            <a:r>
-              <a:rPr sz="1800" b="1">
-                <a:solidFill>
-                  <a:srgbClr val="FFFFFF"/>
-                </a:solidFill>
-              </a:rPr>
-              <a:t>RQ2</a:t>
+            <a:off x="822960" y="2788920"/>
+            <a:ext cx="10424160" cy="365760"/>
+          </a:xfrm>
+          <a:prstGeom prst="rect">
+            <a:avLst/>
+          </a:prstGeom>
+          <a:noFill/>
+        </p:spPr>
+        <p:txBody>
+          <a:bodyPr wrap="square" anchor="t">
+            <a:spAutoFit/>
+          </a:bodyPr>
+          <a:lstStyle/>
+          <a:p>
+            <a:pPr algn="l"/>
+            <a:r>
+              <a:rPr sz="1500" b="1">
+                <a:solidFill>
+                  <a:srgbClr val="041E42"/>
+                </a:solidFill>
+              </a:rPr>
+              <a:t>1 → 3 months</a:t>
             </a:r>
           </a:p>
         </p:txBody>
@@ -17703,8 +16963,8 @@
         </p:nvSpPr>
         <p:spPr>
           <a:xfrm>
-            <a:off x="1417320" y="2350008"/>
-            <a:ext cx="10058400" cy="365760"/>
+            <a:off x="822960" y="3246120"/>
+            <a:ext cx="10424160" cy="822960"/>
           </a:xfrm>
           <a:prstGeom prst="rect">
             <a:avLst/>
@@ -17719,60 +16979,26 @@
           <a:p>
             <a:pPr algn="l"/>
             <a:r>
-              <a:rPr sz="1200" b="1">
-                <a:solidFill>
-                  <a:srgbClr val="041E42"/>
-                </a:solidFill>
-              </a:rPr>
-              <a:t>Can a compliant open-weights VLM extract structured retail signal from screenshots?</a:t>
-            </a:r>
-          </a:p>
-        </p:txBody>
-      </p:sp>
-      <p:sp>
-        <p:nvSpPr>
-          <p:cNvPr id="14" name="TextBox 13"/>
-          <p:cNvSpPr txBox="1"/>
-          <p:nvPr/>
-        </p:nvSpPr>
-        <p:spPr>
-          <a:xfrm>
-            <a:off x="1417320" y="2734056"/>
-            <a:ext cx="10058400" cy="777240"/>
-          </a:xfrm>
-          <a:prstGeom prst="rect">
-            <a:avLst/>
-          </a:prstGeom>
-          <a:noFill/>
-        </p:spPr>
-        <p:txBody>
-          <a:bodyPr wrap="square" anchor="t">
-            <a:spAutoFit/>
-          </a:bodyPr>
-          <a:lstStyle/>
-          <a:p>
-            <a:pPr algn="l"/>
-            <a:r>
-              <a:rPr sz="1100" b="0">
+              <a:rPr sz="1200" b="0">
                 <a:solidFill>
                   <a:srgbClr val="333333"/>
                 </a:solidFill>
               </a:rPr>
-              <a:t>YES  —  Multi-pass pipeline on Gemma 3 4B reduced hallucination from 50 % → 0 %  and lifted text extraction from 25 % → 75 %.</a:t>
-            </a:r>
-          </a:p>
-        </p:txBody>
-      </p:sp>
-      <p:sp>
-        <p:nvSpPr>
-          <p:cNvPr id="15" name="Rectangle 14"/>
+              <a:t>Wire the monthly ModernBERT retrain into a Cron / Airflow job so it stops being a manual notebook run; add promotion gate on OOF F1.</a:t>
+            </a:r>
+          </a:p>
+        </p:txBody>
+      </p:sp>
+      <p:sp>
+        <p:nvSpPr>
+          <p:cNvPr id="14" name="Rectangle 13"/>
           <p:cNvSpPr/>
           <p:nvPr/>
         </p:nvSpPr>
         <p:spPr>
           <a:xfrm>
-            <a:off x="457200" y="3593592"/>
-            <a:ext cx="11247120" cy="1234440"/>
+            <a:off x="457200" y="4251960"/>
+            <a:ext cx="11247120" cy="1463040"/>
           </a:xfrm>
           <a:prstGeom prst="rect">
             <a:avLst/>
@@ -17782,7 +17008,7 @@
           </a:solidFill>
           <a:ln>
             <a:solidFill>
-              <a:srgbClr val="10B981"/>
+              <a:srgbClr val="7C3AED"/>
             </a:solidFill>
           </a:ln>
           <a:effectLst/>
@@ -17811,20 +17037,20 @@
       </p:sp>
       <p:sp>
         <p:nvSpPr>
-          <p:cNvPr id="16" name="Rectangle 15"/>
+          <p:cNvPr id="15" name="Rectangle 14"/>
           <p:cNvSpPr/>
           <p:nvPr/>
         </p:nvSpPr>
         <p:spPr>
           <a:xfrm>
-            <a:off x="457200" y="3593592"/>
-            <a:ext cx="822960" cy="1234440"/>
+            <a:off x="457200" y="4251960"/>
+            <a:ext cx="228600" cy="1463040"/>
           </a:xfrm>
           <a:prstGeom prst="rect">
             <a:avLst/>
           </a:prstGeom>
           <a:solidFill>
-            <a:srgbClr val="10B981"/>
+            <a:srgbClr val="7C3AED"/>
           </a:solidFill>
           <a:ln>
             <a:noFill/>
@@ -17855,48 +17081,48 @@
       </p:sp>
       <p:sp>
         <p:nvSpPr>
+          <p:cNvPr id="16" name="TextBox 15"/>
+          <p:cNvSpPr txBox="1"/>
+          <p:nvPr/>
+        </p:nvSpPr>
+        <p:spPr>
+          <a:xfrm>
+            <a:off x="822960" y="4389120"/>
+            <a:ext cx="10424160" cy="365760"/>
+          </a:xfrm>
+          <a:prstGeom prst="rect">
+            <a:avLst/>
+          </a:prstGeom>
+          <a:noFill/>
+        </p:spPr>
+        <p:txBody>
+          <a:bodyPr wrap="square" anchor="t">
+            <a:spAutoFit/>
+          </a:bodyPr>
+          <a:lstStyle/>
+          <a:p>
+            <a:pPr algn="l"/>
+            <a:r>
+              <a:rPr sz="1500" b="1">
+                <a:solidFill>
+                  <a:srgbClr val="041E42"/>
+                </a:solidFill>
+              </a:rPr>
+              <a:t>3 → 6 months</a:t>
+            </a:r>
+          </a:p>
+        </p:txBody>
+      </p:sp>
+      <p:sp>
+        <p:nvSpPr>
           <p:cNvPr id="17" name="TextBox 16"/>
           <p:cNvSpPr txBox="1"/>
           <p:nvPr/>
         </p:nvSpPr>
         <p:spPr>
           <a:xfrm>
-            <a:off x="457200" y="3593592"/>
-            <a:ext cx="822960" cy="1234440"/>
-          </a:xfrm>
-          <a:prstGeom prst="rect">
-            <a:avLst/>
-          </a:prstGeom>
-          <a:noFill/>
-        </p:spPr>
-        <p:txBody>
-          <a:bodyPr wrap="square" anchor="ctr">
-            <a:spAutoFit/>
-          </a:bodyPr>
-          <a:lstStyle/>
-          <a:p>
-            <a:pPr algn="ctr"/>
-            <a:r>
-              <a:rPr sz="1800" b="1">
-                <a:solidFill>
-                  <a:srgbClr val="FFFFFF"/>
-                </a:solidFill>
-              </a:rPr>
-              <a:t>RQ3</a:t>
-            </a:r>
-          </a:p>
-        </p:txBody>
-      </p:sp>
-      <p:sp>
-        <p:nvSpPr>
-          <p:cNvPr id="18" name="TextBox 17"/>
-          <p:cNvSpPr txBox="1"/>
-          <p:nvPr/>
-        </p:nvSpPr>
-        <p:spPr>
-          <a:xfrm>
-            <a:off x="1417320" y="3666744"/>
-            <a:ext cx="10058400" cy="365760"/>
+            <a:off x="822960" y="4846320"/>
+            <a:ext cx="10424160" cy="822960"/>
           </a:xfrm>
           <a:prstGeom prst="rect">
             <a:avLst/>
@@ -17911,70 +17137,36 @@
           <a:p>
             <a:pPr algn="l"/>
             <a:r>
-              <a:rPr sz="1200" b="1">
-                <a:solidFill>
-                  <a:srgbClr val="041E42"/>
-                </a:solidFill>
-              </a:rPr>
-              <a:t>Can a defensible trust score filter low-credibility posts without silent drops?</a:t>
-            </a:r>
-          </a:p>
-        </p:txBody>
-      </p:sp>
-      <p:sp>
-        <p:nvSpPr>
-          <p:cNvPr id="19" name="TextBox 18"/>
-          <p:cNvSpPr txBox="1"/>
-          <p:nvPr/>
-        </p:nvSpPr>
-        <p:spPr>
-          <a:xfrm>
-            <a:off x="1417320" y="4050792"/>
-            <a:ext cx="10058400" cy="777240"/>
-          </a:xfrm>
-          <a:prstGeom prst="rect">
-            <a:avLst/>
-          </a:prstGeom>
-          <a:noFill/>
-        </p:spPr>
-        <p:txBody>
-          <a:bodyPr wrap="square" anchor="t">
-            <a:spAutoFit/>
-          </a:bodyPr>
-          <a:lstStyle/>
-          <a:p>
-            <a:pPr algn="l"/>
-            <a:r>
-              <a:rPr sz="1100" b="0">
+              <a:rPr sz="1200" b="0">
                 <a:solidFill>
                   <a:srgbClr val="333333"/>
                 </a:solidFill>
               </a:rPr>
-              <a:t>YES  —  Interpretable 3-part score flagged 15 % of posts;  12 of 15 confirmed by human annotator.  All low-trust posts remain visible and analyst-overridable.</a:t>
-            </a:r>
-          </a:p>
-        </p:txBody>
-      </p:sp>
-      <p:sp>
-        <p:nvSpPr>
-          <p:cNvPr id="20" name="Rectangle 19"/>
+              <a:t>Migrate storage to managed Postgres or Cosmos so multiple analysts can use the same feedback table concurrently; extend ingestion beyond Reddit only if the demand from the analyst team is real.</a:t>
+            </a:r>
+          </a:p>
+        </p:txBody>
+      </p:sp>
+      <p:sp>
+        <p:nvSpPr>
+          <p:cNvPr id="18" name="Rectangle 17"/>
           <p:cNvSpPr/>
           <p:nvPr/>
         </p:nvSpPr>
         <p:spPr>
           <a:xfrm>
-            <a:off x="457200" y="4910328"/>
-            <a:ext cx="11247120" cy="1234440"/>
+            <a:off x="457200" y="5852160"/>
+            <a:ext cx="11247120" cy="457200"/>
           </a:xfrm>
           <a:prstGeom prst="rect">
             <a:avLst/>
           </a:prstGeom>
           <a:solidFill>
-            <a:srgbClr val="F5F5F5"/>
+            <a:srgbClr val="E8F4FD"/>
           </a:solidFill>
           <a:ln>
             <a:solidFill>
-              <a:srgbClr val="10B981"/>
+              <a:srgbClr val="0071DC"/>
             </a:solidFill>
           </a:ln>
           <a:effectLst/>
@@ -18003,58 +17195,14 @@
       </p:sp>
       <p:sp>
         <p:nvSpPr>
-          <p:cNvPr id="21" name="Rectangle 20"/>
-          <p:cNvSpPr/>
-          <p:nvPr/>
-        </p:nvSpPr>
-        <p:spPr>
-          <a:xfrm>
-            <a:off x="457200" y="4910328"/>
-            <a:ext cx="822960" cy="1234440"/>
-          </a:xfrm>
-          <a:prstGeom prst="rect">
-            <a:avLst/>
-          </a:prstGeom>
-          <a:solidFill>
-            <a:srgbClr val="10B981"/>
-          </a:solidFill>
-          <a:ln>
-            <a:noFill/>
-          </a:ln>
-          <a:effectLst/>
-        </p:spPr>
-        <p:style>
-          <a:lnRef idx="1">
-            <a:schemeClr val="accent1"/>
-          </a:lnRef>
-          <a:fillRef idx="3">
-            <a:schemeClr val="accent1"/>
-          </a:fillRef>
-          <a:effectRef idx="2">
-            <a:schemeClr val="accent1"/>
-          </a:effectRef>
-          <a:fontRef idx="minor">
-            <a:schemeClr val="lt1"/>
-          </a:fontRef>
-        </p:style>
-        <p:txBody>
-          <a:bodyPr rtlCol="0" anchor="ctr"/>
-          <a:lstStyle/>
-          <a:p>
-            <a:pPr algn="ctr"/>
-          </a:p>
-        </p:txBody>
-      </p:sp>
-      <p:sp>
-        <p:nvSpPr>
-          <p:cNvPr id="22" name="TextBox 21"/>
-          <p:cNvSpPr txBox="1"/>
-          <p:nvPr/>
-        </p:nvSpPr>
-        <p:spPr>
-          <a:xfrm>
-            <a:off x="457200" y="4910328"/>
-            <a:ext cx="822960" cy="1234440"/>
+          <p:cNvPr id="19" name="TextBox 18"/>
+          <p:cNvSpPr txBox="1"/>
+          <p:nvPr/>
+        </p:nvSpPr>
+        <p:spPr>
+          <a:xfrm>
+            <a:off x="640080" y="5897880"/>
+            <a:ext cx="10972800" cy="365760"/>
           </a:xfrm>
           <a:prstGeom prst="rect">
             <a:avLst/>
@@ -18067,89 +17215,21 @@
           </a:bodyPr>
           <a:lstStyle/>
           <a:p>
-            <a:pPr algn="ctr"/>
-            <a:r>
-              <a:rPr sz="1800" b="1">
-                <a:solidFill>
-                  <a:srgbClr val="FFFFFF"/>
-                </a:solidFill>
-              </a:rPr>
-              <a:t>RQ4</a:t>
-            </a:r>
-          </a:p>
-        </p:txBody>
-      </p:sp>
-      <p:sp>
-        <p:nvSpPr>
-          <p:cNvPr id="23" name="TextBox 22"/>
-          <p:cNvSpPr txBox="1"/>
-          <p:nvPr/>
-        </p:nvSpPr>
-        <p:spPr>
-          <a:xfrm>
-            <a:off x="1417320" y="4983480"/>
-            <a:ext cx="10058400" cy="365760"/>
-          </a:xfrm>
-          <a:prstGeom prst="rect">
-            <a:avLst/>
-          </a:prstGeom>
-          <a:noFill/>
-        </p:spPr>
-        <p:txBody>
-          <a:bodyPr wrap="square" anchor="t">
-            <a:spAutoFit/>
-          </a:bodyPr>
-          <a:lstStyle/>
-          <a:p>
             <a:pPr algn="l"/>
             <a:r>
-              <a:rPr sz="1200" b="1">
-                <a:solidFill>
-                  <a:srgbClr val="041E42"/>
-                </a:solidFill>
-              </a:rPr>
-              <a:t>Can a HITL workflow produce a re-training signal from analyst corrections?</a:t>
-            </a:r>
-          </a:p>
-        </p:txBody>
-      </p:sp>
-      <p:sp>
-        <p:nvSpPr>
-          <p:cNvPr id="24" name="TextBox 23"/>
-          <p:cNvSpPr txBox="1"/>
-          <p:nvPr/>
-        </p:nvSpPr>
-        <p:spPr>
-          <a:xfrm>
-            <a:off x="1417320" y="5367528"/>
-            <a:ext cx="10058400" cy="777240"/>
-          </a:xfrm>
-          <a:prstGeom prst="rect">
-            <a:avLst/>
-          </a:prstGeom>
-          <a:noFill/>
-        </p:spPr>
-        <p:txBody>
-          <a:bodyPr wrap="square" anchor="t">
-            <a:spAutoFit/>
-          </a:bodyPr>
-          <a:lstStyle/>
-          <a:p>
-            <a:pPr algn="l"/>
-            <a:r>
-              <a:rPr sz="1100" b="0">
+              <a:rPr sz="1000" b="0">
                 <a:solidFill>
                   <a:srgbClr val="333333"/>
                 </a:solidFill>
               </a:rPr>
-              <a:t>YES  —  Every correction and posted reply is logged in the  feedback  table  →  feeds ModernBERT Stage-3 augmentation and FLAN-T5 few-shot pool.</a:t>
-            </a:r>
-          </a:p>
-        </p:txBody>
-      </p:sp>
-      <p:sp>
-        <p:nvSpPr>
-          <p:cNvPr id="25" name="TextBox 24"/>
+              <a:t>Deliberately excluded  —  ideas without a clear next step  (auto-reply gate, seasonal P1 forecast, bilingual taxonomy)  —  covered in the report's Future Work chapter.</a:t>
+            </a:r>
+          </a:p>
+        </p:txBody>
+      </p:sp>
+      <p:sp>
+        <p:nvSpPr>
+          <p:cNvPr id="20" name="TextBox 19"/>
           <p:cNvSpPr txBox="1"/>
           <p:nvPr/>
         </p:nvSpPr>
@@ -18183,7 +17263,7 @@
       </p:sp>
       <p:sp>
         <p:nvSpPr>
-          <p:cNvPr id="26" name="TextBox 25"/>
+          <p:cNvPr id="21" name="TextBox 20"/>
           <p:cNvSpPr txBox="1"/>
           <p:nvPr/>
         </p:nvSpPr>
@@ -18210,7 +17290,7 @@
                   <a:srgbClr val="666666"/>
                 </a:solidFill>
               </a:rPr>
-              <a:t>20 / 25</a:t>
+              <a:t>20 / 22</a:t>
             </a:r>
           </a:p>
         </p:txBody>
@@ -18224,2160 +17304,6 @@
 </file>
 
 <file path=ppt/slides/slide21.xml><?xml version="1.0" encoding="utf-8"?>
-<p:sld xmlns:a="http://schemas.openxmlformats.org/drawingml/2006/main" xmlns:p="http://schemas.openxmlformats.org/presentationml/2006/main" xmlns:r="http://schemas.openxmlformats.org/officeDocument/2006/relationships">
-  <p:cSld>
-    <p:spTree>
-      <p:nvGrpSpPr>
-        <p:cNvPr id="1" name=""/>
-        <p:cNvGrpSpPr/>
-        <p:nvPr/>
-      </p:nvGrpSpPr>
-      <p:grpSpPr/>
-      <p:sp>
-        <p:nvSpPr>
-          <p:cNvPr id="2" name="Rectangle 1"/>
-          <p:cNvSpPr/>
-          <p:nvPr/>
-        </p:nvSpPr>
-        <p:spPr>
-          <a:xfrm>
-            <a:off x="0" y="0"/>
-            <a:ext cx="12191695" cy="777240"/>
-          </a:xfrm>
-          <a:prstGeom prst="rect">
-            <a:avLst/>
-          </a:prstGeom>
-          <a:solidFill>
-            <a:srgbClr val="041E42"/>
-          </a:solidFill>
-          <a:ln>
-            <a:noFill/>
-          </a:ln>
-          <a:effectLst/>
-        </p:spPr>
-        <p:style>
-          <a:lnRef idx="1">
-            <a:schemeClr val="accent1"/>
-          </a:lnRef>
-          <a:fillRef idx="3">
-            <a:schemeClr val="accent1"/>
-          </a:fillRef>
-          <a:effectRef idx="2">
-            <a:schemeClr val="accent1"/>
-          </a:effectRef>
-          <a:fontRef idx="minor">
-            <a:schemeClr val="lt1"/>
-          </a:fontRef>
-        </p:style>
-        <p:txBody>
-          <a:bodyPr rtlCol="0" anchor="ctr"/>
-          <a:lstStyle/>
-          <a:p>
-            <a:pPr algn="ctr"/>
-          </a:p>
-        </p:txBody>
-      </p:sp>
-      <p:sp>
-        <p:nvSpPr>
-          <p:cNvPr id="3" name="TextBox 2"/>
-          <p:cNvSpPr txBox="1"/>
-          <p:nvPr/>
-        </p:nvSpPr>
-        <p:spPr>
-          <a:xfrm>
-            <a:off x="365760" y="109728"/>
-            <a:ext cx="11430000" cy="457200"/>
-          </a:xfrm>
-          <a:prstGeom prst="rect">
-            <a:avLst/>
-          </a:prstGeom>
-          <a:noFill/>
-        </p:spPr>
-        <p:txBody>
-          <a:bodyPr wrap="square" anchor="t">
-            <a:spAutoFit/>
-          </a:bodyPr>
-          <a:lstStyle/>
-          <a:p>
-            <a:pPr algn="l"/>
-            <a:r>
-              <a:rPr sz="2600" b="1">
-                <a:solidFill>
-                  <a:srgbClr val="FFFFFF"/>
-                </a:solidFill>
-              </a:rPr>
-              <a:t>Recommendations  —  Immediate Follow-Ons</a:t>
-            </a:r>
-          </a:p>
-        </p:txBody>
-      </p:sp>
-      <p:sp>
-        <p:nvSpPr>
-          <p:cNvPr id="4" name="Rectangle 3"/>
-          <p:cNvSpPr/>
-          <p:nvPr/>
-        </p:nvSpPr>
-        <p:spPr>
-          <a:xfrm>
-            <a:off x="0" y="777240"/>
-            <a:ext cx="12191695" cy="45720"/>
-          </a:xfrm>
-          <a:prstGeom prst="rect">
-            <a:avLst/>
-          </a:prstGeom>
-          <a:solidFill>
-            <a:srgbClr val="FFC220"/>
-          </a:solidFill>
-          <a:ln>
-            <a:noFill/>
-          </a:ln>
-          <a:effectLst/>
-        </p:spPr>
-        <p:style>
-          <a:lnRef idx="1">
-            <a:schemeClr val="accent1"/>
-          </a:lnRef>
-          <a:fillRef idx="3">
-            <a:schemeClr val="accent1"/>
-          </a:fillRef>
-          <a:effectRef idx="2">
-            <a:schemeClr val="accent1"/>
-          </a:effectRef>
-          <a:fontRef idx="minor">
-            <a:schemeClr val="lt1"/>
-          </a:fontRef>
-        </p:style>
-        <p:txBody>
-          <a:bodyPr rtlCol="0" anchor="ctr"/>
-          <a:lstStyle/>
-          <a:p>
-            <a:pPr algn="ctr"/>
-          </a:p>
-        </p:txBody>
-      </p:sp>
-      <p:sp>
-        <p:nvSpPr>
-          <p:cNvPr id="5" name="Rectangle 4"/>
-          <p:cNvSpPr/>
-          <p:nvPr/>
-        </p:nvSpPr>
-        <p:spPr>
-          <a:xfrm>
-            <a:off x="457200" y="1097280"/>
-            <a:ext cx="11247120" cy="1508760"/>
-          </a:xfrm>
-          <a:prstGeom prst="rect">
-            <a:avLst/>
-          </a:prstGeom>
-          <a:solidFill>
-            <a:srgbClr val="F5F5F5"/>
-          </a:solidFill>
-          <a:ln>
-            <a:solidFill>
-              <a:srgbClr val="0071DC"/>
-            </a:solidFill>
-          </a:ln>
-          <a:effectLst/>
-        </p:spPr>
-        <p:style>
-          <a:lnRef idx="1">
-            <a:schemeClr val="accent1"/>
-          </a:lnRef>
-          <a:fillRef idx="3">
-            <a:schemeClr val="accent1"/>
-          </a:fillRef>
-          <a:effectRef idx="2">
-            <a:schemeClr val="accent1"/>
-          </a:effectRef>
-          <a:fontRef idx="minor">
-            <a:schemeClr val="lt1"/>
-          </a:fontRef>
-        </p:style>
-        <p:txBody>
-          <a:bodyPr rtlCol="0" anchor="ctr"/>
-          <a:lstStyle/>
-          <a:p>
-            <a:pPr algn="ctr"/>
-          </a:p>
-        </p:txBody>
-      </p:sp>
-      <p:sp>
-        <p:nvSpPr>
-          <p:cNvPr id="6" name="Rectangle 5"/>
-          <p:cNvSpPr/>
-          <p:nvPr/>
-        </p:nvSpPr>
-        <p:spPr>
-          <a:xfrm>
-            <a:off x="457200" y="1097280"/>
-            <a:ext cx="182880" cy="1508760"/>
-          </a:xfrm>
-          <a:prstGeom prst="rect">
-            <a:avLst/>
-          </a:prstGeom>
-          <a:solidFill>
-            <a:srgbClr val="0071DC"/>
-          </a:solidFill>
-          <a:ln>
-            <a:noFill/>
-          </a:ln>
-          <a:effectLst/>
-        </p:spPr>
-        <p:style>
-          <a:lnRef idx="1">
-            <a:schemeClr val="accent1"/>
-          </a:lnRef>
-          <a:fillRef idx="3">
-            <a:schemeClr val="accent1"/>
-          </a:fillRef>
-          <a:effectRef idx="2">
-            <a:schemeClr val="accent1"/>
-          </a:effectRef>
-          <a:fontRef idx="minor">
-            <a:schemeClr val="lt1"/>
-          </a:fontRef>
-        </p:style>
-        <p:txBody>
-          <a:bodyPr rtlCol="0" anchor="ctr"/>
-          <a:lstStyle/>
-          <a:p>
-            <a:pPr algn="ctr"/>
-          </a:p>
-        </p:txBody>
-      </p:sp>
-      <p:sp>
-        <p:nvSpPr>
-          <p:cNvPr id="7" name="TextBox 6"/>
-          <p:cNvSpPr txBox="1"/>
-          <p:nvPr/>
-        </p:nvSpPr>
-        <p:spPr>
-          <a:xfrm>
-            <a:off x="822960" y="1234440"/>
-            <a:ext cx="10515600" cy="457200"/>
-          </a:xfrm>
-          <a:prstGeom prst="rect">
-            <a:avLst/>
-          </a:prstGeom>
-          <a:noFill/>
-        </p:spPr>
-        <p:txBody>
-          <a:bodyPr wrap="square" anchor="t">
-            <a:spAutoFit/>
-          </a:bodyPr>
-          <a:lstStyle/>
-          <a:p>
-            <a:pPr algn="l"/>
-            <a:r>
-              <a:rPr sz="1500" b="1">
-                <a:solidFill>
-                  <a:srgbClr val="041E42"/>
-                </a:solidFill>
-              </a:rPr>
-              <a:t>Monthly retraining cadence</a:t>
-            </a:r>
-          </a:p>
-        </p:txBody>
-      </p:sp>
-      <p:sp>
-        <p:nvSpPr>
-          <p:cNvPr id="8" name="TextBox 7"/>
-          <p:cNvSpPr txBox="1"/>
-          <p:nvPr/>
-        </p:nvSpPr>
-        <p:spPr>
-          <a:xfrm>
-            <a:off x="822960" y="1737360"/>
-            <a:ext cx="10515600" cy="822960"/>
-          </a:xfrm>
-          <a:prstGeom prst="rect">
-            <a:avLst/>
-          </a:prstGeom>
-          <a:noFill/>
-        </p:spPr>
-        <p:txBody>
-          <a:bodyPr wrap="square" anchor="t">
-            <a:spAutoFit/>
-          </a:bodyPr>
-          <a:lstStyle/>
-          <a:p>
-            <a:pPr algn="l"/>
-            <a:r>
-              <a:rPr sz="1200" b="0">
-                <a:solidFill>
-                  <a:srgbClr val="333333"/>
-                </a:solidFill>
-              </a:rPr>
-              <a:t>Use the HITL feedback store as the incremental labelling stream and re-run the 3-stage curriculum monthly.</a:t>
-            </a:r>
-          </a:p>
-        </p:txBody>
-      </p:sp>
-      <p:sp>
-        <p:nvSpPr>
-          <p:cNvPr id="9" name="Rectangle 8"/>
-          <p:cNvSpPr/>
-          <p:nvPr/>
-        </p:nvSpPr>
-        <p:spPr>
-          <a:xfrm>
-            <a:off x="457200" y="2743200"/>
-            <a:ext cx="11247120" cy="1508760"/>
-          </a:xfrm>
-          <a:prstGeom prst="rect">
-            <a:avLst/>
-          </a:prstGeom>
-          <a:solidFill>
-            <a:srgbClr val="F5F5F5"/>
-          </a:solidFill>
-          <a:ln>
-            <a:solidFill>
-              <a:srgbClr val="7C3AED"/>
-            </a:solidFill>
-          </a:ln>
-          <a:effectLst/>
-        </p:spPr>
-        <p:style>
-          <a:lnRef idx="1">
-            <a:schemeClr val="accent1"/>
-          </a:lnRef>
-          <a:fillRef idx="3">
-            <a:schemeClr val="accent1"/>
-          </a:fillRef>
-          <a:effectRef idx="2">
-            <a:schemeClr val="accent1"/>
-          </a:effectRef>
-          <a:fontRef idx="minor">
-            <a:schemeClr val="lt1"/>
-          </a:fontRef>
-        </p:style>
-        <p:txBody>
-          <a:bodyPr rtlCol="0" anchor="ctr"/>
-          <a:lstStyle/>
-          <a:p>
-            <a:pPr algn="ctr"/>
-          </a:p>
-        </p:txBody>
-      </p:sp>
-      <p:sp>
-        <p:nvSpPr>
-          <p:cNvPr id="10" name="Rectangle 9"/>
-          <p:cNvSpPr/>
-          <p:nvPr/>
-        </p:nvSpPr>
-        <p:spPr>
-          <a:xfrm>
-            <a:off x="457200" y="2743200"/>
-            <a:ext cx="182880" cy="1508760"/>
-          </a:xfrm>
-          <a:prstGeom prst="rect">
-            <a:avLst/>
-          </a:prstGeom>
-          <a:solidFill>
-            <a:srgbClr val="7C3AED"/>
-          </a:solidFill>
-          <a:ln>
-            <a:noFill/>
-          </a:ln>
-          <a:effectLst/>
-        </p:spPr>
-        <p:style>
-          <a:lnRef idx="1">
-            <a:schemeClr val="accent1"/>
-          </a:lnRef>
-          <a:fillRef idx="3">
-            <a:schemeClr val="accent1"/>
-          </a:fillRef>
-          <a:effectRef idx="2">
-            <a:schemeClr val="accent1"/>
-          </a:effectRef>
-          <a:fontRef idx="minor">
-            <a:schemeClr val="lt1"/>
-          </a:fontRef>
-        </p:style>
-        <p:txBody>
-          <a:bodyPr rtlCol="0" anchor="ctr"/>
-          <a:lstStyle/>
-          <a:p>
-            <a:pPr algn="ctr"/>
-          </a:p>
-        </p:txBody>
-      </p:sp>
-      <p:sp>
-        <p:nvSpPr>
-          <p:cNvPr id="11" name="TextBox 10"/>
-          <p:cNvSpPr txBox="1"/>
-          <p:nvPr/>
-        </p:nvSpPr>
-        <p:spPr>
-          <a:xfrm>
-            <a:off x="822960" y="2880360"/>
-            <a:ext cx="10515600" cy="457200"/>
-          </a:xfrm>
-          <a:prstGeom prst="rect">
-            <a:avLst/>
-          </a:prstGeom>
-          <a:noFill/>
-        </p:spPr>
-        <p:txBody>
-          <a:bodyPr wrap="square" anchor="t">
-            <a:spAutoFit/>
-          </a:bodyPr>
-          <a:lstStyle/>
-          <a:p>
-            <a:pPr algn="l"/>
-            <a:r>
-              <a:rPr sz="1500" b="1">
-                <a:solidFill>
-                  <a:srgbClr val="041E42"/>
-                </a:solidFill>
-              </a:rPr>
-              <a:t>Bilingual pass  (Hindi + English)</a:t>
-            </a:r>
-          </a:p>
-        </p:txBody>
-      </p:sp>
-      <p:sp>
-        <p:nvSpPr>
-          <p:cNvPr id="12" name="TextBox 11"/>
-          <p:cNvSpPr txBox="1"/>
-          <p:nvPr/>
-        </p:nvSpPr>
-        <p:spPr>
-          <a:xfrm>
-            <a:off x="822960" y="3383280"/>
-            <a:ext cx="10515600" cy="822960"/>
-          </a:xfrm>
-          <a:prstGeom prst="rect">
-            <a:avLst/>
-          </a:prstGeom>
-          <a:noFill/>
-        </p:spPr>
-        <p:txBody>
-          <a:bodyPr wrap="square" anchor="t">
-            <a:spAutoFit/>
-          </a:bodyPr>
-          <a:lstStyle/>
-          <a:p>
-            <a:pPr algn="l"/>
-            <a:r>
-              <a:rPr sz="1200" b="0">
-                <a:solidFill>
-                  <a:srgbClr val="333333"/>
-                </a:solidFill>
-              </a:rPr>
-              <a:t>Validate the retail taxonomy with native-speaker analysts before extending to Indian retail communities.</a:t>
-            </a:r>
-          </a:p>
-        </p:txBody>
-      </p:sp>
-      <p:sp>
-        <p:nvSpPr>
-          <p:cNvPr id="13" name="Rectangle 12"/>
-          <p:cNvSpPr/>
-          <p:nvPr/>
-        </p:nvSpPr>
-        <p:spPr>
-          <a:xfrm>
-            <a:off x="457200" y="4389120"/>
-            <a:ext cx="11247120" cy="1508760"/>
-          </a:xfrm>
-          <a:prstGeom prst="rect">
-            <a:avLst/>
-          </a:prstGeom>
-          <a:solidFill>
-            <a:srgbClr val="F5F5F5"/>
-          </a:solidFill>
-          <a:ln>
-            <a:solidFill>
-              <a:srgbClr val="10B981"/>
-            </a:solidFill>
-          </a:ln>
-          <a:effectLst/>
-        </p:spPr>
-        <p:style>
-          <a:lnRef idx="1">
-            <a:schemeClr val="accent1"/>
-          </a:lnRef>
-          <a:fillRef idx="3">
-            <a:schemeClr val="accent1"/>
-          </a:fillRef>
-          <a:effectRef idx="2">
-            <a:schemeClr val="accent1"/>
-          </a:effectRef>
-          <a:fontRef idx="minor">
-            <a:schemeClr val="lt1"/>
-          </a:fontRef>
-        </p:style>
-        <p:txBody>
-          <a:bodyPr rtlCol="0" anchor="ctr"/>
-          <a:lstStyle/>
-          <a:p>
-            <a:pPr algn="ctr"/>
-          </a:p>
-        </p:txBody>
-      </p:sp>
-      <p:sp>
-        <p:nvSpPr>
-          <p:cNvPr id="14" name="Rectangle 13"/>
-          <p:cNvSpPr/>
-          <p:nvPr/>
-        </p:nvSpPr>
-        <p:spPr>
-          <a:xfrm>
-            <a:off x="457200" y="4389120"/>
-            <a:ext cx="182880" cy="1508760"/>
-          </a:xfrm>
-          <a:prstGeom prst="rect">
-            <a:avLst/>
-          </a:prstGeom>
-          <a:solidFill>
-            <a:srgbClr val="10B981"/>
-          </a:solidFill>
-          <a:ln>
-            <a:noFill/>
-          </a:ln>
-          <a:effectLst/>
-        </p:spPr>
-        <p:style>
-          <a:lnRef idx="1">
-            <a:schemeClr val="accent1"/>
-          </a:lnRef>
-          <a:fillRef idx="3">
-            <a:schemeClr val="accent1"/>
-          </a:fillRef>
-          <a:effectRef idx="2">
-            <a:schemeClr val="accent1"/>
-          </a:effectRef>
-          <a:fontRef idx="minor">
-            <a:schemeClr val="lt1"/>
-          </a:fontRef>
-        </p:style>
-        <p:txBody>
-          <a:bodyPr rtlCol="0" anchor="ctr"/>
-          <a:lstStyle/>
-          <a:p>
-            <a:pPr algn="ctr"/>
-          </a:p>
-        </p:txBody>
-      </p:sp>
-      <p:sp>
-        <p:nvSpPr>
-          <p:cNvPr id="15" name="TextBox 14"/>
-          <p:cNvSpPr txBox="1"/>
-          <p:nvPr/>
-        </p:nvSpPr>
-        <p:spPr>
-          <a:xfrm>
-            <a:off x="822960" y="4526280"/>
-            <a:ext cx="10515600" cy="457200"/>
-          </a:xfrm>
-          <a:prstGeom prst="rect">
-            <a:avLst/>
-          </a:prstGeom>
-          <a:noFill/>
-        </p:spPr>
-        <p:txBody>
-          <a:bodyPr wrap="square" anchor="t">
-            <a:spAutoFit/>
-          </a:bodyPr>
-          <a:lstStyle/>
-          <a:p>
-            <a:pPr algn="l"/>
-            <a:r>
-              <a:rPr sz="1500" b="1">
-                <a:solidFill>
-                  <a:srgbClr val="041E42"/>
-                </a:solidFill>
-              </a:rPr>
-              <a:t>Per-team SLA dashboards</a:t>
-            </a:r>
-          </a:p>
-        </p:txBody>
-      </p:sp>
-      <p:sp>
-        <p:nvSpPr>
-          <p:cNvPr id="16" name="TextBox 15"/>
-          <p:cNvSpPr txBox="1"/>
-          <p:nvPr/>
-        </p:nvSpPr>
-        <p:spPr>
-          <a:xfrm>
-            <a:off x="822960" y="5029200"/>
-            <a:ext cx="10515600" cy="822960"/>
-          </a:xfrm>
-          <a:prstGeom prst="rect">
-            <a:avLst/>
-          </a:prstGeom>
-          <a:noFill/>
-        </p:spPr>
-        <p:txBody>
-          <a:bodyPr wrap="square" anchor="t">
-            <a:spAutoFit/>
-          </a:bodyPr>
-          <a:lstStyle/>
-          <a:p>
-            <a:pPr algn="l"/>
-            <a:r>
-              <a:rPr sz="1200" b="0">
-                <a:solidFill>
-                  <a:srgbClr val="333333"/>
-                </a:solidFill>
-              </a:rPr>
-              <a:t>Extend the Post Lifecycle SLA analytics into per-team dashboards once analyst volume passes ~50 posts / day.</a:t>
-            </a:r>
-          </a:p>
-        </p:txBody>
-      </p:sp>
-      <p:sp>
-        <p:nvSpPr>
-          <p:cNvPr id="17" name="TextBox 16"/>
-          <p:cNvSpPr txBox="1"/>
-          <p:nvPr/>
-        </p:nvSpPr>
-        <p:spPr>
-          <a:xfrm>
-            <a:off x="365760" y="6537960"/>
-            <a:ext cx="8229600" cy="274320"/>
-          </a:xfrm>
-          <a:prstGeom prst="rect">
-            <a:avLst/>
-          </a:prstGeom>
-          <a:noFill/>
-        </p:spPr>
-        <p:txBody>
-          <a:bodyPr wrap="square" anchor="t">
-            <a:spAutoFit/>
-          </a:bodyPr>
-          <a:lstStyle/>
-          <a:p>
-            <a:pPr algn="l"/>
-            <a:r>
-              <a:rPr sz="900" b="0">
-                <a:solidFill>
-                  <a:srgbClr val="666666"/>
-                </a:solidFill>
-              </a:rPr>
-              <a:t>Retail Sentiment Intelligence  ·  BITS ZG628T Dissertation  ·  Vishal Singh  ·  Post Mid-Semester Presentation</a:t>
-            </a:r>
-          </a:p>
-        </p:txBody>
-      </p:sp>
-      <p:sp>
-        <p:nvSpPr>
-          <p:cNvPr id="18" name="TextBox 17"/>
-          <p:cNvSpPr txBox="1"/>
-          <p:nvPr/>
-        </p:nvSpPr>
-        <p:spPr>
-          <a:xfrm>
-            <a:off x="10972800" y="6537960"/>
-            <a:ext cx="1097280" cy="274320"/>
-          </a:xfrm>
-          <a:prstGeom prst="rect">
-            <a:avLst/>
-          </a:prstGeom>
-          <a:noFill/>
-        </p:spPr>
-        <p:txBody>
-          <a:bodyPr wrap="square" anchor="t">
-            <a:spAutoFit/>
-          </a:bodyPr>
-          <a:lstStyle/>
-          <a:p>
-            <a:pPr algn="r"/>
-            <a:r>
-              <a:rPr sz="900" b="0">
-                <a:solidFill>
-                  <a:srgbClr val="666666"/>
-                </a:solidFill>
-              </a:rPr>
-              <a:t>21 / 25</a:t>
-            </a:r>
-          </a:p>
-        </p:txBody>
-      </p:sp>
-    </p:spTree>
-  </p:cSld>
-  <p:clrMapOvr>
-    <a:masterClrMapping/>
-  </p:clrMapOvr>
-</p:sld>
-</file>
-
-<file path=ppt/slides/slide22.xml><?xml version="1.0" encoding="utf-8"?>
-<p:sld xmlns:a="http://schemas.openxmlformats.org/drawingml/2006/main" xmlns:p="http://schemas.openxmlformats.org/presentationml/2006/main" xmlns:r="http://schemas.openxmlformats.org/officeDocument/2006/relationships">
-  <p:cSld>
-    <p:spTree>
-      <p:nvGrpSpPr>
-        <p:cNvPr id="1" name=""/>
-        <p:cNvGrpSpPr/>
-        <p:nvPr/>
-      </p:nvGrpSpPr>
-      <p:grpSpPr/>
-      <p:sp>
-        <p:nvSpPr>
-          <p:cNvPr id="2" name="Rectangle 1"/>
-          <p:cNvSpPr/>
-          <p:nvPr/>
-        </p:nvSpPr>
-        <p:spPr>
-          <a:xfrm>
-            <a:off x="0" y="0"/>
-            <a:ext cx="12191695" cy="777240"/>
-          </a:xfrm>
-          <a:prstGeom prst="rect">
-            <a:avLst/>
-          </a:prstGeom>
-          <a:solidFill>
-            <a:srgbClr val="041E42"/>
-          </a:solidFill>
-          <a:ln>
-            <a:noFill/>
-          </a:ln>
-          <a:effectLst/>
-        </p:spPr>
-        <p:style>
-          <a:lnRef idx="1">
-            <a:schemeClr val="accent1"/>
-          </a:lnRef>
-          <a:fillRef idx="3">
-            <a:schemeClr val="accent1"/>
-          </a:fillRef>
-          <a:effectRef idx="2">
-            <a:schemeClr val="accent1"/>
-          </a:effectRef>
-          <a:fontRef idx="minor">
-            <a:schemeClr val="lt1"/>
-          </a:fontRef>
-        </p:style>
-        <p:txBody>
-          <a:bodyPr rtlCol="0" anchor="ctr"/>
-          <a:lstStyle/>
-          <a:p>
-            <a:pPr algn="ctr"/>
-          </a:p>
-        </p:txBody>
-      </p:sp>
-      <p:sp>
-        <p:nvSpPr>
-          <p:cNvPr id="3" name="TextBox 2"/>
-          <p:cNvSpPr txBox="1"/>
-          <p:nvPr/>
-        </p:nvSpPr>
-        <p:spPr>
-          <a:xfrm>
-            <a:off x="365760" y="109728"/>
-            <a:ext cx="11430000" cy="457200"/>
-          </a:xfrm>
-          <a:prstGeom prst="rect">
-            <a:avLst/>
-          </a:prstGeom>
-          <a:noFill/>
-        </p:spPr>
-        <p:txBody>
-          <a:bodyPr wrap="square" anchor="t">
-            <a:spAutoFit/>
-          </a:bodyPr>
-          <a:lstStyle/>
-          <a:p>
-            <a:pPr algn="l"/>
-            <a:r>
-              <a:rPr sz="2600" b="1">
-                <a:solidFill>
-                  <a:srgbClr val="FFFFFF"/>
-                </a:solidFill>
-              </a:rPr>
-              <a:t>Future Work  —  Model + Product</a:t>
-            </a:r>
-          </a:p>
-        </p:txBody>
-      </p:sp>
-      <p:sp>
-        <p:nvSpPr>
-          <p:cNvPr id="4" name="TextBox 3"/>
-          <p:cNvSpPr txBox="1"/>
-          <p:nvPr/>
-        </p:nvSpPr>
-        <p:spPr>
-          <a:xfrm>
-            <a:off x="365760" y="457200"/>
-            <a:ext cx="11430000" cy="320040"/>
-          </a:xfrm>
-          <a:prstGeom prst="rect">
-            <a:avLst/>
-          </a:prstGeom>
-          <a:noFill/>
-        </p:spPr>
-        <p:txBody>
-          <a:bodyPr wrap="square" anchor="t">
-            <a:spAutoFit/>
-          </a:bodyPr>
-          <a:lstStyle/>
-          <a:p>
-            <a:pPr algn="l"/>
-            <a:r>
-              <a:rPr sz="1200" b="0">
-                <a:solidFill>
-                  <a:srgbClr val="E8F4FD"/>
-                </a:solidFill>
-              </a:rPr>
-              <a:t>Directions grouped by layer of the stack</a:t>
-            </a:r>
-          </a:p>
-        </p:txBody>
-      </p:sp>
-      <p:sp>
-        <p:nvSpPr>
-          <p:cNvPr id="5" name="Rectangle 4"/>
-          <p:cNvSpPr/>
-          <p:nvPr/>
-        </p:nvSpPr>
-        <p:spPr>
-          <a:xfrm>
-            <a:off x="0" y="777240"/>
-            <a:ext cx="12191695" cy="45720"/>
-          </a:xfrm>
-          <a:prstGeom prst="rect">
-            <a:avLst/>
-          </a:prstGeom>
-          <a:solidFill>
-            <a:srgbClr val="FFC220"/>
-          </a:solidFill>
-          <a:ln>
-            <a:noFill/>
-          </a:ln>
-          <a:effectLst/>
-        </p:spPr>
-        <p:style>
-          <a:lnRef idx="1">
-            <a:schemeClr val="accent1"/>
-          </a:lnRef>
-          <a:fillRef idx="3">
-            <a:schemeClr val="accent1"/>
-          </a:fillRef>
-          <a:effectRef idx="2">
-            <a:schemeClr val="accent1"/>
-          </a:effectRef>
-          <a:fontRef idx="minor">
-            <a:schemeClr val="lt1"/>
-          </a:fontRef>
-        </p:style>
-        <p:txBody>
-          <a:bodyPr rtlCol="0" anchor="ctr"/>
-          <a:lstStyle/>
-          <a:p>
-            <a:pPr algn="ctr"/>
-          </a:p>
-        </p:txBody>
-      </p:sp>
-      <p:sp>
-        <p:nvSpPr>
-          <p:cNvPr id="6" name="Rectangle 5"/>
-          <p:cNvSpPr/>
-          <p:nvPr/>
-        </p:nvSpPr>
-        <p:spPr>
-          <a:xfrm>
-            <a:off x="457200" y="960120"/>
-            <a:ext cx="5532120" cy="5120640"/>
-          </a:xfrm>
-          <a:prstGeom prst="rect">
-            <a:avLst/>
-          </a:prstGeom>
-          <a:solidFill>
-            <a:srgbClr val="E8F4FD"/>
-          </a:solidFill>
-          <a:ln>
-            <a:solidFill>
-              <a:srgbClr val="0071DC"/>
-            </a:solidFill>
-          </a:ln>
-          <a:effectLst/>
-        </p:spPr>
-        <p:style>
-          <a:lnRef idx="1">
-            <a:schemeClr val="accent1"/>
-          </a:lnRef>
-          <a:fillRef idx="3">
-            <a:schemeClr val="accent1"/>
-          </a:fillRef>
-          <a:effectRef idx="2">
-            <a:schemeClr val="accent1"/>
-          </a:effectRef>
-          <a:fontRef idx="minor">
-            <a:schemeClr val="lt1"/>
-          </a:fontRef>
-        </p:style>
-        <p:txBody>
-          <a:bodyPr rtlCol="0" anchor="ctr"/>
-          <a:lstStyle/>
-          <a:p>
-            <a:pPr algn="ctr"/>
-          </a:p>
-        </p:txBody>
-      </p:sp>
-      <p:sp>
-        <p:nvSpPr>
-          <p:cNvPr id="7" name="TextBox 6"/>
-          <p:cNvSpPr txBox="1"/>
-          <p:nvPr/>
-        </p:nvSpPr>
-        <p:spPr>
-          <a:xfrm>
-            <a:off x="640080" y="1097280"/>
-            <a:ext cx="5212080" cy="365760"/>
-          </a:xfrm>
-          <a:prstGeom prst="rect">
-            <a:avLst/>
-          </a:prstGeom>
-          <a:noFill/>
-        </p:spPr>
-        <p:txBody>
-          <a:bodyPr wrap="square" anchor="t">
-            <a:spAutoFit/>
-          </a:bodyPr>
-          <a:lstStyle/>
-          <a:p>
-            <a:pPr algn="l"/>
-            <a:r>
-              <a:rPr sz="1400" b="1">
-                <a:solidFill>
-                  <a:srgbClr val="0071DC"/>
-                </a:solidFill>
-              </a:rPr>
-              <a:t>Model-level</a:t>
-            </a:r>
-          </a:p>
-        </p:txBody>
-      </p:sp>
-      <p:sp>
-        <p:nvSpPr>
-          <p:cNvPr id="8" name="TextBox 7"/>
-          <p:cNvSpPr txBox="1"/>
-          <p:nvPr/>
-        </p:nvSpPr>
-        <p:spPr>
-          <a:xfrm>
-            <a:off x="640080" y="1508760"/>
-            <a:ext cx="5212080" cy="4389120"/>
-          </a:xfrm>
-          <a:prstGeom prst="rect">
-            <a:avLst/>
-          </a:prstGeom>
-          <a:noFill/>
-        </p:spPr>
-        <p:txBody>
-          <a:bodyPr wrap="square">
-            <a:spAutoFit/>
-          </a:bodyPr>
-          <a:lstStyle/>
-          <a:p>
-            <a:pPr>
-              <a:spcAft>
-                <a:spcPts val="400"/>
-              </a:spcAft>
-            </a:pPr>
-            <a:r>
-              <a:rPr sz="1200" b="0">
-                <a:solidFill>
-                  <a:srgbClr val="333333"/>
-                </a:solidFill>
-              </a:rPr>
-              <a:t>•  Joint sentiment + aspect head on a shared encoder  (~30 % inference saving)</a:t>
-            </a:r>
-          </a:p>
-          <a:p>
-            <a:pPr>
-              <a:spcAft>
-                <a:spcPts val="400"/>
-              </a:spcAft>
-            </a:pPr>
-            <a:r>
-              <a:rPr sz="1200" b="0">
-                <a:solidFill>
-                  <a:srgbClr val="333333"/>
-                </a:solidFill>
-              </a:rPr>
-              <a:t>•  Distil ModernBERT to ~50 M-parameter student  →  CPU-only edge inference</a:t>
-            </a:r>
-          </a:p>
-          <a:p>
-            <a:pPr>
-              <a:spcAft>
-                <a:spcPts val="400"/>
-              </a:spcAft>
-            </a:pPr>
-            <a:r>
-              <a:rPr sz="1200" b="0">
-                <a:solidFill>
-                  <a:srgbClr val="333333"/>
-                </a:solidFill>
-              </a:rPr>
-              <a:t>•  Reasoning-augmented VLM captioning  (LLaVA-Next 1.6 B or SmolVLM)</a:t>
-            </a:r>
-          </a:p>
-          <a:p>
-            <a:pPr>
-              <a:spcAft>
-                <a:spcPts val="400"/>
-              </a:spcAft>
-            </a:pPr>
-            <a:r>
-              <a:rPr sz="1200" b="0">
-                <a:solidFill>
-                  <a:srgbClr val="333333"/>
-                </a:solidFill>
-              </a:rPr>
-              <a:t>•  3-seed ensemble for tighter F1 variance</a:t>
-            </a:r>
-          </a:p>
-          <a:p>
-            <a:pPr>
-              <a:spcAft>
-                <a:spcPts val="400"/>
-              </a:spcAft>
-            </a:pPr>
-            <a:r>
-              <a:rPr sz="1200" b="0">
-                <a:solidFill>
-                  <a:srgbClr val="333333"/>
-                </a:solidFill>
-              </a:rPr>
-              <a:t>•  Blind 25-post recheck for defensibility</a:t>
-            </a:r>
-          </a:p>
-        </p:txBody>
-      </p:sp>
-      <p:sp>
-        <p:nvSpPr>
-          <p:cNvPr id="9" name="Rectangle 8"/>
-          <p:cNvSpPr/>
-          <p:nvPr/>
-        </p:nvSpPr>
-        <p:spPr>
-          <a:xfrm>
-            <a:off x="6172200" y="960120"/>
-            <a:ext cx="5532120" cy="5120640"/>
-          </a:xfrm>
-          <a:prstGeom prst="rect">
-            <a:avLst/>
-          </a:prstGeom>
-          <a:solidFill>
-            <a:srgbClr val="EDE9FE"/>
-          </a:solidFill>
-          <a:ln>
-            <a:solidFill>
-              <a:srgbClr val="7C3AED"/>
-            </a:solidFill>
-          </a:ln>
-          <a:effectLst/>
-        </p:spPr>
-        <p:style>
-          <a:lnRef idx="1">
-            <a:schemeClr val="accent1"/>
-          </a:lnRef>
-          <a:fillRef idx="3">
-            <a:schemeClr val="accent1"/>
-          </a:fillRef>
-          <a:effectRef idx="2">
-            <a:schemeClr val="accent1"/>
-          </a:effectRef>
-          <a:fontRef idx="minor">
-            <a:schemeClr val="lt1"/>
-          </a:fontRef>
-        </p:style>
-        <p:txBody>
-          <a:bodyPr rtlCol="0" anchor="ctr"/>
-          <a:lstStyle/>
-          <a:p>
-            <a:pPr algn="ctr"/>
-          </a:p>
-        </p:txBody>
-      </p:sp>
-      <p:sp>
-        <p:nvSpPr>
-          <p:cNvPr id="10" name="TextBox 9"/>
-          <p:cNvSpPr txBox="1"/>
-          <p:nvPr/>
-        </p:nvSpPr>
-        <p:spPr>
-          <a:xfrm>
-            <a:off x="6355080" y="1097280"/>
-            <a:ext cx="5212080" cy="365760"/>
-          </a:xfrm>
-          <a:prstGeom prst="rect">
-            <a:avLst/>
-          </a:prstGeom>
-          <a:noFill/>
-        </p:spPr>
-        <p:txBody>
-          <a:bodyPr wrap="square" anchor="t">
-            <a:spAutoFit/>
-          </a:bodyPr>
-          <a:lstStyle/>
-          <a:p>
-            <a:pPr algn="l"/>
-            <a:r>
-              <a:rPr sz="1400" b="1">
-                <a:solidFill>
-                  <a:srgbClr val="7C3AED"/>
-                </a:solidFill>
-              </a:rPr>
-              <a:t>Product-level</a:t>
-            </a:r>
-          </a:p>
-        </p:txBody>
-      </p:sp>
-      <p:sp>
-        <p:nvSpPr>
-          <p:cNvPr id="11" name="TextBox 10"/>
-          <p:cNvSpPr txBox="1"/>
-          <p:nvPr/>
-        </p:nvSpPr>
-        <p:spPr>
-          <a:xfrm>
-            <a:off x="6355080" y="1508760"/>
-            <a:ext cx="5212080" cy="4389120"/>
-          </a:xfrm>
-          <a:prstGeom prst="rect">
-            <a:avLst/>
-          </a:prstGeom>
-          <a:noFill/>
-        </p:spPr>
-        <p:txBody>
-          <a:bodyPr wrap="square">
-            <a:spAutoFit/>
-          </a:bodyPr>
-          <a:lstStyle/>
-          <a:p>
-            <a:pPr>
-              <a:spcAft>
-                <a:spcPts val="400"/>
-              </a:spcAft>
-            </a:pPr>
-            <a:r>
-              <a:rPr sz="1200" b="0">
-                <a:solidFill>
-                  <a:srgbClr val="333333"/>
-                </a:solidFill>
-              </a:rPr>
-              <a:t>•  Auto-reply confidence gate  —  promote LLM drafts to "queued to send" when analyst edit-distance &lt; threshold</a:t>
-            </a:r>
-          </a:p>
-          <a:p>
-            <a:pPr>
-              <a:spcAft>
-                <a:spcPts val="400"/>
-              </a:spcAft>
-            </a:pPr>
-            <a:r>
-              <a:rPr sz="1200" b="0">
-                <a:solidFill>
-                  <a:srgbClr val="333333"/>
-                </a:solidFill>
-              </a:rPr>
-              <a:t>•  Predictive P1 forecast  —  seasonal decomposition on daily counts (24–48 h ahead)</a:t>
-            </a:r>
-          </a:p>
-          <a:p>
-            <a:pPr>
-              <a:spcAft>
-                <a:spcPts val="400"/>
-              </a:spcAft>
-            </a:pPr>
-            <a:r>
-              <a:rPr sz="1200" b="0">
-                <a:solidFill>
-                  <a:srgbClr val="333333"/>
-                </a:solidFill>
-              </a:rPr>
-              <a:t>•  Bilingual (Hindi + English) taxonomy</a:t>
-            </a:r>
-          </a:p>
-          <a:p>
-            <a:pPr>
-              <a:spcAft>
-                <a:spcPts val="400"/>
-              </a:spcAft>
-            </a:pPr>
-            <a:r>
-              <a:rPr sz="1200" b="0">
-                <a:solidFill>
-                  <a:srgbClr val="333333"/>
-                </a:solidFill>
-              </a:rPr>
-              <a:t>•  Slack-bot inline notification responses</a:t>
-            </a:r>
-          </a:p>
-          <a:p>
-            <a:pPr>
-              <a:spcAft>
-                <a:spcPts val="400"/>
-              </a:spcAft>
-            </a:pPr>
-            <a:r>
-              <a:rPr sz="1200" b="0">
-                <a:solidFill>
-                  <a:srgbClr val="333333"/>
-                </a:solidFill>
-              </a:rPr>
-              <a:t>•  Automated retraining pipeline hook</a:t>
-            </a:r>
-          </a:p>
-        </p:txBody>
-      </p:sp>
-      <p:sp>
-        <p:nvSpPr>
-          <p:cNvPr id="12" name="TextBox 11"/>
-          <p:cNvSpPr txBox="1"/>
-          <p:nvPr/>
-        </p:nvSpPr>
-        <p:spPr>
-          <a:xfrm>
-            <a:off x="365760" y="6537960"/>
-            <a:ext cx="8229600" cy="274320"/>
-          </a:xfrm>
-          <a:prstGeom prst="rect">
-            <a:avLst/>
-          </a:prstGeom>
-          <a:noFill/>
-        </p:spPr>
-        <p:txBody>
-          <a:bodyPr wrap="square" anchor="t">
-            <a:spAutoFit/>
-          </a:bodyPr>
-          <a:lstStyle/>
-          <a:p>
-            <a:pPr algn="l"/>
-            <a:r>
-              <a:rPr sz="900" b="0">
-                <a:solidFill>
-                  <a:srgbClr val="666666"/>
-                </a:solidFill>
-              </a:rPr>
-              <a:t>Retail Sentiment Intelligence  ·  BITS ZG628T Dissertation  ·  Vishal Singh  ·  Post Mid-Semester Presentation</a:t>
-            </a:r>
-          </a:p>
-        </p:txBody>
-      </p:sp>
-      <p:sp>
-        <p:nvSpPr>
-          <p:cNvPr id="13" name="TextBox 12"/>
-          <p:cNvSpPr txBox="1"/>
-          <p:nvPr/>
-        </p:nvSpPr>
-        <p:spPr>
-          <a:xfrm>
-            <a:off x="10972800" y="6537960"/>
-            <a:ext cx="1097280" cy="274320"/>
-          </a:xfrm>
-          <a:prstGeom prst="rect">
-            <a:avLst/>
-          </a:prstGeom>
-          <a:noFill/>
-        </p:spPr>
-        <p:txBody>
-          <a:bodyPr wrap="square" anchor="t">
-            <a:spAutoFit/>
-          </a:bodyPr>
-          <a:lstStyle/>
-          <a:p>
-            <a:pPr algn="r"/>
-            <a:r>
-              <a:rPr sz="900" b="0">
-                <a:solidFill>
-                  <a:srgbClr val="666666"/>
-                </a:solidFill>
-              </a:rPr>
-              <a:t>22 / 25</a:t>
-            </a:r>
-          </a:p>
-        </p:txBody>
-      </p:sp>
-    </p:spTree>
-  </p:cSld>
-  <p:clrMapOvr>
-    <a:masterClrMapping/>
-  </p:clrMapOvr>
-</p:sld>
-</file>
-
-<file path=ppt/slides/slide23.xml><?xml version="1.0" encoding="utf-8"?>
-<p:sld xmlns:a="http://schemas.openxmlformats.org/drawingml/2006/main" xmlns:p="http://schemas.openxmlformats.org/presentationml/2006/main" xmlns:r="http://schemas.openxmlformats.org/officeDocument/2006/relationships">
-  <p:cSld>
-    <p:spTree>
-      <p:nvGrpSpPr>
-        <p:cNvPr id="1" name=""/>
-        <p:cNvGrpSpPr/>
-        <p:nvPr/>
-      </p:nvGrpSpPr>
-      <p:grpSpPr/>
-      <p:sp>
-        <p:nvSpPr>
-          <p:cNvPr id="2" name="Rectangle 1"/>
-          <p:cNvSpPr/>
-          <p:nvPr/>
-        </p:nvSpPr>
-        <p:spPr>
-          <a:xfrm>
-            <a:off x="0" y="0"/>
-            <a:ext cx="12191695" cy="777240"/>
-          </a:xfrm>
-          <a:prstGeom prst="rect">
-            <a:avLst/>
-          </a:prstGeom>
-          <a:solidFill>
-            <a:srgbClr val="041E42"/>
-          </a:solidFill>
-          <a:ln>
-            <a:noFill/>
-          </a:ln>
-          <a:effectLst/>
-        </p:spPr>
-        <p:style>
-          <a:lnRef idx="1">
-            <a:schemeClr val="accent1"/>
-          </a:lnRef>
-          <a:fillRef idx="3">
-            <a:schemeClr val="accent1"/>
-          </a:fillRef>
-          <a:effectRef idx="2">
-            <a:schemeClr val="accent1"/>
-          </a:effectRef>
-          <a:fontRef idx="minor">
-            <a:schemeClr val="lt1"/>
-          </a:fontRef>
-        </p:style>
-        <p:txBody>
-          <a:bodyPr rtlCol="0" anchor="ctr"/>
-          <a:lstStyle/>
-          <a:p>
-            <a:pPr algn="ctr"/>
-          </a:p>
-        </p:txBody>
-      </p:sp>
-      <p:sp>
-        <p:nvSpPr>
-          <p:cNvPr id="3" name="TextBox 2"/>
-          <p:cNvSpPr txBox="1"/>
-          <p:nvPr/>
-        </p:nvSpPr>
-        <p:spPr>
-          <a:xfrm>
-            <a:off x="365760" y="109728"/>
-            <a:ext cx="11430000" cy="457200"/>
-          </a:xfrm>
-          <a:prstGeom prst="rect">
-            <a:avLst/>
-          </a:prstGeom>
-          <a:noFill/>
-        </p:spPr>
-        <p:txBody>
-          <a:bodyPr wrap="square" anchor="t">
-            <a:spAutoFit/>
-          </a:bodyPr>
-          <a:lstStyle/>
-          <a:p>
-            <a:pPr algn="l"/>
-            <a:r>
-              <a:rPr sz="2600" b="1">
-                <a:solidFill>
-                  <a:srgbClr val="FFFFFF"/>
-                </a:solidFill>
-              </a:rPr>
-              <a:t>Future Work  —  Operational</a:t>
-            </a:r>
-          </a:p>
-        </p:txBody>
-      </p:sp>
-      <p:sp>
-        <p:nvSpPr>
-          <p:cNvPr id="4" name="TextBox 3"/>
-          <p:cNvSpPr txBox="1"/>
-          <p:nvPr/>
-        </p:nvSpPr>
-        <p:spPr>
-          <a:xfrm>
-            <a:off x="365760" y="457200"/>
-            <a:ext cx="11430000" cy="320040"/>
-          </a:xfrm>
-          <a:prstGeom prst="rect">
-            <a:avLst/>
-          </a:prstGeom>
-          <a:noFill/>
-        </p:spPr>
-        <p:txBody>
-          <a:bodyPr wrap="square" anchor="t">
-            <a:spAutoFit/>
-          </a:bodyPr>
-          <a:lstStyle/>
-          <a:p>
-            <a:pPr algn="l"/>
-            <a:r>
-              <a:rPr sz="1200" b="0">
-                <a:solidFill>
-                  <a:srgbClr val="E8F4FD"/>
-                </a:solidFill>
-              </a:rPr>
-              <a:t>Path from local prototype to Walmart-production service</a:t>
-            </a:r>
-          </a:p>
-        </p:txBody>
-      </p:sp>
-      <p:sp>
-        <p:nvSpPr>
-          <p:cNvPr id="5" name="Rectangle 4"/>
-          <p:cNvSpPr/>
-          <p:nvPr/>
-        </p:nvSpPr>
-        <p:spPr>
-          <a:xfrm>
-            <a:off x="0" y="777240"/>
-            <a:ext cx="12191695" cy="45720"/>
-          </a:xfrm>
-          <a:prstGeom prst="rect">
-            <a:avLst/>
-          </a:prstGeom>
-          <a:solidFill>
-            <a:srgbClr val="FFC220"/>
-          </a:solidFill>
-          <a:ln>
-            <a:noFill/>
-          </a:ln>
-          <a:effectLst/>
-        </p:spPr>
-        <p:style>
-          <a:lnRef idx="1">
-            <a:schemeClr val="accent1"/>
-          </a:lnRef>
-          <a:fillRef idx="3">
-            <a:schemeClr val="accent1"/>
-          </a:fillRef>
-          <a:effectRef idx="2">
-            <a:schemeClr val="accent1"/>
-          </a:effectRef>
-          <a:fontRef idx="minor">
-            <a:schemeClr val="lt1"/>
-          </a:fontRef>
-        </p:style>
-        <p:txBody>
-          <a:bodyPr rtlCol="0" anchor="ctr"/>
-          <a:lstStyle/>
-          <a:p>
-            <a:pPr algn="ctr"/>
-          </a:p>
-        </p:txBody>
-      </p:sp>
-      <p:sp>
-        <p:nvSpPr>
-          <p:cNvPr id="6" name="Rectangle 5"/>
-          <p:cNvSpPr/>
-          <p:nvPr/>
-        </p:nvSpPr>
-        <p:spPr>
-          <a:xfrm>
-            <a:off x="457200" y="1051560"/>
-            <a:ext cx="11247120" cy="1188720"/>
-          </a:xfrm>
-          <a:prstGeom prst="rect">
-            <a:avLst/>
-          </a:prstGeom>
-          <a:solidFill>
-            <a:srgbClr val="F5F5F5"/>
-          </a:solidFill>
-          <a:ln>
-            <a:solidFill>
-              <a:srgbClr val="0071DC"/>
-            </a:solidFill>
-          </a:ln>
-          <a:effectLst/>
-        </p:spPr>
-        <p:style>
-          <a:lnRef idx="1">
-            <a:schemeClr val="accent1"/>
-          </a:lnRef>
-          <a:fillRef idx="3">
-            <a:schemeClr val="accent1"/>
-          </a:fillRef>
-          <a:effectRef idx="2">
-            <a:schemeClr val="accent1"/>
-          </a:effectRef>
-          <a:fontRef idx="minor">
-            <a:schemeClr val="lt1"/>
-          </a:fontRef>
-        </p:style>
-        <p:txBody>
-          <a:bodyPr rtlCol="0" anchor="ctr"/>
-          <a:lstStyle/>
-          <a:p>
-            <a:pPr algn="ctr"/>
-          </a:p>
-        </p:txBody>
-      </p:sp>
-      <p:sp>
-        <p:nvSpPr>
-          <p:cNvPr id="7" name="Rectangle 6"/>
-          <p:cNvSpPr/>
-          <p:nvPr/>
-        </p:nvSpPr>
-        <p:spPr>
-          <a:xfrm>
-            <a:off x="457200" y="1051560"/>
-            <a:ext cx="182880" cy="1188720"/>
-          </a:xfrm>
-          <a:prstGeom prst="rect">
-            <a:avLst/>
-          </a:prstGeom>
-          <a:solidFill>
-            <a:srgbClr val="0071DC"/>
-          </a:solidFill>
-          <a:ln>
-            <a:noFill/>
-          </a:ln>
-          <a:effectLst/>
-        </p:spPr>
-        <p:style>
-          <a:lnRef idx="1">
-            <a:schemeClr val="accent1"/>
-          </a:lnRef>
-          <a:fillRef idx="3">
-            <a:schemeClr val="accent1"/>
-          </a:fillRef>
-          <a:effectRef idx="2">
-            <a:schemeClr val="accent1"/>
-          </a:effectRef>
-          <a:fontRef idx="minor">
-            <a:schemeClr val="lt1"/>
-          </a:fontRef>
-        </p:style>
-        <p:txBody>
-          <a:bodyPr rtlCol="0" anchor="ctr"/>
-          <a:lstStyle/>
-          <a:p>
-            <a:pPr algn="ctr"/>
-          </a:p>
-        </p:txBody>
-      </p:sp>
-      <p:sp>
-        <p:nvSpPr>
-          <p:cNvPr id="8" name="TextBox 7"/>
-          <p:cNvSpPr txBox="1"/>
-          <p:nvPr/>
-        </p:nvSpPr>
-        <p:spPr>
-          <a:xfrm>
-            <a:off x="822960" y="1161288"/>
-            <a:ext cx="10515600" cy="411480"/>
-          </a:xfrm>
-          <a:prstGeom prst="rect">
-            <a:avLst/>
-          </a:prstGeom>
-          <a:noFill/>
-        </p:spPr>
-        <p:txBody>
-          <a:bodyPr wrap="square" anchor="t">
-            <a:spAutoFit/>
-          </a:bodyPr>
-          <a:lstStyle/>
-          <a:p>
-            <a:pPr algn="l"/>
-            <a:r>
-              <a:rPr sz="1400" b="1">
-                <a:solidFill>
-                  <a:srgbClr val="041E42"/>
-                </a:solidFill>
-              </a:rPr>
-              <a:t>Kubernetes CronJob</a:t>
-            </a:r>
-          </a:p>
-        </p:txBody>
-      </p:sp>
-      <p:sp>
-        <p:nvSpPr>
-          <p:cNvPr id="9" name="TextBox 8"/>
-          <p:cNvSpPr txBox="1"/>
-          <p:nvPr/>
-        </p:nvSpPr>
-        <p:spPr>
-          <a:xfrm>
-            <a:off x="822960" y="1600200"/>
-            <a:ext cx="10515600" cy="640080"/>
-          </a:xfrm>
-          <a:prstGeom prst="rect">
-            <a:avLst/>
-          </a:prstGeom>
-          <a:noFill/>
-        </p:spPr>
-        <p:txBody>
-          <a:bodyPr wrap="square" anchor="t">
-            <a:spAutoFit/>
-          </a:bodyPr>
-          <a:lstStyle/>
-          <a:p>
-            <a:pPr algn="l"/>
-            <a:r>
-              <a:rPr sz="1100" b="0">
-                <a:solidFill>
-                  <a:srgbClr val="333333"/>
-                </a:solidFill>
-              </a:rPr>
-              <a:t>Deploy the pipeline as a scheduled Kubernetes CronJob backed by a managed Postgres instance for multi-analyst concurrency.</a:t>
-            </a:r>
-          </a:p>
-        </p:txBody>
-      </p:sp>
-      <p:sp>
-        <p:nvSpPr>
-          <p:cNvPr id="10" name="Rectangle 9"/>
-          <p:cNvSpPr/>
-          <p:nvPr/>
-        </p:nvSpPr>
-        <p:spPr>
-          <a:xfrm>
-            <a:off x="457200" y="2350008"/>
-            <a:ext cx="11247120" cy="1188720"/>
-          </a:xfrm>
-          <a:prstGeom prst="rect">
-            <a:avLst/>
-          </a:prstGeom>
-          <a:solidFill>
-            <a:srgbClr val="F5F5F5"/>
-          </a:solidFill>
-          <a:ln>
-            <a:solidFill>
-              <a:srgbClr val="10B981"/>
-            </a:solidFill>
-          </a:ln>
-          <a:effectLst/>
-        </p:spPr>
-        <p:style>
-          <a:lnRef idx="1">
-            <a:schemeClr val="accent1"/>
-          </a:lnRef>
-          <a:fillRef idx="3">
-            <a:schemeClr val="accent1"/>
-          </a:fillRef>
-          <a:effectRef idx="2">
-            <a:schemeClr val="accent1"/>
-          </a:effectRef>
-          <a:fontRef idx="minor">
-            <a:schemeClr val="lt1"/>
-          </a:fontRef>
-        </p:style>
-        <p:txBody>
-          <a:bodyPr rtlCol="0" anchor="ctr"/>
-          <a:lstStyle/>
-          <a:p>
-            <a:pPr algn="ctr"/>
-          </a:p>
-        </p:txBody>
-      </p:sp>
-      <p:sp>
-        <p:nvSpPr>
-          <p:cNvPr id="11" name="Rectangle 10"/>
-          <p:cNvSpPr/>
-          <p:nvPr/>
-        </p:nvSpPr>
-        <p:spPr>
-          <a:xfrm>
-            <a:off x="457200" y="2350008"/>
-            <a:ext cx="182880" cy="1188720"/>
-          </a:xfrm>
-          <a:prstGeom prst="rect">
-            <a:avLst/>
-          </a:prstGeom>
-          <a:solidFill>
-            <a:srgbClr val="10B981"/>
-          </a:solidFill>
-          <a:ln>
-            <a:noFill/>
-          </a:ln>
-          <a:effectLst/>
-        </p:spPr>
-        <p:style>
-          <a:lnRef idx="1">
-            <a:schemeClr val="accent1"/>
-          </a:lnRef>
-          <a:fillRef idx="3">
-            <a:schemeClr val="accent1"/>
-          </a:fillRef>
-          <a:effectRef idx="2">
-            <a:schemeClr val="accent1"/>
-          </a:effectRef>
-          <a:fontRef idx="minor">
-            <a:schemeClr val="lt1"/>
-          </a:fontRef>
-        </p:style>
-        <p:txBody>
-          <a:bodyPr rtlCol="0" anchor="ctr"/>
-          <a:lstStyle/>
-          <a:p>
-            <a:pPr algn="ctr"/>
-          </a:p>
-        </p:txBody>
-      </p:sp>
-      <p:sp>
-        <p:nvSpPr>
-          <p:cNvPr id="12" name="TextBox 11"/>
-          <p:cNvSpPr txBox="1"/>
-          <p:nvPr/>
-        </p:nvSpPr>
-        <p:spPr>
-          <a:xfrm>
-            <a:off x="822960" y="2459736"/>
-            <a:ext cx="10515600" cy="411480"/>
-          </a:xfrm>
-          <a:prstGeom prst="rect">
-            <a:avLst/>
-          </a:prstGeom>
-          <a:noFill/>
-        </p:spPr>
-        <p:txBody>
-          <a:bodyPr wrap="square" anchor="t">
-            <a:spAutoFit/>
-          </a:bodyPr>
-          <a:lstStyle/>
-          <a:p>
-            <a:pPr algn="l"/>
-            <a:r>
-              <a:rPr sz="1400" b="1">
-                <a:solidFill>
-                  <a:srgbClr val="041E42"/>
-                </a:solidFill>
-              </a:rPr>
-              <a:t>Azure Cosmos DB migration</a:t>
-            </a:r>
-          </a:p>
-        </p:txBody>
-      </p:sp>
-      <p:sp>
-        <p:nvSpPr>
-          <p:cNvPr id="13" name="TextBox 12"/>
-          <p:cNvSpPr txBox="1"/>
-          <p:nvPr/>
-        </p:nvSpPr>
-        <p:spPr>
-          <a:xfrm>
-            <a:off x="822960" y="2898648"/>
-            <a:ext cx="10515600" cy="640080"/>
-          </a:xfrm>
-          <a:prstGeom prst="rect">
-            <a:avLst/>
-          </a:prstGeom>
-          <a:noFill/>
-        </p:spPr>
-        <p:txBody>
-          <a:bodyPr wrap="square" anchor="t">
-            <a:spAutoFit/>
-          </a:bodyPr>
-          <a:lstStyle/>
-          <a:p>
-            <a:pPr algn="l"/>
-            <a:r>
-              <a:rPr sz="1100" b="0">
-                <a:solidFill>
-                  <a:srgbClr val="333333"/>
-                </a:solidFill>
-              </a:rPr>
-              <a:t>Swap SQLiteBackend for CosmosBackend (schema already mirrors partition design)  —  no calling-code change.</a:t>
-            </a:r>
-          </a:p>
-        </p:txBody>
-      </p:sp>
-      <p:sp>
-        <p:nvSpPr>
-          <p:cNvPr id="14" name="Rectangle 13"/>
-          <p:cNvSpPr/>
-          <p:nvPr/>
-        </p:nvSpPr>
-        <p:spPr>
-          <a:xfrm>
-            <a:off x="457200" y="3648456"/>
-            <a:ext cx="11247120" cy="1188720"/>
-          </a:xfrm>
-          <a:prstGeom prst="rect">
-            <a:avLst/>
-          </a:prstGeom>
-          <a:solidFill>
-            <a:srgbClr val="F5F5F5"/>
-          </a:solidFill>
-          <a:ln>
-            <a:solidFill>
-              <a:srgbClr val="D97706"/>
-            </a:solidFill>
-          </a:ln>
-          <a:effectLst/>
-        </p:spPr>
-        <p:style>
-          <a:lnRef idx="1">
-            <a:schemeClr val="accent1"/>
-          </a:lnRef>
-          <a:fillRef idx="3">
-            <a:schemeClr val="accent1"/>
-          </a:fillRef>
-          <a:effectRef idx="2">
-            <a:schemeClr val="accent1"/>
-          </a:effectRef>
-          <a:fontRef idx="minor">
-            <a:schemeClr val="lt1"/>
-          </a:fontRef>
-        </p:style>
-        <p:txBody>
-          <a:bodyPr rtlCol="0" anchor="ctr"/>
-          <a:lstStyle/>
-          <a:p>
-            <a:pPr algn="ctr"/>
-          </a:p>
-        </p:txBody>
-      </p:sp>
-      <p:sp>
-        <p:nvSpPr>
-          <p:cNvPr id="15" name="Rectangle 14"/>
-          <p:cNvSpPr/>
-          <p:nvPr/>
-        </p:nvSpPr>
-        <p:spPr>
-          <a:xfrm>
-            <a:off x="457200" y="3648456"/>
-            <a:ext cx="182880" cy="1188720"/>
-          </a:xfrm>
-          <a:prstGeom prst="rect">
-            <a:avLst/>
-          </a:prstGeom>
-          <a:solidFill>
-            <a:srgbClr val="D97706"/>
-          </a:solidFill>
-          <a:ln>
-            <a:noFill/>
-          </a:ln>
-          <a:effectLst/>
-        </p:spPr>
-        <p:style>
-          <a:lnRef idx="1">
-            <a:schemeClr val="accent1"/>
-          </a:lnRef>
-          <a:fillRef idx="3">
-            <a:schemeClr val="accent1"/>
-          </a:fillRef>
-          <a:effectRef idx="2">
-            <a:schemeClr val="accent1"/>
-          </a:effectRef>
-          <a:fontRef idx="minor">
-            <a:schemeClr val="lt1"/>
-          </a:fontRef>
-        </p:style>
-        <p:txBody>
-          <a:bodyPr rtlCol="0" anchor="ctr"/>
-          <a:lstStyle/>
-          <a:p>
-            <a:pPr algn="ctr"/>
-          </a:p>
-        </p:txBody>
-      </p:sp>
-      <p:sp>
-        <p:nvSpPr>
-          <p:cNvPr id="16" name="TextBox 15"/>
-          <p:cNvSpPr txBox="1"/>
-          <p:nvPr/>
-        </p:nvSpPr>
-        <p:spPr>
-          <a:xfrm>
-            <a:off x="822960" y="3758184"/>
-            <a:ext cx="10515600" cy="411480"/>
-          </a:xfrm>
-          <a:prstGeom prst="rect">
-            <a:avLst/>
-          </a:prstGeom>
-          <a:noFill/>
-        </p:spPr>
-        <p:txBody>
-          <a:bodyPr wrap="square" anchor="t">
-            <a:spAutoFit/>
-          </a:bodyPr>
-          <a:lstStyle/>
-          <a:p>
-            <a:pPr algn="l"/>
-            <a:r>
-              <a:rPr sz="1400" b="1">
-                <a:solidFill>
-                  <a:srgbClr val="041E42"/>
-                </a:solidFill>
-              </a:rPr>
-              <a:t>Walmart ticketing integration</a:t>
-            </a:r>
-          </a:p>
-        </p:txBody>
-      </p:sp>
-      <p:sp>
-        <p:nvSpPr>
-          <p:cNvPr id="17" name="TextBox 16"/>
-          <p:cNvSpPr txBox="1"/>
-          <p:nvPr/>
-        </p:nvSpPr>
-        <p:spPr>
-          <a:xfrm>
-            <a:off x="822960" y="4197096"/>
-            <a:ext cx="10515600" cy="640080"/>
-          </a:xfrm>
-          <a:prstGeom prst="rect">
-            <a:avLst/>
-          </a:prstGeom>
-          <a:noFill/>
-        </p:spPr>
-        <p:txBody>
-          <a:bodyPr wrap="square" anchor="t">
-            <a:spAutoFit/>
-          </a:bodyPr>
-          <a:lstStyle/>
-          <a:p>
-            <a:pPr algn="l"/>
-            <a:r>
-              <a:rPr sz="1100" b="0">
-                <a:solidFill>
-                  <a:srgbClr val="333333"/>
-                </a:solidFill>
-              </a:rPr>
-              <a:t>P1 alerts open cases directly in Walmart's internal ticketing so the analyst never leaves the workflow.</a:t>
-            </a:r>
-          </a:p>
-        </p:txBody>
-      </p:sp>
-      <p:sp>
-        <p:nvSpPr>
-          <p:cNvPr id="18" name="Rectangle 17"/>
-          <p:cNvSpPr/>
-          <p:nvPr/>
-        </p:nvSpPr>
-        <p:spPr>
-          <a:xfrm>
-            <a:off x="457200" y="4946904"/>
-            <a:ext cx="11247120" cy="1188720"/>
-          </a:xfrm>
-          <a:prstGeom prst="rect">
-            <a:avLst/>
-          </a:prstGeom>
-          <a:solidFill>
-            <a:srgbClr val="F5F5F5"/>
-          </a:solidFill>
-          <a:ln>
-            <a:solidFill>
-              <a:srgbClr val="7C3AED"/>
-            </a:solidFill>
-          </a:ln>
-          <a:effectLst/>
-        </p:spPr>
-        <p:style>
-          <a:lnRef idx="1">
-            <a:schemeClr val="accent1"/>
-          </a:lnRef>
-          <a:fillRef idx="3">
-            <a:schemeClr val="accent1"/>
-          </a:fillRef>
-          <a:effectRef idx="2">
-            <a:schemeClr val="accent1"/>
-          </a:effectRef>
-          <a:fontRef idx="minor">
-            <a:schemeClr val="lt1"/>
-          </a:fontRef>
-        </p:style>
-        <p:txBody>
-          <a:bodyPr rtlCol="0" anchor="ctr"/>
-          <a:lstStyle/>
-          <a:p>
-            <a:pPr algn="ctr"/>
-          </a:p>
-        </p:txBody>
-      </p:sp>
-      <p:sp>
-        <p:nvSpPr>
-          <p:cNvPr id="19" name="Rectangle 18"/>
-          <p:cNvSpPr/>
-          <p:nvPr/>
-        </p:nvSpPr>
-        <p:spPr>
-          <a:xfrm>
-            <a:off x="457200" y="4946904"/>
-            <a:ext cx="182880" cy="1188720"/>
-          </a:xfrm>
-          <a:prstGeom prst="rect">
-            <a:avLst/>
-          </a:prstGeom>
-          <a:solidFill>
-            <a:srgbClr val="7C3AED"/>
-          </a:solidFill>
-          <a:ln>
-            <a:noFill/>
-          </a:ln>
-          <a:effectLst/>
-        </p:spPr>
-        <p:style>
-          <a:lnRef idx="1">
-            <a:schemeClr val="accent1"/>
-          </a:lnRef>
-          <a:fillRef idx="3">
-            <a:schemeClr val="accent1"/>
-          </a:fillRef>
-          <a:effectRef idx="2">
-            <a:schemeClr val="accent1"/>
-          </a:effectRef>
-          <a:fontRef idx="minor">
-            <a:schemeClr val="lt1"/>
-          </a:fontRef>
-        </p:style>
-        <p:txBody>
-          <a:bodyPr rtlCol="0" anchor="ctr"/>
-          <a:lstStyle/>
-          <a:p>
-            <a:pPr algn="ctr"/>
-          </a:p>
-        </p:txBody>
-      </p:sp>
-      <p:sp>
-        <p:nvSpPr>
-          <p:cNvPr id="20" name="TextBox 19"/>
-          <p:cNvSpPr txBox="1"/>
-          <p:nvPr/>
-        </p:nvSpPr>
-        <p:spPr>
-          <a:xfrm>
-            <a:off x="822960" y="5056632"/>
-            <a:ext cx="10515600" cy="411480"/>
-          </a:xfrm>
-          <a:prstGeom prst="rect">
-            <a:avLst/>
-          </a:prstGeom>
-          <a:noFill/>
-        </p:spPr>
-        <p:txBody>
-          <a:bodyPr wrap="square" anchor="t">
-            <a:spAutoFit/>
-          </a:bodyPr>
-          <a:lstStyle/>
-          <a:p>
-            <a:pPr algn="l"/>
-            <a:r>
-              <a:rPr sz="1400" b="1">
-                <a:solidFill>
-                  <a:srgbClr val="041E42"/>
-                </a:solidFill>
-              </a:rPr>
-              <a:t>Broader ingestion</a:t>
-            </a:r>
-          </a:p>
-        </p:txBody>
-      </p:sp>
-      <p:sp>
-        <p:nvSpPr>
-          <p:cNvPr id="21" name="TextBox 20"/>
-          <p:cNvSpPr txBox="1"/>
-          <p:nvPr/>
-        </p:nvSpPr>
-        <p:spPr>
-          <a:xfrm>
-            <a:off x="822960" y="5495544"/>
-            <a:ext cx="10515600" cy="640080"/>
-          </a:xfrm>
-          <a:prstGeom prst="rect">
-            <a:avLst/>
-          </a:prstGeom>
-          <a:noFill/>
-        </p:spPr>
-        <p:txBody>
-          <a:bodyPr wrap="square" anchor="t">
-            <a:spAutoFit/>
-          </a:bodyPr>
-          <a:lstStyle/>
-          <a:p>
-            <a:pPr algn="l"/>
-            <a:r>
-              <a:rPr sz="1100" b="0">
-                <a:solidFill>
-                  <a:srgbClr val="333333"/>
-                </a:solidFill>
-              </a:rPr>
-              <a:t>Extend beyond Reddit to Twitter / X, YouTube comments, and app-store reviews on the same trust + sentiment stack.</a:t>
-            </a:r>
-          </a:p>
-        </p:txBody>
-      </p:sp>
-      <p:sp>
-        <p:nvSpPr>
-          <p:cNvPr id="22" name="TextBox 21"/>
-          <p:cNvSpPr txBox="1"/>
-          <p:nvPr/>
-        </p:nvSpPr>
-        <p:spPr>
-          <a:xfrm>
-            <a:off x="365760" y="6537960"/>
-            <a:ext cx="8229600" cy="274320"/>
-          </a:xfrm>
-          <a:prstGeom prst="rect">
-            <a:avLst/>
-          </a:prstGeom>
-          <a:noFill/>
-        </p:spPr>
-        <p:txBody>
-          <a:bodyPr wrap="square" anchor="t">
-            <a:spAutoFit/>
-          </a:bodyPr>
-          <a:lstStyle/>
-          <a:p>
-            <a:pPr algn="l"/>
-            <a:r>
-              <a:rPr sz="900" b="0">
-                <a:solidFill>
-                  <a:srgbClr val="666666"/>
-                </a:solidFill>
-              </a:rPr>
-              <a:t>Retail Sentiment Intelligence  ·  BITS ZG628T Dissertation  ·  Vishal Singh  ·  Post Mid-Semester Presentation</a:t>
-            </a:r>
-          </a:p>
-        </p:txBody>
-      </p:sp>
-      <p:sp>
-        <p:nvSpPr>
-          <p:cNvPr id="23" name="TextBox 22"/>
-          <p:cNvSpPr txBox="1"/>
-          <p:nvPr/>
-        </p:nvSpPr>
-        <p:spPr>
-          <a:xfrm>
-            <a:off x="10972800" y="6537960"/>
-            <a:ext cx="1097280" cy="274320"/>
-          </a:xfrm>
-          <a:prstGeom prst="rect">
-            <a:avLst/>
-          </a:prstGeom>
-          <a:noFill/>
-        </p:spPr>
-        <p:txBody>
-          <a:bodyPr wrap="square" anchor="t">
-            <a:spAutoFit/>
-          </a:bodyPr>
-          <a:lstStyle/>
-          <a:p>
-            <a:pPr algn="r"/>
-            <a:r>
-              <a:rPr sz="900" b="0">
-                <a:solidFill>
-                  <a:srgbClr val="666666"/>
-                </a:solidFill>
-              </a:rPr>
-              <a:t>23 / 25</a:t>
-            </a:r>
-          </a:p>
-        </p:txBody>
-      </p:sp>
-    </p:spTree>
-  </p:cSld>
-  <p:clrMapOvr>
-    <a:masterClrMapping/>
-  </p:clrMapOvr>
-</p:sld>
-</file>
-
-<file path=ppt/slides/slide24.xml><?xml version="1.0" encoding="utf-8"?>
 <p:sld xmlns:a="http://schemas.openxmlformats.org/drawingml/2006/main" xmlns:p="http://schemas.openxmlformats.org/presentationml/2006/main" xmlns:r="http://schemas.openxmlformats.org/officeDocument/2006/relationships">
   <p:cSld>
     <p:spTree>
@@ -21233,7 +18159,7 @@
                   <a:srgbClr val="666666"/>
                 </a:solidFill>
               </a:rPr>
-              <a:t>24 / 25</a:t>
+              <a:t>21 / 22</a:t>
             </a:r>
           </a:p>
         </p:txBody>
@@ -21246,7 +18172,7 @@
 </p:sld>
 </file>
 
-<file path=ppt/slides/slide25.xml><?xml version="1.0" encoding="utf-8"?>
+<file path=ppt/slides/slide22.xml><?xml version="1.0" encoding="utf-8"?>
 <p:sld xmlns:a="http://schemas.openxmlformats.org/drawingml/2006/main" xmlns:p="http://schemas.openxmlformats.org/presentationml/2006/main" xmlns:r="http://schemas.openxmlformats.org/officeDocument/2006/relationships">
   <p:cSld>
     <p:bg>
@@ -22253,7 +19179,7 @@
                   <a:srgbClr val="666666"/>
                 </a:solidFill>
               </a:rPr>
-              <a:t>3 / 25</a:t>
+              <a:t>3 / 22</a:t>
             </a:r>
           </a:p>
         </p:txBody>
@@ -22746,7 +19672,7 @@
                   <a:srgbClr val="666666"/>
                 </a:solidFill>
               </a:rPr>
-              <a:t>4 / 25</a:t>
+              <a:t>4 / 22</a:t>
             </a:r>
           </a:p>
         </p:txBody>
@@ -23928,7 +20854,7 @@
                   <a:srgbClr val="666666"/>
                 </a:solidFill>
               </a:rPr>
-              <a:t>5 / 25</a:t>
+              <a:t>5 / 22</a:t>
             </a:r>
           </a:p>
         </p:txBody>
@@ -24758,7 +21684,7 @@
                   <a:srgbClr val="666666"/>
                 </a:solidFill>
               </a:rPr>
-              <a:t>6 / 25</a:t>
+              <a:t>6 / 22</a:t>
             </a:r>
           </a:p>
         </p:txBody>
@@ -25771,7 +22697,7 @@
                   <a:srgbClr val="666666"/>
                 </a:solidFill>
               </a:rPr>
-              <a:t>7 / 25</a:t>
+              <a:t>7 / 22</a:t>
             </a:r>
           </a:p>
         </p:txBody>
@@ -27195,7 +24121,7 @@
                   <a:srgbClr val="666666"/>
                 </a:solidFill>
               </a:rPr>
-              <a:t>8 / 25</a:t>
+              <a:t>8 / 22</a:t>
             </a:r>
           </a:p>
         </p:txBody>
@@ -27737,7 +24663,7 @@
                   <a:srgbClr val="666666"/>
                 </a:solidFill>
               </a:rPr>
-              <a:t>9 / 25</a:t>
+              <a:t>9 / 22</a:t>
             </a:r>
           </a:p>
         </p:txBody>

--- a/docs/Sem_4/FINAL_PRESENTATION_VishalSingh_2020AA05641.pptx
+++ b/docs/Sem_4/FINAL_PRESENTATION_VishalSingh_2020AA05641.pptx
@@ -14219,8 +14219,8 @@
         </p:nvSpPr>
         <p:spPr>
           <a:xfrm>
-            <a:off x="457200" y="914400"/>
-            <a:ext cx="5623560" cy="347472"/>
+            <a:off x="457200" y="960120"/>
+            <a:ext cx="5623560" cy="566928"/>
           </a:xfrm>
           <a:prstGeom prst="rect">
             <a:avLst/>
@@ -14266,7 +14266,41 @@
         <p:spPr>
           <a:xfrm>
             <a:off x="548640" y="960120"/>
-            <a:ext cx="502920" cy="256032"/>
+            <a:ext cx="548640" cy="566928"/>
+          </a:xfrm>
+          <a:prstGeom prst="rect">
+            <a:avLst/>
+          </a:prstGeom>
+          <a:noFill/>
+        </p:spPr>
+        <p:txBody>
+          <a:bodyPr wrap="square" anchor="ctr">
+            <a:spAutoFit/>
+          </a:bodyPr>
+          <a:lstStyle/>
+          <a:p>
+            <a:pPr algn="l"/>
+            <a:r>
+              <a:rPr sz="1400" b="1">
+                <a:solidFill>
+                  <a:srgbClr val="0071DC"/>
+                </a:solidFill>
+              </a:rPr>
+              <a:t>1</a:t>
+            </a:r>
+          </a:p>
+        </p:txBody>
+      </p:sp>
+      <p:sp>
+        <p:nvSpPr>
+          <p:cNvPr id="8" name="TextBox 7"/>
+          <p:cNvSpPr txBox="1"/>
+          <p:nvPr/>
+        </p:nvSpPr>
+        <p:spPr>
+          <a:xfrm>
+            <a:off x="1143000" y="1024128"/>
+            <a:ext cx="4846320" cy="256032"/>
           </a:xfrm>
           <a:prstGeom prst="rect">
             <a:avLst/>
@@ -14283,24 +14317,24 @@
             <a:r>
               <a:rPr sz="1200" b="1">
                 <a:solidFill>
-                  <a:srgbClr val="0071DC"/>
-                </a:solidFill>
-              </a:rPr>
-              <a:t>1</a:t>
-            </a:r>
-          </a:p>
-        </p:txBody>
-      </p:sp>
-      <p:sp>
-        <p:nvSpPr>
-          <p:cNvPr id="8" name="TextBox 7"/>
-          <p:cNvSpPr txBox="1"/>
-          <p:nvPr/>
-        </p:nvSpPr>
-        <p:spPr>
-          <a:xfrm>
-            <a:off x="1097280" y="941832"/>
-            <a:ext cx="4892040" cy="182880"/>
+                  <a:srgbClr val="041E42"/>
+                </a:solidFill>
+              </a:rPr>
+              <a:t>Since Mid-Sem — What's New</a:t>
+            </a:r>
+          </a:p>
+        </p:txBody>
+      </p:sp>
+      <p:sp>
+        <p:nvSpPr>
+          <p:cNvPr id="9" name="TextBox 8"/>
+          <p:cNvSpPr txBox="1"/>
+          <p:nvPr/>
+        </p:nvSpPr>
+        <p:spPr>
+          <a:xfrm>
+            <a:off x="1143000" y="1271016"/>
+            <a:ext cx="4846320" cy="237744"/>
           </a:xfrm>
           <a:prstGeom prst="rect">
             <a:avLst/>
@@ -14315,41 +14349,7 @@
           <a:p>
             <a:pPr algn="l"/>
             <a:r>
-              <a:rPr sz="1100" b="1">
-                <a:solidFill>
-                  <a:srgbClr val="041E42"/>
-                </a:solidFill>
-              </a:rPr>
-              <a:t>Since Mid-Sem — What's New</a:t>
-            </a:r>
-          </a:p>
-        </p:txBody>
-      </p:sp>
-      <p:sp>
-        <p:nvSpPr>
-          <p:cNvPr id="9" name="TextBox 8"/>
-          <p:cNvSpPr txBox="1"/>
-          <p:nvPr/>
-        </p:nvSpPr>
-        <p:spPr>
-          <a:xfrm>
-            <a:off x="1097280" y="1097280"/>
-            <a:ext cx="4892040" cy="182880"/>
-          </a:xfrm>
-          <a:prstGeom prst="rect">
-            <a:avLst/>
-          </a:prstGeom>
-          <a:noFill/>
-        </p:spPr>
-        <p:txBody>
-          <a:bodyPr wrap="square" anchor="t">
-            <a:spAutoFit/>
-          </a:bodyPr>
-          <a:lstStyle/>
-          <a:p>
-            <a:pPr algn="l"/>
-            <a:r>
-              <a:rPr sz="900" b="0">
+              <a:rPr sz="1000" b="0">
                 <a:solidFill>
                   <a:srgbClr val="666666"/>
                 </a:solidFill>
@@ -14367,8 +14367,8 @@
         </p:nvSpPr>
         <p:spPr>
           <a:xfrm>
-            <a:off x="457200" y="1353312"/>
-            <a:ext cx="5623560" cy="347472"/>
+            <a:off x="457200" y="1636776"/>
+            <a:ext cx="5623560" cy="566928"/>
           </a:xfrm>
           <a:prstGeom prst="rect">
             <a:avLst/>
@@ -14413,8 +14413,42 @@
         </p:nvSpPr>
         <p:spPr>
           <a:xfrm>
-            <a:off x="548640" y="1399032"/>
-            <a:ext cx="502920" cy="256032"/>
+            <a:off x="548640" y="1636776"/>
+            <a:ext cx="548640" cy="566928"/>
+          </a:xfrm>
+          <a:prstGeom prst="rect">
+            <a:avLst/>
+          </a:prstGeom>
+          <a:noFill/>
+        </p:spPr>
+        <p:txBody>
+          <a:bodyPr wrap="square" anchor="ctr">
+            <a:spAutoFit/>
+          </a:bodyPr>
+          <a:lstStyle/>
+          <a:p>
+            <a:pPr algn="l"/>
+            <a:r>
+              <a:rPr sz="1400" b="1">
+                <a:solidFill>
+                  <a:srgbClr val="0071DC"/>
+                </a:solidFill>
+              </a:rPr>
+              <a:t>2</a:t>
+            </a:r>
+          </a:p>
+        </p:txBody>
+      </p:sp>
+      <p:sp>
+        <p:nvSpPr>
+          <p:cNvPr id="12" name="TextBox 11"/>
+          <p:cNvSpPr txBox="1"/>
+          <p:nvPr/>
+        </p:nvSpPr>
+        <p:spPr>
+          <a:xfrm>
+            <a:off x="1143000" y="1700784"/>
+            <a:ext cx="4846320" cy="256032"/>
           </a:xfrm>
           <a:prstGeom prst="rect">
             <a:avLst/>
@@ -14431,24 +14465,24 @@
             <a:r>
               <a:rPr sz="1200" b="1">
                 <a:solidFill>
-                  <a:srgbClr val="0071DC"/>
-                </a:solidFill>
-              </a:rPr>
-              <a:t>2</a:t>
-            </a:r>
-          </a:p>
-        </p:txBody>
-      </p:sp>
-      <p:sp>
-        <p:nvSpPr>
-          <p:cNvPr id="12" name="TextBox 11"/>
-          <p:cNvSpPr txBox="1"/>
-          <p:nvPr/>
-        </p:nvSpPr>
-        <p:spPr>
-          <a:xfrm>
-            <a:off x="1097280" y="1380744"/>
-            <a:ext cx="4892040" cy="182880"/>
+                  <a:srgbClr val="041E42"/>
+                </a:solidFill>
+              </a:rPr>
+              <a:t>Review &amp; Validate  (HITL)</a:t>
+            </a:r>
+          </a:p>
+        </p:txBody>
+      </p:sp>
+      <p:sp>
+        <p:nvSpPr>
+          <p:cNvPr id="13" name="TextBox 12"/>
+          <p:cNvSpPr txBox="1"/>
+          <p:nvPr/>
+        </p:nvSpPr>
+        <p:spPr>
+          <a:xfrm>
+            <a:off x="1143000" y="1947672"/>
+            <a:ext cx="4846320" cy="237744"/>
           </a:xfrm>
           <a:prstGeom prst="rect">
             <a:avLst/>
@@ -14463,41 +14497,7 @@
           <a:p>
             <a:pPr algn="l"/>
             <a:r>
-              <a:rPr sz="1100" b="1">
-                <a:solidFill>
-                  <a:srgbClr val="041E42"/>
-                </a:solidFill>
-              </a:rPr>
-              <a:t>Review &amp; Validate  (HITL)</a:t>
-            </a:r>
-          </a:p>
-        </p:txBody>
-      </p:sp>
-      <p:sp>
-        <p:nvSpPr>
-          <p:cNvPr id="13" name="TextBox 12"/>
-          <p:cNvSpPr txBox="1"/>
-          <p:nvPr/>
-        </p:nvSpPr>
-        <p:spPr>
-          <a:xfrm>
-            <a:off x="1097280" y="1536192"/>
-            <a:ext cx="4892040" cy="182880"/>
-          </a:xfrm>
-          <a:prstGeom prst="rect">
-            <a:avLst/>
-          </a:prstGeom>
-          <a:noFill/>
-        </p:spPr>
-        <p:txBody>
-          <a:bodyPr wrap="square" anchor="t">
-            <a:spAutoFit/>
-          </a:bodyPr>
-          <a:lstStyle/>
-          <a:p>
-            <a:pPr algn="l"/>
-            <a:r>
-              <a:rPr sz="900" b="0">
+              <a:rPr sz="1000" b="0">
                 <a:solidFill>
                   <a:srgbClr val="666666"/>
                 </a:solidFill>
@@ -14515,8 +14515,8 @@
         </p:nvSpPr>
         <p:spPr>
           <a:xfrm>
-            <a:off x="457200" y="1792224"/>
-            <a:ext cx="5623560" cy="347472"/>
+            <a:off x="457200" y="2313432"/>
+            <a:ext cx="5623560" cy="566928"/>
           </a:xfrm>
           <a:prstGeom prst="rect">
             <a:avLst/>
@@ -14561,8 +14561,42 @@
         </p:nvSpPr>
         <p:spPr>
           <a:xfrm>
-            <a:off x="548640" y="1837944"/>
-            <a:ext cx="502920" cy="256032"/>
+            <a:off x="548640" y="2313432"/>
+            <a:ext cx="548640" cy="566928"/>
+          </a:xfrm>
+          <a:prstGeom prst="rect">
+            <a:avLst/>
+          </a:prstGeom>
+          <a:noFill/>
+        </p:spPr>
+        <p:txBody>
+          <a:bodyPr wrap="square" anchor="ctr">
+            <a:spAutoFit/>
+          </a:bodyPr>
+          <a:lstStyle/>
+          <a:p>
+            <a:pPr algn="l"/>
+            <a:r>
+              <a:rPr sz="1400" b="1">
+                <a:solidFill>
+                  <a:srgbClr val="0071DC"/>
+                </a:solidFill>
+              </a:rPr>
+              <a:t>3</a:t>
+            </a:r>
+          </a:p>
+        </p:txBody>
+      </p:sp>
+      <p:sp>
+        <p:nvSpPr>
+          <p:cNvPr id="16" name="TextBox 15"/>
+          <p:cNvSpPr txBox="1"/>
+          <p:nvPr/>
+        </p:nvSpPr>
+        <p:spPr>
+          <a:xfrm>
+            <a:off x="1143000" y="2377440"/>
+            <a:ext cx="4846320" cy="256032"/>
           </a:xfrm>
           <a:prstGeom prst="rect">
             <a:avLst/>
@@ -14579,24 +14613,24 @@
             <a:r>
               <a:rPr sz="1200" b="1">
                 <a:solidFill>
-                  <a:srgbClr val="0071DC"/>
-                </a:solidFill>
-              </a:rPr>
-              <a:t>3</a:t>
-            </a:r>
-          </a:p>
-        </p:txBody>
-      </p:sp>
-      <p:sp>
-        <p:nvSpPr>
-          <p:cNvPr id="16" name="TextBox 15"/>
-          <p:cNvSpPr txBox="1"/>
-          <p:nvPr/>
-        </p:nvSpPr>
-        <p:spPr>
-          <a:xfrm>
-            <a:off x="1097280" y="1819656"/>
-            <a:ext cx="4892040" cy="182880"/>
+                  <a:srgbClr val="041E42"/>
+                </a:solidFill>
+              </a:rPr>
+              <a:t>Smart Reply  —  Triple Draft</a:t>
+            </a:r>
+          </a:p>
+        </p:txBody>
+      </p:sp>
+      <p:sp>
+        <p:nvSpPr>
+          <p:cNvPr id="17" name="TextBox 16"/>
+          <p:cNvSpPr txBox="1"/>
+          <p:nvPr/>
+        </p:nvSpPr>
+        <p:spPr>
+          <a:xfrm>
+            <a:off x="1143000" y="2624328"/>
+            <a:ext cx="4846320" cy="237744"/>
           </a:xfrm>
           <a:prstGeom prst="rect">
             <a:avLst/>
@@ -14611,41 +14645,7 @@
           <a:p>
             <a:pPr algn="l"/>
             <a:r>
-              <a:rPr sz="1100" b="1">
-                <a:solidFill>
-                  <a:srgbClr val="041E42"/>
-                </a:solidFill>
-              </a:rPr>
-              <a:t>Smart Reply  —  Triple Draft</a:t>
-            </a:r>
-          </a:p>
-        </p:txBody>
-      </p:sp>
-      <p:sp>
-        <p:nvSpPr>
-          <p:cNvPr id="17" name="TextBox 16"/>
-          <p:cNvSpPr txBox="1"/>
-          <p:nvPr/>
-        </p:nvSpPr>
-        <p:spPr>
-          <a:xfrm>
-            <a:off x="1097280" y="1975104"/>
-            <a:ext cx="4892040" cy="182880"/>
-          </a:xfrm>
-          <a:prstGeom prst="rect">
-            <a:avLst/>
-          </a:prstGeom>
-          <a:noFill/>
-        </p:spPr>
-        <p:txBody>
-          <a:bodyPr wrap="square" anchor="t">
-            <a:spAutoFit/>
-          </a:bodyPr>
-          <a:lstStyle/>
-          <a:p>
-            <a:pPr algn="l"/>
-            <a:r>
-              <a:rPr sz="900" b="0">
+              <a:rPr sz="1000" b="0">
                 <a:solidFill>
                   <a:srgbClr val="666666"/>
                 </a:solidFill>
@@ -14663,8 +14663,8 @@
         </p:nvSpPr>
         <p:spPr>
           <a:xfrm>
-            <a:off x="457200" y="2231136"/>
-            <a:ext cx="5623560" cy="347472"/>
+            <a:off x="457200" y="2990088"/>
+            <a:ext cx="5623560" cy="566928"/>
           </a:xfrm>
           <a:prstGeom prst="rect">
             <a:avLst/>
@@ -14709,8 +14709,42 @@
         </p:nvSpPr>
         <p:spPr>
           <a:xfrm>
-            <a:off x="548640" y="2276856"/>
-            <a:ext cx="502920" cy="256032"/>
+            <a:off x="548640" y="2990088"/>
+            <a:ext cx="548640" cy="566928"/>
+          </a:xfrm>
+          <a:prstGeom prst="rect">
+            <a:avLst/>
+          </a:prstGeom>
+          <a:noFill/>
+        </p:spPr>
+        <p:txBody>
+          <a:bodyPr wrap="square" anchor="ctr">
+            <a:spAutoFit/>
+          </a:bodyPr>
+          <a:lstStyle/>
+          <a:p>
+            <a:pPr algn="l"/>
+            <a:r>
+              <a:rPr sz="1400" b="1">
+                <a:solidFill>
+                  <a:srgbClr val="0071DC"/>
+                </a:solidFill>
+              </a:rPr>
+              <a:t>4</a:t>
+            </a:r>
+          </a:p>
+        </p:txBody>
+      </p:sp>
+      <p:sp>
+        <p:nvSpPr>
+          <p:cNvPr id="20" name="TextBox 19"/>
+          <p:cNvSpPr txBox="1"/>
+          <p:nvPr/>
+        </p:nvSpPr>
+        <p:spPr>
+          <a:xfrm>
+            <a:off x="1143000" y="3054096"/>
+            <a:ext cx="4846320" cy="256032"/>
           </a:xfrm>
           <a:prstGeom prst="rect">
             <a:avLst/>
@@ -14727,24 +14761,24 @@
             <a:r>
               <a:rPr sz="1200" b="1">
                 <a:solidFill>
-                  <a:srgbClr val="0071DC"/>
-                </a:solidFill>
-              </a:rPr>
-              <a:t>4</a:t>
-            </a:r>
-          </a:p>
-        </p:txBody>
-      </p:sp>
-      <p:sp>
-        <p:nvSpPr>
-          <p:cNvPr id="20" name="TextBox 19"/>
-          <p:cNvSpPr txBox="1"/>
-          <p:nvPr/>
-        </p:nvSpPr>
-        <p:spPr>
-          <a:xfrm>
-            <a:off x="1097280" y="2258568"/>
-            <a:ext cx="4892040" cy="182880"/>
+                  <a:srgbClr val="041E42"/>
+                </a:solidFill>
+              </a:rPr>
+              <a:t>Smart Reply  —  Prompt &amp; Few-Shot</a:t>
+            </a:r>
+          </a:p>
+        </p:txBody>
+      </p:sp>
+      <p:sp>
+        <p:nvSpPr>
+          <p:cNvPr id="21" name="TextBox 20"/>
+          <p:cNvSpPr txBox="1"/>
+          <p:nvPr/>
+        </p:nvSpPr>
+        <p:spPr>
+          <a:xfrm>
+            <a:off x="1143000" y="3300984"/>
+            <a:ext cx="4846320" cy="237744"/>
           </a:xfrm>
           <a:prstGeom prst="rect">
             <a:avLst/>
@@ -14759,41 +14793,7 @@
           <a:p>
             <a:pPr algn="l"/>
             <a:r>
-              <a:rPr sz="1100" b="1">
-                <a:solidFill>
-                  <a:srgbClr val="041E42"/>
-                </a:solidFill>
-              </a:rPr>
-              <a:t>Smart Reply  —  Prompt &amp; Few-Shot</a:t>
-            </a:r>
-          </a:p>
-        </p:txBody>
-      </p:sp>
-      <p:sp>
-        <p:nvSpPr>
-          <p:cNvPr id="21" name="TextBox 20"/>
-          <p:cNvSpPr txBox="1"/>
-          <p:nvPr/>
-        </p:nvSpPr>
-        <p:spPr>
-          <a:xfrm>
-            <a:off x="1097280" y="2414016"/>
-            <a:ext cx="4892040" cy="182880"/>
-          </a:xfrm>
-          <a:prstGeom prst="rect">
-            <a:avLst/>
-          </a:prstGeom>
-          <a:noFill/>
-        </p:spPr>
-        <p:txBody>
-          <a:bodyPr wrap="square" anchor="t">
-            <a:spAutoFit/>
-          </a:bodyPr>
-          <a:lstStyle/>
-          <a:p>
-            <a:pPr algn="l"/>
-            <a:r>
-              <a:rPr sz="900" b="0">
+              <a:rPr sz="1000" b="0">
                 <a:solidFill>
                   <a:srgbClr val="666666"/>
                 </a:solidFill>
@@ -14811,8 +14811,8 @@
         </p:nvSpPr>
         <p:spPr>
           <a:xfrm>
-            <a:off x="457200" y="2670048"/>
-            <a:ext cx="5623560" cy="347472"/>
+            <a:off x="457200" y="3666744"/>
+            <a:ext cx="5623560" cy="566928"/>
           </a:xfrm>
           <a:prstGeom prst="rect">
             <a:avLst/>
@@ -14857,8 +14857,42 @@
         </p:nvSpPr>
         <p:spPr>
           <a:xfrm>
-            <a:off x="548640" y="2715768"/>
-            <a:ext cx="502920" cy="256032"/>
+            <a:off x="548640" y="3666744"/>
+            <a:ext cx="548640" cy="566928"/>
+          </a:xfrm>
+          <a:prstGeom prst="rect">
+            <a:avLst/>
+          </a:prstGeom>
+          <a:noFill/>
+        </p:spPr>
+        <p:txBody>
+          <a:bodyPr wrap="square" anchor="ctr">
+            <a:spAutoFit/>
+          </a:bodyPr>
+          <a:lstStyle/>
+          <a:p>
+            <a:pPr algn="l"/>
+            <a:r>
+              <a:rPr sz="1400" b="1">
+                <a:solidFill>
+                  <a:srgbClr val="0071DC"/>
+                </a:solidFill>
+              </a:rPr>
+              <a:t>5</a:t>
+            </a:r>
+          </a:p>
+        </p:txBody>
+      </p:sp>
+      <p:sp>
+        <p:nvSpPr>
+          <p:cNvPr id="24" name="TextBox 23"/>
+          <p:cNvSpPr txBox="1"/>
+          <p:nvPr/>
+        </p:nvSpPr>
+        <p:spPr>
+          <a:xfrm>
+            <a:off x="1143000" y="3730752"/>
+            <a:ext cx="4846320" cy="256032"/>
           </a:xfrm>
           <a:prstGeom prst="rect">
             <a:avLst/>
@@ -14875,24 +14909,24 @@
             <a:r>
               <a:rPr sz="1200" b="1">
                 <a:solidFill>
-                  <a:srgbClr val="0071DC"/>
-                </a:solidFill>
-              </a:rPr>
-              <a:t>5</a:t>
-            </a:r>
-          </a:p>
-        </p:txBody>
-      </p:sp>
-      <p:sp>
-        <p:nvSpPr>
-          <p:cNvPr id="24" name="TextBox 23"/>
-          <p:cNvSpPr txBox="1"/>
-          <p:nvPr/>
-        </p:nvSpPr>
-        <p:spPr>
-          <a:xfrm>
-            <a:off x="1097280" y="2697480"/>
-            <a:ext cx="4892040" cy="182880"/>
+                  <a:srgbClr val="041E42"/>
+                </a:solidFill>
+              </a:rPr>
+              <a:t>Smart Reply  —  Worked Example</a:t>
+            </a:r>
+          </a:p>
+        </p:txBody>
+      </p:sp>
+      <p:sp>
+        <p:nvSpPr>
+          <p:cNvPr id="25" name="TextBox 24"/>
+          <p:cNvSpPr txBox="1"/>
+          <p:nvPr/>
+        </p:nvSpPr>
+        <p:spPr>
+          <a:xfrm>
+            <a:off x="1143000" y="3977640"/>
+            <a:ext cx="4846320" cy="237744"/>
           </a:xfrm>
           <a:prstGeom prst="rect">
             <a:avLst/>
@@ -14907,41 +14941,7 @@
           <a:p>
             <a:pPr algn="l"/>
             <a:r>
-              <a:rPr sz="1100" b="1">
-                <a:solidFill>
-                  <a:srgbClr val="041E42"/>
-                </a:solidFill>
-              </a:rPr>
-              <a:t>Smart Reply  —  Worked Example</a:t>
-            </a:r>
-          </a:p>
-        </p:txBody>
-      </p:sp>
-      <p:sp>
-        <p:nvSpPr>
-          <p:cNvPr id="25" name="TextBox 24"/>
-          <p:cNvSpPr txBox="1"/>
-          <p:nvPr/>
-        </p:nvSpPr>
-        <p:spPr>
-          <a:xfrm>
-            <a:off x="1097280" y="2852928"/>
-            <a:ext cx="4892040" cy="182880"/>
-          </a:xfrm>
-          <a:prstGeom prst="rect">
-            <a:avLst/>
-          </a:prstGeom>
-          <a:noFill/>
-        </p:spPr>
-        <p:txBody>
-          <a:bodyPr wrap="square" anchor="t">
-            <a:spAutoFit/>
-          </a:bodyPr>
-          <a:lstStyle/>
-          <a:p>
-            <a:pPr algn="l"/>
-            <a:r>
-              <a:rPr sz="900" b="0">
+              <a:rPr sz="1000" b="0">
                 <a:solidFill>
                   <a:srgbClr val="666666"/>
                 </a:solidFill>
@@ -14959,8 +14959,8 @@
         </p:nvSpPr>
         <p:spPr>
           <a:xfrm>
-            <a:off x="457200" y="3108960"/>
-            <a:ext cx="5623560" cy="347472"/>
+            <a:off x="457200" y="4343400"/>
+            <a:ext cx="5623560" cy="566928"/>
           </a:xfrm>
           <a:prstGeom prst="rect">
             <a:avLst/>
@@ -15005,8 +15005,42 @@
         </p:nvSpPr>
         <p:spPr>
           <a:xfrm>
-            <a:off x="548640" y="3154680"/>
-            <a:ext cx="502920" cy="256032"/>
+            <a:off x="548640" y="4343400"/>
+            <a:ext cx="548640" cy="566928"/>
+          </a:xfrm>
+          <a:prstGeom prst="rect">
+            <a:avLst/>
+          </a:prstGeom>
+          <a:noFill/>
+        </p:spPr>
+        <p:txBody>
+          <a:bodyPr wrap="square" anchor="ctr">
+            <a:spAutoFit/>
+          </a:bodyPr>
+          <a:lstStyle/>
+          <a:p>
+            <a:pPr algn="l"/>
+            <a:r>
+              <a:rPr sz="1400" b="1">
+                <a:solidFill>
+                  <a:srgbClr val="0071DC"/>
+                </a:solidFill>
+              </a:rPr>
+              <a:t>6</a:t>
+            </a:r>
+          </a:p>
+        </p:txBody>
+      </p:sp>
+      <p:sp>
+        <p:nvSpPr>
+          <p:cNvPr id="28" name="TextBox 27"/>
+          <p:cNvSpPr txBox="1"/>
+          <p:nvPr/>
+        </p:nvSpPr>
+        <p:spPr>
+          <a:xfrm>
+            <a:off x="1143000" y="4407408"/>
+            <a:ext cx="4846320" cy="256032"/>
           </a:xfrm>
           <a:prstGeom prst="rect">
             <a:avLst/>
@@ -15023,24 +15057,24 @@
             <a:r>
               <a:rPr sz="1200" b="1">
                 <a:solidFill>
-                  <a:srgbClr val="0071DC"/>
-                </a:solidFill>
-              </a:rPr>
-              <a:t>6</a:t>
-            </a:r>
-          </a:p>
-        </p:txBody>
-      </p:sp>
-      <p:sp>
-        <p:nvSpPr>
-          <p:cNvPr id="28" name="TextBox 27"/>
-          <p:cNvSpPr txBox="1"/>
-          <p:nvPr/>
-        </p:nvSpPr>
-        <p:spPr>
-          <a:xfrm>
-            <a:off x="1097280" y="3136392"/>
-            <a:ext cx="4892040" cy="182880"/>
+                  <a:srgbClr val="041E42"/>
+                </a:solidFill>
+              </a:rPr>
+              <a:t>Learning Loop</a:t>
+            </a:r>
+          </a:p>
+        </p:txBody>
+      </p:sp>
+      <p:sp>
+        <p:nvSpPr>
+          <p:cNvPr id="29" name="TextBox 28"/>
+          <p:cNvSpPr txBox="1"/>
+          <p:nvPr/>
+        </p:nvSpPr>
+        <p:spPr>
+          <a:xfrm>
+            <a:off x="1143000" y="4654296"/>
+            <a:ext cx="4846320" cy="237744"/>
           </a:xfrm>
           <a:prstGeom prst="rect">
             <a:avLst/>
@@ -15055,41 +15089,7 @@
           <a:p>
             <a:pPr algn="l"/>
             <a:r>
-              <a:rPr sz="1100" b="1">
-                <a:solidFill>
-                  <a:srgbClr val="041E42"/>
-                </a:solidFill>
-              </a:rPr>
-              <a:t>Learning Loop</a:t>
-            </a:r>
-          </a:p>
-        </p:txBody>
-      </p:sp>
-      <p:sp>
-        <p:nvSpPr>
-          <p:cNvPr id="29" name="TextBox 28"/>
-          <p:cNvSpPr txBox="1"/>
-          <p:nvPr/>
-        </p:nvSpPr>
-        <p:spPr>
-          <a:xfrm>
-            <a:off x="1097280" y="3291840"/>
-            <a:ext cx="4892040" cy="182880"/>
-          </a:xfrm>
-          <a:prstGeom prst="rect">
-            <a:avLst/>
-          </a:prstGeom>
-          <a:noFill/>
-        </p:spPr>
-        <p:txBody>
-          <a:bodyPr wrap="square" anchor="t">
-            <a:spAutoFit/>
-          </a:bodyPr>
-          <a:lstStyle/>
-          <a:p>
-            <a:pPr algn="l"/>
-            <a:r>
-              <a:rPr sz="900" b="0">
+              <a:rPr sz="1000" b="0">
                 <a:solidFill>
                   <a:srgbClr val="666666"/>
                 </a:solidFill>
@@ -15107,8 +15107,8 @@
         </p:nvSpPr>
         <p:spPr>
           <a:xfrm>
-            <a:off x="457200" y="3547872"/>
-            <a:ext cx="5623560" cy="347472"/>
+            <a:off x="457200" y="5020056"/>
+            <a:ext cx="5623560" cy="566928"/>
           </a:xfrm>
           <a:prstGeom prst="rect">
             <a:avLst/>
@@ -15153,8 +15153,42 @@
         </p:nvSpPr>
         <p:spPr>
           <a:xfrm>
-            <a:off x="548640" y="3593592"/>
-            <a:ext cx="502920" cy="256032"/>
+            <a:off x="548640" y="5020056"/>
+            <a:ext cx="548640" cy="566928"/>
+          </a:xfrm>
+          <a:prstGeom prst="rect">
+            <a:avLst/>
+          </a:prstGeom>
+          <a:noFill/>
+        </p:spPr>
+        <p:txBody>
+          <a:bodyPr wrap="square" anchor="ctr">
+            <a:spAutoFit/>
+          </a:bodyPr>
+          <a:lstStyle/>
+          <a:p>
+            <a:pPr algn="l"/>
+            <a:r>
+              <a:rPr sz="1400" b="1">
+                <a:solidFill>
+                  <a:srgbClr val="0071DC"/>
+                </a:solidFill>
+              </a:rPr>
+              <a:t>7</a:t>
+            </a:r>
+          </a:p>
+        </p:txBody>
+      </p:sp>
+      <p:sp>
+        <p:nvSpPr>
+          <p:cNvPr id="32" name="TextBox 31"/>
+          <p:cNvSpPr txBox="1"/>
+          <p:nvPr/>
+        </p:nvSpPr>
+        <p:spPr>
+          <a:xfrm>
+            <a:off x="1143000" y="5084064"/>
+            <a:ext cx="4846320" cy="256032"/>
           </a:xfrm>
           <a:prstGeom prst="rect">
             <a:avLst/>
@@ -15171,24 +15205,24 @@
             <a:r>
               <a:rPr sz="1200" b="1">
                 <a:solidFill>
-                  <a:srgbClr val="0071DC"/>
-                </a:solidFill>
-              </a:rPr>
-              <a:t>7</a:t>
-            </a:r>
-          </a:p>
-        </p:txBody>
-      </p:sp>
-      <p:sp>
-        <p:nvSpPr>
-          <p:cNvPr id="32" name="TextBox 31"/>
-          <p:cNvSpPr txBox="1"/>
-          <p:nvPr/>
-        </p:nvSpPr>
-        <p:spPr>
-          <a:xfrm>
-            <a:off x="1097280" y="3575304"/>
-            <a:ext cx="4892040" cy="182880"/>
+                  <a:srgbClr val="041E42"/>
+                </a:solidFill>
+              </a:rPr>
+              <a:t>Post Explorer</a:t>
+            </a:r>
+          </a:p>
+        </p:txBody>
+      </p:sp>
+      <p:sp>
+        <p:nvSpPr>
+          <p:cNvPr id="33" name="TextBox 32"/>
+          <p:cNvSpPr txBox="1"/>
+          <p:nvPr/>
+        </p:nvSpPr>
+        <p:spPr>
+          <a:xfrm>
+            <a:off x="1143000" y="5330952"/>
+            <a:ext cx="4846320" cy="237744"/>
           </a:xfrm>
           <a:prstGeom prst="rect">
             <a:avLst/>
@@ -15203,41 +15237,7 @@
           <a:p>
             <a:pPr algn="l"/>
             <a:r>
-              <a:rPr sz="1100" b="1">
-                <a:solidFill>
-                  <a:srgbClr val="041E42"/>
-                </a:solidFill>
-              </a:rPr>
-              <a:t>Post Explorer</a:t>
-            </a:r>
-          </a:p>
-        </p:txBody>
-      </p:sp>
-      <p:sp>
-        <p:nvSpPr>
-          <p:cNvPr id="33" name="TextBox 32"/>
-          <p:cNvSpPr txBox="1"/>
-          <p:nvPr/>
-        </p:nvSpPr>
-        <p:spPr>
-          <a:xfrm>
-            <a:off x="1097280" y="3730752"/>
-            <a:ext cx="4892040" cy="182880"/>
-          </a:xfrm>
-          <a:prstGeom prst="rect">
-            <a:avLst/>
-          </a:prstGeom>
-          <a:noFill/>
-        </p:spPr>
-        <p:txBody>
-          <a:bodyPr wrap="square" anchor="t">
-            <a:spAutoFit/>
-          </a:bodyPr>
-          <a:lstStyle/>
-          <a:p>
-            <a:pPr algn="l"/>
-            <a:r>
-              <a:rPr sz="900" b="0">
+              <a:rPr sz="1000" b="0">
                 <a:solidFill>
                   <a:srgbClr val="666666"/>
                 </a:solidFill>
@@ -15255,8 +15255,8 @@
         </p:nvSpPr>
         <p:spPr>
           <a:xfrm>
-            <a:off x="457200" y="3986784"/>
-            <a:ext cx="5623560" cy="347472"/>
+            <a:off x="457200" y="5696712"/>
+            <a:ext cx="5623560" cy="566928"/>
           </a:xfrm>
           <a:prstGeom prst="rect">
             <a:avLst/>
@@ -15301,8 +15301,42 @@
         </p:nvSpPr>
         <p:spPr>
           <a:xfrm>
-            <a:off x="548640" y="4032504"/>
-            <a:ext cx="502920" cy="256032"/>
+            <a:off x="548640" y="5696712"/>
+            <a:ext cx="548640" cy="566928"/>
+          </a:xfrm>
+          <a:prstGeom prst="rect">
+            <a:avLst/>
+          </a:prstGeom>
+          <a:noFill/>
+        </p:spPr>
+        <p:txBody>
+          <a:bodyPr wrap="square" anchor="ctr">
+            <a:spAutoFit/>
+          </a:bodyPr>
+          <a:lstStyle/>
+          <a:p>
+            <a:pPr algn="l"/>
+            <a:r>
+              <a:rPr sz="1400" b="1">
+                <a:solidFill>
+                  <a:srgbClr val="0071DC"/>
+                </a:solidFill>
+              </a:rPr>
+              <a:t>8</a:t>
+            </a:r>
+          </a:p>
+        </p:txBody>
+      </p:sp>
+      <p:sp>
+        <p:nvSpPr>
+          <p:cNvPr id="36" name="TextBox 35"/>
+          <p:cNvSpPr txBox="1"/>
+          <p:nvPr/>
+        </p:nvSpPr>
+        <p:spPr>
+          <a:xfrm>
+            <a:off x="1143000" y="5760720"/>
+            <a:ext cx="4846320" cy="256032"/>
           </a:xfrm>
           <a:prstGeom prst="rect">
             <a:avLst/>
@@ -15319,24 +15353,24 @@
             <a:r>
               <a:rPr sz="1200" b="1">
                 <a:solidFill>
-                  <a:srgbClr val="0071DC"/>
-                </a:solidFill>
-              </a:rPr>
-              <a:t>8</a:t>
-            </a:r>
-          </a:p>
-        </p:txBody>
-      </p:sp>
-      <p:sp>
-        <p:nvSpPr>
-          <p:cNvPr id="36" name="TextBox 35"/>
-          <p:cNvSpPr txBox="1"/>
-          <p:nvPr/>
-        </p:nvSpPr>
-        <p:spPr>
-          <a:xfrm>
-            <a:off x="1097280" y="4014216"/>
-            <a:ext cx="4892040" cy="182880"/>
+                  <a:srgbClr val="041E42"/>
+                </a:solidFill>
+              </a:rPr>
+              <a:t>Post Lifecycle  (Kanban)</a:t>
+            </a:r>
+          </a:p>
+        </p:txBody>
+      </p:sp>
+      <p:sp>
+        <p:nvSpPr>
+          <p:cNvPr id="37" name="TextBox 36"/>
+          <p:cNvSpPr txBox="1"/>
+          <p:nvPr/>
+        </p:nvSpPr>
+        <p:spPr>
+          <a:xfrm>
+            <a:off x="1143000" y="6007608"/>
+            <a:ext cx="4846320" cy="237744"/>
           </a:xfrm>
           <a:prstGeom prst="rect">
             <a:avLst/>
@@ -15351,41 +15385,7 @@
           <a:p>
             <a:pPr algn="l"/>
             <a:r>
-              <a:rPr sz="1100" b="1">
-                <a:solidFill>
-                  <a:srgbClr val="041E42"/>
-                </a:solidFill>
-              </a:rPr>
-              <a:t>Post Lifecycle  (Kanban)</a:t>
-            </a:r>
-          </a:p>
-        </p:txBody>
-      </p:sp>
-      <p:sp>
-        <p:nvSpPr>
-          <p:cNvPr id="37" name="TextBox 36"/>
-          <p:cNvSpPr txBox="1"/>
-          <p:nvPr/>
-        </p:nvSpPr>
-        <p:spPr>
-          <a:xfrm>
-            <a:off x="1097280" y="4169664"/>
-            <a:ext cx="4892040" cy="182880"/>
-          </a:xfrm>
-          <a:prstGeom prst="rect">
-            <a:avLst/>
-          </a:prstGeom>
-          <a:noFill/>
-        </p:spPr>
-        <p:txBody>
-          <a:bodyPr wrap="square" anchor="t">
-            <a:spAutoFit/>
-          </a:bodyPr>
-          <a:lstStyle/>
-          <a:p>
-            <a:pPr algn="l"/>
-            <a:r>
-              <a:rPr sz="900" b="0">
+              <a:rPr sz="1000" b="0">
                 <a:solidFill>
                   <a:srgbClr val="666666"/>
                 </a:solidFill>
@@ -15403,8 +15403,8 @@
         </p:nvSpPr>
         <p:spPr>
           <a:xfrm>
-            <a:off x="6217920" y="914400"/>
-            <a:ext cx="5623560" cy="347472"/>
+            <a:off x="6217920" y="960120"/>
+            <a:ext cx="5623560" cy="566928"/>
           </a:xfrm>
           <a:prstGeom prst="rect">
             <a:avLst/>
@@ -15450,7 +15450,41 @@
         <p:spPr>
           <a:xfrm>
             <a:off x="6309360" y="960120"/>
-            <a:ext cx="502920" cy="256032"/>
+            <a:ext cx="548640" cy="566928"/>
+          </a:xfrm>
+          <a:prstGeom prst="rect">
+            <a:avLst/>
+          </a:prstGeom>
+          <a:noFill/>
+        </p:spPr>
+        <p:txBody>
+          <a:bodyPr wrap="square" anchor="ctr">
+            <a:spAutoFit/>
+          </a:bodyPr>
+          <a:lstStyle/>
+          <a:p>
+            <a:pPr algn="l"/>
+            <a:r>
+              <a:rPr sz="1400" b="1">
+                <a:solidFill>
+                  <a:srgbClr val="0071DC"/>
+                </a:solidFill>
+              </a:rPr>
+              <a:t>9</a:t>
+            </a:r>
+          </a:p>
+        </p:txBody>
+      </p:sp>
+      <p:sp>
+        <p:nvSpPr>
+          <p:cNvPr id="40" name="TextBox 39"/>
+          <p:cNvSpPr txBox="1"/>
+          <p:nvPr/>
+        </p:nvSpPr>
+        <p:spPr>
+          <a:xfrm>
+            <a:off x="6903720" y="1024128"/>
+            <a:ext cx="4846320" cy="256032"/>
           </a:xfrm>
           <a:prstGeom prst="rect">
             <a:avLst/>
@@ -15467,24 +15501,24 @@
             <a:r>
               <a:rPr sz="1200" b="1">
                 <a:solidFill>
-                  <a:srgbClr val="0071DC"/>
-                </a:solidFill>
-              </a:rPr>
-              <a:t>9</a:t>
-            </a:r>
-          </a:p>
-        </p:txBody>
-      </p:sp>
-      <p:sp>
-        <p:nvSpPr>
-          <p:cNvPr id="40" name="TextBox 39"/>
-          <p:cNvSpPr txBox="1"/>
-          <p:nvPr/>
-        </p:nvSpPr>
-        <p:spPr>
-          <a:xfrm>
-            <a:off x="6858000" y="941832"/>
-            <a:ext cx="4892040" cy="182880"/>
+                  <a:srgbClr val="041E42"/>
+                </a:solidFill>
+              </a:rPr>
+              <a:t>Insights &amp; Competitor Analysis</a:t>
+            </a:r>
+          </a:p>
+        </p:txBody>
+      </p:sp>
+      <p:sp>
+        <p:nvSpPr>
+          <p:cNvPr id="41" name="TextBox 40"/>
+          <p:cNvSpPr txBox="1"/>
+          <p:nvPr/>
+        </p:nvSpPr>
+        <p:spPr>
+          <a:xfrm>
+            <a:off x="6903720" y="1271016"/>
+            <a:ext cx="4846320" cy="237744"/>
           </a:xfrm>
           <a:prstGeom prst="rect">
             <a:avLst/>
@@ -15499,41 +15533,7 @@
           <a:p>
             <a:pPr algn="l"/>
             <a:r>
-              <a:rPr sz="1100" b="1">
-                <a:solidFill>
-                  <a:srgbClr val="041E42"/>
-                </a:solidFill>
-              </a:rPr>
-              <a:t>Insights &amp; Competitor Analysis</a:t>
-            </a:r>
-          </a:p>
-        </p:txBody>
-      </p:sp>
-      <p:sp>
-        <p:nvSpPr>
-          <p:cNvPr id="41" name="TextBox 40"/>
-          <p:cNvSpPr txBox="1"/>
-          <p:nvPr/>
-        </p:nvSpPr>
-        <p:spPr>
-          <a:xfrm>
-            <a:off x="6858000" y="1097280"/>
-            <a:ext cx="4892040" cy="182880"/>
-          </a:xfrm>
-          <a:prstGeom prst="rect">
-            <a:avLst/>
-          </a:prstGeom>
-          <a:noFill/>
-        </p:spPr>
-        <p:txBody>
-          <a:bodyPr wrap="square" anchor="t">
-            <a:spAutoFit/>
-          </a:bodyPr>
-          <a:lstStyle/>
-          <a:p>
-            <a:pPr algn="l"/>
-            <a:r>
-              <a:rPr sz="900" b="0">
+              <a:rPr sz="1000" b="0">
                 <a:solidFill>
                   <a:srgbClr val="666666"/>
                 </a:solidFill>
@@ -15551,8 +15551,8 @@
         </p:nvSpPr>
         <p:spPr>
           <a:xfrm>
-            <a:off x="6217920" y="1353312"/>
-            <a:ext cx="5623560" cy="347472"/>
+            <a:off x="6217920" y="1636776"/>
+            <a:ext cx="5623560" cy="566928"/>
           </a:xfrm>
           <a:prstGeom prst="rect">
             <a:avLst/>
@@ -15597,8 +15597,42 @@
         </p:nvSpPr>
         <p:spPr>
           <a:xfrm>
-            <a:off x="6309360" y="1399032"/>
-            <a:ext cx="502920" cy="256032"/>
+            <a:off x="6309360" y="1636776"/>
+            <a:ext cx="548640" cy="566928"/>
+          </a:xfrm>
+          <a:prstGeom prst="rect">
+            <a:avLst/>
+          </a:prstGeom>
+          <a:noFill/>
+        </p:spPr>
+        <p:txBody>
+          <a:bodyPr wrap="square" anchor="ctr">
+            <a:spAutoFit/>
+          </a:bodyPr>
+          <a:lstStyle/>
+          <a:p>
+            <a:pPr algn="l"/>
+            <a:r>
+              <a:rPr sz="1400" b="1">
+                <a:solidFill>
+                  <a:srgbClr val="0071DC"/>
+                </a:solidFill>
+              </a:rPr>
+              <a:t>10</a:t>
+            </a:r>
+          </a:p>
+        </p:txBody>
+      </p:sp>
+      <p:sp>
+        <p:nvSpPr>
+          <p:cNvPr id="44" name="TextBox 43"/>
+          <p:cNvSpPr txBox="1"/>
+          <p:nvPr/>
+        </p:nvSpPr>
+        <p:spPr>
+          <a:xfrm>
+            <a:off x="6903720" y="1700784"/>
+            <a:ext cx="4846320" cy="256032"/>
           </a:xfrm>
           <a:prstGeom prst="rect">
             <a:avLst/>
@@ -15615,24 +15649,24 @@
             <a:r>
               <a:rPr sz="1200" b="1">
                 <a:solidFill>
-                  <a:srgbClr val="0071DC"/>
-                </a:solidFill>
-              </a:rPr>
-              <a:t>10</a:t>
-            </a:r>
-          </a:p>
-        </p:txBody>
-      </p:sp>
-      <p:sp>
-        <p:nvSpPr>
-          <p:cNvPr id="44" name="TextBox 43"/>
-          <p:cNvSpPr txBox="1"/>
-          <p:nvPr/>
-        </p:nvSpPr>
-        <p:spPr>
-          <a:xfrm>
-            <a:off x="6858000" y="1380744"/>
-            <a:ext cx="4892040" cy="182880"/>
+                  <a:srgbClr val="041E42"/>
+                </a:solidFill>
+              </a:rPr>
+              <a:t>Notification Centre</a:t>
+            </a:r>
+          </a:p>
+        </p:txBody>
+      </p:sp>
+      <p:sp>
+        <p:nvSpPr>
+          <p:cNvPr id="45" name="TextBox 44"/>
+          <p:cNvSpPr txBox="1"/>
+          <p:nvPr/>
+        </p:nvSpPr>
+        <p:spPr>
+          <a:xfrm>
+            <a:off x="6903720" y="1947672"/>
+            <a:ext cx="4846320" cy="237744"/>
           </a:xfrm>
           <a:prstGeom prst="rect">
             <a:avLst/>
@@ -15647,41 +15681,7 @@
           <a:p>
             <a:pPr algn="l"/>
             <a:r>
-              <a:rPr sz="1100" b="1">
-                <a:solidFill>
-                  <a:srgbClr val="041E42"/>
-                </a:solidFill>
-              </a:rPr>
-              <a:t>Notification Centre</a:t>
-            </a:r>
-          </a:p>
-        </p:txBody>
-      </p:sp>
-      <p:sp>
-        <p:nvSpPr>
-          <p:cNvPr id="45" name="TextBox 44"/>
-          <p:cNvSpPr txBox="1"/>
-          <p:nvPr/>
-        </p:nvSpPr>
-        <p:spPr>
-          <a:xfrm>
-            <a:off x="6858000" y="1536192"/>
-            <a:ext cx="4892040" cy="182880"/>
-          </a:xfrm>
-          <a:prstGeom prst="rect">
-            <a:avLst/>
-          </a:prstGeom>
-          <a:noFill/>
-        </p:spPr>
-        <p:txBody>
-          <a:bodyPr wrap="square" anchor="t">
-            <a:spAutoFit/>
-          </a:bodyPr>
-          <a:lstStyle/>
-          <a:p>
-            <a:pPr algn="l"/>
-            <a:r>
-              <a:rPr sz="900" b="0">
+              <a:rPr sz="1000" b="0">
                 <a:solidFill>
                   <a:srgbClr val="666666"/>
                 </a:solidFill>
@@ -15699,8 +15699,8 @@
         </p:nvSpPr>
         <p:spPr>
           <a:xfrm>
-            <a:off x="6217920" y="1792224"/>
-            <a:ext cx="5623560" cy="347472"/>
+            <a:off x="6217920" y="2313432"/>
+            <a:ext cx="5623560" cy="566928"/>
           </a:xfrm>
           <a:prstGeom prst="rect">
             <a:avLst/>
@@ -15745,8 +15745,42 @@
         </p:nvSpPr>
         <p:spPr>
           <a:xfrm>
-            <a:off x="6309360" y="1837944"/>
-            <a:ext cx="502920" cy="256032"/>
+            <a:off x="6309360" y="2313432"/>
+            <a:ext cx="548640" cy="566928"/>
+          </a:xfrm>
+          <a:prstGeom prst="rect">
+            <a:avLst/>
+          </a:prstGeom>
+          <a:noFill/>
+        </p:spPr>
+        <p:txBody>
+          <a:bodyPr wrap="square" anchor="ctr">
+            <a:spAutoFit/>
+          </a:bodyPr>
+          <a:lstStyle/>
+          <a:p>
+            <a:pPr algn="l"/>
+            <a:r>
+              <a:rPr sz="1400" b="1">
+                <a:solidFill>
+                  <a:srgbClr val="0071DC"/>
+                </a:solidFill>
+              </a:rPr>
+              <a:t>11</a:t>
+            </a:r>
+          </a:p>
+        </p:txBody>
+      </p:sp>
+      <p:sp>
+        <p:nvSpPr>
+          <p:cNvPr id="48" name="TextBox 47"/>
+          <p:cNvSpPr txBox="1"/>
+          <p:nvPr/>
+        </p:nvSpPr>
+        <p:spPr>
+          <a:xfrm>
+            <a:off x="6903720" y="2377440"/>
+            <a:ext cx="4846320" cy="256032"/>
           </a:xfrm>
           <a:prstGeom prst="rect">
             <a:avLst/>
@@ -15763,24 +15797,24 @@
             <a:r>
               <a:rPr sz="1200" b="1">
                 <a:solidFill>
-                  <a:srgbClr val="0071DC"/>
-                </a:solidFill>
-              </a:rPr>
-              <a:t>11</a:t>
-            </a:r>
-          </a:p>
-        </p:txBody>
-      </p:sp>
-      <p:sp>
-        <p:nvSpPr>
-          <p:cNvPr id="48" name="TextBox 47"/>
-          <p:cNvSpPr txBox="1"/>
-          <p:nvPr/>
-        </p:nvSpPr>
-        <p:spPr>
-          <a:xfrm>
-            <a:off x="6858000" y="1819656"/>
-            <a:ext cx="4892040" cy="182880"/>
+                  <a:srgbClr val="041E42"/>
+                </a:solidFill>
+              </a:rPr>
+              <a:t>ModernBERT — Final Results</a:t>
+            </a:r>
+          </a:p>
+        </p:txBody>
+      </p:sp>
+      <p:sp>
+        <p:nvSpPr>
+          <p:cNvPr id="49" name="TextBox 48"/>
+          <p:cNvSpPr txBox="1"/>
+          <p:nvPr/>
+        </p:nvSpPr>
+        <p:spPr>
+          <a:xfrm>
+            <a:off x="6903720" y="2624328"/>
+            <a:ext cx="4846320" cy="237744"/>
           </a:xfrm>
           <a:prstGeom prst="rect">
             <a:avLst/>
@@ -15795,41 +15829,7 @@
           <a:p>
             <a:pPr algn="l"/>
             <a:r>
-              <a:rPr sz="1100" b="1">
-                <a:solidFill>
-                  <a:srgbClr val="041E42"/>
-                </a:solidFill>
-              </a:rPr>
-              <a:t>ModernBERT — Final Results</a:t>
-            </a:r>
-          </a:p>
-        </p:txBody>
-      </p:sp>
-      <p:sp>
-        <p:nvSpPr>
-          <p:cNvPr id="49" name="TextBox 48"/>
-          <p:cNvSpPr txBox="1"/>
-          <p:nvPr/>
-        </p:nvSpPr>
-        <p:spPr>
-          <a:xfrm>
-            <a:off x="6858000" y="1975104"/>
-            <a:ext cx="4892040" cy="182880"/>
-          </a:xfrm>
-          <a:prstGeom prst="rect">
-            <a:avLst/>
-          </a:prstGeom>
-          <a:noFill/>
-        </p:spPr>
-        <p:txBody>
-          <a:bodyPr wrap="square" anchor="t">
-            <a:spAutoFit/>
-          </a:bodyPr>
-          <a:lstStyle/>
-          <a:p>
-            <a:pPr algn="l"/>
-            <a:r>
-              <a:rPr sz="900" b="0">
+              <a:rPr sz="1000" b="0">
                 <a:solidFill>
                   <a:srgbClr val="666666"/>
                 </a:solidFill>
@@ -15847,8 +15847,8 @@
         </p:nvSpPr>
         <p:spPr>
           <a:xfrm>
-            <a:off x="6217920" y="2231136"/>
-            <a:ext cx="5623560" cy="347472"/>
+            <a:off x="6217920" y="2990088"/>
+            <a:ext cx="5623560" cy="566928"/>
           </a:xfrm>
           <a:prstGeom prst="rect">
             <a:avLst/>
@@ -15893,8 +15893,42 @@
         </p:nvSpPr>
         <p:spPr>
           <a:xfrm>
-            <a:off x="6309360" y="2276856"/>
-            <a:ext cx="502920" cy="256032"/>
+            <a:off x="6309360" y="2990088"/>
+            <a:ext cx="548640" cy="566928"/>
+          </a:xfrm>
+          <a:prstGeom prst="rect">
+            <a:avLst/>
+          </a:prstGeom>
+          <a:noFill/>
+        </p:spPr>
+        <p:txBody>
+          <a:bodyPr wrap="square" anchor="ctr">
+            <a:spAutoFit/>
+          </a:bodyPr>
+          <a:lstStyle/>
+          <a:p>
+            <a:pPr algn="l"/>
+            <a:r>
+              <a:rPr sz="1400" b="1">
+                <a:solidFill>
+                  <a:srgbClr val="0071DC"/>
+                </a:solidFill>
+              </a:rPr>
+              <a:t>12</a:t>
+            </a:r>
+          </a:p>
+        </p:txBody>
+      </p:sp>
+      <p:sp>
+        <p:nvSpPr>
+          <p:cNvPr id="52" name="TextBox 51"/>
+          <p:cNvSpPr txBox="1"/>
+          <p:nvPr/>
+        </p:nvSpPr>
+        <p:spPr>
+          <a:xfrm>
+            <a:off x="6903720" y="3054096"/>
+            <a:ext cx="4846320" cy="256032"/>
           </a:xfrm>
           <a:prstGeom prst="rect">
             <a:avLst/>
@@ -15911,24 +15945,24 @@
             <a:r>
               <a:rPr sz="1200" b="1">
                 <a:solidFill>
-                  <a:srgbClr val="0071DC"/>
-                </a:solidFill>
-              </a:rPr>
-              <a:t>12</a:t>
-            </a:r>
-          </a:p>
-        </p:txBody>
-      </p:sp>
-      <p:sp>
-        <p:nvSpPr>
-          <p:cNvPr id="52" name="TextBox 51"/>
-          <p:cNvSpPr txBox="1"/>
-          <p:nvPr/>
-        </p:nvSpPr>
-        <p:spPr>
-          <a:xfrm>
-            <a:off x="6858000" y="2258568"/>
-            <a:ext cx="4892040" cy="182880"/>
+                  <a:srgbClr val="041E42"/>
+                </a:solidFill>
+              </a:rPr>
+              <a:t>Vision — Multi-Pass Payoff</a:t>
+            </a:r>
+          </a:p>
+        </p:txBody>
+      </p:sp>
+      <p:sp>
+        <p:nvSpPr>
+          <p:cNvPr id="53" name="TextBox 52"/>
+          <p:cNvSpPr txBox="1"/>
+          <p:nvPr/>
+        </p:nvSpPr>
+        <p:spPr>
+          <a:xfrm>
+            <a:off x="6903720" y="3300984"/>
+            <a:ext cx="4846320" cy="237744"/>
           </a:xfrm>
           <a:prstGeom prst="rect">
             <a:avLst/>
@@ -15943,41 +15977,7 @@
           <a:p>
             <a:pPr algn="l"/>
             <a:r>
-              <a:rPr sz="1100" b="1">
-                <a:solidFill>
-                  <a:srgbClr val="041E42"/>
-                </a:solidFill>
-              </a:rPr>
-              <a:t>Vision — Multi-Pass Payoff</a:t>
-            </a:r>
-          </a:p>
-        </p:txBody>
-      </p:sp>
-      <p:sp>
-        <p:nvSpPr>
-          <p:cNvPr id="53" name="TextBox 52"/>
-          <p:cNvSpPr txBox="1"/>
-          <p:nvPr/>
-        </p:nvSpPr>
-        <p:spPr>
-          <a:xfrm>
-            <a:off x="6858000" y="2414016"/>
-            <a:ext cx="4892040" cy="182880"/>
-          </a:xfrm>
-          <a:prstGeom prst="rect">
-            <a:avLst/>
-          </a:prstGeom>
-          <a:noFill/>
-        </p:spPr>
-        <p:txBody>
-          <a:bodyPr wrap="square" anchor="t">
-            <a:spAutoFit/>
-          </a:bodyPr>
-          <a:lstStyle/>
-          <a:p>
-            <a:pPr algn="l"/>
-            <a:r>
-              <a:rPr sz="900" b="0">
+              <a:rPr sz="1000" b="0">
                 <a:solidFill>
                   <a:srgbClr val="666666"/>
                 </a:solidFill>
@@ -15995,8 +15995,8 @@
         </p:nvSpPr>
         <p:spPr>
           <a:xfrm>
-            <a:off x="6217920" y="2670048"/>
-            <a:ext cx="5623560" cy="347472"/>
+            <a:off x="6217920" y="3666744"/>
+            <a:ext cx="5623560" cy="566928"/>
           </a:xfrm>
           <a:prstGeom prst="rect">
             <a:avLst/>
@@ -16041,8 +16041,42 @@
         </p:nvSpPr>
         <p:spPr>
           <a:xfrm>
-            <a:off x="6309360" y="2715768"/>
-            <a:ext cx="502920" cy="256032"/>
+            <a:off x="6309360" y="3666744"/>
+            <a:ext cx="548640" cy="566928"/>
+          </a:xfrm>
+          <a:prstGeom prst="rect">
+            <a:avLst/>
+          </a:prstGeom>
+          <a:noFill/>
+        </p:spPr>
+        <p:txBody>
+          <a:bodyPr wrap="square" anchor="ctr">
+            <a:spAutoFit/>
+          </a:bodyPr>
+          <a:lstStyle/>
+          <a:p>
+            <a:pPr algn="l"/>
+            <a:r>
+              <a:rPr sz="1400" b="1">
+                <a:solidFill>
+                  <a:srgbClr val="0071DC"/>
+                </a:solidFill>
+              </a:rPr>
+              <a:t>13</a:t>
+            </a:r>
+          </a:p>
+        </p:txBody>
+      </p:sp>
+      <p:sp>
+        <p:nvSpPr>
+          <p:cNvPr id="56" name="TextBox 55"/>
+          <p:cNvSpPr txBox="1"/>
+          <p:nvPr/>
+        </p:nvSpPr>
+        <p:spPr>
+          <a:xfrm>
+            <a:off x="6903720" y="3730752"/>
+            <a:ext cx="4846320" cy="256032"/>
           </a:xfrm>
           <a:prstGeom prst="rect">
             <a:avLst/>
@@ -16059,24 +16093,24 @@
             <a:r>
               <a:rPr sz="1200" b="1">
                 <a:solidFill>
-                  <a:srgbClr val="0071DC"/>
-                </a:solidFill>
-              </a:rPr>
-              <a:t>13</a:t>
-            </a:r>
-          </a:p>
-        </p:txBody>
-      </p:sp>
-      <p:sp>
-        <p:nvSpPr>
-          <p:cNvPr id="56" name="TextBox 55"/>
-          <p:cNvSpPr txBox="1"/>
-          <p:nvPr/>
-        </p:nvSpPr>
-        <p:spPr>
-          <a:xfrm>
-            <a:off x="6858000" y="2697480"/>
-            <a:ext cx="4892040" cy="182880"/>
+                  <a:srgbClr val="041E42"/>
+                </a:solidFill>
+              </a:rPr>
+              <a:t>Trust-Score Evaluation</a:t>
+            </a:r>
+          </a:p>
+        </p:txBody>
+      </p:sp>
+      <p:sp>
+        <p:nvSpPr>
+          <p:cNvPr id="57" name="TextBox 56"/>
+          <p:cNvSpPr txBox="1"/>
+          <p:nvPr/>
+        </p:nvSpPr>
+        <p:spPr>
+          <a:xfrm>
+            <a:off x="6903720" y="3977640"/>
+            <a:ext cx="4846320" cy="237744"/>
           </a:xfrm>
           <a:prstGeom prst="rect">
             <a:avLst/>
@@ -16091,41 +16125,7 @@
           <a:p>
             <a:pPr algn="l"/>
             <a:r>
-              <a:rPr sz="1100" b="1">
-                <a:solidFill>
-                  <a:srgbClr val="041E42"/>
-                </a:solidFill>
-              </a:rPr>
-              <a:t>Trust-Score Evaluation</a:t>
-            </a:r>
-          </a:p>
-        </p:txBody>
-      </p:sp>
-      <p:sp>
-        <p:nvSpPr>
-          <p:cNvPr id="57" name="TextBox 56"/>
-          <p:cNvSpPr txBox="1"/>
-          <p:nvPr/>
-        </p:nvSpPr>
-        <p:spPr>
-          <a:xfrm>
-            <a:off x="6858000" y="2852928"/>
-            <a:ext cx="4892040" cy="182880"/>
-          </a:xfrm>
-          <a:prstGeom prst="rect">
-            <a:avLst/>
-          </a:prstGeom>
-          <a:noFill/>
-        </p:spPr>
-        <p:txBody>
-          <a:bodyPr wrap="square" anchor="t">
-            <a:spAutoFit/>
-          </a:bodyPr>
-          <a:lstStyle/>
-          <a:p>
-            <a:pPr algn="l"/>
-            <a:r>
-              <a:rPr sz="900" b="0">
+              <a:rPr sz="1000" b="0">
                 <a:solidFill>
                   <a:srgbClr val="666666"/>
                 </a:solidFill>
@@ -16143,8 +16143,8 @@
         </p:nvSpPr>
         <p:spPr>
           <a:xfrm>
-            <a:off x="6217920" y="3108960"/>
-            <a:ext cx="5623560" cy="347472"/>
+            <a:off x="6217920" y="4343400"/>
+            <a:ext cx="5623560" cy="566928"/>
           </a:xfrm>
           <a:prstGeom prst="rect">
             <a:avLst/>
@@ -16189,8 +16189,42 @@
         </p:nvSpPr>
         <p:spPr>
           <a:xfrm>
-            <a:off x="6309360" y="3154680"/>
-            <a:ext cx="502920" cy="256032"/>
+            <a:off x="6309360" y="4343400"/>
+            <a:ext cx="548640" cy="566928"/>
+          </a:xfrm>
+          <a:prstGeom prst="rect">
+            <a:avLst/>
+          </a:prstGeom>
+          <a:noFill/>
+        </p:spPr>
+        <p:txBody>
+          <a:bodyPr wrap="square" anchor="ctr">
+            <a:spAutoFit/>
+          </a:bodyPr>
+          <a:lstStyle/>
+          <a:p>
+            <a:pPr algn="l"/>
+            <a:r>
+              <a:rPr sz="1400" b="1">
+                <a:solidFill>
+                  <a:srgbClr val="0071DC"/>
+                </a:solidFill>
+              </a:rPr>
+              <a:t>14</a:t>
+            </a:r>
+          </a:p>
+        </p:txBody>
+      </p:sp>
+      <p:sp>
+        <p:nvSpPr>
+          <p:cNvPr id="60" name="TextBox 59"/>
+          <p:cNvSpPr txBox="1"/>
+          <p:nvPr/>
+        </p:nvSpPr>
+        <p:spPr>
+          <a:xfrm>
+            <a:off x="6903720" y="4407408"/>
+            <a:ext cx="4846320" cy="256032"/>
           </a:xfrm>
           <a:prstGeom prst="rect">
             <a:avLst/>
@@ -16207,24 +16241,24 @@
             <a:r>
               <a:rPr sz="1200" b="1">
                 <a:solidFill>
-                  <a:srgbClr val="0071DC"/>
-                </a:solidFill>
-              </a:rPr>
-              <a:t>14</a:t>
-            </a:r>
-          </a:p>
-        </p:txBody>
-      </p:sp>
-      <p:sp>
-        <p:nvSpPr>
-          <p:cNvPr id="60" name="TextBox 59"/>
-          <p:cNvSpPr txBox="1"/>
-          <p:nvPr/>
-        </p:nvSpPr>
-        <p:spPr>
-          <a:xfrm>
-            <a:off x="6858000" y="3136392"/>
-            <a:ext cx="4892040" cy="182880"/>
+                  <a:srgbClr val="041E42"/>
+                </a:solidFill>
+              </a:rPr>
+              <a:t>Live Demo</a:t>
+            </a:r>
+          </a:p>
+        </p:txBody>
+      </p:sp>
+      <p:sp>
+        <p:nvSpPr>
+          <p:cNvPr id="61" name="TextBox 60"/>
+          <p:cNvSpPr txBox="1"/>
+          <p:nvPr/>
+        </p:nvSpPr>
+        <p:spPr>
+          <a:xfrm>
+            <a:off x="6903720" y="4654296"/>
+            <a:ext cx="4846320" cy="237744"/>
           </a:xfrm>
           <a:prstGeom prst="rect">
             <a:avLst/>
@@ -16239,41 +16273,7 @@
           <a:p>
             <a:pPr algn="l"/>
             <a:r>
-              <a:rPr sz="1100" b="1">
-                <a:solidFill>
-                  <a:srgbClr val="041E42"/>
-                </a:solidFill>
-              </a:rPr>
-              <a:t>Live Demo</a:t>
-            </a:r>
-          </a:p>
-        </p:txBody>
-      </p:sp>
-      <p:sp>
-        <p:nvSpPr>
-          <p:cNvPr id="61" name="TextBox 60"/>
-          <p:cNvSpPr txBox="1"/>
-          <p:nvPr/>
-        </p:nvSpPr>
-        <p:spPr>
-          <a:xfrm>
-            <a:off x="6858000" y="3291840"/>
-            <a:ext cx="4892040" cy="182880"/>
-          </a:xfrm>
-          <a:prstGeom prst="rect">
-            <a:avLst/>
-          </a:prstGeom>
-          <a:noFill/>
-        </p:spPr>
-        <p:txBody>
-          <a:bodyPr wrap="square" anchor="t">
-            <a:spAutoFit/>
-          </a:bodyPr>
-          <a:lstStyle/>
-          <a:p>
-            <a:pPr algn="l"/>
-            <a:r>
-              <a:rPr sz="900" b="0">
+              <a:rPr sz="1000" b="0">
                 <a:solidFill>
                   <a:srgbClr val="666666"/>
                 </a:solidFill>
@@ -16291,8 +16291,8 @@
         </p:nvSpPr>
         <p:spPr>
           <a:xfrm>
-            <a:off x="6217920" y="3547872"/>
-            <a:ext cx="5623560" cy="347472"/>
+            <a:off x="6217920" y="5020056"/>
+            <a:ext cx="5623560" cy="566928"/>
           </a:xfrm>
           <a:prstGeom prst="rect">
             <a:avLst/>
@@ -16337,8 +16337,42 @@
         </p:nvSpPr>
         <p:spPr>
           <a:xfrm>
-            <a:off x="6309360" y="3593592"/>
-            <a:ext cx="502920" cy="256032"/>
+            <a:off x="6309360" y="5020056"/>
+            <a:ext cx="548640" cy="566928"/>
+          </a:xfrm>
+          <a:prstGeom prst="rect">
+            <a:avLst/>
+          </a:prstGeom>
+          <a:noFill/>
+        </p:spPr>
+        <p:txBody>
+          <a:bodyPr wrap="square" anchor="ctr">
+            <a:spAutoFit/>
+          </a:bodyPr>
+          <a:lstStyle/>
+          <a:p>
+            <a:pPr algn="l"/>
+            <a:r>
+              <a:rPr sz="1400" b="1">
+                <a:solidFill>
+                  <a:srgbClr val="0071DC"/>
+                </a:solidFill>
+              </a:rPr>
+              <a:t>15</a:t>
+            </a:r>
+          </a:p>
+        </p:txBody>
+      </p:sp>
+      <p:sp>
+        <p:nvSpPr>
+          <p:cNvPr id="64" name="TextBox 63"/>
+          <p:cNvSpPr txBox="1"/>
+          <p:nvPr/>
+        </p:nvSpPr>
+        <p:spPr>
+          <a:xfrm>
+            <a:off x="6903720" y="5084064"/>
+            <a:ext cx="4846320" cy="256032"/>
           </a:xfrm>
           <a:prstGeom prst="rect">
             <a:avLst/>
@@ -16355,24 +16389,24 @@
             <a:r>
               <a:rPr sz="1200" b="1">
                 <a:solidFill>
-                  <a:srgbClr val="0071DC"/>
-                </a:solidFill>
-              </a:rPr>
-              <a:t>15</a:t>
-            </a:r>
-          </a:p>
-        </p:txBody>
-      </p:sp>
-      <p:sp>
-        <p:nvSpPr>
-          <p:cNvPr id="64" name="TextBox 63"/>
-          <p:cNvSpPr txBox="1"/>
-          <p:nvPr/>
-        </p:nvSpPr>
-        <p:spPr>
-          <a:xfrm>
-            <a:off x="6858000" y="3575304"/>
-            <a:ext cx="4892040" cy="182880"/>
+                  <a:srgbClr val="041E42"/>
+                </a:solidFill>
+              </a:rPr>
+              <a:t>Conclusions &amp; Future Work</a:t>
+            </a:r>
+          </a:p>
+        </p:txBody>
+      </p:sp>
+      <p:sp>
+        <p:nvSpPr>
+          <p:cNvPr id="65" name="TextBox 64"/>
+          <p:cNvSpPr txBox="1"/>
+          <p:nvPr/>
+        </p:nvSpPr>
+        <p:spPr>
+          <a:xfrm>
+            <a:off x="6903720" y="5330952"/>
+            <a:ext cx="4846320" cy="237744"/>
           </a:xfrm>
           <a:prstGeom prst="rect">
             <a:avLst/>
@@ -16387,41 +16421,7 @@
           <a:p>
             <a:pPr algn="l"/>
             <a:r>
-              <a:rPr sz="1100" b="1">
-                <a:solidFill>
-                  <a:srgbClr val="041E42"/>
-                </a:solidFill>
-              </a:rPr>
-              <a:t>Conclusions &amp; Future Work</a:t>
-            </a:r>
-          </a:p>
-        </p:txBody>
-      </p:sp>
-      <p:sp>
-        <p:nvSpPr>
-          <p:cNvPr id="65" name="TextBox 64"/>
-          <p:cNvSpPr txBox="1"/>
-          <p:nvPr/>
-        </p:nvSpPr>
-        <p:spPr>
-          <a:xfrm>
-            <a:off x="6858000" y="3730752"/>
-            <a:ext cx="4892040" cy="182880"/>
-          </a:xfrm>
-          <a:prstGeom prst="rect">
-            <a:avLst/>
-          </a:prstGeom>
-          <a:noFill/>
-        </p:spPr>
-        <p:txBody>
-          <a:bodyPr wrap="square" anchor="t">
-            <a:spAutoFit/>
-          </a:bodyPr>
-          <a:lstStyle/>
-          <a:p>
-            <a:pPr algn="l"/>
-            <a:r>
-              <a:rPr sz="900" b="0">
+              <a:rPr sz="1000" b="0">
                 <a:solidFill>
                   <a:srgbClr val="666666"/>
                 </a:solidFill>

--- a/docs/Sem_4/FINAL_PRESENTATION_VishalSingh_2020AA05641.pptx
+++ b/docs/Sem_4/FINAL_PRESENTATION_VishalSingh_2020AA05641.pptx
@@ -6609,7 +6609,7 @@
                   <a:srgbClr val="666666"/>
                 </a:solidFill>
               </a:rPr>
-              <a:t>Long-post F1  (&gt; 256 tok)</a:t>
+              <a:t>Long posts  (≥ 512 tok,  n = 7)</a:t>
             </a:r>
           </a:p>
         </p:txBody>
@@ -6638,12 +6638,12 @@
           <a:p>
             <a:pPr algn="ctr"/>
             <a:r>
-              <a:rPr sz="2400" b="1">
+              <a:rPr sz="2000" b="1">
                 <a:solidFill>
                   <a:srgbClr val="10B981"/>
                 </a:solidFill>
               </a:rPr>
-              <a:t>0.28 → 1.00</a:t>
+              <a:t>5 / 7  →  7 / 7  correct</a:t>
             </a:r>
           </a:p>
         </p:txBody>
@@ -7283,7 +7283,7 @@
                   <a:srgbClr val="041E42"/>
                 </a:solidFill>
               </a:rPr>
-              <a:t>Per-length-bucket F1</a:t>
+              <a:t>Per-length-bucket accuracy  (5-fold OOF predictions)</a:t>
             </a:r>
           </a:p>
         </p:txBody>
@@ -7312,7 +7312,7 @@
                 <a:gridCol w="2811780"/>
                 <a:gridCol w="2811780"/>
               </a:tblGrid>
-              <a:tr h="251460">
+              <a:tr h="335280">
                 <a:tc>
                   <a:txBody>
                     <a:bodyPr/>
@@ -7324,7 +7324,7 @@
                             <a:srgbClr val="FFFFFF"/>
                           </a:solidFill>
                         </a:rPr>
-                        <a:t>Bucket</a:t>
+                        <a:t>Bucket  (token count)</a:t>
                       </a:r>
                     </a:p>
                   </a:txBody>
@@ -7345,7 +7345,7 @@
                             <a:srgbClr val="FFFFFF"/>
                           </a:solidFill>
                         </a:rPr>
-                        <a:t>Baseline</a:t>
+                        <a:t>Baseline correct</a:t>
                       </a:r>
                     </a:p>
                   </a:txBody>
@@ -7366,7 +7366,7 @@
                             <a:srgbClr val="FFFFFF"/>
                           </a:solidFill>
                         </a:rPr>
-                        <a:t>ModernBERT</a:t>
+                        <a:t>ModernBERT correct</a:t>
                       </a:r>
                     </a:p>
                   </a:txBody>
@@ -7387,7 +7387,7 @@
                             <a:srgbClr val="FFFFFF"/>
                           </a:solidFill>
                         </a:rPr>
-                        <a:t>Δ</a:t>
+                        <a:t>Recovered</a:t>
                       </a:r>
                     </a:p>
                   </a:txBody>
@@ -7398,7 +7398,7 @@
                   </a:tcPr>
                 </a:tc>
               </a:tr>
-              <a:tr h="251460">
+              <a:tr h="335280">
                 <a:tc>
                   <a:txBody>
                     <a:bodyPr/>
@@ -7410,7 +7410,7 @@
                             <a:srgbClr val="333333"/>
                           </a:solidFill>
                         </a:rPr>
-                        <a:t>Short  (&lt; 64 tokens)</a:t>
+                        <a:t>Short-to-medium  (&lt; 512, n = 193)</a:t>
                       </a:r>
                     </a:p>
                   </a:txBody>
@@ -7431,7 +7431,7 @@
                             <a:srgbClr val="333333"/>
                           </a:solidFill>
                         </a:rPr>
-                        <a:t>0.7500</a:t>
+                        <a:t>138 / 193 (72 %)</a:t>
                       </a:r>
                     </a:p>
                   </a:txBody>
@@ -7452,7 +7452,7 @@
                             <a:srgbClr val="333333"/>
                           </a:solidFill>
                         </a:rPr>
-                        <a:t>0.7800</a:t>
+                        <a:t>159 / 193 (82 %)</a:t>
                       </a:r>
                     </a:p>
                   </a:txBody>
@@ -7473,7 +7473,7 @@
                             <a:srgbClr val="333333"/>
                           </a:solidFill>
                         </a:rPr>
-                        <a:t>+3.0</a:t>
+                        <a:t>+21</a:t>
                       </a:r>
                     </a:p>
                   </a:txBody>
@@ -7484,7 +7484,7 @@
                   </a:tcPr>
                 </a:tc>
               </a:tr>
-              <a:tr h="251460">
+              <a:tr h="335280">
                 <a:tc>
                   <a:txBody>
                     <a:bodyPr/>
@@ -7496,93 +7496,7 @@
                             <a:srgbClr val="333333"/>
                           </a:solidFill>
                         </a:rPr>
-                        <a:t>Medium  (64 – 256 tokens)</a:t>
-                      </a:r>
-                    </a:p>
-                  </a:txBody>
-                  <a:tcPr>
-                    <a:solidFill>
-                      <a:srgbClr val="F5F5F5"/>
-                    </a:solidFill>
-                  </a:tcPr>
-                </a:tc>
-                <a:tc>
-                  <a:txBody>
-                    <a:bodyPr/>
-                    <a:lstStyle/>
-                    <a:p>
-                      <a:r>
-                        <a:rPr sz="1100">
-                          <a:solidFill>
-                            <a:srgbClr val="333333"/>
-                          </a:solidFill>
-                        </a:rPr>
-                        <a:t>0.6500</a:t>
-                      </a:r>
-                    </a:p>
-                  </a:txBody>
-                  <a:tcPr>
-                    <a:solidFill>
-                      <a:srgbClr val="F5F5F5"/>
-                    </a:solidFill>
-                  </a:tcPr>
-                </a:tc>
-                <a:tc>
-                  <a:txBody>
-                    <a:bodyPr/>
-                    <a:lstStyle/>
-                    <a:p>
-                      <a:r>
-                        <a:rPr sz="1100">
-                          <a:solidFill>
-                            <a:srgbClr val="333333"/>
-                          </a:solidFill>
-                        </a:rPr>
-                        <a:t>0.7400</a:t>
-                      </a:r>
-                    </a:p>
-                  </a:txBody>
-                  <a:tcPr>
-                    <a:solidFill>
-                      <a:srgbClr val="F5F5F5"/>
-                    </a:solidFill>
-                  </a:tcPr>
-                </a:tc>
-                <a:tc>
-                  <a:txBody>
-                    <a:bodyPr/>
-                    <a:lstStyle/>
-                    <a:p>
-                      <a:r>
-                        <a:rPr sz="1100">
-                          <a:solidFill>
-                            <a:srgbClr val="333333"/>
-                          </a:solidFill>
-                        </a:rPr>
-                        <a:t>+9.0</a:t>
-                      </a:r>
-                    </a:p>
-                  </a:txBody>
-                  <a:tcPr>
-                    <a:solidFill>
-                      <a:srgbClr val="F5F5F5"/>
-                    </a:solidFill>
-                  </a:tcPr>
-                </a:tc>
-              </a:tr>
-              <a:tr h="251460">
-                <a:tc>
-                  <a:txBody>
-                    <a:bodyPr/>
-                    <a:lstStyle/>
-                    <a:p>
-                      <a:r>
-                        <a:rPr sz="1100" b="1">
-                          <a:solidFill>
-                            <a:srgbClr val="333333"/>
-                          </a:solidFill>
-                        </a:rPr>
-                        <a:t>Long  (&gt; 256 tokens)</a:t>
+                        <a:t>Long  (≥ 512, n = 7, all negative)</a:t>
                       </a:r>
                     </a:p>
                   </a:txBody>
@@ -7603,7 +7517,7 @@
                             <a:srgbClr val="333333"/>
                           </a:solidFill>
                         </a:rPr>
-                        <a:t>0.2778</a:t>
+                        <a:t>5 / 7</a:t>
                       </a:r>
                     </a:p>
                   </a:txBody>
@@ -7624,7 +7538,7 @@
                             <a:srgbClr val="333333"/>
                           </a:solidFill>
                         </a:rPr>
-                        <a:t>1.0000</a:t>
+                        <a:t>7 / 7</a:t>
                       </a:r>
                     </a:p>
                   </a:txBody>
@@ -7645,7 +7559,7 @@
                             <a:srgbClr val="333333"/>
                           </a:solidFill>
                         </a:rPr>
-                        <a:t>+72.2</a:t>
+                        <a:t>+2</a:t>
                       </a:r>
                     </a:p>
                   </a:txBody>
@@ -10748,7 +10662,7 @@
                             <a:srgbClr val="333333"/>
                           </a:solidFill>
                         </a:rPr>
-                        <a:t>Long-post F1  (&gt; 256 tokens)</a:t>
+                        <a:t>Long-bucket accuracy  (≥ 512 tokens, n=7)</a:t>
                       </a:r>
                     </a:p>
                   </a:txBody>
@@ -10769,7 +10683,7 @@
                             <a:srgbClr val="333333"/>
                           </a:solidFill>
                         </a:rPr>
-                        <a:t>1.0000</a:t>
+                        <a:t>7 / 7 correct</a:t>
                       </a:r>
                     </a:p>
                   </a:txBody>
@@ -10790,7 +10704,7 @@
                             <a:srgbClr val="333333"/>
                           </a:solidFill>
                         </a:rPr>
-                        <a:t>From 0.2778 baseline</a:t>
+                        <a:t>Baseline 5 / 7  ·  all negative-class</a:t>
                       </a:r>
                     </a:p>
                   </a:txBody>
@@ -13741,7 +13655,7 @@
                   <a:srgbClr val="333333"/>
                 </a:solidFill>
               </a:rPr>
-              <a:t>•  Long-post recovery  (0.28 → 1.00)  came for free once we switched off truncation.</a:t>
+              <a:t>•  Long-post recovery came for free once we switched off truncation  (≥1024-tok context):  5/7 → 7/7 correct on the ≥ 512-token bucket.</a:t>
             </a:r>
           </a:p>
           <a:p>
@@ -13934,7 +13848,7 @@
                   <a:srgbClr val="333333"/>
                 </a:solidFill>
               </a:rPr>
-              <a:t>•  Long-post F1 of 1.00 is on 7 posts  —  read it as evidence the truncation ceiling is gone, not that the model is perfect on long text.</a:t>
+              <a:t>•  Long bucket has only 7 posts and they are all negative-class  —  7/7 correct is evidence the truncation ceiling is gone, not proof of long-text mastery.</a:t>
             </a:r>
           </a:p>
           <a:p>
@@ -18967,7 +18881,7 @@
                   <a:srgbClr val="333333"/>
                 </a:solidFill>
               </a:rPr>
-              <a:t>•  ModernBERT Stage 3 (final)  —  F1 0.7285 → 0.7642</a:t>
+              <a:t>•  ModernBERT Stage 3 (final)  —  Macro-F1 0.7285 → 0.7642  (5-fold OOF)</a:t>
             </a:r>
           </a:p>
           <a:p>

--- a/docs/Sem_4/FINAL_PRESENTATION_VishalSingh_2020AA05641.pptx
+++ b/docs/Sem_4/FINAL_PRESENTATION_VishalSingh_2020AA05641.pptx
@@ -19350,7 +19350,7 @@
                   <a:srgbClr val="333333"/>
                 </a:solidFill>
               </a:rPr>
-              <a:t>•  Generate Drafts  →  two reply options  (rule + LLM)</a:t>
+              <a:t>•  Generate Drafts  →  three reply options  (GPT-4o + Mistral + Smart Composer)</a:t>
             </a:r>
           </a:p>
           <a:p>
@@ -19365,7 +19365,7 @@
                   <a:srgbClr val="333333"/>
                 </a:solidFill>
               </a:rPr>
-              <a:t>•  Analyst picks A or B, edits, and posts to Reddit</a:t>
+              <a:t>•  Analyst picks A, B or C, edits inline, and posts to Reddit</a:t>
             </a:r>
           </a:p>
           <a:p>

--- a/docs/Sem_4/FINAL_PRESENTATION_VishalSingh_2020AA05641.pptx
+++ b/docs/Sem_4/FINAL_PRESENTATION_VishalSingh_2020AA05641.pptx
@@ -3125,8 +3125,8 @@
         </p:nvSpPr>
         <p:spPr>
           <a:xfrm>
-            <a:off x="0" y="2103120"/>
-            <a:ext cx="365760" cy="2468880"/>
+            <a:off x="0" y="1645920"/>
+            <a:ext cx="365760" cy="3108960"/>
           </a:xfrm>
           <a:prstGeom prst="rect">
             <a:avLst/>
@@ -3169,7 +3169,7 @@
         </p:nvSpPr>
         <p:spPr>
           <a:xfrm>
-            <a:off x="822960" y="777240"/>
+            <a:off x="822960" y="640080"/>
             <a:ext cx="10515600" cy="822960"/>
           </a:xfrm>
           <a:prstGeom prst="rect">
@@ -3185,7 +3185,7 @@
           <a:p>
             <a:pPr algn="l"/>
             <a:r>
-              <a:rPr sz="3800" b="1">
+              <a:rPr sz="4000" b="1">
                 <a:solidFill>
                   <a:srgbClr val="FFFFFF"/>
                 </a:solidFill>
@@ -3203,7 +3203,7 @@
         </p:nvSpPr>
         <p:spPr>
           <a:xfrm>
-            <a:off x="822960" y="1600200"/>
+            <a:off x="822960" y="1463040"/>
             <a:ext cx="10515600" cy="1280160"/>
           </a:xfrm>
           <a:prstGeom prst="rect">
@@ -3219,7 +3219,7 @@
           <a:p>
             <a:pPr algn="l"/>
             <a:r>
-              <a:rPr sz="1800" b="0">
+              <a:rPr sz="1900" b="0">
                 <a:solidFill>
                   <a:srgbClr val="FFC220"/>
                 </a:solidFill>
@@ -3230,7 +3230,7 @@
           <a:p>
             <a:pPr algn="l"/>
             <a:r>
-              <a:rPr sz="1800" b="0">
+              <a:rPr sz="1900" b="0">
                 <a:solidFill>
                   <a:srgbClr val="FFC220"/>
                 </a:solidFill>
@@ -3248,7 +3248,7 @@
         </p:nvSpPr>
         <p:spPr>
           <a:xfrm>
-            <a:off x="822960" y="2880360"/>
+            <a:off x="822960" y="2697480"/>
             <a:ext cx="10515600" cy="365760"/>
           </a:xfrm>
           <a:prstGeom prst="rect">
@@ -3269,20 +3269,64 @@
                   <a:srgbClr val="FFFFFF"/>
                 </a:solidFill>
               </a:rPr>
-              <a:t>BITS ZG628T  ·  Dissertation  ·  Post Mid-Semester Presentation</a:t>
-            </a:r>
-          </a:p>
-        </p:txBody>
-      </p:sp>
-      <p:sp>
-        <p:nvSpPr>
-          <p:cNvPr id="6" name="TextBox 5"/>
-          <p:cNvSpPr txBox="1"/>
-          <p:nvPr/>
-        </p:nvSpPr>
-        <p:spPr>
-          <a:xfrm>
-            <a:off x="822960" y="3794760"/>
+              <a:t>BITS ZG628T   ·   Dissertation   ·   Post Mid-Semester Presentation</a:t>
+            </a:r>
+          </a:p>
+        </p:txBody>
+      </p:sp>
+      <p:sp>
+        <p:nvSpPr>
+          <p:cNvPr id="6" name="Rectangle 5"/>
+          <p:cNvSpPr/>
+          <p:nvPr/>
+        </p:nvSpPr>
+        <p:spPr>
+          <a:xfrm>
+            <a:off x="822960" y="3246120"/>
+            <a:ext cx="3657600" cy="36576"/>
+          </a:xfrm>
+          <a:prstGeom prst="rect">
+            <a:avLst/>
+          </a:prstGeom>
+          <a:solidFill>
+            <a:srgbClr val="FFC220"/>
+          </a:solidFill>
+          <a:ln>
+            <a:noFill/>
+          </a:ln>
+          <a:effectLst/>
+        </p:spPr>
+        <p:style>
+          <a:lnRef idx="1">
+            <a:schemeClr val="accent1"/>
+          </a:lnRef>
+          <a:fillRef idx="3">
+            <a:schemeClr val="accent1"/>
+          </a:fillRef>
+          <a:effectRef idx="2">
+            <a:schemeClr val="accent1"/>
+          </a:effectRef>
+          <a:fontRef idx="minor">
+            <a:schemeClr val="lt1"/>
+          </a:fontRef>
+        </p:style>
+        <p:txBody>
+          <a:bodyPr rtlCol="0" anchor="ctr"/>
+          <a:lstStyle/>
+          <a:p>
+            <a:pPr algn="ctr"/>
+          </a:p>
+        </p:txBody>
+      </p:sp>
+      <p:sp>
+        <p:nvSpPr>
+          <p:cNvPr id="7" name="TextBox 6"/>
+          <p:cNvSpPr txBox="1"/>
+          <p:nvPr/>
+        </p:nvSpPr>
+        <p:spPr>
+          <a:xfrm>
+            <a:off x="822960" y="3520440"/>
             <a:ext cx="10515600" cy="365760"/>
           </a:xfrm>
           <a:prstGeom prst="rect">
@@ -3298,7 +3342,7 @@
           <a:p>
             <a:pPr algn="l"/>
             <a:r>
-              <a:rPr sz="1500" b="1">
+              <a:rPr sz="1600" b="1">
                 <a:solidFill>
                   <a:srgbClr val="FFFFFF"/>
                 </a:solidFill>
@@ -3310,13 +3354,13 @@
       </p:sp>
       <p:sp>
         <p:nvSpPr>
-          <p:cNvPr id="7" name="TextBox 6"/>
-          <p:cNvSpPr txBox="1"/>
-          <p:nvPr/>
-        </p:nvSpPr>
-        <p:spPr>
-          <a:xfrm>
-            <a:off x="822960" y="4206240"/>
+          <p:cNvPr id="8" name="TextBox 7"/>
+          <p:cNvSpPr txBox="1"/>
+          <p:nvPr/>
+        </p:nvSpPr>
+        <p:spPr>
+          <a:xfrm>
+            <a:off x="822960" y="3931920"/>
             <a:ext cx="10515600" cy="365760"/>
           </a:xfrm>
           <a:prstGeom prst="rect">
@@ -3344,13 +3388,13 @@
       </p:sp>
       <p:sp>
         <p:nvSpPr>
-          <p:cNvPr id="8" name="TextBox 7"/>
-          <p:cNvSpPr txBox="1"/>
-          <p:nvPr/>
-        </p:nvSpPr>
-        <p:spPr>
-          <a:xfrm>
-            <a:off x="822960" y="4709160"/>
+          <p:cNvPr id="9" name="TextBox 8"/>
+          <p:cNvSpPr txBox="1"/>
+          <p:nvPr/>
+        </p:nvSpPr>
+        <p:spPr>
+          <a:xfrm>
+            <a:off x="822960" y="4480560"/>
             <a:ext cx="10515600" cy="365760"/>
           </a:xfrm>
           <a:prstGeom prst="rect">
@@ -3366,7 +3410,7 @@
           <a:p>
             <a:pPr algn="l"/>
             <a:r>
-              <a:rPr sz="1500" b="1">
+              <a:rPr sz="1600" b="1">
                 <a:solidFill>
                   <a:srgbClr val="FFFFFF"/>
                 </a:solidFill>
@@ -3378,13 +3422,13 @@
       </p:sp>
       <p:sp>
         <p:nvSpPr>
-          <p:cNvPr id="9" name="TextBox 8"/>
-          <p:cNvSpPr txBox="1"/>
-          <p:nvPr/>
-        </p:nvSpPr>
-        <p:spPr>
-          <a:xfrm>
-            <a:off x="822960" y="5120640"/>
+          <p:cNvPr id="10" name="TextBox 9"/>
+          <p:cNvSpPr txBox="1"/>
+          <p:nvPr/>
+        </p:nvSpPr>
+        <p:spPr>
+          <a:xfrm>
+            <a:off x="822960" y="4892040"/>
             <a:ext cx="10515600" cy="365760"/>
           </a:xfrm>
           <a:prstGeom prst="rect">
@@ -3412,13 +3456,13 @@
       </p:sp>
       <p:sp>
         <p:nvSpPr>
-          <p:cNvPr id="10" name="TextBox 9"/>
-          <p:cNvSpPr txBox="1"/>
-          <p:nvPr/>
-        </p:nvSpPr>
-        <p:spPr>
-          <a:xfrm>
-            <a:off x="822960" y="5623560"/>
+          <p:cNvPr id="11" name="TextBox 10"/>
+          <p:cNvSpPr txBox="1"/>
+          <p:nvPr/>
+        </p:nvSpPr>
+        <p:spPr>
+          <a:xfrm>
+            <a:off x="822960" y="5440680"/>
             <a:ext cx="10515600" cy="365760"/>
           </a:xfrm>
           <a:prstGeom prst="rect">
@@ -3434,7 +3478,7 @@
           <a:p>
             <a:pPr algn="l"/>
             <a:r>
-              <a:rPr sz="1500" b="1">
+              <a:rPr sz="1600" b="1">
                 <a:solidFill>
                   <a:srgbClr val="FFFFFF"/>
                 </a:solidFill>
@@ -3446,13 +3490,13 @@
       </p:sp>
       <p:sp>
         <p:nvSpPr>
-          <p:cNvPr id="11" name="TextBox 10"/>
-          <p:cNvSpPr txBox="1"/>
-          <p:nvPr/>
-        </p:nvSpPr>
-        <p:spPr>
-          <a:xfrm>
-            <a:off x="822960" y="6035040"/>
+          <p:cNvPr id="12" name="TextBox 11"/>
+          <p:cNvSpPr txBox="1"/>
+          <p:nvPr/>
+        </p:nvSpPr>
+        <p:spPr>
+          <a:xfrm>
+            <a:off x="822960" y="5852160"/>
             <a:ext cx="10515600" cy="365760"/>
           </a:xfrm>
           <a:prstGeom prst="rect">
@@ -3480,13 +3524,13 @@
       </p:sp>
       <p:sp>
         <p:nvSpPr>
-          <p:cNvPr id="12" name="TextBox 11"/>
-          <p:cNvSpPr txBox="1"/>
-          <p:nvPr/>
-        </p:nvSpPr>
-        <p:spPr>
-          <a:xfrm>
-            <a:off x="822960" y="6446520"/>
+          <p:cNvPr id="13" name="TextBox 12"/>
+          <p:cNvSpPr txBox="1"/>
+          <p:nvPr/>
+        </p:nvSpPr>
+        <p:spPr>
+          <a:xfrm>
+            <a:off x="822960" y="6492240"/>
             <a:ext cx="10515600" cy="274320"/>
           </a:xfrm>
           <a:prstGeom prst="rect">
@@ -4508,7 +4552,7 @@
         <p:spPr>
           <a:xfrm>
             <a:off x="457200" y="3246120"/>
-            <a:ext cx="6858000" cy="4286250"/>
+            <a:ext cx="6858000" cy="3017520"/>
           </a:xfrm>
           <a:prstGeom prst="rect">
             <a:avLst/>
@@ -4524,7 +4568,7 @@
         <p:spPr>
           <a:xfrm>
             <a:off x="7589520" y="3246120"/>
-            <a:ext cx="4114800" cy="2880360"/>
+            <a:ext cx="4114800" cy="3017520"/>
           </a:xfrm>
           <a:prstGeom prst="rect">
             <a:avLst/>
@@ -4585,12 +4629,12 @@
           <a:p>
             <a:pPr algn="l"/>
             <a:r>
-              <a:rPr sz="1200" b="1">
+              <a:rPr sz="1100" b="1">
                 <a:solidFill>
                   <a:srgbClr val="0071DC"/>
                 </a:solidFill>
               </a:rPr>
-              <a:t>Resolve modal  —  2-step flow</a:t>
+              <a:t>RESOLVE MODAL  —  2-step flow</a:t>
             </a:r>
           </a:p>
         </p:txBody>
@@ -4604,7 +4648,7 @@
         <p:spPr>
           <a:xfrm>
             <a:off x="7772400" y="3703320"/>
-            <a:ext cx="3840480" cy="2377440"/>
+            <a:ext cx="3840480" cy="2514600"/>
           </a:xfrm>
           <a:prstGeom prst="rect">
             <a:avLst/>
@@ -4943,8 +4987,8 @@
         </p:nvSpPr>
         <p:spPr>
           <a:xfrm>
-            <a:off x="457200" y="960120"/>
-            <a:ext cx="5486400" cy="2148840"/>
+            <a:off x="457200" y="914400"/>
+            <a:ext cx="5532120" cy="2423160"/>
           </a:xfrm>
           <a:prstGeom prst="rect">
             <a:avLst/>
@@ -4989,8 +5033,8 @@
         </p:nvSpPr>
         <p:spPr>
           <a:xfrm>
-            <a:off x="457200" y="960120"/>
-            <a:ext cx="5486400" cy="411480"/>
+            <a:off x="457200" y="914400"/>
+            <a:ext cx="5532120" cy="457200"/>
           </a:xfrm>
           <a:prstGeom prst="rect">
             <a:avLst/>
@@ -5033,8 +5077,8 @@
         </p:nvSpPr>
         <p:spPr>
           <a:xfrm>
-            <a:off x="457200" y="1014984"/>
-            <a:ext cx="5486400" cy="320040"/>
+            <a:off x="457200" y="987552"/>
+            <a:ext cx="5532120" cy="365760"/>
           </a:xfrm>
           <a:prstGeom prst="rect">
             <a:avLst/>
@@ -5049,7 +5093,7 @@
           <a:p>
             <a:pPr algn="ctr"/>
             <a:r>
-              <a:rPr sz="1300" b="1">
+              <a:rPr sz="1400" b="1">
                 <a:solidFill>
                   <a:srgbClr val="FFFFFF"/>
                 </a:solidFill>
@@ -5067,8 +5111,8 @@
         </p:nvSpPr>
         <p:spPr>
           <a:xfrm>
-            <a:off x="640080" y="1463040"/>
-            <a:ext cx="5120640" cy="1554480"/>
+            <a:off x="640080" y="1508760"/>
+            <a:ext cx="5166360" cy="1737360"/>
           </a:xfrm>
           <a:prstGeom prst="rect">
             <a:avLst/>
@@ -5083,7 +5127,7 @@
           <a:p>
             <a:pPr algn="ctr"/>
             <a:r>
-              <a:rPr sz="1200" b="0">
+              <a:rPr sz="1300" b="0">
                 <a:solidFill>
                   <a:srgbClr val="333333"/>
                 </a:solidFill>
@@ -5094,7 +5138,7 @@
           <a:p>
             <a:pPr algn="ctr"/>
             <a:r>
-              <a:rPr sz="1200" b="0">
+              <a:rPr sz="1300" b="0">
                 <a:solidFill>
                   <a:srgbClr val="333333"/>
                 </a:solidFill>
@@ -5105,7 +5149,7 @@
           <a:p>
             <a:pPr algn="ctr"/>
             <a:r>
-              <a:rPr sz="1200" b="0">
+              <a:rPr sz="1300" b="0">
                 <a:solidFill>
                   <a:srgbClr val="333333"/>
                 </a:solidFill>
@@ -5123,8 +5167,8 @@
         </p:nvSpPr>
         <p:spPr>
           <a:xfrm>
-            <a:off x="6309360" y="960120"/>
-            <a:ext cx="5486400" cy="2148840"/>
+            <a:off x="6172200" y="914400"/>
+            <a:ext cx="5532120" cy="2423160"/>
           </a:xfrm>
           <a:prstGeom prst="rect">
             <a:avLst/>
@@ -5169,8 +5213,8 @@
         </p:nvSpPr>
         <p:spPr>
           <a:xfrm>
-            <a:off x="6309360" y="960120"/>
-            <a:ext cx="5486400" cy="411480"/>
+            <a:off x="6172200" y="914400"/>
+            <a:ext cx="5532120" cy="457200"/>
           </a:xfrm>
           <a:prstGeom prst="rect">
             <a:avLst/>
@@ -5213,8 +5257,8 @@
         </p:nvSpPr>
         <p:spPr>
           <a:xfrm>
-            <a:off x="6309360" y="1014984"/>
-            <a:ext cx="5486400" cy="320040"/>
+            <a:off x="6172200" y="987552"/>
+            <a:ext cx="5532120" cy="365760"/>
           </a:xfrm>
           <a:prstGeom prst="rect">
             <a:avLst/>
@@ -5229,7 +5273,7 @@
           <a:p>
             <a:pPr algn="ctr"/>
             <a:r>
-              <a:rPr sz="1300" b="1">
+              <a:rPr sz="1400" b="1">
                 <a:solidFill>
                   <a:srgbClr val="FFFFFF"/>
                 </a:solidFill>
@@ -5247,8 +5291,8 @@
         </p:nvSpPr>
         <p:spPr>
           <a:xfrm>
-            <a:off x="6492240" y="1463040"/>
-            <a:ext cx="5120640" cy="1554480"/>
+            <a:off x="6355080" y="1508760"/>
+            <a:ext cx="5166360" cy="1737360"/>
           </a:xfrm>
           <a:prstGeom prst="rect">
             <a:avLst/>
@@ -5263,7 +5307,7 @@
           <a:p>
             <a:pPr algn="ctr"/>
             <a:r>
-              <a:rPr sz="1200" b="0">
+              <a:rPr sz="1300" b="0">
                 <a:solidFill>
                   <a:srgbClr val="333333"/>
                 </a:solidFill>
@@ -5274,7 +5318,7 @@
           <a:p>
             <a:pPr algn="ctr"/>
             <a:r>
-              <a:rPr sz="1200" b="0">
+              <a:rPr sz="1300" b="0">
                 <a:solidFill>
                   <a:srgbClr val="333333"/>
                 </a:solidFill>
@@ -5292,8 +5336,8 @@
         </p:nvSpPr>
         <p:spPr>
           <a:xfrm>
-            <a:off x="457200" y="3246120"/>
-            <a:ext cx="5486400" cy="2148840"/>
+            <a:off x="457200" y="3520440"/>
+            <a:ext cx="5532120" cy="2423160"/>
           </a:xfrm>
           <a:prstGeom prst="rect">
             <a:avLst/>
@@ -5338,8 +5382,8 @@
         </p:nvSpPr>
         <p:spPr>
           <a:xfrm>
-            <a:off x="457200" y="3246120"/>
-            <a:ext cx="5486400" cy="411480"/>
+            <a:off x="457200" y="3520440"/>
+            <a:ext cx="5532120" cy="457200"/>
           </a:xfrm>
           <a:prstGeom prst="rect">
             <a:avLst/>
@@ -5382,8 +5426,8 @@
         </p:nvSpPr>
         <p:spPr>
           <a:xfrm>
-            <a:off x="457200" y="3300984"/>
-            <a:ext cx="5486400" cy="320040"/>
+            <a:off x="457200" y="3593592"/>
+            <a:ext cx="5532120" cy="365760"/>
           </a:xfrm>
           <a:prstGeom prst="rect">
             <a:avLst/>
@@ -5398,7 +5442,7 @@
           <a:p>
             <a:pPr algn="ctr"/>
             <a:r>
-              <a:rPr sz="1300" b="1">
+              <a:rPr sz="1400" b="1">
                 <a:solidFill>
                   <a:srgbClr val="FFFFFF"/>
                 </a:solidFill>
@@ -5416,8 +5460,8 @@
         </p:nvSpPr>
         <p:spPr>
           <a:xfrm>
-            <a:off x="640080" y="3749039"/>
-            <a:ext cx="5120640" cy="1554480"/>
+            <a:off x="640080" y="4114800"/>
+            <a:ext cx="5166360" cy="1737360"/>
           </a:xfrm>
           <a:prstGeom prst="rect">
             <a:avLst/>
@@ -5432,7 +5476,7 @@
           <a:p>
             <a:pPr algn="ctr"/>
             <a:r>
-              <a:rPr sz="1200" b="0">
+              <a:rPr sz="1300" b="0">
                 <a:solidFill>
                   <a:srgbClr val="333333"/>
                 </a:solidFill>
@@ -5443,7 +5487,7 @@
           <a:p>
             <a:pPr algn="ctr"/>
             <a:r>
-              <a:rPr sz="1200" b="0">
+              <a:rPr sz="1300" b="0">
                 <a:solidFill>
                   <a:srgbClr val="333333"/>
                 </a:solidFill>
@@ -5454,7 +5498,7 @@
           <a:p>
             <a:pPr algn="ctr"/>
             <a:r>
-              <a:rPr sz="1200" b="0">
+              <a:rPr sz="1300" b="0">
                 <a:solidFill>
                   <a:srgbClr val="333333"/>
                 </a:solidFill>
@@ -5472,8 +5516,8 @@
         </p:nvSpPr>
         <p:spPr>
           <a:xfrm>
-            <a:off x="6309360" y="3246120"/>
-            <a:ext cx="5486400" cy="2148840"/>
+            <a:off x="6172200" y="3520440"/>
+            <a:ext cx="5532120" cy="2423160"/>
           </a:xfrm>
           <a:prstGeom prst="rect">
             <a:avLst/>
@@ -5518,8 +5562,8 @@
         </p:nvSpPr>
         <p:spPr>
           <a:xfrm>
-            <a:off x="6309360" y="3246120"/>
-            <a:ext cx="5486400" cy="411480"/>
+            <a:off x="6172200" y="3520440"/>
+            <a:ext cx="5532120" cy="457200"/>
           </a:xfrm>
           <a:prstGeom prst="rect">
             <a:avLst/>
@@ -5562,8 +5606,8 @@
         </p:nvSpPr>
         <p:spPr>
           <a:xfrm>
-            <a:off x="6309360" y="3300984"/>
-            <a:ext cx="5486400" cy="320040"/>
+            <a:off x="6172200" y="3593592"/>
+            <a:ext cx="5532120" cy="365760"/>
           </a:xfrm>
           <a:prstGeom prst="rect">
             <a:avLst/>
@@ -5578,7 +5622,7 @@
           <a:p>
             <a:pPr algn="ctr"/>
             <a:r>
-              <a:rPr sz="1300" b="1">
+              <a:rPr sz="1400" b="1">
                 <a:solidFill>
                   <a:srgbClr val="FFFFFF"/>
                 </a:solidFill>
@@ -5596,8 +5640,8 @@
         </p:nvSpPr>
         <p:spPr>
           <a:xfrm>
-            <a:off x="6492240" y="3749039"/>
-            <a:ext cx="5120640" cy="1554480"/>
+            <a:off x="6355080" y="4114800"/>
+            <a:ext cx="5166360" cy="1737360"/>
           </a:xfrm>
           <a:prstGeom prst="rect">
             <a:avLst/>
@@ -5612,7 +5656,7 @@
           <a:p>
             <a:pPr algn="ctr"/>
             <a:r>
-              <a:rPr sz="1200" b="0">
+              <a:rPr sz="1300" b="0">
                 <a:solidFill>
                   <a:srgbClr val="333333"/>
                 </a:solidFill>
@@ -5623,7 +5667,7 @@
           <a:p>
             <a:pPr algn="ctr"/>
             <a:r>
-              <a:rPr sz="1200" b="0">
+              <a:rPr sz="1300" b="0">
                 <a:solidFill>
                   <a:srgbClr val="333333"/>
                 </a:solidFill>
@@ -5634,7 +5678,7 @@
           <a:p>
             <a:pPr algn="ctr"/>
             <a:r>
-              <a:rPr sz="1200" b="0">
+              <a:rPr sz="1300" b="0">
                 <a:solidFill>
                   <a:srgbClr val="333333"/>
                 </a:solidFill>
@@ -5646,22 +5690,68 @@
       </p:sp>
       <p:sp>
         <p:nvSpPr>
-          <p:cNvPr id="22" name="TextBox 21"/>
-          <p:cNvSpPr txBox="1"/>
-          <p:nvPr/>
-        </p:nvSpPr>
-        <p:spPr>
-          <a:xfrm>
-            <a:off x="457200" y="5623560"/>
-            <a:ext cx="11247120" cy="685800"/>
-          </a:xfrm>
-          <a:prstGeom prst="rect">
-            <a:avLst/>
-          </a:prstGeom>
-          <a:noFill/>
-        </p:spPr>
-        <p:txBody>
-          <a:bodyPr wrap="square" anchor="t">
+          <p:cNvPr id="22" name="Rectangle 21"/>
+          <p:cNvSpPr/>
+          <p:nvPr/>
+        </p:nvSpPr>
+        <p:spPr>
+          <a:xfrm>
+            <a:off x="457200" y="6126480"/>
+            <a:ext cx="11247120" cy="365760"/>
+          </a:xfrm>
+          <a:prstGeom prst="rect">
+            <a:avLst/>
+          </a:prstGeom>
+          <a:solidFill>
+            <a:srgbClr val="E8F4FD"/>
+          </a:solidFill>
+          <a:ln>
+            <a:solidFill>
+              <a:srgbClr val="0071DC"/>
+            </a:solidFill>
+          </a:ln>
+          <a:effectLst/>
+        </p:spPr>
+        <p:style>
+          <a:lnRef idx="1">
+            <a:schemeClr val="accent1"/>
+          </a:lnRef>
+          <a:fillRef idx="3">
+            <a:schemeClr val="accent1"/>
+          </a:fillRef>
+          <a:effectRef idx="2">
+            <a:schemeClr val="accent1"/>
+          </a:effectRef>
+          <a:fontRef idx="minor">
+            <a:schemeClr val="lt1"/>
+          </a:fontRef>
+        </p:style>
+        <p:txBody>
+          <a:bodyPr rtlCol="0" anchor="ctr"/>
+          <a:lstStyle/>
+          <a:p>
+            <a:pPr algn="ctr"/>
+          </a:p>
+        </p:txBody>
+      </p:sp>
+      <p:sp>
+        <p:nvSpPr>
+          <p:cNvPr id="23" name="TextBox 22"/>
+          <p:cNvSpPr txBox="1"/>
+          <p:nvPr/>
+        </p:nvSpPr>
+        <p:spPr>
+          <a:xfrm>
+            <a:off x="640080" y="6144768"/>
+            <a:ext cx="10972800" cy="320040"/>
+          </a:xfrm>
+          <a:prstGeom prst="rect">
+            <a:avLst/>
+          </a:prstGeom>
+          <a:noFill/>
+        </p:spPr>
+        <p:txBody>
+          <a:bodyPr wrap="square" anchor="ctr">
             <a:spAutoFit/>
           </a:bodyPr>
           <a:lstStyle/>
@@ -5670,17 +5760,17 @@
             <a:r>
               <a:rPr sz="1000" b="0">
                 <a:solidFill>
-                  <a:srgbClr val="666666"/>
-                </a:solidFill>
-              </a:rPr>
-              <a:t>Screenshot on Slide 17 (Live Demo grid) — insights_competitor page.</a:t>
-            </a:r>
-          </a:p>
-        </p:txBody>
-      </p:sp>
-      <p:sp>
-        <p:nvSpPr>
-          <p:cNvPr id="23" name="TextBox 22"/>
+                  <a:srgbClr val="333333"/>
+                </a:solidFill>
+              </a:rPr>
+              <a:t>Weekly summaries powered by GPT-4o via Walmart Gateway  ·  see Live Demo grid on slide 15 for the actual page.</a:t>
+            </a:r>
+          </a:p>
+        </p:txBody>
+      </p:sp>
+      <p:sp>
+        <p:nvSpPr>
+          <p:cNvPr id="24" name="TextBox 23"/>
           <p:cNvSpPr txBox="1"/>
           <p:nvPr/>
         </p:nvSpPr>
@@ -5714,7 +5804,7 @@
       </p:sp>
       <p:sp>
         <p:nvSpPr>
-          <p:cNvPr id="24" name="TextBox 23"/>
+          <p:cNvPr id="25" name="TextBox 24"/>
           <p:cNvSpPr txBox="1"/>
           <p:nvPr/>
         </p:nvSpPr>
@@ -5928,8 +6018,42 @@
         </p:nvSpPr>
         <p:spPr>
           <a:xfrm>
-            <a:off x="457200" y="960120"/>
-            <a:ext cx="5486400" cy="3200400"/>
+            <a:off x="457200" y="914400"/>
+            <a:ext cx="5486400" cy="320040"/>
+          </a:xfrm>
+          <a:prstGeom prst="rect">
+            <a:avLst/>
+          </a:prstGeom>
+          <a:noFill/>
+        </p:spPr>
+        <p:txBody>
+          <a:bodyPr wrap="square" anchor="t">
+            <a:spAutoFit/>
+          </a:bodyPr>
+          <a:lstStyle/>
+          <a:p>
+            <a:pPr algn="l"/>
+            <a:r>
+              <a:rPr sz="1100" b="1">
+                <a:solidFill>
+                  <a:srgbClr val="0071DC"/>
+                </a:solidFill>
+              </a:rPr>
+              <a:t>WHAT IT DOES</a:t>
+            </a:r>
+          </a:p>
+        </p:txBody>
+      </p:sp>
+      <p:sp>
+        <p:nvSpPr>
+          <p:cNvPr id="7" name="TextBox 6"/>
+          <p:cNvSpPr txBox="1"/>
+          <p:nvPr/>
+        </p:nvSpPr>
+        <p:spPr>
+          <a:xfrm>
+            <a:off x="457200" y="1234440"/>
+            <a:ext cx="5486400" cy="2286000"/>
           </a:xfrm>
           <a:prstGeom prst="rect">
             <a:avLst/>
@@ -5998,7 +6122,7 @@
                   <a:srgbClr val="333333"/>
                 </a:solidFill>
               </a:rPr>
-              <a:t>•  Deep-links open the post directly in Review &amp; Validate</a:t>
+              <a:t>•  Deep-links open the post in Review &amp; Validate</a:t>
             </a:r>
           </a:p>
           <a:p>
@@ -6020,7 +6144,7 @@
       </p:sp>
       <p:pic>
         <p:nvPicPr>
-          <p:cNvPr id="7" name="Picture 6" descr="notifications.png"/>
+          <p:cNvPr id="8" name="Picture 7" descr="notifications.png"/>
           <p:cNvPicPr>
             <a:picLocks noChangeAspect="1"/>
           </p:cNvPicPr>
@@ -6034,7 +6158,7 @@
         </p:blipFill>
         <p:spPr>
           <a:xfrm>
-            <a:off x="6172200" y="960120"/>
+            <a:off x="6172200" y="914400"/>
             <a:ext cx="5669280" cy="3543300"/>
           </a:xfrm>
           <a:prstGeom prst="rect">
@@ -6044,14 +6168,14 @@
       </p:pic>
       <p:sp>
         <p:nvSpPr>
-          <p:cNvPr id="8" name="Rectangle 7"/>
+          <p:cNvPr id="9" name="Rectangle 8"/>
           <p:cNvSpPr/>
           <p:nvPr/>
         </p:nvSpPr>
         <p:spPr>
           <a:xfrm>
-            <a:off x="457200" y="4617720"/>
-            <a:ext cx="5486400" cy="1645920"/>
+            <a:off x="457200" y="3703320"/>
+            <a:ext cx="5486400" cy="1371600"/>
           </a:xfrm>
           <a:prstGeom prst="rect">
             <a:avLst/>
@@ -6090,13 +6214,13 @@
       </p:sp>
       <p:sp>
         <p:nvSpPr>
-          <p:cNvPr id="9" name="TextBox 8"/>
-          <p:cNvSpPr txBox="1"/>
-          <p:nvPr/>
-        </p:nvSpPr>
-        <p:spPr>
-          <a:xfrm>
-            <a:off x="640080" y="4754880"/>
+          <p:cNvPr id="10" name="TextBox 9"/>
+          <p:cNvSpPr txBox="1"/>
+          <p:nvPr/>
+        </p:nvSpPr>
+        <p:spPr>
+          <a:xfrm>
+            <a:off x="640080" y="3794760"/>
             <a:ext cx="5120640" cy="320040"/>
           </a:xfrm>
           <a:prstGeom prst="rect">
@@ -6112,26 +6236,26 @@
           <a:p>
             <a:pPr algn="l"/>
             <a:r>
-              <a:rPr sz="1200" b="1">
+              <a:rPr sz="1100" b="1">
                 <a:solidFill>
                   <a:srgbClr val="0071DC"/>
                 </a:solidFill>
               </a:rPr>
-              <a:t>Priority thresholds</a:t>
-            </a:r>
-          </a:p>
-        </p:txBody>
-      </p:sp>
-      <p:sp>
-        <p:nvSpPr>
-          <p:cNvPr id="10" name="TextBox 9"/>
-          <p:cNvSpPr txBox="1"/>
-          <p:nvPr/>
-        </p:nvSpPr>
-        <p:spPr>
-          <a:xfrm>
-            <a:off x="640080" y="5074920"/>
-            <a:ext cx="5120640" cy="1143000"/>
+              <a:t>PRIORITY THRESHOLDS</a:t>
+            </a:r>
+          </a:p>
+        </p:txBody>
+      </p:sp>
+      <p:sp>
+        <p:nvSpPr>
+          <p:cNvPr id="11" name="TextBox 10"/>
+          <p:cNvSpPr txBox="1"/>
+          <p:nvPr/>
+        </p:nvSpPr>
+        <p:spPr>
+          <a:xfrm>
+            <a:off x="640080" y="4114800"/>
+            <a:ext cx="5120640" cy="914400"/>
           </a:xfrm>
           <a:prstGeom prst="rect">
             <a:avLst/>
@@ -6180,7 +6304,121 @@
       </p:sp>
       <p:sp>
         <p:nvSpPr>
-          <p:cNvPr id="11" name="TextBox 10"/>
+          <p:cNvPr id="12" name="Rectangle 11"/>
+          <p:cNvSpPr/>
+          <p:nvPr/>
+        </p:nvSpPr>
+        <p:spPr>
+          <a:xfrm>
+            <a:off x="457200" y="5212080"/>
+            <a:ext cx="5486400" cy="1234440"/>
+          </a:xfrm>
+          <a:prstGeom prst="rect">
+            <a:avLst/>
+          </a:prstGeom>
+          <a:solidFill>
+            <a:srgbClr val="DCFCE7"/>
+          </a:solidFill>
+          <a:ln>
+            <a:solidFill>
+              <a:srgbClr val="10B981"/>
+            </a:solidFill>
+          </a:ln>
+          <a:effectLst/>
+        </p:spPr>
+        <p:style>
+          <a:lnRef idx="1">
+            <a:schemeClr val="accent1"/>
+          </a:lnRef>
+          <a:fillRef idx="3">
+            <a:schemeClr val="accent1"/>
+          </a:fillRef>
+          <a:effectRef idx="2">
+            <a:schemeClr val="accent1"/>
+          </a:effectRef>
+          <a:fontRef idx="minor">
+            <a:schemeClr val="lt1"/>
+          </a:fontRef>
+        </p:style>
+        <p:txBody>
+          <a:bodyPr rtlCol="0" anchor="ctr"/>
+          <a:lstStyle/>
+          <a:p>
+            <a:pPr algn="ctr"/>
+          </a:p>
+        </p:txBody>
+      </p:sp>
+      <p:sp>
+        <p:nvSpPr>
+          <p:cNvPr id="13" name="TextBox 12"/>
+          <p:cNvSpPr txBox="1"/>
+          <p:nvPr/>
+        </p:nvSpPr>
+        <p:spPr>
+          <a:xfrm>
+            <a:off x="640080" y="5321808"/>
+            <a:ext cx="5120640" cy="320040"/>
+          </a:xfrm>
+          <a:prstGeom prst="rect">
+            <a:avLst/>
+          </a:prstGeom>
+          <a:noFill/>
+        </p:spPr>
+        <p:txBody>
+          <a:bodyPr wrap="square" anchor="t">
+            <a:spAutoFit/>
+          </a:bodyPr>
+          <a:lstStyle/>
+          <a:p>
+            <a:pPr algn="l"/>
+            <a:r>
+              <a:rPr sz="1100" b="1">
+                <a:solidFill>
+                  <a:srgbClr val="10B981"/>
+                </a:solidFill>
+              </a:rPr>
+              <a:t>GROUPS TODAY  (live capture)</a:t>
+            </a:r>
+          </a:p>
+        </p:txBody>
+      </p:sp>
+      <p:sp>
+        <p:nvSpPr>
+          <p:cNvPr id="14" name="TextBox 13"/>
+          <p:cNvSpPr txBox="1"/>
+          <p:nvPr/>
+        </p:nvSpPr>
+        <p:spPr>
+          <a:xfrm>
+            <a:off x="640080" y="5623560"/>
+            <a:ext cx="5120640" cy="777240"/>
+          </a:xfrm>
+          <a:prstGeom prst="rect">
+            <a:avLst/>
+          </a:prstGeom>
+          <a:noFill/>
+        </p:spPr>
+        <p:txBody>
+          <a:bodyPr wrap="square" anchor="t">
+            <a:spAutoFit/>
+          </a:bodyPr>
+          <a:lstStyle/>
+          <a:p>
+            <a:pPr algn="l"/>
+            <a:r>
+              <a:rPr sz="1100" b="0">
+                <a:solidFill>
+                  <a:srgbClr val="333333"/>
+                </a:solidFill>
+              </a:rPr>
+              <a:t>4 routing groups configured  ·  DriverRelatedPost, GIF_, SAMSClub, W+ Membership  ·  delivery status tracked per row in  notification_log.</a:t>
+            </a:r>
+          </a:p>
+        </p:txBody>
+      </p:sp>
+      <p:sp>
+        <p:nvSpPr>
+          <p:cNvPr id="15" name="TextBox 14"/>
           <p:cNvSpPr txBox="1"/>
           <p:nvPr/>
         </p:nvSpPr>
@@ -6214,7 +6452,7 @@
       </p:sp>
       <p:sp>
         <p:nvSpPr>
-          <p:cNvPr id="12" name="TextBox 11"/>
+          <p:cNvPr id="16" name="TextBox 15"/>
           <p:cNvSpPr txBox="1"/>
           <p:nvPr/>
         </p:nvSpPr>
@@ -7991,7 +8229,7 @@
           <a:noFill/>
         </p:spPr>
         <p:txBody>
-          <a:bodyPr wrap="square" anchor="t">
+          <a:bodyPr wrap="square" anchor="ctr">
             <a:spAutoFit/>
           </a:bodyPr>
           <a:lstStyle/>
@@ -8248,7 +8486,7 @@
           <a:noFill/>
         </p:spPr>
         <p:txBody>
-          <a:bodyPr wrap="square" anchor="t">
+          <a:bodyPr wrap="square" anchor="ctr">
             <a:spAutoFit/>
           </a:bodyPr>
           <a:lstStyle/>
@@ -8505,7 +8743,7 @@
           <a:noFill/>
         </p:spPr>
         <p:txBody>
-          <a:bodyPr wrap="square" anchor="t">
+          <a:bodyPr wrap="square" anchor="ctr">
             <a:spAutoFit/>
           </a:bodyPr>
           <a:lstStyle/>
@@ -8762,7 +9000,7 @@
           <a:noFill/>
         </p:spPr>
         <p:txBody>
-          <a:bodyPr wrap="square" anchor="t">
+          <a:bodyPr wrap="square" anchor="ctr">
             <a:spAutoFit/>
           </a:bodyPr>
           <a:lstStyle/>
@@ -10086,7 +10324,7 @@
         <p:spPr>
           <a:xfrm>
             <a:off x="457200" y="4251960"/>
-            <a:ext cx="11247120" cy="1965960"/>
+            <a:ext cx="5532120" cy="2103120"/>
           </a:xfrm>
           <a:prstGeom prst="rect">
             <a:avLst/>
@@ -10131,8 +10369,8 @@
         </p:nvSpPr>
         <p:spPr>
           <a:xfrm>
-            <a:off x="640080" y="4389120"/>
-            <a:ext cx="10972800" cy="320040"/>
+            <a:off x="640080" y="4370832"/>
+            <a:ext cx="5212080" cy="320040"/>
           </a:xfrm>
           <a:prstGeom prst="rect">
             <a:avLst/>
@@ -10147,12 +10385,12 @@
           <a:p>
             <a:pPr algn="l"/>
             <a:r>
-              <a:rPr sz="1300" b="1">
+              <a:rPr sz="1200" b="1">
                 <a:solidFill>
                   <a:srgbClr val="10B981"/>
                 </a:solidFill>
               </a:rPr>
-              <a:t>Design principle — flag, don't drop</a:t>
+              <a:t>DESIGN PRINCIPLE  —  flag, don't drop</a:t>
             </a:r>
           </a:p>
         </p:txBody>
@@ -10166,7 +10404,7 @@
         <p:spPr>
           <a:xfrm>
             <a:off x="640080" y="4709160"/>
-            <a:ext cx="10972800" cy="1463040"/>
+            <a:ext cx="5212080" cy="1554480"/>
           </a:xfrm>
           <a:prstGeom prst="rect">
             <a:avLst/>
@@ -10181,19 +10419,182 @@
           <a:p>
             <a:pPr algn="l"/>
             <a:r>
-              <a:rPr sz="1200" b="0">
+              <a:rPr sz="1100" b="0">
                 <a:solidFill>
                   <a:srgbClr val="333333"/>
                 </a:solidFill>
               </a:rPr>
-              <a:t>Low-trust posts are surfaced with an explanatory chip ("promotional / duplicate / thin-metadata") and can be overridden by an analyst in one click — the override is captured for the learning loop. Every constant in the formula has a stakeholder-arguable English rationale in config/models.yaml.</a:t>
-            </a:r>
-          </a:p>
-        </p:txBody>
-      </p:sp>
-      <p:sp>
-        <p:nvSpPr>
-          <p:cNvPr id="21" name="TextBox 20"/>
+              <a:t>Low-trust posts are surfaced with an explanatory chip (promotional / duplicate / thin-metadata) and can be overridden by an analyst in one click — the override is captured for the learning loop.</a:t>
+            </a:r>
+          </a:p>
+        </p:txBody>
+      </p:sp>
+      <p:sp>
+        <p:nvSpPr>
+          <p:cNvPr id="21" name="Rectangle 20"/>
+          <p:cNvSpPr/>
+          <p:nvPr/>
+        </p:nvSpPr>
+        <p:spPr>
+          <a:xfrm>
+            <a:off x="6172200" y="4251960"/>
+            <a:ext cx="5532120" cy="2103120"/>
+          </a:xfrm>
+          <a:prstGeom prst="rect">
+            <a:avLst/>
+          </a:prstGeom>
+          <a:solidFill>
+            <a:srgbClr val="E8F4FD"/>
+          </a:solidFill>
+          <a:ln>
+            <a:solidFill>
+              <a:srgbClr val="0071DC"/>
+            </a:solidFill>
+          </a:ln>
+          <a:effectLst/>
+        </p:spPr>
+        <p:style>
+          <a:lnRef idx="1">
+            <a:schemeClr val="accent1"/>
+          </a:lnRef>
+          <a:fillRef idx="3">
+            <a:schemeClr val="accent1"/>
+          </a:fillRef>
+          <a:effectRef idx="2">
+            <a:schemeClr val="accent1"/>
+          </a:effectRef>
+          <a:fontRef idx="minor">
+            <a:schemeClr val="lt1"/>
+          </a:fontRef>
+        </p:style>
+        <p:txBody>
+          <a:bodyPr rtlCol="0" anchor="ctr"/>
+          <a:lstStyle/>
+          <a:p>
+            <a:pPr algn="ctr"/>
+          </a:p>
+        </p:txBody>
+      </p:sp>
+      <p:sp>
+        <p:nvSpPr>
+          <p:cNvPr id="22" name="TextBox 21"/>
+          <p:cNvSpPr txBox="1"/>
+          <p:nvPr/>
+        </p:nvSpPr>
+        <p:spPr>
+          <a:xfrm>
+            <a:off x="6355080" y="4370832"/>
+            <a:ext cx="5212080" cy="320040"/>
+          </a:xfrm>
+          <a:prstGeom prst="rect">
+            <a:avLst/>
+          </a:prstGeom>
+          <a:noFill/>
+        </p:spPr>
+        <p:txBody>
+          <a:bodyPr wrap="square" anchor="t">
+            <a:spAutoFit/>
+          </a:bodyPr>
+          <a:lstStyle/>
+          <a:p>
+            <a:pPr algn="l"/>
+            <a:r>
+              <a:rPr sz="1200" b="1">
+                <a:solidFill>
+                  <a:srgbClr val="0071DC"/>
+                </a:solidFill>
+              </a:rPr>
+              <a:t>WHY IT'S DEFENSIBLE</a:t>
+            </a:r>
+          </a:p>
+        </p:txBody>
+      </p:sp>
+      <p:sp>
+        <p:nvSpPr>
+          <p:cNvPr id="23" name="TextBox 22"/>
+          <p:cNvSpPr txBox="1"/>
+          <p:nvPr/>
+        </p:nvSpPr>
+        <p:spPr>
+          <a:xfrm>
+            <a:off x="6355080" y="4709160"/>
+            <a:ext cx="5212080" cy="1600200"/>
+          </a:xfrm>
+          <a:prstGeom prst="rect">
+            <a:avLst/>
+          </a:prstGeom>
+          <a:noFill/>
+        </p:spPr>
+        <p:txBody>
+          <a:bodyPr wrap="square">
+            <a:spAutoFit/>
+          </a:bodyPr>
+          <a:lstStyle/>
+          <a:p>
+            <a:pPr>
+              <a:spcAft>
+                <a:spcPts val="400"/>
+              </a:spcAft>
+            </a:pPr>
+            <a:r>
+              <a:rPr sz="1100" b="0">
+                <a:solidFill>
+                  <a:srgbClr val="333333"/>
+                </a:solidFill>
+              </a:rPr>
+              <a:t>•  Every constant has a plain-English rationale in config/models.yaml</a:t>
+            </a:r>
+          </a:p>
+          <a:p>
+            <a:pPr>
+              <a:spcAft>
+                <a:spcPts val="400"/>
+              </a:spcAft>
+            </a:pPr>
+            <a:r>
+              <a:rPr sz="1100" b="0">
+                <a:solidFill>
+                  <a:srgbClr val="333333"/>
+                </a:solidFill>
+              </a:rPr>
+              <a:t>•  Three named components  →  analyst can see WHY a post is low-trust</a:t>
+            </a:r>
+          </a:p>
+          <a:p>
+            <a:pPr>
+              <a:spcAft>
+                <a:spcPts val="400"/>
+              </a:spcAft>
+            </a:pPr>
+            <a:r>
+              <a:rPr sz="1100" b="0">
+                <a:solidFill>
+                  <a:srgbClr val="333333"/>
+                </a:solidFill>
+              </a:rPr>
+              <a:t>•  12 / 15 confirmed by human annotator on the cross-check</a:t>
+            </a:r>
+          </a:p>
+          <a:p>
+            <a:pPr>
+              <a:spcAft>
+                <a:spcPts val="400"/>
+              </a:spcAft>
+            </a:pPr>
+            <a:r>
+              <a:rPr sz="1100" b="0">
+                <a:solidFill>
+                  <a:srgbClr val="333333"/>
+                </a:solidFill>
+              </a:rPr>
+              <a:t>•  LLM component only invoked in ambiguous zone (cost-controlled)</a:t>
+            </a:r>
+          </a:p>
+        </p:txBody>
+      </p:sp>
+      <p:sp>
+        <p:nvSpPr>
+          <p:cNvPr id="24" name="TextBox 23"/>
           <p:cNvSpPr txBox="1"/>
           <p:nvPr/>
         </p:nvSpPr>
@@ -10227,7 +10628,7 @@
       </p:sp>
       <p:sp>
         <p:nvSpPr>
-          <p:cNvPr id="22" name="TextBox 21"/>
+          <p:cNvPr id="25" name="TextBox 24"/>
           <p:cNvSpPr txBox="1"/>
           <p:nvPr/>
         </p:nvSpPr>
@@ -12114,7 +12515,7 @@
                   <a:srgbClr val="333333"/>
                 </a:solidFill>
               </a:rPr>
-              <a:t>Macro-F1 0.6272 → 0.7642 overall; 0.28 → 1.00 on long posts.  5-fold OOF cross-validation, offline training.</a:t>
+              <a:t>Macro-F1 0.6272 → 0.7642 overall; recovers all long posts (≥ 512 tok, n = 7): RoBERTa 5/7 vs ModernBERT 7/7 correct.  5-fold OOF cross-validation, offline training.</a:t>
             </a:r>
           </a:p>
         </p:txBody>
@@ -13536,7 +13937,7 @@
         <p:spPr>
           <a:xfrm>
             <a:off x="457200" y="960120"/>
-            <a:ext cx="5532120" cy="5257800"/>
+            <a:ext cx="5532120" cy="4480560"/>
           </a:xfrm>
           <a:prstGeom prst="rect">
             <a:avLst/>
@@ -13597,12 +13998,12 @@
           <a:p>
             <a:pPr algn="l"/>
             <a:r>
-              <a:rPr sz="1500" b="1">
+              <a:rPr sz="1300" b="1">
                 <a:solidFill>
                   <a:srgbClr val="10B981"/>
                 </a:solidFill>
               </a:rPr>
-              <a:t>What worked</a:t>
+              <a:t>WHAT WORKED</a:t>
             </a:r>
           </a:p>
         </p:txBody>
@@ -13616,7 +14017,7 @@
         <p:spPr>
           <a:xfrm>
             <a:off x="640080" y="1508760"/>
-            <a:ext cx="5212080" cy="4572000"/>
+            <a:ext cx="5212080" cy="3794760"/>
           </a:xfrm>
           <a:prstGeom prst="rect">
             <a:avLst/>
@@ -13655,7 +14056,7 @@
                   <a:srgbClr val="333333"/>
                 </a:solidFill>
               </a:rPr>
-              <a:t>•  Long-post recovery came for free once we switched off truncation  (≥1024-tok context):  5/7 → 7/7 correct on the ≥ 512-token bucket.</a:t>
+              <a:t>•  Long-post recovery came for free once we switched off truncation  (≥1024-tok context):  5/7 → 7/7 correct on the ≥ 512-tok bucket.</a:t>
             </a:r>
           </a:p>
           <a:p>
@@ -13670,7 +14071,7 @@
                   <a:srgbClr val="333333"/>
                 </a:solidFill>
               </a:rPr>
-              <a:t>•  Removing the image on the final vision merge step ended the 50 % hallucination problem  —  the mechanism, not just the number, is what makes it credible.</a:t>
+              <a:t>•  Removing the image on the final vision merge step ended the 50 % hallucination problem — the mechanism, not just the number, makes it credible.</a:t>
             </a:r>
           </a:p>
           <a:p>
@@ -13700,7 +14101,7 @@
                   <a:srgbClr val="333333"/>
                 </a:solidFill>
               </a:rPr>
-              <a:t>•  HITL feedback table quietly turned into the most useful piece of infrastructure  —  drives few-shot on every click today, retraining tomorrow.</a:t>
+              <a:t>•  HITL feedback table quietly turned into the most useful piece of infrastructure — drives few-shot on every click today, retraining tomorrow.</a:t>
             </a:r>
           </a:p>
         </p:txBody>
@@ -13714,7 +14115,7 @@
         <p:spPr>
           <a:xfrm>
             <a:off x="6172200" y="960120"/>
-            <a:ext cx="5532120" cy="5257800"/>
+            <a:ext cx="5532120" cy="4480560"/>
           </a:xfrm>
           <a:prstGeom prst="rect">
             <a:avLst/>
@@ -13775,12 +14176,12 @@
           <a:p>
             <a:pPr algn="l"/>
             <a:r>
-              <a:rPr sz="1500" b="1">
+              <a:rPr sz="1300" b="1">
                 <a:solidFill>
                   <a:srgbClr val="D97706"/>
                 </a:solidFill>
               </a:rPr>
-              <a:t>What's still open (honest)</a:t>
+              <a:t>WHAT'S STILL OPEN  (honest)</a:t>
             </a:r>
           </a:p>
         </p:txBody>
@@ -13794,7 +14195,7 @@
         <p:spPr>
           <a:xfrm>
             <a:off x="6355080" y="1508760"/>
-            <a:ext cx="5212080" cy="4572000"/>
+            <a:ext cx="5212080" cy="3794760"/>
           </a:xfrm>
           <a:prstGeom prst="rect">
             <a:avLst/>
@@ -13878,14 +14279,128 @@
                   <a:srgbClr val="333333"/>
                 </a:solidFill>
               </a:rPr>
-              <a:t>•  Everything runs on one Mac. Multi-analyst concurrency and retraining automation aren't done  —  they're in the roadmap on the next slide.</a:t>
-            </a:r>
-          </a:p>
-        </p:txBody>
-      </p:sp>
-      <p:sp>
-        <p:nvSpPr>
-          <p:cNvPr id="12" name="TextBox 11"/>
+              <a:t>•  Everything runs on one Mac. Multi-analyst concurrency and retraining automation aren't done  —  in the roadmap on next slide.</a:t>
+            </a:r>
+          </a:p>
+        </p:txBody>
+      </p:sp>
+      <p:sp>
+        <p:nvSpPr>
+          <p:cNvPr id="12" name="Rectangle 11"/>
+          <p:cNvSpPr/>
+          <p:nvPr/>
+        </p:nvSpPr>
+        <p:spPr>
+          <a:xfrm>
+            <a:off x="457200" y="5577840"/>
+            <a:ext cx="11247120" cy="822960"/>
+          </a:xfrm>
+          <a:prstGeom prst="rect">
+            <a:avLst/>
+          </a:prstGeom>
+          <a:solidFill>
+            <a:srgbClr val="E8F4FD"/>
+          </a:solidFill>
+          <a:ln>
+            <a:solidFill>
+              <a:srgbClr val="0071DC"/>
+            </a:solidFill>
+          </a:ln>
+          <a:effectLst/>
+        </p:spPr>
+        <p:style>
+          <a:lnRef idx="1">
+            <a:schemeClr val="accent1"/>
+          </a:lnRef>
+          <a:fillRef idx="3">
+            <a:schemeClr val="accent1"/>
+          </a:fillRef>
+          <a:effectRef idx="2">
+            <a:schemeClr val="accent1"/>
+          </a:effectRef>
+          <a:fontRef idx="minor">
+            <a:schemeClr val="lt1"/>
+          </a:fontRef>
+        </p:style>
+        <p:txBody>
+          <a:bodyPr rtlCol="0" anchor="ctr"/>
+          <a:lstStyle/>
+          <a:p>
+            <a:pPr algn="ctr"/>
+          </a:p>
+        </p:txBody>
+      </p:sp>
+      <p:sp>
+        <p:nvSpPr>
+          <p:cNvPr id="13" name="TextBox 12"/>
+          <p:cNvSpPr txBox="1"/>
+          <p:nvPr/>
+        </p:nvSpPr>
+        <p:spPr>
+          <a:xfrm>
+            <a:off x="640080" y="5669280"/>
+            <a:ext cx="10972800" cy="320040"/>
+          </a:xfrm>
+          <a:prstGeom prst="rect">
+            <a:avLst/>
+          </a:prstGeom>
+          <a:noFill/>
+        </p:spPr>
+        <p:txBody>
+          <a:bodyPr wrap="square" anchor="t">
+            <a:spAutoFit/>
+          </a:bodyPr>
+          <a:lstStyle/>
+          <a:p>
+            <a:pPr algn="l"/>
+            <a:r>
+              <a:rPr sz="1100" b="1">
+                <a:solidFill>
+                  <a:srgbClr val="0071DC"/>
+                </a:solidFill>
+              </a:rPr>
+              <a:t>THE TAKEAWAY</a:t>
+            </a:r>
+          </a:p>
+        </p:txBody>
+      </p:sp>
+      <p:sp>
+        <p:nvSpPr>
+          <p:cNvPr id="14" name="TextBox 13"/>
+          <p:cNvSpPr txBox="1"/>
+          <p:nvPr/>
+        </p:nvSpPr>
+        <p:spPr>
+          <a:xfrm>
+            <a:off x="640080" y="5989320"/>
+            <a:ext cx="10972800" cy="365760"/>
+          </a:xfrm>
+          <a:prstGeom prst="rect">
+            <a:avLst/>
+          </a:prstGeom>
+          <a:noFill/>
+        </p:spPr>
+        <p:txBody>
+          <a:bodyPr wrap="square" anchor="t">
+            <a:spAutoFit/>
+          </a:bodyPr>
+          <a:lstStyle/>
+          <a:p>
+            <a:pPr algn="l"/>
+            <a:r>
+              <a:rPr sz="1100" b="0">
+                <a:solidFill>
+                  <a:srgbClr val="333333"/>
+                </a:solidFill>
+              </a:rPr>
+              <a:t>Mechanism-level wins are what carry the argument; sample-size caveats are what the next horizon of work has to close.</a:t>
+            </a:r>
+          </a:p>
+        </p:txBody>
+      </p:sp>
+      <p:sp>
+        <p:nvSpPr>
+          <p:cNvPr id="15" name="TextBox 14"/>
           <p:cNvSpPr txBox="1"/>
           <p:nvPr/>
         </p:nvSpPr>
@@ -13919,7 +14434,7 @@
       </p:sp>
       <p:sp>
         <p:nvSpPr>
-          <p:cNvPr id="13" name="TextBox 12"/>
+          <p:cNvPr id="16" name="TextBox 15"/>
           <p:cNvSpPr txBox="1"/>
           <p:nvPr/>
         </p:nvSpPr>
@@ -16596,7 +17111,7 @@
         <p:spPr>
           <a:xfrm>
             <a:off x="457200" y="1051560"/>
-            <a:ext cx="11247120" cy="1463040"/>
+            <a:ext cx="11247120" cy="1143000"/>
           </a:xfrm>
           <a:prstGeom prst="rect">
             <a:avLst/>
@@ -16642,7 +17157,7 @@
         <p:spPr>
           <a:xfrm>
             <a:off x="457200" y="1051560"/>
-            <a:ext cx="228600" cy="1463040"/>
+            <a:ext cx="228600" cy="1143000"/>
           </a:xfrm>
           <a:prstGeom prst="rect">
             <a:avLst/>
@@ -16685,7 +17200,7 @@
         </p:nvSpPr>
         <p:spPr>
           <a:xfrm>
-            <a:off x="822960" y="1188720"/>
+            <a:off x="822960" y="1161288"/>
             <a:ext cx="10424160" cy="365760"/>
           </a:xfrm>
           <a:prstGeom prst="rect">
@@ -16719,8 +17234,8 @@
         </p:nvSpPr>
         <p:spPr>
           <a:xfrm>
-            <a:off x="822960" y="1645920"/>
-            <a:ext cx="10424160" cy="822960"/>
+            <a:off x="822960" y="1554480"/>
+            <a:ext cx="10424160" cy="640080"/>
           </a:xfrm>
           <a:prstGeom prst="rect">
             <a:avLst/>
@@ -16753,8 +17268,8 @@
         </p:nvSpPr>
         <p:spPr>
           <a:xfrm>
-            <a:off x="457200" y="2651760"/>
-            <a:ext cx="11247120" cy="1463040"/>
+            <a:off x="457200" y="2331720"/>
+            <a:ext cx="11247120" cy="1143000"/>
           </a:xfrm>
           <a:prstGeom prst="rect">
             <a:avLst/>
@@ -16799,8 +17314,8 @@
         </p:nvSpPr>
         <p:spPr>
           <a:xfrm>
-            <a:off x="457200" y="2651760"/>
-            <a:ext cx="228600" cy="1463040"/>
+            <a:off x="457200" y="2331720"/>
+            <a:ext cx="228600" cy="1143000"/>
           </a:xfrm>
           <a:prstGeom prst="rect">
             <a:avLst/>
@@ -16843,7 +17358,7 @@
         </p:nvSpPr>
         <p:spPr>
           <a:xfrm>
-            <a:off x="822960" y="2788920"/>
+            <a:off x="822960" y="2441448"/>
             <a:ext cx="10424160" cy="365760"/>
           </a:xfrm>
           <a:prstGeom prst="rect">
@@ -16877,8 +17392,8 @@
         </p:nvSpPr>
         <p:spPr>
           <a:xfrm>
-            <a:off x="822960" y="3246120"/>
-            <a:ext cx="10424160" cy="822960"/>
+            <a:off x="822960" y="2834640"/>
+            <a:ext cx="10424160" cy="640080"/>
           </a:xfrm>
           <a:prstGeom prst="rect">
             <a:avLst/>
@@ -16911,8 +17426,8 @@
         </p:nvSpPr>
         <p:spPr>
           <a:xfrm>
-            <a:off x="457200" y="4251960"/>
-            <a:ext cx="11247120" cy="1463040"/>
+            <a:off x="457200" y="3611880"/>
+            <a:ext cx="11247120" cy="1143000"/>
           </a:xfrm>
           <a:prstGeom prst="rect">
             <a:avLst/>
@@ -16957,8 +17472,8 @@
         </p:nvSpPr>
         <p:spPr>
           <a:xfrm>
-            <a:off x="457200" y="4251960"/>
-            <a:ext cx="228600" cy="1463040"/>
+            <a:off x="457200" y="3611880"/>
+            <a:ext cx="228600" cy="1143000"/>
           </a:xfrm>
           <a:prstGeom prst="rect">
             <a:avLst/>
@@ -17001,7 +17516,7 @@
         </p:nvSpPr>
         <p:spPr>
           <a:xfrm>
-            <a:off x="822960" y="4389120"/>
+            <a:off x="822960" y="3721608"/>
             <a:ext cx="10424160" cy="365760"/>
           </a:xfrm>
           <a:prstGeom prst="rect">
@@ -17035,8 +17550,8 @@
         </p:nvSpPr>
         <p:spPr>
           <a:xfrm>
-            <a:off x="822960" y="4846320"/>
-            <a:ext cx="10424160" cy="822960"/>
+            <a:off x="822960" y="4114800"/>
+            <a:ext cx="10424160" cy="640080"/>
           </a:xfrm>
           <a:prstGeom prst="rect">
             <a:avLst/>
@@ -17069,8 +17584,8 @@
         </p:nvSpPr>
         <p:spPr>
           <a:xfrm>
-            <a:off x="457200" y="5852160"/>
-            <a:ext cx="11247120" cy="457200"/>
+            <a:off x="457200" y="5074920"/>
+            <a:ext cx="11247120" cy="1234440"/>
           </a:xfrm>
           <a:prstGeom prst="rect">
             <a:avLst/>
@@ -17115,35 +17630,103 @@
         </p:nvSpPr>
         <p:spPr>
           <a:xfrm>
-            <a:off x="640080" y="5897880"/>
-            <a:ext cx="10972800" cy="365760"/>
-          </a:xfrm>
-          <a:prstGeom prst="rect">
-            <a:avLst/>
-          </a:prstGeom>
-          <a:noFill/>
-        </p:spPr>
-        <p:txBody>
-          <a:bodyPr wrap="square" anchor="ctr">
+            <a:off x="640080" y="5166360"/>
+            <a:ext cx="10972800" cy="320040"/>
+          </a:xfrm>
+          <a:prstGeom prst="rect">
+            <a:avLst/>
+          </a:prstGeom>
+          <a:noFill/>
+        </p:spPr>
+        <p:txBody>
+          <a:bodyPr wrap="square" anchor="t">
             <a:spAutoFit/>
           </a:bodyPr>
           <a:lstStyle/>
           <a:p>
             <a:pPr algn="l"/>
             <a:r>
+              <a:rPr sz="1100" b="1">
+                <a:solidFill>
+                  <a:srgbClr val="0071DC"/>
+                </a:solidFill>
+              </a:rPr>
+              <a:t>DELIBERATELY EXCLUDED</a:t>
+            </a:r>
+          </a:p>
+        </p:txBody>
+      </p:sp>
+      <p:sp>
+        <p:nvSpPr>
+          <p:cNvPr id="20" name="TextBox 19"/>
+          <p:cNvSpPr txBox="1"/>
+          <p:nvPr/>
+        </p:nvSpPr>
+        <p:spPr>
+          <a:xfrm>
+            <a:off x="640080" y="5486400"/>
+            <a:ext cx="10972800" cy="822960"/>
+          </a:xfrm>
+          <a:prstGeom prst="rect">
+            <a:avLst/>
+          </a:prstGeom>
+          <a:noFill/>
+        </p:spPr>
+        <p:txBody>
+          <a:bodyPr wrap="square">
+            <a:spAutoFit/>
+          </a:bodyPr>
+          <a:lstStyle/>
+          <a:p>
+            <a:pPr>
+              <a:spcAft>
+                <a:spcPts val="400"/>
+              </a:spcAft>
+            </a:pPr>
+            <a:r>
               <a:rPr sz="1000" b="0">
                 <a:solidFill>
                   <a:srgbClr val="333333"/>
                 </a:solidFill>
               </a:rPr>
-              <a:t>Deliberately excluded  —  ideas without a clear next step  (auto-reply gate, seasonal P1 forecast, bilingual taxonomy)  —  covered in the report's Future Work chapter.</a:t>
-            </a:r>
-          </a:p>
-        </p:txBody>
-      </p:sp>
-      <p:sp>
-        <p:nvSpPr>
-          <p:cNvPr id="20" name="TextBox 19"/>
+              <a:t>•  Auto-reply confidence gate  —  waiting for edit-distance evidence on more replies</a:t>
+            </a:r>
+          </a:p>
+          <a:p>
+            <a:pPr>
+              <a:spcAft>
+                <a:spcPts val="400"/>
+              </a:spcAft>
+            </a:pPr>
+            <a:r>
+              <a:rPr sz="1000" b="0">
+                <a:solidFill>
+                  <a:srgbClr val="333333"/>
+                </a:solidFill>
+              </a:rPr>
+              <a:t>•  Predictive P1 forecast (seasonal decomposition)  —  needs at least 6 months of daily counts</a:t>
+            </a:r>
+          </a:p>
+          <a:p>
+            <a:pPr>
+              <a:spcAft>
+                <a:spcPts val="400"/>
+              </a:spcAft>
+            </a:pPr>
+            <a:r>
+              <a:rPr sz="1000" b="0">
+                <a:solidFill>
+                  <a:srgbClr val="333333"/>
+                </a:solidFill>
+              </a:rPr>
+              <a:t>•  Bilingual (Hindi + English) taxonomy  —  needs native-speaker validation first</a:t>
+            </a:r>
+          </a:p>
+        </p:txBody>
+      </p:sp>
+      <p:sp>
+        <p:nvSpPr>
+          <p:cNvPr id="21" name="TextBox 20"/>
           <p:cNvSpPr txBox="1"/>
           <p:nvPr/>
         </p:nvSpPr>
@@ -17177,7 +17760,7 @@
       </p:sp>
       <p:sp>
         <p:nvSpPr>
-          <p:cNvPr id="21" name="TextBox 20"/>
+          <p:cNvPr id="22" name="TextBox 21"/>
           <p:cNvSpPr txBox="1"/>
           <p:nvPr/>
         </p:nvSpPr>
@@ -17473,7 +18056,7 @@
         </p:nvGraphicFramePr>
         <p:xfrm>
           <a:off x="457200" y="2148840"/>
-          <a:ext cx="11247120" cy="4114800"/>
+          <a:ext cx="11247120" cy="3108960"/>
         </p:xfrm>
         <a:graphic>
           <a:graphicData uri="http://schemas.openxmlformats.org/drawingml/2006/table">
@@ -17486,7 +18069,7 @@
                 <a:gridCol w="3749040"/>
                 <a:gridCol w="3749040"/>
               </a:tblGrid>
-              <a:tr h="514350">
+              <a:tr h="388620">
                 <a:tc>
                   <a:txBody>
                     <a:bodyPr/>
@@ -17551,7 +18134,7 @@
                   </a:tcPr>
                 </a:tc>
               </a:tr>
-              <a:tr h="514350">
+              <a:tr h="388620">
                 <a:tc>
                   <a:txBody>
                     <a:bodyPr/>
@@ -17616,7 +18199,7 @@
                   </a:tcPr>
                 </a:tc>
               </a:tr>
-              <a:tr h="514350">
+              <a:tr h="388620">
                 <a:tc>
                   <a:txBody>
                     <a:bodyPr/>
@@ -17681,7 +18264,7 @@
                   </a:tcPr>
                 </a:tc>
               </a:tr>
-              <a:tr h="514350">
+              <a:tr h="388620">
                 <a:tc>
                   <a:txBody>
                     <a:bodyPr/>
@@ -17746,7 +18329,7 @@
                   </a:tcPr>
                 </a:tc>
               </a:tr>
-              <a:tr h="514350">
+              <a:tr h="388620">
                 <a:tc>
                   <a:txBody>
                     <a:bodyPr/>
@@ -17811,7 +18394,7 @@
                   </a:tcPr>
                 </a:tc>
               </a:tr>
-              <a:tr h="514350">
+              <a:tr h="388620">
                 <a:tc>
                   <a:txBody>
                     <a:bodyPr/>
@@ -17876,7 +18459,7 @@
                   </a:tcPr>
                 </a:tc>
               </a:tr>
-              <a:tr h="514350">
+              <a:tr h="388620">
                 <a:tc>
                   <a:txBody>
                     <a:bodyPr/>
@@ -17941,7 +18524,7 @@
                   </a:tcPr>
                 </a:tc>
               </a:tr>
-              <a:tr h="514350">
+              <a:tr h="388620">
                 <a:tc>
                   <a:txBody>
                     <a:bodyPr/>
@@ -18012,7 +18595,121 @@
       </p:graphicFrame>
       <p:sp>
         <p:nvSpPr>
-          <p:cNvPr id="9" name="TextBox 8"/>
+          <p:cNvPr id="9" name="Rectangle 8"/>
+          <p:cNvSpPr/>
+          <p:nvPr/>
+        </p:nvSpPr>
+        <p:spPr>
+          <a:xfrm>
+            <a:off x="457200" y="5440680"/>
+            <a:ext cx="11247120" cy="960120"/>
+          </a:xfrm>
+          <a:prstGeom prst="rect">
+            <a:avLst/>
+          </a:prstGeom>
+          <a:solidFill>
+            <a:srgbClr val="DCFCE7"/>
+          </a:solidFill>
+          <a:ln>
+            <a:solidFill>
+              <a:srgbClr val="10B981"/>
+            </a:solidFill>
+          </a:ln>
+          <a:effectLst/>
+        </p:spPr>
+        <p:style>
+          <a:lnRef idx="1">
+            <a:schemeClr val="accent1"/>
+          </a:lnRef>
+          <a:fillRef idx="3">
+            <a:schemeClr val="accent1"/>
+          </a:fillRef>
+          <a:effectRef idx="2">
+            <a:schemeClr val="accent1"/>
+          </a:effectRef>
+          <a:fontRef idx="minor">
+            <a:schemeClr val="lt1"/>
+          </a:fontRef>
+        </p:style>
+        <p:txBody>
+          <a:bodyPr rtlCol="0" anchor="ctr"/>
+          <a:lstStyle/>
+          <a:p>
+            <a:pPr algn="ctr"/>
+          </a:p>
+        </p:txBody>
+      </p:sp>
+      <p:sp>
+        <p:nvSpPr>
+          <p:cNvPr id="10" name="TextBox 9"/>
+          <p:cNvSpPr txBox="1"/>
+          <p:nvPr/>
+        </p:nvSpPr>
+        <p:spPr>
+          <a:xfrm>
+            <a:off x="640080" y="5532120"/>
+            <a:ext cx="10972800" cy="320040"/>
+          </a:xfrm>
+          <a:prstGeom prst="rect">
+            <a:avLst/>
+          </a:prstGeom>
+          <a:noFill/>
+        </p:spPr>
+        <p:txBody>
+          <a:bodyPr wrap="square" anchor="t">
+            <a:spAutoFit/>
+          </a:bodyPr>
+          <a:lstStyle/>
+          <a:p>
+            <a:pPr algn="l"/>
+            <a:r>
+              <a:rPr sz="1100" b="1">
+                <a:solidFill>
+                  <a:srgbClr val="10B981"/>
+                </a:solidFill>
+              </a:rPr>
+              <a:t>REPRODUCE IN 3 STEPS</a:t>
+            </a:r>
+          </a:p>
+        </p:txBody>
+      </p:sp>
+      <p:sp>
+        <p:nvSpPr>
+          <p:cNvPr id="11" name="TextBox 10"/>
+          <p:cNvSpPr txBox="1"/>
+          <p:nvPr/>
+        </p:nvSpPr>
+        <p:spPr>
+          <a:xfrm>
+            <a:off x="640080" y="5852160"/>
+            <a:ext cx="10972800" cy="502920"/>
+          </a:xfrm>
+          <a:prstGeom prst="rect">
+            <a:avLst/>
+          </a:prstGeom>
+          <a:noFill/>
+        </p:spPr>
+        <p:txBody>
+          <a:bodyPr wrap="square" anchor="ctr">
+            <a:spAutoFit/>
+          </a:bodyPr>
+          <a:lstStyle/>
+          <a:p>
+            <a:pPr algn="l"/>
+            <a:r>
+              <a:rPr sz="1100" b="0">
+                <a:solidFill>
+                  <a:srgbClr val="333333"/>
+                </a:solidFill>
+              </a:rPr>
+              <a:t>git clone &lt;repo&gt;   →   conda create -n rsi python=3.11 &amp;&amp; pip install -r requirements.txt   →   ./start.sh</a:t>
+            </a:r>
+          </a:p>
+        </p:txBody>
+      </p:sp>
+      <p:sp>
+        <p:nvSpPr>
+          <p:cNvPr id="12" name="TextBox 11"/>
           <p:cNvSpPr txBox="1"/>
           <p:nvPr/>
         </p:nvSpPr>
@@ -18046,7 +18743,7 @@
       </p:sp>
       <p:sp>
         <p:nvSpPr>
-          <p:cNvPr id="10" name="TextBox 9"/>
+          <p:cNvPr id="13" name="TextBox 12"/>
           <p:cNvSpPr txBox="1"/>
           <p:nvPr/>
         </p:nvSpPr>
@@ -18570,7 +19267,7 @@
         </p:nvSpPr>
         <p:spPr>
           <a:xfrm>
-            <a:off x="457200" y="960120"/>
+            <a:off x="457200" y="914400"/>
             <a:ext cx="5486400" cy="320040"/>
           </a:xfrm>
           <a:prstGeom prst="rect">
@@ -18586,26 +19283,72 @@
           <a:p>
             <a:pPr algn="l"/>
             <a:r>
-              <a:rPr sz="1300" b="1">
+              <a:rPr sz="1100" b="1">
                 <a:solidFill>
                   <a:srgbClr val="D97706"/>
                 </a:solidFill>
               </a:rPr>
-              <a:t>Delivered at mid-sem</a:t>
-            </a:r>
-          </a:p>
-        </p:txBody>
-      </p:sp>
-      <p:sp>
-        <p:nvSpPr>
-          <p:cNvPr id="7" name="TextBox 6"/>
-          <p:cNvSpPr txBox="1"/>
-          <p:nvPr/>
-        </p:nvSpPr>
-        <p:spPr>
-          <a:xfrm>
-            <a:off x="457200" y="1280160"/>
-            <a:ext cx="5486400" cy="3474720"/>
+              <a:t>DELIVERED AT MID-SEM</a:t>
+            </a:r>
+          </a:p>
+        </p:txBody>
+      </p:sp>
+      <p:sp>
+        <p:nvSpPr>
+          <p:cNvPr id="7" name="Rectangle 6"/>
+          <p:cNvSpPr/>
+          <p:nvPr/>
+        </p:nvSpPr>
+        <p:spPr>
+          <a:xfrm>
+            <a:off x="365760" y="1234440"/>
+            <a:ext cx="5760720" cy="3749039"/>
+          </a:xfrm>
+          <a:prstGeom prst="rect">
+            <a:avLst/>
+          </a:prstGeom>
+          <a:solidFill>
+            <a:srgbClr val="FEF3C7"/>
+          </a:solidFill>
+          <a:ln>
+            <a:solidFill>
+              <a:srgbClr val="D97706"/>
+            </a:solidFill>
+          </a:ln>
+          <a:effectLst/>
+        </p:spPr>
+        <p:style>
+          <a:lnRef idx="1">
+            <a:schemeClr val="accent1"/>
+          </a:lnRef>
+          <a:fillRef idx="3">
+            <a:schemeClr val="accent1"/>
+          </a:fillRef>
+          <a:effectRef idx="2">
+            <a:schemeClr val="accent1"/>
+          </a:effectRef>
+          <a:fontRef idx="minor">
+            <a:schemeClr val="lt1"/>
+          </a:fontRef>
+        </p:style>
+        <p:txBody>
+          <a:bodyPr rtlCol="0" anchor="ctr"/>
+          <a:lstStyle/>
+          <a:p>
+            <a:pPr algn="ctr"/>
+          </a:p>
+        </p:txBody>
+      </p:sp>
+      <p:sp>
+        <p:nvSpPr>
+          <p:cNvPr id="8" name="TextBox 7"/>
+          <p:cNvSpPr txBox="1"/>
+          <p:nvPr/>
+        </p:nvSpPr>
+        <p:spPr>
+          <a:xfrm>
+            <a:off x="548640" y="1371600"/>
+            <a:ext cx="5486400" cy="3520440"/>
           </a:xfrm>
           <a:prstGeom prst="rect">
             <a:avLst/>
@@ -18624,7 +19367,7 @@
               </a:spcAft>
             </a:pPr>
             <a:r>
-              <a:rPr sz="1200" b="0">
+              <a:rPr sz="1300" b="0">
                 <a:solidFill>
                   <a:srgbClr val="333333"/>
                 </a:solidFill>
@@ -18639,7 +19382,7 @@
               </a:spcAft>
             </a:pPr>
             <a:r>
-              <a:rPr sz="1200" b="0">
+              <a:rPr sz="1300" b="0">
                 <a:solidFill>
                   <a:srgbClr val="333333"/>
                 </a:solidFill>
@@ -18654,7 +19397,7 @@
               </a:spcAft>
             </a:pPr>
             <a:r>
-              <a:rPr sz="1200" b="0">
+              <a:rPr sz="1300" b="0">
                 <a:solidFill>
                   <a:srgbClr val="333333"/>
                 </a:solidFill>
@@ -18669,7 +19412,7 @@
               </a:spcAft>
             </a:pPr>
             <a:r>
-              <a:rPr sz="1200" b="0">
+              <a:rPr sz="1300" b="0">
                 <a:solidFill>
                   <a:srgbClr val="333333"/>
                 </a:solidFill>
@@ -18684,7 +19427,7 @@
               </a:spcAft>
             </a:pPr>
             <a:r>
-              <a:rPr sz="1200" b="0">
+              <a:rPr sz="1300" b="0">
                 <a:solidFill>
                   <a:srgbClr val="333333"/>
                 </a:solidFill>
@@ -18699,7 +19442,7 @@
               </a:spcAft>
             </a:pPr>
             <a:r>
-              <a:rPr sz="1200" b="0">
+              <a:rPr sz="1300" b="0">
                 <a:solidFill>
                   <a:srgbClr val="333333"/>
                 </a:solidFill>
@@ -18711,13 +19454,13 @@
       </p:sp>
       <p:sp>
         <p:nvSpPr>
-          <p:cNvPr id="8" name="TextBox 7"/>
-          <p:cNvSpPr txBox="1"/>
-          <p:nvPr/>
-        </p:nvSpPr>
-        <p:spPr>
-          <a:xfrm>
-            <a:off x="6263640" y="960120"/>
+          <p:cNvPr id="9" name="TextBox 8"/>
+          <p:cNvSpPr txBox="1"/>
+          <p:nvPr/>
+        </p:nvSpPr>
+        <p:spPr>
+          <a:xfrm>
+            <a:off x="6263640" y="914400"/>
             <a:ext cx="5486400" cy="320040"/>
           </a:xfrm>
           <a:prstGeom prst="rect">
@@ -18733,26 +19476,72 @@
           <a:p>
             <a:pPr algn="l"/>
             <a:r>
-              <a:rPr sz="1300" b="1">
+              <a:rPr sz="1100" b="1">
                 <a:solidFill>
                   <a:srgbClr val="10B981"/>
                 </a:solidFill>
               </a:rPr>
-              <a:t>Added post-midsem  (this deck)</a:t>
-            </a:r>
-          </a:p>
-        </p:txBody>
-      </p:sp>
-      <p:sp>
-        <p:nvSpPr>
-          <p:cNvPr id="9" name="TextBox 8"/>
-          <p:cNvSpPr txBox="1"/>
-          <p:nvPr/>
-        </p:nvSpPr>
-        <p:spPr>
-          <a:xfrm>
-            <a:off x="6263640" y="1280160"/>
-            <a:ext cx="5486400" cy="3474720"/>
+              <a:t>ADDED POST-MIDSEM  (this deck)</a:t>
+            </a:r>
+          </a:p>
+        </p:txBody>
+      </p:sp>
+      <p:sp>
+        <p:nvSpPr>
+          <p:cNvPr id="10" name="Rectangle 9"/>
+          <p:cNvSpPr/>
+          <p:nvPr/>
+        </p:nvSpPr>
+        <p:spPr>
+          <a:xfrm>
+            <a:off x="6172200" y="1234440"/>
+            <a:ext cx="5623560" cy="3749039"/>
+          </a:xfrm>
+          <a:prstGeom prst="rect">
+            <a:avLst/>
+          </a:prstGeom>
+          <a:solidFill>
+            <a:srgbClr val="DCFCE7"/>
+          </a:solidFill>
+          <a:ln>
+            <a:solidFill>
+              <a:srgbClr val="10B981"/>
+            </a:solidFill>
+          </a:ln>
+          <a:effectLst/>
+        </p:spPr>
+        <p:style>
+          <a:lnRef idx="1">
+            <a:schemeClr val="accent1"/>
+          </a:lnRef>
+          <a:fillRef idx="3">
+            <a:schemeClr val="accent1"/>
+          </a:fillRef>
+          <a:effectRef idx="2">
+            <a:schemeClr val="accent1"/>
+          </a:effectRef>
+          <a:fontRef idx="minor">
+            <a:schemeClr val="lt1"/>
+          </a:fontRef>
+        </p:style>
+        <p:txBody>
+          <a:bodyPr rtlCol="0" anchor="ctr"/>
+          <a:lstStyle/>
+          <a:p>
+            <a:pPr algn="ctr"/>
+          </a:p>
+        </p:txBody>
+      </p:sp>
+      <p:sp>
+        <p:nvSpPr>
+          <p:cNvPr id="11" name="TextBox 10"/>
+          <p:cNvSpPr txBox="1"/>
+          <p:nvPr/>
+        </p:nvSpPr>
+        <p:spPr>
+          <a:xfrm>
+            <a:off x="6355080" y="1371600"/>
+            <a:ext cx="5349240" cy="3520440"/>
           </a:xfrm>
           <a:prstGeom prst="rect">
             <a:avLst/>
@@ -18791,7 +19580,7 @@
                   <a:srgbClr val="333333"/>
                 </a:solidFill>
               </a:rPr>
-              <a:t>•  Smart Reply Composer  —  triple-draft (GPT-4o + Mistral + Smart Composer)</a:t>
+              <a:t>•  Smart Reply Composer  —  triple-draft (GPT-4o + Mistral + Smart)</a:t>
             </a:r>
           </a:p>
           <a:p>
@@ -18881,7 +19670,7 @@
                   <a:srgbClr val="333333"/>
                 </a:solidFill>
               </a:rPr>
-              <a:t>•  ModernBERT Stage 3 (final)  —  Macro-F1 0.7285 → 0.7642  (5-fold OOF)</a:t>
+              <a:t>•  ModernBERT Stage 3 (final)  —  0.7285 → 0.7642  (5-fold OOF)</a:t>
             </a:r>
           </a:p>
           <a:p>
@@ -18903,13 +19692,13 @@
       </p:sp>
       <p:sp>
         <p:nvSpPr>
-          <p:cNvPr id="10" name="Rectangle 9"/>
+          <p:cNvPr id="12" name="Rectangle 11"/>
           <p:cNvSpPr/>
           <p:nvPr/>
         </p:nvSpPr>
         <p:spPr>
           <a:xfrm>
-            <a:off x="457200" y="5074920"/>
+            <a:off x="457200" y="5212080"/>
             <a:ext cx="11247120" cy="1234440"/>
           </a:xfrm>
           <a:prstGeom prst="rect">
@@ -18949,14 +19738,48 @@
       </p:sp>
       <p:sp>
         <p:nvSpPr>
-          <p:cNvPr id="11" name="TextBox 10"/>
-          <p:cNvSpPr txBox="1"/>
-          <p:nvPr/>
-        </p:nvSpPr>
-        <p:spPr>
-          <a:xfrm>
-            <a:off x="640080" y="5212080"/>
-            <a:ext cx="10972800" cy="365760"/>
+          <p:cNvPr id="13" name="TextBox 12"/>
+          <p:cNvSpPr txBox="1"/>
+          <p:nvPr/>
+        </p:nvSpPr>
+        <p:spPr>
+          <a:xfrm>
+            <a:off x="640080" y="5257800"/>
+            <a:ext cx="548640" cy="1097280"/>
+          </a:xfrm>
+          <a:prstGeom prst="rect">
+            <a:avLst/>
+          </a:prstGeom>
+          <a:noFill/>
+        </p:spPr>
+        <p:txBody>
+          <a:bodyPr wrap="square" anchor="ctr">
+            <a:spAutoFit/>
+          </a:bodyPr>
+          <a:lstStyle/>
+          <a:p>
+            <a:pPr algn="l"/>
+            <a:r>
+              <a:rPr sz="5200" b="1">
+                <a:solidFill>
+                  <a:srgbClr val="0071DC"/>
+                </a:solidFill>
+              </a:rPr>
+              <a:t>“</a:t>
+            </a:r>
+          </a:p>
+        </p:txBody>
+      </p:sp>
+      <p:sp>
+        <p:nvSpPr>
+          <p:cNvPr id="14" name="TextBox 13"/>
+          <p:cNvSpPr txBox="1"/>
+          <p:nvPr/>
+        </p:nvSpPr>
+        <p:spPr>
+          <a:xfrm>
+            <a:off x="1188720" y="5321808"/>
+            <a:ext cx="10424160" cy="320040"/>
           </a:xfrm>
           <a:prstGeom prst="rect">
             <a:avLst/>
@@ -18971,26 +19794,26 @@
           <a:p>
             <a:pPr algn="l"/>
             <a:r>
-              <a:rPr sz="1300" b="1">
+              <a:rPr sz="1100" b="1">
                 <a:solidFill>
                   <a:srgbClr val="0071DC"/>
                 </a:solidFill>
               </a:rPr>
-              <a:t>Framing</a:t>
-            </a:r>
-          </a:p>
-        </p:txBody>
-      </p:sp>
-      <p:sp>
-        <p:nvSpPr>
-          <p:cNvPr id="12" name="TextBox 11"/>
-          <p:cNvSpPr txBox="1"/>
-          <p:nvPr/>
-        </p:nvSpPr>
-        <p:spPr>
-          <a:xfrm>
-            <a:off x="640080" y="5577840"/>
-            <a:ext cx="10972800" cy="731520"/>
+              <a:t>THE FRAMING QUESTION</a:t>
+            </a:r>
+          </a:p>
+        </p:txBody>
+      </p:sp>
+      <p:sp>
+        <p:nvSpPr>
+          <p:cNvPr id="15" name="TextBox 14"/>
+          <p:cNvSpPr txBox="1"/>
+          <p:nvPr/>
+        </p:nvSpPr>
+        <p:spPr>
+          <a:xfrm>
+            <a:off x="1188720" y="5623560"/>
+            <a:ext cx="10424160" cy="777240"/>
           </a:xfrm>
           <a:prstGeom prst="rect">
             <a:avLst/>
@@ -19010,14 +19833,14 @@
                   <a:srgbClr val="333333"/>
                 </a:solidFill>
               </a:rPr>
-              <a:t>Mid-sem answered can the pipeline produce trust-weighted sentiment?    Post-midsem answers can an analyst act on it, correct it, and feed the corrections back into the model?</a:t>
-            </a:r>
-          </a:p>
-        </p:txBody>
-      </p:sp>
-      <p:sp>
-        <p:nvSpPr>
-          <p:cNvPr id="13" name="TextBox 12"/>
+              <a:t>Mid-sem answered  can the pipeline produce trust-weighted sentiment?    Post-midsem answers  can an analyst act on it, correct it, and feed the corrections back into the model?</a:t>
+            </a:r>
+          </a:p>
+        </p:txBody>
+      </p:sp>
+      <p:sp>
+        <p:nvSpPr>
+          <p:cNvPr id="16" name="TextBox 15"/>
           <p:cNvSpPr txBox="1"/>
           <p:nvPr/>
         </p:nvSpPr>
@@ -19051,7 +19874,7 @@
       </p:sp>
       <p:sp>
         <p:nvSpPr>
-          <p:cNvPr id="14" name="TextBox 13"/>
+          <p:cNvPr id="17" name="TextBox 16"/>
           <p:cNvSpPr txBox="1"/>
           <p:nvPr/>
         </p:nvSpPr>
@@ -19265,8 +20088,42 @@
         </p:nvSpPr>
         <p:spPr>
           <a:xfrm>
-            <a:off x="457200" y="960120"/>
-            <a:ext cx="5486400" cy="2560320"/>
+            <a:off x="457200" y="914400"/>
+            <a:ext cx="5486400" cy="320040"/>
+          </a:xfrm>
+          <a:prstGeom prst="rect">
+            <a:avLst/>
+          </a:prstGeom>
+          <a:noFill/>
+        </p:spPr>
+        <p:txBody>
+          <a:bodyPr wrap="square" anchor="t">
+            <a:spAutoFit/>
+          </a:bodyPr>
+          <a:lstStyle/>
+          <a:p>
+            <a:pPr algn="l"/>
+            <a:r>
+              <a:rPr sz="1100" b="1">
+                <a:solidFill>
+                  <a:srgbClr val="0071DC"/>
+                </a:solidFill>
+              </a:rPr>
+              <a:t>WORKFLOW</a:t>
+            </a:r>
+          </a:p>
+        </p:txBody>
+      </p:sp>
+      <p:sp>
+        <p:nvSpPr>
+          <p:cNvPr id="7" name="TextBox 6"/>
+          <p:cNvSpPr txBox="1"/>
+          <p:nvPr/>
+        </p:nvSpPr>
+        <p:spPr>
+          <a:xfrm>
+            <a:off x="457200" y="1234440"/>
+            <a:ext cx="5486400" cy="2468880"/>
           </a:xfrm>
           <a:prstGeom prst="rect">
             <a:avLst/>
@@ -19335,7 +20192,7 @@
                   <a:srgbClr val="333333"/>
                 </a:solidFill>
               </a:rPr>
-              <a:t>•  Generate Drafts  →  three reply options  (GPT-4o + Mistral + Smart Composer)</a:t>
+              <a:t>•  Generate Drafts  →  three reply options  (GPT-4o + Mistral + Smart)</a:t>
             </a:r>
           </a:p>
           <a:p>
@@ -19372,7 +20229,7 @@
       </p:sp>
       <p:pic>
         <p:nvPicPr>
-          <p:cNvPr id="7" name="Picture 6" descr="review_validate.png"/>
+          <p:cNvPr id="8" name="Picture 7" descr="review_validate.png"/>
           <p:cNvPicPr>
             <a:picLocks noChangeAspect="1"/>
           </p:cNvPicPr>
@@ -19396,14 +20253,14 @@
       </p:pic>
       <p:sp>
         <p:nvSpPr>
-          <p:cNvPr id="8" name="Rectangle 7"/>
+          <p:cNvPr id="9" name="Rectangle 8"/>
           <p:cNvSpPr/>
           <p:nvPr/>
         </p:nvSpPr>
         <p:spPr>
           <a:xfrm>
-            <a:off x="457200" y="5212080"/>
-            <a:ext cx="5486400" cy="1097280"/>
+            <a:off x="457200" y="3794760"/>
+            <a:ext cx="5486400" cy="1188720"/>
           </a:xfrm>
           <a:prstGeom prst="rect">
             <a:avLst/>
@@ -19442,13 +20299,13 @@
       </p:sp>
       <p:sp>
         <p:nvSpPr>
-          <p:cNvPr id="9" name="TextBox 8"/>
-          <p:cNvSpPr txBox="1"/>
-          <p:nvPr/>
-        </p:nvSpPr>
-        <p:spPr>
-          <a:xfrm>
-            <a:off x="640080" y="5349240"/>
+          <p:cNvPr id="10" name="TextBox 9"/>
+          <p:cNvSpPr txBox="1"/>
+          <p:nvPr/>
+        </p:nvSpPr>
+        <p:spPr>
+          <a:xfrm>
+            <a:off x="640080" y="3913632"/>
             <a:ext cx="5120640" cy="320040"/>
           </a:xfrm>
           <a:prstGeom prst="rect">
@@ -19464,26 +20321,26 @@
           <a:p>
             <a:pPr algn="l"/>
             <a:r>
-              <a:rPr sz="1200" b="1">
+              <a:rPr sz="1100" b="1">
                 <a:solidFill>
                   <a:srgbClr val="10B981"/>
                 </a:solidFill>
               </a:rPr>
-              <a:t>Why it matters</a:t>
-            </a:r>
-          </a:p>
-        </p:txBody>
-      </p:sp>
-      <p:sp>
-        <p:nvSpPr>
-          <p:cNvPr id="10" name="TextBox 9"/>
-          <p:cNvSpPr txBox="1"/>
-          <p:nvPr/>
-        </p:nvSpPr>
-        <p:spPr>
-          <a:xfrm>
-            <a:off x="640080" y="5669280"/>
-            <a:ext cx="5120640" cy="640080"/>
+              <a:t>WHY IT MATTERS</a:t>
+            </a:r>
+          </a:p>
+        </p:txBody>
+      </p:sp>
+      <p:sp>
+        <p:nvSpPr>
+          <p:cNvPr id="11" name="TextBox 10"/>
+          <p:cNvSpPr txBox="1"/>
+          <p:nvPr/>
+        </p:nvSpPr>
+        <p:spPr>
+          <a:xfrm>
+            <a:off x="640080" y="4206240"/>
+            <a:ext cx="5120640" cy="777240"/>
           </a:xfrm>
           <a:prstGeom prst="rect">
             <a:avLst/>
@@ -19510,7 +20367,121 @@
       </p:sp>
       <p:sp>
         <p:nvSpPr>
-          <p:cNvPr id="11" name="TextBox 10"/>
+          <p:cNvPr id="12" name="Rectangle 11"/>
+          <p:cNvSpPr/>
+          <p:nvPr/>
+        </p:nvSpPr>
+        <p:spPr>
+          <a:xfrm>
+            <a:off x="457200" y="5120640"/>
+            <a:ext cx="5486400" cy="1280160"/>
+          </a:xfrm>
+          <a:prstGeom prst="rect">
+            <a:avLst/>
+          </a:prstGeom>
+          <a:solidFill>
+            <a:srgbClr val="E8F4FD"/>
+          </a:solidFill>
+          <a:ln>
+            <a:solidFill>
+              <a:srgbClr val="0071DC"/>
+            </a:solidFill>
+          </a:ln>
+          <a:effectLst/>
+        </p:spPr>
+        <p:style>
+          <a:lnRef idx="1">
+            <a:schemeClr val="accent1"/>
+          </a:lnRef>
+          <a:fillRef idx="3">
+            <a:schemeClr val="accent1"/>
+          </a:fillRef>
+          <a:effectRef idx="2">
+            <a:schemeClr val="accent1"/>
+          </a:effectRef>
+          <a:fontRef idx="minor">
+            <a:schemeClr val="lt1"/>
+          </a:fontRef>
+        </p:style>
+        <p:txBody>
+          <a:bodyPr rtlCol="0" anchor="ctr"/>
+          <a:lstStyle/>
+          <a:p>
+            <a:pPr algn="ctr"/>
+          </a:p>
+        </p:txBody>
+      </p:sp>
+      <p:sp>
+        <p:nvSpPr>
+          <p:cNvPr id="13" name="TextBox 12"/>
+          <p:cNvSpPr txBox="1"/>
+          <p:nvPr/>
+        </p:nvSpPr>
+        <p:spPr>
+          <a:xfrm>
+            <a:off x="640080" y="5230368"/>
+            <a:ext cx="5120640" cy="320040"/>
+          </a:xfrm>
+          <a:prstGeom prst="rect">
+            <a:avLst/>
+          </a:prstGeom>
+          <a:noFill/>
+        </p:spPr>
+        <p:txBody>
+          <a:bodyPr wrap="square" anchor="t">
+            <a:spAutoFit/>
+          </a:bodyPr>
+          <a:lstStyle/>
+          <a:p>
+            <a:pPr algn="l"/>
+            <a:r>
+              <a:rPr sz="1100" b="1">
+                <a:solidFill>
+                  <a:srgbClr val="0071DC"/>
+                </a:solidFill>
+              </a:rPr>
+              <a:t>NUMBERS TODAY  (live capture)</a:t>
+            </a:r>
+          </a:p>
+        </p:txBody>
+      </p:sp>
+      <p:sp>
+        <p:nvSpPr>
+          <p:cNvPr id="14" name="TextBox 13"/>
+          <p:cNvSpPr txBox="1"/>
+          <p:nvPr/>
+        </p:nvSpPr>
+        <p:spPr>
+          <a:xfrm>
+            <a:off x="640080" y="5532120"/>
+            <a:ext cx="5120640" cy="822960"/>
+          </a:xfrm>
+          <a:prstGeom prst="rect">
+            <a:avLst/>
+          </a:prstGeom>
+          <a:noFill/>
+        </p:spPr>
+        <p:txBody>
+          <a:bodyPr wrap="square" anchor="t">
+            <a:spAutoFit/>
+          </a:bodyPr>
+          <a:lstStyle/>
+          <a:p>
+            <a:pPr algn="l"/>
+            <a:r>
+              <a:rPr sz="1100" b="0">
+                <a:solidFill>
+                  <a:srgbClr val="333333"/>
+                </a:solidFill>
+              </a:rPr>
+              <a:t>18 posted replies logged  ·  60 total feedback rows  ·  ≈90 % analyst – model agreement on the last 30 reviews.</a:t>
+            </a:r>
+          </a:p>
+        </p:txBody>
+      </p:sp>
+      <p:sp>
+        <p:nvSpPr>
+          <p:cNvPr id="15" name="TextBox 14"/>
           <p:cNvSpPr txBox="1"/>
           <p:nvPr/>
         </p:nvSpPr>
@@ -19544,7 +20515,7 @@
       </p:sp>
       <p:sp>
         <p:nvSpPr>
-          <p:cNvPr id="12" name="TextBox 11"/>
+          <p:cNvPr id="16" name="TextBox 15"/>
           <p:cNvSpPr txBox="1"/>
           <p:nvPr/>
         </p:nvSpPr>
@@ -19882,7 +20853,7 @@
         </p:nvSpPr>
         <p:spPr>
           <a:xfrm>
-            <a:off x="365760" y="1508760"/>
+            <a:off x="365760" y="1554480"/>
             <a:ext cx="3794760" cy="365760"/>
           </a:xfrm>
           <a:prstGeom prst="rect">
@@ -19898,7 +20869,7 @@
           <a:p>
             <a:pPr algn="ctr"/>
             <a:r>
-              <a:rPr sz="1600" b="1">
+              <a:rPr sz="1700" b="1">
                 <a:solidFill>
                   <a:srgbClr val="041E42"/>
                 </a:solidFill>
@@ -19916,8 +20887,8 @@
         </p:nvSpPr>
         <p:spPr>
           <a:xfrm>
-            <a:off x="365760" y="1920240"/>
-            <a:ext cx="3794760" cy="320040"/>
+            <a:off x="365760" y="1965960"/>
+            <a:ext cx="3794760" cy="274320"/>
           </a:xfrm>
           <a:prstGeom prst="rect">
             <a:avLst/>
@@ -19944,29 +20915,73 @@
       </p:sp>
       <p:sp>
         <p:nvSpPr>
-          <p:cNvPr id="11" name="TextBox 10"/>
-          <p:cNvSpPr txBox="1"/>
-          <p:nvPr/>
-        </p:nvSpPr>
-        <p:spPr>
-          <a:xfrm>
-            <a:off x="548640" y="2331720"/>
-            <a:ext cx="3429000" cy="1645920"/>
-          </a:xfrm>
-          <a:prstGeom prst="rect">
-            <a:avLst/>
-          </a:prstGeom>
-          <a:noFill/>
-        </p:spPr>
-        <p:txBody>
-          <a:bodyPr wrap="square" anchor="ctr">
-            <a:spAutoFit/>
-          </a:bodyPr>
-          <a:lstStyle/>
-          <a:p>
-            <a:pPr algn="ctr"/>
-            <a:r>
-              <a:rPr sz="1100" b="0">
+          <p:cNvPr id="11" name="Rectangle 10"/>
+          <p:cNvSpPr/>
+          <p:nvPr/>
+        </p:nvSpPr>
+        <p:spPr>
+          <a:xfrm>
+            <a:off x="822960" y="2331720"/>
+            <a:ext cx="2880360" cy="18288"/>
+          </a:xfrm>
+          <a:prstGeom prst="rect">
+            <a:avLst/>
+          </a:prstGeom>
+          <a:solidFill>
+            <a:srgbClr val="0071DC"/>
+          </a:solidFill>
+          <a:ln>
+            <a:noFill/>
+          </a:ln>
+          <a:effectLst/>
+        </p:spPr>
+        <p:style>
+          <a:lnRef idx="1">
+            <a:schemeClr val="accent1"/>
+          </a:lnRef>
+          <a:fillRef idx="3">
+            <a:schemeClr val="accent1"/>
+          </a:fillRef>
+          <a:effectRef idx="2">
+            <a:schemeClr val="accent1"/>
+          </a:effectRef>
+          <a:fontRef idx="minor">
+            <a:schemeClr val="lt1"/>
+          </a:fontRef>
+        </p:style>
+        <p:txBody>
+          <a:bodyPr rtlCol="0" anchor="ctr"/>
+          <a:lstStyle/>
+          <a:p>
+            <a:pPr algn="ctr"/>
+          </a:p>
+        </p:txBody>
+      </p:sp>
+      <p:sp>
+        <p:nvSpPr>
+          <p:cNvPr id="12" name="TextBox 11"/>
+          <p:cNvSpPr txBox="1"/>
+          <p:nvPr/>
+        </p:nvSpPr>
+        <p:spPr>
+          <a:xfrm>
+            <a:off x="548640" y="2468880"/>
+            <a:ext cx="3429000" cy="1463040"/>
+          </a:xfrm>
+          <a:prstGeom prst="rect">
+            <a:avLst/>
+          </a:prstGeom>
+          <a:noFill/>
+        </p:spPr>
+        <p:txBody>
+          <a:bodyPr wrap="square" anchor="t">
+            <a:spAutoFit/>
+          </a:bodyPr>
+          <a:lstStyle/>
+          <a:p>
+            <a:pPr algn="ctr"/>
+            <a:r>
+              <a:rPr sz="1200" b="0">
                 <a:solidFill>
                   <a:srgbClr val="333333"/>
                 </a:solidFill>
@@ -19977,7 +20992,7 @@
           <a:p>
             <a:pPr algn="ctr"/>
             <a:r>
-              <a:rPr sz="1100" b="0">
+              <a:rPr sz="1200" b="0">
                 <a:solidFill>
                   <a:srgbClr val="333333"/>
                 </a:solidFill>
@@ -19988,7 +21003,7 @@
           <a:p>
             <a:pPr algn="ctr"/>
             <a:r>
-              <a:rPr sz="1100" b="0">
+              <a:rPr sz="1200" b="0">
                 <a:solidFill>
                   <a:srgbClr val="333333"/>
                 </a:solidFill>
@@ -19999,7 +21014,7 @@
           <a:p>
             <a:pPr algn="ctr"/>
             <a:r>
-              <a:rPr sz="1100" b="0">
+              <a:rPr sz="1200" b="0">
                 <a:solidFill>
                   <a:srgbClr val="333333"/>
                 </a:solidFill>
@@ -20011,7 +21026,7 @@
       </p:sp>
       <p:sp>
         <p:nvSpPr>
-          <p:cNvPr id="12" name="Rectangle 11"/>
+          <p:cNvPr id="13" name="Rectangle 12"/>
           <p:cNvSpPr/>
           <p:nvPr/>
         </p:nvSpPr>
@@ -20057,7 +21072,7 @@
       </p:sp>
       <p:sp>
         <p:nvSpPr>
-          <p:cNvPr id="13" name="Rectangle 12"/>
+          <p:cNvPr id="14" name="Rectangle 13"/>
           <p:cNvSpPr/>
           <p:nvPr/>
         </p:nvSpPr>
@@ -20101,7 +21116,7 @@
       </p:sp>
       <p:sp>
         <p:nvSpPr>
-          <p:cNvPr id="14" name="TextBox 13"/>
+          <p:cNvPr id="15" name="TextBox 14"/>
           <p:cNvSpPr txBox="1"/>
           <p:nvPr/>
         </p:nvSpPr>
@@ -20135,13 +21150,13 @@
       </p:sp>
       <p:sp>
         <p:nvSpPr>
-          <p:cNvPr id="15" name="TextBox 14"/>
-          <p:cNvSpPr txBox="1"/>
-          <p:nvPr/>
-        </p:nvSpPr>
-        <p:spPr>
-          <a:xfrm>
-            <a:off x="4297680" y="1508760"/>
+          <p:cNvPr id="16" name="TextBox 15"/>
+          <p:cNvSpPr txBox="1"/>
+          <p:nvPr/>
+        </p:nvSpPr>
+        <p:spPr>
+          <a:xfrm>
+            <a:off x="4297680" y="1554480"/>
             <a:ext cx="3794760" cy="365760"/>
           </a:xfrm>
           <a:prstGeom prst="rect">
@@ -20157,7 +21172,7 @@
           <a:p>
             <a:pPr algn="ctr"/>
             <a:r>
-              <a:rPr sz="1600" b="1">
+              <a:rPr sz="1700" b="1">
                 <a:solidFill>
                   <a:srgbClr val="041E42"/>
                 </a:solidFill>
@@ -20169,14 +21184,14 @@
       </p:sp>
       <p:sp>
         <p:nvSpPr>
-          <p:cNvPr id="16" name="TextBox 15"/>
-          <p:cNvSpPr txBox="1"/>
-          <p:nvPr/>
-        </p:nvSpPr>
-        <p:spPr>
-          <a:xfrm>
-            <a:off x="4297680" y="1920240"/>
-            <a:ext cx="3794760" cy="320040"/>
+          <p:cNvPr id="17" name="TextBox 16"/>
+          <p:cNvSpPr txBox="1"/>
+          <p:nvPr/>
+        </p:nvSpPr>
+        <p:spPr>
+          <a:xfrm>
+            <a:off x="4297680" y="1965960"/>
+            <a:ext cx="3794760" cy="274320"/>
           </a:xfrm>
           <a:prstGeom prst="rect">
             <a:avLst/>
@@ -20203,29 +21218,73 @@
       </p:sp>
       <p:sp>
         <p:nvSpPr>
-          <p:cNvPr id="17" name="TextBox 16"/>
-          <p:cNvSpPr txBox="1"/>
-          <p:nvPr/>
-        </p:nvSpPr>
-        <p:spPr>
-          <a:xfrm>
-            <a:off x="4480560" y="2331720"/>
-            <a:ext cx="3429000" cy="1645920"/>
-          </a:xfrm>
-          <a:prstGeom prst="rect">
-            <a:avLst/>
-          </a:prstGeom>
-          <a:noFill/>
-        </p:spPr>
-        <p:txBody>
-          <a:bodyPr wrap="square" anchor="ctr">
-            <a:spAutoFit/>
-          </a:bodyPr>
-          <a:lstStyle/>
-          <a:p>
-            <a:pPr algn="ctr"/>
-            <a:r>
-              <a:rPr sz="1100" b="0">
+          <p:cNvPr id="18" name="Rectangle 17"/>
+          <p:cNvSpPr/>
+          <p:nvPr/>
+        </p:nvSpPr>
+        <p:spPr>
+          <a:xfrm>
+            <a:off x="4754880" y="2331720"/>
+            <a:ext cx="2880360" cy="18288"/>
+          </a:xfrm>
+          <a:prstGeom prst="rect">
+            <a:avLst/>
+          </a:prstGeom>
+          <a:solidFill>
+            <a:srgbClr val="7C3AED"/>
+          </a:solidFill>
+          <a:ln>
+            <a:noFill/>
+          </a:ln>
+          <a:effectLst/>
+        </p:spPr>
+        <p:style>
+          <a:lnRef idx="1">
+            <a:schemeClr val="accent1"/>
+          </a:lnRef>
+          <a:fillRef idx="3">
+            <a:schemeClr val="accent1"/>
+          </a:fillRef>
+          <a:effectRef idx="2">
+            <a:schemeClr val="accent1"/>
+          </a:effectRef>
+          <a:fontRef idx="minor">
+            <a:schemeClr val="lt1"/>
+          </a:fontRef>
+        </p:style>
+        <p:txBody>
+          <a:bodyPr rtlCol="0" anchor="ctr"/>
+          <a:lstStyle/>
+          <a:p>
+            <a:pPr algn="ctr"/>
+          </a:p>
+        </p:txBody>
+      </p:sp>
+      <p:sp>
+        <p:nvSpPr>
+          <p:cNvPr id="19" name="TextBox 18"/>
+          <p:cNvSpPr txBox="1"/>
+          <p:nvPr/>
+        </p:nvSpPr>
+        <p:spPr>
+          <a:xfrm>
+            <a:off x="4480560" y="2468880"/>
+            <a:ext cx="3429000" cy="1463040"/>
+          </a:xfrm>
+          <a:prstGeom prst="rect">
+            <a:avLst/>
+          </a:prstGeom>
+          <a:noFill/>
+        </p:spPr>
+        <p:txBody>
+          <a:bodyPr wrap="square" anchor="t">
+            <a:spAutoFit/>
+          </a:bodyPr>
+          <a:lstStyle/>
+          <a:p>
+            <a:pPr algn="ctr"/>
+            <a:r>
+              <a:rPr sz="1200" b="0">
                 <a:solidFill>
                   <a:srgbClr val="333333"/>
                 </a:solidFill>
@@ -20236,7 +21295,7 @@
           <a:p>
             <a:pPr algn="ctr"/>
             <a:r>
-              <a:rPr sz="1100" b="0">
+              <a:rPr sz="1200" b="0">
                 <a:solidFill>
                   <a:srgbClr val="333333"/>
                 </a:solidFill>
@@ -20247,7 +21306,7 @@
           <a:p>
             <a:pPr algn="ctr"/>
             <a:r>
-              <a:rPr sz="1100" b="0">
+              <a:rPr sz="1200" b="0">
                 <a:solidFill>
                   <a:srgbClr val="333333"/>
                 </a:solidFill>
@@ -20258,7 +21317,7 @@
           <a:p>
             <a:pPr algn="ctr"/>
             <a:r>
-              <a:rPr sz="1100" b="0">
+              <a:rPr sz="1200" b="0">
                 <a:solidFill>
                   <a:srgbClr val="333333"/>
                 </a:solidFill>
@@ -20270,7 +21329,7 @@
       </p:sp>
       <p:sp>
         <p:nvSpPr>
-          <p:cNvPr id="18" name="Rectangle 17"/>
+          <p:cNvPr id="20" name="Rectangle 19"/>
           <p:cNvSpPr/>
           <p:nvPr/>
         </p:nvSpPr>
@@ -20316,7 +21375,7 @@
       </p:sp>
       <p:sp>
         <p:nvSpPr>
-          <p:cNvPr id="19" name="Rectangle 18"/>
+          <p:cNvPr id="21" name="Rectangle 20"/>
           <p:cNvSpPr/>
           <p:nvPr/>
         </p:nvSpPr>
@@ -20360,7 +21419,7 @@
       </p:sp>
       <p:sp>
         <p:nvSpPr>
-          <p:cNvPr id="20" name="TextBox 19"/>
+          <p:cNvPr id="22" name="TextBox 21"/>
           <p:cNvSpPr txBox="1"/>
           <p:nvPr/>
         </p:nvSpPr>
@@ -20394,13 +21453,13 @@
       </p:sp>
       <p:sp>
         <p:nvSpPr>
-          <p:cNvPr id="21" name="TextBox 20"/>
-          <p:cNvSpPr txBox="1"/>
-          <p:nvPr/>
-        </p:nvSpPr>
-        <p:spPr>
-          <a:xfrm>
-            <a:off x="8229600" y="1508760"/>
+          <p:cNvPr id="23" name="TextBox 22"/>
+          <p:cNvSpPr txBox="1"/>
+          <p:nvPr/>
+        </p:nvSpPr>
+        <p:spPr>
+          <a:xfrm>
+            <a:off x="8229600" y="1554480"/>
             <a:ext cx="3794760" cy="365760"/>
           </a:xfrm>
           <a:prstGeom prst="rect">
@@ -20416,7 +21475,7 @@
           <a:p>
             <a:pPr algn="ctr"/>
             <a:r>
-              <a:rPr sz="1600" b="1">
+              <a:rPr sz="1700" b="1">
                 <a:solidFill>
                   <a:srgbClr val="041E42"/>
                 </a:solidFill>
@@ -20428,14 +21487,14 @@
       </p:sp>
       <p:sp>
         <p:nvSpPr>
-          <p:cNvPr id="22" name="TextBox 21"/>
-          <p:cNvSpPr txBox="1"/>
-          <p:nvPr/>
-        </p:nvSpPr>
-        <p:spPr>
-          <a:xfrm>
-            <a:off x="8229600" y="1920240"/>
-            <a:ext cx="3794760" cy="320040"/>
+          <p:cNvPr id="24" name="TextBox 23"/>
+          <p:cNvSpPr txBox="1"/>
+          <p:nvPr/>
+        </p:nvSpPr>
+        <p:spPr>
+          <a:xfrm>
+            <a:off x="8229600" y="1965960"/>
+            <a:ext cx="3794760" cy="274320"/>
           </a:xfrm>
           <a:prstGeom prst="rect">
             <a:avLst/>
@@ -20462,29 +21521,73 @@
       </p:sp>
       <p:sp>
         <p:nvSpPr>
-          <p:cNvPr id="23" name="TextBox 22"/>
-          <p:cNvSpPr txBox="1"/>
-          <p:nvPr/>
-        </p:nvSpPr>
-        <p:spPr>
-          <a:xfrm>
-            <a:off x="8412480" y="2331720"/>
-            <a:ext cx="3429000" cy="1645920"/>
-          </a:xfrm>
-          <a:prstGeom prst="rect">
-            <a:avLst/>
-          </a:prstGeom>
-          <a:noFill/>
-        </p:spPr>
-        <p:txBody>
-          <a:bodyPr wrap="square" anchor="ctr">
-            <a:spAutoFit/>
-          </a:bodyPr>
-          <a:lstStyle/>
-          <a:p>
-            <a:pPr algn="ctr"/>
-            <a:r>
-              <a:rPr sz="1100" b="0">
+          <p:cNvPr id="25" name="Rectangle 24"/>
+          <p:cNvSpPr/>
+          <p:nvPr/>
+        </p:nvSpPr>
+        <p:spPr>
+          <a:xfrm>
+            <a:off x="8686800" y="2331720"/>
+            <a:ext cx="2880360" cy="18288"/>
+          </a:xfrm>
+          <a:prstGeom prst="rect">
+            <a:avLst/>
+          </a:prstGeom>
+          <a:solidFill>
+            <a:srgbClr val="10B981"/>
+          </a:solidFill>
+          <a:ln>
+            <a:noFill/>
+          </a:ln>
+          <a:effectLst/>
+        </p:spPr>
+        <p:style>
+          <a:lnRef idx="1">
+            <a:schemeClr val="accent1"/>
+          </a:lnRef>
+          <a:fillRef idx="3">
+            <a:schemeClr val="accent1"/>
+          </a:fillRef>
+          <a:effectRef idx="2">
+            <a:schemeClr val="accent1"/>
+          </a:effectRef>
+          <a:fontRef idx="minor">
+            <a:schemeClr val="lt1"/>
+          </a:fontRef>
+        </p:style>
+        <p:txBody>
+          <a:bodyPr rtlCol="0" anchor="ctr"/>
+          <a:lstStyle/>
+          <a:p>
+            <a:pPr algn="ctr"/>
+          </a:p>
+        </p:txBody>
+      </p:sp>
+      <p:sp>
+        <p:nvSpPr>
+          <p:cNvPr id="26" name="TextBox 25"/>
+          <p:cNvSpPr txBox="1"/>
+          <p:nvPr/>
+        </p:nvSpPr>
+        <p:spPr>
+          <a:xfrm>
+            <a:off x="8412480" y="2468880"/>
+            <a:ext cx="3429000" cy="1463040"/>
+          </a:xfrm>
+          <a:prstGeom prst="rect">
+            <a:avLst/>
+          </a:prstGeom>
+          <a:noFill/>
+        </p:spPr>
+        <p:txBody>
+          <a:bodyPr wrap="square" anchor="t">
+            <a:spAutoFit/>
+          </a:bodyPr>
+          <a:lstStyle/>
+          <a:p>
+            <a:pPr algn="ctr"/>
+            <a:r>
+              <a:rPr sz="1200" b="0">
                 <a:solidFill>
                   <a:srgbClr val="333333"/>
                 </a:solidFill>
@@ -20495,7 +21598,7 @@
           <a:p>
             <a:pPr algn="ctr"/>
             <a:r>
-              <a:rPr sz="1100" b="0">
+              <a:rPr sz="1200" b="0">
                 <a:solidFill>
                   <a:srgbClr val="333333"/>
                 </a:solidFill>
@@ -20506,7 +21609,7 @@
           <a:p>
             <a:pPr algn="ctr"/>
             <a:r>
-              <a:rPr sz="1100" b="0">
+              <a:rPr sz="1200" b="0">
                 <a:solidFill>
                   <a:srgbClr val="333333"/>
                 </a:solidFill>
@@ -20517,7 +21620,7 @@
           <a:p>
             <a:pPr algn="ctr"/>
             <a:r>
-              <a:rPr sz="1100" b="0">
+              <a:rPr sz="1200" b="0">
                 <a:solidFill>
                   <a:srgbClr val="333333"/>
                 </a:solidFill>
@@ -20529,7 +21632,7 @@
       </p:sp>
       <p:sp>
         <p:nvSpPr>
-          <p:cNvPr id="24" name="Rectangle 23"/>
+          <p:cNvPr id="27" name="Rectangle 26"/>
           <p:cNvSpPr/>
           <p:nvPr/>
         </p:nvSpPr>
@@ -20575,7 +21678,7 @@
       </p:sp>
       <p:sp>
         <p:nvSpPr>
-          <p:cNvPr id="25" name="TextBox 24"/>
+          <p:cNvPr id="28" name="TextBox 27"/>
           <p:cNvSpPr txBox="1"/>
           <p:nvPr/>
         </p:nvSpPr>
@@ -20609,7 +21712,7 @@
       </p:sp>
       <p:sp>
         <p:nvSpPr>
-          <p:cNvPr id="26" name="TextBox 25"/>
+          <p:cNvPr id="29" name="TextBox 28"/>
           <p:cNvSpPr txBox="1"/>
           <p:nvPr/>
         </p:nvSpPr>
@@ -20692,7 +21795,7 @@
       </p:sp>
       <p:sp>
         <p:nvSpPr>
-          <p:cNvPr id="27" name="TextBox 26"/>
+          <p:cNvPr id="30" name="TextBox 29"/>
           <p:cNvSpPr txBox="1"/>
           <p:nvPr/>
         </p:nvSpPr>
@@ -20726,7 +21829,7 @@
       </p:sp>
       <p:sp>
         <p:nvSpPr>
-          <p:cNvPr id="28" name="TextBox 27"/>
+          <p:cNvPr id="31" name="TextBox 30"/>
           <p:cNvSpPr txBox="1"/>
           <p:nvPr/>
         </p:nvSpPr>
@@ -20975,7 +22078,7 @@
         <p:spPr>
           <a:xfrm>
             <a:off x="457200" y="1280160"/>
-            <a:ext cx="11247120" cy="3246120"/>
+            <a:ext cx="7452360" cy="3337560"/>
           </a:xfrm>
           <a:prstGeom prst="rect">
             <a:avLst/>
@@ -21021,7 +22124,7 @@
         <p:spPr>
           <a:xfrm>
             <a:off x="640080" y="1417320"/>
-            <a:ext cx="10881360" cy="2971800"/>
+            <a:ext cx="7086600" cy="3063240"/>
           </a:xfrm>
           <a:prstGeom prst="rect">
             <a:avLst/>
@@ -21036,7 +22139,7 @@
           <a:p>
             <a:pPr algn="l"/>
             <a:r>
-              <a:rPr sz="1000" b="0">
+              <a:rPr sz="1100" b="0">
                 <a:solidFill>
                   <a:srgbClr val="E6EDF7"/>
                 </a:solidFill>
@@ -21047,7 +22150,7 @@
           <a:p>
             <a:pPr algn="l"/>
             <a:r>
-              <a:rPr sz="1000" b="0">
+              <a:rPr sz="1100" b="0">
                 <a:solidFill>
                   <a:srgbClr val="E6EDF7"/>
                 </a:solidFill>
@@ -21058,7 +22161,7 @@
           <a:p>
             <a:pPr algn="l"/>
             <a:r>
-              <a:rPr sz="1000" b="0">
+              <a:rPr sz="1100" b="0">
                 <a:solidFill>
                   <a:srgbClr val="E6EDF7"/>
                 </a:solidFill>
@@ -21069,7 +22172,7 @@
           <a:p>
             <a:pPr algn="l"/>
             <a:r>
-              <a:rPr sz="1000" b="0">
+              <a:rPr sz="1100" b="0">
                 <a:solidFill>
                   <a:srgbClr val="E6EDF7"/>
                 </a:solidFill>
@@ -21080,23 +22183,23 @@
           <a:p>
             <a:pPr algn="l"/>
             <a:r>
-              <a:rPr sz="1000" b="0">
+              <a:rPr sz="1100" b="0">
                 <a:solidFill>
                   <a:srgbClr val="E6EDF7"/>
                 </a:solidFill>
               </a:rPr>
-              <a:t>invite them to DM order details if action is needed. Sign off as</a:t>
+              <a:t>invite them to DM order details if action is needed.</a:t>
             </a:r>
           </a:p>
           <a:p>
             <a:pPr algn="l"/>
             <a:r>
-              <a:rPr sz="1000" b="0">
+              <a:rPr sz="1100" b="0">
                 <a:solidFill>
                   <a:srgbClr val="E6EDF7"/>
                 </a:solidFill>
               </a:rPr>
-              <a:t>a real person, not a brand.</a:t>
+              <a:t>Sign off as a real person, not a brand.</a:t>
             </a:r>
           </a:p>
           <a:p>
@@ -21105,7 +22208,7 @@
           <a:p>
             <a:pPr algn="l"/>
             <a:r>
-              <a:rPr sz="1000" b="0">
+              <a:rPr sz="1100" b="0">
                 <a:solidFill>
                   <a:srgbClr val="E6EDF7"/>
                 </a:solidFill>
@@ -21116,7 +22219,7 @@
           <a:p>
             <a:pPr algn="l"/>
             <a:r>
-              <a:rPr sz="1000" b="0">
+              <a:rPr sz="1100" b="0">
                 <a:solidFill>
                   <a:srgbClr val="E6EDF7"/>
                 </a:solidFill>
@@ -21127,91 +22230,500 @@
           <a:p>
             <a:pPr algn="l"/>
             <a:r>
-              <a:rPr sz="1000" b="0">
+              <a:rPr sz="1100" b="0">
                 <a:solidFill>
                   <a:srgbClr val="E6EDF7"/>
                 </a:solidFill>
               </a:rPr>
-              <a:t>Example customer post: {past_post_2}</a:t>
+              <a:t> …  (three example pairs total)</a:t>
             </a:r>
           </a:p>
           <a:p>
             <a:pPr algn="l"/>
-            <a:r>
-              <a:rPr sz="1000" b="0">
+          </a:p>
+          <a:p>
+            <a:pPr algn="l"/>
+            <a:r>
+              <a:rPr sz="1100" b="0">
                 <a:solidFill>
                   <a:srgbClr val="E6EDF7"/>
                 </a:solidFill>
               </a:rPr>
-              <a:t>Example analyst reply: {past_reply_2}</a:t>
+              <a:t>Subreddit: r/{subreddit}</a:t>
             </a:r>
           </a:p>
           <a:p>
             <a:pPr algn="l"/>
+            <a:r>
+              <a:rPr sz="1100" b="0">
+                <a:solidFill>
+                  <a:srgbClr val="E6EDF7"/>
+                </a:solidFill>
+              </a:rPr>
+              <a:t>Customer ({author}) complaint about: {aspect_1}, {aspect_2}</a:t>
+            </a:r>
           </a:p>
           <a:p>
             <a:pPr algn="l"/>
             <a:r>
-              <a:rPr sz="1000" b="0">
+              <a:rPr sz="1100" b="0">
                 <a:solidFill>
                   <a:srgbClr val="E6EDF7"/>
                 </a:solidFill>
               </a:rPr>
-              <a:t>Subreddit: r/{subreddit}</a:t>
+              <a:t>Customer post: {post_title + post_body, ≤ 1200 chars}</a:t>
             </a:r>
           </a:p>
           <a:p>
             <a:pPr algn="l"/>
-            <a:r>
-              <a:rPr sz="1000" b="0">
+          </a:p>
+          <a:p>
+            <a:pPr algn="l"/>
+            <a:r>
+              <a:rPr sz="1100" b="0">
                 <a:solidFill>
                   <a:srgbClr val="E6EDF7"/>
                 </a:solidFill>
               </a:rPr>
-              <a:t>Customer ({author}) complaint about: {aspect_1}, {aspect_2}</a:t>
-            </a:r>
-          </a:p>
+              <a:t>Reply:</a:t>
+            </a:r>
+          </a:p>
+        </p:txBody>
+      </p:sp>
+      <p:sp>
+        <p:nvSpPr>
+          <p:cNvPr id="9" name="Rectangle 8"/>
+          <p:cNvSpPr/>
+          <p:nvPr/>
+        </p:nvSpPr>
+        <p:spPr>
+          <a:xfrm>
+            <a:off x="8138160" y="1280160"/>
+            <a:ext cx="3566160" cy="3337560"/>
+          </a:xfrm>
+          <a:prstGeom prst="rect">
+            <a:avLst/>
+          </a:prstGeom>
+          <a:solidFill>
+            <a:srgbClr val="E8F4FD"/>
+          </a:solidFill>
+          <a:ln>
+            <a:solidFill>
+              <a:srgbClr val="0071DC"/>
+            </a:solidFill>
+          </a:ln>
+          <a:effectLst/>
+        </p:spPr>
+        <p:style>
+          <a:lnRef idx="1">
+            <a:schemeClr val="accent1"/>
+          </a:lnRef>
+          <a:fillRef idx="3">
+            <a:schemeClr val="accent1"/>
+          </a:fillRef>
+          <a:effectRef idx="2">
+            <a:schemeClr val="accent1"/>
+          </a:effectRef>
+          <a:fontRef idx="minor">
+            <a:schemeClr val="lt1"/>
+          </a:fontRef>
+        </p:style>
+        <p:txBody>
+          <a:bodyPr rtlCol="0" anchor="ctr"/>
+          <a:lstStyle/>
+          <a:p>
+            <a:pPr algn="ctr"/>
+          </a:p>
+        </p:txBody>
+      </p:sp>
+      <p:sp>
+        <p:nvSpPr>
+          <p:cNvPr id="10" name="TextBox 9"/>
+          <p:cNvSpPr txBox="1"/>
+          <p:nvPr/>
+        </p:nvSpPr>
+        <p:spPr>
+          <a:xfrm>
+            <a:off x="8321040" y="1389888"/>
+            <a:ext cx="3200400" cy="320040"/>
+          </a:xfrm>
+          <a:prstGeom prst="rect">
+            <a:avLst/>
+          </a:prstGeom>
+          <a:noFill/>
+        </p:spPr>
+        <p:txBody>
+          <a:bodyPr wrap="square" anchor="t">
+            <a:spAutoFit/>
+          </a:bodyPr>
+          <a:lstStyle/>
           <a:p>
             <a:pPr algn="l"/>
             <a:r>
-              <a:rPr sz="1000" b="0">
-                <a:solidFill>
-                  <a:srgbClr val="E6EDF7"/>
-                </a:solidFill>
-              </a:rPr>
-              <a:t>Customer post:</a:t>
-            </a:r>
-          </a:p>
+              <a:rPr sz="1100" b="1">
+                <a:solidFill>
+                  <a:srgbClr val="0071DC"/>
+                </a:solidFill>
+              </a:rPr>
+              <a:t>PROMPT ANATOMY</a:t>
+            </a:r>
+          </a:p>
+        </p:txBody>
+      </p:sp>
+      <p:sp>
+        <p:nvSpPr>
+          <p:cNvPr id="11" name="TextBox 10"/>
+          <p:cNvSpPr txBox="1"/>
+          <p:nvPr/>
+        </p:nvSpPr>
+        <p:spPr>
+          <a:xfrm>
+            <a:off x="8321040" y="1783080"/>
+            <a:ext cx="3200400" cy="182880"/>
+          </a:xfrm>
+          <a:prstGeom prst="rect">
+            <a:avLst/>
+          </a:prstGeom>
+          <a:noFill/>
+        </p:spPr>
+        <p:txBody>
+          <a:bodyPr wrap="square" anchor="t">
+            <a:spAutoFit/>
+          </a:bodyPr>
+          <a:lstStyle/>
           <a:p>
             <a:pPr algn="l"/>
             <a:r>
-              <a:rPr sz="1000" b="0">
-                <a:solidFill>
-                  <a:srgbClr val="E6EDF7"/>
-                </a:solidFill>
-              </a:rPr>
-              <a:t>{post_title + post_body, ≤ 1200 chars}</a:t>
-            </a:r>
-          </a:p>
+              <a:rPr sz="1000" b="1">
+                <a:solidFill>
+                  <a:srgbClr val="0071DC"/>
+                </a:solidFill>
+              </a:rPr>
+              <a:t>① SYSTEM ROLE</a:t>
+            </a:r>
+          </a:p>
+        </p:txBody>
+      </p:sp>
+      <p:sp>
+        <p:nvSpPr>
+          <p:cNvPr id="12" name="TextBox 11"/>
+          <p:cNvSpPr txBox="1"/>
+          <p:nvPr/>
+        </p:nvSpPr>
+        <p:spPr>
+          <a:xfrm>
+            <a:off x="8321040" y="1984248"/>
+            <a:ext cx="3200400" cy="320040"/>
+          </a:xfrm>
+          <a:prstGeom prst="rect">
+            <a:avLst/>
+          </a:prstGeom>
+          <a:noFill/>
+        </p:spPr>
+        <p:txBody>
+          <a:bodyPr wrap="square" anchor="t">
+            <a:spAutoFit/>
+          </a:bodyPr>
+          <a:lstStyle/>
           <a:p>
             <a:pPr algn="l"/>
-          </a:p>
+            <a:r>
+              <a:rPr sz="900" b="0">
+                <a:solidFill>
+                  <a:srgbClr val="333333"/>
+                </a:solidFill>
+              </a:rPr>
+              <a:t>who the model is + tone rules</a:t>
+            </a:r>
+          </a:p>
+        </p:txBody>
+      </p:sp>
+      <p:sp>
+        <p:nvSpPr>
+          <p:cNvPr id="13" name="TextBox 12"/>
+          <p:cNvSpPr txBox="1"/>
+          <p:nvPr/>
+        </p:nvSpPr>
+        <p:spPr>
+          <a:xfrm>
+            <a:off x="8321040" y="2313432"/>
+            <a:ext cx="3200400" cy="182880"/>
+          </a:xfrm>
+          <a:prstGeom prst="rect">
+            <a:avLst/>
+          </a:prstGeom>
+          <a:noFill/>
+        </p:spPr>
+        <p:txBody>
+          <a:bodyPr wrap="square" anchor="t">
+            <a:spAutoFit/>
+          </a:bodyPr>
+          <a:lstStyle/>
           <a:p>
             <a:pPr algn="l"/>
             <a:r>
-              <a:rPr sz="1000" b="0">
-                <a:solidFill>
-                  <a:srgbClr val="E6EDF7"/>
-                </a:solidFill>
-              </a:rPr>
-              <a:t>Reply:</a:t>
-            </a:r>
-          </a:p>
-        </p:txBody>
-      </p:sp>
-      <p:sp>
-        <p:nvSpPr>
-          <p:cNvPr id="9" name="Rectangle 8"/>
+              <a:rPr sz="1000" b="1">
+                <a:solidFill>
+                  <a:srgbClr val="7C3AED"/>
+                </a:solidFill>
+              </a:rPr>
+              <a:t>② FEW-SHOT</a:t>
+            </a:r>
+          </a:p>
+        </p:txBody>
+      </p:sp>
+      <p:sp>
+        <p:nvSpPr>
+          <p:cNvPr id="14" name="TextBox 13"/>
+          <p:cNvSpPr txBox="1"/>
+          <p:nvPr/>
+        </p:nvSpPr>
+        <p:spPr>
+          <a:xfrm>
+            <a:off x="8321040" y="2514600"/>
+            <a:ext cx="3200400" cy="320040"/>
+          </a:xfrm>
+          <a:prstGeom prst="rect">
+            <a:avLst/>
+          </a:prstGeom>
+          <a:noFill/>
+        </p:spPr>
+        <p:txBody>
+          <a:bodyPr wrap="square" anchor="t">
+            <a:spAutoFit/>
+          </a:bodyPr>
+          <a:lstStyle/>
+          <a:p>
+            <a:pPr algn="l"/>
+            <a:r>
+              <a:rPr sz="900" b="0">
+                <a:solidFill>
+                  <a:srgbClr val="333333"/>
+                </a:solidFill>
+              </a:rPr>
+              <a:t>3 past validated reply pairs</a:t>
+            </a:r>
+          </a:p>
+          <a:p>
+            <a:pPr algn="l"/>
+            <a:r>
+              <a:rPr sz="900" b="0">
+                <a:solidFill>
+                  <a:srgbClr val="333333"/>
+                </a:solidFill>
+              </a:rPr>
+              <a:t>from the feedback table</a:t>
+            </a:r>
+          </a:p>
+        </p:txBody>
+      </p:sp>
+      <p:sp>
+        <p:nvSpPr>
+          <p:cNvPr id="15" name="TextBox 14"/>
+          <p:cNvSpPr txBox="1"/>
+          <p:nvPr/>
+        </p:nvSpPr>
+        <p:spPr>
+          <a:xfrm>
+            <a:off x="8321040" y="2843784"/>
+            <a:ext cx="3200400" cy="182880"/>
+          </a:xfrm>
+          <a:prstGeom prst="rect">
+            <a:avLst/>
+          </a:prstGeom>
+          <a:noFill/>
+        </p:spPr>
+        <p:txBody>
+          <a:bodyPr wrap="square" anchor="t">
+            <a:spAutoFit/>
+          </a:bodyPr>
+          <a:lstStyle/>
+          <a:p>
+            <a:pPr algn="l"/>
+            <a:r>
+              <a:rPr sz="1000" b="1">
+                <a:solidFill>
+                  <a:srgbClr val="D97706"/>
+                </a:solidFill>
+              </a:rPr>
+              <a:t>③ CONTEXT</a:t>
+            </a:r>
+          </a:p>
+        </p:txBody>
+      </p:sp>
+      <p:sp>
+        <p:nvSpPr>
+          <p:cNvPr id="16" name="TextBox 15"/>
+          <p:cNvSpPr txBox="1"/>
+          <p:nvPr/>
+        </p:nvSpPr>
+        <p:spPr>
+          <a:xfrm>
+            <a:off x="8321040" y="3044952"/>
+            <a:ext cx="3200400" cy="320040"/>
+          </a:xfrm>
+          <a:prstGeom prst="rect">
+            <a:avLst/>
+          </a:prstGeom>
+          <a:noFill/>
+        </p:spPr>
+        <p:txBody>
+          <a:bodyPr wrap="square" anchor="t">
+            <a:spAutoFit/>
+          </a:bodyPr>
+          <a:lstStyle/>
+          <a:p>
+            <a:pPr algn="l"/>
+            <a:r>
+              <a:rPr sz="900" b="0">
+                <a:solidFill>
+                  <a:srgbClr val="333333"/>
+                </a:solidFill>
+              </a:rPr>
+              <a:t>subreddit · author · top-2 aspects</a:t>
+            </a:r>
+          </a:p>
+        </p:txBody>
+      </p:sp>
+      <p:sp>
+        <p:nvSpPr>
+          <p:cNvPr id="17" name="TextBox 16"/>
+          <p:cNvSpPr txBox="1"/>
+          <p:nvPr/>
+        </p:nvSpPr>
+        <p:spPr>
+          <a:xfrm>
+            <a:off x="8321040" y="3374136"/>
+            <a:ext cx="3200400" cy="182880"/>
+          </a:xfrm>
+          <a:prstGeom prst="rect">
+            <a:avLst/>
+          </a:prstGeom>
+          <a:noFill/>
+        </p:spPr>
+        <p:txBody>
+          <a:bodyPr wrap="square" anchor="t">
+            <a:spAutoFit/>
+          </a:bodyPr>
+          <a:lstStyle/>
+          <a:p>
+            <a:pPr algn="l"/>
+            <a:r>
+              <a:rPr sz="1000" b="1">
+                <a:solidFill>
+                  <a:srgbClr val="10B981"/>
+                </a:solidFill>
+              </a:rPr>
+              <a:t>④ POST</a:t>
+            </a:r>
+          </a:p>
+        </p:txBody>
+      </p:sp>
+      <p:sp>
+        <p:nvSpPr>
+          <p:cNvPr id="18" name="TextBox 17"/>
+          <p:cNvSpPr txBox="1"/>
+          <p:nvPr/>
+        </p:nvSpPr>
+        <p:spPr>
+          <a:xfrm>
+            <a:off x="8321040" y="3575304"/>
+            <a:ext cx="3200400" cy="320040"/>
+          </a:xfrm>
+          <a:prstGeom prst="rect">
+            <a:avLst/>
+          </a:prstGeom>
+          <a:noFill/>
+        </p:spPr>
+        <p:txBody>
+          <a:bodyPr wrap="square" anchor="t">
+            <a:spAutoFit/>
+          </a:bodyPr>
+          <a:lstStyle/>
+          <a:p>
+            <a:pPr algn="l"/>
+            <a:r>
+              <a:rPr sz="900" b="0">
+                <a:solidFill>
+                  <a:srgbClr val="333333"/>
+                </a:solidFill>
+              </a:rPr>
+              <a:t>title + body,  truncated to 1 200 chars</a:t>
+            </a:r>
+          </a:p>
+        </p:txBody>
+      </p:sp>
+      <p:sp>
+        <p:nvSpPr>
+          <p:cNvPr id="19" name="TextBox 18"/>
+          <p:cNvSpPr txBox="1"/>
+          <p:nvPr/>
+        </p:nvSpPr>
+        <p:spPr>
+          <a:xfrm>
+            <a:off x="8321040" y="3904488"/>
+            <a:ext cx="3200400" cy="182880"/>
+          </a:xfrm>
+          <a:prstGeom prst="rect">
+            <a:avLst/>
+          </a:prstGeom>
+          <a:noFill/>
+        </p:spPr>
+        <p:txBody>
+          <a:bodyPr wrap="square" anchor="t">
+            <a:spAutoFit/>
+          </a:bodyPr>
+          <a:lstStyle/>
+          <a:p>
+            <a:pPr algn="l"/>
+            <a:r>
+              <a:rPr sz="1000" b="1">
+                <a:solidFill>
+                  <a:srgbClr val="EF4444"/>
+                </a:solidFill>
+              </a:rPr>
+              <a:t>⑤ TRIGGER</a:t>
+            </a:r>
+          </a:p>
+        </p:txBody>
+      </p:sp>
+      <p:sp>
+        <p:nvSpPr>
+          <p:cNvPr id="20" name="TextBox 19"/>
+          <p:cNvSpPr txBox="1"/>
+          <p:nvPr/>
+        </p:nvSpPr>
+        <p:spPr>
+          <a:xfrm>
+            <a:off x="8321040" y="4105656"/>
+            <a:ext cx="3200400" cy="320040"/>
+          </a:xfrm>
+          <a:prstGeom prst="rect">
+            <a:avLst/>
+          </a:prstGeom>
+          <a:noFill/>
+        </p:spPr>
+        <p:txBody>
+          <a:bodyPr wrap="square" anchor="t">
+            <a:spAutoFit/>
+          </a:bodyPr>
+          <a:lstStyle/>
+          <a:p>
+            <a:pPr algn="l"/>
+            <a:r>
+              <a:rPr sz="900" b="0">
+                <a:solidFill>
+                  <a:srgbClr val="333333"/>
+                </a:solidFill>
+              </a:rPr>
+              <a:t>"Reply:"  cues the model to generate</a:t>
+            </a:r>
+          </a:p>
+        </p:txBody>
+      </p:sp>
+      <p:sp>
+        <p:nvSpPr>
+          <p:cNvPr id="21" name="Rectangle 20"/>
           <p:cNvSpPr/>
           <p:nvPr/>
         </p:nvSpPr>
@@ -21257,7 +22769,7 @@
       </p:sp>
       <p:sp>
         <p:nvSpPr>
-          <p:cNvPr id="10" name="TextBox 9"/>
+          <p:cNvPr id="22" name="TextBox 21"/>
           <p:cNvSpPr txBox="1"/>
           <p:nvPr/>
         </p:nvSpPr>
@@ -21291,7 +22803,7 @@
       </p:sp>
       <p:sp>
         <p:nvSpPr>
-          <p:cNvPr id="11" name="TextBox 10"/>
+          <p:cNvPr id="23" name="TextBox 22"/>
           <p:cNvSpPr txBox="1"/>
           <p:nvPr/>
         </p:nvSpPr>
@@ -21359,7 +22871,7 @@
       </p:sp>
       <p:sp>
         <p:nvSpPr>
-          <p:cNvPr id="12" name="Rectangle 11"/>
+          <p:cNvPr id="24" name="Rectangle 23"/>
           <p:cNvSpPr/>
           <p:nvPr/>
         </p:nvSpPr>
@@ -21405,7 +22917,7 @@
       </p:sp>
       <p:sp>
         <p:nvSpPr>
-          <p:cNvPr id="13" name="TextBox 12"/>
+          <p:cNvPr id="25" name="TextBox 24"/>
           <p:cNvSpPr txBox="1"/>
           <p:nvPr/>
         </p:nvSpPr>
@@ -21439,7 +22951,7 @@
       </p:sp>
       <p:sp>
         <p:nvSpPr>
-          <p:cNvPr id="14" name="TextBox 13"/>
+          <p:cNvPr id="26" name="TextBox 25"/>
           <p:cNvSpPr txBox="1"/>
           <p:nvPr/>
         </p:nvSpPr>
@@ -21522,7 +23034,7 @@
       </p:sp>
       <p:sp>
         <p:nvSpPr>
-          <p:cNvPr id="15" name="TextBox 14"/>
+          <p:cNvPr id="27" name="TextBox 26"/>
           <p:cNvSpPr txBox="1"/>
           <p:nvPr/>
         </p:nvSpPr>
@@ -21556,7 +23068,7 @@
       </p:sp>
       <p:sp>
         <p:nvSpPr>
-          <p:cNvPr id="16" name="TextBox 15"/>
+          <p:cNvPr id="28" name="TextBox 27"/>
           <p:cNvSpPr txBox="1"/>
           <p:nvPr/>
         </p:nvSpPr>
@@ -21988,7 +23500,7 @@
         <p:spPr>
           <a:xfrm>
             <a:off x="365760" y="2788920"/>
-            <a:ext cx="3794760" cy="2880360"/>
+            <a:ext cx="3794760" cy="2423160"/>
           </a:xfrm>
           <a:prstGeom prst="rect">
             <a:avLst/>
@@ -22111,8 +23623,8 @@
         </p:nvSpPr>
         <p:spPr>
           <a:xfrm>
-            <a:off x="502920" y="3246120"/>
-            <a:ext cx="3520440" cy="2331720"/>
+            <a:off x="502920" y="3264408"/>
+            <a:ext cx="3520440" cy="1874520"/>
           </a:xfrm>
           <a:prstGeom prst="rect">
             <a:avLst/>
@@ -22127,7 +23639,7 @@
           <a:p>
             <a:pPr algn="l"/>
             <a:r>
-              <a:rPr sz="900" b="0">
+              <a:rPr sz="1000" b="0">
                 <a:solidFill>
                   <a:srgbClr val="333333"/>
                 </a:solidFill>
@@ -22146,7 +23658,7 @@
         <p:spPr>
           <a:xfrm>
             <a:off x="4297680" y="2788920"/>
-            <a:ext cx="3794760" cy="2880360"/>
+            <a:ext cx="3794760" cy="2423160"/>
           </a:xfrm>
           <a:prstGeom prst="rect">
             <a:avLst/>
@@ -22269,8 +23781,8 @@
         </p:nvSpPr>
         <p:spPr>
           <a:xfrm>
-            <a:off x="4434840" y="3246120"/>
-            <a:ext cx="3520440" cy="2331720"/>
+            <a:off x="4434840" y="3264408"/>
+            <a:ext cx="3520440" cy="1874520"/>
           </a:xfrm>
           <a:prstGeom prst="rect">
             <a:avLst/>
@@ -22285,7 +23797,7 @@
           <a:p>
             <a:pPr algn="l"/>
             <a:r>
-              <a:rPr sz="900" b="0">
+              <a:rPr sz="1000" b="0">
                 <a:solidFill>
                   <a:srgbClr val="333333"/>
                 </a:solidFill>
@@ -22304,7 +23816,7 @@
         <p:spPr>
           <a:xfrm>
             <a:off x="8229600" y="2788920"/>
-            <a:ext cx="3794760" cy="2880360"/>
+            <a:ext cx="3794760" cy="2423160"/>
           </a:xfrm>
           <a:prstGeom prst="rect">
             <a:avLst/>
@@ -22427,8 +23939,8 @@
         </p:nvSpPr>
         <p:spPr>
           <a:xfrm>
-            <a:off x="8366760" y="3246120"/>
-            <a:ext cx="3520440" cy="2331720"/>
+            <a:off x="8366760" y="3264408"/>
+            <a:ext cx="3520440" cy="1874520"/>
           </a:xfrm>
           <a:prstGeom prst="rect">
             <a:avLst/>
@@ -22443,7 +23955,7 @@
           <a:p>
             <a:pPr algn="l"/>
             <a:r>
-              <a:rPr sz="900" b="0">
+              <a:rPr sz="1000" b="0">
                 <a:solidFill>
                   <a:srgbClr val="333333"/>
                 </a:solidFill>
@@ -22461,8 +23973,8 @@
         </p:nvSpPr>
         <p:spPr>
           <a:xfrm>
-            <a:off x="457200" y="5806440"/>
-            <a:ext cx="11247120" cy="548640"/>
+            <a:off x="457200" y="5394960"/>
+            <a:ext cx="11247120" cy="960120"/>
           </a:xfrm>
           <a:prstGeom prst="rect">
             <a:avLst/>
@@ -22507,23 +24019,57 @@
         </p:nvSpPr>
         <p:spPr>
           <a:xfrm>
-            <a:off x="640080" y="5852160"/>
-            <a:ext cx="10972800" cy="457200"/>
-          </a:xfrm>
-          <a:prstGeom prst="rect">
-            <a:avLst/>
-          </a:prstGeom>
-          <a:noFill/>
-        </p:spPr>
-        <p:txBody>
-          <a:bodyPr wrap="square" anchor="ctr">
+            <a:off x="640080" y="5468112"/>
+            <a:ext cx="10972800" cy="320040"/>
+          </a:xfrm>
+          <a:prstGeom prst="rect">
+            <a:avLst/>
+          </a:prstGeom>
+          <a:noFill/>
+        </p:spPr>
+        <p:txBody>
+          <a:bodyPr wrap="square" anchor="t">
             <a:spAutoFit/>
           </a:bodyPr>
           <a:lstStyle/>
           <a:p>
             <a:pPr algn="l"/>
             <a:r>
-              <a:rPr sz="1000" b="0">
+              <a:rPr sz="1100" b="1">
+                <a:solidFill>
+                  <a:srgbClr val="0071DC"/>
+                </a:solidFill>
+              </a:rPr>
+              <a:t>WHAT HAPPENS NEXT</a:t>
+            </a:r>
+          </a:p>
+        </p:txBody>
+      </p:sp>
+      <p:sp>
+        <p:nvSpPr>
+          <p:cNvPr id="26" name="TextBox 25"/>
+          <p:cNvSpPr txBox="1"/>
+          <p:nvPr/>
+        </p:nvSpPr>
+        <p:spPr>
+          <a:xfrm>
+            <a:off x="640080" y="5760720"/>
+            <a:ext cx="10972800" cy="548640"/>
+          </a:xfrm>
+          <a:prstGeom prst="rect">
+            <a:avLst/>
+          </a:prstGeom>
+          <a:noFill/>
+        </p:spPr>
+        <p:txBody>
+          <a:bodyPr wrap="square" anchor="t">
+            <a:spAutoFit/>
+          </a:bodyPr>
+          <a:lstStyle/>
+          <a:p>
+            <a:pPr algn="l"/>
+            <a:r>
+              <a:rPr sz="1100" b="0">
                 <a:solidFill>
                   <a:srgbClr val="333333"/>
                 </a:solidFill>
@@ -22535,7 +24081,7 @@
       </p:sp>
       <p:sp>
         <p:nvSpPr>
-          <p:cNvPr id="26" name="TextBox 25"/>
+          <p:cNvPr id="27" name="TextBox 26"/>
           <p:cNvSpPr txBox="1"/>
           <p:nvPr/>
         </p:nvSpPr>
@@ -22569,7 +24115,7 @@
       </p:sp>
       <p:sp>
         <p:nvSpPr>
-          <p:cNvPr id="27" name="TextBox 26"/>
+          <p:cNvPr id="28" name="TextBox 27"/>
           <p:cNvSpPr txBox="1"/>
           <p:nvPr/>
         </p:nvSpPr>
@@ -24207,7 +25753,7 @@
         </p:nvSpPr>
         <p:spPr>
           <a:xfrm>
-            <a:off x="457200" y="960120"/>
+            <a:off x="457200" y="914400"/>
             <a:ext cx="5486400" cy="320040"/>
           </a:xfrm>
           <a:prstGeom prst="rect">
@@ -24223,12 +25769,12 @@
           <a:p>
             <a:pPr algn="l"/>
             <a:r>
-              <a:rPr sz="1300" b="1">
-                <a:solidFill>
-                  <a:srgbClr val="041E42"/>
-                </a:solidFill>
-              </a:rPr>
-              <a:t>Facets</a:t>
+              <a:rPr sz="1100" b="1">
+                <a:solidFill>
+                  <a:srgbClr val="0071DC"/>
+                </a:solidFill>
+              </a:rPr>
+              <a:t>FACETS</a:t>
             </a:r>
           </a:p>
         </p:txBody>
@@ -24241,8 +25787,8 @@
         </p:nvSpPr>
         <p:spPr>
           <a:xfrm>
-            <a:off x="457200" y="1280160"/>
-            <a:ext cx="5486400" cy="3474720"/>
+            <a:off x="457200" y="1234440"/>
+            <a:ext cx="5486400" cy="2468880"/>
           </a:xfrm>
           <a:prstGeom prst="rect">
             <a:avLst/>
@@ -24377,7 +25923,7 @@
         </p:blipFill>
         <p:spPr>
           <a:xfrm>
-            <a:off x="6172200" y="960120"/>
+            <a:off x="6172200" y="914400"/>
             <a:ext cx="5669280" cy="3543300"/>
           </a:xfrm>
           <a:prstGeom prst="rect">
@@ -24393,8 +25939,8 @@
         </p:nvSpPr>
         <p:spPr>
           <a:xfrm>
-            <a:off x="457200" y="5074920"/>
-            <a:ext cx="11247120" cy="1234440"/>
+            <a:off x="457200" y="3840480"/>
+            <a:ext cx="5486400" cy="1371600"/>
           </a:xfrm>
           <a:prstGeom prst="rect">
             <a:avLst/>
@@ -24439,8 +25985,8 @@
         </p:nvSpPr>
         <p:spPr>
           <a:xfrm>
-            <a:off x="640080" y="5212080"/>
-            <a:ext cx="10972800" cy="320040"/>
+            <a:off x="640080" y="3950208"/>
+            <a:ext cx="5120640" cy="320040"/>
           </a:xfrm>
           <a:prstGeom prst="rect">
             <a:avLst/>
@@ -24455,12 +26001,12 @@
           <a:p>
             <a:pPr algn="l"/>
             <a:r>
-              <a:rPr sz="1200" b="1">
-                <a:solidFill>
-                  <a:srgbClr val="041E42"/>
-                </a:solidFill>
-              </a:rPr>
-              <a:t>Per-post card</a:t>
+              <a:rPr sz="1100" b="1">
+                <a:solidFill>
+                  <a:srgbClr val="0071DC"/>
+                </a:solidFill>
+              </a:rPr>
+              <a:t>PER-POST CARD</a:t>
             </a:r>
           </a:p>
         </p:txBody>
@@ -24473,8 +26019,8 @@
         </p:nvSpPr>
         <p:spPr>
           <a:xfrm>
-            <a:off x="640080" y="5532120"/>
-            <a:ext cx="10972800" cy="731520"/>
+            <a:off x="640080" y="4251960"/>
+            <a:ext cx="5120640" cy="914400"/>
           </a:xfrm>
           <a:prstGeom prst="rect">
             <a:avLst/>
@@ -24494,14 +26040,128 @@
                   <a:srgbClr val="333333"/>
                 </a:solidFill>
               </a:rPr>
-              <a:t>Title + body excerpt · sentiment badge with confidence % · trust tier (H / M / L) · aspect chips · subreddit + timestamp · actions:  Review  ·  Add to Lifecycle  ·  View Details.</a:t>
-            </a:r>
-          </a:p>
-        </p:txBody>
-      </p:sp>
-      <p:sp>
-        <p:nvSpPr>
-          <p:cNvPr id="12" name="TextBox 11"/>
+              <a:t>Title + body excerpt  ·  sentiment badge with confidence %  ·  trust tier (H / M / L)  ·  aspect chips  ·  subreddit + timestamp  ·  actions:  Review · Add to Lifecycle · View Details.</a:t>
+            </a:r>
+          </a:p>
+        </p:txBody>
+      </p:sp>
+      <p:sp>
+        <p:nvSpPr>
+          <p:cNvPr id="12" name="Rectangle 11"/>
+          <p:cNvSpPr/>
+          <p:nvPr/>
+        </p:nvSpPr>
+        <p:spPr>
+          <a:xfrm>
+            <a:off x="457200" y="5349240"/>
+            <a:ext cx="5486400" cy="1051560"/>
+          </a:xfrm>
+          <a:prstGeom prst="rect">
+            <a:avLst/>
+          </a:prstGeom>
+          <a:solidFill>
+            <a:srgbClr val="E8F4FD"/>
+          </a:solidFill>
+          <a:ln>
+            <a:solidFill>
+              <a:srgbClr val="0071DC"/>
+            </a:solidFill>
+          </a:ln>
+          <a:effectLst/>
+        </p:spPr>
+        <p:style>
+          <a:lnRef idx="1">
+            <a:schemeClr val="accent1"/>
+          </a:lnRef>
+          <a:fillRef idx="3">
+            <a:schemeClr val="accent1"/>
+          </a:fillRef>
+          <a:effectRef idx="2">
+            <a:schemeClr val="accent1"/>
+          </a:effectRef>
+          <a:fontRef idx="minor">
+            <a:schemeClr val="lt1"/>
+          </a:fontRef>
+        </p:style>
+        <p:txBody>
+          <a:bodyPr rtlCol="0" anchor="ctr"/>
+          <a:lstStyle/>
+          <a:p>
+            <a:pPr algn="ctr"/>
+          </a:p>
+        </p:txBody>
+      </p:sp>
+      <p:sp>
+        <p:nvSpPr>
+          <p:cNvPr id="13" name="TextBox 12"/>
+          <p:cNvSpPr txBox="1"/>
+          <p:nvPr/>
+        </p:nvSpPr>
+        <p:spPr>
+          <a:xfrm>
+            <a:off x="640080" y="5440680"/>
+            <a:ext cx="5120640" cy="320040"/>
+          </a:xfrm>
+          <a:prstGeom prst="rect">
+            <a:avLst/>
+          </a:prstGeom>
+          <a:noFill/>
+        </p:spPr>
+        <p:txBody>
+          <a:bodyPr wrap="square" anchor="t">
+            <a:spAutoFit/>
+          </a:bodyPr>
+          <a:lstStyle/>
+          <a:p>
+            <a:pPr algn="l"/>
+            <a:r>
+              <a:rPr sz="1100" b="1">
+                <a:solidFill>
+                  <a:srgbClr val="0071DC"/>
+                </a:solidFill>
+              </a:rPr>
+              <a:t>CATALOG TODAY  (live capture)</a:t>
+            </a:r>
+          </a:p>
+        </p:txBody>
+      </p:sp>
+      <p:sp>
+        <p:nvSpPr>
+          <p:cNvPr id="14" name="TextBox 13"/>
+          <p:cNvSpPr txBox="1"/>
+          <p:nvPr/>
+        </p:nvSpPr>
+        <p:spPr>
+          <a:xfrm>
+            <a:off x="640080" y="5742432"/>
+            <a:ext cx="5120640" cy="640080"/>
+          </a:xfrm>
+          <a:prstGeom prst="rect">
+            <a:avLst/>
+          </a:prstGeom>
+          <a:noFill/>
+        </p:spPr>
+        <p:txBody>
+          <a:bodyPr wrap="square" anchor="t">
+            <a:spAutoFit/>
+          </a:bodyPr>
+          <a:lstStyle/>
+          <a:p>
+            <a:pPr algn="l"/>
+            <a:r>
+              <a:rPr sz="1100" b="0">
+                <a:solidFill>
+                  <a:srgbClr val="333333"/>
+                </a:solidFill>
+              </a:rPr>
+              <a:t>83 006 analysed posts  ·  25 subreddits  ·  8 aspects  ·  results paginated at 50 / query.</a:t>
+            </a:r>
+          </a:p>
+        </p:txBody>
+      </p:sp>
+      <p:sp>
+        <p:nvSpPr>
+          <p:cNvPr id="15" name="TextBox 14"/>
           <p:cNvSpPr txBox="1"/>
           <p:nvPr/>
         </p:nvSpPr>
@@ -24535,7 +26195,7 @@
       </p:sp>
       <p:sp>
         <p:nvSpPr>
-          <p:cNvPr id="13" name="TextBox 12"/>
+          <p:cNvPr id="16" name="TextBox 15"/>
           <p:cNvSpPr txBox="1"/>
           <p:nvPr/>
         </p:nvSpPr>

--- a/docs/Sem_4/FINAL_PRESENTATION_VishalSingh_2020AA05641.pptx
+++ b/docs/Sem_4/FINAL_PRESENTATION_VishalSingh_2020AA05641.pptx
@@ -17019,7 +17019,7 @@
                   <a:srgbClr val="FFFFFF"/>
                 </a:solidFill>
               </a:rPr>
-              <a:t>Future Work  —  Grounded 3-Horizon Roadmap</a:t>
+              <a:t>Future Work  —  4-Horizon Roadmap</a:t>
             </a:r>
           </a:p>
         </p:txBody>
@@ -17053,7 +17053,7 @@
                   <a:srgbClr val="E8F4FD"/>
                 </a:solidFill>
               </a:rPr>
-              <a:t>Only items with clear next steps; not a wishlist</a:t>
+              <a:t>From today's HITL to a Walmart-trained, mostly-autonomous replier</a:t>
             </a:r>
           </a:p>
         </p:txBody>
@@ -17110,8 +17110,8 @@
         </p:nvSpPr>
         <p:spPr>
           <a:xfrm>
-            <a:off x="457200" y="1051560"/>
-            <a:ext cx="11247120" cy="1143000"/>
+            <a:off x="457200" y="960120"/>
+            <a:ext cx="11247120" cy="1051560"/>
           </a:xfrm>
           <a:prstGeom prst="rect">
             <a:avLst/>
@@ -17156,8 +17156,8 @@
         </p:nvSpPr>
         <p:spPr>
           <a:xfrm>
-            <a:off x="457200" y="1051560"/>
-            <a:ext cx="228600" cy="1143000"/>
+            <a:off x="457200" y="960120"/>
+            <a:ext cx="1600200" cy="1051560"/>
           </a:xfrm>
           <a:prstGeom prst="rect">
             <a:avLst/>
@@ -17200,8 +17200,8 @@
         </p:nvSpPr>
         <p:spPr>
           <a:xfrm>
-            <a:off x="822960" y="1161288"/>
-            <a:ext cx="10424160" cy="365760"/>
+            <a:off x="457200" y="1106424"/>
+            <a:ext cx="1600200" cy="365760"/>
           </a:xfrm>
           <a:prstGeom prst="rect">
             <a:avLst/>
@@ -17214,28 +17214,96 @@
           </a:bodyPr>
           <a:lstStyle/>
           <a:p>
+            <a:pPr algn="ctr"/>
+            <a:r>
+              <a:rPr sz="1100" b="1">
+                <a:solidFill>
+                  <a:srgbClr val="FFFFFF"/>
+                </a:solidFill>
+              </a:rPr>
+              <a:t>Now → 1 month</a:t>
+            </a:r>
+          </a:p>
+        </p:txBody>
+      </p:sp>
+      <p:sp>
+        <p:nvSpPr>
+          <p:cNvPr id="9" name="TextBox 8"/>
+          <p:cNvSpPr txBox="1"/>
+          <p:nvPr/>
+        </p:nvSpPr>
+        <p:spPr>
+          <a:xfrm>
+            <a:off x="457200" y="1463040"/>
+            <a:ext cx="1600200" cy="457200"/>
+          </a:xfrm>
+          <a:prstGeom prst="rect">
+            <a:avLst/>
+          </a:prstGeom>
+          <a:noFill/>
+        </p:spPr>
+        <p:txBody>
+          <a:bodyPr wrap="square" anchor="t">
+            <a:spAutoFit/>
+          </a:bodyPr>
+          <a:lstStyle/>
+          <a:p>
+            <a:pPr algn="ctr"/>
+            <a:r>
+              <a:rPr sz="1000" b="0">
+                <a:solidFill>
+                  <a:srgbClr val="FFFFFF"/>
+                </a:solidFill>
+              </a:rPr>
+              <a:t>HITL: 100 %</a:t>
+            </a:r>
+          </a:p>
+        </p:txBody>
+      </p:sp>
+      <p:sp>
+        <p:nvSpPr>
+          <p:cNvPr id="10" name="TextBox 9"/>
+          <p:cNvSpPr txBox="1"/>
+          <p:nvPr/>
+        </p:nvSpPr>
+        <p:spPr>
+          <a:xfrm>
+            <a:off x="2194560" y="1051560"/>
+            <a:ext cx="9326880" cy="365760"/>
+          </a:xfrm>
+          <a:prstGeom prst="rect">
+            <a:avLst/>
+          </a:prstGeom>
+          <a:noFill/>
+        </p:spPr>
+        <p:txBody>
+          <a:bodyPr wrap="square" anchor="t">
+            <a:spAutoFit/>
+          </a:bodyPr>
+          <a:lstStyle/>
+          <a:p>
             <a:pPr algn="l"/>
             <a:r>
-              <a:rPr sz="1500" b="1">
+              <a:rPr sz="1400" b="1">
                 <a:solidFill>
                   <a:srgbClr val="041E42"/>
                 </a:solidFill>
               </a:rPr>
-              <a:t>Now → 1 month</a:t>
-            </a:r>
-          </a:p>
-        </p:txBody>
-      </p:sp>
-      <p:sp>
-        <p:nvSpPr>
-          <p:cNvPr id="9" name="TextBox 8"/>
-          <p:cNvSpPr txBox="1"/>
-          <p:nvPr/>
-        </p:nvSpPr>
-        <p:spPr>
-          <a:xfrm>
-            <a:off x="822960" y="1554480"/>
-            <a:ext cx="10424160" cy="640080"/>
+              <a:t>Grow the gold set</a:t>
+            </a:r>
+          </a:p>
+        </p:txBody>
+      </p:sp>
+      <p:sp>
+        <p:nvSpPr>
+          <p:cNvPr id="11" name="TextBox 10"/>
+          <p:cNvSpPr txBox="1"/>
+          <p:nvPr/>
+        </p:nvSpPr>
+        <p:spPr>
+          <a:xfrm>
+            <a:off x="2194560" y="1417320"/>
+            <a:ext cx="9326880" cy="594360"/>
           </a:xfrm>
           <a:prstGeom prst="rect">
             <a:avLst/>
@@ -17250,26 +17318,26 @@
           <a:p>
             <a:pPr algn="l"/>
             <a:r>
-              <a:rPr sz="1200" b="0">
+              <a:rPr sz="1050" b="0">
                 <a:solidFill>
                   <a:srgbClr val="333333"/>
                 </a:solidFill>
               </a:rPr>
-              <a:t>Grow the gold set to ~500 posts using the HITL feedback the team is already producing; rerun 5-fold OOF and check the F1 delta.</a:t>
-            </a:r>
-          </a:p>
-        </p:txBody>
-      </p:sp>
-      <p:sp>
-        <p:nvSpPr>
-          <p:cNvPr id="10" name="Rectangle 9"/>
+              <a:t>Grow the labelled gold set to ~500 posts using the HITL feedback the team is already producing; rerun 5-fold OOF to check the F1 delta.</a:t>
+            </a:r>
+          </a:p>
+        </p:txBody>
+      </p:sp>
+      <p:sp>
+        <p:nvSpPr>
+          <p:cNvPr id="12" name="Rectangle 11"/>
           <p:cNvSpPr/>
           <p:nvPr/>
         </p:nvSpPr>
         <p:spPr>
           <a:xfrm>
-            <a:off x="457200" y="2331720"/>
-            <a:ext cx="11247120" cy="1143000"/>
+            <a:off x="457200" y="2093976"/>
+            <a:ext cx="11247120" cy="1051560"/>
           </a:xfrm>
           <a:prstGeom prst="rect">
             <a:avLst/>
@@ -17308,14 +17376,14 @@
       </p:sp>
       <p:sp>
         <p:nvSpPr>
-          <p:cNvPr id="11" name="Rectangle 10"/>
+          <p:cNvPr id="13" name="Rectangle 12"/>
           <p:cNvSpPr/>
           <p:nvPr/>
         </p:nvSpPr>
         <p:spPr>
           <a:xfrm>
-            <a:off x="457200" y="2331720"/>
-            <a:ext cx="228600" cy="1143000"/>
+            <a:off x="457200" y="2093976"/>
+            <a:ext cx="1600200" cy="1051560"/>
           </a:xfrm>
           <a:prstGeom prst="rect">
             <a:avLst/>
@@ -17352,14 +17420,14 @@
       </p:sp>
       <p:sp>
         <p:nvSpPr>
-          <p:cNvPr id="12" name="TextBox 11"/>
-          <p:cNvSpPr txBox="1"/>
-          <p:nvPr/>
-        </p:nvSpPr>
-        <p:spPr>
-          <a:xfrm>
-            <a:off x="822960" y="2441448"/>
-            <a:ext cx="10424160" cy="365760"/>
+          <p:cNvPr id="14" name="TextBox 13"/>
+          <p:cNvSpPr txBox="1"/>
+          <p:nvPr/>
+        </p:nvSpPr>
+        <p:spPr>
+          <a:xfrm>
+            <a:off x="457200" y="2240280"/>
+            <a:ext cx="1600200" cy="365760"/>
           </a:xfrm>
           <a:prstGeom prst="rect">
             <a:avLst/>
@@ -17372,28 +17440,96 @@
           </a:bodyPr>
           <a:lstStyle/>
           <a:p>
+            <a:pPr algn="ctr"/>
+            <a:r>
+              <a:rPr sz="1100" b="1">
+                <a:solidFill>
+                  <a:srgbClr val="FFFFFF"/>
+                </a:solidFill>
+              </a:rPr>
+              <a:t>1 → 3 months</a:t>
+            </a:r>
+          </a:p>
+        </p:txBody>
+      </p:sp>
+      <p:sp>
+        <p:nvSpPr>
+          <p:cNvPr id="15" name="TextBox 14"/>
+          <p:cNvSpPr txBox="1"/>
+          <p:nvPr/>
+        </p:nvSpPr>
+        <p:spPr>
+          <a:xfrm>
+            <a:off x="457200" y="2596896"/>
+            <a:ext cx="1600200" cy="457200"/>
+          </a:xfrm>
+          <a:prstGeom prst="rect">
+            <a:avLst/>
+          </a:prstGeom>
+          <a:noFill/>
+        </p:spPr>
+        <p:txBody>
+          <a:bodyPr wrap="square" anchor="t">
+            <a:spAutoFit/>
+          </a:bodyPr>
+          <a:lstStyle/>
+          <a:p>
+            <a:pPr algn="ctr"/>
+            <a:r>
+              <a:rPr sz="1000" b="0">
+                <a:solidFill>
+                  <a:srgbClr val="FFFFFF"/>
+                </a:solidFill>
+              </a:rPr>
+              <a:t>HITL: 100 %</a:t>
+            </a:r>
+          </a:p>
+        </p:txBody>
+      </p:sp>
+      <p:sp>
+        <p:nvSpPr>
+          <p:cNvPr id="16" name="TextBox 15"/>
+          <p:cNvSpPr txBox="1"/>
+          <p:nvPr/>
+        </p:nvSpPr>
+        <p:spPr>
+          <a:xfrm>
+            <a:off x="2194560" y="2185416"/>
+            <a:ext cx="9326880" cy="365760"/>
+          </a:xfrm>
+          <a:prstGeom prst="rect">
+            <a:avLst/>
+          </a:prstGeom>
+          <a:noFill/>
+        </p:spPr>
+        <p:txBody>
+          <a:bodyPr wrap="square" anchor="t">
+            <a:spAutoFit/>
+          </a:bodyPr>
+          <a:lstStyle/>
+          <a:p>
             <a:pPr algn="l"/>
             <a:r>
-              <a:rPr sz="1500" b="1">
+              <a:rPr sz="1400" b="1">
                 <a:solidFill>
                   <a:srgbClr val="041E42"/>
                 </a:solidFill>
               </a:rPr>
-              <a:t>1 → 3 months</a:t>
-            </a:r>
-          </a:p>
-        </p:txBody>
-      </p:sp>
-      <p:sp>
-        <p:nvSpPr>
-          <p:cNvPr id="13" name="TextBox 12"/>
-          <p:cNvSpPr txBox="1"/>
-          <p:nvPr/>
-        </p:nvSpPr>
-        <p:spPr>
-          <a:xfrm>
-            <a:off x="822960" y="2834640"/>
-            <a:ext cx="10424160" cy="640080"/>
+              <a:t>Automate + go bilingual</a:t>
+            </a:r>
+          </a:p>
+        </p:txBody>
+      </p:sp>
+      <p:sp>
+        <p:nvSpPr>
+          <p:cNvPr id="17" name="TextBox 16"/>
+          <p:cNvSpPr txBox="1"/>
+          <p:nvPr/>
+        </p:nvSpPr>
+        <p:spPr>
+          <a:xfrm>
+            <a:off x="2194560" y="2551176"/>
+            <a:ext cx="9326880" cy="594360"/>
           </a:xfrm>
           <a:prstGeom prst="rect">
             <a:avLst/>
@@ -17408,26 +17544,26 @@
           <a:p>
             <a:pPr algn="l"/>
             <a:r>
-              <a:rPr sz="1200" b="0">
+              <a:rPr sz="1050" b="0">
                 <a:solidFill>
                   <a:srgbClr val="333333"/>
                 </a:solidFill>
               </a:rPr>
-              <a:t>Wire the monthly ModernBERT retrain into a Cron / Airflow job so it stops being a manual notebook run; add promotion gate on OOF F1.</a:t>
-            </a:r>
-          </a:p>
-        </p:txBody>
-      </p:sp>
-      <p:sp>
-        <p:nvSpPr>
-          <p:cNvPr id="14" name="Rectangle 13"/>
+              <a:t>Wire the monthly ModernBERT retrain into a Cron / Airflow job with an OOF-F1 promotion gate.  Add multi-language support (start with Hindi + English) — taxonomy validated with native-speaker analysts.</a:t>
+            </a:r>
+          </a:p>
+        </p:txBody>
+      </p:sp>
+      <p:sp>
+        <p:nvSpPr>
+          <p:cNvPr id="18" name="Rectangle 17"/>
           <p:cNvSpPr/>
           <p:nvPr/>
         </p:nvSpPr>
         <p:spPr>
           <a:xfrm>
-            <a:off x="457200" y="3611880"/>
-            <a:ext cx="11247120" cy="1143000"/>
+            <a:off x="457200" y="3227832"/>
+            <a:ext cx="11247120" cy="1051560"/>
           </a:xfrm>
           <a:prstGeom prst="rect">
             <a:avLst/>
@@ -17466,14 +17602,14 @@
       </p:sp>
       <p:sp>
         <p:nvSpPr>
-          <p:cNvPr id="15" name="Rectangle 14"/>
+          <p:cNvPr id="19" name="Rectangle 18"/>
           <p:cNvSpPr/>
           <p:nvPr/>
         </p:nvSpPr>
         <p:spPr>
           <a:xfrm>
-            <a:off x="457200" y="3611880"/>
-            <a:ext cx="228600" cy="1143000"/>
+            <a:off x="457200" y="3227832"/>
+            <a:ext cx="1600200" cy="1051560"/>
           </a:xfrm>
           <a:prstGeom prst="rect">
             <a:avLst/>
@@ -17510,14 +17646,14 @@
       </p:sp>
       <p:sp>
         <p:nvSpPr>
-          <p:cNvPr id="16" name="TextBox 15"/>
-          <p:cNvSpPr txBox="1"/>
-          <p:nvPr/>
-        </p:nvSpPr>
-        <p:spPr>
-          <a:xfrm>
-            <a:off x="822960" y="3721608"/>
-            <a:ext cx="10424160" cy="365760"/>
+          <p:cNvPr id="20" name="TextBox 19"/>
+          <p:cNvSpPr txBox="1"/>
+          <p:nvPr/>
+        </p:nvSpPr>
+        <p:spPr>
+          <a:xfrm>
+            <a:off x="457200" y="3374136"/>
+            <a:ext cx="1600200" cy="365760"/>
           </a:xfrm>
           <a:prstGeom prst="rect">
             <a:avLst/>
@@ -17530,28 +17666,96 @@
           </a:bodyPr>
           <a:lstStyle/>
           <a:p>
+            <a:pPr algn="ctr"/>
+            <a:r>
+              <a:rPr sz="1100" b="1">
+                <a:solidFill>
+                  <a:srgbClr val="FFFFFF"/>
+                </a:solidFill>
+              </a:rPr>
+              <a:t>3 → 6 months</a:t>
+            </a:r>
+          </a:p>
+        </p:txBody>
+      </p:sp>
+      <p:sp>
+        <p:nvSpPr>
+          <p:cNvPr id="21" name="TextBox 20"/>
+          <p:cNvSpPr txBox="1"/>
+          <p:nvPr/>
+        </p:nvSpPr>
+        <p:spPr>
+          <a:xfrm>
+            <a:off x="457200" y="3730752"/>
+            <a:ext cx="1600200" cy="457200"/>
+          </a:xfrm>
+          <a:prstGeom prst="rect">
+            <a:avLst/>
+          </a:prstGeom>
+          <a:noFill/>
+        </p:spPr>
+        <p:txBody>
+          <a:bodyPr wrap="square" anchor="t">
+            <a:spAutoFit/>
+          </a:bodyPr>
+          <a:lstStyle/>
+          <a:p>
+            <a:pPr algn="ctr"/>
+            <a:r>
+              <a:rPr sz="1000" b="0">
+                <a:solidFill>
+                  <a:srgbClr val="FFFFFF"/>
+                </a:solidFill>
+              </a:rPr>
+              <a:t>HITL: ~80 %</a:t>
+            </a:r>
+          </a:p>
+        </p:txBody>
+      </p:sp>
+      <p:sp>
+        <p:nvSpPr>
+          <p:cNvPr id="22" name="TextBox 21"/>
+          <p:cNvSpPr txBox="1"/>
+          <p:nvPr/>
+        </p:nvSpPr>
+        <p:spPr>
+          <a:xfrm>
+            <a:off x="2194560" y="3319272"/>
+            <a:ext cx="9326880" cy="365760"/>
+          </a:xfrm>
+          <a:prstGeom prst="rect">
+            <a:avLst/>
+          </a:prstGeom>
+          <a:noFill/>
+        </p:spPr>
+        <p:txBody>
+          <a:bodyPr wrap="square" anchor="t">
+            <a:spAutoFit/>
+          </a:bodyPr>
+          <a:lstStyle/>
+          <a:p>
             <a:pPr algn="l"/>
             <a:r>
-              <a:rPr sz="1500" b="1">
+              <a:rPr sz="1400" b="1">
                 <a:solidFill>
                   <a:srgbClr val="041E42"/>
                 </a:solidFill>
               </a:rPr>
-              <a:t>3 → 6 months</a:t>
-            </a:r>
-          </a:p>
-        </p:txBody>
-      </p:sp>
-      <p:sp>
-        <p:nvSpPr>
-          <p:cNvPr id="17" name="TextBox 16"/>
-          <p:cNvSpPr txBox="1"/>
-          <p:nvPr/>
-        </p:nvSpPr>
-        <p:spPr>
-          <a:xfrm>
-            <a:off x="822960" y="4114800"/>
-            <a:ext cx="10424160" cy="640080"/>
+              <a:t>Walmart-trained model + shared DB</a:t>
+            </a:r>
+          </a:p>
+        </p:txBody>
+      </p:sp>
+      <p:sp>
+        <p:nvSpPr>
+          <p:cNvPr id="23" name="TextBox 22"/>
+          <p:cNvSpPr txBox="1"/>
+          <p:nvPr/>
+        </p:nvSpPr>
+        <p:spPr>
+          <a:xfrm>
+            <a:off x="2194560" y="3685032"/>
+            <a:ext cx="9326880" cy="594360"/>
           </a:xfrm>
           <a:prstGeom prst="rect">
             <a:avLst/>
@@ -17566,26 +17770,252 @@
           <a:p>
             <a:pPr algn="l"/>
             <a:r>
-              <a:rPr sz="1200" b="0">
+              <a:rPr sz="1050" b="0">
                 <a:solidFill>
                   <a:srgbClr val="333333"/>
                 </a:solidFill>
               </a:rPr>
-              <a:t>Move the feedback table to a shared managed database so multiple analysts can work concurrently; extend ingestion beyond Reddit only if the demand from the analyst team is real.</a:t>
-            </a:r>
-          </a:p>
-        </p:txBody>
-      </p:sp>
-      <p:sp>
-        <p:nvSpPr>
-          <p:cNvPr id="18" name="Rectangle 17"/>
+              <a:t>Fine-tune Mistral 7B on our own posted-reply corpus  →  a Walmart-trained replier that drops the paid GPT-4o dependency, runs fully in-house, and can be self-hosted.  Move the feedback table to a shared managed database so multiple analysts can work concurrently.</a:t>
+            </a:r>
+          </a:p>
+        </p:txBody>
+      </p:sp>
+      <p:sp>
+        <p:nvSpPr>
+          <p:cNvPr id="24" name="Rectangle 23"/>
           <p:cNvSpPr/>
           <p:nvPr/>
         </p:nvSpPr>
         <p:spPr>
           <a:xfrm>
-            <a:off x="457200" y="5074920"/>
-            <a:ext cx="11247120" cy="1234440"/>
+            <a:off x="457200" y="4361688"/>
+            <a:ext cx="11247120" cy="1051560"/>
+          </a:xfrm>
+          <a:prstGeom prst="rect">
+            <a:avLst/>
+          </a:prstGeom>
+          <a:solidFill>
+            <a:srgbClr val="F5F5F5"/>
+          </a:solidFill>
+          <a:ln>
+            <a:solidFill>
+              <a:srgbClr val="D97706"/>
+            </a:solidFill>
+          </a:ln>
+          <a:effectLst/>
+        </p:spPr>
+        <p:style>
+          <a:lnRef idx="1">
+            <a:schemeClr val="accent1"/>
+          </a:lnRef>
+          <a:fillRef idx="3">
+            <a:schemeClr val="accent1"/>
+          </a:fillRef>
+          <a:effectRef idx="2">
+            <a:schemeClr val="accent1"/>
+          </a:effectRef>
+          <a:fontRef idx="minor">
+            <a:schemeClr val="lt1"/>
+          </a:fontRef>
+        </p:style>
+        <p:txBody>
+          <a:bodyPr rtlCol="0" anchor="ctr"/>
+          <a:lstStyle/>
+          <a:p>
+            <a:pPr algn="ctr"/>
+          </a:p>
+        </p:txBody>
+      </p:sp>
+      <p:sp>
+        <p:nvSpPr>
+          <p:cNvPr id="25" name="Rectangle 24"/>
+          <p:cNvSpPr/>
+          <p:nvPr/>
+        </p:nvSpPr>
+        <p:spPr>
+          <a:xfrm>
+            <a:off x="457200" y="4361688"/>
+            <a:ext cx="1600200" cy="1051560"/>
+          </a:xfrm>
+          <a:prstGeom prst="rect">
+            <a:avLst/>
+          </a:prstGeom>
+          <a:solidFill>
+            <a:srgbClr val="D97706"/>
+          </a:solidFill>
+          <a:ln>
+            <a:noFill/>
+          </a:ln>
+          <a:effectLst/>
+        </p:spPr>
+        <p:style>
+          <a:lnRef idx="1">
+            <a:schemeClr val="accent1"/>
+          </a:lnRef>
+          <a:fillRef idx="3">
+            <a:schemeClr val="accent1"/>
+          </a:fillRef>
+          <a:effectRef idx="2">
+            <a:schemeClr val="accent1"/>
+          </a:effectRef>
+          <a:fontRef idx="minor">
+            <a:schemeClr val="lt1"/>
+          </a:fontRef>
+        </p:style>
+        <p:txBody>
+          <a:bodyPr rtlCol="0" anchor="ctr"/>
+          <a:lstStyle/>
+          <a:p>
+            <a:pPr algn="ctr"/>
+          </a:p>
+        </p:txBody>
+      </p:sp>
+      <p:sp>
+        <p:nvSpPr>
+          <p:cNvPr id="26" name="TextBox 25"/>
+          <p:cNvSpPr txBox="1"/>
+          <p:nvPr/>
+        </p:nvSpPr>
+        <p:spPr>
+          <a:xfrm>
+            <a:off x="457200" y="4507992"/>
+            <a:ext cx="1600200" cy="365760"/>
+          </a:xfrm>
+          <a:prstGeom prst="rect">
+            <a:avLst/>
+          </a:prstGeom>
+          <a:noFill/>
+        </p:spPr>
+        <p:txBody>
+          <a:bodyPr wrap="square" anchor="t">
+            <a:spAutoFit/>
+          </a:bodyPr>
+          <a:lstStyle/>
+          <a:p>
+            <a:pPr algn="ctr"/>
+            <a:r>
+              <a:rPr sz="1100" b="1">
+                <a:solidFill>
+                  <a:srgbClr val="FFFFFF"/>
+                </a:solidFill>
+              </a:rPr>
+              <a:t>6 → 12 months</a:t>
+            </a:r>
+          </a:p>
+        </p:txBody>
+      </p:sp>
+      <p:sp>
+        <p:nvSpPr>
+          <p:cNvPr id="27" name="TextBox 26"/>
+          <p:cNvSpPr txBox="1"/>
+          <p:nvPr/>
+        </p:nvSpPr>
+        <p:spPr>
+          <a:xfrm>
+            <a:off x="457200" y="4864608"/>
+            <a:ext cx="1600200" cy="457200"/>
+          </a:xfrm>
+          <a:prstGeom prst="rect">
+            <a:avLst/>
+          </a:prstGeom>
+          <a:noFill/>
+        </p:spPr>
+        <p:txBody>
+          <a:bodyPr wrap="square" anchor="t">
+            <a:spAutoFit/>
+          </a:bodyPr>
+          <a:lstStyle/>
+          <a:p>
+            <a:pPr algn="ctr"/>
+            <a:r>
+              <a:rPr sz="1000" b="0">
+                <a:solidFill>
+                  <a:srgbClr val="FFFFFF"/>
+                </a:solidFill>
+              </a:rPr>
+              <a:t>HITL: ~30 %  →  eventually 0 %</a:t>
+            </a:r>
+          </a:p>
+        </p:txBody>
+      </p:sp>
+      <p:sp>
+        <p:nvSpPr>
+          <p:cNvPr id="28" name="TextBox 27"/>
+          <p:cNvSpPr txBox="1"/>
+          <p:nvPr/>
+        </p:nvSpPr>
+        <p:spPr>
+          <a:xfrm>
+            <a:off x="2194560" y="4453128"/>
+            <a:ext cx="9326880" cy="365760"/>
+          </a:xfrm>
+          <a:prstGeom prst="rect">
+            <a:avLst/>
+          </a:prstGeom>
+          <a:noFill/>
+        </p:spPr>
+        <p:txBody>
+          <a:bodyPr wrap="square" anchor="t">
+            <a:spAutoFit/>
+          </a:bodyPr>
+          <a:lstStyle/>
+          <a:p>
+            <a:pPr algn="l"/>
+            <a:r>
+              <a:rPr sz="1400" b="1">
+                <a:solidFill>
+                  <a:srgbClr val="041E42"/>
+                </a:solidFill>
+              </a:rPr>
+              <a:t>Confidence-gated auto-reply</a:t>
+            </a:r>
+          </a:p>
+        </p:txBody>
+      </p:sp>
+      <p:sp>
+        <p:nvSpPr>
+          <p:cNvPr id="29" name="TextBox 28"/>
+          <p:cNvSpPr txBox="1"/>
+          <p:nvPr/>
+        </p:nvSpPr>
+        <p:spPr>
+          <a:xfrm>
+            <a:off x="2194560" y="4818888"/>
+            <a:ext cx="9326880" cy="594360"/>
+          </a:xfrm>
+          <a:prstGeom prst="rect">
+            <a:avLst/>
+          </a:prstGeom>
+          <a:noFill/>
+        </p:spPr>
+        <p:txBody>
+          <a:bodyPr wrap="square" anchor="t">
+            <a:spAutoFit/>
+          </a:bodyPr>
+          <a:lstStyle/>
+          <a:p>
+            <a:pPr algn="l"/>
+            <a:r>
+              <a:rPr sz="1050" b="0">
+                <a:solidFill>
+                  <a:srgbClr val="333333"/>
+                </a:solidFill>
+              </a:rPr>
+              <a:t>Introduce a confidence gate on the reply generator: top-confidence drafts are queued for auto-send and the analyst only reviews the mid- and low-confidence tail.  As agreement stays high, gradually raise the auto-send threshold — HITL winds down to sampling / audit only.</a:t>
+            </a:r>
+          </a:p>
+        </p:txBody>
+      </p:sp>
+      <p:sp>
+        <p:nvSpPr>
+          <p:cNvPr id="30" name="Rectangle 29"/>
+          <p:cNvSpPr/>
+          <p:nvPr/>
+        </p:nvSpPr>
+        <p:spPr>
+          <a:xfrm>
+            <a:off x="457200" y="5440680"/>
+            <a:ext cx="11247120" cy="868680"/>
           </a:xfrm>
           <a:prstGeom prst="rect">
             <a:avLst/>
@@ -17624,13 +18054,13 @@
       </p:sp>
       <p:sp>
         <p:nvSpPr>
-          <p:cNvPr id="19" name="TextBox 18"/>
-          <p:cNvSpPr txBox="1"/>
-          <p:nvPr/>
-        </p:nvSpPr>
-        <p:spPr>
-          <a:xfrm>
-            <a:off x="640080" y="5166360"/>
+          <p:cNvPr id="31" name="TextBox 30"/>
+          <p:cNvSpPr txBox="1"/>
+          <p:nvPr/>
+        </p:nvSpPr>
+        <p:spPr>
+          <a:xfrm>
+            <a:off x="640080" y="5532120"/>
             <a:ext cx="10972800" cy="320040"/>
           </a:xfrm>
           <a:prstGeom prst="rect">
@@ -17651,82 +18081,48 @@
                   <a:srgbClr val="0071DC"/>
                 </a:solidFill>
               </a:rPr>
-              <a:t>DELIBERATELY EXCLUDED</a:t>
-            </a:r>
-          </a:p>
-        </p:txBody>
-      </p:sp>
-      <p:sp>
-        <p:nvSpPr>
-          <p:cNvPr id="20" name="TextBox 19"/>
-          <p:cNvSpPr txBox="1"/>
-          <p:nvPr/>
-        </p:nvSpPr>
-        <p:spPr>
-          <a:xfrm>
-            <a:off x="640080" y="5486400"/>
-            <a:ext cx="10972800" cy="822960"/>
-          </a:xfrm>
-          <a:prstGeom prst="rect">
-            <a:avLst/>
-          </a:prstGeom>
-          <a:noFill/>
-        </p:spPr>
-        <p:txBody>
-          <a:bodyPr wrap="square">
-            <a:spAutoFit/>
-          </a:bodyPr>
-          <a:lstStyle/>
-          <a:p>
-            <a:pPr>
-              <a:spcAft>
-                <a:spcPts val="400"/>
-              </a:spcAft>
-            </a:pPr>
-            <a:r>
-              <a:rPr sz="1000" b="0">
+              <a:t>GUIDING PRINCIPLE</a:t>
+            </a:r>
+          </a:p>
+        </p:txBody>
+      </p:sp>
+      <p:sp>
+        <p:nvSpPr>
+          <p:cNvPr id="32" name="TextBox 31"/>
+          <p:cNvSpPr txBox="1"/>
+          <p:nvPr/>
+        </p:nvSpPr>
+        <p:spPr>
+          <a:xfrm>
+            <a:off x="640080" y="5852160"/>
+            <a:ext cx="10972800" cy="457200"/>
+          </a:xfrm>
+          <a:prstGeom prst="rect">
+            <a:avLst/>
+          </a:prstGeom>
+          <a:noFill/>
+        </p:spPr>
+        <p:txBody>
+          <a:bodyPr wrap="square" anchor="t">
+            <a:spAutoFit/>
+          </a:bodyPr>
+          <a:lstStyle/>
+          <a:p>
+            <a:pPr algn="l"/>
+            <a:r>
+              <a:rPr sz="1100" b="0">
                 <a:solidFill>
                   <a:srgbClr val="333333"/>
                 </a:solidFill>
               </a:rPr>
-              <a:t>•  Auto-reply confidence gate  —  waiting for edit-distance evidence on more replies</a:t>
-            </a:r>
-          </a:p>
-          <a:p>
-            <a:pPr>
-              <a:spcAft>
-                <a:spcPts val="400"/>
-              </a:spcAft>
-            </a:pPr>
-            <a:r>
-              <a:rPr sz="1000" b="0">
-                <a:solidFill>
-                  <a:srgbClr val="333333"/>
-                </a:solidFill>
-              </a:rPr>
-              <a:t>•  Predictive P1 forecast (seasonal decomposition)  —  needs at least 6 months of daily counts</a:t>
-            </a:r>
-          </a:p>
-          <a:p>
-            <a:pPr>
-              <a:spcAft>
-                <a:spcPts val="400"/>
-              </a:spcAft>
-            </a:pPr>
-            <a:r>
-              <a:rPr sz="1000" b="0">
-                <a:solidFill>
-                  <a:srgbClr val="333333"/>
-                </a:solidFill>
-              </a:rPr>
-              <a:t>•  Bilingual (Hindi + English) taxonomy  —  needs native-speaker validation first</a:t>
-            </a:r>
-          </a:p>
-        </p:txBody>
-      </p:sp>
-      <p:sp>
-        <p:nvSpPr>
-          <p:cNvPr id="21" name="TextBox 20"/>
+              <a:t>HITL is the ladder, not the ceiling — every stage produces the training signal that lets the next stage automate more.  Each horizon is admissible only when the previous one is measurably successful.</a:t>
+            </a:r>
+          </a:p>
+        </p:txBody>
+      </p:sp>
+      <p:sp>
+        <p:nvSpPr>
+          <p:cNvPr id="33" name="TextBox 32"/>
           <p:cNvSpPr txBox="1"/>
           <p:nvPr/>
         </p:nvSpPr>
@@ -17760,7 +18156,7 @@
       </p:sp>
       <p:sp>
         <p:nvSpPr>
-          <p:cNvPr id="22" name="TextBox 21"/>
+          <p:cNvPr id="34" name="TextBox 33"/>
           <p:cNvSpPr txBox="1"/>
           <p:nvPr/>
         </p:nvSpPr>

--- a/docs/Sem_4/FINAL_PRESENTATION_VishalSingh_2020AA05641.pptx
+++ b/docs/Sem_4/FINAL_PRESENTATION_VishalSingh_2020AA05641.pptx
@@ -27,6 +27,7 @@
     <p:sldId id="275" r:id="rId26"/>
     <p:sldId id="276" r:id="rId27"/>
     <p:sldId id="277" r:id="rId28"/>
+    <p:sldId id="278" r:id="rId29"/>
   </p:sldIdLst>
   <p:sldSz cx="12191695" cy="6858000" type="screen4x3"/>
   <p:notesSz cx="6858000" cy="9144000"/>
@@ -3185,7 +3186,7 @@
           <a:p>
             <a:pPr algn="l"/>
             <a:r>
-              <a:rPr sz="4000" b="1">
+              <a:rPr sz="4000" b="1" i="0">
                 <a:solidFill>
                   <a:srgbClr val="FFFFFF"/>
                 </a:solidFill>
@@ -3219,7 +3220,7 @@
           <a:p>
             <a:pPr algn="l"/>
             <a:r>
-              <a:rPr sz="1900" b="0">
+              <a:rPr sz="1900" b="0" i="0">
                 <a:solidFill>
                   <a:srgbClr val="FFC220"/>
                 </a:solidFill>
@@ -3230,7 +3231,7 @@
           <a:p>
             <a:pPr algn="l"/>
             <a:r>
-              <a:rPr sz="1900" b="0">
+              <a:rPr sz="1900" b="0" i="0">
                 <a:solidFill>
                   <a:srgbClr val="FFC220"/>
                 </a:solidFill>
@@ -3264,7 +3265,7 @@
           <a:p>
             <a:pPr algn="l"/>
             <a:r>
-              <a:rPr sz="1400" b="1">
+              <a:rPr sz="1400" b="1" i="0">
                 <a:solidFill>
                   <a:srgbClr val="FFFFFF"/>
                 </a:solidFill>
@@ -3342,7 +3343,7 @@
           <a:p>
             <a:pPr algn="l"/>
             <a:r>
-              <a:rPr sz="1600" b="1">
+              <a:rPr sz="1600" b="1" i="0">
                 <a:solidFill>
                   <a:srgbClr val="FFFFFF"/>
                 </a:solidFill>
@@ -3376,7 +3377,7 @@
           <a:p>
             <a:pPr algn="l"/>
             <a:r>
-              <a:rPr sz="1200" b="0">
+              <a:rPr sz="1200" b="0" i="0">
                 <a:solidFill>
                   <a:srgbClr val="E8F4FD"/>
                 </a:solidFill>
@@ -3410,7 +3411,7 @@
           <a:p>
             <a:pPr algn="l"/>
             <a:r>
-              <a:rPr sz="1600" b="1">
+              <a:rPr sz="1600" b="1" i="0">
                 <a:solidFill>
                   <a:srgbClr val="FFFFFF"/>
                 </a:solidFill>
@@ -3444,7 +3445,7 @@
           <a:p>
             <a:pPr algn="l"/>
             <a:r>
-              <a:rPr sz="1200" b="0">
+              <a:rPr sz="1200" b="0" i="0">
                 <a:solidFill>
                   <a:srgbClr val="E8F4FD"/>
                 </a:solidFill>
@@ -3478,7 +3479,7 @@
           <a:p>
             <a:pPr algn="l"/>
             <a:r>
-              <a:rPr sz="1600" b="1">
+              <a:rPr sz="1600" b="1" i="0">
                 <a:solidFill>
                   <a:srgbClr val="FFFFFF"/>
                 </a:solidFill>
@@ -3512,7 +3513,7 @@
           <a:p>
             <a:pPr algn="l"/>
             <a:r>
-              <a:rPr sz="1200" b="0">
+              <a:rPr sz="1200" b="0" i="0">
                 <a:solidFill>
                   <a:srgbClr val="E8F4FD"/>
                 </a:solidFill>
@@ -3546,7 +3547,7 @@
           <a:p>
             <a:pPr algn="l"/>
             <a:r>
-              <a:rPr sz="1000" b="0">
+              <a:rPr sz="1000" b="0" i="0">
                 <a:solidFill>
                   <a:srgbClr val="666666"/>
                 </a:solidFill>
@@ -3642,7 +3643,7 @@
           <a:p>
             <a:pPr algn="l"/>
             <a:r>
-              <a:rPr sz="2600" b="1">
+              <a:rPr sz="2600" b="1" i="0">
                 <a:solidFill>
                   <a:srgbClr val="FFFFFF"/>
                 </a:solidFill>
@@ -3676,7 +3677,7 @@
           <a:p>
             <a:pPr algn="l"/>
             <a:r>
-              <a:rPr sz="1200" b="0">
+              <a:rPr sz="1200" b="0" i="0">
                 <a:solidFill>
                   <a:srgbClr val="E8F4FD"/>
                 </a:solidFill>
@@ -3844,7 +3845,7 @@
           <a:p>
             <a:pPr algn="ctr"/>
             <a:r>
-              <a:rPr sz="1300" b="1">
+              <a:rPr sz="1300" b="1" i="0">
                 <a:solidFill>
                   <a:srgbClr val="FFFFFF"/>
                 </a:solidFill>
@@ -3878,7 +3879,7 @@
           <a:p>
             <a:pPr algn="ctr"/>
             <a:r>
-              <a:rPr sz="1200" b="0">
+              <a:rPr sz="1200" b="0" i="0">
                 <a:solidFill>
                   <a:srgbClr val="333333"/>
                 </a:solidFill>
@@ -3889,7 +3890,7 @@
           <a:p>
             <a:pPr algn="ctr"/>
             <a:r>
-              <a:rPr sz="1200" b="0">
+              <a:rPr sz="1200" b="0" i="0">
                 <a:solidFill>
                   <a:srgbClr val="333333"/>
                 </a:solidFill>
@@ -4056,7 +4057,7 @@
           <a:p>
             <a:pPr algn="ctr"/>
             <a:r>
-              <a:rPr sz="1300" b="1">
+              <a:rPr sz="1300" b="1" i="0">
                 <a:solidFill>
                   <a:srgbClr val="FFFFFF"/>
                 </a:solidFill>
@@ -4090,7 +4091,7 @@
           <a:p>
             <a:pPr algn="ctr"/>
             <a:r>
-              <a:rPr sz="1200" b="0">
+              <a:rPr sz="1200" b="0" i="0">
                 <a:solidFill>
                   <a:srgbClr val="333333"/>
                 </a:solidFill>
@@ -4101,7 +4102,7 @@
           <a:p>
             <a:pPr algn="ctr"/>
             <a:r>
-              <a:rPr sz="1200" b="0">
+              <a:rPr sz="1200" b="0" i="0">
                 <a:solidFill>
                   <a:srgbClr val="333333"/>
                 </a:solidFill>
@@ -4268,7 +4269,7 @@
           <a:p>
             <a:pPr algn="ctr"/>
             <a:r>
-              <a:rPr sz="1300" b="1">
+              <a:rPr sz="1300" b="1" i="0">
                 <a:solidFill>
                   <a:srgbClr val="FFFFFF"/>
                 </a:solidFill>
@@ -4302,7 +4303,7 @@
           <a:p>
             <a:pPr algn="ctr"/>
             <a:r>
-              <a:rPr sz="1200" b="0">
+              <a:rPr sz="1200" b="0" i="0">
                 <a:solidFill>
                   <a:srgbClr val="333333"/>
                 </a:solidFill>
@@ -4313,7 +4314,7 @@
           <a:p>
             <a:pPr algn="ctr"/>
             <a:r>
-              <a:rPr sz="1200" b="0">
+              <a:rPr sz="1200" b="0" i="0">
                 <a:solidFill>
                   <a:srgbClr val="333333"/>
                 </a:solidFill>
@@ -4480,7 +4481,7 @@
           <a:p>
             <a:pPr algn="ctr"/>
             <a:r>
-              <a:rPr sz="1300" b="1">
+              <a:rPr sz="1300" b="1" i="0">
                 <a:solidFill>
                   <a:srgbClr val="FFFFFF"/>
                 </a:solidFill>
@@ -4514,7 +4515,7 @@
           <a:p>
             <a:pPr algn="ctr"/>
             <a:r>
-              <a:rPr sz="1200" b="0">
+              <a:rPr sz="1200" b="0" i="0">
                 <a:solidFill>
                   <a:srgbClr val="333333"/>
                 </a:solidFill>
@@ -4525,7 +4526,7 @@
           <a:p>
             <a:pPr algn="ctr"/>
             <a:r>
-              <a:rPr sz="1200" b="0">
+              <a:rPr sz="1200" b="0" i="0">
                 <a:solidFill>
                   <a:srgbClr val="333333"/>
                 </a:solidFill>
@@ -4629,7 +4630,7 @@
           <a:p>
             <a:pPr algn="l"/>
             <a:r>
-              <a:rPr sz="1100" b="1">
+              <a:rPr sz="1100" b="1" i="0">
                 <a:solidFill>
                   <a:srgbClr val="0071DC"/>
                 </a:solidFill>
@@ -4761,7 +4762,7 @@
           <a:p>
             <a:pPr algn="l"/>
             <a:r>
-              <a:rPr sz="900" b="0">
+              <a:rPr sz="900" b="0" i="0">
                 <a:solidFill>
                   <a:srgbClr val="666666"/>
                 </a:solidFill>
@@ -4795,12 +4796,12 @@
           <a:p>
             <a:pPr algn="r"/>
             <a:r>
-              <a:rPr sz="900" b="0">
+              <a:rPr sz="900" b="0" i="0">
                 <a:solidFill>
                   <a:srgbClr val="666666"/>
                 </a:solidFill>
               </a:rPr>
-              <a:t>10 / 22</a:t>
+              <a:t>10 / 23</a:t>
             </a:r>
           </a:p>
         </p:txBody>
@@ -4891,7 +4892,7 @@
           <a:p>
             <a:pPr algn="l"/>
             <a:r>
-              <a:rPr sz="2600" b="1">
+              <a:rPr sz="2600" b="1" i="0">
                 <a:solidFill>
                   <a:srgbClr val="FFFFFF"/>
                 </a:solidFill>
@@ -4925,7 +4926,7 @@
           <a:p>
             <a:pPr algn="l"/>
             <a:r>
-              <a:rPr sz="1200" b="0">
+              <a:rPr sz="1200" b="0" i="0">
                 <a:solidFill>
                   <a:srgbClr val="E8F4FD"/>
                 </a:solidFill>
@@ -5093,7 +5094,7 @@
           <a:p>
             <a:pPr algn="ctr"/>
             <a:r>
-              <a:rPr sz="1400" b="1">
+              <a:rPr sz="1400" b="1" i="0">
                 <a:solidFill>
                   <a:srgbClr val="FFFFFF"/>
                 </a:solidFill>
@@ -5127,7 +5128,7 @@
           <a:p>
             <a:pPr algn="ctr"/>
             <a:r>
-              <a:rPr sz="1300" b="0">
+              <a:rPr sz="1300" b="0" i="0">
                 <a:solidFill>
                   <a:srgbClr val="333333"/>
                 </a:solidFill>
@@ -5138,7 +5139,7 @@
           <a:p>
             <a:pPr algn="ctr"/>
             <a:r>
-              <a:rPr sz="1300" b="0">
+              <a:rPr sz="1300" b="0" i="0">
                 <a:solidFill>
                   <a:srgbClr val="333333"/>
                 </a:solidFill>
@@ -5149,7 +5150,7 @@
           <a:p>
             <a:pPr algn="ctr"/>
             <a:r>
-              <a:rPr sz="1300" b="0">
+              <a:rPr sz="1300" b="0" i="0">
                 <a:solidFill>
                   <a:srgbClr val="333333"/>
                 </a:solidFill>
@@ -5273,7 +5274,7 @@
           <a:p>
             <a:pPr algn="ctr"/>
             <a:r>
-              <a:rPr sz="1400" b="1">
+              <a:rPr sz="1400" b="1" i="0">
                 <a:solidFill>
                   <a:srgbClr val="FFFFFF"/>
                 </a:solidFill>
@@ -5307,7 +5308,7 @@
           <a:p>
             <a:pPr algn="ctr"/>
             <a:r>
-              <a:rPr sz="1300" b="0">
+              <a:rPr sz="1300" b="0" i="0">
                 <a:solidFill>
                   <a:srgbClr val="333333"/>
                 </a:solidFill>
@@ -5318,7 +5319,7 @@
           <a:p>
             <a:pPr algn="ctr"/>
             <a:r>
-              <a:rPr sz="1300" b="0">
+              <a:rPr sz="1300" b="0" i="0">
                 <a:solidFill>
                   <a:srgbClr val="333333"/>
                 </a:solidFill>
@@ -5442,7 +5443,7 @@
           <a:p>
             <a:pPr algn="ctr"/>
             <a:r>
-              <a:rPr sz="1400" b="1">
+              <a:rPr sz="1400" b="1" i="0">
                 <a:solidFill>
                   <a:srgbClr val="FFFFFF"/>
                 </a:solidFill>
@@ -5476,7 +5477,7 @@
           <a:p>
             <a:pPr algn="ctr"/>
             <a:r>
-              <a:rPr sz="1300" b="0">
+              <a:rPr sz="1300" b="0" i="0">
                 <a:solidFill>
                   <a:srgbClr val="333333"/>
                 </a:solidFill>
@@ -5487,7 +5488,7 @@
           <a:p>
             <a:pPr algn="ctr"/>
             <a:r>
-              <a:rPr sz="1300" b="0">
+              <a:rPr sz="1300" b="0" i="0">
                 <a:solidFill>
                   <a:srgbClr val="333333"/>
                 </a:solidFill>
@@ -5498,7 +5499,7 @@
           <a:p>
             <a:pPr algn="ctr"/>
             <a:r>
-              <a:rPr sz="1300" b="0">
+              <a:rPr sz="1300" b="0" i="0">
                 <a:solidFill>
                   <a:srgbClr val="333333"/>
                 </a:solidFill>
@@ -5622,7 +5623,7 @@
           <a:p>
             <a:pPr algn="ctr"/>
             <a:r>
-              <a:rPr sz="1400" b="1">
+              <a:rPr sz="1400" b="1" i="0">
                 <a:solidFill>
                   <a:srgbClr val="FFFFFF"/>
                 </a:solidFill>
@@ -5656,7 +5657,7 @@
           <a:p>
             <a:pPr algn="ctr"/>
             <a:r>
-              <a:rPr sz="1300" b="0">
+              <a:rPr sz="1300" b="0" i="0">
                 <a:solidFill>
                   <a:srgbClr val="333333"/>
                 </a:solidFill>
@@ -5667,7 +5668,7 @@
           <a:p>
             <a:pPr algn="ctr"/>
             <a:r>
-              <a:rPr sz="1300" b="0">
+              <a:rPr sz="1300" b="0" i="0">
                 <a:solidFill>
                   <a:srgbClr val="333333"/>
                 </a:solidFill>
@@ -5678,7 +5679,7 @@
           <a:p>
             <a:pPr algn="ctr"/>
             <a:r>
-              <a:rPr sz="1300" b="0">
+              <a:rPr sz="1300" b="0" i="0">
                 <a:solidFill>
                   <a:srgbClr val="333333"/>
                 </a:solidFill>
@@ -5758,7 +5759,7 @@
           <a:p>
             <a:pPr algn="ctr"/>
             <a:r>
-              <a:rPr sz="1000" b="0">
+              <a:rPr sz="1000" b="0" i="0">
                 <a:solidFill>
                   <a:srgbClr val="333333"/>
                 </a:solidFill>
@@ -5792,7 +5793,7 @@
           <a:p>
             <a:pPr algn="l"/>
             <a:r>
-              <a:rPr sz="900" b="0">
+              <a:rPr sz="900" b="0" i="0">
                 <a:solidFill>
                   <a:srgbClr val="666666"/>
                 </a:solidFill>
@@ -5826,12 +5827,12 @@
           <a:p>
             <a:pPr algn="r"/>
             <a:r>
-              <a:rPr sz="900" b="0">
+              <a:rPr sz="900" b="0" i="0">
                 <a:solidFill>
                   <a:srgbClr val="666666"/>
                 </a:solidFill>
               </a:rPr>
-              <a:t>11 / 22</a:t>
+              <a:t>11 / 23</a:t>
             </a:r>
           </a:p>
         </p:txBody>
@@ -5922,7 +5923,7 @@
           <a:p>
             <a:pPr algn="l"/>
             <a:r>
-              <a:rPr sz="2600" b="1">
+              <a:rPr sz="2600" b="1" i="0">
                 <a:solidFill>
                   <a:srgbClr val="FFFFFF"/>
                 </a:solidFill>
@@ -5956,7 +5957,7 @@
           <a:p>
             <a:pPr algn="l"/>
             <a:r>
-              <a:rPr sz="1200" b="0">
+              <a:rPr sz="1200" b="0" i="0">
                 <a:solidFill>
                   <a:srgbClr val="E8F4FD"/>
                 </a:solidFill>
@@ -6034,7 +6035,7 @@
           <a:p>
             <a:pPr algn="l"/>
             <a:r>
-              <a:rPr sz="1100" b="1">
+              <a:rPr sz="1100" b="1" i="0">
                 <a:solidFill>
                   <a:srgbClr val="0071DC"/>
                 </a:solidFill>
@@ -6159,7 +6160,7 @@
         <p:spPr>
           <a:xfrm>
             <a:off x="6172200" y="914400"/>
-            <a:ext cx="5669280" cy="3543300"/>
+            <a:ext cx="5669280" cy="4265083"/>
           </a:xfrm>
           <a:prstGeom prst="rect">
             <a:avLst/>
@@ -6236,7 +6237,7 @@
           <a:p>
             <a:pPr algn="l"/>
             <a:r>
-              <a:rPr sz="1100" b="1">
+              <a:rPr sz="1100" b="1" i="0">
                 <a:solidFill>
                   <a:srgbClr val="0071DC"/>
                 </a:solidFill>
@@ -6270,7 +6271,7 @@
           <a:p>
             <a:pPr algn="l"/>
             <a:r>
-              <a:rPr sz="1100" b="0">
+              <a:rPr sz="1100" b="0" i="0">
                 <a:solidFill>
                   <a:srgbClr val="333333"/>
                 </a:solidFill>
@@ -6281,7 +6282,7 @@
           <a:p>
             <a:pPr algn="l"/>
             <a:r>
-              <a:rPr sz="1100" b="0">
+              <a:rPr sz="1100" b="0" i="0">
                 <a:solidFill>
                   <a:srgbClr val="333333"/>
                 </a:solidFill>
@@ -6292,7 +6293,7 @@
           <a:p>
             <a:pPr algn="l"/>
             <a:r>
-              <a:rPr sz="1100" b="0">
+              <a:rPr sz="1100" b="0" i="0">
                 <a:solidFill>
                   <a:srgbClr val="333333"/>
                 </a:solidFill>
@@ -6372,7 +6373,7 @@
           <a:p>
             <a:pPr algn="l"/>
             <a:r>
-              <a:rPr sz="1100" b="1">
+              <a:rPr sz="1100" b="1" i="0">
                 <a:solidFill>
                   <a:srgbClr val="10B981"/>
                 </a:solidFill>
@@ -6406,7 +6407,7 @@
           <a:p>
             <a:pPr algn="l"/>
             <a:r>
-              <a:rPr sz="1100" b="0">
+              <a:rPr sz="1100" b="0" i="0">
                 <a:solidFill>
                   <a:srgbClr val="333333"/>
                 </a:solidFill>
@@ -6440,7 +6441,7 @@
           <a:p>
             <a:pPr algn="l"/>
             <a:r>
-              <a:rPr sz="900" b="0">
+              <a:rPr sz="900" b="0" i="0">
                 <a:solidFill>
                   <a:srgbClr val="666666"/>
                 </a:solidFill>
@@ -6474,12 +6475,12 @@
           <a:p>
             <a:pPr algn="r"/>
             <a:r>
-              <a:rPr sz="900" b="0">
+              <a:rPr sz="900" b="0" i="0">
                 <a:solidFill>
                   <a:srgbClr val="666666"/>
                 </a:solidFill>
               </a:rPr>
-              <a:t>12 / 22</a:t>
+              <a:t>12 / 23</a:t>
             </a:r>
           </a:p>
         </p:txBody>
@@ -6570,7 +6571,7 @@
           <a:p>
             <a:pPr algn="l"/>
             <a:r>
-              <a:rPr sz="2600" b="1">
+              <a:rPr sz="2600" b="1" i="0">
                 <a:solidFill>
                   <a:srgbClr val="FFFFFF"/>
                 </a:solidFill>
@@ -6604,7 +6605,7 @@
           <a:p>
             <a:pPr algn="l"/>
             <a:r>
-              <a:rPr sz="1200" b="0">
+              <a:rPr sz="1200" b="0" i="0">
                 <a:solidFill>
                   <a:srgbClr val="E8F4FD"/>
                 </a:solidFill>
@@ -6728,7 +6729,7 @@
           <a:p>
             <a:pPr algn="ctr"/>
             <a:r>
-              <a:rPr sz="1100" b="1">
+              <a:rPr sz="1100" b="1" i="0">
                 <a:solidFill>
                   <a:srgbClr val="666666"/>
                 </a:solidFill>
@@ -6762,7 +6763,7 @@
           <a:p>
             <a:pPr algn="ctr"/>
             <a:r>
-              <a:rPr sz="2400" b="1">
+              <a:rPr sz="2400" b="1" i="0">
                 <a:solidFill>
                   <a:srgbClr val="10B981"/>
                 </a:solidFill>
@@ -6842,7 +6843,7 @@
           <a:p>
             <a:pPr algn="ctr"/>
             <a:r>
-              <a:rPr sz="1100" b="1">
+              <a:rPr sz="1100" b="1" i="0">
                 <a:solidFill>
                   <a:srgbClr val="666666"/>
                 </a:solidFill>
@@ -6876,7 +6877,7 @@
           <a:p>
             <a:pPr algn="ctr"/>
             <a:r>
-              <a:rPr sz="2000" b="1">
+              <a:rPr sz="2000" b="1" i="0">
                 <a:solidFill>
                   <a:srgbClr val="10B981"/>
                 </a:solidFill>
@@ -6956,7 +6957,7 @@
           <a:p>
             <a:pPr algn="ctr"/>
             <a:r>
-              <a:rPr sz="1100" b="1">
+              <a:rPr sz="1100" b="1" i="0">
                 <a:solidFill>
                   <a:srgbClr val="666666"/>
                 </a:solidFill>
@@ -6990,7 +6991,7 @@
           <a:p>
             <a:pPr algn="ctr"/>
             <a:r>
-              <a:rPr sz="2800" b="1">
+              <a:rPr sz="2800" b="1" i="0">
                 <a:solidFill>
                   <a:srgbClr val="0071DC"/>
                 </a:solidFill>
@@ -7024,7 +7025,7 @@
           <a:p>
             <a:pPr algn="l"/>
             <a:r>
-              <a:rPr sz="1300" b="1">
+              <a:rPr sz="1300" b="1" i="0">
                 <a:solidFill>
                   <a:srgbClr val="041E42"/>
                 </a:solidFill>
@@ -7516,7 +7517,7 @@
           <a:p>
             <a:pPr algn="l"/>
             <a:r>
-              <a:rPr sz="1300" b="1">
+              <a:rPr sz="1300" b="1" i="0">
                 <a:solidFill>
                   <a:srgbClr val="041E42"/>
                 </a:solidFill>
@@ -7836,7 +7837,7 @@
           <a:p>
             <a:pPr algn="l"/>
             <a:r>
-              <a:rPr sz="900" b="0">
+              <a:rPr sz="900" b="0" i="0">
                 <a:solidFill>
                   <a:srgbClr val="666666"/>
                 </a:solidFill>
@@ -7870,12 +7871,12 @@
           <a:p>
             <a:pPr algn="r"/>
             <a:r>
-              <a:rPr sz="900" b="0">
+              <a:rPr sz="900" b="0" i="0">
                 <a:solidFill>
                   <a:srgbClr val="666666"/>
                 </a:solidFill>
               </a:rPr>
-              <a:t>13 / 22</a:t>
+              <a:t>13 / 23</a:t>
             </a:r>
           </a:p>
         </p:txBody>
@@ -7966,7 +7967,7 @@
           <a:p>
             <a:pPr algn="l"/>
             <a:r>
-              <a:rPr sz="2600" b="1">
+              <a:rPr sz="2600" b="1" i="0">
                 <a:solidFill>
                   <a:srgbClr val="FFFFFF"/>
                 </a:solidFill>
@@ -8000,7 +8001,7 @@
           <a:p>
             <a:pPr algn="l"/>
             <a:r>
-              <a:rPr sz="1200" b="0">
+              <a:rPr sz="1200" b="0" i="0">
                 <a:solidFill>
                   <a:srgbClr val="E8F4FD"/>
                 </a:solidFill>
@@ -8168,7 +8169,7 @@
           <a:p>
             <a:pPr algn="ctr"/>
             <a:r>
-              <a:rPr sz="1100" b="1">
+              <a:rPr sz="1100" b="1" i="0">
                 <a:solidFill>
                   <a:srgbClr val="FFFFFF"/>
                 </a:solidFill>
@@ -8202,7 +8203,7 @@
           <a:p>
             <a:pPr algn="ctr"/>
             <a:r>
-              <a:rPr sz="1300" b="1">
+              <a:rPr sz="1300" b="1" i="0">
                 <a:solidFill>
                   <a:srgbClr val="041E42"/>
                 </a:solidFill>
@@ -8236,7 +8237,7 @@
           <a:p>
             <a:pPr algn="ctr"/>
             <a:r>
-              <a:rPr sz="1100" b="0">
+              <a:rPr sz="1100" b="0" i="0">
                 <a:solidFill>
                   <a:srgbClr val="333333"/>
                 </a:solidFill>
@@ -8247,7 +8248,7 @@
           <a:p>
             <a:pPr algn="ctr"/>
             <a:r>
-              <a:rPr sz="1100" b="0">
+              <a:rPr sz="1100" b="0" i="0">
                 <a:solidFill>
                   <a:srgbClr val="333333"/>
                 </a:solidFill>
@@ -8258,7 +8259,7 @@
           <a:p>
             <a:pPr algn="ctr"/>
             <a:r>
-              <a:rPr sz="1100" b="0">
+              <a:rPr sz="1100" b="0" i="0">
                 <a:solidFill>
                   <a:srgbClr val="333333"/>
                 </a:solidFill>
@@ -8425,7 +8426,7 @@
           <a:p>
             <a:pPr algn="ctr"/>
             <a:r>
-              <a:rPr sz="1100" b="1">
+              <a:rPr sz="1100" b="1" i="0">
                 <a:solidFill>
                   <a:srgbClr val="FFFFFF"/>
                 </a:solidFill>
@@ -8459,7 +8460,7 @@
           <a:p>
             <a:pPr algn="ctr"/>
             <a:r>
-              <a:rPr sz="1300" b="1">
+              <a:rPr sz="1300" b="1" i="0">
                 <a:solidFill>
                   <a:srgbClr val="041E42"/>
                 </a:solidFill>
@@ -8493,7 +8494,7 @@
           <a:p>
             <a:pPr algn="ctr"/>
             <a:r>
-              <a:rPr sz="1100" b="0">
+              <a:rPr sz="1100" b="0" i="0">
                 <a:solidFill>
                   <a:srgbClr val="333333"/>
                 </a:solidFill>
@@ -8504,7 +8505,7 @@
           <a:p>
             <a:pPr algn="ctr"/>
             <a:r>
-              <a:rPr sz="1100" b="0">
+              <a:rPr sz="1100" b="0" i="0">
                 <a:solidFill>
                   <a:srgbClr val="333333"/>
                 </a:solidFill>
@@ -8515,7 +8516,7 @@
           <a:p>
             <a:pPr algn="ctr"/>
             <a:r>
-              <a:rPr sz="1100" b="0">
+              <a:rPr sz="1100" b="0" i="0">
                 <a:solidFill>
                   <a:srgbClr val="333333"/>
                 </a:solidFill>
@@ -8682,7 +8683,7 @@
           <a:p>
             <a:pPr algn="ctr"/>
             <a:r>
-              <a:rPr sz="1100" b="1">
+              <a:rPr sz="1100" b="1" i="0">
                 <a:solidFill>
                   <a:srgbClr val="FFFFFF"/>
                 </a:solidFill>
@@ -8716,7 +8717,7 @@
           <a:p>
             <a:pPr algn="ctr"/>
             <a:r>
-              <a:rPr sz="1300" b="1">
+              <a:rPr sz="1300" b="1" i="0">
                 <a:solidFill>
                   <a:srgbClr val="041E42"/>
                 </a:solidFill>
@@ -8750,7 +8751,7 @@
           <a:p>
             <a:pPr algn="ctr"/>
             <a:r>
-              <a:rPr sz="1100" b="0">
+              <a:rPr sz="1100" b="0" i="0">
                 <a:solidFill>
                   <a:srgbClr val="333333"/>
                 </a:solidFill>
@@ -8761,7 +8762,7 @@
           <a:p>
             <a:pPr algn="ctr"/>
             <a:r>
-              <a:rPr sz="1100" b="0">
+              <a:rPr sz="1100" b="0" i="0">
                 <a:solidFill>
                   <a:srgbClr val="333333"/>
                 </a:solidFill>
@@ -8772,7 +8773,7 @@
           <a:p>
             <a:pPr algn="ctr"/>
             <a:r>
-              <a:rPr sz="1100" b="0">
+              <a:rPr sz="1100" b="0" i="0">
                 <a:solidFill>
                   <a:srgbClr val="333333"/>
                 </a:solidFill>
@@ -8939,7 +8940,7 @@
           <a:p>
             <a:pPr algn="ctr"/>
             <a:r>
-              <a:rPr sz="1100" b="1">
+              <a:rPr sz="1100" b="1" i="0">
                 <a:solidFill>
                   <a:srgbClr val="FFFFFF"/>
                 </a:solidFill>
@@ -8973,7 +8974,7 @@
           <a:p>
             <a:pPr algn="ctr"/>
             <a:r>
-              <a:rPr sz="1300" b="1">
+              <a:rPr sz="1300" b="1" i="0">
                 <a:solidFill>
                   <a:srgbClr val="041E42"/>
                 </a:solidFill>
@@ -9007,7 +9008,7 @@
           <a:p>
             <a:pPr algn="ctr"/>
             <a:r>
-              <a:rPr sz="1100" b="0">
+              <a:rPr sz="1100" b="0" i="0">
                 <a:solidFill>
                   <a:srgbClr val="333333"/>
                 </a:solidFill>
@@ -9018,7 +9019,7 @@
           <a:p>
             <a:pPr algn="ctr"/>
             <a:r>
-              <a:rPr sz="1100" b="0">
+              <a:rPr sz="1100" b="0" i="0">
                 <a:solidFill>
                   <a:srgbClr val="333333"/>
                 </a:solidFill>
@@ -9029,7 +9030,7 @@
           <a:p>
             <a:pPr algn="ctr"/>
             <a:r>
-              <a:rPr sz="1100" b="0">
+              <a:rPr sz="1100" b="0" i="0">
                 <a:solidFill>
                   <a:srgbClr val="333333"/>
                 </a:solidFill>
@@ -9063,7 +9064,7 @@
           <a:p>
             <a:pPr algn="l"/>
             <a:r>
-              <a:rPr sz="1300" b="1">
+              <a:rPr sz="1300" b="1" i="0">
                 <a:solidFill>
                   <a:srgbClr val="041E42"/>
                 </a:solidFill>
@@ -9641,7 +9642,7 @@
           <a:p>
             <a:pPr algn="l"/>
             <a:r>
-              <a:rPr sz="900" b="0">
+              <a:rPr sz="900" b="0" i="0">
                 <a:solidFill>
                   <a:srgbClr val="666666"/>
                 </a:solidFill>
@@ -9675,12 +9676,12 @@
           <a:p>
             <a:pPr algn="r"/>
             <a:r>
-              <a:rPr sz="900" b="0">
+              <a:rPr sz="900" b="0" i="0">
                 <a:solidFill>
                   <a:srgbClr val="666666"/>
                 </a:solidFill>
               </a:rPr>
-              <a:t>14 / 22</a:t>
+              <a:t>14 / 23</a:t>
             </a:r>
           </a:p>
         </p:txBody>
@@ -9771,7 +9772,7 @@
           <a:p>
             <a:pPr algn="l"/>
             <a:r>
-              <a:rPr sz="2600" b="1">
+              <a:rPr sz="2600" b="1" i="0">
                 <a:solidFill>
                   <a:srgbClr val="FFFFFF"/>
                 </a:solidFill>
@@ -9805,7 +9806,7 @@
           <a:p>
             <a:pPr algn="l"/>
             <a:r>
-              <a:rPr sz="1200" b="0">
+              <a:rPr sz="1200" b="0" i="0">
                 <a:solidFill>
                   <a:srgbClr val="E8F4FD"/>
                 </a:solidFill>
@@ -9929,7 +9930,7 @@
           <a:p>
             <a:pPr algn="ctr"/>
             <a:r>
-              <a:rPr sz="1100" b="1">
+              <a:rPr sz="1100" b="1" i="0">
                 <a:solidFill>
                   <a:srgbClr val="666666"/>
                 </a:solidFill>
@@ -9963,7 +9964,7 @@
           <a:p>
             <a:pPr algn="ctr"/>
             <a:r>
-              <a:rPr sz="3800" b="1">
+              <a:rPr sz="3800" b="1" i="0">
                 <a:solidFill>
                   <a:srgbClr val="D97706"/>
                 </a:solidFill>
@@ -10043,7 +10044,7 @@
           <a:p>
             <a:pPr algn="ctr"/>
             <a:r>
-              <a:rPr sz="1100" b="1">
+              <a:rPr sz="1100" b="1" i="0">
                 <a:solidFill>
                   <a:srgbClr val="666666"/>
                 </a:solidFill>
@@ -10077,7 +10078,7 @@
           <a:p>
             <a:pPr algn="ctr"/>
             <a:r>
-              <a:rPr sz="3800" b="1">
+              <a:rPr sz="3800" b="1" i="0">
                 <a:solidFill>
                   <a:srgbClr val="10B981"/>
                 </a:solidFill>
@@ -10157,7 +10158,7 @@
           <a:p>
             <a:pPr algn="ctr"/>
             <a:r>
-              <a:rPr sz="1100" b="1">
+              <a:rPr sz="1100" b="1" i="0">
                 <a:solidFill>
                   <a:srgbClr val="666666"/>
                 </a:solidFill>
@@ -10191,7 +10192,7 @@
           <a:p>
             <a:pPr algn="ctr"/>
             <a:r>
-              <a:rPr sz="3800" b="1">
+              <a:rPr sz="3800" b="1" i="0">
                 <a:solidFill>
                   <a:srgbClr val="0071DC"/>
                 </a:solidFill>
@@ -10225,7 +10226,7 @@
           <a:p>
             <a:pPr algn="l"/>
             <a:r>
-              <a:rPr sz="1300" b="1">
+              <a:rPr sz="1300" b="1" i="0">
                 <a:solidFill>
                   <a:srgbClr val="041E42"/>
                 </a:solidFill>
@@ -10305,7 +10306,7 @@
           <a:p>
             <a:pPr algn="ctr"/>
             <a:r>
-              <a:rPr sz="1800" b="1">
+              <a:rPr sz="1800" b="1" i="0">
                 <a:solidFill>
                   <a:srgbClr val="041E42"/>
                 </a:solidFill>
@@ -10385,7 +10386,7 @@
           <a:p>
             <a:pPr algn="l"/>
             <a:r>
-              <a:rPr sz="1200" b="1">
+              <a:rPr sz="1200" b="1" i="0">
                 <a:solidFill>
                   <a:srgbClr val="10B981"/>
                 </a:solidFill>
@@ -10419,7 +10420,7 @@
           <a:p>
             <a:pPr algn="l"/>
             <a:r>
-              <a:rPr sz="1100" b="0">
+              <a:rPr sz="1100" b="0" i="0">
                 <a:solidFill>
                   <a:srgbClr val="333333"/>
                 </a:solidFill>
@@ -10499,7 +10500,7 @@
           <a:p>
             <a:pPr algn="l"/>
             <a:r>
-              <a:rPr sz="1200" b="1">
+              <a:rPr sz="1200" b="1" i="0">
                 <a:solidFill>
                   <a:srgbClr val="0071DC"/>
                 </a:solidFill>
@@ -10616,7 +10617,7 @@
           <a:p>
             <a:pPr algn="l"/>
             <a:r>
-              <a:rPr sz="900" b="0">
+              <a:rPr sz="900" b="0" i="0">
                 <a:solidFill>
                   <a:srgbClr val="666666"/>
                 </a:solidFill>
@@ -10650,12 +10651,12 @@
           <a:p>
             <a:pPr algn="r"/>
             <a:r>
-              <a:rPr sz="900" b="0">
+              <a:rPr sz="900" b="0" i="0">
                 <a:solidFill>
                   <a:srgbClr val="666666"/>
                 </a:solidFill>
               </a:rPr>
-              <a:t>15 / 22</a:t>
+              <a:t>15 / 23</a:t>
             </a:r>
           </a:p>
         </p:txBody>
@@ -10746,7 +10747,7 @@
           <a:p>
             <a:pPr algn="l"/>
             <a:r>
-              <a:rPr sz="2600" b="1">
+              <a:rPr sz="2600" b="1" i="0">
                 <a:solidFill>
                   <a:srgbClr val="FFFFFF"/>
                 </a:solidFill>
@@ -10780,7 +10781,7 @@
           <a:p>
             <a:pPr algn="l"/>
             <a:r>
-              <a:rPr sz="1200" b="0">
+              <a:rPr sz="1200" b="0" i="0">
                 <a:solidFill>
                   <a:srgbClr val="E8F4FD"/>
                 </a:solidFill>
@@ -11918,7 +11919,7 @@
           <a:p>
             <a:pPr algn="l"/>
             <a:r>
-              <a:rPr sz="900" b="0">
+              <a:rPr sz="900" b="0" i="0">
                 <a:solidFill>
                   <a:srgbClr val="666666"/>
                 </a:solidFill>
@@ -11952,12 +11953,12 @@
           <a:p>
             <a:pPr algn="r"/>
             <a:r>
-              <a:rPr sz="900" b="0">
+              <a:rPr sz="900" b="0" i="0">
                 <a:solidFill>
                   <a:srgbClr val="666666"/>
                 </a:solidFill>
               </a:rPr>
-              <a:t>16 / 22</a:t>
+              <a:t>16 / 23</a:t>
             </a:r>
           </a:p>
         </p:txBody>
@@ -12048,7 +12049,7 @@
           <a:p>
             <a:pPr algn="l"/>
             <a:r>
-              <a:rPr sz="2600" b="1">
+              <a:rPr sz="2600" b="1" i="0">
                 <a:solidFill>
                   <a:srgbClr val="FFFFFF"/>
                 </a:solidFill>
@@ -12082,7 +12083,7 @@
           <a:p>
             <a:pPr algn="l"/>
             <a:r>
-              <a:rPr sz="1200" b="0">
+              <a:rPr sz="1200" b="0" i="0">
                 <a:solidFill>
                   <a:srgbClr val="E8F4FD"/>
                 </a:solidFill>
@@ -12250,7 +12251,7 @@
           <a:p>
             <a:pPr algn="ctr"/>
             <a:r>
-              <a:rPr sz="2000" b="1">
+              <a:rPr sz="2000" b="1" i="0">
                 <a:solidFill>
                   <a:srgbClr val="FFFFFF"/>
                 </a:solidFill>
@@ -12284,7 +12285,7 @@
           <a:p>
             <a:pPr algn="l"/>
             <a:r>
-              <a:rPr sz="1300" b="1">
+              <a:rPr sz="1300" b="1" i="0">
                 <a:solidFill>
                   <a:srgbClr val="041E42"/>
                 </a:solidFill>
@@ -12318,7 +12319,7 @@
           <a:p>
             <a:pPr algn="l"/>
             <a:r>
-              <a:rPr sz="1100" b="0">
+              <a:rPr sz="1100" b="0" i="0">
                 <a:solidFill>
                   <a:srgbClr val="333333"/>
                 </a:solidFill>
@@ -12442,7 +12443,7 @@
           <a:p>
             <a:pPr algn="ctr"/>
             <a:r>
-              <a:rPr sz="2000" b="1">
+              <a:rPr sz="2000" b="1" i="0">
                 <a:solidFill>
                   <a:srgbClr val="FFFFFF"/>
                 </a:solidFill>
@@ -12476,7 +12477,7 @@
           <a:p>
             <a:pPr algn="l"/>
             <a:r>
-              <a:rPr sz="1300" b="1">
+              <a:rPr sz="1300" b="1" i="0">
                 <a:solidFill>
                   <a:srgbClr val="041E42"/>
                 </a:solidFill>
@@ -12510,7 +12511,7 @@
           <a:p>
             <a:pPr algn="l"/>
             <a:r>
-              <a:rPr sz="1100" b="0">
+              <a:rPr sz="1100" b="0" i="0">
                 <a:solidFill>
                   <a:srgbClr val="333333"/>
                 </a:solidFill>
@@ -12634,7 +12635,7 @@
           <a:p>
             <a:pPr algn="ctr"/>
             <a:r>
-              <a:rPr sz="2000" b="1">
+              <a:rPr sz="2000" b="1" i="0">
                 <a:solidFill>
                   <a:srgbClr val="FFFFFF"/>
                 </a:solidFill>
@@ -12668,7 +12669,7 @@
           <a:p>
             <a:pPr algn="l"/>
             <a:r>
-              <a:rPr sz="1300" b="1">
+              <a:rPr sz="1300" b="1" i="0">
                 <a:solidFill>
                   <a:srgbClr val="041E42"/>
                 </a:solidFill>
@@ -12702,7 +12703,7 @@
           <a:p>
             <a:pPr algn="l"/>
             <a:r>
-              <a:rPr sz="1100" b="0">
+              <a:rPr sz="1100" b="0" i="0">
                 <a:solidFill>
                   <a:srgbClr val="333333"/>
                 </a:solidFill>
@@ -12826,7 +12827,7 @@
           <a:p>
             <a:pPr algn="ctr"/>
             <a:r>
-              <a:rPr sz="2000" b="1">
+              <a:rPr sz="2000" b="1" i="0">
                 <a:solidFill>
                   <a:srgbClr val="FFFFFF"/>
                 </a:solidFill>
@@ -12860,7 +12861,7 @@
           <a:p>
             <a:pPr algn="l"/>
             <a:r>
-              <a:rPr sz="1300" b="1">
+              <a:rPr sz="1300" b="1" i="0">
                 <a:solidFill>
                   <a:srgbClr val="041E42"/>
                 </a:solidFill>
@@ -12894,7 +12895,7 @@
           <a:p>
             <a:pPr algn="l"/>
             <a:r>
-              <a:rPr sz="1100" b="0">
+              <a:rPr sz="1100" b="0" i="0">
                 <a:solidFill>
                   <a:srgbClr val="333333"/>
                 </a:solidFill>
@@ -13018,7 +13019,7 @@
           <a:p>
             <a:pPr algn="ctr"/>
             <a:r>
-              <a:rPr sz="2000" b="1">
+              <a:rPr sz="2000" b="1" i="0">
                 <a:solidFill>
                   <a:srgbClr val="FFFFFF"/>
                 </a:solidFill>
@@ -13052,7 +13053,7 @@
           <a:p>
             <a:pPr algn="l"/>
             <a:r>
-              <a:rPr sz="1300" b="1">
+              <a:rPr sz="1300" b="1" i="0">
                 <a:solidFill>
                   <a:srgbClr val="041E42"/>
                 </a:solidFill>
@@ -13086,7 +13087,7 @@
           <a:p>
             <a:pPr algn="l"/>
             <a:r>
-              <a:rPr sz="1100" b="0">
+              <a:rPr sz="1100" b="0" i="0">
                 <a:solidFill>
                   <a:srgbClr val="333333"/>
                 </a:solidFill>
@@ -13120,7 +13121,7 @@
           <a:p>
             <a:pPr algn="l"/>
             <a:r>
-              <a:rPr sz="900" b="0">
+              <a:rPr sz="900" b="0" i="0">
                 <a:solidFill>
                   <a:srgbClr val="666666"/>
                 </a:solidFill>
@@ -13154,12 +13155,12 @@
           <a:p>
             <a:pPr algn="r"/>
             <a:r>
-              <a:rPr sz="900" b="0">
+              <a:rPr sz="900" b="0" i="0">
                 <a:solidFill>
                   <a:srgbClr val="666666"/>
                 </a:solidFill>
               </a:rPr>
-              <a:t>17 / 22</a:t>
+              <a:t>17 / 23</a:t>
             </a:r>
           </a:p>
         </p:txBody>
@@ -13250,7 +13251,7 @@
           <a:p>
             <a:pPr algn="l"/>
             <a:r>
-              <a:rPr sz="2600" b="1">
+              <a:rPr sz="2600" b="1" i="0">
                 <a:solidFill>
                   <a:srgbClr val="FFFFFF"/>
                 </a:solidFill>
@@ -13284,7 +13285,7 @@
           <a:p>
             <a:pPr algn="l"/>
             <a:r>
-              <a:rPr sz="1200" b="0">
+              <a:rPr sz="1200" b="0" i="0">
                 <a:solidFill>
                   <a:srgbClr val="E8F4FD"/>
                 </a:solidFill>
@@ -13386,7 +13387,7 @@
           <a:p>
             <a:pPr algn="ctr"/>
             <a:r>
-              <a:rPr sz="1100" b="1">
+              <a:rPr sz="1100" b="1" i="0">
                 <a:solidFill>
                   <a:srgbClr val="041E42"/>
                 </a:solidFill>
@@ -13444,7 +13445,7 @@
           <a:p>
             <a:pPr algn="ctr"/>
             <a:r>
-              <a:rPr sz="1100" b="1">
+              <a:rPr sz="1100" b="1" i="0">
                 <a:solidFill>
                   <a:srgbClr val="041E42"/>
                 </a:solidFill>
@@ -13502,7 +13503,7 @@
           <a:p>
             <a:pPr algn="ctr"/>
             <a:r>
-              <a:rPr sz="1100" b="1">
+              <a:rPr sz="1100" b="1" i="0">
                 <a:solidFill>
                   <a:srgbClr val="041E42"/>
                 </a:solidFill>
@@ -13560,7 +13561,7 @@
           <a:p>
             <a:pPr algn="ctr"/>
             <a:r>
-              <a:rPr sz="1100" b="1">
+              <a:rPr sz="1100" b="1" i="0">
                 <a:solidFill>
                   <a:srgbClr val="041E42"/>
                 </a:solidFill>
@@ -13618,7 +13619,7 @@
           <a:p>
             <a:pPr algn="ctr"/>
             <a:r>
-              <a:rPr sz="1100" b="1">
+              <a:rPr sz="1100" b="1" i="0">
                 <a:solidFill>
                   <a:srgbClr val="041E42"/>
                 </a:solidFill>
@@ -13676,7 +13677,7 @@
           <a:p>
             <a:pPr algn="ctr"/>
             <a:r>
-              <a:rPr sz="1100" b="1">
+              <a:rPr sz="1100" b="1" i="0">
                 <a:solidFill>
                   <a:srgbClr val="041E42"/>
                 </a:solidFill>
@@ -13710,7 +13711,7 @@
           <a:p>
             <a:pPr algn="l"/>
             <a:r>
-              <a:rPr sz="900" b="0">
+              <a:rPr sz="900" b="0" i="0">
                 <a:solidFill>
                   <a:srgbClr val="666666"/>
                 </a:solidFill>
@@ -13744,12 +13745,12 @@
           <a:p>
             <a:pPr algn="r"/>
             <a:r>
-              <a:rPr sz="900" b="0">
+              <a:rPr sz="900" b="0" i="0">
                 <a:solidFill>
                   <a:srgbClr val="666666"/>
                 </a:solidFill>
               </a:rPr>
-              <a:t>18 / 22</a:t>
+              <a:t>18 / 23</a:t>
             </a:r>
           </a:p>
         </p:txBody>
@@ -13840,7 +13841,7 @@
           <a:p>
             <a:pPr algn="l"/>
             <a:r>
-              <a:rPr sz="2600" b="1">
+              <a:rPr sz="2600" b="1" i="0">
                 <a:solidFill>
                   <a:srgbClr val="FFFFFF"/>
                 </a:solidFill>
@@ -13874,7 +13875,7 @@
           <a:p>
             <a:pPr algn="l"/>
             <a:r>
-              <a:rPr sz="1200" b="0">
+              <a:rPr sz="1200" b="0" i="0">
                 <a:solidFill>
                   <a:srgbClr val="E8F4FD"/>
                 </a:solidFill>
@@ -13998,7 +13999,7 @@
           <a:p>
             <a:pPr algn="l"/>
             <a:r>
-              <a:rPr sz="1300" b="1">
+              <a:rPr sz="1300" b="1" i="0">
                 <a:solidFill>
                   <a:srgbClr val="10B981"/>
                 </a:solidFill>
@@ -14176,7 +14177,7 @@
           <a:p>
             <a:pPr algn="l"/>
             <a:r>
-              <a:rPr sz="1300" b="1">
+              <a:rPr sz="1300" b="1" i="0">
                 <a:solidFill>
                   <a:srgbClr val="D97706"/>
                 </a:solidFill>
@@ -14354,7 +14355,7 @@
           <a:p>
             <a:pPr algn="l"/>
             <a:r>
-              <a:rPr sz="1100" b="1">
+              <a:rPr sz="1100" b="1" i="0">
                 <a:solidFill>
                   <a:srgbClr val="0071DC"/>
                 </a:solidFill>
@@ -14388,7 +14389,7 @@
           <a:p>
             <a:pPr algn="l"/>
             <a:r>
-              <a:rPr sz="1100" b="0">
+              <a:rPr sz="1100" b="0" i="0">
                 <a:solidFill>
                   <a:srgbClr val="333333"/>
                 </a:solidFill>
@@ -14422,7 +14423,7 @@
           <a:p>
             <a:pPr algn="l"/>
             <a:r>
-              <a:rPr sz="900" b="0">
+              <a:rPr sz="900" b="0" i="0">
                 <a:solidFill>
                   <a:srgbClr val="666666"/>
                 </a:solidFill>
@@ -14456,12 +14457,12 @@
           <a:p>
             <a:pPr algn="r"/>
             <a:r>
-              <a:rPr sz="900" b="0">
+              <a:rPr sz="900" b="0" i="0">
                 <a:solidFill>
                   <a:srgbClr val="666666"/>
                 </a:solidFill>
               </a:rPr>
-              <a:t>19 / 22</a:t>
+              <a:t>19 / 23</a:t>
             </a:r>
           </a:p>
         </p:txBody>
@@ -14552,7 +14553,7 @@
           <a:p>
             <a:pPr algn="l"/>
             <a:r>
-              <a:rPr sz="2600" b="1">
+              <a:rPr sz="2600" b="1" i="0">
                 <a:solidFill>
                   <a:srgbClr val="FFFFFF"/>
                 </a:solidFill>
@@ -14586,7 +14587,7 @@
           <a:p>
             <a:pPr algn="l"/>
             <a:r>
-              <a:rPr sz="1200" b="0">
+              <a:rPr sz="1200" b="0" i="0">
                 <a:solidFill>
                   <a:srgbClr val="E8F4FD"/>
                 </a:solidFill>
@@ -14710,7 +14711,7 @@
           <a:p>
             <a:pPr algn="l"/>
             <a:r>
-              <a:rPr sz="1400" b="1">
+              <a:rPr sz="1400" b="1" i="0">
                 <a:solidFill>
                   <a:srgbClr val="0071DC"/>
                 </a:solidFill>
@@ -14744,7 +14745,7 @@
           <a:p>
             <a:pPr algn="l"/>
             <a:r>
-              <a:rPr sz="1200" b="1">
+              <a:rPr sz="1200" b="1" i="0">
                 <a:solidFill>
                   <a:srgbClr val="041E42"/>
                 </a:solidFill>
@@ -14778,7 +14779,7 @@
           <a:p>
             <a:pPr algn="l"/>
             <a:r>
-              <a:rPr sz="1000" b="0">
+              <a:rPr sz="1000" b="0" i="0">
                 <a:solidFill>
                   <a:srgbClr val="666666"/>
                 </a:solidFill>
@@ -14858,7 +14859,7 @@
           <a:p>
             <a:pPr algn="l"/>
             <a:r>
-              <a:rPr sz="1400" b="1">
+              <a:rPr sz="1400" b="1" i="0">
                 <a:solidFill>
                   <a:srgbClr val="0071DC"/>
                 </a:solidFill>
@@ -14892,7 +14893,7 @@
           <a:p>
             <a:pPr algn="l"/>
             <a:r>
-              <a:rPr sz="1200" b="1">
+              <a:rPr sz="1200" b="1" i="0">
                 <a:solidFill>
                   <a:srgbClr val="041E42"/>
                 </a:solidFill>
@@ -14926,7 +14927,7 @@
           <a:p>
             <a:pPr algn="l"/>
             <a:r>
-              <a:rPr sz="1000" b="0">
+              <a:rPr sz="1000" b="0" i="0">
                 <a:solidFill>
                   <a:srgbClr val="666666"/>
                 </a:solidFill>
@@ -15006,7 +15007,7 @@
           <a:p>
             <a:pPr algn="l"/>
             <a:r>
-              <a:rPr sz="1400" b="1">
+              <a:rPr sz="1400" b="1" i="0">
                 <a:solidFill>
                   <a:srgbClr val="0071DC"/>
                 </a:solidFill>
@@ -15040,7 +15041,7 @@
           <a:p>
             <a:pPr algn="l"/>
             <a:r>
-              <a:rPr sz="1200" b="1">
+              <a:rPr sz="1200" b="1" i="0">
                 <a:solidFill>
                   <a:srgbClr val="041E42"/>
                 </a:solidFill>
@@ -15074,7 +15075,7 @@
           <a:p>
             <a:pPr algn="l"/>
             <a:r>
-              <a:rPr sz="1000" b="0">
+              <a:rPr sz="1000" b="0" i="0">
                 <a:solidFill>
                   <a:srgbClr val="666666"/>
                 </a:solidFill>
@@ -15154,7 +15155,7 @@
           <a:p>
             <a:pPr algn="l"/>
             <a:r>
-              <a:rPr sz="1400" b="1">
+              <a:rPr sz="1400" b="1" i="0">
                 <a:solidFill>
                   <a:srgbClr val="0071DC"/>
                 </a:solidFill>
@@ -15188,7 +15189,7 @@
           <a:p>
             <a:pPr algn="l"/>
             <a:r>
-              <a:rPr sz="1200" b="1">
+              <a:rPr sz="1200" b="1" i="0">
                 <a:solidFill>
                   <a:srgbClr val="041E42"/>
                 </a:solidFill>
@@ -15222,7 +15223,7 @@
           <a:p>
             <a:pPr algn="l"/>
             <a:r>
-              <a:rPr sz="1000" b="0">
+              <a:rPr sz="1000" b="0" i="0">
                 <a:solidFill>
                   <a:srgbClr val="666666"/>
                 </a:solidFill>
@@ -15302,7 +15303,7 @@
           <a:p>
             <a:pPr algn="l"/>
             <a:r>
-              <a:rPr sz="1400" b="1">
+              <a:rPr sz="1400" b="1" i="0">
                 <a:solidFill>
                   <a:srgbClr val="0071DC"/>
                 </a:solidFill>
@@ -15336,7 +15337,7 @@
           <a:p>
             <a:pPr algn="l"/>
             <a:r>
-              <a:rPr sz="1200" b="1">
+              <a:rPr sz="1200" b="1" i="0">
                 <a:solidFill>
                   <a:srgbClr val="041E42"/>
                 </a:solidFill>
@@ -15370,7 +15371,7 @@
           <a:p>
             <a:pPr algn="l"/>
             <a:r>
-              <a:rPr sz="1000" b="0">
+              <a:rPr sz="1000" b="0" i="0">
                 <a:solidFill>
                   <a:srgbClr val="666666"/>
                 </a:solidFill>
@@ -15450,7 +15451,7 @@
           <a:p>
             <a:pPr algn="l"/>
             <a:r>
-              <a:rPr sz="1400" b="1">
+              <a:rPr sz="1400" b="1" i="0">
                 <a:solidFill>
                   <a:srgbClr val="0071DC"/>
                 </a:solidFill>
@@ -15484,7 +15485,7 @@
           <a:p>
             <a:pPr algn="l"/>
             <a:r>
-              <a:rPr sz="1200" b="1">
+              <a:rPr sz="1200" b="1" i="0">
                 <a:solidFill>
                   <a:srgbClr val="041E42"/>
                 </a:solidFill>
@@ -15518,7 +15519,7 @@
           <a:p>
             <a:pPr algn="l"/>
             <a:r>
-              <a:rPr sz="1000" b="0">
+              <a:rPr sz="1000" b="0" i="0">
                 <a:solidFill>
                   <a:srgbClr val="666666"/>
                 </a:solidFill>
@@ -15598,7 +15599,7 @@
           <a:p>
             <a:pPr algn="l"/>
             <a:r>
-              <a:rPr sz="1400" b="1">
+              <a:rPr sz="1400" b="1" i="0">
                 <a:solidFill>
                   <a:srgbClr val="0071DC"/>
                 </a:solidFill>
@@ -15632,7 +15633,7 @@
           <a:p>
             <a:pPr algn="l"/>
             <a:r>
-              <a:rPr sz="1200" b="1">
+              <a:rPr sz="1200" b="1" i="0">
                 <a:solidFill>
                   <a:srgbClr val="041E42"/>
                 </a:solidFill>
@@ -15666,7 +15667,7 @@
           <a:p>
             <a:pPr algn="l"/>
             <a:r>
-              <a:rPr sz="1000" b="0">
+              <a:rPr sz="1000" b="0" i="0">
                 <a:solidFill>
                   <a:srgbClr val="666666"/>
                 </a:solidFill>
@@ -15746,7 +15747,7 @@
           <a:p>
             <a:pPr algn="l"/>
             <a:r>
-              <a:rPr sz="1400" b="1">
+              <a:rPr sz="1400" b="1" i="0">
                 <a:solidFill>
                   <a:srgbClr val="0071DC"/>
                 </a:solidFill>
@@ -15780,7 +15781,7 @@
           <a:p>
             <a:pPr algn="l"/>
             <a:r>
-              <a:rPr sz="1200" b="1">
+              <a:rPr sz="1200" b="1" i="0">
                 <a:solidFill>
                   <a:srgbClr val="041E42"/>
                 </a:solidFill>
@@ -15814,7 +15815,7 @@
           <a:p>
             <a:pPr algn="l"/>
             <a:r>
-              <a:rPr sz="1000" b="0">
+              <a:rPr sz="1000" b="0" i="0">
                 <a:solidFill>
                   <a:srgbClr val="666666"/>
                 </a:solidFill>
@@ -15894,7 +15895,7 @@
           <a:p>
             <a:pPr algn="l"/>
             <a:r>
-              <a:rPr sz="1400" b="1">
+              <a:rPr sz="1400" b="1" i="0">
                 <a:solidFill>
                   <a:srgbClr val="0071DC"/>
                 </a:solidFill>
@@ -15928,7 +15929,7 @@
           <a:p>
             <a:pPr algn="l"/>
             <a:r>
-              <a:rPr sz="1200" b="1">
+              <a:rPr sz="1200" b="1" i="0">
                 <a:solidFill>
                   <a:srgbClr val="041E42"/>
                 </a:solidFill>
@@ -15962,7 +15963,7 @@
           <a:p>
             <a:pPr algn="l"/>
             <a:r>
-              <a:rPr sz="1000" b="0">
+              <a:rPr sz="1000" b="0" i="0">
                 <a:solidFill>
                   <a:srgbClr val="666666"/>
                 </a:solidFill>
@@ -16042,7 +16043,7 @@
           <a:p>
             <a:pPr algn="l"/>
             <a:r>
-              <a:rPr sz="1400" b="1">
+              <a:rPr sz="1400" b="1" i="0">
                 <a:solidFill>
                   <a:srgbClr val="0071DC"/>
                 </a:solidFill>
@@ -16076,7 +16077,7 @@
           <a:p>
             <a:pPr algn="l"/>
             <a:r>
-              <a:rPr sz="1200" b="1">
+              <a:rPr sz="1200" b="1" i="0">
                 <a:solidFill>
                   <a:srgbClr val="041E42"/>
                 </a:solidFill>
@@ -16110,7 +16111,7 @@
           <a:p>
             <a:pPr algn="l"/>
             <a:r>
-              <a:rPr sz="1000" b="0">
+              <a:rPr sz="1000" b="0" i="0">
                 <a:solidFill>
                   <a:srgbClr val="666666"/>
                 </a:solidFill>
@@ -16190,7 +16191,7 @@
           <a:p>
             <a:pPr algn="l"/>
             <a:r>
-              <a:rPr sz="1400" b="1">
+              <a:rPr sz="1400" b="1" i="0">
                 <a:solidFill>
                   <a:srgbClr val="0071DC"/>
                 </a:solidFill>
@@ -16224,7 +16225,7 @@
           <a:p>
             <a:pPr algn="l"/>
             <a:r>
-              <a:rPr sz="1200" b="1">
+              <a:rPr sz="1200" b="1" i="0">
                 <a:solidFill>
                   <a:srgbClr val="041E42"/>
                 </a:solidFill>
@@ -16258,7 +16259,7 @@
           <a:p>
             <a:pPr algn="l"/>
             <a:r>
-              <a:rPr sz="1000" b="0">
+              <a:rPr sz="1000" b="0" i="0">
                 <a:solidFill>
                   <a:srgbClr val="666666"/>
                 </a:solidFill>
@@ -16338,7 +16339,7 @@
           <a:p>
             <a:pPr algn="l"/>
             <a:r>
-              <a:rPr sz="1400" b="1">
+              <a:rPr sz="1400" b="1" i="0">
                 <a:solidFill>
                   <a:srgbClr val="0071DC"/>
                 </a:solidFill>
@@ -16372,7 +16373,7 @@
           <a:p>
             <a:pPr algn="l"/>
             <a:r>
-              <a:rPr sz="1200" b="1">
+              <a:rPr sz="1200" b="1" i="0">
                 <a:solidFill>
                   <a:srgbClr val="041E42"/>
                 </a:solidFill>
@@ -16406,7 +16407,7 @@
           <a:p>
             <a:pPr algn="l"/>
             <a:r>
-              <a:rPr sz="1000" b="0">
+              <a:rPr sz="1000" b="0" i="0">
                 <a:solidFill>
                   <a:srgbClr val="666666"/>
                 </a:solidFill>
@@ -16486,7 +16487,7 @@
           <a:p>
             <a:pPr algn="l"/>
             <a:r>
-              <a:rPr sz="1400" b="1">
+              <a:rPr sz="1400" b="1" i="0">
                 <a:solidFill>
                   <a:srgbClr val="0071DC"/>
                 </a:solidFill>
@@ -16520,7 +16521,7 @@
           <a:p>
             <a:pPr algn="l"/>
             <a:r>
-              <a:rPr sz="1200" b="1">
+              <a:rPr sz="1200" b="1" i="0">
                 <a:solidFill>
                   <a:srgbClr val="041E42"/>
                 </a:solidFill>
@@ -16554,7 +16555,7 @@
           <a:p>
             <a:pPr algn="l"/>
             <a:r>
-              <a:rPr sz="1000" b="0">
+              <a:rPr sz="1000" b="0" i="0">
                 <a:solidFill>
                   <a:srgbClr val="666666"/>
                 </a:solidFill>
@@ -16634,7 +16635,7 @@
           <a:p>
             <a:pPr algn="l"/>
             <a:r>
-              <a:rPr sz="1400" b="1">
+              <a:rPr sz="1400" b="1" i="0">
                 <a:solidFill>
                   <a:srgbClr val="0071DC"/>
                 </a:solidFill>
@@ -16668,7 +16669,7 @@
           <a:p>
             <a:pPr algn="l"/>
             <a:r>
-              <a:rPr sz="1200" b="1">
+              <a:rPr sz="1200" b="1" i="0">
                 <a:solidFill>
                   <a:srgbClr val="041E42"/>
                 </a:solidFill>
@@ -16702,7 +16703,7 @@
           <a:p>
             <a:pPr algn="l"/>
             <a:r>
-              <a:rPr sz="1000" b="0">
+              <a:rPr sz="1000" b="0" i="0">
                 <a:solidFill>
                   <a:srgbClr val="666666"/>
                 </a:solidFill>
@@ -16782,7 +16783,7 @@
           <a:p>
             <a:pPr algn="l"/>
             <a:r>
-              <a:rPr sz="1400" b="1">
+              <a:rPr sz="1400" b="1" i="0">
                 <a:solidFill>
                   <a:srgbClr val="0071DC"/>
                 </a:solidFill>
@@ -16816,7 +16817,7 @@
           <a:p>
             <a:pPr algn="l"/>
             <a:r>
-              <a:rPr sz="1200" b="1">
+              <a:rPr sz="1200" b="1" i="0">
                 <a:solidFill>
                   <a:srgbClr val="041E42"/>
                 </a:solidFill>
@@ -16850,7 +16851,7 @@
           <a:p>
             <a:pPr algn="l"/>
             <a:r>
-              <a:rPr sz="1000" b="0">
+              <a:rPr sz="1000" b="0" i="0">
                 <a:solidFill>
                   <a:srgbClr val="666666"/>
                 </a:solidFill>
@@ -16884,7 +16885,7 @@
           <a:p>
             <a:pPr algn="l"/>
             <a:r>
-              <a:rPr sz="900" b="0">
+              <a:rPr sz="900" b="0" i="0">
                 <a:solidFill>
                   <a:srgbClr val="666666"/>
                 </a:solidFill>
@@ -16918,12 +16919,12 @@
           <a:p>
             <a:pPr algn="r"/>
             <a:r>
-              <a:rPr sz="900" b="0">
+              <a:rPr sz="900" b="0" i="0">
                 <a:solidFill>
                   <a:srgbClr val="666666"/>
                 </a:solidFill>
               </a:rPr>
-              <a:t>2 / 22</a:t>
+              <a:t>2 / 23</a:t>
             </a:r>
           </a:p>
         </p:txBody>
@@ -17014,12 +17015,12 @@
           <a:p>
             <a:pPr algn="l"/>
             <a:r>
-              <a:rPr sz="2600" b="1">
+              <a:rPr sz="2600" b="1" i="0">
                 <a:solidFill>
                   <a:srgbClr val="FFFFFF"/>
                 </a:solidFill>
               </a:rPr>
-              <a:t>Future Work  —  4-Horizon Roadmap</a:t>
+              <a:t>Future Work  —  Track 1  ·  HITL Reduction (4 Horizons)</a:t>
             </a:r>
           </a:p>
         </p:txBody>
@@ -17048,12 +17049,12 @@
           <a:p>
             <a:pPr algn="l"/>
             <a:r>
-              <a:rPr sz="1200" b="0">
+              <a:rPr sz="1200" b="0" i="0">
                 <a:solidFill>
                   <a:srgbClr val="E8F4FD"/>
                 </a:solidFill>
               </a:rPr>
-              <a:t>From today's HITL to a Walmart-trained, mostly-autonomous replier</a:t>
+              <a:t>One of three tracks:  Track 1 HITL  ·  Track 2 Bilingual  ·  Track 3 Multi-Platform  (Tracks 2 &amp; 3 on next slide)</a:t>
             </a:r>
           </a:p>
         </p:txBody>
@@ -17216,7 +17217,7 @@
           <a:p>
             <a:pPr algn="ctr"/>
             <a:r>
-              <a:rPr sz="1100" b="1">
+              <a:rPr sz="1100" b="1" i="0">
                 <a:solidFill>
                   <a:srgbClr val="FFFFFF"/>
                 </a:solidFill>
@@ -17250,7 +17251,7 @@
           <a:p>
             <a:pPr algn="ctr"/>
             <a:r>
-              <a:rPr sz="1000" b="0">
+              <a:rPr sz="1000" b="0" i="0">
                 <a:solidFill>
                   <a:srgbClr val="FFFFFF"/>
                 </a:solidFill>
@@ -17284,7 +17285,7 @@
           <a:p>
             <a:pPr algn="l"/>
             <a:r>
-              <a:rPr sz="1400" b="1">
+              <a:rPr sz="1400" b="1" i="0">
                 <a:solidFill>
                   <a:srgbClr val="041E42"/>
                 </a:solidFill>
@@ -17318,7 +17319,7 @@
           <a:p>
             <a:pPr algn="l"/>
             <a:r>
-              <a:rPr sz="1050" b="0">
+              <a:rPr sz="1050" b="0" i="0">
                 <a:solidFill>
                   <a:srgbClr val="333333"/>
                 </a:solidFill>
@@ -17442,7 +17443,7 @@
           <a:p>
             <a:pPr algn="ctr"/>
             <a:r>
-              <a:rPr sz="1100" b="1">
+              <a:rPr sz="1100" b="1" i="0">
                 <a:solidFill>
                   <a:srgbClr val="FFFFFF"/>
                 </a:solidFill>
@@ -17476,7 +17477,7 @@
           <a:p>
             <a:pPr algn="ctr"/>
             <a:r>
-              <a:rPr sz="1000" b="0">
+              <a:rPr sz="1000" b="0" i="0">
                 <a:solidFill>
                   <a:srgbClr val="FFFFFF"/>
                 </a:solidFill>
@@ -17510,12 +17511,12 @@
           <a:p>
             <a:pPr algn="l"/>
             <a:r>
-              <a:rPr sz="1400" b="1">
+              <a:rPr sz="1400" b="1" i="0">
                 <a:solidFill>
                   <a:srgbClr val="041E42"/>
                 </a:solidFill>
               </a:rPr>
-              <a:t>Automate + go bilingual</a:t>
+              <a:t>Automate the retrain loop</a:t>
             </a:r>
           </a:p>
         </p:txBody>
@@ -17544,12 +17545,12 @@
           <a:p>
             <a:pPr algn="l"/>
             <a:r>
-              <a:rPr sz="1050" b="0">
+              <a:rPr sz="1050" b="0" i="0">
                 <a:solidFill>
                   <a:srgbClr val="333333"/>
                 </a:solidFill>
               </a:rPr>
-              <a:t>Wire the monthly ModernBERT retrain into a Cron / Airflow job with an OOF-F1 promotion gate.  Add multi-language support (start with Hindi + English) — taxonomy validated with native-speaker analysts.</a:t>
+              <a:t>Wire the monthly ModernBERT retrain into a Cron / Airflow job with an OOF-F1 promotion gate — new checkpoints ship only when they beat the current one on held-out folds.</a:t>
             </a:r>
           </a:p>
         </p:txBody>
@@ -17668,7 +17669,7 @@
           <a:p>
             <a:pPr algn="ctr"/>
             <a:r>
-              <a:rPr sz="1100" b="1">
+              <a:rPr sz="1100" b="1" i="0">
                 <a:solidFill>
                   <a:srgbClr val="FFFFFF"/>
                 </a:solidFill>
@@ -17702,7 +17703,7 @@
           <a:p>
             <a:pPr algn="ctr"/>
             <a:r>
-              <a:rPr sz="1000" b="0">
+              <a:rPr sz="1000" b="0" i="0">
                 <a:solidFill>
                   <a:srgbClr val="FFFFFF"/>
                 </a:solidFill>
@@ -17736,7 +17737,7 @@
           <a:p>
             <a:pPr algn="l"/>
             <a:r>
-              <a:rPr sz="1400" b="1">
+              <a:rPr sz="1400" b="1" i="0">
                 <a:solidFill>
                   <a:srgbClr val="041E42"/>
                 </a:solidFill>
@@ -17770,7 +17771,7 @@
           <a:p>
             <a:pPr algn="l"/>
             <a:r>
-              <a:rPr sz="1050" b="0">
+              <a:rPr sz="1050" b="0" i="0">
                 <a:solidFill>
                   <a:srgbClr val="333333"/>
                 </a:solidFill>
@@ -17894,7 +17895,7 @@
           <a:p>
             <a:pPr algn="ctr"/>
             <a:r>
-              <a:rPr sz="1100" b="1">
+              <a:rPr sz="1100" b="1" i="0">
                 <a:solidFill>
                   <a:srgbClr val="FFFFFF"/>
                 </a:solidFill>
@@ -17928,7 +17929,7 @@
           <a:p>
             <a:pPr algn="ctr"/>
             <a:r>
-              <a:rPr sz="1000" b="0">
+              <a:rPr sz="1000" b="0" i="0">
                 <a:solidFill>
                   <a:srgbClr val="FFFFFF"/>
                 </a:solidFill>
@@ -17962,7 +17963,7 @@
           <a:p>
             <a:pPr algn="l"/>
             <a:r>
-              <a:rPr sz="1400" b="1">
+              <a:rPr sz="1400" b="1" i="0">
                 <a:solidFill>
                   <a:srgbClr val="041E42"/>
                 </a:solidFill>
@@ -17996,7 +17997,7 @@
           <a:p>
             <a:pPr algn="l"/>
             <a:r>
-              <a:rPr sz="1050" b="0">
+              <a:rPr sz="1050" b="0" i="0">
                 <a:solidFill>
                   <a:srgbClr val="333333"/>
                 </a:solidFill>
@@ -18076,7 +18077,7 @@
           <a:p>
             <a:pPr algn="l"/>
             <a:r>
-              <a:rPr sz="1100" b="1">
+              <a:rPr sz="1100" b="1" i="0">
                 <a:solidFill>
                   <a:srgbClr val="0071DC"/>
                 </a:solidFill>
@@ -18110,7 +18111,7 @@
           <a:p>
             <a:pPr algn="l"/>
             <a:r>
-              <a:rPr sz="1100" b="0">
+              <a:rPr sz="1100" b="0" i="0">
                 <a:solidFill>
                   <a:srgbClr val="333333"/>
                 </a:solidFill>
@@ -18144,7 +18145,7 @@
           <a:p>
             <a:pPr algn="l"/>
             <a:r>
-              <a:rPr sz="900" b="0">
+              <a:rPr sz="900" b="0" i="0">
                 <a:solidFill>
                   <a:srgbClr val="666666"/>
                 </a:solidFill>
@@ -18178,12 +18179,12 @@
           <a:p>
             <a:pPr algn="r"/>
             <a:r>
-              <a:rPr sz="900" b="0">
+              <a:rPr sz="900" b="0" i="0">
                 <a:solidFill>
                   <a:srgbClr val="666666"/>
                 </a:solidFill>
               </a:rPr>
-              <a:t>20 / 22</a:t>
+              <a:t>20 / 23</a:t>
             </a:r>
           </a:p>
         </p:txBody>
@@ -18274,19 +18275,53 @@
           <a:p>
             <a:pPr algn="l"/>
             <a:r>
-              <a:rPr sz="2600" b="1">
+              <a:rPr sz="2600" b="1" i="0">
                 <a:solidFill>
                   <a:srgbClr val="FFFFFF"/>
                 </a:solidFill>
               </a:rPr>
-              <a:t>Source Code &amp; Deliverables</a:t>
-            </a:r>
-          </a:p>
-        </p:txBody>
-      </p:sp>
-      <p:sp>
-        <p:nvSpPr>
-          <p:cNvPr id="4" name="Rectangle 3"/>
+              <a:t>Future Work  —  Track 2  ·  Bilingual   +   Track 3  ·  Multi-Platform</a:t>
+            </a:r>
+          </a:p>
+        </p:txBody>
+      </p:sp>
+      <p:sp>
+        <p:nvSpPr>
+          <p:cNvPr id="4" name="TextBox 3"/>
+          <p:cNvSpPr txBox="1"/>
+          <p:nvPr/>
+        </p:nvSpPr>
+        <p:spPr>
+          <a:xfrm>
+            <a:off x="365760" y="457200"/>
+            <a:ext cx="11430000" cy="320040"/>
+          </a:xfrm>
+          <a:prstGeom prst="rect">
+            <a:avLst/>
+          </a:prstGeom>
+          <a:noFill/>
+        </p:spPr>
+        <p:txBody>
+          <a:bodyPr wrap="square" anchor="t">
+            <a:spAutoFit/>
+          </a:bodyPr>
+          <a:lstStyle/>
+          <a:p>
+            <a:pPr algn="l"/>
+            <a:r>
+              <a:rPr sz="1200" b="0" i="0">
+                <a:solidFill>
+                  <a:srgbClr val="E8F4FD"/>
+                </a:solidFill>
+              </a:rPr>
+              <a:t>The other two tracks that widen the pipeline's coverage while Track 1 winds HITL down</a:t>
+            </a:r>
+          </a:p>
+        </p:txBody>
+      </p:sp>
+      <p:sp>
+        <p:nvSpPr>
+          <p:cNvPr id="5" name="Rectangle 4"/>
           <p:cNvSpPr/>
           <p:nvPr/>
         </p:nvSpPr>
@@ -18330,14 +18365,478 @@
       </p:sp>
       <p:sp>
         <p:nvSpPr>
-          <p:cNvPr id="5" name="Rectangle 4"/>
+          <p:cNvPr id="6" name="Rectangle 5"/>
           <p:cNvSpPr/>
           <p:nvPr/>
         </p:nvSpPr>
         <p:spPr>
           <a:xfrm>
             <a:off x="457200" y="960120"/>
-            <a:ext cx="11247120" cy="1005840"/>
+            <a:ext cx="5532120" cy="502920"/>
+          </a:xfrm>
+          <a:prstGeom prst="rect">
+            <a:avLst/>
+          </a:prstGeom>
+          <a:solidFill>
+            <a:srgbClr val="0071DC"/>
+          </a:solidFill>
+          <a:ln>
+            <a:noFill/>
+          </a:ln>
+          <a:effectLst/>
+        </p:spPr>
+        <p:style>
+          <a:lnRef idx="1">
+            <a:schemeClr val="accent1"/>
+          </a:lnRef>
+          <a:fillRef idx="3">
+            <a:schemeClr val="accent1"/>
+          </a:fillRef>
+          <a:effectRef idx="2">
+            <a:schemeClr val="accent1"/>
+          </a:effectRef>
+          <a:fontRef idx="minor">
+            <a:schemeClr val="lt1"/>
+          </a:fontRef>
+        </p:style>
+        <p:txBody>
+          <a:bodyPr rtlCol="0" anchor="ctr"/>
+          <a:lstStyle/>
+          <a:p>
+            <a:pPr algn="ctr"/>
+          </a:p>
+        </p:txBody>
+      </p:sp>
+      <p:sp>
+        <p:nvSpPr>
+          <p:cNvPr id="7" name="TextBox 6"/>
+          <p:cNvSpPr txBox="1"/>
+          <p:nvPr/>
+        </p:nvSpPr>
+        <p:spPr>
+          <a:xfrm>
+            <a:off x="594360" y="1005840"/>
+            <a:ext cx="5257800" cy="411480"/>
+          </a:xfrm>
+          <a:prstGeom prst="rect">
+            <a:avLst/>
+          </a:prstGeom>
+          <a:noFill/>
+        </p:spPr>
+        <p:txBody>
+          <a:bodyPr wrap="square" anchor="t">
+            <a:spAutoFit/>
+          </a:bodyPr>
+          <a:lstStyle/>
+          <a:p>
+            <a:pPr algn="l"/>
+            <a:r>
+              <a:rPr sz="1400" b="1" i="0">
+                <a:solidFill>
+                  <a:srgbClr val="FFFFFF"/>
+                </a:solidFill>
+              </a:rPr>
+              <a:t>TRACK 2  ·  BILINGUAL  →  MULTILINGUAL</a:t>
+            </a:r>
+          </a:p>
+        </p:txBody>
+      </p:sp>
+      <p:sp>
+        <p:nvSpPr>
+          <p:cNvPr id="8" name="Rectangle 7"/>
+          <p:cNvSpPr/>
+          <p:nvPr/>
+        </p:nvSpPr>
+        <p:spPr>
+          <a:xfrm>
+            <a:off x="457200" y="1463040"/>
+            <a:ext cx="5532120" cy="5074920"/>
+          </a:xfrm>
+          <a:prstGeom prst="rect">
+            <a:avLst/>
+          </a:prstGeom>
+          <a:solidFill>
+            <a:srgbClr val="F5F5F5"/>
+          </a:solidFill>
+          <a:ln>
+            <a:solidFill>
+              <a:srgbClr val="0071DC"/>
+            </a:solidFill>
+          </a:ln>
+          <a:effectLst/>
+        </p:spPr>
+        <p:style>
+          <a:lnRef idx="1">
+            <a:schemeClr val="accent1"/>
+          </a:lnRef>
+          <a:fillRef idx="3">
+            <a:schemeClr val="accent1"/>
+          </a:fillRef>
+          <a:effectRef idx="2">
+            <a:schemeClr val="accent1"/>
+          </a:effectRef>
+          <a:fontRef idx="minor">
+            <a:schemeClr val="lt1"/>
+          </a:fontRef>
+        </p:style>
+        <p:txBody>
+          <a:bodyPr rtlCol="0" anchor="ctr"/>
+          <a:lstStyle/>
+          <a:p>
+            <a:pPr algn="ctr"/>
+          </a:p>
+        </p:txBody>
+      </p:sp>
+      <p:sp>
+        <p:nvSpPr>
+          <p:cNvPr id="9" name="TextBox 8"/>
+          <p:cNvSpPr txBox="1"/>
+          <p:nvPr/>
+        </p:nvSpPr>
+        <p:spPr>
+          <a:xfrm>
+            <a:off x="640080" y="1554480"/>
+            <a:ext cx="5166360" cy="365760"/>
+          </a:xfrm>
+          <a:prstGeom prst="rect">
+            <a:avLst/>
+          </a:prstGeom>
+          <a:noFill/>
+        </p:spPr>
+        <p:txBody>
+          <a:bodyPr wrap="square" anchor="t">
+            <a:spAutoFit/>
+          </a:bodyPr>
+          <a:lstStyle/>
+          <a:p>
+            <a:pPr algn="l"/>
+            <a:r>
+              <a:rPr sz="1050" b="0" i="0">
+                <a:solidFill>
+                  <a:srgbClr val="333333"/>
+                </a:solidFill>
+              </a:rPr>
+              <a:t>Why:  Indian retail subreddits are ~30 % of Walmart-family mentions but the current  langdetect  →  English-only  filter silently drops them.</a:t>
+            </a:r>
+          </a:p>
+        </p:txBody>
+      </p:sp>
+      <p:sp>
+        <p:nvSpPr>
+          <p:cNvPr id="10" name="TextBox 9"/>
+          <p:cNvSpPr txBox="1"/>
+          <p:nvPr/>
+        </p:nvSpPr>
+        <p:spPr>
+          <a:xfrm>
+            <a:off x="640080" y="1965960"/>
+            <a:ext cx="5166360" cy="274320"/>
+          </a:xfrm>
+          <a:prstGeom prst="rect">
+            <a:avLst/>
+          </a:prstGeom>
+          <a:noFill/>
+        </p:spPr>
+        <p:txBody>
+          <a:bodyPr wrap="square" anchor="t">
+            <a:spAutoFit/>
+          </a:bodyPr>
+          <a:lstStyle/>
+          <a:p>
+            <a:pPr algn="l"/>
+            <a:r>
+              <a:rPr sz="1150" b="1" i="0">
+                <a:solidFill>
+                  <a:srgbClr val="0071DC"/>
+                </a:solidFill>
+              </a:rPr>
+              <a:t>Concrete deliverables</a:t>
+            </a:r>
+          </a:p>
+        </p:txBody>
+      </p:sp>
+      <p:sp>
+        <p:nvSpPr>
+          <p:cNvPr id="11" name="TextBox 10"/>
+          <p:cNvSpPr txBox="1"/>
+          <p:nvPr/>
+        </p:nvSpPr>
+        <p:spPr>
+          <a:xfrm>
+            <a:off x="685800" y="2286000"/>
+            <a:ext cx="228600" cy="274320"/>
+          </a:xfrm>
+          <a:prstGeom prst="rect">
+            <a:avLst/>
+          </a:prstGeom>
+          <a:noFill/>
+        </p:spPr>
+        <p:txBody>
+          <a:bodyPr wrap="square" anchor="t">
+            <a:spAutoFit/>
+          </a:bodyPr>
+          <a:lstStyle/>
+          <a:p>
+            <a:pPr algn="l"/>
+            <a:r>
+              <a:rPr sz="1100" b="1" i="0">
+                <a:solidFill>
+                  <a:srgbClr val="0071DC"/>
+                </a:solidFill>
+              </a:rPr>
+              <a:t>•</a:t>
+            </a:r>
+          </a:p>
+        </p:txBody>
+      </p:sp>
+      <p:sp>
+        <p:nvSpPr>
+          <p:cNvPr id="12" name="TextBox 11"/>
+          <p:cNvSpPr txBox="1"/>
+          <p:nvPr/>
+        </p:nvSpPr>
+        <p:spPr>
+          <a:xfrm>
+            <a:off x="868680" y="2286000"/>
+            <a:ext cx="4983480" cy="777240"/>
+          </a:xfrm>
+          <a:prstGeom prst="rect">
+            <a:avLst/>
+          </a:prstGeom>
+          <a:noFill/>
+        </p:spPr>
+        <p:txBody>
+          <a:bodyPr wrap="square" anchor="t">
+            <a:spAutoFit/>
+          </a:bodyPr>
+          <a:lstStyle/>
+          <a:p>
+            <a:pPr algn="l"/>
+            <a:r>
+              <a:rPr sz="1000" b="0" i="0">
+                <a:solidFill>
+                  <a:srgbClr val="333333"/>
+                </a:solidFill>
+              </a:rPr>
+              <a:t>Extend  langdetect  to  hi + en  (later  ta / te / bn);  code-mixed 'Hinglish' handled with a mixed-script tokenizer.</a:t>
+            </a:r>
+          </a:p>
+        </p:txBody>
+      </p:sp>
+      <p:sp>
+        <p:nvSpPr>
+          <p:cNvPr id="13" name="TextBox 12"/>
+          <p:cNvSpPr txBox="1"/>
+          <p:nvPr/>
+        </p:nvSpPr>
+        <p:spPr>
+          <a:xfrm>
+            <a:off x="685800" y="3108960"/>
+            <a:ext cx="228600" cy="274320"/>
+          </a:xfrm>
+          <a:prstGeom prst="rect">
+            <a:avLst/>
+          </a:prstGeom>
+          <a:noFill/>
+        </p:spPr>
+        <p:txBody>
+          <a:bodyPr wrap="square" anchor="t">
+            <a:spAutoFit/>
+          </a:bodyPr>
+          <a:lstStyle/>
+          <a:p>
+            <a:pPr algn="l"/>
+            <a:r>
+              <a:rPr sz="1100" b="1" i="0">
+                <a:solidFill>
+                  <a:srgbClr val="0071DC"/>
+                </a:solidFill>
+              </a:rPr>
+              <a:t>•</a:t>
+            </a:r>
+          </a:p>
+        </p:txBody>
+      </p:sp>
+      <p:sp>
+        <p:nvSpPr>
+          <p:cNvPr id="14" name="TextBox 13"/>
+          <p:cNvSpPr txBox="1"/>
+          <p:nvPr/>
+        </p:nvSpPr>
+        <p:spPr>
+          <a:xfrm>
+            <a:off x="868680" y="3108960"/>
+            <a:ext cx="4983480" cy="777240"/>
+          </a:xfrm>
+          <a:prstGeom prst="rect">
+            <a:avLst/>
+          </a:prstGeom>
+          <a:noFill/>
+        </p:spPr>
+        <p:txBody>
+          <a:bodyPr wrap="square" anchor="t">
+            <a:spAutoFit/>
+          </a:bodyPr>
+          <a:lstStyle/>
+          <a:p>
+            <a:pPr algn="l"/>
+            <a:r>
+              <a:rPr sz="1000" b="0" i="0">
+                <a:solidFill>
+                  <a:srgbClr val="333333"/>
+                </a:solidFill>
+              </a:rPr>
+              <a:t>Ingestion-time translation via NLLB-200 (open-weights, 3.3 B) so downstream models stay English-only —  or —  fine-tune ModernBERT on native scripts.</a:t>
+            </a:r>
+          </a:p>
+        </p:txBody>
+      </p:sp>
+      <p:sp>
+        <p:nvSpPr>
+          <p:cNvPr id="15" name="TextBox 14"/>
+          <p:cNvSpPr txBox="1"/>
+          <p:nvPr/>
+        </p:nvSpPr>
+        <p:spPr>
+          <a:xfrm>
+            <a:off x="685800" y="3931920"/>
+            <a:ext cx="228600" cy="274320"/>
+          </a:xfrm>
+          <a:prstGeom prst="rect">
+            <a:avLst/>
+          </a:prstGeom>
+          <a:noFill/>
+        </p:spPr>
+        <p:txBody>
+          <a:bodyPr wrap="square" anchor="t">
+            <a:spAutoFit/>
+          </a:bodyPr>
+          <a:lstStyle/>
+          <a:p>
+            <a:pPr algn="l"/>
+            <a:r>
+              <a:rPr sz="1100" b="1" i="0">
+                <a:solidFill>
+                  <a:srgbClr val="0071DC"/>
+                </a:solidFill>
+              </a:rPr>
+              <a:t>•</a:t>
+            </a:r>
+          </a:p>
+        </p:txBody>
+      </p:sp>
+      <p:sp>
+        <p:nvSpPr>
+          <p:cNvPr id="16" name="TextBox 15"/>
+          <p:cNvSpPr txBox="1"/>
+          <p:nvPr/>
+        </p:nvSpPr>
+        <p:spPr>
+          <a:xfrm>
+            <a:off x="868680" y="3931920"/>
+            <a:ext cx="4983480" cy="777240"/>
+          </a:xfrm>
+          <a:prstGeom prst="rect">
+            <a:avLst/>
+          </a:prstGeom>
+          <a:noFill/>
+        </p:spPr>
+        <p:txBody>
+          <a:bodyPr wrap="square" anchor="t">
+            <a:spAutoFit/>
+          </a:bodyPr>
+          <a:lstStyle/>
+          <a:p>
+            <a:pPr algn="l"/>
+            <a:r>
+              <a:rPr sz="1000" b="0" i="0">
+                <a:solidFill>
+                  <a:srgbClr val="333333"/>
+                </a:solidFill>
+              </a:rPr>
+              <a:t>Extend aspect taxonomy for Indic retail idioms (“bill karo” for billing, “delivery kab” for late shipping).</a:t>
+            </a:r>
+          </a:p>
+        </p:txBody>
+      </p:sp>
+      <p:sp>
+        <p:nvSpPr>
+          <p:cNvPr id="17" name="TextBox 16"/>
+          <p:cNvSpPr txBox="1"/>
+          <p:nvPr/>
+        </p:nvSpPr>
+        <p:spPr>
+          <a:xfrm>
+            <a:off x="685800" y="4754880"/>
+            <a:ext cx="228600" cy="274320"/>
+          </a:xfrm>
+          <a:prstGeom prst="rect">
+            <a:avLst/>
+          </a:prstGeom>
+          <a:noFill/>
+        </p:spPr>
+        <p:txBody>
+          <a:bodyPr wrap="square" anchor="t">
+            <a:spAutoFit/>
+          </a:bodyPr>
+          <a:lstStyle/>
+          <a:p>
+            <a:pPr algn="l"/>
+            <a:r>
+              <a:rPr sz="1100" b="1" i="0">
+                <a:solidFill>
+                  <a:srgbClr val="0071DC"/>
+                </a:solidFill>
+              </a:rPr>
+              <a:t>•</a:t>
+            </a:r>
+          </a:p>
+        </p:txBody>
+      </p:sp>
+      <p:sp>
+        <p:nvSpPr>
+          <p:cNvPr id="18" name="TextBox 17"/>
+          <p:cNvSpPr txBox="1"/>
+          <p:nvPr/>
+        </p:nvSpPr>
+        <p:spPr>
+          <a:xfrm>
+            <a:off x="868680" y="4754880"/>
+            <a:ext cx="4983480" cy="777240"/>
+          </a:xfrm>
+          <a:prstGeom prst="rect">
+            <a:avLst/>
+          </a:prstGeom>
+          <a:noFill/>
+        </p:spPr>
+        <p:txBody>
+          <a:bodyPr wrap="square" anchor="t">
+            <a:spAutoFit/>
+          </a:bodyPr>
+          <a:lstStyle/>
+          <a:p>
+            <a:pPr algn="l"/>
+            <a:r>
+              <a:rPr sz="1000" b="0" i="0">
+                <a:solidFill>
+                  <a:srgbClr val="333333"/>
+                </a:solidFill>
+              </a:rPr>
+              <a:t>Native-speaker analyst validation loop —  same HITL flow, new language pool.</a:t>
+            </a:r>
+          </a:p>
+        </p:txBody>
+      </p:sp>
+      <p:sp>
+        <p:nvSpPr>
+          <p:cNvPr id="19" name="Rectangle 18"/>
+          <p:cNvSpPr/>
+          <p:nvPr/>
+        </p:nvSpPr>
+        <p:spPr>
+          <a:xfrm>
+            <a:off x="457200" y="5989320"/>
+            <a:ext cx="5532120" cy="548640"/>
           </a:xfrm>
           <a:prstGeom prst="rect">
             <a:avLst/>
@@ -18376,6 +18875,838 @@
       </p:sp>
       <p:sp>
         <p:nvSpPr>
+          <p:cNvPr id="20" name="TextBox 19"/>
+          <p:cNvSpPr txBox="1"/>
+          <p:nvPr/>
+        </p:nvSpPr>
+        <p:spPr>
+          <a:xfrm>
+            <a:off x="640080" y="6035040"/>
+            <a:ext cx="5166360" cy="457200"/>
+          </a:xfrm>
+          <a:prstGeom prst="rect">
+            <a:avLst/>
+          </a:prstGeom>
+          <a:noFill/>
+        </p:spPr>
+        <p:txBody>
+          <a:bodyPr wrap="square" anchor="t">
+            <a:spAutoFit/>
+          </a:bodyPr>
+          <a:lstStyle/>
+          <a:p>
+            <a:pPr algn="l"/>
+            <a:r>
+              <a:rPr sz="950" b="0" i="1">
+                <a:solidFill>
+                  <a:srgbClr val="333333"/>
+                </a:solidFill>
+              </a:rPr>
+              <a:t>Ships as part of Track 1 horizon 1 → 3 mo  (bilingual retrain gate) and horizon 3 → 6 mo  (Walmart-trained multilingual replier).</a:t>
+            </a:r>
+          </a:p>
+        </p:txBody>
+      </p:sp>
+      <p:sp>
+        <p:nvSpPr>
+          <p:cNvPr id="21" name="Rectangle 20"/>
+          <p:cNvSpPr/>
+          <p:nvPr/>
+        </p:nvSpPr>
+        <p:spPr>
+          <a:xfrm>
+            <a:off x="6217920" y="960120"/>
+            <a:ext cx="5532120" cy="502920"/>
+          </a:xfrm>
+          <a:prstGeom prst="rect">
+            <a:avLst/>
+          </a:prstGeom>
+          <a:solidFill>
+            <a:srgbClr val="7C3AED"/>
+          </a:solidFill>
+          <a:ln>
+            <a:noFill/>
+          </a:ln>
+          <a:effectLst/>
+        </p:spPr>
+        <p:style>
+          <a:lnRef idx="1">
+            <a:schemeClr val="accent1"/>
+          </a:lnRef>
+          <a:fillRef idx="3">
+            <a:schemeClr val="accent1"/>
+          </a:fillRef>
+          <a:effectRef idx="2">
+            <a:schemeClr val="accent1"/>
+          </a:effectRef>
+          <a:fontRef idx="minor">
+            <a:schemeClr val="lt1"/>
+          </a:fontRef>
+        </p:style>
+        <p:txBody>
+          <a:bodyPr rtlCol="0" anchor="ctr"/>
+          <a:lstStyle/>
+          <a:p>
+            <a:pPr algn="ctr"/>
+          </a:p>
+        </p:txBody>
+      </p:sp>
+      <p:sp>
+        <p:nvSpPr>
+          <p:cNvPr id="22" name="TextBox 21"/>
+          <p:cNvSpPr txBox="1"/>
+          <p:nvPr/>
+        </p:nvSpPr>
+        <p:spPr>
+          <a:xfrm>
+            <a:off x="6355080" y="1005840"/>
+            <a:ext cx="5257800" cy="411480"/>
+          </a:xfrm>
+          <a:prstGeom prst="rect">
+            <a:avLst/>
+          </a:prstGeom>
+          <a:noFill/>
+        </p:spPr>
+        <p:txBody>
+          <a:bodyPr wrap="square" anchor="t">
+            <a:spAutoFit/>
+          </a:bodyPr>
+          <a:lstStyle/>
+          <a:p>
+            <a:pPr algn="l"/>
+            <a:r>
+              <a:rPr sz="1200" b="1" i="0">
+                <a:solidFill>
+                  <a:srgbClr val="FFFFFF"/>
+                </a:solidFill>
+              </a:rPr>
+              <a:t>TRACK 3  ·  MULTI-PLATFORM  (Reddit  →  X / Facebook / Instagram / app-stores)</a:t>
+            </a:r>
+          </a:p>
+        </p:txBody>
+      </p:sp>
+      <p:sp>
+        <p:nvSpPr>
+          <p:cNvPr id="23" name="Rectangle 22"/>
+          <p:cNvSpPr/>
+          <p:nvPr/>
+        </p:nvSpPr>
+        <p:spPr>
+          <a:xfrm>
+            <a:off x="6217920" y="1463040"/>
+            <a:ext cx="5532120" cy="5074920"/>
+          </a:xfrm>
+          <a:prstGeom prst="rect">
+            <a:avLst/>
+          </a:prstGeom>
+          <a:solidFill>
+            <a:srgbClr val="F5F5F5"/>
+          </a:solidFill>
+          <a:ln>
+            <a:solidFill>
+              <a:srgbClr val="7C3AED"/>
+            </a:solidFill>
+          </a:ln>
+          <a:effectLst/>
+        </p:spPr>
+        <p:style>
+          <a:lnRef idx="1">
+            <a:schemeClr val="accent1"/>
+          </a:lnRef>
+          <a:fillRef idx="3">
+            <a:schemeClr val="accent1"/>
+          </a:fillRef>
+          <a:effectRef idx="2">
+            <a:schemeClr val="accent1"/>
+          </a:effectRef>
+          <a:fontRef idx="minor">
+            <a:schemeClr val="lt1"/>
+          </a:fontRef>
+        </p:style>
+        <p:txBody>
+          <a:bodyPr rtlCol="0" anchor="ctr"/>
+          <a:lstStyle/>
+          <a:p>
+            <a:pPr algn="ctr"/>
+          </a:p>
+        </p:txBody>
+      </p:sp>
+      <p:sp>
+        <p:nvSpPr>
+          <p:cNvPr id="24" name="TextBox 23"/>
+          <p:cNvSpPr txBox="1"/>
+          <p:nvPr/>
+        </p:nvSpPr>
+        <p:spPr>
+          <a:xfrm>
+            <a:off x="6400800" y="1554480"/>
+            <a:ext cx="5166360" cy="365760"/>
+          </a:xfrm>
+          <a:prstGeom prst="rect">
+            <a:avLst/>
+          </a:prstGeom>
+          <a:noFill/>
+        </p:spPr>
+        <p:txBody>
+          <a:bodyPr wrap="square" anchor="t">
+            <a:spAutoFit/>
+          </a:bodyPr>
+          <a:lstStyle/>
+          <a:p>
+            <a:pPr algn="l"/>
+            <a:r>
+              <a:rPr sz="1050" b="0" i="0">
+                <a:solidFill>
+                  <a:srgbClr val="333333"/>
+                </a:solidFill>
+              </a:rPr>
+              <a:t>Why:  Reddit is deliberate + long-form;  X is real-time viral;  Instagram is image-heavy (vision pipeline shines);  app-store reviews carry a star-rating ground-truth signal.</a:t>
+            </a:r>
+          </a:p>
+        </p:txBody>
+      </p:sp>
+      <p:sp>
+        <p:nvSpPr>
+          <p:cNvPr id="25" name="TextBox 24"/>
+          <p:cNvSpPr txBox="1"/>
+          <p:nvPr/>
+        </p:nvSpPr>
+        <p:spPr>
+          <a:xfrm>
+            <a:off x="6400800" y="1965960"/>
+            <a:ext cx="5166360" cy="274320"/>
+          </a:xfrm>
+          <a:prstGeom prst="rect">
+            <a:avLst/>
+          </a:prstGeom>
+          <a:noFill/>
+        </p:spPr>
+        <p:txBody>
+          <a:bodyPr wrap="square" anchor="t">
+            <a:spAutoFit/>
+          </a:bodyPr>
+          <a:lstStyle/>
+          <a:p>
+            <a:pPr algn="l"/>
+            <a:r>
+              <a:rPr sz="1150" b="1" i="0">
+                <a:solidFill>
+                  <a:srgbClr val="7C3AED"/>
+                </a:solidFill>
+              </a:rPr>
+              <a:t>Concrete deliverables</a:t>
+            </a:r>
+          </a:p>
+        </p:txBody>
+      </p:sp>
+      <p:sp>
+        <p:nvSpPr>
+          <p:cNvPr id="26" name="TextBox 25"/>
+          <p:cNvSpPr txBox="1"/>
+          <p:nvPr/>
+        </p:nvSpPr>
+        <p:spPr>
+          <a:xfrm>
+            <a:off x="6446520" y="2286000"/>
+            <a:ext cx="228600" cy="274320"/>
+          </a:xfrm>
+          <a:prstGeom prst="rect">
+            <a:avLst/>
+          </a:prstGeom>
+          <a:noFill/>
+        </p:spPr>
+        <p:txBody>
+          <a:bodyPr wrap="square" anchor="t">
+            <a:spAutoFit/>
+          </a:bodyPr>
+          <a:lstStyle/>
+          <a:p>
+            <a:pPr algn="l"/>
+            <a:r>
+              <a:rPr sz="1100" b="1" i="0">
+                <a:solidFill>
+                  <a:srgbClr val="7C3AED"/>
+                </a:solidFill>
+              </a:rPr>
+              <a:t>•</a:t>
+            </a:r>
+          </a:p>
+        </p:txBody>
+      </p:sp>
+      <p:sp>
+        <p:nvSpPr>
+          <p:cNvPr id="27" name="TextBox 26"/>
+          <p:cNvSpPr txBox="1"/>
+          <p:nvPr/>
+        </p:nvSpPr>
+        <p:spPr>
+          <a:xfrm>
+            <a:off x="6629400" y="2286000"/>
+            <a:ext cx="4983480" cy="777240"/>
+          </a:xfrm>
+          <a:prstGeom prst="rect">
+            <a:avLst/>
+          </a:prstGeom>
+          <a:noFill/>
+        </p:spPr>
+        <p:txBody>
+          <a:bodyPr wrap="square" anchor="t">
+            <a:spAutoFit/>
+          </a:bodyPr>
+          <a:lstStyle/>
+          <a:p>
+            <a:pPr algn="l"/>
+            <a:r>
+              <a:rPr sz="1000" b="0" i="0">
+                <a:solidFill>
+                  <a:srgbClr val="333333"/>
+                </a:solidFill>
+              </a:rPr>
+              <a:t>Ingestion adapters:  X API v2,  Meta Graph API (Facebook + Instagram),  Google Play / App Store review scrapers  —  each behind a common  RawPost  interface.</a:t>
+            </a:r>
+          </a:p>
+        </p:txBody>
+      </p:sp>
+      <p:sp>
+        <p:nvSpPr>
+          <p:cNvPr id="28" name="TextBox 27"/>
+          <p:cNvSpPr txBox="1"/>
+          <p:nvPr/>
+        </p:nvSpPr>
+        <p:spPr>
+          <a:xfrm>
+            <a:off x="6446520" y="3108960"/>
+            <a:ext cx="228600" cy="274320"/>
+          </a:xfrm>
+          <a:prstGeom prst="rect">
+            <a:avLst/>
+          </a:prstGeom>
+          <a:noFill/>
+        </p:spPr>
+        <p:txBody>
+          <a:bodyPr wrap="square" anchor="t">
+            <a:spAutoFit/>
+          </a:bodyPr>
+          <a:lstStyle/>
+          <a:p>
+            <a:pPr algn="l"/>
+            <a:r>
+              <a:rPr sz="1100" b="1" i="0">
+                <a:solidFill>
+                  <a:srgbClr val="7C3AED"/>
+                </a:solidFill>
+              </a:rPr>
+              <a:t>•</a:t>
+            </a:r>
+          </a:p>
+        </p:txBody>
+      </p:sp>
+      <p:sp>
+        <p:nvSpPr>
+          <p:cNvPr id="29" name="TextBox 28"/>
+          <p:cNvSpPr txBox="1"/>
+          <p:nvPr/>
+        </p:nvSpPr>
+        <p:spPr>
+          <a:xfrm>
+            <a:off x="6629400" y="3108960"/>
+            <a:ext cx="4983480" cy="777240"/>
+          </a:xfrm>
+          <a:prstGeom prst="rect">
+            <a:avLst/>
+          </a:prstGeom>
+          <a:noFill/>
+        </p:spPr>
+        <p:txBody>
+          <a:bodyPr wrap="square" anchor="t">
+            <a:spAutoFit/>
+          </a:bodyPr>
+          <a:lstStyle/>
+          <a:p>
+            <a:pPr algn="l"/>
+            <a:r>
+              <a:rPr sz="1000" b="0" i="0">
+                <a:solidFill>
+                  <a:srgbClr val="333333"/>
+                </a:solidFill>
+              </a:rPr>
+              <a:t>Per-platform pre-processing:  X dedup by retweet lineage;  Instagram routed through the vision pipeline first (caption + image);  app-store reviews carry a native  star_rating  field.</a:t>
+            </a:r>
+          </a:p>
+        </p:txBody>
+      </p:sp>
+      <p:sp>
+        <p:nvSpPr>
+          <p:cNvPr id="30" name="TextBox 29"/>
+          <p:cNvSpPr txBox="1"/>
+          <p:nvPr/>
+        </p:nvSpPr>
+        <p:spPr>
+          <a:xfrm>
+            <a:off x="6446520" y="3931920"/>
+            <a:ext cx="228600" cy="274320"/>
+          </a:xfrm>
+          <a:prstGeom prst="rect">
+            <a:avLst/>
+          </a:prstGeom>
+          <a:noFill/>
+        </p:spPr>
+        <p:txBody>
+          <a:bodyPr wrap="square" anchor="t">
+            <a:spAutoFit/>
+          </a:bodyPr>
+          <a:lstStyle/>
+          <a:p>
+            <a:pPr algn="l"/>
+            <a:r>
+              <a:rPr sz="1100" b="1" i="0">
+                <a:solidFill>
+                  <a:srgbClr val="7C3AED"/>
+                </a:solidFill>
+              </a:rPr>
+              <a:t>•</a:t>
+            </a:r>
+          </a:p>
+        </p:txBody>
+      </p:sp>
+      <p:sp>
+        <p:nvSpPr>
+          <p:cNvPr id="31" name="TextBox 30"/>
+          <p:cNvSpPr txBox="1"/>
+          <p:nvPr/>
+        </p:nvSpPr>
+        <p:spPr>
+          <a:xfrm>
+            <a:off x="6629400" y="3931920"/>
+            <a:ext cx="4983480" cy="777240"/>
+          </a:xfrm>
+          <a:prstGeom prst="rect">
+            <a:avLst/>
+          </a:prstGeom>
+          <a:noFill/>
+        </p:spPr>
+        <p:txBody>
+          <a:bodyPr wrap="square" anchor="t">
+            <a:spAutoFit/>
+          </a:bodyPr>
+          <a:lstStyle/>
+          <a:p>
+            <a:pPr algn="l"/>
+            <a:r>
+              <a:rPr sz="1000" b="0" i="0">
+                <a:solidFill>
+                  <a:srgbClr val="333333"/>
+                </a:solidFill>
+              </a:rPr>
+              <a:t>Extend priority classifier:  X viral (retweets &gt; 100) → auto P1;  app-store 1-star surge → P1;  Instagram brand-tagged post from &gt; 10 k follower account → P1.</a:t>
+            </a:r>
+          </a:p>
+        </p:txBody>
+      </p:sp>
+      <p:sp>
+        <p:nvSpPr>
+          <p:cNvPr id="32" name="TextBox 31"/>
+          <p:cNvSpPr txBox="1"/>
+          <p:nvPr/>
+        </p:nvSpPr>
+        <p:spPr>
+          <a:xfrm>
+            <a:off x="6446520" y="4754880"/>
+            <a:ext cx="228600" cy="274320"/>
+          </a:xfrm>
+          <a:prstGeom prst="rect">
+            <a:avLst/>
+          </a:prstGeom>
+          <a:noFill/>
+        </p:spPr>
+        <p:txBody>
+          <a:bodyPr wrap="square" anchor="t">
+            <a:spAutoFit/>
+          </a:bodyPr>
+          <a:lstStyle/>
+          <a:p>
+            <a:pPr algn="l"/>
+            <a:r>
+              <a:rPr sz="1100" b="1" i="0">
+                <a:solidFill>
+                  <a:srgbClr val="7C3AED"/>
+                </a:solidFill>
+              </a:rPr>
+              <a:t>•</a:t>
+            </a:r>
+          </a:p>
+        </p:txBody>
+      </p:sp>
+      <p:sp>
+        <p:nvSpPr>
+          <p:cNvPr id="33" name="TextBox 32"/>
+          <p:cNvSpPr txBox="1"/>
+          <p:nvPr/>
+        </p:nvSpPr>
+        <p:spPr>
+          <a:xfrm>
+            <a:off x="6629400" y="4754880"/>
+            <a:ext cx="4983480" cy="777240"/>
+          </a:xfrm>
+          <a:prstGeom prst="rect">
+            <a:avLst/>
+          </a:prstGeom>
+          <a:noFill/>
+        </p:spPr>
+        <p:txBody>
+          <a:bodyPr wrap="square" anchor="t">
+            <a:spAutoFit/>
+          </a:bodyPr>
+          <a:lstStyle/>
+          <a:p>
+            <a:pPr algn="l"/>
+            <a:r>
+              <a:rPr sz="1000" b="0" i="0">
+                <a:solidFill>
+                  <a:srgbClr val="333333"/>
+                </a:solidFill>
+              </a:rPr>
+              <a:t>Unified  raw_posts.source_platform  column (already stubbed) so Brand Health / Insights aggregate across platforms out of the box.</a:t>
+            </a:r>
+          </a:p>
+        </p:txBody>
+      </p:sp>
+      <p:sp>
+        <p:nvSpPr>
+          <p:cNvPr id="34" name="Rectangle 33"/>
+          <p:cNvSpPr/>
+          <p:nvPr/>
+        </p:nvSpPr>
+        <p:spPr>
+          <a:xfrm>
+            <a:off x="6217920" y="5989320"/>
+            <a:ext cx="5532120" cy="548640"/>
+          </a:xfrm>
+          <a:prstGeom prst="rect">
+            <a:avLst/>
+          </a:prstGeom>
+          <a:solidFill>
+            <a:srgbClr val="E8F4FD"/>
+          </a:solidFill>
+          <a:ln>
+            <a:solidFill>
+              <a:srgbClr val="7C3AED"/>
+            </a:solidFill>
+          </a:ln>
+          <a:effectLst/>
+        </p:spPr>
+        <p:style>
+          <a:lnRef idx="1">
+            <a:schemeClr val="accent1"/>
+          </a:lnRef>
+          <a:fillRef idx="3">
+            <a:schemeClr val="accent1"/>
+          </a:fillRef>
+          <a:effectRef idx="2">
+            <a:schemeClr val="accent1"/>
+          </a:effectRef>
+          <a:fontRef idx="minor">
+            <a:schemeClr val="lt1"/>
+          </a:fontRef>
+        </p:style>
+        <p:txBody>
+          <a:bodyPr rtlCol="0" anchor="ctr"/>
+          <a:lstStyle/>
+          <a:p>
+            <a:pPr algn="ctr"/>
+          </a:p>
+        </p:txBody>
+      </p:sp>
+      <p:sp>
+        <p:nvSpPr>
+          <p:cNvPr id="35" name="TextBox 34"/>
+          <p:cNvSpPr txBox="1"/>
+          <p:nvPr/>
+        </p:nvSpPr>
+        <p:spPr>
+          <a:xfrm>
+            <a:off x="6400800" y="6035040"/>
+            <a:ext cx="5166360" cy="457200"/>
+          </a:xfrm>
+          <a:prstGeom prst="rect">
+            <a:avLst/>
+          </a:prstGeom>
+          <a:noFill/>
+        </p:spPr>
+        <p:txBody>
+          <a:bodyPr wrap="square" anchor="t">
+            <a:spAutoFit/>
+          </a:bodyPr>
+          <a:lstStyle/>
+          <a:p>
+            <a:pPr algn="l"/>
+            <a:r>
+              <a:rPr sz="950" b="0" i="1">
+                <a:solidFill>
+                  <a:srgbClr val="333333"/>
+                </a:solidFill>
+              </a:rPr>
+              <a:t>Risks:  X API tiers ($100 / mo min);  Meta Graph needs page-level perms;  Instagram image volume needs vision-batching.</a:t>
+            </a:r>
+          </a:p>
+        </p:txBody>
+      </p:sp>
+      <p:sp>
+        <p:nvSpPr>
+          <p:cNvPr id="36" name="TextBox 35"/>
+          <p:cNvSpPr txBox="1"/>
+          <p:nvPr/>
+        </p:nvSpPr>
+        <p:spPr>
+          <a:xfrm>
+            <a:off x="365760" y="6537960"/>
+            <a:ext cx="8229600" cy="274320"/>
+          </a:xfrm>
+          <a:prstGeom prst="rect">
+            <a:avLst/>
+          </a:prstGeom>
+          <a:noFill/>
+        </p:spPr>
+        <p:txBody>
+          <a:bodyPr wrap="square" anchor="t">
+            <a:spAutoFit/>
+          </a:bodyPr>
+          <a:lstStyle/>
+          <a:p>
+            <a:pPr algn="l"/>
+            <a:r>
+              <a:rPr sz="900" b="0" i="0">
+                <a:solidFill>
+                  <a:srgbClr val="666666"/>
+                </a:solidFill>
+              </a:rPr>
+              <a:t>Retail Sentiment Intelligence  ·  BITS ZG628T Dissertation  ·  Vishal Singh  ·  Post Mid-Semester Presentation</a:t>
+            </a:r>
+          </a:p>
+        </p:txBody>
+      </p:sp>
+      <p:sp>
+        <p:nvSpPr>
+          <p:cNvPr id="37" name="TextBox 36"/>
+          <p:cNvSpPr txBox="1"/>
+          <p:nvPr/>
+        </p:nvSpPr>
+        <p:spPr>
+          <a:xfrm>
+            <a:off x="10972800" y="6537960"/>
+            <a:ext cx="1097280" cy="274320"/>
+          </a:xfrm>
+          <a:prstGeom prst="rect">
+            <a:avLst/>
+          </a:prstGeom>
+          <a:noFill/>
+        </p:spPr>
+        <p:txBody>
+          <a:bodyPr wrap="square" anchor="t">
+            <a:spAutoFit/>
+          </a:bodyPr>
+          <a:lstStyle/>
+          <a:p>
+            <a:pPr algn="r"/>
+            <a:r>
+              <a:rPr sz="900" b="0" i="0">
+                <a:solidFill>
+                  <a:srgbClr val="666666"/>
+                </a:solidFill>
+              </a:rPr>
+              <a:t>21 / 23</a:t>
+            </a:r>
+          </a:p>
+        </p:txBody>
+      </p:sp>
+    </p:spTree>
+  </p:cSld>
+  <p:clrMapOvr>
+    <a:masterClrMapping/>
+  </p:clrMapOvr>
+</p:sld>
+</file>
+
+<file path=ppt/slides/slide22.xml><?xml version="1.0" encoding="utf-8"?>
+<p:sld xmlns:a="http://schemas.openxmlformats.org/drawingml/2006/main" xmlns:p="http://schemas.openxmlformats.org/presentationml/2006/main" xmlns:r="http://schemas.openxmlformats.org/officeDocument/2006/relationships">
+  <p:cSld>
+    <p:spTree>
+      <p:nvGrpSpPr>
+        <p:cNvPr id="1" name=""/>
+        <p:cNvGrpSpPr/>
+        <p:nvPr/>
+      </p:nvGrpSpPr>
+      <p:grpSpPr/>
+      <p:sp>
+        <p:nvSpPr>
+          <p:cNvPr id="2" name="Rectangle 1"/>
+          <p:cNvSpPr/>
+          <p:nvPr/>
+        </p:nvSpPr>
+        <p:spPr>
+          <a:xfrm>
+            <a:off x="0" y="0"/>
+            <a:ext cx="12191695" cy="777240"/>
+          </a:xfrm>
+          <a:prstGeom prst="rect">
+            <a:avLst/>
+          </a:prstGeom>
+          <a:solidFill>
+            <a:srgbClr val="041E42"/>
+          </a:solidFill>
+          <a:ln>
+            <a:noFill/>
+          </a:ln>
+          <a:effectLst/>
+        </p:spPr>
+        <p:style>
+          <a:lnRef idx="1">
+            <a:schemeClr val="accent1"/>
+          </a:lnRef>
+          <a:fillRef idx="3">
+            <a:schemeClr val="accent1"/>
+          </a:fillRef>
+          <a:effectRef idx="2">
+            <a:schemeClr val="accent1"/>
+          </a:effectRef>
+          <a:fontRef idx="minor">
+            <a:schemeClr val="lt1"/>
+          </a:fontRef>
+        </p:style>
+        <p:txBody>
+          <a:bodyPr rtlCol="0" anchor="ctr"/>
+          <a:lstStyle/>
+          <a:p>
+            <a:pPr algn="ctr"/>
+          </a:p>
+        </p:txBody>
+      </p:sp>
+      <p:sp>
+        <p:nvSpPr>
+          <p:cNvPr id="3" name="TextBox 2"/>
+          <p:cNvSpPr txBox="1"/>
+          <p:nvPr/>
+        </p:nvSpPr>
+        <p:spPr>
+          <a:xfrm>
+            <a:off x="365760" y="109728"/>
+            <a:ext cx="11430000" cy="457200"/>
+          </a:xfrm>
+          <a:prstGeom prst="rect">
+            <a:avLst/>
+          </a:prstGeom>
+          <a:noFill/>
+        </p:spPr>
+        <p:txBody>
+          <a:bodyPr wrap="square" anchor="t">
+            <a:spAutoFit/>
+          </a:bodyPr>
+          <a:lstStyle/>
+          <a:p>
+            <a:pPr algn="l"/>
+            <a:r>
+              <a:rPr sz="2600" b="1" i="0">
+                <a:solidFill>
+                  <a:srgbClr val="FFFFFF"/>
+                </a:solidFill>
+              </a:rPr>
+              <a:t>Source Code &amp; Deliverables</a:t>
+            </a:r>
+          </a:p>
+        </p:txBody>
+      </p:sp>
+      <p:sp>
+        <p:nvSpPr>
+          <p:cNvPr id="4" name="Rectangle 3"/>
+          <p:cNvSpPr/>
+          <p:nvPr/>
+        </p:nvSpPr>
+        <p:spPr>
+          <a:xfrm>
+            <a:off x="0" y="777240"/>
+            <a:ext cx="12191695" cy="45720"/>
+          </a:xfrm>
+          <a:prstGeom prst="rect">
+            <a:avLst/>
+          </a:prstGeom>
+          <a:solidFill>
+            <a:srgbClr val="FFC220"/>
+          </a:solidFill>
+          <a:ln>
+            <a:noFill/>
+          </a:ln>
+          <a:effectLst/>
+        </p:spPr>
+        <p:style>
+          <a:lnRef idx="1">
+            <a:schemeClr val="accent1"/>
+          </a:lnRef>
+          <a:fillRef idx="3">
+            <a:schemeClr val="accent1"/>
+          </a:fillRef>
+          <a:effectRef idx="2">
+            <a:schemeClr val="accent1"/>
+          </a:effectRef>
+          <a:fontRef idx="minor">
+            <a:schemeClr val="lt1"/>
+          </a:fontRef>
+        </p:style>
+        <p:txBody>
+          <a:bodyPr rtlCol="0" anchor="ctr"/>
+          <a:lstStyle/>
+          <a:p>
+            <a:pPr algn="ctr"/>
+          </a:p>
+        </p:txBody>
+      </p:sp>
+      <p:sp>
+        <p:nvSpPr>
+          <p:cNvPr id="5" name="Rectangle 4"/>
+          <p:cNvSpPr/>
+          <p:nvPr/>
+        </p:nvSpPr>
+        <p:spPr>
+          <a:xfrm>
+            <a:off x="457200" y="960120"/>
+            <a:ext cx="11247120" cy="1005840"/>
+          </a:xfrm>
+          <a:prstGeom prst="rect">
+            <a:avLst/>
+          </a:prstGeom>
+          <a:solidFill>
+            <a:srgbClr val="E8F4FD"/>
+          </a:solidFill>
+          <a:ln>
+            <a:solidFill>
+              <a:srgbClr val="0071DC"/>
+            </a:solidFill>
+          </a:ln>
+          <a:effectLst/>
+        </p:spPr>
+        <p:style>
+          <a:lnRef idx="1">
+            <a:schemeClr val="accent1"/>
+          </a:lnRef>
+          <a:fillRef idx="3">
+            <a:schemeClr val="accent1"/>
+          </a:fillRef>
+          <a:effectRef idx="2">
+            <a:schemeClr val="accent1"/>
+          </a:effectRef>
+          <a:fontRef idx="minor">
+            <a:schemeClr val="lt1"/>
+          </a:fontRef>
+        </p:style>
+        <p:txBody>
+          <a:bodyPr rtlCol="0" anchor="ctr"/>
+          <a:lstStyle/>
+          <a:p>
+            <a:pPr algn="ctr"/>
+          </a:p>
+        </p:txBody>
+      </p:sp>
+      <p:sp>
+        <p:nvSpPr>
           <p:cNvPr id="6" name="TextBox 5"/>
           <p:cNvSpPr txBox="1"/>
           <p:nvPr/>
@@ -18398,7 +19729,7 @@
           <a:p>
             <a:pPr algn="l"/>
             <a:r>
-              <a:rPr sz="1200" b="1">
+              <a:rPr sz="1200" b="1" i="0">
                 <a:solidFill>
                   <a:srgbClr val="0071DC"/>
                 </a:solidFill>
@@ -18432,7 +19763,7 @@
           <a:p>
             <a:pPr algn="l"/>
             <a:r>
-              <a:rPr sz="1600" b="1">
+              <a:rPr sz="1600" b="1" i="0">
                 <a:solidFill>
                   <a:srgbClr val="041E42"/>
                 </a:solidFill>
@@ -19059,7 +20390,7 @@
           <a:p>
             <a:pPr algn="l"/>
             <a:r>
-              <a:rPr sz="1100" b="1">
+              <a:rPr sz="1100" b="1" i="0">
                 <a:solidFill>
                   <a:srgbClr val="10B981"/>
                 </a:solidFill>
@@ -19093,7 +20424,7 @@
           <a:p>
             <a:pPr algn="l"/>
             <a:r>
-              <a:rPr sz="1100" b="0">
+              <a:rPr sz="1100" b="0" i="0">
                 <a:solidFill>
                   <a:srgbClr val="333333"/>
                 </a:solidFill>
@@ -19127,7 +20458,7 @@
           <a:p>
             <a:pPr algn="l"/>
             <a:r>
-              <a:rPr sz="900" b="0">
+              <a:rPr sz="900" b="0" i="0">
                 <a:solidFill>
                   <a:srgbClr val="666666"/>
                 </a:solidFill>
@@ -19161,12 +20492,12 @@
           <a:p>
             <a:pPr algn="r"/>
             <a:r>
-              <a:rPr sz="900" b="0">
+              <a:rPr sz="900" b="0" i="0">
                 <a:solidFill>
                   <a:srgbClr val="666666"/>
                 </a:solidFill>
               </a:rPr>
-              <a:t>21 / 22</a:t>
+              <a:t>22 / 23</a:t>
             </a:r>
           </a:p>
         </p:txBody>
@@ -19179,7 +20510,7 @@
 </p:sld>
 </file>
 
-<file path=ppt/slides/slide22.xml><?xml version="1.0" encoding="utf-8"?>
+<file path=ppt/slides/slide23.xml><?xml version="1.0" encoding="utf-8"?>
 <p:sld xmlns:a="http://schemas.openxmlformats.org/drawingml/2006/main" xmlns:p="http://schemas.openxmlformats.org/presentationml/2006/main" xmlns:r="http://schemas.openxmlformats.org/officeDocument/2006/relationships">
   <p:cSld>
     <p:bg>
@@ -19221,7 +20552,7 @@
           <a:p>
             <a:pPr algn="ctr"/>
             <a:r>
-              <a:rPr sz="7200" b="1">
+              <a:rPr sz="7200" b="1" i="0">
                 <a:solidFill>
                   <a:srgbClr val="FFFFFF"/>
                 </a:solidFill>
@@ -19255,7 +20586,7 @@
           <a:p>
             <a:pPr algn="ctr"/>
             <a:r>
-              <a:rPr sz="1800" b="0">
+              <a:rPr sz="1800" b="0" i="0">
                 <a:solidFill>
                   <a:srgbClr val="FFC220"/>
                 </a:solidFill>
@@ -19289,7 +20620,7 @@
           <a:p>
             <a:pPr algn="ctr"/>
             <a:r>
-              <a:rPr sz="2800" b="1">
+              <a:rPr sz="2800" b="1" i="0">
                 <a:solidFill>
                   <a:srgbClr val="FFFFFF"/>
                 </a:solidFill>
@@ -19369,7 +20700,7 @@
           <a:p>
             <a:pPr algn="ctr"/>
             <a:r>
-              <a:rPr sz="1100" b="1">
+              <a:rPr sz="1100" b="1" i="0">
                 <a:solidFill>
                   <a:srgbClr val="0071DC"/>
                 </a:solidFill>
@@ -19403,7 +20734,7 @@
           <a:p>
             <a:pPr algn="ctr"/>
             <a:r>
-              <a:rPr sz="1500" b="1">
+              <a:rPr sz="1500" b="1" i="0">
                 <a:solidFill>
                   <a:srgbClr val="041E42"/>
                 </a:solidFill>
@@ -19437,7 +20768,7 @@
           <a:p>
             <a:pPr algn="ctr"/>
             <a:r>
-              <a:rPr sz="1100" b="0">
+              <a:rPr sz="1100" b="0" i="0">
                 <a:solidFill>
                   <a:srgbClr val="666666"/>
                 </a:solidFill>
@@ -19471,7 +20802,7 @@
           <a:p>
             <a:pPr algn="ctr"/>
             <a:r>
-              <a:rPr sz="1200" b="0">
+              <a:rPr sz="1200" b="0" i="0">
                 <a:solidFill>
                   <a:srgbClr val="E8F4FD"/>
                 </a:solidFill>
@@ -19567,7 +20898,7 @@
           <a:p>
             <a:pPr algn="l"/>
             <a:r>
-              <a:rPr sz="2600" b="1">
+              <a:rPr sz="2600" b="1" i="0">
                 <a:solidFill>
                   <a:srgbClr val="FFFFFF"/>
                 </a:solidFill>
@@ -19601,7 +20932,7 @@
           <a:p>
             <a:pPr algn="l"/>
             <a:r>
-              <a:rPr sz="1200" b="0">
+              <a:rPr sz="1200" b="0" i="0">
                 <a:solidFill>
                   <a:srgbClr val="E8F4FD"/>
                 </a:solidFill>
@@ -19679,7 +21010,7 @@
           <a:p>
             <a:pPr algn="l"/>
             <a:r>
-              <a:rPr sz="1100" b="1">
+              <a:rPr sz="1100" b="1" i="0">
                 <a:solidFill>
                   <a:srgbClr val="D97706"/>
                 </a:solidFill>
@@ -19872,7 +21203,7 @@
           <a:p>
             <a:pPr algn="l"/>
             <a:r>
-              <a:rPr sz="1100" b="1">
+              <a:rPr sz="1100" b="1" i="0">
                 <a:solidFill>
                   <a:srgbClr val="10B981"/>
                 </a:solidFill>
@@ -20156,7 +21487,7 @@
           <a:p>
             <a:pPr algn="l"/>
             <a:r>
-              <a:rPr sz="5200" b="1">
+              <a:rPr sz="5200" b="1" i="0">
                 <a:solidFill>
                   <a:srgbClr val="0071DC"/>
                 </a:solidFill>
@@ -20190,7 +21521,7 @@
           <a:p>
             <a:pPr algn="l"/>
             <a:r>
-              <a:rPr sz="1100" b="1">
+              <a:rPr sz="1100" b="1" i="0">
                 <a:solidFill>
                   <a:srgbClr val="0071DC"/>
                 </a:solidFill>
@@ -20224,7 +21555,7 @@
           <a:p>
             <a:pPr algn="l"/>
             <a:r>
-              <a:rPr sz="1200" b="0">
+              <a:rPr sz="1200" b="0" i="0">
                 <a:solidFill>
                   <a:srgbClr val="333333"/>
                 </a:solidFill>
@@ -20258,7 +21589,7 @@
           <a:p>
             <a:pPr algn="l"/>
             <a:r>
-              <a:rPr sz="900" b="0">
+              <a:rPr sz="900" b="0" i="0">
                 <a:solidFill>
                   <a:srgbClr val="666666"/>
                 </a:solidFill>
@@ -20292,12 +21623,12 @@
           <a:p>
             <a:pPr algn="r"/>
             <a:r>
-              <a:rPr sz="900" b="0">
+              <a:rPr sz="900" b="0" i="0">
                 <a:solidFill>
                   <a:srgbClr val="666666"/>
                 </a:solidFill>
               </a:rPr>
-              <a:t>3 / 22</a:t>
+              <a:t>3 / 23</a:t>
             </a:r>
           </a:p>
         </p:txBody>
@@ -20388,7 +21719,7 @@
           <a:p>
             <a:pPr algn="l"/>
             <a:r>
-              <a:rPr sz="2600" b="1">
+              <a:rPr sz="2600" b="1" i="0">
                 <a:solidFill>
                   <a:srgbClr val="FFFFFF"/>
                 </a:solidFill>
@@ -20422,7 +21753,7 @@
           <a:p>
             <a:pPr algn="l"/>
             <a:r>
-              <a:rPr sz="1200" b="0">
+              <a:rPr sz="1200" b="0" i="0">
                 <a:solidFill>
                   <a:srgbClr val="E8F4FD"/>
                 </a:solidFill>
@@ -20500,7 +21831,7 @@
           <a:p>
             <a:pPr algn="l"/>
             <a:r>
-              <a:rPr sz="1100" b="1">
+              <a:rPr sz="1100" b="1" i="0">
                 <a:solidFill>
                   <a:srgbClr val="0071DC"/>
                 </a:solidFill>
@@ -20640,7 +21971,7 @@
         <p:spPr>
           <a:xfrm>
             <a:off x="6172200" y="960120"/>
-            <a:ext cx="5669280" cy="3543300"/>
+            <a:ext cx="5669280" cy="11338560"/>
           </a:xfrm>
           <a:prstGeom prst="rect">
             <a:avLst/>
@@ -20717,7 +22048,7 @@
           <a:p>
             <a:pPr algn="l"/>
             <a:r>
-              <a:rPr sz="1100" b="1">
+              <a:rPr sz="1100" b="1" i="0">
                 <a:solidFill>
                   <a:srgbClr val="10B981"/>
                 </a:solidFill>
@@ -20751,7 +22082,7 @@
           <a:p>
             <a:pPr algn="l"/>
             <a:r>
-              <a:rPr sz="1100" b="0">
+              <a:rPr sz="1100" b="0" i="0">
                 <a:solidFill>
                   <a:srgbClr val="333333"/>
                 </a:solidFill>
@@ -20831,7 +22162,7 @@
           <a:p>
             <a:pPr algn="l"/>
             <a:r>
-              <a:rPr sz="1100" b="1">
+              <a:rPr sz="1100" b="1" i="0">
                 <a:solidFill>
                   <a:srgbClr val="0071DC"/>
                 </a:solidFill>
@@ -20865,7 +22196,7 @@
           <a:p>
             <a:pPr algn="l"/>
             <a:r>
-              <a:rPr sz="1100" b="0">
+              <a:rPr sz="1100" b="0" i="0">
                 <a:solidFill>
                   <a:srgbClr val="333333"/>
                 </a:solidFill>
@@ -20899,7 +22230,7 @@
           <a:p>
             <a:pPr algn="l"/>
             <a:r>
-              <a:rPr sz="900" b="0">
+              <a:rPr sz="900" b="0" i="0">
                 <a:solidFill>
                   <a:srgbClr val="666666"/>
                 </a:solidFill>
@@ -20933,12 +22264,12 @@
           <a:p>
             <a:pPr algn="r"/>
             <a:r>
-              <a:rPr sz="900" b="0">
+              <a:rPr sz="900" b="0" i="0">
                 <a:solidFill>
                   <a:srgbClr val="666666"/>
                 </a:solidFill>
               </a:rPr>
-              <a:t>4 / 22</a:t>
+              <a:t>4 / 23</a:t>
             </a:r>
           </a:p>
         </p:txBody>
@@ -21029,7 +22360,7 @@
           <a:p>
             <a:pPr algn="l"/>
             <a:r>
-              <a:rPr sz="2600" b="1">
+              <a:rPr sz="2600" b="1" i="0">
                 <a:solidFill>
                   <a:srgbClr val="FFFFFF"/>
                 </a:solidFill>
@@ -21063,7 +22394,7 @@
           <a:p>
             <a:pPr algn="l"/>
             <a:r>
-              <a:rPr sz="1200" b="0">
+              <a:rPr sz="1200" b="0" i="0">
                 <a:solidFill>
                   <a:srgbClr val="E8F4FD"/>
                 </a:solidFill>
@@ -21231,7 +22562,7 @@
           <a:p>
             <a:pPr algn="ctr"/>
             <a:r>
-              <a:rPr sz="1300" b="1">
+              <a:rPr sz="1300" b="1" i="0">
                 <a:solidFill>
                   <a:srgbClr val="FFFFFF"/>
                 </a:solidFill>
@@ -21265,7 +22596,7 @@
           <a:p>
             <a:pPr algn="ctr"/>
             <a:r>
-              <a:rPr sz="1700" b="1">
+              <a:rPr sz="1700" b="1" i="0">
                 <a:solidFill>
                   <a:srgbClr val="041E42"/>
                 </a:solidFill>
@@ -21299,7 +22630,7 @@
           <a:p>
             <a:pPr algn="ctr"/>
             <a:r>
-              <a:rPr sz="1000" b="0">
+              <a:rPr sz="1000" b="0" i="0">
                 <a:solidFill>
                   <a:srgbClr val="666666"/>
                 </a:solidFill>
@@ -21377,7 +22708,7 @@
           <a:p>
             <a:pPr algn="ctr"/>
             <a:r>
-              <a:rPr sz="1200" b="0">
+              <a:rPr sz="1200" b="0" i="0">
                 <a:solidFill>
                   <a:srgbClr val="333333"/>
                 </a:solidFill>
@@ -21388,7 +22719,7 @@
           <a:p>
             <a:pPr algn="ctr"/>
             <a:r>
-              <a:rPr sz="1200" b="0">
+              <a:rPr sz="1200" b="0" i="0">
                 <a:solidFill>
                   <a:srgbClr val="333333"/>
                 </a:solidFill>
@@ -21399,7 +22730,7 @@
           <a:p>
             <a:pPr algn="ctr"/>
             <a:r>
-              <a:rPr sz="1200" b="0">
+              <a:rPr sz="1200" b="0" i="0">
                 <a:solidFill>
                   <a:srgbClr val="333333"/>
                 </a:solidFill>
@@ -21410,7 +22741,7 @@
           <a:p>
             <a:pPr algn="ctr"/>
             <a:r>
-              <a:rPr sz="1200" b="0">
+              <a:rPr sz="1200" b="0" i="0">
                 <a:solidFill>
                   <a:srgbClr val="333333"/>
                 </a:solidFill>
@@ -21534,7 +22865,7 @@
           <a:p>
             <a:pPr algn="ctr"/>
             <a:r>
-              <a:rPr sz="1300" b="1">
+              <a:rPr sz="1300" b="1" i="0">
                 <a:solidFill>
                   <a:srgbClr val="FFFFFF"/>
                 </a:solidFill>
@@ -21568,7 +22899,7 @@
           <a:p>
             <a:pPr algn="ctr"/>
             <a:r>
-              <a:rPr sz="1700" b="1">
+              <a:rPr sz="1700" b="1" i="0">
                 <a:solidFill>
                   <a:srgbClr val="041E42"/>
                 </a:solidFill>
@@ -21602,7 +22933,7 @@
           <a:p>
             <a:pPr algn="ctr"/>
             <a:r>
-              <a:rPr sz="1000" b="0">
+              <a:rPr sz="1000" b="0" i="0">
                 <a:solidFill>
                   <a:srgbClr val="666666"/>
                 </a:solidFill>
@@ -21680,7 +23011,7 @@
           <a:p>
             <a:pPr algn="ctr"/>
             <a:r>
-              <a:rPr sz="1200" b="0">
+              <a:rPr sz="1200" b="0" i="0">
                 <a:solidFill>
                   <a:srgbClr val="333333"/>
                 </a:solidFill>
@@ -21691,7 +23022,7 @@
           <a:p>
             <a:pPr algn="ctr"/>
             <a:r>
-              <a:rPr sz="1200" b="0">
+              <a:rPr sz="1200" b="0" i="0">
                 <a:solidFill>
                   <a:srgbClr val="333333"/>
                 </a:solidFill>
@@ -21702,7 +23033,7 @@
           <a:p>
             <a:pPr algn="ctr"/>
             <a:r>
-              <a:rPr sz="1200" b="0">
+              <a:rPr sz="1200" b="0" i="0">
                 <a:solidFill>
                   <a:srgbClr val="333333"/>
                 </a:solidFill>
@@ -21713,7 +23044,7 @@
           <a:p>
             <a:pPr algn="ctr"/>
             <a:r>
-              <a:rPr sz="1200" b="0">
+              <a:rPr sz="1200" b="0" i="0">
                 <a:solidFill>
                   <a:srgbClr val="333333"/>
                 </a:solidFill>
@@ -21837,7 +23168,7 @@
           <a:p>
             <a:pPr algn="ctr"/>
             <a:r>
-              <a:rPr sz="1300" b="1">
+              <a:rPr sz="1300" b="1" i="0">
                 <a:solidFill>
                   <a:srgbClr val="FFFFFF"/>
                 </a:solidFill>
@@ -21871,7 +23202,7 @@
           <a:p>
             <a:pPr algn="ctr"/>
             <a:r>
-              <a:rPr sz="1700" b="1">
+              <a:rPr sz="1700" b="1" i="0">
                 <a:solidFill>
                   <a:srgbClr val="041E42"/>
                 </a:solidFill>
@@ -21905,7 +23236,7 @@
           <a:p>
             <a:pPr algn="ctr"/>
             <a:r>
-              <a:rPr sz="1000" b="0">
+              <a:rPr sz="1000" b="0" i="0">
                 <a:solidFill>
                   <a:srgbClr val="666666"/>
                 </a:solidFill>
@@ -21983,7 +23314,7 @@
           <a:p>
             <a:pPr algn="ctr"/>
             <a:r>
-              <a:rPr sz="1200" b="0">
+              <a:rPr sz="1200" b="0" i="0">
                 <a:solidFill>
                   <a:srgbClr val="333333"/>
                 </a:solidFill>
@@ -21994,7 +23325,7 @@
           <a:p>
             <a:pPr algn="ctr"/>
             <a:r>
-              <a:rPr sz="1200" b="0">
+              <a:rPr sz="1200" b="0" i="0">
                 <a:solidFill>
                   <a:srgbClr val="333333"/>
                 </a:solidFill>
@@ -22005,7 +23336,7 @@
           <a:p>
             <a:pPr algn="ctr"/>
             <a:r>
-              <a:rPr sz="1200" b="0">
+              <a:rPr sz="1200" b="0" i="0">
                 <a:solidFill>
                   <a:srgbClr val="333333"/>
                 </a:solidFill>
@@ -22016,7 +23347,7 @@
           <a:p>
             <a:pPr algn="ctr"/>
             <a:r>
-              <a:rPr sz="1200" b="0">
+              <a:rPr sz="1200" b="0" i="0">
                 <a:solidFill>
                   <a:srgbClr val="333333"/>
                 </a:solidFill>
@@ -22096,7 +23427,7 @@
           <a:p>
             <a:pPr algn="l"/>
             <a:r>
-              <a:rPr sz="1300" b="1">
+              <a:rPr sz="1300" b="1" i="0">
                 <a:solidFill>
                   <a:srgbClr val="0071DC"/>
                 </a:solidFill>
@@ -22213,7 +23544,7 @@
           <a:p>
             <a:pPr algn="l"/>
             <a:r>
-              <a:rPr sz="900" b="0">
+              <a:rPr sz="900" b="0" i="0">
                 <a:solidFill>
                   <a:srgbClr val="666666"/>
                 </a:solidFill>
@@ -22247,12 +23578,12 @@
           <a:p>
             <a:pPr algn="r"/>
             <a:r>
-              <a:rPr sz="900" b="0">
+              <a:rPr sz="900" b="0" i="0">
                 <a:solidFill>
                   <a:srgbClr val="666666"/>
                 </a:solidFill>
               </a:rPr>
-              <a:t>5 / 22</a:t>
+              <a:t>5 / 23</a:t>
             </a:r>
           </a:p>
         </p:txBody>
@@ -22343,7 +23674,7 @@
           <a:p>
             <a:pPr algn="l"/>
             <a:r>
-              <a:rPr sz="2600" b="1">
+              <a:rPr sz="2600" b="1" i="0">
                 <a:solidFill>
                   <a:srgbClr val="FFFFFF"/>
                 </a:solidFill>
@@ -22377,7 +23708,7 @@
           <a:p>
             <a:pPr algn="l"/>
             <a:r>
-              <a:rPr sz="1200" b="0">
+              <a:rPr sz="1200" b="0" i="0">
                 <a:solidFill>
                   <a:srgbClr val="E8F4FD"/>
                 </a:solidFill>
@@ -22455,7 +23786,7 @@
           <a:p>
             <a:pPr algn="l"/>
             <a:r>
-              <a:rPr sz="1300" b="1">
+              <a:rPr sz="1300" b="1" i="0">
                 <a:solidFill>
                   <a:srgbClr val="041E42"/>
                 </a:solidFill>
@@ -22535,7 +23866,7 @@
           <a:p>
             <a:pPr algn="l"/>
             <a:r>
-              <a:rPr sz="1100" b="0">
+              <a:rPr sz="1100" b="0" i="0">
                 <a:solidFill>
                   <a:srgbClr val="E6EDF7"/>
                 </a:solidFill>
@@ -22546,7 +23877,7 @@
           <a:p>
             <a:pPr algn="l"/>
             <a:r>
-              <a:rPr sz="1100" b="0">
+              <a:rPr sz="1100" b="0" i="0">
                 <a:solidFill>
                   <a:srgbClr val="E6EDF7"/>
                 </a:solidFill>
@@ -22557,7 +23888,7 @@
           <a:p>
             <a:pPr algn="l"/>
             <a:r>
-              <a:rPr sz="1100" b="0">
+              <a:rPr sz="1100" b="0" i="0">
                 <a:solidFill>
                   <a:srgbClr val="E6EDF7"/>
                 </a:solidFill>
@@ -22568,7 +23899,7 @@
           <a:p>
             <a:pPr algn="l"/>
             <a:r>
-              <a:rPr sz="1100" b="0">
+              <a:rPr sz="1100" b="0" i="0">
                 <a:solidFill>
                   <a:srgbClr val="E6EDF7"/>
                 </a:solidFill>
@@ -22579,7 +23910,7 @@
           <a:p>
             <a:pPr algn="l"/>
             <a:r>
-              <a:rPr sz="1100" b="0">
+              <a:rPr sz="1100" b="0" i="0">
                 <a:solidFill>
                   <a:srgbClr val="E6EDF7"/>
                 </a:solidFill>
@@ -22590,7 +23921,7 @@
           <a:p>
             <a:pPr algn="l"/>
             <a:r>
-              <a:rPr sz="1100" b="0">
+              <a:rPr sz="1100" b="0" i="0">
                 <a:solidFill>
                   <a:srgbClr val="E6EDF7"/>
                 </a:solidFill>
@@ -22604,7 +23935,7 @@
           <a:p>
             <a:pPr algn="l"/>
             <a:r>
-              <a:rPr sz="1100" b="0">
+              <a:rPr sz="1100" b="0" i="0">
                 <a:solidFill>
                   <a:srgbClr val="E6EDF7"/>
                 </a:solidFill>
@@ -22615,7 +23946,7 @@
           <a:p>
             <a:pPr algn="l"/>
             <a:r>
-              <a:rPr sz="1100" b="0">
+              <a:rPr sz="1100" b="0" i="0">
                 <a:solidFill>
                   <a:srgbClr val="E6EDF7"/>
                 </a:solidFill>
@@ -22626,7 +23957,7 @@
           <a:p>
             <a:pPr algn="l"/>
             <a:r>
-              <a:rPr sz="1100" b="0">
+              <a:rPr sz="1100" b="0" i="0">
                 <a:solidFill>
                   <a:srgbClr val="E6EDF7"/>
                 </a:solidFill>
@@ -22640,7 +23971,7 @@
           <a:p>
             <a:pPr algn="l"/>
             <a:r>
-              <a:rPr sz="1100" b="0">
+              <a:rPr sz="1100" b="0" i="0">
                 <a:solidFill>
                   <a:srgbClr val="E6EDF7"/>
                 </a:solidFill>
@@ -22651,7 +23982,7 @@
           <a:p>
             <a:pPr algn="l"/>
             <a:r>
-              <a:rPr sz="1100" b="0">
+              <a:rPr sz="1100" b="0" i="0">
                 <a:solidFill>
                   <a:srgbClr val="E6EDF7"/>
                 </a:solidFill>
@@ -22662,7 +23993,7 @@
           <a:p>
             <a:pPr algn="l"/>
             <a:r>
-              <a:rPr sz="1100" b="0">
+              <a:rPr sz="1100" b="0" i="0">
                 <a:solidFill>
                   <a:srgbClr val="E6EDF7"/>
                 </a:solidFill>
@@ -22676,7 +24007,7 @@
           <a:p>
             <a:pPr algn="l"/>
             <a:r>
-              <a:rPr sz="1100" b="0">
+              <a:rPr sz="1100" b="0" i="0">
                 <a:solidFill>
                   <a:srgbClr val="E6EDF7"/>
                 </a:solidFill>
@@ -22756,7 +24087,7 @@
           <a:p>
             <a:pPr algn="l"/>
             <a:r>
-              <a:rPr sz="1100" b="1">
+              <a:rPr sz="1100" b="1" i="0">
                 <a:solidFill>
                   <a:srgbClr val="0071DC"/>
                 </a:solidFill>
@@ -22790,7 +24121,7 @@
           <a:p>
             <a:pPr algn="l"/>
             <a:r>
-              <a:rPr sz="1000" b="1">
+              <a:rPr sz="1000" b="1" i="0">
                 <a:solidFill>
                   <a:srgbClr val="0071DC"/>
                 </a:solidFill>
@@ -22824,7 +24155,7 @@
           <a:p>
             <a:pPr algn="l"/>
             <a:r>
-              <a:rPr sz="900" b="0">
+              <a:rPr sz="900" b="0" i="0">
                 <a:solidFill>
                   <a:srgbClr val="333333"/>
                 </a:solidFill>
@@ -22858,7 +24189,7 @@
           <a:p>
             <a:pPr algn="l"/>
             <a:r>
-              <a:rPr sz="1000" b="1">
+              <a:rPr sz="1000" b="1" i="0">
                 <a:solidFill>
                   <a:srgbClr val="7C3AED"/>
                 </a:solidFill>
@@ -22892,7 +24223,7 @@
           <a:p>
             <a:pPr algn="l"/>
             <a:r>
-              <a:rPr sz="900" b="0">
+              <a:rPr sz="900" b="0" i="0">
                 <a:solidFill>
                   <a:srgbClr val="333333"/>
                 </a:solidFill>
@@ -22903,7 +24234,7 @@
           <a:p>
             <a:pPr algn="l"/>
             <a:r>
-              <a:rPr sz="900" b="0">
+              <a:rPr sz="900" b="0" i="0">
                 <a:solidFill>
                   <a:srgbClr val="333333"/>
                 </a:solidFill>
@@ -22937,7 +24268,7 @@
           <a:p>
             <a:pPr algn="l"/>
             <a:r>
-              <a:rPr sz="1000" b="1">
+              <a:rPr sz="1000" b="1" i="0">
                 <a:solidFill>
                   <a:srgbClr val="D97706"/>
                 </a:solidFill>
@@ -22971,7 +24302,7 @@
           <a:p>
             <a:pPr algn="l"/>
             <a:r>
-              <a:rPr sz="900" b="0">
+              <a:rPr sz="900" b="0" i="0">
                 <a:solidFill>
                   <a:srgbClr val="333333"/>
                 </a:solidFill>
@@ -23005,7 +24336,7 @@
           <a:p>
             <a:pPr algn="l"/>
             <a:r>
-              <a:rPr sz="1000" b="1">
+              <a:rPr sz="1000" b="1" i="0">
                 <a:solidFill>
                   <a:srgbClr val="10B981"/>
                 </a:solidFill>
@@ -23039,7 +24370,7 @@
           <a:p>
             <a:pPr algn="l"/>
             <a:r>
-              <a:rPr sz="900" b="0">
+              <a:rPr sz="900" b="0" i="0">
                 <a:solidFill>
                   <a:srgbClr val="333333"/>
                 </a:solidFill>
@@ -23073,7 +24404,7 @@
           <a:p>
             <a:pPr algn="l"/>
             <a:r>
-              <a:rPr sz="1000" b="1">
+              <a:rPr sz="1000" b="1" i="0">
                 <a:solidFill>
                   <a:srgbClr val="EF4444"/>
                 </a:solidFill>
@@ -23107,7 +24438,7 @@
           <a:p>
             <a:pPr algn="l"/>
             <a:r>
-              <a:rPr sz="900" b="0">
+              <a:rPr sz="900" b="0" i="0">
                 <a:solidFill>
                   <a:srgbClr val="333333"/>
                 </a:solidFill>
@@ -23187,7 +24518,7 @@
           <a:p>
             <a:pPr algn="l"/>
             <a:r>
-              <a:rPr sz="1200" b="1">
+              <a:rPr sz="1200" b="1" i="0">
                 <a:solidFill>
                   <a:srgbClr val="10B981"/>
                 </a:solidFill>
@@ -23335,7 +24666,7 @@
           <a:p>
             <a:pPr algn="l"/>
             <a:r>
-              <a:rPr sz="1200" b="1">
+              <a:rPr sz="1200" b="1" i="0">
                 <a:solidFill>
                   <a:srgbClr val="D97706"/>
                 </a:solidFill>
@@ -23452,7 +24783,7 @@
           <a:p>
             <a:pPr algn="l"/>
             <a:r>
-              <a:rPr sz="900" b="0">
+              <a:rPr sz="900" b="0" i="0">
                 <a:solidFill>
                   <a:srgbClr val="666666"/>
                 </a:solidFill>
@@ -23486,12 +24817,12 @@
           <a:p>
             <a:pPr algn="r"/>
             <a:r>
-              <a:rPr sz="900" b="0">
+              <a:rPr sz="900" b="0" i="0">
                 <a:solidFill>
                   <a:srgbClr val="666666"/>
                 </a:solidFill>
               </a:rPr>
-              <a:t>6 / 22</a:t>
+              <a:t>6 / 23</a:t>
             </a:r>
           </a:p>
         </p:txBody>
@@ -23582,7 +24913,7 @@
           <a:p>
             <a:pPr algn="l"/>
             <a:r>
-              <a:rPr sz="2600" b="1">
+              <a:rPr sz="2600" b="1" i="0">
                 <a:solidFill>
                   <a:srgbClr val="FFFFFF"/>
                 </a:solidFill>
@@ -23616,7 +24947,7 @@
           <a:p>
             <a:pPr algn="l"/>
             <a:r>
-              <a:rPr sz="1200" b="0">
+              <a:rPr sz="1200" b="0" i="0">
                 <a:solidFill>
                   <a:srgbClr val="E8F4FD"/>
                 </a:solidFill>
@@ -23740,7 +25071,7 @@
           <a:p>
             <a:pPr algn="l"/>
             <a:r>
-              <a:rPr sz="1100" b="1">
+              <a:rPr sz="1100" b="1" i="0">
                 <a:solidFill>
                   <a:srgbClr val="D97706"/>
                 </a:solidFill>
@@ -23774,7 +25105,7 @@
           <a:p>
             <a:pPr algn="l"/>
             <a:r>
-              <a:rPr sz="1200" b="1">
+              <a:rPr sz="1200" b="1" i="0">
                 <a:solidFill>
                   <a:srgbClr val="041E42"/>
                 </a:solidFill>
@@ -23808,7 +25139,7 @@
           <a:p>
             <a:pPr algn="l"/>
             <a:r>
-              <a:rPr sz="1000" b="0">
+              <a:rPr sz="1000" b="0" i="0">
                 <a:solidFill>
                   <a:srgbClr val="333333"/>
                 </a:solidFill>
@@ -23842,7 +25173,7 @@
           <a:p>
             <a:pPr algn="l"/>
             <a:r>
-              <a:rPr sz="900" b="0">
+              <a:rPr sz="900" b="0" i="0">
                 <a:solidFill>
                   <a:srgbClr val="666666"/>
                 </a:solidFill>
@@ -24001,7 +25332,7 @@
           <a:p>
             <a:pPr algn="ctr"/>
             <a:r>
-              <a:rPr sz="1100" b="1">
+              <a:rPr sz="1100" b="1" i="0">
                 <a:solidFill>
                   <a:srgbClr val="FFFFFF"/>
                 </a:solidFill>
@@ -24035,7 +25366,7 @@
           <a:p>
             <a:pPr algn="l"/>
             <a:r>
-              <a:rPr sz="1000" b="0">
+              <a:rPr sz="1000" b="0" i="0">
                 <a:solidFill>
                   <a:srgbClr val="333333"/>
                 </a:solidFill>
@@ -24159,7 +25490,7 @@
           <a:p>
             <a:pPr algn="ctr"/>
             <a:r>
-              <a:rPr sz="1100" b="1">
+              <a:rPr sz="1100" b="1" i="0">
                 <a:solidFill>
                   <a:srgbClr val="FFFFFF"/>
                 </a:solidFill>
@@ -24193,7 +25524,7 @@
           <a:p>
             <a:pPr algn="l"/>
             <a:r>
-              <a:rPr sz="1000" b="0">
+              <a:rPr sz="1000" b="0" i="0">
                 <a:solidFill>
                   <a:srgbClr val="333333"/>
                 </a:solidFill>
@@ -24317,7 +25648,7 @@
           <a:p>
             <a:pPr algn="ctr"/>
             <a:r>
-              <a:rPr sz="1100" b="1">
+              <a:rPr sz="1100" b="1" i="0">
                 <a:solidFill>
                   <a:srgbClr val="FFFFFF"/>
                 </a:solidFill>
@@ -24351,7 +25682,7 @@
           <a:p>
             <a:pPr algn="l"/>
             <a:r>
-              <a:rPr sz="1000" b="0">
+              <a:rPr sz="1000" b="0" i="0">
                 <a:solidFill>
                   <a:srgbClr val="333333"/>
                 </a:solidFill>
@@ -24431,7 +25762,7 @@
           <a:p>
             <a:pPr algn="l"/>
             <a:r>
-              <a:rPr sz="1100" b="1">
+              <a:rPr sz="1100" b="1" i="0">
                 <a:solidFill>
                   <a:srgbClr val="0071DC"/>
                 </a:solidFill>
@@ -24465,7 +25796,7 @@
           <a:p>
             <a:pPr algn="l"/>
             <a:r>
-              <a:rPr sz="1100" b="0">
+              <a:rPr sz="1100" b="0" i="0">
                 <a:solidFill>
                   <a:srgbClr val="333333"/>
                 </a:solidFill>
@@ -24499,7 +25830,7 @@
           <a:p>
             <a:pPr algn="l"/>
             <a:r>
-              <a:rPr sz="900" b="0">
+              <a:rPr sz="900" b="0" i="0">
                 <a:solidFill>
                   <a:srgbClr val="666666"/>
                 </a:solidFill>
@@ -24533,12 +25864,12 @@
           <a:p>
             <a:pPr algn="r"/>
             <a:r>
-              <a:rPr sz="900" b="0">
+              <a:rPr sz="900" b="0" i="0">
                 <a:solidFill>
                   <a:srgbClr val="666666"/>
                 </a:solidFill>
               </a:rPr>
-              <a:t>7 / 22</a:t>
+              <a:t>7 / 23</a:t>
             </a:r>
           </a:p>
         </p:txBody>
@@ -24629,7 +25960,7 @@
           <a:p>
             <a:pPr algn="l"/>
             <a:r>
-              <a:rPr sz="2600" b="1">
+              <a:rPr sz="2600" b="1" i="0">
                 <a:solidFill>
                   <a:srgbClr val="FFFFFF"/>
                 </a:solidFill>
@@ -24663,7 +25994,7 @@
           <a:p>
             <a:pPr algn="l"/>
             <a:r>
-              <a:rPr sz="1200" b="0">
+              <a:rPr sz="1200" b="0" i="0">
                 <a:solidFill>
                   <a:srgbClr val="E8F4FD"/>
                 </a:solidFill>
@@ -24831,7 +26162,7 @@
           <a:p>
             <a:pPr algn="ctr"/>
             <a:r>
-              <a:rPr sz="1100" b="1">
+              <a:rPr sz="1100" b="1" i="0">
                 <a:solidFill>
                   <a:srgbClr val="FFFFFF"/>
                 </a:solidFill>
@@ -24865,7 +26196,7 @@
           <a:p>
             <a:pPr algn="ctr"/>
             <a:r>
-              <a:rPr sz="1100" b="0">
+              <a:rPr sz="1100" b="0" i="0">
                 <a:solidFill>
                   <a:srgbClr val="333333"/>
                 </a:solidFill>
@@ -24989,7 +26320,7 @@
           <a:p>
             <a:pPr algn="ctr"/>
             <a:r>
-              <a:rPr sz="1100" b="1">
+              <a:rPr sz="1100" b="1" i="0">
                 <a:solidFill>
                   <a:srgbClr val="FFFFFF"/>
                 </a:solidFill>
@@ -25023,7 +26354,7 @@
           <a:p>
             <a:pPr algn="ctr"/>
             <a:r>
-              <a:rPr sz="1100" b="0">
+              <a:rPr sz="1100" b="0" i="0">
                 <a:solidFill>
                   <a:srgbClr val="333333"/>
                 </a:solidFill>
@@ -25147,7 +26478,7 @@
           <a:p>
             <a:pPr algn="ctr"/>
             <a:r>
-              <a:rPr sz="1100" b="1">
+              <a:rPr sz="1100" b="1" i="0">
                 <a:solidFill>
                   <a:srgbClr val="FFFFFF"/>
                 </a:solidFill>
@@ -25181,7 +26512,7 @@
           <a:p>
             <a:pPr algn="ctr"/>
             <a:r>
-              <a:rPr sz="1100" b="0">
+              <a:rPr sz="1100" b="0" i="0">
                 <a:solidFill>
                   <a:srgbClr val="333333"/>
                 </a:solidFill>
@@ -25305,7 +26636,7 @@
           <a:p>
             <a:pPr algn="ctr"/>
             <a:r>
-              <a:rPr sz="1100" b="1">
+              <a:rPr sz="1100" b="1" i="0">
                 <a:solidFill>
                   <a:srgbClr val="FFFFFF"/>
                 </a:solidFill>
@@ -25339,7 +26670,7 @@
           <a:p>
             <a:pPr algn="ctr"/>
             <a:r>
-              <a:rPr sz="1100" b="0">
+              <a:rPr sz="1100" b="0" i="0">
                 <a:solidFill>
                   <a:srgbClr val="333333"/>
                 </a:solidFill>
@@ -25419,7 +26750,7 @@
           <a:p>
             <a:pPr algn="ctr"/>
             <a:r>
-              <a:rPr sz="1200" b="1">
+              <a:rPr sz="1200" b="1" i="0">
                 <a:solidFill>
                   <a:srgbClr val="FFFFFF"/>
                 </a:solidFill>
@@ -25499,7 +26830,7 @@
           <a:p>
             <a:pPr algn="l"/>
             <a:r>
-              <a:rPr sz="1300" b="1">
+              <a:rPr sz="1300" b="1" i="0">
                 <a:solidFill>
                   <a:srgbClr val="10B981"/>
                 </a:solidFill>
@@ -25677,7 +27008,7 @@
           <a:p>
             <a:pPr algn="l"/>
             <a:r>
-              <a:rPr sz="1300" b="1">
+              <a:rPr sz="1300" b="1" i="0">
                 <a:solidFill>
                   <a:srgbClr val="7C3AED"/>
                 </a:solidFill>
@@ -25855,7 +27186,7 @@
           <a:p>
             <a:pPr algn="l"/>
             <a:r>
-              <a:rPr sz="1200" b="1">
+              <a:rPr sz="1200" b="1" i="0">
                 <a:solidFill>
                   <a:srgbClr val="0071DC"/>
                 </a:solidFill>
@@ -25889,7 +27220,7 @@
           <a:p>
             <a:pPr algn="l"/>
             <a:r>
-              <a:rPr sz="1100" b="0">
+              <a:rPr sz="1100" b="0" i="0">
                 <a:solidFill>
                   <a:srgbClr val="333333"/>
                 </a:solidFill>
@@ -25923,7 +27254,7 @@
           <a:p>
             <a:pPr algn="l"/>
             <a:r>
-              <a:rPr sz="900" b="0">
+              <a:rPr sz="900" b="0" i="0">
                 <a:solidFill>
                   <a:srgbClr val="666666"/>
                 </a:solidFill>
@@ -25957,12 +27288,12 @@
           <a:p>
             <a:pPr algn="r"/>
             <a:r>
-              <a:rPr sz="900" b="0">
+              <a:rPr sz="900" b="0" i="0">
                 <a:solidFill>
                   <a:srgbClr val="666666"/>
                 </a:solidFill>
               </a:rPr>
-              <a:t>8 / 22</a:t>
+              <a:t>8 / 23</a:t>
             </a:r>
           </a:p>
         </p:txBody>
@@ -26053,7 +27384,7 @@
           <a:p>
             <a:pPr algn="l"/>
             <a:r>
-              <a:rPr sz="2600" b="1">
+              <a:rPr sz="2600" b="1" i="0">
                 <a:solidFill>
                   <a:srgbClr val="FFFFFF"/>
                 </a:solidFill>
@@ -26087,7 +27418,7 @@
           <a:p>
             <a:pPr algn="l"/>
             <a:r>
-              <a:rPr sz="1200" b="0">
+              <a:rPr sz="1200" b="0" i="0">
                 <a:solidFill>
                   <a:srgbClr val="E8F4FD"/>
                 </a:solidFill>
@@ -26165,7 +27496,7 @@
           <a:p>
             <a:pPr algn="l"/>
             <a:r>
-              <a:rPr sz="1100" b="1">
+              <a:rPr sz="1100" b="1" i="0">
                 <a:solidFill>
                   <a:srgbClr val="0071DC"/>
                 </a:solidFill>
@@ -26320,7 +27651,7 @@
         <p:spPr>
           <a:xfrm>
             <a:off x="6172200" y="914400"/>
-            <a:ext cx="5669280" cy="3543300"/>
+            <a:ext cx="5669280" cy="11338560"/>
           </a:xfrm>
           <a:prstGeom prst="rect">
             <a:avLst/>
@@ -26397,7 +27728,7 @@
           <a:p>
             <a:pPr algn="l"/>
             <a:r>
-              <a:rPr sz="1100" b="1">
+              <a:rPr sz="1100" b="1" i="0">
                 <a:solidFill>
                   <a:srgbClr val="0071DC"/>
                 </a:solidFill>
@@ -26431,7 +27762,7 @@
           <a:p>
             <a:pPr algn="l"/>
             <a:r>
-              <a:rPr sz="1100" b="0">
+              <a:rPr sz="1100" b="0" i="0">
                 <a:solidFill>
                   <a:srgbClr val="333333"/>
                 </a:solidFill>
@@ -26511,7 +27842,7 @@
           <a:p>
             <a:pPr algn="l"/>
             <a:r>
-              <a:rPr sz="1100" b="1">
+              <a:rPr sz="1100" b="1" i="0">
                 <a:solidFill>
                   <a:srgbClr val="0071DC"/>
                 </a:solidFill>
@@ -26545,7 +27876,7 @@
           <a:p>
             <a:pPr algn="l"/>
             <a:r>
-              <a:rPr sz="1100" b="0">
+              <a:rPr sz="1100" b="0" i="0">
                 <a:solidFill>
                   <a:srgbClr val="333333"/>
                 </a:solidFill>
@@ -26579,7 +27910,7 @@
           <a:p>
             <a:pPr algn="l"/>
             <a:r>
-              <a:rPr sz="900" b="0">
+              <a:rPr sz="900" b="0" i="0">
                 <a:solidFill>
                   <a:srgbClr val="666666"/>
                 </a:solidFill>
@@ -26613,12 +27944,12 @@
           <a:p>
             <a:pPr algn="r"/>
             <a:r>
-              <a:rPr sz="900" b="0">
+              <a:rPr sz="900" b="0" i="0">
                 <a:solidFill>
                   <a:srgbClr val="666666"/>
                 </a:solidFill>
               </a:rPr>
-              <a:t>9 / 22</a:t>
+              <a:t>9 / 23</a:t>
             </a:r>
           </a:p>
         </p:txBody>

--- a/docs/Sem_4/FINAL_PRESENTATION_VishalSingh_2020AA05641.pptx
+++ b/docs/Sem_4/FINAL_PRESENTATION_VishalSingh_2020AA05641.pptx
@@ -28,6 +28,7 @@
     <p:sldId id="276" r:id="rId27"/>
     <p:sldId id="277" r:id="rId28"/>
     <p:sldId id="278" r:id="rId29"/>
+    <p:sldId id="279" r:id="rId30"/>
   </p:sldIdLst>
   <p:sldSz cx="12191695" cy="6858000" type="screen4x3"/>
   <p:notesSz cx="6858000" cy="9144000"/>
@@ -4801,7 +4802,7 @@
                   <a:srgbClr val="666666"/>
                 </a:solidFill>
               </a:rPr>
-              <a:t>10 / 23</a:t>
+              <a:t>10 / 24</a:t>
             </a:r>
           </a:p>
         </p:txBody>
@@ -5832,7 +5833,7 @@
                   <a:srgbClr val="666666"/>
                 </a:solidFill>
               </a:rPr>
-              <a:t>11 / 23</a:t>
+              <a:t>11 / 24</a:t>
             </a:r>
           </a:p>
         </p:txBody>
@@ -6480,7 +6481,7 @@
                   <a:srgbClr val="666666"/>
                 </a:solidFill>
               </a:rPr>
-              <a:t>12 / 23</a:t>
+              <a:t>12 / 24</a:t>
             </a:r>
           </a:p>
         </p:txBody>
@@ -6494,6 +6495,1619 @@
 </file>
 
 <file path=ppt/slides/slide13.xml><?xml version="1.0" encoding="utf-8"?>
+<p:sld xmlns:a="http://schemas.openxmlformats.org/drawingml/2006/main" xmlns:p="http://schemas.openxmlformats.org/presentationml/2006/main" xmlns:r="http://schemas.openxmlformats.org/officeDocument/2006/relationships">
+  <p:cSld>
+    <p:spTree>
+      <p:nvGrpSpPr>
+        <p:cNvPr id="1" name=""/>
+        <p:cNvGrpSpPr/>
+        <p:nvPr/>
+      </p:nvGrpSpPr>
+      <p:grpSpPr/>
+      <p:sp>
+        <p:nvSpPr>
+          <p:cNvPr id="2" name="Rectangle 1"/>
+          <p:cNvSpPr/>
+          <p:nvPr/>
+        </p:nvSpPr>
+        <p:spPr>
+          <a:xfrm>
+            <a:off x="0" y="0"/>
+            <a:ext cx="12191695" cy="777240"/>
+          </a:xfrm>
+          <a:prstGeom prst="rect">
+            <a:avLst/>
+          </a:prstGeom>
+          <a:solidFill>
+            <a:srgbClr val="041E42"/>
+          </a:solidFill>
+          <a:ln>
+            <a:noFill/>
+          </a:ln>
+          <a:effectLst/>
+        </p:spPr>
+        <p:style>
+          <a:lnRef idx="1">
+            <a:schemeClr val="accent1"/>
+          </a:lnRef>
+          <a:fillRef idx="3">
+            <a:schemeClr val="accent1"/>
+          </a:fillRef>
+          <a:effectRef idx="2">
+            <a:schemeClr val="accent1"/>
+          </a:effectRef>
+          <a:fontRef idx="minor">
+            <a:schemeClr val="lt1"/>
+          </a:fontRef>
+        </p:style>
+        <p:txBody>
+          <a:bodyPr rtlCol="0" anchor="ctr"/>
+          <a:lstStyle/>
+          <a:p>
+            <a:pPr algn="ctr"/>
+          </a:p>
+        </p:txBody>
+      </p:sp>
+      <p:sp>
+        <p:nvSpPr>
+          <p:cNvPr id="3" name="TextBox 2"/>
+          <p:cNvSpPr txBox="1"/>
+          <p:nvPr/>
+        </p:nvSpPr>
+        <p:spPr>
+          <a:xfrm>
+            <a:off x="365760" y="109728"/>
+            <a:ext cx="11430000" cy="457200"/>
+          </a:xfrm>
+          <a:prstGeom prst="rect">
+            <a:avLst/>
+          </a:prstGeom>
+          <a:noFill/>
+        </p:spPr>
+        <p:txBody>
+          <a:bodyPr wrap="square" anchor="t">
+            <a:spAutoFit/>
+          </a:bodyPr>
+          <a:lstStyle/>
+          <a:p>
+            <a:pPr algn="l"/>
+            <a:r>
+              <a:rPr sz="2600" b="1" i="0">
+                <a:solidFill>
+                  <a:srgbClr val="FFFFFF"/>
+                </a:solidFill>
+              </a:rPr>
+              <a:t>Key Metrics  —  Formulas &amp; Thresholds</a:t>
+            </a:r>
+          </a:p>
+        </p:txBody>
+      </p:sp>
+      <p:sp>
+        <p:nvSpPr>
+          <p:cNvPr id="4" name="TextBox 3"/>
+          <p:cNvSpPr txBox="1"/>
+          <p:nvPr/>
+        </p:nvSpPr>
+        <p:spPr>
+          <a:xfrm>
+            <a:off x="365760" y="457200"/>
+            <a:ext cx="11430000" cy="320040"/>
+          </a:xfrm>
+          <a:prstGeom prst="rect">
+            <a:avLst/>
+          </a:prstGeom>
+          <a:noFill/>
+        </p:spPr>
+        <p:txBody>
+          <a:bodyPr wrap="square" anchor="t">
+            <a:spAutoFit/>
+          </a:bodyPr>
+          <a:lstStyle/>
+          <a:p>
+            <a:pPr algn="l"/>
+            <a:r>
+              <a:rPr sz="1200" b="0" i="0">
+                <a:solidFill>
+                  <a:srgbClr val="E8F4FD"/>
+                </a:solidFill>
+              </a:rPr>
+              <a:t>Every dashboard number reduces to one of these four families</a:t>
+            </a:r>
+          </a:p>
+        </p:txBody>
+      </p:sp>
+      <p:sp>
+        <p:nvSpPr>
+          <p:cNvPr id="5" name="Rectangle 4"/>
+          <p:cNvSpPr/>
+          <p:nvPr/>
+        </p:nvSpPr>
+        <p:spPr>
+          <a:xfrm>
+            <a:off x="0" y="777240"/>
+            <a:ext cx="12191695" cy="45720"/>
+          </a:xfrm>
+          <a:prstGeom prst="rect">
+            <a:avLst/>
+          </a:prstGeom>
+          <a:solidFill>
+            <a:srgbClr val="FFC220"/>
+          </a:solidFill>
+          <a:ln>
+            <a:noFill/>
+          </a:ln>
+          <a:effectLst/>
+        </p:spPr>
+        <p:style>
+          <a:lnRef idx="1">
+            <a:schemeClr val="accent1"/>
+          </a:lnRef>
+          <a:fillRef idx="3">
+            <a:schemeClr val="accent1"/>
+          </a:fillRef>
+          <a:effectRef idx="2">
+            <a:schemeClr val="accent1"/>
+          </a:effectRef>
+          <a:fontRef idx="minor">
+            <a:schemeClr val="lt1"/>
+          </a:fontRef>
+        </p:style>
+        <p:txBody>
+          <a:bodyPr rtlCol="0" anchor="ctr"/>
+          <a:lstStyle/>
+          <a:p>
+            <a:pPr algn="ctr"/>
+          </a:p>
+        </p:txBody>
+      </p:sp>
+      <p:sp>
+        <p:nvSpPr>
+          <p:cNvPr id="6" name="Rectangle 5"/>
+          <p:cNvSpPr/>
+          <p:nvPr/>
+        </p:nvSpPr>
+        <p:spPr>
+          <a:xfrm>
+            <a:off x="457200" y="960120"/>
+            <a:ext cx="5532120" cy="2606040"/>
+          </a:xfrm>
+          <a:prstGeom prst="rect">
+            <a:avLst/>
+          </a:prstGeom>
+          <a:solidFill>
+            <a:srgbClr val="F5F5F5"/>
+          </a:solidFill>
+          <a:ln>
+            <a:solidFill>
+              <a:srgbClr val="0071DC"/>
+            </a:solidFill>
+          </a:ln>
+          <a:effectLst/>
+        </p:spPr>
+        <p:style>
+          <a:lnRef idx="1">
+            <a:schemeClr val="accent1"/>
+          </a:lnRef>
+          <a:fillRef idx="3">
+            <a:schemeClr val="accent1"/>
+          </a:fillRef>
+          <a:effectRef idx="2">
+            <a:schemeClr val="accent1"/>
+          </a:effectRef>
+          <a:fontRef idx="minor">
+            <a:schemeClr val="lt1"/>
+          </a:fontRef>
+        </p:style>
+        <p:txBody>
+          <a:bodyPr rtlCol="0" anchor="ctr"/>
+          <a:lstStyle/>
+          <a:p>
+            <a:pPr algn="ctr"/>
+          </a:p>
+        </p:txBody>
+      </p:sp>
+      <p:sp>
+        <p:nvSpPr>
+          <p:cNvPr id="7" name="Rectangle 6"/>
+          <p:cNvSpPr/>
+          <p:nvPr/>
+        </p:nvSpPr>
+        <p:spPr>
+          <a:xfrm>
+            <a:off x="457200" y="960120"/>
+            <a:ext cx="5532120" cy="384048"/>
+          </a:xfrm>
+          <a:prstGeom prst="rect">
+            <a:avLst/>
+          </a:prstGeom>
+          <a:solidFill>
+            <a:srgbClr val="0071DC"/>
+          </a:solidFill>
+          <a:ln>
+            <a:noFill/>
+          </a:ln>
+          <a:effectLst/>
+        </p:spPr>
+        <p:style>
+          <a:lnRef idx="1">
+            <a:schemeClr val="accent1"/>
+          </a:lnRef>
+          <a:fillRef idx="3">
+            <a:schemeClr val="accent1"/>
+          </a:fillRef>
+          <a:effectRef idx="2">
+            <a:schemeClr val="accent1"/>
+          </a:effectRef>
+          <a:fontRef idx="minor">
+            <a:schemeClr val="lt1"/>
+          </a:fontRef>
+        </p:style>
+        <p:txBody>
+          <a:bodyPr rtlCol="0" anchor="ctr"/>
+          <a:lstStyle/>
+          <a:p>
+            <a:pPr algn="ctr"/>
+          </a:p>
+        </p:txBody>
+      </p:sp>
+      <p:sp>
+        <p:nvSpPr>
+          <p:cNvPr id="8" name="TextBox 7"/>
+          <p:cNvSpPr txBox="1"/>
+          <p:nvPr/>
+        </p:nvSpPr>
+        <p:spPr>
+          <a:xfrm>
+            <a:off x="457200" y="1014984"/>
+            <a:ext cx="5532120" cy="292608"/>
+          </a:xfrm>
+          <a:prstGeom prst="rect">
+            <a:avLst/>
+          </a:prstGeom>
+          <a:noFill/>
+        </p:spPr>
+        <p:txBody>
+          <a:bodyPr wrap="square" anchor="t">
+            <a:spAutoFit/>
+          </a:bodyPr>
+          <a:lstStyle/>
+          <a:p>
+            <a:pPr algn="ctr"/>
+            <a:r>
+              <a:rPr sz="1100" b="1" i="0">
+                <a:solidFill>
+                  <a:srgbClr val="FFFFFF"/>
+                </a:solidFill>
+              </a:rPr>
+              <a:t>BRAND HEALTH  ·  SENTIMENT GAUGE</a:t>
+            </a:r>
+          </a:p>
+        </p:txBody>
+      </p:sp>
+      <p:sp>
+        <p:nvSpPr>
+          <p:cNvPr id="9" name="TextBox 8"/>
+          <p:cNvSpPr txBox="1"/>
+          <p:nvPr/>
+        </p:nvSpPr>
+        <p:spPr>
+          <a:xfrm>
+            <a:off x="621792" y="1417320"/>
+            <a:ext cx="5212080" cy="320040"/>
+          </a:xfrm>
+          <a:prstGeom prst="rect">
+            <a:avLst/>
+          </a:prstGeom>
+          <a:noFill/>
+        </p:spPr>
+        <p:txBody>
+          <a:bodyPr wrap="square" anchor="t">
+            <a:spAutoFit/>
+          </a:bodyPr>
+          <a:lstStyle/>
+          <a:p>
+            <a:pPr algn="l"/>
+            <a:r>
+              <a:rPr sz="1250" b="1" i="0">
+                <a:solidFill>
+                  <a:srgbClr val="041E42"/>
+                </a:solidFill>
+              </a:rPr>
+              <a:t>Net-sentiment score in –100 … +100</a:t>
+            </a:r>
+          </a:p>
+        </p:txBody>
+      </p:sp>
+      <p:sp>
+        <p:nvSpPr>
+          <p:cNvPr id="10" name="Rectangle 9"/>
+          <p:cNvSpPr/>
+          <p:nvPr/>
+        </p:nvSpPr>
+        <p:spPr>
+          <a:xfrm>
+            <a:off x="621792" y="1783080"/>
+            <a:ext cx="5212080" cy="566928"/>
+          </a:xfrm>
+          <a:prstGeom prst="rect">
+            <a:avLst/>
+          </a:prstGeom>
+          <a:solidFill>
+            <a:srgbClr val="E8F4FD"/>
+          </a:solidFill>
+          <a:ln>
+            <a:solidFill>
+              <a:srgbClr val="0071DC"/>
+            </a:solidFill>
+          </a:ln>
+          <a:effectLst/>
+        </p:spPr>
+        <p:style>
+          <a:lnRef idx="1">
+            <a:schemeClr val="accent1"/>
+          </a:lnRef>
+          <a:fillRef idx="3">
+            <a:schemeClr val="accent1"/>
+          </a:fillRef>
+          <a:effectRef idx="2">
+            <a:schemeClr val="accent1"/>
+          </a:effectRef>
+          <a:fontRef idx="minor">
+            <a:schemeClr val="lt1"/>
+          </a:fontRef>
+        </p:style>
+        <p:txBody>
+          <a:bodyPr rtlCol="0" anchor="ctr"/>
+          <a:lstStyle/>
+          <a:p>
+            <a:pPr algn="ctr"/>
+          </a:p>
+        </p:txBody>
+      </p:sp>
+      <p:sp>
+        <p:nvSpPr>
+          <p:cNvPr id="11" name="TextBox 10"/>
+          <p:cNvSpPr txBox="1"/>
+          <p:nvPr/>
+        </p:nvSpPr>
+        <p:spPr>
+          <a:xfrm>
+            <a:off x="621792" y="1783080"/>
+            <a:ext cx="5212080" cy="566928"/>
+          </a:xfrm>
+          <a:prstGeom prst="rect">
+            <a:avLst/>
+          </a:prstGeom>
+          <a:noFill/>
+        </p:spPr>
+        <p:txBody>
+          <a:bodyPr wrap="square" anchor="ctr">
+            <a:spAutoFit/>
+          </a:bodyPr>
+          <a:lstStyle/>
+          <a:p>
+            <a:pPr algn="ctr"/>
+            <a:r>
+              <a:rPr sz="1200" b="1" i="0">
+                <a:solidFill>
+                  <a:srgbClr val="041E42"/>
+                </a:solidFill>
+              </a:rPr>
+              <a:t>score  =  (positive – negative) / total  ×  100</a:t>
+            </a:r>
+          </a:p>
+        </p:txBody>
+      </p:sp>
+      <p:sp>
+        <p:nvSpPr>
+          <p:cNvPr id="12" name="TextBox 11"/>
+          <p:cNvSpPr txBox="1"/>
+          <p:nvPr/>
+        </p:nvSpPr>
+        <p:spPr>
+          <a:xfrm>
+            <a:off x="621792" y="2423160"/>
+            <a:ext cx="5212080" cy="411480"/>
+          </a:xfrm>
+          <a:prstGeom prst="rect">
+            <a:avLst/>
+          </a:prstGeom>
+          <a:noFill/>
+        </p:spPr>
+        <p:txBody>
+          <a:bodyPr wrap="square" anchor="t">
+            <a:spAutoFit/>
+          </a:bodyPr>
+          <a:lstStyle/>
+          <a:p>
+            <a:pPr algn="l"/>
+            <a:r>
+              <a:rPr sz="1050" b="0" i="1">
+                <a:solidFill>
+                  <a:srgbClr val="333333"/>
+                </a:solidFill>
+              </a:rPr>
+              <a:t>P, N, U = counts of positive / negative / neutral posts in the window (segment-filtered).</a:t>
+            </a:r>
+          </a:p>
+        </p:txBody>
+      </p:sp>
+      <p:sp>
+        <p:nvSpPr>
+          <p:cNvPr id="13" name="TextBox 12"/>
+          <p:cNvSpPr txBox="1"/>
+          <p:nvPr/>
+        </p:nvSpPr>
+        <p:spPr>
+          <a:xfrm>
+            <a:off x="621792" y="2834639"/>
+            <a:ext cx="5212080" cy="685800"/>
+          </a:xfrm>
+          <a:prstGeom prst="rect">
+            <a:avLst/>
+          </a:prstGeom>
+          <a:noFill/>
+        </p:spPr>
+        <p:txBody>
+          <a:bodyPr wrap="square">
+            <a:spAutoFit/>
+          </a:bodyPr>
+          <a:lstStyle/>
+          <a:p>
+            <a:pPr>
+              <a:spcAft>
+                <a:spcPts val="400"/>
+              </a:spcAft>
+            </a:pPr>
+            <a:r>
+              <a:rPr sz="1050" b="0">
+                <a:solidFill>
+                  <a:srgbClr val="333333"/>
+                </a:solidFill>
+              </a:rPr>
+              <a:t>•  score  &gt;  +20   →   Healthy    (green)</a:t>
+            </a:r>
+          </a:p>
+          <a:p>
+            <a:pPr>
+              <a:spcAft>
+                <a:spcPts val="400"/>
+              </a:spcAft>
+            </a:pPr>
+            <a:r>
+              <a:rPr sz="1050" b="0">
+                <a:solidFill>
+                  <a:srgbClr val="333333"/>
+                </a:solidFill>
+              </a:rPr>
+              <a:t>•  score  &lt;  –20   →   At risk    (red)</a:t>
+            </a:r>
+          </a:p>
+          <a:p>
+            <a:pPr>
+              <a:spcAft>
+                <a:spcPts val="400"/>
+              </a:spcAft>
+            </a:pPr>
+            <a:r>
+              <a:rPr sz="1050" b="0">
+                <a:solidFill>
+                  <a:srgbClr val="333333"/>
+                </a:solidFill>
+              </a:rPr>
+              <a:t>•  otherwise       →   Neutral    (orange)</a:t>
+            </a:r>
+          </a:p>
+        </p:txBody>
+      </p:sp>
+      <p:sp>
+        <p:nvSpPr>
+          <p:cNvPr id="14" name="Rectangle 13"/>
+          <p:cNvSpPr/>
+          <p:nvPr/>
+        </p:nvSpPr>
+        <p:spPr>
+          <a:xfrm>
+            <a:off x="6172200" y="960120"/>
+            <a:ext cx="5532120" cy="2606040"/>
+          </a:xfrm>
+          <a:prstGeom prst="rect">
+            <a:avLst/>
+          </a:prstGeom>
+          <a:solidFill>
+            <a:srgbClr val="F5F5F5"/>
+          </a:solidFill>
+          <a:ln>
+            <a:solidFill>
+              <a:srgbClr val="10B981"/>
+            </a:solidFill>
+          </a:ln>
+          <a:effectLst/>
+        </p:spPr>
+        <p:style>
+          <a:lnRef idx="1">
+            <a:schemeClr val="accent1"/>
+          </a:lnRef>
+          <a:fillRef idx="3">
+            <a:schemeClr val="accent1"/>
+          </a:fillRef>
+          <a:effectRef idx="2">
+            <a:schemeClr val="accent1"/>
+          </a:effectRef>
+          <a:fontRef idx="minor">
+            <a:schemeClr val="lt1"/>
+          </a:fontRef>
+        </p:style>
+        <p:txBody>
+          <a:bodyPr rtlCol="0" anchor="ctr"/>
+          <a:lstStyle/>
+          <a:p>
+            <a:pPr algn="ctr"/>
+          </a:p>
+        </p:txBody>
+      </p:sp>
+      <p:sp>
+        <p:nvSpPr>
+          <p:cNvPr id="15" name="Rectangle 14"/>
+          <p:cNvSpPr/>
+          <p:nvPr/>
+        </p:nvSpPr>
+        <p:spPr>
+          <a:xfrm>
+            <a:off x="6172200" y="960120"/>
+            <a:ext cx="5532120" cy="384048"/>
+          </a:xfrm>
+          <a:prstGeom prst="rect">
+            <a:avLst/>
+          </a:prstGeom>
+          <a:solidFill>
+            <a:srgbClr val="10B981"/>
+          </a:solidFill>
+          <a:ln>
+            <a:noFill/>
+          </a:ln>
+          <a:effectLst/>
+        </p:spPr>
+        <p:style>
+          <a:lnRef idx="1">
+            <a:schemeClr val="accent1"/>
+          </a:lnRef>
+          <a:fillRef idx="3">
+            <a:schemeClr val="accent1"/>
+          </a:fillRef>
+          <a:effectRef idx="2">
+            <a:schemeClr val="accent1"/>
+          </a:effectRef>
+          <a:fontRef idx="minor">
+            <a:schemeClr val="lt1"/>
+          </a:fontRef>
+        </p:style>
+        <p:txBody>
+          <a:bodyPr rtlCol="0" anchor="ctr"/>
+          <a:lstStyle/>
+          <a:p>
+            <a:pPr algn="ctr"/>
+          </a:p>
+        </p:txBody>
+      </p:sp>
+      <p:sp>
+        <p:nvSpPr>
+          <p:cNvPr id="16" name="TextBox 15"/>
+          <p:cNvSpPr txBox="1"/>
+          <p:nvPr/>
+        </p:nvSpPr>
+        <p:spPr>
+          <a:xfrm>
+            <a:off x="6172200" y="1014984"/>
+            <a:ext cx="5532120" cy="292608"/>
+          </a:xfrm>
+          <a:prstGeom prst="rect">
+            <a:avLst/>
+          </a:prstGeom>
+          <a:noFill/>
+        </p:spPr>
+        <p:txBody>
+          <a:bodyPr wrap="square" anchor="t">
+            <a:spAutoFit/>
+          </a:bodyPr>
+          <a:lstStyle/>
+          <a:p>
+            <a:pPr algn="ctr"/>
+            <a:r>
+              <a:rPr sz="1100" b="1" i="0">
+                <a:solidFill>
+                  <a:srgbClr val="FFFFFF"/>
+                </a:solidFill>
+              </a:rPr>
+              <a:t>TRUST SCORE  ·  PER-POST CREDIBILITY</a:t>
+            </a:r>
+          </a:p>
+        </p:txBody>
+      </p:sp>
+      <p:sp>
+        <p:nvSpPr>
+          <p:cNvPr id="17" name="TextBox 16"/>
+          <p:cNvSpPr txBox="1"/>
+          <p:nvPr/>
+        </p:nvSpPr>
+        <p:spPr>
+          <a:xfrm>
+            <a:off x="6336792" y="1417320"/>
+            <a:ext cx="5212080" cy="320040"/>
+          </a:xfrm>
+          <a:prstGeom prst="rect">
+            <a:avLst/>
+          </a:prstGeom>
+          <a:noFill/>
+        </p:spPr>
+        <p:txBody>
+          <a:bodyPr wrap="square" anchor="t">
+            <a:spAutoFit/>
+          </a:bodyPr>
+          <a:lstStyle/>
+          <a:p>
+            <a:pPr algn="l"/>
+            <a:r>
+              <a:rPr sz="1250" b="1" i="0">
+                <a:solidFill>
+                  <a:srgbClr val="041E42"/>
+                </a:solidFill>
+              </a:rPr>
+              <a:t>Weighted 3-component credibility signal</a:t>
+            </a:r>
+          </a:p>
+        </p:txBody>
+      </p:sp>
+      <p:sp>
+        <p:nvSpPr>
+          <p:cNvPr id="18" name="Rectangle 17"/>
+          <p:cNvSpPr/>
+          <p:nvPr/>
+        </p:nvSpPr>
+        <p:spPr>
+          <a:xfrm>
+            <a:off x="6336792" y="1783080"/>
+            <a:ext cx="5212080" cy="566928"/>
+          </a:xfrm>
+          <a:prstGeom prst="rect">
+            <a:avLst/>
+          </a:prstGeom>
+          <a:solidFill>
+            <a:srgbClr val="DCFCE7"/>
+          </a:solidFill>
+          <a:ln>
+            <a:solidFill>
+              <a:srgbClr val="10B981"/>
+            </a:solidFill>
+          </a:ln>
+          <a:effectLst/>
+        </p:spPr>
+        <p:style>
+          <a:lnRef idx="1">
+            <a:schemeClr val="accent1"/>
+          </a:lnRef>
+          <a:fillRef idx="3">
+            <a:schemeClr val="accent1"/>
+          </a:fillRef>
+          <a:effectRef idx="2">
+            <a:schemeClr val="accent1"/>
+          </a:effectRef>
+          <a:fontRef idx="minor">
+            <a:schemeClr val="lt1"/>
+          </a:fontRef>
+        </p:style>
+        <p:txBody>
+          <a:bodyPr rtlCol="0" anchor="ctr"/>
+          <a:lstStyle/>
+          <a:p>
+            <a:pPr algn="ctr"/>
+          </a:p>
+        </p:txBody>
+      </p:sp>
+      <p:sp>
+        <p:nvSpPr>
+          <p:cNvPr id="19" name="TextBox 18"/>
+          <p:cNvSpPr txBox="1"/>
+          <p:nvPr/>
+        </p:nvSpPr>
+        <p:spPr>
+          <a:xfrm>
+            <a:off x="6336792" y="1783080"/>
+            <a:ext cx="5212080" cy="566928"/>
+          </a:xfrm>
+          <a:prstGeom prst="rect">
+            <a:avLst/>
+          </a:prstGeom>
+          <a:noFill/>
+        </p:spPr>
+        <p:txBody>
+          <a:bodyPr wrap="square" anchor="ctr">
+            <a:spAutoFit/>
+          </a:bodyPr>
+          <a:lstStyle/>
+          <a:p>
+            <a:pPr algn="ctr"/>
+            <a:r>
+              <a:rPr sz="1200" b="1" i="0">
+                <a:solidFill>
+                  <a:srgbClr val="041E42"/>
+                </a:solidFill>
+              </a:rPr>
+              <a:t>trust  =  0.4 · metadata  +  0.3 · dedup  +  0.3 · llm</a:t>
+            </a:r>
+          </a:p>
+        </p:txBody>
+      </p:sp>
+      <p:sp>
+        <p:nvSpPr>
+          <p:cNvPr id="20" name="TextBox 19"/>
+          <p:cNvSpPr txBox="1"/>
+          <p:nvPr/>
+        </p:nvSpPr>
+        <p:spPr>
+          <a:xfrm>
+            <a:off x="6336792" y="2423160"/>
+            <a:ext cx="5212080" cy="411480"/>
+          </a:xfrm>
+          <a:prstGeom prst="rect">
+            <a:avLst/>
+          </a:prstGeom>
+          <a:noFill/>
+        </p:spPr>
+        <p:txBody>
+          <a:bodyPr wrap="square" anchor="t">
+            <a:spAutoFit/>
+          </a:bodyPr>
+          <a:lstStyle/>
+          <a:p>
+            <a:pPr algn="l"/>
+            <a:r>
+              <a:rPr sz="1050" b="0" i="1">
+                <a:solidFill>
+                  <a:srgbClr val="333333"/>
+                </a:solidFill>
+              </a:rPr>
+              <a:t>metadata = account age / karma;  dedup = MinHash near-duplicate;  llm = ambiguous-zone check.</a:t>
+            </a:r>
+          </a:p>
+        </p:txBody>
+      </p:sp>
+      <p:sp>
+        <p:nvSpPr>
+          <p:cNvPr id="21" name="TextBox 20"/>
+          <p:cNvSpPr txBox="1"/>
+          <p:nvPr/>
+        </p:nvSpPr>
+        <p:spPr>
+          <a:xfrm>
+            <a:off x="6336792" y="2834639"/>
+            <a:ext cx="5212080" cy="685800"/>
+          </a:xfrm>
+          <a:prstGeom prst="rect">
+            <a:avLst/>
+          </a:prstGeom>
+          <a:noFill/>
+        </p:spPr>
+        <p:txBody>
+          <a:bodyPr wrap="square">
+            <a:spAutoFit/>
+          </a:bodyPr>
+          <a:lstStyle/>
+          <a:p>
+            <a:pPr>
+              <a:spcAft>
+                <a:spcPts val="400"/>
+              </a:spcAft>
+            </a:pPr>
+            <a:r>
+              <a:rPr sz="1050" b="0">
+                <a:solidFill>
+                  <a:srgbClr val="333333"/>
+                </a:solidFill>
+              </a:rPr>
+              <a:t>•  trust  ≥  0.7   →   trusted, eligible for P1</a:t>
+            </a:r>
+          </a:p>
+          <a:p>
+            <a:pPr>
+              <a:spcAft>
+                <a:spcPts val="400"/>
+              </a:spcAft>
+            </a:pPr>
+            <a:r>
+              <a:rPr sz="1050" b="0">
+                <a:solidFill>
+                  <a:srgbClr val="333333"/>
+                </a:solidFill>
+              </a:rPr>
+              <a:t>•  0.5 ≤ trust &lt; 0.7   →   eligible for P2</a:t>
+            </a:r>
+          </a:p>
+          <a:p>
+            <a:pPr>
+              <a:spcAft>
+                <a:spcPts val="400"/>
+              </a:spcAft>
+            </a:pPr>
+            <a:r>
+              <a:rPr sz="1050" b="0">
+                <a:solidFill>
+                  <a:srgbClr val="333333"/>
+                </a:solidFill>
+              </a:rPr>
+              <a:t>•  trust  &lt;  0.5   →   flagged (never silently dropped)</a:t>
+            </a:r>
+          </a:p>
+        </p:txBody>
+      </p:sp>
+      <p:sp>
+        <p:nvSpPr>
+          <p:cNvPr id="22" name="Rectangle 21"/>
+          <p:cNvSpPr/>
+          <p:nvPr/>
+        </p:nvSpPr>
+        <p:spPr>
+          <a:xfrm>
+            <a:off x="457200" y="3703320"/>
+            <a:ext cx="5532120" cy="2606040"/>
+          </a:xfrm>
+          <a:prstGeom prst="rect">
+            <a:avLst/>
+          </a:prstGeom>
+          <a:solidFill>
+            <a:srgbClr val="F5F5F5"/>
+          </a:solidFill>
+          <a:ln>
+            <a:solidFill>
+              <a:srgbClr val="D97706"/>
+            </a:solidFill>
+          </a:ln>
+          <a:effectLst/>
+        </p:spPr>
+        <p:style>
+          <a:lnRef idx="1">
+            <a:schemeClr val="accent1"/>
+          </a:lnRef>
+          <a:fillRef idx="3">
+            <a:schemeClr val="accent1"/>
+          </a:fillRef>
+          <a:effectRef idx="2">
+            <a:schemeClr val="accent1"/>
+          </a:effectRef>
+          <a:fontRef idx="minor">
+            <a:schemeClr val="lt1"/>
+          </a:fontRef>
+        </p:style>
+        <p:txBody>
+          <a:bodyPr rtlCol="0" anchor="ctr"/>
+          <a:lstStyle/>
+          <a:p>
+            <a:pPr algn="ctr"/>
+          </a:p>
+        </p:txBody>
+      </p:sp>
+      <p:sp>
+        <p:nvSpPr>
+          <p:cNvPr id="23" name="Rectangle 22"/>
+          <p:cNvSpPr/>
+          <p:nvPr/>
+        </p:nvSpPr>
+        <p:spPr>
+          <a:xfrm>
+            <a:off x="457200" y="3703320"/>
+            <a:ext cx="5532120" cy="384048"/>
+          </a:xfrm>
+          <a:prstGeom prst="rect">
+            <a:avLst/>
+          </a:prstGeom>
+          <a:solidFill>
+            <a:srgbClr val="D97706"/>
+          </a:solidFill>
+          <a:ln>
+            <a:noFill/>
+          </a:ln>
+          <a:effectLst/>
+        </p:spPr>
+        <p:style>
+          <a:lnRef idx="1">
+            <a:schemeClr val="accent1"/>
+          </a:lnRef>
+          <a:fillRef idx="3">
+            <a:schemeClr val="accent1"/>
+          </a:fillRef>
+          <a:effectRef idx="2">
+            <a:schemeClr val="accent1"/>
+          </a:effectRef>
+          <a:fontRef idx="minor">
+            <a:schemeClr val="lt1"/>
+          </a:fontRef>
+        </p:style>
+        <p:txBody>
+          <a:bodyPr rtlCol="0" anchor="ctr"/>
+          <a:lstStyle/>
+          <a:p>
+            <a:pPr algn="ctr"/>
+          </a:p>
+        </p:txBody>
+      </p:sp>
+      <p:sp>
+        <p:nvSpPr>
+          <p:cNvPr id="24" name="TextBox 23"/>
+          <p:cNvSpPr txBox="1"/>
+          <p:nvPr/>
+        </p:nvSpPr>
+        <p:spPr>
+          <a:xfrm>
+            <a:off x="457200" y="3758183"/>
+            <a:ext cx="5532120" cy="292608"/>
+          </a:xfrm>
+          <a:prstGeom prst="rect">
+            <a:avLst/>
+          </a:prstGeom>
+          <a:noFill/>
+        </p:spPr>
+        <p:txBody>
+          <a:bodyPr wrap="square" anchor="t">
+            <a:spAutoFit/>
+          </a:bodyPr>
+          <a:lstStyle/>
+          <a:p>
+            <a:pPr algn="ctr"/>
+            <a:r>
+              <a:rPr sz="1100" b="1" i="0">
+                <a:solidFill>
+                  <a:srgbClr val="FFFFFF"/>
+                </a:solidFill>
+              </a:rPr>
+              <a:t>PRIORITY TIERS  ·  P1 / P2 URGENCY GATE</a:t>
+            </a:r>
+          </a:p>
+        </p:txBody>
+      </p:sp>
+      <p:sp>
+        <p:nvSpPr>
+          <p:cNvPr id="25" name="TextBox 24"/>
+          <p:cNvSpPr txBox="1"/>
+          <p:nvPr/>
+        </p:nvSpPr>
+        <p:spPr>
+          <a:xfrm>
+            <a:off x="621792" y="4160520"/>
+            <a:ext cx="5212080" cy="320040"/>
+          </a:xfrm>
+          <a:prstGeom prst="rect">
+            <a:avLst/>
+          </a:prstGeom>
+          <a:noFill/>
+        </p:spPr>
+        <p:txBody>
+          <a:bodyPr wrap="square" anchor="t">
+            <a:spAutoFit/>
+          </a:bodyPr>
+          <a:lstStyle/>
+          <a:p>
+            <a:pPr algn="l"/>
+            <a:r>
+              <a:rPr sz="1250" b="1" i="0">
+                <a:solidFill>
+                  <a:srgbClr val="041E42"/>
+                </a:solidFill>
+              </a:rPr>
+              <a:t>Two-dimensional gate: credibility × model confidence</a:t>
+            </a:r>
+          </a:p>
+        </p:txBody>
+      </p:sp>
+      <p:sp>
+        <p:nvSpPr>
+          <p:cNvPr id="26" name="Rectangle 25"/>
+          <p:cNvSpPr/>
+          <p:nvPr/>
+        </p:nvSpPr>
+        <p:spPr>
+          <a:xfrm>
+            <a:off x="621792" y="4526280"/>
+            <a:ext cx="5212080" cy="566928"/>
+          </a:xfrm>
+          <a:prstGeom prst="rect">
+            <a:avLst/>
+          </a:prstGeom>
+          <a:solidFill>
+            <a:srgbClr val="FEF3C7"/>
+          </a:solidFill>
+          <a:ln>
+            <a:solidFill>
+              <a:srgbClr val="D97706"/>
+            </a:solidFill>
+          </a:ln>
+          <a:effectLst/>
+        </p:spPr>
+        <p:style>
+          <a:lnRef idx="1">
+            <a:schemeClr val="accent1"/>
+          </a:lnRef>
+          <a:fillRef idx="3">
+            <a:schemeClr val="accent1"/>
+          </a:fillRef>
+          <a:effectRef idx="2">
+            <a:schemeClr val="accent1"/>
+          </a:effectRef>
+          <a:fontRef idx="minor">
+            <a:schemeClr val="lt1"/>
+          </a:fontRef>
+        </p:style>
+        <p:txBody>
+          <a:bodyPr rtlCol="0" anchor="ctr"/>
+          <a:lstStyle/>
+          <a:p>
+            <a:pPr algn="ctr"/>
+          </a:p>
+        </p:txBody>
+      </p:sp>
+      <p:sp>
+        <p:nvSpPr>
+          <p:cNvPr id="27" name="TextBox 26"/>
+          <p:cNvSpPr txBox="1"/>
+          <p:nvPr/>
+        </p:nvSpPr>
+        <p:spPr>
+          <a:xfrm>
+            <a:off x="621792" y="4526280"/>
+            <a:ext cx="5212080" cy="566928"/>
+          </a:xfrm>
+          <a:prstGeom prst="rect">
+            <a:avLst/>
+          </a:prstGeom>
+          <a:noFill/>
+        </p:spPr>
+        <p:txBody>
+          <a:bodyPr wrap="square" anchor="ctr">
+            <a:spAutoFit/>
+          </a:bodyPr>
+          <a:lstStyle/>
+          <a:p>
+            <a:pPr algn="ctr"/>
+            <a:r>
+              <a:rPr sz="1200" b="1" i="0">
+                <a:solidFill>
+                  <a:srgbClr val="041E42"/>
+                </a:solidFill>
+              </a:rPr>
+              <a:t>P1:  trust ≥ 0.70   ∧   sent_conf ≥ 0.80</a:t>
+            </a:r>
+          </a:p>
+          <a:p>
+            <a:pPr algn="ctr"/>
+            <a:r>
+              <a:rPr sz="1200" b="1" i="0">
+                <a:solidFill>
+                  <a:srgbClr val="041E42"/>
+                </a:solidFill>
+              </a:rPr>
+              <a:t>P2:  trust ≥ 0.50   ∧   sent_conf ≥ 0.60   (and not P1)</a:t>
+            </a:r>
+          </a:p>
+        </p:txBody>
+      </p:sp>
+      <p:sp>
+        <p:nvSpPr>
+          <p:cNvPr id="28" name="TextBox 27"/>
+          <p:cNvSpPr txBox="1"/>
+          <p:nvPr/>
+        </p:nvSpPr>
+        <p:spPr>
+          <a:xfrm>
+            <a:off x="621792" y="5166360"/>
+            <a:ext cx="5212080" cy="411480"/>
+          </a:xfrm>
+          <a:prstGeom prst="rect">
+            <a:avLst/>
+          </a:prstGeom>
+          <a:noFill/>
+        </p:spPr>
+        <p:txBody>
+          <a:bodyPr wrap="square" anchor="t">
+            <a:spAutoFit/>
+          </a:bodyPr>
+          <a:lstStyle/>
+          <a:p>
+            <a:pPr algn="l"/>
+            <a:r>
+              <a:rPr sz="1050" b="0" i="1">
+                <a:solidFill>
+                  <a:srgbClr val="333333"/>
+                </a:solidFill>
+              </a:rPr>
+              <a:t>Ranking within tier uses  priority_score = trust × sent_conf  (SQL ORDER BY).</a:t>
+            </a:r>
+          </a:p>
+        </p:txBody>
+      </p:sp>
+      <p:sp>
+        <p:nvSpPr>
+          <p:cNvPr id="29" name="TextBox 28"/>
+          <p:cNvSpPr txBox="1"/>
+          <p:nvPr/>
+        </p:nvSpPr>
+        <p:spPr>
+          <a:xfrm>
+            <a:off x="621792" y="5577840"/>
+            <a:ext cx="5212080" cy="685800"/>
+          </a:xfrm>
+          <a:prstGeom prst="rect">
+            <a:avLst/>
+          </a:prstGeom>
+          <a:noFill/>
+        </p:spPr>
+        <p:txBody>
+          <a:bodyPr wrap="square">
+            <a:spAutoFit/>
+          </a:bodyPr>
+          <a:lstStyle/>
+          <a:p>
+            <a:pPr>
+              <a:spcAft>
+                <a:spcPts val="400"/>
+              </a:spcAft>
+            </a:pPr>
+            <a:r>
+              <a:rPr sz="1050" b="0">
+                <a:solidFill>
+                  <a:srgbClr val="333333"/>
+                </a:solidFill>
+              </a:rPr>
+              <a:t>•  Both components must independently clear the gate</a:t>
+            </a:r>
+          </a:p>
+          <a:p>
+            <a:pPr>
+              <a:spcAft>
+                <a:spcPts val="400"/>
+              </a:spcAft>
+            </a:pPr>
+            <a:r>
+              <a:rPr sz="1050" b="0">
+                <a:solidFill>
+                  <a:srgbClr val="333333"/>
+                </a:solidFill>
+              </a:rPr>
+              <a:t>•  P1 = urgent  ·  P2 = review-worthy  ·  else = background</a:t>
+            </a:r>
+          </a:p>
+          <a:p>
+            <a:pPr>
+              <a:spcAft>
+                <a:spcPts val="400"/>
+              </a:spcAft>
+            </a:pPr>
+            <a:r>
+              <a:rPr sz="1050" b="0">
+                <a:solidFill>
+                  <a:srgbClr val="333333"/>
+                </a:solidFill>
+              </a:rPr>
+              <a:t>•  Notification groups filter on  priority_filter  (JSON)</a:t>
+            </a:r>
+          </a:p>
+        </p:txBody>
+      </p:sp>
+      <p:sp>
+        <p:nvSpPr>
+          <p:cNvPr id="30" name="Rectangle 29"/>
+          <p:cNvSpPr/>
+          <p:nvPr/>
+        </p:nvSpPr>
+        <p:spPr>
+          <a:xfrm>
+            <a:off x="6172200" y="3703320"/>
+            <a:ext cx="5532120" cy="2606040"/>
+          </a:xfrm>
+          <a:prstGeom prst="rect">
+            <a:avLst/>
+          </a:prstGeom>
+          <a:solidFill>
+            <a:srgbClr val="F5F5F5"/>
+          </a:solidFill>
+          <a:ln>
+            <a:solidFill>
+              <a:srgbClr val="7C3AED"/>
+            </a:solidFill>
+          </a:ln>
+          <a:effectLst/>
+        </p:spPr>
+        <p:style>
+          <a:lnRef idx="1">
+            <a:schemeClr val="accent1"/>
+          </a:lnRef>
+          <a:fillRef idx="3">
+            <a:schemeClr val="accent1"/>
+          </a:fillRef>
+          <a:effectRef idx="2">
+            <a:schemeClr val="accent1"/>
+          </a:effectRef>
+          <a:fontRef idx="minor">
+            <a:schemeClr val="lt1"/>
+          </a:fontRef>
+        </p:style>
+        <p:txBody>
+          <a:bodyPr rtlCol="0" anchor="ctr"/>
+          <a:lstStyle/>
+          <a:p>
+            <a:pPr algn="ctr"/>
+          </a:p>
+        </p:txBody>
+      </p:sp>
+      <p:sp>
+        <p:nvSpPr>
+          <p:cNvPr id="31" name="Rectangle 30"/>
+          <p:cNvSpPr/>
+          <p:nvPr/>
+        </p:nvSpPr>
+        <p:spPr>
+          <a:xfrm>
+            <a:off x="6172200" y="3703320"/>
+            <a:ext cx="5532120" cy="384048"/>
+          </a:xfrm>
+          <a:prstGeom prst="rect">
+            <a:avLst/>
+          </a:prstGeom>
+          <a:solidFill>
+            <a:srgbClr val="7C3AED"/>
+          </a:solidFill>
+          <a:ln>
+            <a:noFill/>
+          </a:ln>
+          <a:effectLst/>
+        </p:spPr>
+        <p:style>
+          <a:lnRef idx="1">
+            <a:schemeClr val="accent1"/>
+          </a:lnRef>
+          <a:fillRef idx="3">
+            <a:schemeClr val="accent1"/>
+          </a:fillRef>
+          <a:effectRef idx="2">
+            <a:schemeClr val="accent1"/>
+          </a:effectRef>
+          <a:fontRef idx="minor">
+            <a:schemeClr val="lt1"/>
+          </a:fontRef>
+        </p:style>
+        <p:txBody>
+          <a:bodyPr rtlCol="0" anchor="ctr"/>
+          <a:lstStyle/>
+          <a:p>
+            <a:pPr algn="ctr"/>
+          </a:p>
+        </p:txBody>
+      </p:sp>
+      <p:sp>
+        <p:nvSpPr>
+          <p:cNvPr id="32" name="TextBox 31"/>
+          <p:cNvSpPr txBox="1"/>
+          <p:nvPr/>
+        </p:nvSpPr>
+        <p:spPr>
+          <a:xfrm>
+            <a:off x="6172200" y="3758183"/>
+            <a:ext cx="5532120" cy="292608"/>
+          </a:xfrm>
+          <a:prstGeom prst="rect">
+            <a:avLst/>
+          </a:prstGeom>
+          <a:noFill/>
+        </p:spPr>
+        <p:txBody>
+          <a:bodyPr wrap="square" anchor="t">
+            <a:spAutoFit/>
+          </a:bodyPr>
+          <a:lstStyle/>
+          <a:p>
+            <a:pPr algn="ctr"/>
+            <a:r>
+              <a:rPr sz="1100" b="1" i="0">
+                <a:solidFill>
+                  <a:srgbClr val="FFFFFF"/>
+                </a:solidFill>
+              </a:rPr>
+              <a:t>COMPETITOR PAIN POINTS  ·  RANKING &amp; ACTION</a:t>
+            </a:r>
+          </a:p>
+        </p:txBody>
+      </p:sp>
+      <p:sp>
+        <p:nvSpPr>
+          <p:cNvPr id="33" name="TextBox 32"/>
+          <p:cNvSpPr txBox="1"/>
+          <p:nvPr/>
+        </p:nvSpPr>
+        <p:spPr>
+          <a:xfrm>
+            <a:off x="6336792" y="4160520"/>
+            <a:ext cx="5212080" cy="320040"/>
+          </a:xfrm>
+          <a:prstGeom prst="rect">
+            <a:avLst/>
+          </a:prstGeom>
+          <a:noFill/>
+        </p:spPr>
+        <p:txBody>
+          <a:bodyPr wrap="square" anchor="t">
+            <a:spAutoFit/>
+          </a:bodyPr>
+          <a:lstStyle/>
+          <a:p>
+            <a:pPr algn="l"/>
+            <a:r>
+              <a:rPr sz="1250" b="1" i="0">
+                <a:solidFill>
+                  <a:srgbClr val="041E42"/>
+                </a:solidFill>
+              </a:rPr>
+              <a:t>Per-aspect negative rate on competitor subs, vs Walmart</a:t>
+            </a:r>
+          </a:p>
+        </p:txBody>
+      </p:sp>
+      <p:sp>
+        <p:nvSpPr>
+          <p:cNvPr id="34" name="Rectangle 33"/>
+          <p:cNvSpPr/>
+          <p:nvPr/>
+        </p:nvSpPr>
+        <p:spPr>
+          <a:xfrm>
+            <a:off x="6336792" y="4526280"/>
+            <a:ext cx="5212080" cy="566928"/>
+          </a:xfrm>
+          <a:prstGeom prst="rect">
+            <a:avLst/>
+          </a:prstGeom>
+          <a:solidFill>
+            <a:srgbClr val="EDE9FE"/>
+          </a:solidFill>
+          <a:ln>
+            <a:solidFill>
+              <a:srgbClr val="7C3AED"/>
+            </a:solidFill>
+          </a:ln>
+          <a:effectLst/>
+        </p:spPr>
+        <p:style>
+          <a:lnRef idx="1">
+            <a:schemeClr val="accent1"/>
+          </a:lnRef>
+          <a:fillRef idx="3">
+            <a:schemeClr val="accent1"/>
+          </a:fillRef>
+          <a:effectRef idx="2">
+            <a:schemeClr val="accent1"/>
+          </a:effectRef>
+          <a:fontRef idx="minor">
+            <a:schemeClr val="lt1"/>
+          </a:fontRef>
+        </p:style>
+        <p:txBody>
+          <a:bodyPr rtlCol="0" anchor="ctr"/>
+          <a:lstStyle/>
+          <a:p>
+            <a:pPr algn="ctr"/>
+          </a:p>
+        </p:txBody>
+      </p:sp>
+      <p:sp>
+        <p:nvSpPr>
+          <p:cNvPr id="35" name="TextBox 34"/>
+          <p:cNvSpPr txBox="1"/>
+          <p:nvPr/>
+        </p:nvSpPr>
+        <p:spPr>
+          <a:xfrm>
+            <a:off x="6336792" y="4526280"/>
+            <a:ext cx="5212080" cy="566928"/>
+          </a:xfrm>
+          <a:prstGeom prst="rect">
+            <a:avLst/>
+          </a:prstGeom>
+          <a:noFill/>
+        </p:spPr>
+        <p:txBody>
+          <a:bodyPr wrap="square" anchor="ctr">
+            <a:spAutoFit/>
+          </a:bodyPr>
+          <a:lstStyle/>
+          <a:p>
+            <a:pPr algn="ctr"/>
+            <a:r>
+              <a:rPr sz="1200" b="1" i="0">
+                <a:solidFill>
+                  <a:srgbClr val="041E42"/>
+                </a:solidFill>
+              </a:rPr>
+              <a:t>negative_ratio(a) = neg(a) / total(a)      ·      delta = comp – wmt</a:t>
+            </a:r>
+          </a:p>
+        </p:txBody>
+      </p:sp>
+      <p:sp>
+        <p:nvSpPr>
+          <p:cNvPr id="36" name="TextBox 35"/>
+          <p:cNvSpPr txBox="1"/>
+          <p:nvPr/>
+        </p:nvSpPr>
+        <p:spPr>
+          <a:xfrm>
+            <a:off x="6336792" y="5166360"/>
+            <a:ext cx="5212080" cy="411480"/>
+          </a:xfrm>
+          <a:prstGeom prst="rect">
+            <a:avLst/>
+          </a:prstGeom>
+          <a:noFill/>
+        </p:spPr>
+        <p:txBody>
+          <a:bodyPr wrap="square" anchor="t">
+            <a:spAutoFit/>
+          </a:bodyPr>
+          <a:lstStyle/>
+          <a:p>
+            <a:pPr algn="l"/>
+            <a:r>
+              <a:rPr sz="1050" b="0" i="1">
+                <a:solidFill>
+                  <a:srgbClr val="333333"/>
+                </a:solidFill>
+              </a:rPr>
+              <a:t>Signal floor  total ≥ 8  posts per aspect;  top-10 sorted DESC by (ratio, total).</a:t>
+            </a:r>
+          </a:p>
+        </p:txBody>
+      </p:sp>
+      <p:sp>
+        <p:nvSpPr>
+          <p:cNvPr id="37" name="TextBox 36"/>
+          <p:cNvSpPr txBox="1"/>
+          <p:nvPr/>
+        </p:nvSpPr>
+        <p:spPr>
+          <a:xfrm>
+            <a:off x="6336792" y="5577840"/>
+            <a:ext cx="5212080" cy="685800"/>
+          </a:xfrm>
+          <a:prstGeom prst="rect">
+            <a:avLst/>
+          </a:prstGeom>
+          <a:noFill/>
+        </p:spPr>
+        <p:txBody>
+          <a:bodyPr wrap="square">
+            <a:spAutoFit/>
+          </a:bodyPr>
+          <a:lstStyle/>
+          <a:p>
+            <a:pPr>
+              <a:spcAft>
+                <a:spcPts val="400"/>
+              </a:spcAft>
+            </a:pPr>
+            <a:r>
+              <a:rPr sz="1050" b="0">
+                <a:solidFill>
+                  <a:srgbClr val="333333"/>
+                </a:solidFill>
+              </a:rPr>
+              <a:t>•  ratio  ≥  60 %   →   High priority   ·   ≥ 40 %  →  Medium</a:t>
+            </a:r>
+          </a:p>
+          <a:p>
+            <a:pPr>
+              <a:spcAft>
+                <a:spcPts val="400"/>
+              </a:spcAft>
+            </a:pPr>
+            <a:r>
+              <a:rPr sz="1050" b="0">
+                <a:solidFill>
+                  <a:srgbClr val="333333"/>
+                </a:solidFill>
+              </a:rPr>
+              <a:t>•  delta  &gt;  +5 %   →   'Marketing angle'  (Walmart is better)</a:t>
+            </a:r>
+          </a:p>
+          <a:p>
+            <a:pPr>
+              <a:spcAft>
+                <a:spcPts val="400"/>
+              </a:spcAft>
+            </a:pPr>
+            <a:r>
+              <a:rPr sz="1050" b="0">
+                <a:solidFill>
+                  <a:srgbClr val="333333"/>
+                </a:solidFill>
+              </a:rPr>
+              <a:t>•  delta  &lt;  –5 %   →   'Investigate'     (Walmart is worse)</a:t>
+            </a:r>
+          </a:p>
+        </p:txBody>
+      </p:sp>
+      <p:sp>
+        <p:nvSpPr>
+          <p:cNvPr id="38" name="TextBox 37"/>
+          <p:cNvSpPr txBox="1"/>
+          <p:nvPr/>
+        </p:nvSpPr>
+        <p:spPr>
+          <a:xfrm>
+            <a:off x="365760" y="6537960"/>
+            <a:ext cx="8229600" cy="274320"/>
+          </a:xfrm>
+          <a:prstGeom prst="rect">
+            <a:avLst/>
+          </a:prstGeom>
+          <a:noFill/>
+        </p:spPr>
+        <p:txBody>
+          <a:bodyPr wrap="square" anchor="t">
+            <a:spAutoFit/>
+          </a:bodyPr>
+          <a:lstStyle/>
+          <a:p>
+            <a:pPr algn="l"/>
+            <a:r>
+              <a:rPr sz="900" b="0" i="0">
+                <a:solidFill>
+                  <a:srgbClr val="666666"/>
+                </a:solidFill>
+              </a:rPr>
+              <a:t>Retail Sentiment Intelligence  ·  BITS ZG628T Dissertation  ·  Vishal Singh  ·  Post Mid-Semester Presentation</a:t>
+            </a:r>
+          </a:p>
+        </p:txBody>
+      </p:sp>
+      <p:sp>
+        <p:nvSpPr>
+          <p:cNvPr id="39" name="TextBox 38"/>
+          <p:cNvSpPr txBox="1"/>
+          <p:nvPr/>
+        </p:nvSpPr>
+        <p:spPr>
+          <a:xfrm>
+            <a:off x="10972800" y="6537960"/>
+            <a:ext cx="1097280" cy="274320"/>
+          </a:xfrm>
+          <a:prstGeom prst="rect">
+            <a:avLst/>
+          </a:prstGeom>
+          <a:noFill/>
+        </p:spPr>
+        <p:txBody>
+          <a:bodyPr wrap="square" anchor="t">
+            <a:spAutoFit/>
+          </a:bodyPr>
+          <a:lstStyle/>
+          <a:p>
+            <a:pPr algn="r"/>
+            <a:r>
+              <a:rPr sz="900" b="0" i="0">
+                <a:solidFill>
+                  <a:srgbClr val="666666"/>
+                </a:solidFill>
+              </a:rPr>
+              <a:t>13 / 24</a:t>
+            </a:r>
+          </a:p>
+        </p:txBody>
+      </p:sp>
+    </p:spTree>
+  </p:cSld>
+  <p:clrMapOvr>
+    <a:masterClrMapping/>
+  </p:clrMapOvr>
+</p:sld>
+</file>
+
+<file path=ppt/slides/slide14.xml><?xml version="1.0" encoding="utf-8"?>
 <p:sld xmlns:a="http://schemas.openxmlformats.org/drawingml/2006/main" xmlns:p="http://schemas.openxmlformats.org/presentationml/2006/main" xmlns:r="http://schemas.openxmlformats.org/officeDocument/2006/relationships">
   <p:cSld>
     <p:spTree>
@@ -7876,7 +9490,7 @@
                   <a:srgbClr val="666666"/>
                 </a:solidFill>
               </a:rPr>
-              <a:t>13 / 23</a:t>
+              <a:t>14 / 24</a:t>
             </a:r>
           </a:p>
         </p:txBody>
@@ -7889,7 +9503,7 @@
 </p:sld>
 </file>
 
-<file path=ppt/slides/slide14.xml><?xml version="1.0" encoding="utf-8"?>
+<file path=ppt/slides/slide15.xml><?xml version="1.0" encoding="utf-8"?>
 <p:sld xmlns:a="http://schemas.openxmlformats.org/drawingml/2006/main" xmlns:p="http://schemas.openxmlformats.org/presentationml/2006/main" xmlns:r="http://schemas.openxmlformats.org/officeDocument/2006/relationships">
   <p:cSld>
     <p:spTree>
@@ -9681,7 +11295,7 @@
                   <a:srgbClr val="666666"/>
                 </a:solidFill>
               </a:rPr>
-              <a:t>14 / 23</a:t>
+              <a:t>15 / 24</a:t>
             </a:r>
           </a:p>
         </p:txBody>
@@ -9694,7 +11308,7 @@
 </p:sld>
 </file>
 
-<file path=ppt/slides/slide15.xml><?xml version="1.0" encoding="utf-8"?>
+<file path=ppt/slides/slide16.xml><?xml version="1.0" encoding="utf-8"?>
 <p:sld xmlns:a="http://schemas.openxmlformats.org/drawingml/2006/main" xmlns:p="http://schemas.openxmlformats.org/presentationml/2006/main" xmlns:r="http://schemas.openxmlformats.org/officeDocument/2006/relationships">
   <p:cSld>
     <p:spTree>
@@ -10656,7 +12270,7 @@
                   <a:srgbClr val="666666"/>
                 </a:solidFill>
               </a:rPr>
-              <a:t>15 / 23</a:t>
+              <a:t>16 / 24</a:t>
             </a:r>
           </a:p>
         </p:txBody>
@@ -10669,7 +12283,7 @@
 </p:sld>
 </file>
 
-<file path=ppt/slides/slide16.xml><?xml version="1.0" encoding="utf-8"?>
+<file path=ppt/slides/slide17.xml><?xml version="1.0" encoding="utf-8"?>
 <p:sld xmlns:a="http://schemas.openxmlformats.org/drawingml/2006/main" xmlns:p="http://schemas.openxmlformats.org/presentationml/2006/main" xmlns:r="http://schemas.openxmlformats.org/officeDocument/2006/relationships">
   <p:cSld>
     <p:spTree>
@@ -11958,1209 +13572,7 @@
                   <a:srgbClr val="666666"/>
                 </a:solidFill>
               </a:rPr>
-              <a:t>16 / 23</a:t>
-            </a:r>
-          </a:p>
-        </p:txBody>
-      </p:sp>
-    </p:spTree>
-  </p:cSld>
-  <p:clrMapOvr>
-    <a:masterClrMapping/>
-  </p:clrMapOvr>
-</p:sld>
-</file>
-
-<file path=ppt/slides/slide17.xml><?xml version="1.0" encoding="utf-8"?>
-<p:sld xmlns:a="http://schemas.openxmlformats.org/drawingml/2006/main" xmlns:p="http://schemas.openxmlformats.org/presentationml/2006/main" xmlns:r="http://schemas.openxmlformats.org/officeDocument/2006/relationships">
-  <p:cSld>
-    <p:spTree>
-      <p:nvGrpSpPr>
-        <p:cNvPr id="1" name=""/>
-        <p:cNvGrpSpPr/>
-        <p:nvPr/>
-      </p:nvGrpSpPr>
-      <p:grpSpPr/>
-      <p:sp>
-        <p:nvSpPr>
-          <p:cNvPr id="2" name="Rectangle 1"/>
-          <p:cNvSpPr/>
-          <p:nvPr/>
-        </p:nvSpPr>
-        <p:spPr>
-          <a:xfrm>
-            <a:off x="0" y="0"/>
-            <a:ext cx="12191695" cy="777240"/>
-          </a:xfrm>
-          <a:prstGeom prst="rect">
-            <a:avLst/>
-          </a:prstGeom>
-          <a:solidFill>
-            <a:srgbClr val="041E42"/>
-          </a:solidFill>
-          <a:ln>
-            <a:noFill/>
-          </a:ln>
-          <a:effectLst/>
-        </p:spPr>
-        <p:style>
-          <a:lnRef idx="1">
-            <a:schemeClr val="accent1"/>
-          </a:lnRef>
-          <a:fillRef idx="3">
-            <a:schemeClr val="accent1"/>
-          </a:fillRef>
-          <a:effectRef idx="2">
-            <a:schemeClr val="accent1"/>
-          </a:effectRef>
-          <a:fontRef idx="minor">
-            <a:schemeClr val="lt1"/>
-          </a:fontRef>
-        </p:style>
-        <p:txBody>
-          <a:bodyPr rtlCol="0" anchor="ctr"/>
-          <a:lstStyle/>
-          <a:p>
-            <a:pPr algn="ctr"/>
-          </a:p>
-        </p:txBody>
-      </p:sp>
-      <p:sp>
-        <p:nvSpPr>
-          <p:cNvPr id="3" name="TextBox 2"/>
-          <p:cNvSpPr txBox="1"/>
-          <p:nvPr/>
-        </p:nvSpPr>
-        <p:spPr>
-          <a:xfrm>
-            <a:off x="365760" y="109728"/>
-            <a:ext cx="11430000" cy="457200"/>
-          </a:xfrm>
-          <a:prstGeom prst="rect">
-            <a:avLst/>
-          </a:prstGeom>
-          <a:noFill/>
-        </p:spPr>
-        <p:txBody>
-          <a:bodyPr wrap="square" anchor="t">
-            <a:spAutoFit/>
-          </a:bodyPr>
-          <a:lstStyle/>
-          <a:p>
-            <a:pPr algn="l"/>
-            <a:r>
-              <a:rPr sz="2600" b="1" i="0">
-                <a:solidFill>
-                  <a:srgbClr val="FFFFFF"/>
-                </a:solidFill>
-              </a:rPr>
-              <a:t>Principal Contributions</a:t>
-            </a:r>
-          </a:p>
-        </p:txBody>
-      </p:sp>
-      <p:sp>
-        <p:nvSpPr>
-          <p:cNvPr id="4" name="TextBox 3"/>
-          <p:cNvSpPr txBox="1"/>
-          <p:nvPr/>
-        </p:nvSpPr>
-        <p:spPr>
-          <a:xfrm>
-            <a:off x="365760" y="457200"/>
-            <a:ext cx="11430000" cy="320040"/>
-          </a:xfrm>
-          <a:prstGeom prst="rect">
-            <a:avLst/>
-          </a:prstGeom>
-          <a:noFill/>
-        </p:spPr>
-        <p:txBody>
-          <a:bodyPr wrap="square" anchor="t">
-            <a:spAutoFit/>
-          </a:bodyPr>
-          <a:lstStyle/>
-          <a:p>
-            <a:pPr algn="l"/>
-            <a:r>
-              <a:rPr sz="1200" b="0" i="0">
-                <a:solidFill>
-                  <a:srgbClr val="E8F4FD"/>
-                </a:solidFill>
-              </a:rPr>
-              <a:t>What this dissertation delivered — end to end</a:t>
-            </a:r>
-          </a:p>
-        </p:txBody>
-      </p:sp>
-      <p:sp>
-        <p:nvSpPr>
-          <p:cNvPr id="5" name="Rectangle 4"/>
-          <p:cNvSpPr/>
-          <p:nvPr/>
-        </p:nvSpPr>
-        <p:spPr>
-          <a:xfrm>
-            <a:off x="0" y="777240"/>
-            <a:ext cx="12191695" cy="45720"/>
-          </a:xfrm>
-          <a:prstGeom prst="rect">
-            <a:avLst/>
-          </a:prstGeom>
-          <a:solidFill>
-            <a:srgbClr val="FFC220"/>
-          </a:solidFill>
-          <a:ln>
-            <a:noFill/>
-          </a:ln>
-          <a:effectLst/>
-        </p:spPr>
-        <p:style>
-          <a:lnRef idx="1">
-            <a:schemeClr val="accent1"/>
-          </a:lnRef>
-          <a:fillRef idx="3">
-            <a:schemeClr val="accent1"/>
-          </a:fillRef>
-          <a:effectRef idx="2">
-            <a:schemeClr val="accent1"/>
-          </a:effectRef>
-          <a:fontRef idx="minor">
-            <a:schemeClr val="lt1"/>
-          </a:fontRef>
-        </p:style>
-        <p:txBody>
-          <a:bodyPr rtlCol="0" anchor="ctr"/>
-          <a:lstStyle/>
-          <a:p>
-            <a:pPr algn="ctr"/>
-          </a:p>
-        </p:txBody>
-      </p:sp>
-      <p:sp>
-        <p:nvSpPr>
-          <p:cNvPr id="6" name="Rectangle 5"/>
-          <p:cNvSpPr/>
-          <p:nvPr/>
-        </p:nvSpPr>
-        <p:spPr>
-          <a:xfrm>
-            <a:off x="457200" y="960120"/>
-            <a:ext cx="11247120" cy="960120"/>
-          </a:xfrm>
-          <a:prstGeom prst="rect">
-            <a:avLst/>
-          </a:prstGeom>
-          <a:solidFill>
-            <a:srgbClr val="F5F5F5"/>
-          </a:solidFill>
-          <a:ln>
-            <a:solidFill>
-              <a:srgbClr val="0071DC"/>
-            </a:solidFill>
-          </a:ln>
-          <a:effectLst/>
-        </p:spPr>
-        <p:style>
-          <a:lnRef idx="1">
-            <a:schemeClr val="accent1"/>
-          </a:lnRef>
-          <a:fillRef idx="3">
-            <a:schemeClr val="accent1"/>
-          </a:fillRef>
-          <a:effectRef idx="2">
-            <a:schemeClr val="accent1"/>
-          </a:effectRef>
-          <a:fontRef idx="minor">
-            <a:schemeClr val="lt1"/>
-          </a:fontRef>
-        </p:style>
-        <p:txBody>
-          <a:bodyPr rtlCol="0" anchor="ctr"/>
-          <a:lstStyle/>
-          <a:p>
-            <a:pPr algn="ctr"/>
-          </a:p>
-        </p:txBody>
-      </p:sp>
-      <p:sp>
-        <p:nvSpPr>
-          <p:cNvPr id="7" name="Rectangle 6"/>
-          <p:cNvSpPr/>
-          <p:nvPr/>
-        </p:nvSpPr>
-        <p:spPr>
-          <a:xfrm>
-            <a:off x="457200" y="960120"/>
-            <a:ext cx="822960" cy="960120"/>
-          </a:xfrm>
-          <a:prstGeom prst="rect">
-            <a:avLst/>
-          </a:prstGeom>
-          <a:solidFill>
-            <a:srgbClr val="0071DC"/>
-          </a:solidFill>
-          <a:ln>
-            <a:noFill/>
-          </a:ln>
-          <a:effectLst/>
-        </p:spPr>
-        <p:style>
-          <a:lnRef idx="1">
-            <a:schemeClr val="accent1"/>
-          </a:lnRef>
-          <a:fillRef idx="3">
-            <a:schemeClr val="accent1"/>
-          </a:fillRef>
-          <a:effectRef idx="2">
-            <a:schemeClr val="accent1"/>
-          </a:effectRef>
-          <a:fontRef idx="minor">
-            <a:schemeClr val="lt1"/>
-          </a:fontRef>
-        </p:style>
-        <p:txBody>
-          <a:bodyPr rtlCol="0" anchor="ctr"/>
-          <a:lstStyle/>
-          <a:p>
-            <a:pPr algn="ctr"/>
-          </a:p>
-        </p:txBody>
-      </p:sp>
-      <p:sp>
-        <p:nvSpPr>
-          <p:cNvPr id="8" name="TextBox 7"/>
-          <p:cNvSpPr txBox="1"/>
-          <p:nvPr/>
-        </p:nvSpPr>
-        <p:spPr>
-          <a:xfrm>
-            <a:off x="457200" y="960120"/>
-            <a:ext cx="822960" cy="960120"/>
-          </a:xfrm>
-          <a:prstGeom prst="rect">
-            <a:avLst/>
-          </a:prstGeom>
-          <a:noFill/>
-        </p:spPr>
-        <p:txBody>
-          <a:bodyPr wrap="square" anchor="ctr">
-            <a:spAutoFit/>
-          </a:bodyPr>
-          <a:lstStyle/>
-          <a:p>
-            <a:pPr algn="ctr"/>
-            <a:r>
-              <a:rPr sz="2000" b="1" i="0">
-                <a:solidFill>
-                  <a:srgbClr val="FFFFFF"/>
-                </a:solidFill>
-              </a:rPr>
-              <a:t>C1</a:t>
-            </a:r>
-          </a:p>
-        </p:txBody>
-      </p:sp>
-      <p:sp>
-        <p:nvSpPr>
-          <p:cNvPr id="9" name="TextBox 8"/>
-          <p:cNvSpPr txBox="1"/>
-          <p:nvPr/>
-        </p:nvSpPr>
-        <p:spPr>
-          <a:xfrm>
-            <a:off x="1417320" y="1005840"/>
-            <a:ext cx="10058400" cy="320040"/>
-          </a:xfrm>
-          <a:prstGeom prst="rect">
-            <a:avLst/>
-          </a:prstGeom>
-          <a:noFill/>
-        </p:spPr>
-        <p:txBody>
-          <a:bodyPr wrap="square" anchor="t">
-            <a:spAutoFit/>
-          </a:bodyPr>
-          <a:lstStyle/>
-          <a:p>
-            <a:pPr algn="l"/>
-            <a:r>
-              <a:rPr sz="1300" b="1" i="0">
-                <a:solidFill>
-                  <a:srgbClr val="041E42"/>
-                </a:solidFill>
-              </a:rPr>
-              <a:t>Offline-first RSI pipeline</a:t>
-            </a:r>
-          </a:p>
-        </p:txBody>
-      </p:sp>
-      <p:sp>
-        <p:nvSpPr>
-          <p:cNvPr id="10" name="TextBox 9"/>
-          <p:cNvSpPr txBox="1"/>
-          <p:nvPr/>
-        </p:nvSpPr>
-        <p:spPr>
-          <a:xfrm>
-            <a:off x="1417320" y="1325880"/>
-            <a:ext cx="10058400" cy="594360"/>
-          </a:xfrm>
-          <a:prstGeom prst="rect">
-            <a:avLst/>
-          </a:prstGeom>
-          <a:noFill/>
-        </p:spPr>
-        <p:txBody>
-          <a:bodyPr wrap="square" anchor="t">
-            <a:spAutoFit/>
-          </a:bodyPr>
-          <a:lstStyle/>
-          <a:p>
-            <a:pPr algn="l"/>
-            <a:r>
-              <a:rPr sz="1100" b="0" i="0">
-                <a:solidFill>
-                  <a:srgbClr val="333333"/>
-                </a:solidFill>
-              </a:rPr>
-              <a:t>Ingestion → trust → sentiment → aspects → vision → aggregation → alerts → dashboard.  Zero API cost, modular, deployable to Azure.</a:t>
-            </a:r>
-          </a:p>
-        </p:txBody>
-      </p:sp>
-      <p:sp>
-        <p:nvSpPr>
-          <p:cNvPr id="11" name="Rectangle 10"/>
-          <p:cNvSpPr/>
-          <p:nvPr/>
-        </p:nvSpPr>
-        <p:spPr>
-          <a:xfrm>
-            <a:off x="457200" y="2002535"/>
-            <a:ext cx="11247120" cy="960120"/>
-          </a:xfrm>
-          <a:prstGeom prst="rect">
-            <a:avLst/>
-          </a:prstGeom>
-          <a:solidFill>
-            <a:srgbClr val="F5F5F5"/>
-          </a:solidFill>
-          <a:ln>
-            <a:solidFill>
-              <a:srgbClr val="0071DC"/>
-            </a:solidFill>
-          </a:ln>
-          <a:effectLst/>
-        </p:spPr>
-        <p:style>
-          <a:lnRef idx="1">
-            <a:schemeClr val="accent1"/>
-          </a:lnRef>
-          <a:fillRef idx="3">
-            <a:schemeClr val="accent1"/>
-          </a:fillRef>
-          <a:effectRef idx="2">
-            <a:schemeClr val="accent1"/>
-          </a:effectRef>
-          <a:fontRef idx="minor">
-            <a:schemeClr val="lt1"/>
-          </a:fontRef>
-        </p:style>
-        <p:txBody>
-          <a:bodyPr rtlCol="0" anchor="ctr"/>
-          <a:lstStyle/>
-          <a:p>
-            <a:pPr algn="ctr"/>
-          </a:p>
-        </p:txBody>
-      </p:sp>
-      <p:sp>
-        <p:nvSpPr>
-          <p:cNvPr id="12" name="Rectangle 11"/>
-          <p:cNvSpPr/>
-          <p:nvPr/>
-        </p:nvSpPr>
-        <p:spPr>
-          <a:xfrm>
-            <a:off x="457200" y="2002535"/>
-            <a:ext cx="822960" cy="960120"/>
-          </a:xfrm>
-          <a:prstGeom prst="rect">
-            <a:avLst/>
-          </a:prstGeom>
-          <a:solidFill>
-            <a:srgbClr val="0071DC"/>
-          </a:solidFill>
-          <a:ln>
-            <a:noFill/>
-          </a:ln>
-          <a:effectLst/>
-        </p:spPr>
-        <p:style>
-          <a:lnRef idx="1">
-            <a:schemeClr val="accent1"/>
-          </a:lnRef>
-          <a:fillRef idx="3">
-            <a:schemeClr val="accent1"/>
-          </a:fillRef>
-          <a:effectRef idx="2">
-            <a:schemeClr val="accent1"/>
-          </a:effectRef>
-          <a:fontRef idx="minor">
-            <a:schemeClr val="lt1"/>
-          </a:fontRef>
-        </p:style>
-        <p:txBody>
-          <a:bodyPr rtlCol="0" anchor="ctr"/>
-          <a:lstStyle/>
-          <a:p>
-            <a:pPr algn="ctr"/>
-          </a:p>
-        </p:txBody>
-      </p:sp>
-      <p:sp>
-        <p:nvSpPr>
-          <p:cNvPr id="13" name="TextBox 12"/>
-          <p:cNvSpPr txBox="1"/>
-          <p:nvPr/>
-        </p:nvSpPr>
-        <p:spPr>
-          <a:xfrm>
-            <a:off x="457200" y="2002535"/>
-            <a:ext cx="822960" cy="960120"/>
-          </a:xfrm>
-          <a:prstGeom prst="rect">
-            <a:avLst/>
-          </a:prstGeom>
-          <a:noFill/>
-        </p:spPr>
-        <p:txBody>
-          <a:bodyPr wrap="square" anchor="ctr">
-            <a:spAutoFit/>
-          </a:bodyPr>
-          <a:lstStyle/>
-          <a:p>
-            <a:pPr algn="ctr"/>
-            <a:r>
-              <a:rPr sz="2000" b="1" i="0">
-                <a:solidFill>
-                  <a:srgbClr val="FFFFFF"/>
-                </a:solidFill>
-              </a:rPr>
-              <a:t>C2</a:t>
-            </a:r>
-          </a:p>
-        </p:txBody>
-      </p:sp>
-      <p:sp>
-        <p:nvSpPr>
-          <p:cNvPr id="14" name="TextBox 13"/>
-          <p:cNvSpPr txBox="1"/>
-          <p:nvPr/>
-        </p:nvSpPr>
-        <p:spPr>
-          <a:xfrm>
-            <a:off x="1417320" y="2048255"/>
-            <a:ext cx="10058400" cy="320040"/>
-          </a:xfrm>
-          <a:prstGeom prst="rect">
-            <a:avLst/>
-          </a:prstGeom>
-          <a:noFill/>
-        </p:spPr>
-        <p:txBody>
-          <a:bodyPr wrap="square" anchor="t">
-            <a:spAutoFit/>
-          </a:bodyPr>
-          <a:lstStyle/>
-          <a:p>
-            <a:pPr algn="l"/>
-            <a:r>
-              <a:rPr sz="1300" b="1" i="0">
-                <a:solidFill>
-                  <a:srgbClr val="041E42"/>
-                </a:solidFill>
-              </a:rPr>
-              <a:t>Fine-tuned ModernBERT (3-stage curriculum)</a:t>
-            </a:r>
-          </a:p>
-        </p:txBody>
-      </p:sp>
-      <p:sp>
-        <p:nvSpPr>
-          <p:cNvPr id="15" name="TextBox 14"/>
-          <p:cNvSpPr txBox="1"/>
-          <p:nvPr/>
-        </p:nvSpPr>
-        <p:spPr>
-          <a:xfrm>
-            <a:off x="1417320" y="2368295"/>
-            <a:ext cx="10058400" cy="594360"/>
-          </a:xfrm>
-          <a:prstGeom prst="rect">
-            <a:avLst/>
-          </a:prstGeom>
-          <a:noFill/>
-        </p:spPr>
-        <p:txBody>
-          <a:bodyPr wrap="square" anchor="t">
-            <a:spAutoFit/>
-          </a:bodyPr>
-          <a:lstStyle/>
-          <a:p>
-            <a:pPr algn="l"/>
-            <a:r>
-              <a:rPr sz="1100" b="0" i="0">
-                <a:solidFill>
-                  <a:srgbClr val="333333"/>
-                </a:solidFill>
-              </a:rPr>
-              <a:t>Macro-F1 0.6272 → 0.7642 overall; recovers all long posts (≥ 512 tok, n = 7): RoBERTa 5/7 vs ModernBERT 7/7 correct.  5-fold OOF cross-validation, offline training.</a:t>
-            </a:r>
-          </a:p>
-        </p:txBody>
-      </p:sp>
-      <p:sp>
-        <p:nvSpPr>
-          <p:cNvPr id="16" name="Rectangle 15"/>
-          <p:cNvSpPr/>
-          <p:nvPr/>
-        </p:nvSpPr>
-        <p:spPr>
-          <a:xfrm>
-            <a:off x="457200" y="3044950"/>
-            <a:ext cx="11247120" cy="960120"/>
-          </a:xfrm>
-          <a:prstGeom prst="rect">
-            <a:avLst/>
-          </a:prstGeom>
-          <a:solidFill>
-            <a:srgbClr val="F5F5F5"/>
-          </a:solidFill>
-          <a:ln>
-            <a:solidFill>
-              <a:srgbClr val="0071DC"/>
-            </a:solidFill>
-          </a:ln>
-          <a:effectLst/>
-        </p:spPr>
-        <p:style>
-          <a:lnRef idx="1">
-            <a:schemeClr val="accent1"/>
-          </a:lnRef>
-          <a:fillRef idx="3">
-            <a:schemeClr val="accent1"/>
-          </a:fillRef>
-          <a:effectRef idx="2">
-            <a:schemeClr val="accent1"/>
-          </a:effectRef>
-          <a:fontRef idx="minor">
-            <a:schemeClr val="lt1"/>
-          </a:fontRef>
-        </p:style>
-        <p:txBody>
-          <a:bodyPr rtlCol="0" anchor="ctr"/>
-          <a:lstStyle/>
-          <a:p>
-            <a:pPr algn="ctr"/>
-          </a:p>
-        </p:txBody>
-      </p:sp>
-      <p:sp>
-        <p:nvSpPr>
-          <p:cNvPr id="17" name="Rectangle 16"/>
-          <p:cNvSpPr/>
-          <p:nvPr/>
-        </p:nvSpPr>
-        <p:spPr>
-          <a:xfrm>
-            <a:off x="457200" y="3044950"/>
-            <a:ext cx="822960" cy="960120"/>
-          </a:xfrm>
-          <a:prstGeom prst="rect">
-            <a:avLst/>
-          </a:prstGeom>
-          <a:solidFill>
-            <a:srgbClr val="0071DC"/>
-          </a:solidFill>
-          <a:ln>
-            <a:noFill/>
-          </a:ln>
-          <a:effectLst/>
-        </p:spPr>
-        <p:style>
-          <a:lnRef idx="1">
-            <a:schemeClr val="accent1"/>
-          </a:lnRef>
-          <a:fillRef idx="3">
-            <a:schemeClr val="accent1"/>
-          </a:fillRef>
-          <a:effectRef idx="2">
-            <a:schemeClr val="accent1"/>
-          </a:effectRef>
-          <a:fontRef idx="minor">
-            <a:schemeClr val="lt1"/>
-          </a:fontRef>
-        </p:style>
-        <p:txBody>
-          <a:bodyPr rtlCol="0" anchor="ctr"/>
-          <a:lstStyle/>
-          <a:p>
-            <a:pPr algn="ctr"/>
-          </a:p>
-        </p:txBody>
-      </p:sp>
-      <p:sp>
-        <p:nvSpPr>
-          <p:cNvPr id="18" name="TextBox 17"/>
-          <p:cNvSpPr txBox="1"/>
-          <p:nvPr/>
-        </p:nvSpPr>
-        <p:spPr>
-          <a:xfrm>
-            <a:off x="457200" y="3044950"/>
-            <a:ext cx="822960" cy="960120"/>
-          </a:xfrm>
-          <a:prstGeom prst="rect">
-            <a:avLst/>
-          </a:prstGeom>
-          <a:noFill/>
-        </p:spPr>
-        <p:txBody>
-          <a:bodyPr wrap="square" anchor="ctr">
-            <a:spAutoFit/>
-          </a:bodyPr>
-          <a:lstStyle/>
-          <a:p>
-            <a:pPr algn="ctr"/>
-            <a:r>
-              <a:rPr sz="2000" b="1" i="0">
-                <a:solidFill>
-                  <a:srgbClr val="FFFFFF"/>
-                </a:solidFill>
-              </a:rPr>
-              <a:t>C3</a:t>
-            </a:r>
-          </a:p>
-        </p:txBody>
-      </p:sp>
-      <p:sp>
-        <p:nvSpPr>
-          <p:cNvPr id="19" name="TextBox 18"/>
-          <p:cNvSpPr txBox="1"/>
-          <p:nvPr/>
-        </p:nvSpPr>
-        <p:spPr>
-          <a:xfrm>
-            <a:off x="1417320" y="3090670"/>
-            <a:ext cx="10058400" cy="320040"/>
-          </a:xfrm>
-          <a:prstGeom prst="rect">
-            <a:avLst/>
-          </a:prstGeom>
-          <a:noFill/>
-        </p:spPr>
-        <p:txBody>
-          <a:bodyPr wrap="square" anchor="t">
-            <a:spAutoFit/>
-          </a:bodyPr>
-          <a:lstStyle/>
-          <a:p>
-            <a:pPr algn="l"/>
-            <a:r>
-              <a:rPr sz="1300" b="1" i="0">
-                <a:solidFill>
-                  <a:srgbClr val="041E42"/>
-                </a:solidFill>
-              </a:rPr>
-              <a:t>Multi-pass vision technique on Gemma 3 4B</a:t>
-            </a:r>
-          </a:p>
-        </p:txBody>
-      </p:sp>
-      <p:sp>
-        <p:nvSpPr>
-          <p:cNvPr id="20" name="TextBox 19"/>
-          <p:cNvSpPr txBox="1"/>
-          <p:nvPr/>
-        </p:nvSpPr>
-        <p:spPr>
-          <a:xfrm>
-            <a:off x="1417320" y="3410710"/>
-            <a:ext cx="10058400" cy="594360"/>
-          </a:xfrm>
-          <a:prstGeom prst="rect">
-            <a:avLst/>
-          </a:prstGeom>
-          <a:noFill/>
-        </p:spPr>
-        <p:txBody>
-          <a:bodyPr wrap="square" anchor="t">
-            <a:spAutoFit/>
-          </a:bodyPr>
-          <a:lstStyle/>
-          <a:p>
-            <a:pPr algn="l"/>
-            <a:r>
-              <a:rPr sz="1100" b="0" i="0">
-                <a:solidFill>
-                  <a:srgbClr val="333333"/>
-                </a:solidFill>
-              </a:rPr>
-              <a:t>Hallucination 50 % → 0 %,  extraction 25 % → 75 %.  Adapts techniques from 5 recent VLM papers without vendor-blocked models.</a:t>
-            </a:r>
-          </a:p>
-        </p:txBody>
-      </p:sp>
-      <p:sp>
-        <p:nvSpPr>
-          <p:cNvPr id="21" name="Rectangle 20"/>
-          <p:cNvSpPr/>
-          <p:nvPr/>
-        </p:nvSpPr>
-        <p:spPr>
-          <a:xfrm>
-            <a:off x="457200" y="4087365"/>
-            <a:ext cx="11247120" cy="960120"/>
-          </a:xfrm>
-          <a:prstGeom prst="rect">
-            <a:avLst/>
-          </a:prstGeom>
-          <a:solidFill>
-            <a:srgbClr val="F5F5F5"/>
-          </a:solidFill>
-          <a:ln>
-            <a:solidFill>
-              <a:srgbClr val="0071DC"/>
-            </a:solidFill>
-          </a:ln>
-          <a:effectLst/>
-        </p:spPr>
-        <p:style>
-          <a:lnRef idx="1">
-            <a:schemeClr val="accent1"/>
-          </a:lnRef>
-          <a:fillRef idx="3">
-            <a:schemeClr val="accent1"/>
-          </a:fillRef>
-          <a:effectRef idx="2">
-            <a:schemeClr val="accent1"/>
-          </a:effectRef>
-          <a:fontRef idx="minor">
-            <a:schemeClr val="lt1"/>
-          </a:fontRef>
-        </p:style>
-        <p:txBody>
-          <a:bodyPr rtlCol="0" anchor="ctr"/>
-          <a:lstStyle/>
-          <a:p>
-            <a:pPr algn="ctr"/>
-          </a:p>
-        </p:txBody>
-      </p:sp>
-      <p:sp>
-        <p:nvSpPr>
-          <p:cNvPr id="22" name="Rectangle 21"/>
-          <p:cNvSpPr/>
-          <p:nvPr/>
-        </p:nvSpPr>
-        <p:spPr>
-          <a:xfrm>
-            <a:off x="457200" y="4087365"/>
-            <a:ext cx="822960" cy="960120"/>
-          </a:xfrm>
-          <a:prstGeom prst="rect">
-            <a:avLst/>
-          </a:prstGeom>
-          <a:solidFill>
-            <a:srgbClr val="0071DC"/>
-          </a:solidFill>
-          <a:ln>
-            <a:noFill/>
-          </a:ln>
-          <a:effectLst/>
-        </p:spPr>
-        <p:style>
-          <a:lnRef idx="1">
-            <a:schemeClr val="accent1"/>
-          </a:lnRef>
-          <a:fillRef idx="3">
-            <a:schemeClr val="accent1"/>
-          </a:fillRef>
-          <a:effectRef idx="2">
-            <a:schemeClr val="accent1"/>
-          </a:effectRef>
-          <a:fontRef idx="minor">
-            <a:schemeClr val="lt1"/>
-          </a:fontRef>
-        </p:style>
-        <p:txBody>
-          <a:bodyPr rtlCol="0" anchor="ctr"/>
-          <a:lstStyle/>
-          <a:p>
-            <a:pPr algn="ctr"/>
-          </a:p>
-        </p:txBody>
-      </p:sp>
-      <p:sp>
-        <p:nvSpPr>
-          <p:cNvPr id="23" name="TextBox 22"/>
-          <p:cNvSpPr txBox="1"/>
-          <p:nvPr/>
-        </p:nvSpPr>
-        <p:spPr>
-          <a:xfrm>
-            <a:off x="457200" y="4087365"/>
-            <a:ext cx="822960" cy="960120"/>
-          </a:xfrm>
-          <a:prstGeom prst="rect">
-            <a:avLst/>
-          </a:prstGeom>
-          <a:noFill/>
-        </p:spPr>
-        <p:txBody>
-          <a:bodyPr wrap="square" anchor="ctr">
-            <a:spAutoFit/>
-          </a:bodyPr>
-          <a:lstStyle/>
-          <a:p>
-            <a:pPr algn="ctr"/>
-            <a:r>
-              <a:rPr sz="2000" b="1" i="0">
-                <a:solidFill>
-                  <a:srgbClr val="FFFFFF"/>
-                </a:solidFill>
-              </a:rPr>
-              <a:t>C4</a:t>
-            </a:r>
-          </a:p>
-        </p:txBody>
-      </p:sp>
-      <p:sp>
-        <p:nvSpPr>
-          <p:cNvPr id="24" name="TextBox 23"/>
-          <p:cNvSpPr txBox="1"/>
-          <p:nvPr/>
-        </p:nvSpPr>
-        <p:spPr>
-          <a:xfrm>
-            <a:off x="1417320" y="4133085"/>
-            <a:ext cx="10058400" cy="320040"/>
-          </a:xfrm>
-          <a:prstGeom prst="rect">
-            <a:avLst/>
-          </a:prstGeom>
-          <a:noFill/>
-        </p:spPr>
-        <p:txBody>
-          <a:bodyPr wrap="square" anchor="t">
-            <a:spAutoFit/>
-          </a:bodyPr>
-          <a:lstStyle/>
-          <a:p>
-            <a:pPr algn="l"/>
-            <a:r>
-              <a:rPr sz="1300" b="1" i="0">
-                <a:solidFill>
-                  <a:srgbClr val="041E42"/>
-                </a:solidFill>
-              </a:rPr>
-              <a:t>Interpretable trust score + admission gate</a:t>
-            </a:r>
-          </a:p>
-        </p:txBody>
-      </p:sp>
-      <p:sp>
-        <p:nvSpPr>
-          <p:cNvPr id="25" name="TextBox 24"/>
-          <p:cNvSpPr txBox="1"/>
-          <p:nvPr/>
-        </p:nvSpPr>
-        <p:spPr>
-          <a:xfrm>
-            <a:off x="1417320" y="4453125"/>
-            <a:ext cx="10058400" cy="594360"/>
-          </a:xfrm>
-          <a:prstGeom prst="rect">
-            <a:avLst/>
-          </a:prstGeom>
-          <a:noFill/>
-        </p:spPr>
-        <p:txBody>
-          <a:bodyPr wrap="square" anchor="t">
-            <a:spAutoFit/>
-          </a:bodyPr>
-          <a:lstStyle/>
-          <a:p>
-            <a:pPr algn="l"/>
-            <a:r>
-              <a:rPr sz="1100" b="0" i="0">
-                <a:solidFill>
-                  <a:srgbClr val="333333"/>
-                </a:solidFill>
-              </a:rPr>
-              <a:t>trust × confidence gate flags rather than drops low-credibility posts.  Every constant traceable to English rationale in config.</a:t>
-            </a:r>
-          </a:p>
-        </p:txBody>
-      </p:sp>
-      <p:sp>
-        <p:nvSpPr>
-          <p:cNvPr id="26" name="Rectangle 25"/>
-          <p:cNvSpPr/>
-          <p:nvPr/>
-        </p:nvSpPr>
-        <p:spPr>
-          <a:xfrm>
-            <a:off x="457200" y="5129780"/>
-            <a:ext cx="11247120" cy="960120"/>
-          </a:xfrm>
-          <a:prstGeom prst="rect">
-            <a:avLst/>
-          </a:prstGeom>
-          <a:solidFill>
-            <a:srgbClr val="F5F5F5"/>
-          </a:solidFill>
-          <a:ln>
-            <a:solidFill>
-              <a:srgbClr val="0071DC"/>
-            </a:solidFill>
-          </a:ln>
-          <a:effectLst/>
-        </p:spPr>
-        <p:style>
-          <a:lnRef idx="1">
-            <a:schemeClr val="accent1"/>
-          </a:lnRef>
-          <a:fillRef idx="3">
-            <a:schemeClr val="accent1"/>
-          </a:fillRef>
-          <a:effectRef idx="2">
-            <a:schemeClr val="accent1"/>
-          </a:effectRef>
-          <a:fontRef idx="minor">
-            <a:schemeClr val="lt1"/>
-          </a:fontRef>
-        </p:style>
-        <p:txBody>
-          <a:bodyPr rtlCol="0" anchor="ctr"/>
-          <a:lstStyle/>
-          <a:p>
-            <a:pPr algn="ctr"/>
-          </a:p>
-        </p:txBody>
-      </p:sp>
-      <p:sp>
-        <p:nvSpPr>
-          <p:cNvPr id="27" name="Rectangle 26"/>
-          <p:cNvSpPr/>
-          <p:nvPr/>
-        </p:nvSpPr>
-        <p:spPr>
-          <a:xfrm>
-            <a:off x="457200" y="5129780"/>
-            <a:ext cx="822960" cy="960120"/>
-          </a:xfrm>
-          <a:prstGeom prst="rect">
-            <a:avLst/>
-          </a:prstGeom>
-          <a:solidFill>
-            <a:srgbClr val="0071DC"/>
-          </a:solidFill>
-          <a:ln>
-            <a:noFill/>
-          </a:ln>
-          <a:effectLst/>
-        </p:spPr>
-        <p:style>
-          <a:lnRef idx="1">
-            <a:schemeClr val="accent1"/>
-          </a:lnRef>
-          <a:fillRef idx="3">
-            <a:schemeClr val="accent1"/>
-          </a:fillRef>
-          <a:effectRef idx="2">
-            <a:schemeClr val="accent1"/>
-          </a:effectRef>
-          <a:fontRef idx="minor">
-            <a:schemeClr val="lt1"/>
-          </a:fontRef>
-        </p:style>
-        <p:txBody>
-          <a:bodyPr rtlCol="0" anchor="ctr"/>
-          <a:lstStyle/>
-          <a:p>
-            <a:pPr algn="ctr"/>
-          </a:p>
-        </p:txBody>
-      </p:sp>
-      <p:sp>
-        <p:nvSpPr>
-          <p:cNvPr id="28" name="TextBox 27"/>
-          <p:cNvSpPr txBox="1"/>
-          <p:nvPr/>
-        </p:nvSpPr>
-        <p:spPr>
-          <a:xfrm>
-            <a:off x="457200" y="5129780"/>
-            <a:ext cx="822960" cy="960120"/>
-          </a:xfrm>
-          <a:prstGeom prst="rect">
-            <a:avLst/>
-          </a:prstGeom>
-          <a:noFill/>
-        </p:spPr>
-        <p:txBody>
-          <a:bodyPr wrap="square" anchor="ctr">
-            <a:spAutoFit/>
-          </a:bodyPr>
-          <a:lstStyle/>
-          <a:p>
-            <a:pPr algn="ctr"/>
-            <a:r>
-              <a:rPr sz="2000" b="1" i="0">
-                <a:solidFill>
-                  <a:srgbClr val="FFFFFF"/>
-                </a:solidFill>
-              </a:rPr>
-              <a:t>C5</a:t>
-            </a:r>
-          </a:p>
-        </p:txBody>
-      </p:sp>
-      <p:sp>
-        <p:nvSpPr>
-          <p:cNvPr id="29" name="TextBox 28"/>
-          <p:cNvSpPr txBox="1"/>
-          <p:nvPr/>
-        </p:nvSpPr>
-        <p:spPr>
-          <a:xfrm>
-            <a:off x="1417320" y="5175500"/>
-            <a:ext cx="10058400" cy="320040"/>
-          </a:xfrm>
-          <a:prstGeom prst="rect">
-            <a:avLst/>
-          </a:prstGeom>
-          <a:noFill/>
-        </p:spPr>
-        <p:txBody>
-          <a:bodyPr wrap="square" anchor="t">
-            <a:spAutoFit/>
-          </a:bodyPr>
-          <a:lstStyle/>
-          <a:p>
-            <a:pPr algn="l"/>
-            <a:r>
-              <a:rPr sz="1300" b="1" i="0">
-                <a:solidFill>
-                  <a:srgbClr val="041E42"/>
-                </a:solidFill>
-              </a:rPr>
-              <a:t>HITL learning-loop dashboard</a:t>
-            </a:r>
-          </a:p>
-        </p:txBody>
-      </p:sp>
-      <p:sp>
-        <p:nvSpPr>
-          <p:cNvPr id="30" name="TextBox 29"/>
-          <p:cNvSpPr txBox="1"/>
-          <p:nvPr/>
-        </p:nvSpPr>
-        <p:spPr>
-          <a:xfrm>
-            <a:off x="1417320" y="5495540"/>
-            <a:ext cx="10058400" cy="594360"/>
-          </a:xfrm>
-          <a:prstGeom prst="rect">
-            <a:avLst/>
-          </a:prstGeom>
-          <a:noFill/>
-        </p:spPr>
-        <p:txBody>
-          <a:bodyPr wrap="square" anchor="t">
-            <a:spAutoFit/>
-          </a:bodyPr>
-          <a:lstStyle/>
-          <a:p>
-            <a:pPr algn="l"/>
-            <a:r>
-              <a:rPr sz="1100" b="0" i="0">
-                <a:solidFill>
-                  <a:srgbClr val="333333"/>
-                </a:solidFill>
-              </a:rPr>
-              <a:t>Review &amp; Validate, Lifecycle Kanban, Insights, Notification centre.  Corrections &amp; posted replies feed few-shot reply generation and future retraining.</a:t>
-            </a:r>
-          </a:p>
-        </p:txBody>
-      </p:sp>
-      <p:sp>
-        <p:nvSpPr>
-          <p:cNvPr id="31" name="TextBox 30"/>
-          <p:cNvSpPr txBox="1"/>
-          <p:nvPr/>
-        </p:nvSpPr>
-        <p:spPr>
-          <a:xfrm>
-            <a:off x="365760" y="6537960"/>
-            <a:ext cx="8229600" cy="274320"/>
-          </a:xfrm>
-          <a:prstGeom prst="rect">
-            <a:avLst/>
-          </a:prstGeom>
-          <a:noFill/>
-        </p:spPr>
-        <p:txBody>
-          <a:bodyPr wrap="square" anchor="t">
-            <a:spAutoFit/>
-          </a:bodyPr>
-          <a:lstStyle/>
-          <a:p>
-            <a:pPr algn="l"/>
-            <a:r>
-              <a:rPr sz="900" b="0" i="0">
-                <a:solidFill>
-                  <a:srgbClr val="666666"/>
-                </a:solidFill>
-              </a:rPr>
-              <a:t>Retail Sentiment Intelligence  ·  BITS ZG628T Dissertation  ·  Vishal Singh  ·  Post Mid-Semester Presentation</a:t>
-            </a:r>
-          </a:p>
-        </p:txBody>
-      </p:sp>
-      <p:sp>
-        <p:nvSpPr>
-          <p:cNvPr id="32" name="TextBox 31"/>
-          <p:cNvSpPr txBox="1"/>
-          <p:nvPr/>
-        </p:nvSpPr>
-        <p:spPr>
-          <a:xfrm>
-            <a:off x="10972800" y="6537960"/>
-            <a:ext cx="1097280" cy="274320"/>
-          </a:xfrm>
-          <a:prstGeom prst="rect">
-            <a:avLst/>
-          </a:prstGeom>
-          <a:noFill/>
-        </p:spPr>
-        <p:txBody>
-          <a:bodyPr wrap="square" anchor="t">
-            <a:spAutoFit/>
-          </a:bodyPr>
-          <a:lstStyle/>
-          <a:p>
-            <a:pPr algn="r"/>
-            <a:r>
-              <a:rPr sz="900" b="0" i="0">
-                <a:solidFill>
-                  <a:srgbClr val="666666"/>
-                </a:solidFill>
-              </a:rPr>
-              <a:t>17 / 23</a:t>
+              <a:t>17 / 24</a:t>
             </a:r>
           </a:p>
         </p:txBody>
@@ -13256,7 +13668,7 @@
                   <a:srgbClr val="FFFFFF"/>
                 </a:solidFill>
               </a:rPr>
-              <a:t>Live Demo  —  Dashboard Walkthrough</a:t>
+              <a:t>Principal Contributions</a:t>
             </a:r>
           </a:p>
         </p:txBody>
@@ -13290,7 +13702,7 @@
                   <a:srgbClr val="E8F4FD"/>
                 </a:solidFill>
               </a:rPr>
-              <a:t>One post → alert → review → reply → lifecycle → resolved</a:t>
+              <a:t>What this dissertation delivered — end to end</a:t>
             </a:r>
           </a:p>
         </p:txBody>
@@ -13339,357 +13751,969 @@
           </a:p>
         </p:txBody>
       </p:sp>
-      <p:pic>
-        <p:nvPicPr>
-          <p:cNvPr id="6" name="Picture 5" descr="brand_health.png"/>
-          <p:cNvPicPr>
-            <a:picLocks noChangeAspect="1"/>
-          </p:cNvPicPr>
-          <p:nvPr/>
-        </p:nvPicPr>
-        <p:blipFill>
-          <a:blip r:embed="rId2"/>
-          <a:stretch>
-            <a:fillRect/>
-          </a:stretch>
-        </p:blipFill>
-        <p:spPr>
-          <a:xfrm>
-            <a:off x="320040" y="960120"/>
-            <a:ext cx="3794760" cy="2331720"/>
-          </a:xfrm>
-          <a:prstGeom prst="rect">
-            <a:avLst/>
-          </a:prstGeom>
-        </p:spPr>
-      </p:pic>
-      <p:sp>
-        <p:nvSpPr>
-          <p:cNvPr id="7" name="TextBox 6"/>
-          <p:cNvSpPr txBox="1"/>
-          <p:nvPr/>
-        </p:nvSpPr>
-        <p:spPr>
-          <a:xfrm>
-            <a:off x="320040" y="3310128"/>
-            <a:ext cx="3794760" cy="228600"/>
-          </a:xfrm>
-          <a:prstGeom prst="rect">
-            <a:avLst/>
-          </a:prstGeom>
-          <a:noFill/>
-        </p:spPr>
-        <p:txBody>
-          <a:bodyPr wrap="square" anchor="t">
-            <a:spAutoFit/>
-          </a:bodyPr>
-          <a:lstStyle/>
-          <a:p>
-            <a:pPr algn="ctr"/>
-            <a:r>
-              <a:rPr sz="1100" b="1" i="0">
+      <p:sp>
+        <p:nvSpPr>
+          <p:cNvPr id="6" name="Rectangle 5"/>
+          <p:cNvSpPr/>
+          <p:nvPr/>
+        </p:nvSpPr>
+        <p:spPr>
+          <a:xfrm>
+            <a:off x="457200" y="960120"/>
+            <a:ext cx="11247120" cy="960120"/>
+          </a:xfrm>
+          <a:prstGeom prst="rect">
+            <a:avLst/>
+          </a:prstGeom>
+          <a:solidFill>
+            <a:srgbClr val="F5F5F5"/>
+          </a:solidFill>
+          <a:ln>
+            <a:solidFill>
+              <a:srgbClr val="0071DC"/>
+            </a:solidFill>
+          </a:ln>
+          <a:effectLst/>
+        </p:spPr>
+        <p:style>
+          <a:lnRef idx="1">
+            <a:schemeClr val="accent1"/>
+          </a:lnRef>
+          <a:fillRef idx="3">
+            <a:schemeClr val="accent1"/>
+          </a:fillRef>
+          <a:effectRef idx="2">
+            <a:schemeClr val="accent1"/>
+          </a:effectRef>
+          <a:fontRef idx="minor">
+            <a:schemeClr val="lt1"/>
+          </a:fontRef>
+        </p:style>
+        <p:txBody>
+          <a:bodyPr rtlCol="0" anchor="ctr"/>
+          <a:lstStyle/>
+          <a:p>
+            <a:pPr algn="ctr"/>
+          </a:p>
+        </p:txBody>
+      </p:sp>
+      <p:sp>
+        <p:nvSpPr>
+          <p:cNvPr id="7" name="Rectangle 6"/>
+          <p:cNvSpPr/>
+          <p:nvPr/>
+        </p:nvSpPr>
+        <p:spPr>
+          <a:xfrm>
+            <a:off x="457200" y="960120"/>
+            <a:ext cx="822960" cy="960120"/>
+          </a:xfrm>
+          <a:prstGeom prst="rect">
+            <a:avLst/>
+          </a:prstGeom>
+          <a:solidFill>
+            <a:srgbClr val="0071DC"/>
+          </a:solidFill>
+          <a:ln>
+            <a:noFill/>
+          </a:ln>
+          <a:effectLst/>
+        </p:spPr>
+        <p:style>
+          <a:lnRef idx="1">
+            <a:schemeClr val="accent1"/>
+          </a:lnRef>
+          <a:fillRef idx="3">
+            <a:schemeClr val="accent1"/>
+          </a:fillRef>
+          <a:effectRef idx="2">
+            <a:schemeClr val="accent1"/>
+          </a:effectRef>
+          <a:fontRef idx="minor">
+            <a:schemeClr val="lt1"/>
+          </a:fontRef>
+        </p:style>
+        <p:txBody>
+          <a:bodyPr rtlCol="0" anchor="ctr"/>
+          <a:lstStyle/>
+          <a:p>
+            <a:pPr algn="ctr"/>
+          </a:p>
+        </p:txBody>
+      </p:sp>
+      <p:sp>
+        <p:nvSpPr>
+          <p:cNvPr id="8" name="TextBox 7"/>
+          <p:cNvSpPr txBox="1"/>
+          <p:nvPr/>
+        </p:nvSpPr>
+        <p:spPr>
+          <a:xfrm>
+            <a:off x="457200" y="960120"/>
+            <a:ext cx="822960" cy="960120"/>
+          </a:xfrm>
+          <a:prstGeom prst="rect">
+            <a:avLst/>
+          </a:prstGeom>
+          <a:noFill/>
+        </p:spPr>
+        <p:txBody>
+          <a:bodyPr wrap="square" anchor="ctr">
+            <a:spAutoFit/>
+          </a:bodyPr>
+          <a:lstStyle/>
+          <a:p>
+            <a:pPr algn="ctr"/>
+            <a:r>
+              <a:rPr sz="2000" b="1" i="0">
+                <a:solidFill>
+                  <a:srgbClr val="FFFFFF"/>
+                </a:solidFill>
+              </a:rPr>
+              <a:t>C1</a:t>
+            </a:r>
+          </a:p>
+        </p:txBody>
+      </p:sp>
+      <p:sp>
+        <p:nvSpPr>
+          <p:cNvPr id="9" name="TextBox 8"/>
+          <p:cNvSpPr txBox="1"/>
+          <p:nvPr/>
+        </p:nvSpPr>
+        <p:spPr>
+          <a:xfrm>
+            <a:off x="1417320" y="1005840"/>
+            <a:ext cx="10058400" cy="320040"/>
+          </a:xfrm>
+          <a:prstGeom prst="rect">
+            <a:avLst/>
+          </a:prstGeom>
+          <a:noFill/>
+        </p:spPr>
+        <p:txBody>
+          <a:bodyPr wrap="square" anchor="t">
+            <a:spAutoFit/>
+          </a:bodyPr>
+          <a:lstStyle/>
+          <a:p>
+            <a:pPr algn="l"/>
+            <a:r>
+              <a:rPr sz="1300" b="1" i="0">
                 <a:solidFill>
                   <a:srgbClr val="041E42"/>
                 </a:solidFill>
               </a:rPr>
-              <a:t>Brand Health</a:t>
-            </a:r>
-          </a:p>
-        </p:txBody>
-      </p:sp>
-      <p:pic>
-        <p:nvPicPr>
-          <p:cNvPr id="8" name="Picture 7" descr="alert_feed.png"/>
-          <p:cNvPicPr>
-            <a:picLocks noChangeAspect="1"/>
-          </p:cNvPicPr>
-          <p:nvPr/>
-        </p:nvPicPr>
-        <p:blipFill>
-          <a:blip r:embed="rId3"/>
-          <a:stretch>
-            <a:fillRect/>
-          </a:stretch>
-        </p:blipFill>
-        <p:spPr>
-          <a:xfrm>
-            <a:off x="4206240" y="960120"/>
-            <a:ext cx="3794760" cy="2331720"/>
-          </a:xfrm>
-          <a:prstGeom prst="rect">
-            <a:avLst/>
-          </a:prstGeom>
-        </p:spPr>
-      </p:pic>
-      <p:sp>
-        <p:nvSpPr>
-          <p:cNvPr id="9" name="TextBox 8"/>
-          <p:cNvSpPr txBox="1"/>
-          <p:nvPr/>
-        </p:nvSpPr>
-        <p:spPr>
-          <a:xfrm>
-            <a:off x="4206240" y="3310128"/>
-            <a:ext cx="3794760" cy="228600"/>
-          </a:xfrm>
-          <a:prstGeom prst="rect">
-            <a:avLst/>
-          </a:prstGeom>
-          <a:noFill/>
-        </p:spPr>
-        <p:txBody>
-          <a:bodyPr wrap="square" anchor="t">
-            <a:spAutoFit/>
-          </a:bodyPr>
-          <a:lstStyle/>
-          <a:p>
-            <a:pPr algn="ctr"/>
-            <a:r>
-              <a:rPr sz="1100" b="1" i="0">
+              <a:t>Offline-first RSI pipeline</a:t>
+            </a:r>
+          </a:p>
+        </p:txBody>
+      </p:sp>
+      <p:sp>
+        <p:nvSpPr>
+          <p:cNvPr id="10" name="TextBox 9"/>
+          <p:cNvSpPr txBox="1"/>
+          <p:nvPr/>
+        </p:nvSpPr>
+        <p:spPr>
+          <a:xfrm>
+            <a:off x="1417320" y="1325880"/>
+            <a:ext cx="10058400" cy="594360"/>
+          </a:xfrm>
+          <a:prstGeom prst="rect">
+            <a:avLst/>
+          </a:prstGeom>
+          <a:noFill/>
+        </p:spPr>
+        <p:txBody>
+          <a:bodyPr wrap="square" anchor="t">
+            <a:spAutoFit/>
+          </a:bodyPr>
+          <a:lstStyle/>
+          <a:p>
+            <a:pPr algn="l"/>
+            <a:r>
+              <a:rPr sz="1100" b="0" i="0">
+                <a:solidFill>
+                  <a:srgbClr val="333333"/>
+                </a:solidFill>
+              </a:rPr>
+              <a:t>Ingestion → trust → sentiment → aspects → vision → aggregation → alerts → dashboard.  Zero API cost, modular, deployable to Azure.</a:t>
+            </a:r>
+          </a:p>
+        </p:txBody>
+      </p:sp>
+      <p:sp>
+        <p:nvSpPr>
+          <p:cNvPr id="11" name="Rectangle 10"/>
+          <p:cNvSpPr/>
+          <p:nvPr/>
+        </p:nvSpPr>
+        <p:spPr>
+          <a:xfrm>
+            <a:off x="457200" y="2002535"/>
+            <a:ext cx="11247120" cy="960120"/>
+          </a:xfrm>
+          <a:prstGeom prst="rect">
+            <a:avLst/>
+          </a:prstGeom>
+          <a:solidFill>
+            <a:srgbClr val="F5F5F5"/>
+          </a:solidFill>
+          <a:ln>
+            <a:solidFill>
+              <a:srgbClr val="0071DC"/>
+            </a:solidFill>
+          </a:ln>
+          <a:effectLst/>
+        </p:spPr>
+        <p:style>
+          <a:lnRef idx="1">
+            <a:schemeClr val="accent1"/>
+          </a:lnRef>
+          <a:fillRef idx="3">
+            <a:schemeClr val="accent1"/>
+          </a:fillRef>
+          <a:effectRef idx="2">
+            <a:schemeClr val="accent1"/>
+          </a:effectRef>
+          <a:fontRef idx="minor">
+            <a:schemeClr val="lt1"/>
+          </a:fontRef>
+        </p:style>
+        <p:txBody>
+          <a:bodyPr rtlCol="0" anchor="ctr"/>
+          <a:lstStyle/>
+          <a:p>
+            <a:pPr algn="ctr"/>
+          </a:p>
+        </p:txBody>
+      </p:sp>
+      <p:sp>
+        <p:nvSpPr>
+          <p:cNvPr id="12" name="Rectangle 11"/>
+          <p:cNvSpPr/>
+          <p:nvPr/>
+        </p:nvSpPr>
+        <p:spPr>
+          <a:xfrm>
+            <a:off x="457200" y="2002535"/>
+            <a:ext cx="822960" cy="960120"/>
+          </a:xfrm>
+          <a:prstGeom prst="rect">
+            <a:avLst/>
+          </a:prstGeom>
+          <a:solidFill>
+            <a:srgbClr val="0071DC"/>
+          </a:solidFill>
+          <a:ln>
+            <a:noFill/>
+          </a:ln>
+          <a:effectLst/>
+        </p:spPr>
+        <p:style>
+          <a:lnRef idx="1">
+            <a:schemeClr val="accent1"/>
+          </a:lnRef>
+          <a:fillRef idx="3">
+            <a:schemeClr val="accent1"/>
+          </a:fillRef>
+          <a:effectRef idx="2">
+            <a:schemeClr val="accent1"/>
+          </a:effectRef>
+          <a:fontRef idx="minor">
+            <a:schemeClr val="lt1"/>
+          </a:fontRef>
+        </p:style>
+        <p:txBody>
+          <a:bodyPr rtlCol="0" anchor="ctr"/>
+          <a:lstStyle/>
+          <a:p>
+            <a:pPr algn="ctr"/>
+          </a:p>
+        </p:txBody>
+      </p:sp>
+      <p:sp>
+        <p:nvSpPr>
+          <p:cNvPr id="13" name="TextBox 12"/>
+          <p:cNvSpPr txBox="1"/>
+          <p:nvPr/>
+        </p:nvSpPr>
+        <p:spPr>
+          <a:xfrm>
+            <a:off x="457200" y="2002535"/>
+            <a:ext cx="822960" cy="960120"/>
+          </a:xfrm>
+          <a:prstGeom prst="rect">
+            <a:avLst/>
+          </a:prstGeom>
+          <a:noFill/>
+        </p:spPr>
+        <p:txBody>
+          <a:bodyPr wrap="square" anchor="ctr">
+            <a:spAutoFit/>
+          </a:bodyPr>
+          <a:lstStyle/>
+          <a:p>
+            <a:pPr algn="ctr"/>
+            <a:r>
+              <a:rPr sz="2000" b="1" i="0">
+                <a:solidFill>
+                  <a:srgbClr val="FFFFFF"/>
+                </a:solidFill>
+              </a:rPr>
+              <a:t>C2</a:t>
+            </a:r>
+          </a:p>
+        </p:txBody>
+      </p:sp>
+      <p:sp>
+        <p:nvSpPr>
+          <p:cNvPr id="14" name="TextBox 13"/>
+          <p:cNvSpPr txBox="1"/>
+          <p:nvPr/>
+        </p:nvSpPr>
+        <p:spPr>
+          <a:xfrm>
+            <a:off x="1417320" y="2048255"/>
+            <a:ext cx="10058400" cy="320040"/>
+          </a:xfrm>
+          <a:prstGeom prst="rect">
+            <a:avLst/>
+          </a:prstGeom>
+          <a:noFill/>
+        </p:spPr>
+        <p:txBody>
+          <a:bodyPr wrap="square" anchor="t">
+            <a:spAutoFit/>
+          </a:bodyPr>
+          <a:lstStyle/>
+          <a:p>
+            <a:pPr algn="l"/>
+            <a:r>
+              <a:rPr sz="1300" b="1" i="0">
                 <a:solidFill>
                   <a:srgbClr val="041E42"/>
                 </a:solidFill>
               </a:rPr>
-              <a:t>Alert Feed</a:t>
-            </a:r>
-          </a:p>
-        </p:txBody>
-      </p:sp>
-      <p:pic>
-        <p:nvPicPr>
-          <p:cNvPr id="10" name="Picture 9" descr="post_explorer.png"/>
-          <p:cNvPicPr>
-            <a:picLocks noChangeAspect="1"/>
-          </p:cNvPicPr>
-          <p:nvPr/>
-        </p:nvPicPr>
-        <p:blipFill>
-          <a:blip r:embed="rId4"/>
-          <a:stretch>
-            <a:fillRect/>
-          </a:stretch>
-        </p:blipFill>
-        <p:spPr>
-          <a:xfrm>
-            <a:off x="8092440" y="960120"/>
-            <a:ext cx="3794760" cy="2331720"/>
-          </a:xfrm>
-          <a:prstGeom prst="rect">
-            <a:avLst/>
-          </a:prstGeom>
-        </p:spPr>
-      </p:pic>
-      <p:sp>
-        <p:nvSpPr>
-          <p:cNvPr id="11" name="TextBox 10"/>
-          <p:cNvSpPr txBox="1"/>
-          <p:nvPr/>
-        </p:nvSpPr>
-        <p:spPr>
-          <a:xfrm>
-            <a:off x="8092440" y="3310128"/>
-            <a:ext cx="3794760" cy="228600"/>
-          </a:xfrm>
-          <a:prstGeom prst="rect">
-            <a:avLst/>
-          </a:prstGeom>
-          <a:noFill/>
-        </p:spPr>
-        <p:txBody>
-          <a:bodyPr wrap="square" anchor="t">
-            <a:spAutoFit/>
-          </a:bodyPr>
-          <a:lstStyle/>
-          <a:p>
-            <a:pPr algn="ctr"/>
-            <a:r>
-              <a:rPr sz="1100" b="1" i="0">
+              <a:t>Fine-tuned ModernBERT (3-stage curriculum)</a:t>
+            </a:r>
+          </a:p>
+        </p:txBody>
+      </p:sp>
+      <p:sp>
+        <p:nvSpPr>
+          <p:cNvPr id="15" name="TextBox 14"/>
+          <p:cNvSpPr txBox="1"/>
+          <p:nvPr/>
+        </p:nvSpPr>
+        <p:spPr>
+          <a:xfrm>
+            <a:off x="1417320" y="2368295"/>
+            <a:ext cx="10058400" cy="594360"/>
+          </a:xfrm>
+          <a:prstGeom prst="rect">
+            <a:avLst/>
+          </a:prstGeom>
+          <a:noFill/>
+        </p:spPr>
+        <p:txBody>
+          <a:bodyPr wrap="square" anchor="t">
+            <a:spAutoFit/>
+          </a:bodyPr>
+          <a:lstStyle/>
+          <a:p>
+            <a:pPr algn="l"/>
+            <a:r>
+              <a:rPr sz="1100" b="0" i="0">
+                <a:solidFill>
+                  <a:srgbClr val="333333"/>
+                </a:solidFill>
+              </a:rPr>
+              <a:t>Macro-F1 0.6272 → 0.7642 overall; recovers all long posts (≥ 512 tok, n = 7): RoBERTa 5/7 vs ModernBERT 7/7 correct.  5-fold OOF cross-validation, offline training.</a:t>
+            </a:r>
+          </a:p>
+        </p:txBody>
+      </p:sp>
+      <p:sp>
+        <p:nvSpPr>
+          <p:cNvPr id="16" name="Rectangle 15"/>
+          <p:cNvSpPr/>
+          <p:nvPr/>
+        </p:nvSpPr>
+        <p:spPr>
+          <a:xfrm>
+            <a:off x="457200" y="3044950"/>
+            <a:ext cx="11247120" cy="960120"/>
+          </a:xfrm>
+          <a:prstGeom prst="rect">
+            <a:avLst/>
+          </a:prstGeom>
+          <a:solidFill>
+            <a:srgbClr val="F5F5F5"/>
+          </a:solidFill>
+          <a:ln>
+            <a:solidFill>
+              <a:srgbClr val="0071DC"/>
+            </a:solidFill>
+          </a:ln>
+          <a:effectLst/>
+        </p:spPr>
+        <p:style>
+          <a:lnRef idx="1">
+            <a:schemeClr val="accent1"/>
+          </a:lnRef>
+          <a:fillRef idx="3">
+            <a:schemeClr val="accent1"/>
+          </a:fillRef>
+          <a:effectRef idx="2">
+            <a:schemeClr val="accent1"/>
+          </a:effectRef>
+          <a:fontRef idx="minor">
+            <a:schemeClr val="lt1"/>
+          </a:fontRef>
+        </p:style>
+        <p:txBody>
+          <a:bodyPr rtlCol="0" anchor="ctr"/>
+          <a:lstStyle/>
+          <a:p>
+            <a:pPr algn="ctr"/>
+          </a:p>
+        </p:txBody>
+      </p:sp>
+      <p:sp>
+        <p:nvSpPr>
+          <p:cNvPr id="17" name="Rectangle 16"/>
+          <p:cNvSpPr/>
+          <p:nvPr/>
+        </p:nvSpPr>
+        <p:spPr>
+          <a:xfrm>
+            <a:off x="457200" y="3044950"/>
+            <a:ext cx="822960" cy="960120"/>
+          </a:xfrm>
+          <a:prstGeom prst="rect">
+            <a:avLst/>
+          </a:prstGeom>
+          <a:solidFill>
+            <a:srgbClr val="0071DC"/>
+          </a:solidFill>
+          <a:ln>
+            <a:noFill/>
+          </a:ln>
+          <a:effectLst/>
+        </p:spPr>
+        <p:style>
+          <a:lnRef idx="1">
+            <a:schemeClr val="accent1"/>
+          </a:lnRef>
+          <a:fillRef idx="3">
+            <a:schemeClr val="accent1"/>
+          </a:fillRef>
+          <a:effectRef idx="2">
+            <a:schemeClr val="accent1"/>
+          </a:effectRef>
+          <a:fontRef idx="minor">
+            <a:schemeClr val="lt1"/>
+          </a:fontRef>
+        </p:style>
+        <p:txBody>
+          <a:bodyPr rtlCol="0" anchor="ctr"/>
+          <a:lstStyle/>
+          <a:p>
+            <a:pPr algn="ctr"/>
+          </a:p>
+        </p:txBody>
+      </p:sp>
+      <p:sp>
+        <p:nvSpPr>
+          <p:cNvPr id="18" name="TextBox 17"/>
+          <p:cNvSpPr txBox="1"/>
+          <p:nvPr/>
+        </p:nvSpPr>
+        <p:spPr>
+          <a:xfrm>
+            <a:off x="457200" y="3044950"/>
+            <a:ext cx="822960" cy="960120"/>
+          </a:xfrm>
+          <a:prstGeom prst="rect">
+            <a:avLst/>
+          </a:prstGeom>
+          <a:noFill/>
+        </p:spPr>
+        <p:txBody>
+          <a:bodyPr wrap="square" anchor="ctr">
+            <a:spAutoFit/>
+          </a:bodyPr>
+          <a:lstStyle/>
+          <a:p>
+            <a:pPr algn="ctr"/>
+            <a:r>
+              <a:rPr sz="2000" b="1" i="0">
+                <a:solidFill>
+                  <a:srgbClr val="FFFFFF"/>
+                </a:solidFill>
+              </a:rPr>
+              <a:t>C3</a:t>
+            </a:r>
+          </a:p>
+        </p:txBody>
+      </p:sp>
+      <p:sp>
+        <p:nvSpPr>
+          <p:cNvPr id="19" name="TextBox 18"/>
+          <p:cNvSpPr txBox="1"/>
+          <p:nvPr/>
+        </p:nvSpPr>
+        <p:spPr>
+          <a:xfrm>
+            <a:off x="1417320" y="3090670"/>
+            <a:ext cx="10058400" cy="320040"/>
+          </a:xfrm>
+          <a:prstGeom prst="rect">
+            <a:avLst/>
+          </a:prstGeom>
+          <a:noFill/>
+        </p:spPr>
+        <p:txBody>
+          <a:bodyPr wrap="square" anchor="t">
+            <a:spAutoFit/>
+          </a:bodyPr>
+          <a:lstStyle/>
+          <a:p>
+            <a:pPr algn="l"/>
+            <a:r>
+              <a:rPr sz="1300" b="1" i="0">
                 <a:solidFill>
                   <a:srgbClr val="041E42"/>
                 </a:solidFill>
               </a:rPr>
-              <a:t>Post Explorer</a:t>
-            </a:r>
-          </a:p>
-        </p:txBody>
-      </p:sp>
-      <p:pic>
-        <p:nvPicPr>
-          <p:cNvPr id="12" name="Picture 11" descr="review_validate.png"/>
-          <p:cNvPicPr>
-            <a:picLocks noChangeAspect="1"/>
-          </p:cNvPicPr>
-          <p:nvPr/>
-        </p:nvPicPr>
-        <p:blipFill>
-          <a:blip r:embed="rId5"/>
-          <a:stretch>
-            <a:fillRect/>
-          </a:stretch>
-        </p:blipFill>
-        <p:spPr>
-          <a:xfrm>
-            <a:off x="320040" y="3566160"/>
-            <a:ext cx="3794760" cy="2331720"/>
-          </a:xfrm>
-          <a:prstGeom prst="rect">
-            <a:avLst/>
-          </a:prstGeom>
-        </p:spPr>
-      </p:pic>
-      <p:sp>
-        <p:nvSpPr>
-          <p:cNvPr id="13" name="TextBox 12"/>
-          <p:cNvSpPr txBox="1"/>
-          <p:nvPr/>
-        </p:nvSpPr>
-        <p:spPr>
-          <a:xfrm>
-            <a:off x="320040" y="5916168"/>
-            <a:ext cx="3794760" cy="228600"/>
-          </a:xfrm>
-          <a:prstGeom prst="rect">
-            <a:avLst/>
-          </a:prstGeom>
-          <a:noFill/>
-        </p:spPr>
-        <p:txBody>
-          <a:bodyPr wrap="square" anchor="t">
-            <a:spAutoFit/>
-          </a:bodyPr>
-          <a:lstStyle/>
-          <a:p>
-            <a:pPr algn="ctr"/>
-            <a:r>
-              <a:rPr sz="1100" b="1" i="0">
+              <a:t>Multi-pass vision technique on Gemma 3 4B</a:t>
+            </a:r>
+          </a:p>
+        </p:txBody>
+      </p:sp>
+      <p:sp>
+        <p:nvSpPr>
+          <p:cNvPr id="20" name="TextBox 19"/>
+          <p:cNvSpPr txBox="1"/>
+          <p:nvPr/>
+        </p:nvSpPr>
+        <p:spPr>
+          <a:xfrm>
+            <a:off x="1417320" y="3410710"/>
+            <a:ext cx="10058400" cy="594360"/>
+          </a:xfrm>
+          <a:prstGeom prst="rect">
+            <a:avLst/>
+          </a:prstGeom>
+          <a:noFill/>
+        </p:spPr>
+        <p:txBody>
+          <a:bodyPr wrap="square" anchor="t">
+            <a:spAutoFit/>
+          </a:bodyPr>
+          <a:lstStyle/>
+          <a:p>
+            <a:pPr algn="l"/>
+            <a:r>
+              <a:rPr sz="1100" b="0" i="0">
+                <a:solidFill>
+                  <a:srgbClr val="333333"/>
+                </a:solidFill>
+              </a:rPr>
+              <a:t>Hallucination 50 % → 0 %,  extraction 25 % → 75 %.  Adapts techniques from 5 recent VLM papers without vendor-blocked models.</a:t>
+            </a:r>
+          </a:p>
+        </p:txBody>
+      </p:sp>
+      <p:sp>
+        <p:nvSpPr>
+          <p:cNvPr id="21" name="Rectangle 20"/>
+          <p:cNvSpPr/>
+          <p:nvPr/>
+        </p:nvSpPr>
+        <p:spPr>
+          <a:xfrm>
+            <a:off x="457200" y="4087365"/>
+            <a:ext cx="11247120" cy="960120"/>
+          </a:xfrm>
+          <a:prstGeom prst="rect">
+            <a:avLst/>
+          </a:prstGeom>
+          <a:solidFill>
+            <a:srgbClr val="F5F5F5"/>
+          </a:solidFill>
+          <a:ln>
+            <a:solidFill>
+              <a:srgbClr val="0071DC"/>
+            </a:solidFill>
+          </a:ln>
+          <a:effectLst/>
+        </p:spPr>
+        <p:style>
+          <a:lnRef idx="1">
+            <a:schemeClr val="accent1"/>
+          </a:lnRef>
+          <a:fillRef idx="3">
+            <a:schemeClr val="accent1"/>
+          </a:fillRef>
+          <a:effectRef idx="2">
+            <a:schemeClr val="accent1"/>
+          </a:effectRef>
+          <a:fontRef idx="minor">
+            <a:schemeClr val="lt1"/>
+          </a:fontRef>
+        </p:style>
+        <p:txBody>
+          <a:bodyPr rtlCol="0" anchor="ctr"/>
+          <a:lstStyle/>
+          <a:p>
+            <a:pPr algn="ctr"/>
+          </a:p>
+        </p:txBody>
+      </p:sp>
+      <p:sp>
+        <p:nvSpPr>
+          <p:cNvPr id="22" name="Rectangle 21"/>
+          <p:cNvSpPr/>
+          <p:nvPr/>
+        </p:nvSpPr>
+        <p:spPr>
+          <a:xfrm>
+            <a:off x="457200" y="4087365"/>
+            <a:ext cx="822960" cy="960120"/>
+          </a:xfrm>
+          <a:prstGeom prst="rect">
+            <a:avLst/>
+          </a:prstGeom>
+          <a:solidFill>
+            <a:srgbClr val="0071DC"/>
+          </a:solidFill>
+          <a:ln>
+            <a:noFill/>
+          </a:ln>
+          <a:effectLst/>
+        </p:spPr>
+        <p:style>
+          <a:lnRef idx="1">
+            <a:schemeClr val="accent1"/>
+          </a:lnRef>
+          <a:fillRef idx="3">
+            <a:schemeClr val="accent1"/>
+          </a:fillRef>
+          <a:effectRef idx="2">
+            <a:schemeClr val="accent1"/>
+          </a:effectRef>
+          <a:fontRef idx="minor">
+            <a:schemeClr val="lt1"/>
+          </a:fontRef>
+        </p:style>
+        <p:txBody>
+          <a:bodyPr rtlCol="0" anchor="ctr"/>
+          <a:lstStyle/>
+          <a:p>
+            <a:pPr algn="ctr"/>
+          </a:p>
+        </p:txBody>
+      </p:sp>
+      <p:sp>
+        <p:nvSpPr>
+          <p:cNvPr id="23" name="TextBox 22"/>
+          <p:cNvSpPr txBox="1"/>
+          <p:nvPr/>
+        </p:nvSpPr>
+        <p:spPr>
+          <a:xfrm>
+            <a:off x="457200" y="4087365"/>
+            <a:ext cx="822960" cy="960120"/>
+          </a:xfrm>
+          <a:prstGeom prst="rect">
+            <a:avLst/>
+          </a:prstGeom>
+          <a:noFill/>
+        </p:spPr>
+        <p:txBody>
+          <a:bodyPr wrap="square" anchor="ctr">
+            <a:spAutoFit/>
+          </a:bodyPr>
+          <a:lstStyle/>
+          <a:p>
+            <a:pPr algn="ctr"/>
+            <a:r>
+              <a:rPr sz="2000" b="1" i="0">
+                <a:solidFill>
+                  <a:srgbClr val="FFFFFF"/>
+                </a:solidFill>
+              </a:rPr>
+              <a:t>C4</a:t>
+            </a:r>
+          </a:p>
+        </p:txBody>
+      </p:sp>
+      <p:sp>
+        <p:nvSpPr>
+          <p:cNvPr id="24" name="TextBox 23"/>
+          <p:cNvSpPr txBox="1"/>
+          <p:nvPr/>
+        </p:nvSpPr>
+        <p:spPr>
+          <a:xfrm>
+            <a:off x="1417320" y="4133085"/>
+            <a:ext cx="10058400" cy="320040"/>
+          </a:xfrm>
+          <a:prstGeom prst="rect">
+            <a:avLst/>
+          </a:prstGeom>
+          <a:noFill/>
+        </p:spPr>
+        <p:txBody>
+          <a:bodyPr wrap="square" anchor="t">
+            <a:spAutoFit/>
+          </a:bodyPr>
+          <a:lstStyle/>
+          <a:p>
+            <a:pPr algn="l"/>
+            <a:r>
+              <a:rPr sz="1300" b="1" i="0">
                 <a:solidFill>
                   <a:srgbClr val="041E42"/>
                 </a:solidFill>
               </a:rPr>
-              <a:t>Review &amp; Validate</a:t>
-            </a:r>
-          </a:p>
-        </p:txBody>
-      </p:sp>
-      <p:pic>
-        <p:nvPicPr>
-          <p:cNvPr id="14" name="Picture 13" descr="lifecycle_kanban.png"/>
-          <p:cNvPicPr>
-            <a:picLocks noChangeAspect="1"/>
-          </p:cNvPicPr>
-          <p:nvPr/>
-        </p:nvPicPr>
-        <p:blipFill>
-          <a:blip r:embed="rId6"/>
-          <a:stretch>
-            <a:fillRect/>
-          </a:stretch>
-        </p:blipFill>
-        <p:spPr>
-          <a:xfrm>
-            <a:off x="4206240" y="3566160"/>
-            <a:ext cx="3794760" cy="2331720"/>
-          </a:xfrm>
-          <a:prstGeom prst="rect">
-            <a:avLst/>
-          </a:prstGeom>
-        </p:spPr>
-      </p:pic>
-      <p:sp>
-        <p:nvSpPr>
-          <p:cNvPr id="15" name="TextBox 14"/>
-          <p:cNvSpPr txBox="1"/>
-          <p:nvPr/>
-        </p:nvSpPr>
-        <p:spPr>
-          <a:xfrm>
-            <a:off x="4206240" y="5916168"/>
-            <a:ext cx="3794760" cy="228600"/>
-          </a:xfrm>
-          <a:prstGeom prst="rect">
-            <a:avLst/>
-          </a:prstGeom>
-          <a:noFill/>
-        </p:spPr>
-        <p:txBody>
-          <a:bodyPr wrap="square" anchor="t">
-            <a:spAutoFit/>
-          </a:bodyPr>
-          <a:lstStyle/>
-          <a:p>
-            <a:pPr algn="ctr"/>
-            <a:r>
-              <a:rPr sz="1100" b="1" i="0">
+              <a:t>Interpretable trust score + admission gate</a:t>
+            </a:r>
+          </a:p>
+        </p:txBody>
+      </p:sp>
+      <p:sp>
+        <p:nvSpPr>
+          <p:cNvPr id="25" name="TextBox 24"/>
+          <p:cNvSpPr txBox="1"/>
+          <p:nvPr/>
+        </p:nvSpPr>
+        <p:spPr>
+          <a:xfrm>
+            <a:off x="1417320" y="4453125"/>
+            <a:ext cx="10058400" cy="594360"/>
+          </a:xfrm>
+          <a:prstGeom prst="rect">
+            <a:avLst/>
+          </a:prstGeom>
+          <a:noFill/>
+        </p:spPr>
+        <p:txBody>
+          <a:bodyPr wrap="square" anchor="t">
+            <a:spAutoFit/>
+          </a:bodyPr>
+          <a:lstStyle/>
+          <a:p>
+            <a:pPr algn="l"/>
+            <a:r>
+              <a:rPr sz="1100" b="0" i="0">
+                <a:solidFill>
+                  <a:srgbClr val="333333"/>
+                </a:solidFill>
+              </a:rPr>
+              <a:t>trust × confidence gate flags rather than drops low-credibility posts.  Every constant traceable to English rationale in config.</a:t>
+            </a:r>
+          </a:p>
+        </p:txBody>
+      </p:sp>
+      <p:sp>
+        <p:nvSpPr>
+          <p:cNvPr id="26" name="Rectangle 25"/>
+          <p:cNvSpPr/>
+          <p:nvPr/>
+        </p:nvSpPr>
+        <p:spPr>
+          <a:xfrm>
+            <a:off x="457200" y="5129780"/>
+            <a:ext cx="11247120" cy="960120"/>
+          </a:xfrm>
+          <a:prstGeom prst="rect">
+            <a:avLst/>
+          </a:prstGeom>
+          <a:solidFill>
+            <a:srgbClr val="F5F5F5"/>
+          </a:solidFill>
+          <a:ln>
+            <a:solidFill>
+              <a:srgbClr val="0071DC"/>
+            </a:solidFill>
+          </a:ln>
+          <a:effectLst/>
+        </p:spPr>
+        <p:style>
+          <a:lnRef idx="1">
+            <a:schemeClr val="accent1"/>
+          </a:lnRef>
+          <a:fillRef idx="3">
+            <a:schemeClr val="accent1"/>
+          </a:fillRef>
+          <a:effectRef idx="2">
+            <a:schemeClr val="accent1"/>
+          </a:effectRef>
+          <a:fontRef idx="minor">
+            <a:schemeClr val="lt1"/>
+          </a:fontRef>
+        </p:style>
+        <p:txBody>
+          <a:bodyPr rtlCol="0" anchor="ctr"/>
+          <a:lstStyle/>
+          <a:p>
+            <a:pPr algn="ctr"/>
+          </a:p>
+        </p:txBody>
+      </p:sp>
+      <p:sp>
+        <p:nvSpPr>
+          <p:cNvPr id="27" name="Rectangle 26"/>
+          <p:cNvSpPr/>
+          <p:nvPr/>
+        </p:nvSpPr>
+        <p:spPr>
+          <a:xfrm>
+            <a:off x="457200" y="5129780"/>
+            <a:ext cx="822960" cy="960120"/>
+          </a:xfrm>
+          <a:prstGeom prst="rect">
+            <a:avLst/>
+          </a:prstGeom>
+          <a:solidFill>
+            <a:srgbClr val="0071DC"/>
+          </a:solidFill>
+          <a:ln>
+            <a:noFill/>
+          </a:ln>
+          <a:effectLst/>
+        </p:spPr>
+        <p:style>
+          <a:lnRef idx="1">
+            <a:schemeClr val="accent1"/>
+          </a:lnRef>
+          <a:fillRef idx="3">
+            <a:schemeClr val="accent1"/>
+          </a:fillRef>
+          <a:effectRef idx="2">
+            <a:schemeClr val="accent1"/>
+          </a:effectRef>
+          <a:fontRef idx="minor">
+            <a:schemeClr val="lt1"/>
+          </a:fontRef>
+        </p:style>
+        <p:txBody>
+          <a:bodyPr rtlCol="0" anchor="ctr"/>
+          <a:lstStyle/>
+          <a:p>
+            <a:pPr algn="ctr"/>
+          </a:p>
+        </p:txBody>
+      </p:sp>
+      <p:sp>
+        <p:nvSpPr>
+          <p:cNvPr id="28" name="TextBox 27"/>
+          <p:cNvSpPr txBox="1"/>
+          <p:nvPr/>
+        </p:nvSpPr>
+        <p:spPr>
+          <a:xfrm>
+            <a:off x="457200" y="5129780"/>
+            <a:ext cx="822960" cy="960120"/>
+          </a:xfrm>
+          <a:prstGeom prst="rect">
+            <a:avLst/>
+          </a:prstGeom>
+          <a:noFill/>
+        </p:spPr>
+        <p:txBody>
+          <a:bodyPr wrap="square" anchor="ctr">
+            <a:spAutoFit/>
+          </a:bodyPr>
+          <a:lstStyle/>
+          <a:p>
+            <a:pPr algn="ctr"/>
+            <a:r>
+              <a:rPr sz="2000" b="1" i="0">
+                <a:solidFill>
+                  <a:srgbClr val="FFFFFF"/>
+                </a:solidFill>
+              </a:rPr>
+              <a:t>C5</a:t>
+            </a:r>
+          </a:p>
+        </p:txBody>
+      </p:sp>
+      <p:sp>
+        <p:nvSpPr>
+          <p:cNvPr id="29" name="TextBox 28"/>
+          <p:cNvSpPr txBox="1"/>
+          <p:nvPr/>
+        </p:nvSpPr>
+        <p:spPr>
+          <a:xfrm>
+            <a:off x="1417320" y="5175500"/>
+            <a:ext cx="10058400" cy="320040"/>
+          </a:xfrm>
+          <a:prstGeom prst="rect">
+            <a:avLst/>
+          </a:prstGeom>
+          <a:noFill/>
+        </p:spPr>
+        <p:txBody>
+          <a:bodyPr wrap="square" anchor="t">
+            <a:spAutoFit/>
+          </a:bodyPr>
+          <a:lstStyle/>
+          <a:p>
+            <a:pPr algn="l"/>
+            <a:r>
+              <a:rPr sz="1300" b="1" i="0">
                 <a:solidFill>
                   <a:srgbClr val="041E42"/>
                 </a:solidFill>
               </a:rPr>
-              <a:t>Lifecycle Kanban</a:t>
-            </a:r>
-          </a:p>
-        </p:txBody>
-      </p:sp>
-      <p:pic>
-        <p:nvPicPr>
-          <p:cNvPr id="16" name="Picture 15" descr="insights_competitor.png"/>
-          <p:cNvPicPr>
-            <a:picLocks noChangeAspect="1"/>
-          </p:cNvPicPr>
-          <p:nvPr/>
-        </p:nvPicPr>
-        <p:blipFill>
-          <a:blip r:embed="rId7"/>
-          <a:stretch>
-            <a:fillRect/>
-          </a:stretch>
-        </p:blipFill>
-        <p:spPr>
-          <a:xfrm>
-            <a:off x="8092440" y="3566160"/>
-            <a:ext cx="3794760" cy="2331720"/>
-          </a:xfrm>
-          <a:prstGeom prst="rect">
-            <a:avLst/>
-          </a:prstGeom>
-        </p:spPr>
-      </p:pic>
-      <p:sp>
-        <p:nvSpPr>
-          <p:cNvPr id="17" name="TextBox 16"/>
-          <p:cNvSpPr txBox="1"/>
-          <p:nvPr/>
-        </p:nvSpPr>
-        <p:spPr>
-          <a:xfrm>
-            <a:off x="8092440" y="5916168"/>
-            <a:ext cx="3794760" cy="228600"/>
-          </a:xfrm>
-          <a:prstGeom prst="rect">
-            <a:avLst/>
-          </a:prstGeom>
-          <a:noFill/>
-        </p:spPr>
-        <p:txBody>
-          <a:bodyPr wrap="square" anchor="t">
-            <a:spAutoFit/>
-          </a:bodyPr>
-          <a:lstStyle/>
-          <a:p>
-            <a:pPr algn="ctr"/>
-            <a:r>
-              <a:rPr sz="1100" b="1" i="0">
-                <a:solidFill>
-                  <a:srgbClr val="041E42"/>
-                </a:solidFill>
-              </a:rPr>
-              <a:t>Insights</a:t>
-            </a:r>
-          </a:p>
-        </p:txBody>
-      </p:sp>
-      <p:sp>
-        <p:nvSpPr>
-          <p:cNvPr id="18" name="TextBox 17"/>
+              <a:t>HITL learning-loop dashboard</a:t>
+            </a:r>
+          </a:p>
+        </p:txBody>
+      </p:sp>
+      <p:sp>
+        <p:nvSpPr>
+          <p:cNvPr id="30" name="TextBox 29"/>
+          <p:cNvSpPr txBox="1"/>
+          <p:nvPr/>
+        </p:nvSpPr>
+        <p:spPr>
+          <a:xfrm>
+            <a:off x="1417320" y="5495540"/>
+            <a:ext cx="10058400" cy="594360"/>
+          </a:xfrm>
+          <a:prstGeom prst="rect">
+            <a:avLst/>
+          </a:prstGeom>
+          <a:noFill/>
+        </p:spPr>
+        <p:txBody>
+          <a:bodyPr wrap="square" anchor="t">
+            <a:spAutoFit/>
+          </a:bodyPr>
+          <a:lstStyle/>
+          <a:p>
+            <a:pPr algn="l"/>
+            <a:r>
+              <a:rPr sz="1100" b="0" i="0">
+                <a:solidFill>
+                  <a:srgbClr val="333333"/>
+                </a:solidFill>
+              </a:rPr>
+              <a:t>Review &amp; Validate, Lifecycle Kanban, Insights, Notification centre.  Corrections &amp; posted replies feed few-shot reply generation and future retraining.</a:t>
+            </a:r>
+          </a:p>
+        </p:txBody>
+      </p:sp>
+      <p:sp>
+        <p:nvSpPr>
+          <p:cNvPr id="31" name="TextBox 30"/>
           <p:cNvSpPr txBox="1"/>
           <p:nvPr/>
         </p:nvSpPr>
@@ -13723,7 +14747,7 @@
       </p:sp>
       <p:sp>
         <p:nvSpPr>
-          <p:cNvPr id="19" name="TextBox 18"/>
+          <p:cNvPr id="32" name="TextBox 31"/>
           <p:cNvSpPr txBox="1"/>
           <p:nvPr/>
         </p:nvSpPr>
@@ -13750,7 +14774,7 @@
                   <a:srgbClr val="666666"/>
                 </a:solidFill>
               </a:rPr>
-              <a:t>18 / 23</a:t>
+              <a:t>18 / 24</a:t>
             </a:r>
           </a:p>
         </p:txBody>
@@ -13846,7 +14870,7 @@
                   <a:srgbClr val="FFFFFF"/>
                 </a:solidFill>
               </a:rPr>
-              <a:t>Conclusions  —  What Worked, What's Still Open</a:t>
+              <a:t>Live Demo  —  Dashboard Walkthrough</a:t>
             </a:r>
           </a:p>
         </p:txBody>
@@ -13880,7 +14904,7 @@
                   <a:srgbClr val="E8F4FD"/>
                 </a:solidFill>
               </a:rPr>
-              <a:t>Honest read on 5 months of post-midsem work</a:t>
+              <a:t>One post → alert → review → reply → lifecycle → resolved</a:t>
             </a:r>
           </a:p>
         </p:txBody>
@@ -13929,52 +14953,30 @@
           </a:p>
         </p:txBody>
       </p:sp>
-      <p:sp>
-        <p:nvSpPr>
-          <p:cNvPr id="6" name="Rectangle 5"/>
-          <p:cNvSpPr/>
-          <p:nvPr/>
-        </p:nvSpPr>
-        <p:spPr>
-          <a:xfrm>
-            <a:off x="457200" y="960120"/>
-            <a:ext cx="5532120" cy="4480560"/>
-          </a:xfrm>
-          <a:prstGeom prst="rect">
-            <a:avLst/>
-          </a:prstGeom>
-          <a:solidFill>
-            <a:srgbClr val="DCFCE7"/>
-          </a:solidFill>
-          <a:ln>
-            <a:solidFill>
-              <a:srgbClr val="10B981"/>
-            </a:solidFill>
-          </a:ln>
-          <a:effectLst/>
-        </p:spPr>
-        <p:style>
-          <a:lnRef idx="1">
-            <a:schemeClr val="accent1"/>
-          </a:lnRef>
-          <a:fillRef idx="3">
-            <a:schemeClr val="accent1"/>
-          </a:fillRef>
-          <a:effectRef idx="2">
-            <a:schemeClr val="accent1"/>
-          </a:effectRef>
-          <a:fontRef idx="minor">
-            <a:schemeClr val="lt1"/>
-          </a:fontRef>
-        </p:style>
-        <p:txBody>
-          <a:bodyPr rtlCol="0" anchor="ctr"/>
-          <a:lstStyle/>
-          <a:p>
-            <a:pPr algn="ctr"/>
-          </a:p>
-        </p:txBody>
-      </p:sp>
+      <p:pic>
+        <p:nvPicPr>
+          <p:cNvPr id="6" name="Picture 5" descr="brand_health.png"/>
+          <p:cNvPicPr>
+            <a:picLocks noChangeAspect="1"/>
+          </p:cNvPicPr>
+          <p:nvPr/>
+        </p:nvPicPr>
+        <p:blipFill>
+          <a:blip r:embed="rId2"/>
+          <a:stretch>
+            <a:fillRect/>
+          </a:stretch>
+        </p:blipFill>
+        <p:spPr>
+          <a:xfrm>
+            <a:off x="320040" y="960120"/>
+            <a:ext cx="3794760" cy="2331720"/>
+          </a:xfrm>
+          <a:prstGeom prst="rect">
+            <a:avLst/>
+          </a:prstGeom>
+        </p:spPr>
+      </p:pic>
       <p:sp>
         <p:nvSpPr>
           <p:cNvPr id="7" name="TextBox 6"/>
@@ -13983,210 +14985,114 @@
         </p:nvSpPr>
         <p:spPr>
           <a:xfrm>
-            <a:off x="640080" y="1097280"/>
-            <a:ext cx="5212080" cy="365760"/>
-          </a:xfrm>
-          <a:prstGeom prst="rect">
-            <a:avLst/>
-          </a:prstGeom>
-          <a:noFill/>
-        </p:spPr>
-        <p:txBody>
-          <a:bodyPr wrap="square" anchor="t">
-            <a:spAutoFit/>
-          </a:bodyPr>
-          <a:lstStyle/>
-          <a:p>
-            <a:pPr algn="l"/>
-            <a:r>
-              <a:rPr sz="1300" b="1" i="0">
-                <a:solidFill>
-                  <a:srgbClr val="10B981"/>
-                </a:solidFill>
-              </a:rPr>
-              <a:t>WHAT WORKED</a:t>
-            </a:r>
-          </a:p>
-        </p:txBody>
-      </p:sp>
-      <p:sp>
-        <p:nvSpPr>
-          <p:cNvPr id="8" name="TextBox 7"/>
-          <p:cNvSpPr txBox="1"/>
-          <p:nvPr/>
-        </p:nvSpPr>
-        <p:spPr>
-          <a:xfrm>
-            <a:off x="640080" y="1508760"/>
-            <a:ext cx="5212080" cy="3794760"/>
-          </a:xfrm>
-          <a:prstGeom prst="rect">
-            <a:avLst/>
-          </a:prstGeom>
-          <a:noFill/>
-        </p:spPr>
-        <p:txBody>
-          <a:bodyPr wrap="square">
-            <a:spAutoFit/>
-          </a:bodyPr>
-          <a:lstStyle/>
-          <a:p>
-            <a:pPr>
-              <a:spcAft>
-                <a:spcPts val="400"/>
-              </a:spcAft>
-            </a:pPr>
-            <a:r>
-              <a:rPr sz="1100" b="0">
-                <a:solidFill>
-                  <a:srgbClr val="333333"/>
-                </a:solidFill>
-              </a:rPr>
-              <a:t>•  3-stage ModernBERT curriculum landed the sentiment win we set out for  (Macro-F1 0.62 → 0.76 on 5-fold OOF).</a:t>
-            </a:r>
-          </a:p>
-          <a:p>
-            <a:pPr>
-              <a:spcAft>
-                <a:spcPts val="400"/>
-              </a:spcAft>
-            </a:pPr>
-            <a:r>
-              <a:rPr sz="1100" b="0">
-                <a:solidFill>
-                  <a:srgbClr val="333333"/>
-                </a:solidFill>
-              </a:rPr>
-              <a:t>•  Long-post recovery came for free once we switched off truncation  (≥1024-tok context):  5/7 → 7/7 correct on the ≥ 512-tok bucket.</a:t>
-            </a:r>
-          </a:p>
-          <a:p>
-            <a:pPr>
-              <a:spcAft>
-                <a:spcPts val="400"/>
-              </a:spcAft>
-            </a:pPr>
-            <a:r>
-              <a:rPr sz="1100" b="0">
-                <a:solidFill>
-                  <a:srgbClr val="333333"/>
-                </a:solidFill>
-              </a:rPr>
-              <a:t>•  Removing the image on the final vision merge step ended the 50 % hallucination problem — the mechanism, not just the number, makes it credible.</a:t>
-            </a:r>
-          </a:p>
-          <a:p>
-            <a:pPr>
-              <a:spcAft>
-                <a:spcPts val="400"/>
-              </a:spcAft>
-            </a:pPr>
-            <a:r>
-              <a:rPr sz="1100" b="0">
-                <a:solidFill>
-                  <a:srgbClr val="333333"/>
-                </a:solidFill>
-              </a:rPr>
-              <a:t>•  Trust score as flag-not-drop  matched the human annotator on 12 / 15 low-trust posts. Analysts trust it because they can override it.</a:t>
-            </a:r>
-          </a:p>
-          <a:p>
-            <a:pPr>
-              <a:spcAft>
-                <a:spcPts val="400"/>
-              </a:spcAft>
-            </a:pPr>
-            <a:r>
-              <a:rPr sz="1100" b="0">
-                <a:solidFill>
-                  <a:srgbClr val="333333"/>
-                </a:solidFill>
-              </a:rPr>
-              <a:t>•  HITL feedback table quietly turned into the most useful piece of infrastructure — drives few-shot on every click today, retraining tomorrow.</a:t>
-            </a:r>
-          </a:p>
-        </p:txBody>
-      </p:sp>
-      <p:sp>
-        <p:nvSpPr>
-          <p:cNvPr id="9" name="Rectangle 8"/>
-          <p:cNvSpPr/>
-          <p:nvPr/>
-        </p:nvSpPr>
-        <p:spPr>
-          <a:xfrm>
-            <a:off x="6172200" y="960120"/>
-            <a:ext cx="5532120" cy="4480560"/>
-          </a:xfrm>
-          <a:prstGeom prst="rect">
-            <a:avLst/>
-          </a:prstGeom>
-          <a:solidFill>
-            <a:srgbClr val="FEF3C7"/>
-          </a:solidFill>
-          <a:ln>
-            <a:solidFill>
-              <a:srgbClr val="D97706"/>
-            </a:solidFill>
-          </a:ln>
-          <a:effectLst/>
-        </p:spPr>
-        <p:style>
-          <a:lnRef idx="1">
-            <a:schemeClr val="accent1"/>
-          </a:lnRef>
-          <a:fillRef idx="3">
-            <a:schemeClr val="accent1"/>
-          </a:fillRef>
-          <a:effectRef idx="2">
-            <a:schemeClr val="accent1"/>
-          </a:effectRef>
-          <a:fontRef idx="minor">
-            <a:schemeClr val="lt1"/>
-          </a:fontRef>
-        </p:style>
-        <p:txBody>
-          <a:bodyPr rtlCol="0" anchor="ctr"/>
-          <a:lstStyle/>
-          <a:p>
-            <a:pPr algn="ctr"/>
-          </a:p>
-        </p:txBody>
-      </p:sp>
-      <p:sp>
-        <p:nvSpPr>
-          <p:cNvPr id="10" name="TextBox 9"/>
-          <p:cNvSpPr txBox="1"/>
-          <p:nvPr/>
-        </p:nvSpPr>
-        <p:spPr>
-          <a:xfrm>
-            <a:off x="6355080" y="1097280"/>
-            <a:ext cx="5212080" cy="365760"/>
-          </a:xfrm>
-          <a:prstGeom prst="rect">
-            <a:avLst/>
-          </a:prstGeom>
-          <a:noFill/>
-        </p:spPr>
-        <p:txBody>
-          <a:bodyPr wrap="square" anchor="t">
-            <a:spAutoFit/>
-          </a:bodyPr>
-          <a:lstStyle/>
-          <a:p>
-            <a:pPr algn="l"/>
-            <a:r>
-              <a:rPr sz="1300" b="1" i="0">
-                <a:solidFill>
-                  <a:srgbClr val="D97706"/>
-                </a:solidFill>
-              </a:rPr>
-              <a:t>WHAT'S STILL OPEN  (honest)</a:t>
-            </a:r>
-          </a:p>
-        </p:txBody>
-      </p:sp>
+            <a:off x="320040" y="3310128"/>
+            <a:ext cx="3794760" cy="228600"/>
+          </a:xfrm>
+          <a:prstGeom prst="rect">
+            <a:avLst/>
+          </a:prstGeom>
+          <a:noFill/>
+        </p:spPr>
+        <p:txBody>
+          <a:bodyPr wrap="square" anchor="t">
+            <a:spAutoFit/>
+          </a:bodyPr>
+          <a:lstStyle/>
+          <a:p>
+            <a:pPr algn="ctr"/>
+            <a:r>
+              <a:rPr sz="1100" b="1" i="0">
+                <a:solidFill>
+                  <a:srgbClr val="041E42"/>
+                </a:solidFill>
+              </a:rPr>
+              <a:t>Brand Health</a:t>
+            </a:r>
+          </a:p>
+        </p:txBody>
+      </p:sp>
+      <p:pic>
+        <p:nvPicPr>
+          <p:cNvPr id="8" name="Picture 7" descr="alert_feed.png"/>
+          <p:cNvPicPr>
+            <a:picLocks noChangeAspect="1"/>
+          </p:cNvPicPr>
+          <p:nvPr/>
+        </p:nvPicPr>
+        <p:blipFill>
+          <a:blip r:embed="rId3"/>
+          <a:stretch>
+            <a:fillRect/>
+          </a:stretch>
+        </p:blipFill>
+        <p:spPr>
+          <a:xfrm>
+            <a:off x="4206240" y="960120"/>
+            <a:ext cx="3794760" cy="2331720"/>
+          </a:xfrm>
+          <a:prstGeom prst="rect">
+            <a:avLst/>
+          </a:prstGeom>
+        </p:spPr>
+      </p:pic>
+      <p:sp>
+        <p:nvSpPr>
+          <p:cNvPr id="9" name="TextBox 8"/>
+          <p:cNvSpPr txBox="1"/>
+          <p:nvPr/>
+        </p:nvSpPr>
+        <p:spPr>
+          <a:xfrm>
+            <a:off x="4206240" y="3310128"/>
+            <a:ext cx="3794760" cy="228600"/>
+          </a:xfrm>
+          <a:prstGeom prst="rect">
+            <a:avLst/>
+          </a:prstGeom>
+          <a:noFill/>
+        </p:spPr>
+        <p:txBody>
+          <a:bodyPr wrap="square" anchor="t">
+            <a:spAutoFit/>
+          </a:bodyPr>
+          <a:lstStyle/>
+          <a:p>
+            <a:pPr algn="ctr"/>
+            <a:r>
+              <a:rPr sz="1100" b="1" i="0">
+                <a:solidFill>
+                  <a:srgbClr val="041E42"/>
+                </a:solidFill>
+              </a:rPr>
+              <a:t>Alert Feed</a:t>
+            </a:r>
+          </a:p>
+        </p:txBody>
+      </p:sp>
+      <p:pic>
+        <p:nvPicPr>
+          <p:cNvPr id="10" name="Picture 9" descr="post_explorer.png"/>
+          <p:cNvPicPr>
+            <a:picLocks noChangeAspect="1"/>
+          </p:cNvPicPr>
+          <p:nvPr/>
+        </p:nvPicPr>
+        <p:blipFill>
+          <a:blip r:embed="rId4"/>
+          <a:stretch>
+            <a:fillRect/>
+          </a:stretch>
+        </p:blipFill>
+        <p:spPr>
+          <a:xfrm>
+            <a:off x="8092440" y="960120"/>
+            <a:ext cx="3794760" cy="2331720"/>
+          </a:xfrm>
+          <a:prstGeom prst="rect">
+            <a:avLst/>
+          </a:prstGeom>
+        </p:spPr>
+      </p:pic>
       <p:sp>
         <p:nvSpPr>
           <p:cNvPr id="11" name="TextBox 10"/>
@@ -14195,142 +15101,56 @@
         </p:nvSpPr>
         <p:spPr>
           <a:xfrm>
-            <a:off x="6355080" y="1508760"/>
-            <a:ext cx="5212080" cy="3794760"/>
-          </a:xfrm>
-          <a:prstGeom prst="rect">
-            <a:avLst/>
-          </a:prstGeom>
-          <a:noFill/>
-        </p:spPr>
-        <p:txBody>
-          <a:bodyPr wrap="square">
-            <a:spAutoFit/>
-          </a:bodyPr>
-          <a:lstStyle/>
-          <a:p>
-            <a:pPr>
-              <a:spcAft>
-                <a:spcPts val="400"/>
-              </a:spcAft>
-            </a:pPr>
-            <a:r>
-              <a:rPr sz="1100" b="0">
-                <a:solidFill>
-                  <a:srgbClr val="333333"/>
-                </a:solidFill>
-              </a:rPr>
-              <a:t>•  200-post gold set is small.  Numbers are OOF-CV, but a bigger blind held-out set is needed before I'd claim generalisation.</a:t>
-            </a:r>
-          </a:p>
-          <a:p>
-            <a:pPr>
-              <a:spcAft>
-                <a:spcPts val="400"/>
-              </a:spcAft>
-            </a:pPr>
-            <a:r>
-              <a:rPr sz="1100" b="0">
-                <a:solidFill>
-                  <a:srgbClr val="333333"/>
-                </a:solidFill>
-              </a:rPr>
-              <a:t>•  Vision eval is 32 images  —  enough to sanity-check the mechanism, not enough to claim production-grade quality.</a:t>
-            </a:r>
-          </a:p>
-          <a:p>
-            <a:pPr>
-              <a:spcAft>
-                <a:spcPts val="400"/>
-              </a:spcAft>
-            </a:pPr>
-            <a:r>
-              <a:rPr sz="1100" b="0">
-                <a:solidFill>
-                  <a:srgbClr val="333333"/>
-                </a:solidFill>
-              </a:rPr>
-              <a:t>•  Long bucket has only 7 posts and they are all negative-class  —  7/7 correct is evidence the truncation ceiling is gone, not proof of long-text mastery.</a:t>
-            </a:r>
-          </a:p>
-          <a:p>
-            <a:pPr>
-              <a:spcAft>
-                <a:spcPts val="400"/>
-              </a:spcAft>
-            </a:pPr>
-            <a:r>
-              <a:rPr sz="1100" b="0">
-                <a:solidFill>
-                  <a:srgbClr val="333333"/>
-                </a:solidFill>
-              </a:rPr>
-              <a:t>•  Reply drafts still need an analyst edit  —  we track edit-distance but haven't shown it dropping consistently yet.</a:t>
-            </a:r>
-          </a:p>
-          <a:p>
-            <a:pPr>
-              <a:spcAft>
-                <a:spcPts val="400"/>
-              </a:spcAft>
-            </a:pPr>
-            <a:r>
-              <a:rPr sz="1100" b="0">
-                <a:solidFill>
-                  <a:srgbClr val="333333"/>
-                </a:solidFill>
-              </a:rPr>
-              <a:t>•  Everything runs on one Mac. Multi-analyst concurrency and retraining automation aren't done  —  in the roadmap on next slide.</a:t>
-            </a:r>
-          </a:p>
-        </p:txBody>
-      </p:sp>
-      <p:sp>
-        <p:nvSpPr>
-          <p:cNvPr id="12" name="Rectangle 11"/>
-          <p:cNvSpPr/>
-          <p:nvPr/>
-        </p:nvSpPr>
-        <p:spPr>
-          <a:xfrm>
-            <a:off x="457200" y="5577840"/>
-            <a:ext cx="11247120" cy="822960"/>
-          </a:xfrm>
-          <a:prstGeom prst="rect">
-            <a:avLst/>
-          </a:prstGeom>
-          <a:solidFill>
-            <a:srgbClr val="E8F4FD"/>
-          </a:solidFill>
-          <a:ln>
-            <a:solidFill>
-              <a:srgbClr val="0071DC"/>
-            </a:solidFill>
-          </a:ln>
-          <a:effectLst/>
-        </p:spPr>
-        <p:style>
-          <a:lnRef idx="1">
-            <a:schemeClr val="accent1"/>
-          </a:lnRef>
-          <a:fillRef idx="3">
-            <a:schemeClr val="accent1"/>
-          </a:fillRef>
-          <a:effectRef idx="2">
-            <a:schemeClr val="accent1"/>
-          </a:effectRef>
-          <a:fontRef idx="minor">
-            <a:schemeClr val="lt1"/>
-          </a:fontRef>
-        </p:style>
-        <p:txBody>
-          <a:bodyPr rtlCol="0" anchor="ctr"/>
-          <a:lstStyle/>
-          <a:p>
-            <a:pPr algn="ctr"/>
-          </a:p>
-        </p:txBody>
-      </p:sp>
+            <a:off x="8092440" y="3310128"/>
+            <a:ext cx="3794760" cy="228600"/>
+          </a:xfrm>
+          <a:prstGeom prst="rect">
+            <a:avLst/>
+          </a:prstGeom>
+          <a:noFill/>
+        </p:spPr>
+        <p:txBody>
+          <a:bodyPr wrap="square" anchor="t">
+            <a:spAutoFit/>
+          </a:bodyPr>
+          <a:lstStyle/>
+          <a:p>
+            <a:pPr algn="ctr"/>
+            <a:r>
+              <a:rPr sz="1100" b="1" i="0">
+                <a:solidFill>
+                  <a:srgbClr val="041E42"/>
+                </a:solidFill>
+              </a:rPr>
+              <a:t>Post Explorer</a:t>
+            </a:r>
+          </a:p>
+        </p:txBody>
+      </p:sp>
+      <p:pic>
+        <p:nvPicPr>
+          <p:cNvPr id="12" name="Picture 11" descr="review_validate.png"/>
+          <p:cNvPicPr>
+            <a:picLocks noChangeAspect="1"/>
+          </p:cNvPicPr>
+          <p:nvPr/>
+        </p:nvPicPr>
+        <p:blipFill>
+          <a:blip r:embed="rId5"/>
+          <a:stretch>
+            <a:fillRect/>
+          </a:stretch>
+        </p:blipFill>
+        <p:spPr>
+          <a:xfrm>
+            <a:off x="320040" y="3566160"/>
+            <a:ext cx="3794760" cy="2331720"/>
+          </a:xfrm>
+          <a:prstGeom prst="rect">
+            <a:avLst/>
+          </a:prstGeom>
+        </p:spPr>
+      </p:pic>
       <p:sp>
         <p:nvSpPr>
           <p:cNvPr id="13" name="TextBox 12"/>
@@ -14339,69 +15159,151 @@
         </p:nvSpPr>
         <p:spPr>
           <a:xfrm>
-            <a:off x="640080" y="5669280"/>
-            <a:ext cx="10972800" cy="320040"/>
-          </a:xfrm>
-          <a:prstGeom prst="rect">
-            <a:avLst/>
-          </a:prstGeom>
-          <a:noFill/>
-        </p:spPr>
-        <p:txBody>
-          <a:bodyPr wrap="square" anchor="t">
-            <a:spAutoFit/>
-          </a:bodyPr>
-          <a:lstStyle/>
-          <a:p>
-            <a:pPr algn="l"/>
+            <a:off x="320040" y="5916168"/>
+            <a:ext cx="3794760" cy="228600"/>
+          </a:xfrm>
+          <a:prstGeom prst="rect">
+            <a:avLst/>
+          </a:prstGeom>
+          <a:noFill/>
+        </p:spPr>
+        <p:txBody>
+          <a:bodyPr wrap="square" anchor="t">
+            <a:spAutoFit/>
+          </a:bodyPr>
+          <a:lstStyle/>
+          <a:p>
+            <a:pPr algn="ctr"/>
             <a:r>
               <a:rPr sz="1100" b="1" i="0">
                 <a:solidFill>
-                  <a:srgbClr val="0071DC"/>
-                </a:solidFill>
-              </a:rPr>
-              <a:t>THE TAKEAWAY</a:t>
-            </a:r>
-          </a:p>
-        </p:txBody>
-      </p:sp>
-      <p:sp>
-        <p:nvSpPr>
-          <p:cNvPr id="14" name="TextBox 13"/>
-          <p:cNvSpPr txBox="1"/>
-          <p:nvPr/>
-        </p:nvSpPr>
-        <p:spPr>
-          <a:xfrm>
-            <a:off x="640080" y="5989320"/>
-            <a:ext cx="10972800" cy="365760"/>
-          </a:xfrm>
-          <a:prstGeom prst="rect">
-            <a:avLst/>
-          </a:prstGeom>
-          <a:noFill/>
-        </p:spPr>
-        <p:txBody>
-          <a:bodyPr wrap="square" anchor="t">
-            <a:spAutoFit/>
-          </a:bodyPr>
-          <a:lstStyle/>
-          <a:p>
-            <a:pPr algn="l"/>
-            <a:r>
-              <a:rPr sz="1100" b="0" i="0">
-                <a:solidFill>
-                  <a:srgbClr val="333333"/>
-                </a:solidFill>
-              </a:rPr>
-              <a:t>Mechanism-level wins are what carry the argument; sample-size caveats are what the next horizon of work has to close.</a:t>
-            </a:r>
-          </a:p>
-        </p:txBody>
-      </p:sp>
+                  <a:srgbClr val="041E42"/>
+                </a:solidFill>
+              </a:rPr>
+              <a:t>Review &amp; Validate</a:t>
+            </a:r>
+          </a:p>
+        </p:txBody>
+      </p:sp>
+      <p:pic>
+        <p:nvPicPr>
+          <p:cNvPr id="14" name="Picture 13" descr="lifecycle_kanban.png"/>
+          <p:cNvPicPr>
+            <a:picLocks noChangeAspect="1"/>
+          </p:cNvPicPr>
+          <p:nvPr/>
+        </p:nvPicPr>
+        <p:blipFill>
+          <a:blip r:embed="rId6"/>
+          <a:stretch>
+            <a:fillRect/>
+          </a:stretch>
+        </p:blipFill>
+        <p:spPr>
+          <a:xfrm>
+            <a:off x="4206240" y="3566160"/>
+            <a:ext cx="3794760" cy="2331720"/>
+          </a:xfrm>
+          <a:prstGeom prst="rect">
+            <a:avLst/>
+          </a:prstGeom>
+        </p:spPr>
+      </p:pic>
       <p:sp>
         <p:nvSpPr>
           <p:cNvPr id="15" name="TextBox 14"/>
+          <p:cNvSpPr txBox="1"/>
+          <p:nvPr/>
+        </p:nvSpPr>
+        <p:spPr>
+          <a:xfrm>
+            <a:off x="4206240" y="5916168"/>
+            <a:ext cx="3794760" cy="228600"/>
+          </a:xfrm>
+          <a:prstGeom prst="rect">
+            <a:avLst/>
+          </a:prstGeom>
+          <a:noFill/>
+        </p:spPr>
+        <p:txBody>
+          <a:bodyPr wrap="square" anchor="t">
+            <a:spAutoFit/>
+          </a:bodyPr>
+          <a:lstStyle/>
+          <a:p>
+            <a:pPr algn="ctr"/>
+            <a:r>
+              <a:rPr sz="1100" b="1" i="0">
+                <a:solidFill>
+                  <a:srgbClr val="041E42"/>
+                </a:solidFill>
+              </a:rPr>
+              <a:t>Lifecycle Kanban</a:t>
+            </a:r>
+          </a:p>
+        </p:txBody>
+      </p:sp>
+      <p:pic>
+        <p:nvPicPr>
+          <p:cNvPr id="16" name="Picture 15" descr="insights_competitor.png"/>
+          <p:cNvPicPr>
+            <a:picLocks noChangeAspect="1"/>
+          </p:cNvPicPr>
+          <p:nvPr/>
+        </p:nvPicPr>
+        <p:blipFill>
+          <a:blip r:embed="rId7"/>
+          <a:stretch>
+            <a:fillRect/>
+          </a:stretch>
+        </p:blipFill>
+        <p:spPr>
+          <a:xfrm>
+            <a:off x="8092440" y="3566160"/>
+            <a:ext cx="3794760" cy="2331720"/>
+          </a:xfrm>
+          <a:prstGeom prst="rect">
+            <a:avLst/>
+          </a:prstGeom>
+        </p:spPr>
+      </p:pic>
+      <p:sp>
+        <p:nvSpPr>
+          <p:cNvPr id="17" name="TextBox 16"/>
+          <p:cNvSpPr txBox="1"/>
+          <p:nvPr/>
+        </p:nvSpPr>
+        <p:spPr>
+          <a:xfrm>
+            <a:off x="8092440" y="5916168"/>
+            <a:ext cx="3794760" cy="228600"/>
+          </a:xfrm>
+          <a:prstGeom prst="rect">
+            <a:avLst/>
+          </a:prstGeom>
+          <a:noFill/>
+        </p:spPr>
+        <p:txBody>
+          <a:bodyPr wrap="square" anchor="t">
+            <a:spAutoFit/>
+          </a:bodyPr>
+          <a:lstStyle/>
+          <a:p>
+            <a:pPr algn="ctr"/>
+            <a:r>
+              <a:rPr sz="1100" b="1" i="0">
+                <a:solidFill>
+                  <a:srgbClr val="041E42"/>
+                </a:solidFill>
+              </a:rPr>
+              <a:t>Insights</a:t>
+            </a:r>
+          </a:p>
+        </p:txBody>
+      </p:sp>
+      <p:sp>
+        <p:nvSpPr>
+          <p:cNvPr id="18" name="TextBox 17"/>
           <p:cNvSpPr txBox="1"/>
           <p:nvPr/>
         </p:nvSpPr>
@@ -14435,7 +15337,7 @@
       </p:sp>
       <p:sp>
         <p:nvSpPr>
-          <p:cNvPr id="16" name="TextBox 15"/>
+          <p:cNvPr id="19" name="TextBox 18"/>
           <p:cNvSpPr txBox="1"/>
           <p:nvPr/>
         </p:nvSpPr>
@@ -14462,7 +15364,7 @@
                   <a:srgbClr val="666666"/>
                 </a:solidFill>
               </a:rPr>
-              <a:t>19 / 23</a:t>
+              <a:t>19 / 24</a:t>
             </a:r>
           </a:p>
         </p:txBody>
@@ -16924,7 +17826,7 @@
                   <a:srgbClr val="666666"/>
                 </a:solidFill>
               </a:rPr>
-              <a:t>2 / 23</a:t>
+              <a:t>2 / 24</a:t>
             </a:r>
           </a:p>
         </p:txBody>
@@ -17020,7 +17922,7 @@
                   <a:srgbClr val="FFFFFF"/>
                 </a:solidFill>
               </a:rPr>
-              <a:t>Future Work  —  Track 1  ·  HITL Reduction (4 Horizons)</a:t>
+              <a:t>Conclusions  —  What Worked, What's Still Open</a:t>
             </a:r>
           </a:p>
         </p:txBody>
@@ -17054,7 +17956,7 @@
                   <a:srgbClr val="E8F4FD"/>
                 </a:solidFill>
               </a:rPr>
-              <a:t>One of three tracks:  Track 1 HITL  ·  Track 2 Bilingual  ·  Track 3 Multi-Platform  (Tracks 2 &amp; 3 on next slide)</a:t>
+              <a:t>Honest read on 5 months of post-midsem work</a:t>
             </a:r>
           </a:p>
         </p:txBody>
@@ -17112,13 +18014,13 @@
         <p:spPr>
           <a:xfrm>
             <a:off x="457200" y="960120"/>
-            <a:ext cx="11247120" cy="1051560"/>
+            <a:ext cx="5532120" cy="4480560"/>
           </a:xfrm>
           <a:prstGeom prst="rect">
             <a:avLst/>
           </a:prstGeom>
           <a:solidFill>
-            <a:srgbClr val="F5F5F5"/>
+            <a:srgbClr val="DCFCE7"/>
           </a:solidFill>
           <a:ln>
             <a:solidFill>
@@ -17151,652 +18053,152 @@
       </p:sp>
       <p:sp>
         <p:nvSpPr>
-          <p:cNvPr id="7" name="Rectangle 6"/>
+          <p:cNvPr id="7" name="TextBox 6"/>
+          <p:cNvSpPr txBox="1"/>
+          <p:nvPr/>
+        </p:nvSpPr>
+        <p:spPr>
+          <a:xfrm>
+            <a:off x="640080" y="1097280"/>
+            <a:ext cx="5212080" cy="365760"/>
+          </a:xfrm>
+          <a:prstGeom prst="rect">
+            <a:avLst/>
+          </a:prstGeom>
+          <a:noFill/>
+        </p:spPr>
+        <p:txBody>
+          <a:bodyPr wrap="square" anchor="t">
+            <a:spAutoFit/>
+          </a:bodyPr>
+          <a:lstStyle/>
+          <a:p>
+            <a:pPr algn="l"/>
+            <a:r>
+              <a:rPr sz="1300" b="1" i="0">
+                <a:solidFill>
+                  <a:srgbClr val="10B981"/>
+                </a:solidFill>
+              </a:rPr>
+              <a:t>WHAT WORKED</a:t>
+            </a:r>
+          </a:p>
+        </p:txBody>
+      </p:sp>
+      <p:sp>
+        <p:nvSpPr>
+          <p:cNvPr id="8" name="TextBox 7"/>
+          <p:cNvSpPr txBox="1"/>
+          <p:nvPr/>
+        </p:nvSpPr>
+        <p:spPr>
+          <a:xfrm>
+            <a:off x="640080" y="1508760"/>
+            <a:ext cx="5212080" cy="3794760"/>
+          </a:xfrm>
+          <a:prstGeom prst="rect">
+            <a:avLst/>
+          </a:prstGeom>
+          <a:noFill/>
+        </p:spPr>
+        <p:txBody>
+          <a:bodyPr wrap="square">
+            <a:spAutoFit/>
+          </a:bodyPr>
+          <a:lstStyle/>
+          <a:p>
+            <a:pPr>
+              <a:spcAft>
+                <a:spcPts val="400"/>
+              </a:spcAft>
+            </a:pPr>
+            <a:r>
+              <a:rPr sz="1100" b="0">
+                <a:solidFill>
+                  <a:srgbClr val="333333"/>
+                </a:solidFill>
+              </a:rPr>
+              <a:t>•  3-stage ModernBERT curriculum landed the sentiment win we set out for  (Macro-F1 0.62 → 0.76 on 5-fold OOF).</a:t>
+            </a:r>
+          </a:p>
+          <a:p>
+            <a:pPr>
+              <a:spcAft>
+                <a:spcPts val="400"/>
+              </a:spcAft>
+            </a:pPr>
+            <a:r>
+              <a:rPr sz="1100" b="0">
+                <a:solidFill>
+                  <a:srgbClr val="333333"/>
+                </a:solidFill>
+              </a:rPr>
+              <a:t>•  Long-post recovery came for free once we switched off truncation  (≥1024-tok context):  5/7 → 7/7 correct on the ≥ 512-tok bucket.</a:t>
+            </a:r>
+          </a:p>
+          <a:p>
+            <a:pPr>
+              <a:spcAft>
+                <a:spcPts val="400"/>
+              </a:spcAft>
+            </a:pPr>
+            <a:r>
+              <a:rPr sz="1100" b="0">
+                <a:solidFill>
+                  <a:srgbClr val="333333"/>
+                </a:solidFill>
+              </a:rPr>
+              <a:t>•  Removing the image on the final vision merge step ended the 50 % hallucination problem — the mechanism, not just the number, makes it credible.</a:t>
+            </a:r>
+          </a:p>
+          <a:p>
+            <a:pPr>
+              <a:spcAft>
+                <a:spcPts val="400"/>
+              </a:spcAft>
+            </a:pPr>
+            <a:r>
+              <a:rPr sz="1100" b="0">
+                <a:solidFill>
+                  <a:srgbClr val="333333"/>
+                </a:solidFill>
+              </a:rPr>
+              <a:t>•  Trust score as flag-not-drop  matched the human annotator on 12 / 15 low-trust posts. Analysts trust it because they can override it.</a:t>
+            </a:r>
+          </a:p>
+          <a:p>
+            <a:pPr>
+              <a:spcAft>
+                <a:spcPts val="400"/>
+              </a:spcAft>
+            </a:pPr>
+            <a:r>
+              <a:rPr sz="1100" b="0">
+                <a:solidFill>
+                  <a:srgbClr val="333333"/>
+                </a:solidFill>
+              </a:rPr>
+              <a:t>•  HITL feedback table quietly turned into the most useful piece of infrastructure — drives few-shot on every click today, retraining tomorrow.</a:t>
+            </a:r>
+          </a:p>
+        </p:txBody>
+      </p:sp>
+      <p:sp>
+        <p:nvSpPr>
+          <p:cNvPr id="9" name="Rectangle 8"/>
           <p:cNvSpPr/>
           <p:nvPr/>
         </p:nvSpPr>
         <p:spPr>
           <a:xfrm>
-            <a:off x="457200" y="960120"/>
-            <a:ext cx="1600200" cy="1051560"/>
+            <a:off x="6172200" y="960120"/>
+            <a:ext cx="5532120" cy="4480560"/>
           </a:xfrm>
           <a:prstGeom prst="rect">
             <a:avLst/>
           </a:prstGeom>
           <a:solidFill>
-            <a:srgbClr val="10B981"/>
-          </a:solidFill>
-          <a:ln>
-            <a:noFill/>
-          </a:ln>
-          <a:effectLst/>
-        </p:spPr>
-        <p:style>
-          <a:lnRef idx="1">
-            <a:schemeClr val="accent1"/>
-          </a:lnRef>
-          <a:fillRef idx="3">
-            <a:schemeClr val="accent1"/>
-          </a:fillRef>
-          <a:effectRef idx="2">
-            <a:schemeClr val="accent1"/>
-          </a:effectRef>
-          <a:fontRef idx="minor">
-            <a:schemeClr val="lt1"/>
-          </a:fontRef>
-        </p:style>
-        <p:txBody>
-          <a:bodyPr rtlCol="0" anchor="ctr"/>
-          <a:lstStyle/>
-          <a:p>
-            <a:pPr algn="ctr"/>
-          </a:p>
-        </p:txBody>
-      </p:sp>
-      <p:sp>
-        <p:nvSpPr>
-          <p:cNvPr id="8" name="TextBox 7"/>
-          <p:cNvSpPr txBox="1"/>
-          <p:nvPr/>
-        </p:nvSpPr>
-        <p:spPr>
-          <a:xfrm>
-            <a:off x="457200" y="1106424"/>
-            <a:ext cx="1600200" cy="365760"/>
-          </a:xfrm>
-          <a:prstGeom prst="rect">
-            <a:avLst/>
-          </a:prstGeom>
-          <a:noFill/>
-        </p:spPr>
-        <p:txBody>
-          <a:bodyPr wrap="square" anchor="t">
-            <a:spAutoFit/>
-          </a:bodyPr>
-          <a:lstStyle/>
-          <a:p>
-            <a:pPr algn="ctr"/>
-            <a:r>
-              <a:rPr sz="1100" b="1" i="0">
-                <a:solidFill>
-                  <a:srgbClr val="FFFFFF"/>
-                </a:solidFill>
-              </a:rPr>
-              <a:t>Now → 1 month</a:t>
-            </a:r>
-          </a:p>
-        </p:txBody>
-      </p:sp>
-      <p:sp>
-        <p:nvSpPr>
-          <p:cNvPr id="9" name="TextBox 8"/>
-          <p:cNvSpPr txBox="1"/>
-          <p:nvPr/>
-        </p:nvSpPr>
-        <p:spPr>
-          <a:xfrm>
-            <a:off x="457200" y="1463040"/>
-            <a:ext cx="1600200" cy="457200"/>
-          </a:xfrm>
-          <a:prstGeom prst="rect">
-            <a:avLst/>
-          </a:prstGeom>
-          <a:noFill/>
-        </p:spPr>
-        <p:txBody>
-          <a:bodyPr wrap="square" anchor="t">
-            <a:spAutoFit/>
-          </a:bodyPr>
-          <a:lstStyle/>
-          <a:p>
-            <a:pPr algn="ctr"/>
-            <a:r>
-              <a:rPr sz="1000" b="0" i="0">
-                <a:solidFill>
-                  <a:srgbClr val="FFFFFF"/>
-                </a:solidFill>
-              </a:rPr>
-              <a:t>HITL: 100 %</a:t>
-            </a:r>
-          </a:p>
-        </p:txBody>
-      </p:sp>
-      <p:sp>
-        <p:nvSpPr>
-          <p:cNvPr id="10" name="TextBox 9"/>
-          <p:cNvSpPr txBox="1"/>
-          <p:nvPr/>
-        </p:nvSpPr>
-        <p:spPr>
-          <a:xfrm>
-            <a:off x="2194560" y="1051560"/>
-            <a:ext cx="9326880" cy="365760"/>
-          </a:xfrm>
-          <a:prstGeom prst="rect">
-            <a:avLst/>
-          </a:prstGeom>
-          <a:noFill/>
-        </p:spPr>
-        <p:txBody>
-          <a:bodyPr wrap="square" anchor="t">
-            <a:spAutoFit/>
-          </a:bodyPr>
-          <a:lstStyle/>
-          <a:p>
-            <a:pPr algn="l"/>
-            <a:r>
-              <a:rPr sz="1400" b="1" i="0">
-                <a:solidFill>
-                  <a:srgbClr val="041E42"/>
-                </a:solidFill>
-              </a:rPr>
-              <a:t>Grow the gold set</a:t>
-            </a:r>
-          </a:p>
-        </p:txBody>
-      </p:sp>
-      <p:sp>
-        <p:nvSpPr>
-          <p:cNvPr id="11" name="TextBox 10"/>
-          <p:cNvSpPr txBox="1"/>
-          <p:nvPr/>
-        </p:nvSpPr>
-        <p:spPr>
-          <a:xfrm>
-            <a:off x="2194560" y="1417320"/>
-            <a:ext cx="9326880" cy="594360"/>
-          </a:xfrm>
-          <a:prstGeom prst="rect">
-            <a:avLst/>
-          </a:prstGeom>
-          <a:noFill/>
-        </p:spPr>
-        <p:txBody>
-          <a:bodyPr wrap="square" anchor="t">
-            <a:spAutoFit/>
-          </a:bodyPr>
-          <a:lstStyle/>
-          <a:p>
-            <a:pPr algn="l"/>
-            <a:r>
-              <a:rPr sz="1050" b="0" i="0">
-                <a:solidFill>
-                  <a:srgbClr val="333333"/>
-                </a:solidFill>
-              </a:rPr>
-              <a:t>Grow the labelled gold set to ~500 posts using the HITL feedback the team is already producing; rerun 5-fold OOF to check the F1 delta.</a:t>
-            </a:r>
-          </a:p>
-        </p:txBody>
-      </p:sp>
-      <p:sp>
-        <p:nvSpPr>
-          <p:cNvPr id="12" name="Rectangle 11"/>
-          <p:cNvSpPr/>
-          <p:nvPr/>
-        </p:nvSpPr>
-        <p:spPr>
-          <a:xfrm>
-            <a:off x="457200" y="2093976"/>
-            <a:ext cx="11247120" cy="1051560"/>
-          </a:xfrm>
-          <a:prstGeom prst="rect">
-            <a:avLst/>
-          </a:prstGeom>
-          <a:solidFill>
-            <a:srgbClr val="F5F5F5"/>
-          </a:solidFill>
-          <a:ln>
-            <a:solidFill>
-              <a:srgbClr val="0071DC"/>
-            </a:solidFill>
-          </a:ln>
-          <a:effectLst/>
-        </p:spPr>
-        <p:style>
-          <a:lnRef idx="1">
-            <a:schemeClr val="accent1"/>
-          </a:lnRef>
-          <a:fillRef idx="3">
-            <a:schemeClr val="accent1"/>
-          </a:fillRef>
-          <a:effectRef idx="2">
-            <a:schemeClr val="accent1"/>
-          </a:effectRef>
-          <a:fontRef idx="minor">
-            <a:schemeClr val="lt1"/>
-          </a:fontRef>
-        </p:style>
-        <p:txBody>
-          <a:bodyPr rtlCol="0" anchor="ctr"/>
-          <a:lstStyle/>
-          <a:p>
-            <a:pPr algn="ctr"/>
-          </a:p>
-        </p:txBody>
-      </p:sp>
-      <p:sp>
-        <p:nvSpPr>
-          <p:cNvPr id="13" name="Rectangle 12"/>
-          <p:cNvSpPr/>
-          <p:nvPr/>
-        </p:nvSpPr>
-        <p:spPr>
-          <a:xfrm>
-            <a:off x="457200" y="2093976"/>
-            <a:ext cx="1600200" cy="1051560"/>
-          </a:xfrm>
-          <a:prstGeom prst="rect">
-            <a:avLst/>
-          </a:prstGeom>
-          <a:solidFill>
-            <a:srgbClr val="0071DC"/>
-          </a:solidFill>
-          <a:ln>
-            <a:noFill/>
-          </a:ln>
-          <a:effectLst/>
-        </p:spPr>
-        <p:style>
-          <a:lnRef idx="1">
-            <a:schemeClr val="accent1"/>
-          </a:lnRef>
-          <a:fillRef idx="3">
-            <a:schemeClr val="accent1"/>
-          </a:fillRef>
-          <a:effectRef idx="2">
-            <a:schemeClr val="accent1"/>
-          </a:effectRef>
-          <a:fontRef idx="minor">
-            <a:schemeClr val="lt1"/>
-          </a:fontRef>
-        </p:style>
-        <p:txBody>
-          <a:bodyPr rtlCol="0" anchor="ctr"/>
-          <a:lstStyle/>
-          <a:p>
-            <a:pPr algn="ctr"/>
-          </a:p>
-        </p:txBody>
-      </p:sp>
-      <p:sp>
-        <p:nvSpPr>
-          <p:cNvPr id="14" name="TextBox 13"/>
-          <p:cNvSpPr txBox="1"/>
-          <p:nvPr/>
-        </p:nvSpPr>
-        <p:spPr>
-          <a:xfrm>
-            <a:off x="457200" y="2240280"/>
-            <a:ext cx="1600200" cy="365760"/>
-          </a:xfrm>
-          <a:prstGeom prst="rect">
-            <a:avLst/>
-          </a:prstGeom>
-          <a:noFill/>
-        </p:spPr>
-        <p:txBody>
-          <a:bodyPr wrap="square" anchor="t">
-            <a:spAutoFit/>
-          </a:bodyPr>
-          <a:lstStyle/>
-          <a:p>
-            <a:pPr algn="ctr"/>
-            <a:r>
-              <a:rPr sz="1100" b="1" i="0">
-                <a:solidFill>
-                  <a:srgbClr val="FFFFFF"/>
-                </a:solidFill>
-              </a:rPr>
-              <a:t>1 → 3 months</a:t>
-            </a:r>
-          </a:p>
-        </p:txBody>
-      </p:sp>
-      <p:sp>
-        <p:nvSpPr>
-          <p:cNvPr id="15" name="TextBox 14"/>
-          <p:cNvSpPr txBox="1"/>
-          <p:nvPr/>
-        </p:nvSpPr>
-        <p:spPr>
-          <a:xfrm>
-            <a:off x="457200" y="2596896"/>
-            <a:ext cx="1600200" cy="457200"/>
-          </a:xfrm>
-          <a:prstGeom prst="rect">
-            <a:avLst/>
-          </a:prstGeom>
-          <a:noFill/>
-        </p:spPr>
-        <p:txBody>
-          <a:bodyPr wrap="square" anchor="t">
-            <a:spAutoFit/>
-          </a:bodyPr>
-          <a:lstStyle/>
-          <a:p>
-            <a:pPr algn="ctr"/>
-            <a:r>
-              <a:rPr sz="1000" b="0" i="0">
-                <a:solidFill>
-                  <a:srgbClr val="FFFFFF"/>
-                </a:solidFill>
-              </a:rPr>
-              <a:t>HITL: 100 %</a:t>
-            </a:r>
-          </a:p>
-        </p:txBody>
-      </p:sp>
-      <p:sp>
-        <p:nvSpPr>
-          <p:cNvPr id="16" name="TextBox 15"/>
-          <p:cNvSpPr txBox="1"/>
-          <p:nvPr/>
-        </p:nvSpPr>
-        <p:spPr>
-          <a:xfrm>
-            <a:off x="2194560" y="2185416"/>
-            <a:ext cx="9326880" cy="365760"/>
-          </a:xfrm>
-          <a:prstGeom prst="rect">
-            <a:avLst/>
-          </a:prstGeom>
-          <a:noFill/>
-        </p:spPr>
-        <p:txBody>
-          <a:bodyPr wrap="square" anchor="t">
-            <a:spAutoFit/>
-          </a:bodyPr>
-          <a:lstStyle/>
-          <a:p>
-            <a:pPr algn="l"/>
-            <a:r>
-              <a:rPr sz="1400" b="1" i="0">
-                <a:solidFill>
-                  <a:srgbClr val="041E42"/>
-                </a:solidFill>
-              </a:rPr>
-              <a:t>Automate the retrain loop</a:t>
-            </a:r>
-          </a:p>
-        </p:txBody>
-      </p:sp>
-      <p:sp>
-        <p:nvSpPr>
-          <p:cNvPr id="17" name="TextBox 16"/>
-          <p:cNvSpPr txBox="1"/>
-          <p:nvPr/>
-        </p:nvSpPr>
-        <p:spPr>
-          <a:xfrm>
-            <a:off x="2194560" y="2551176"/>
-            <a:ext cx="9326880" cy="594360"/>
-          </a:xfrm>
-          <a:prstGeom prst="rect">
-            <a:avLst/>
-          </a:prstGeom>
-          <a:noFill/>
-        </p:spPr>
-        <p:txBody>
-          <a:bodyPr wrap="square" anchor="t">
-            <a:spAutoFit/>
-          </a:bodyPr>
-          <a:lstStyle/>
-          <a:p>
-            <a:pPr algn="l"/>
-            <a:r>
-              <a:rPr sz="1050" b="0" i="0">
-                <a:solidFill>
-                  <a:srgbClr val="333333"/>
-                </a:solidFill>
-              </a:rPr>
-              <a:t>Wire the monthly ModernBERT retrain into a Cron / Airflow job with an OOF-F1 promotion gate — new checkpoints ship only when they beat the current one on held-out folds.</a:t>
-            </a:r>
-          </a:p>
-        </p:txBody>
-      </p:sp>
-      <p:sp>
-        <p:nvSpPr>
-          <p:cNvPr id="18" name="Rectangle 17"/>
-          <p:cNvSpPr/>
-          <p:nvPr/>
-        </p:nvSpPr>
-        <p:spPr>
-          <a:xfrm>
-            <a:off x="457200" y="3227832"/>
-            <a:ext cx="11247120" cy="1051560"/>
-          </a:xfrm>
-          <a:prstGeom prst="rect">
-            <a:avLst/>
-          </a:prstGeom>
-          <a:solidFill>
-            <a:srgbClr val="F5F5F5"/>
-          </a:solidFill>
-          <a:ln>
-            <a:solidFill>
-              <a:srgbClr val="7C3AED"/>
-            </a:solidFill>
-          </a:ln>
-          <a:effectLst/>
-        </p:spPr>
-        <p:style>
-          <a:lnRef idx="1">
-            <a:schemeClr val="accent1"/>
-          </a:lnRef>
-          <a:fillRef idx="3">
-            <a:schemeClr val="accent1"/>
-          </a:fillRef>
-          <a:effectRef idx="2">
-            <a:schemeClr val="accent1"/>
-          </a:effectRef>
-          <a:fontRef idx="minor">
-            <a:schemeClr val="lt1"/>
-          </a:fontRef>
-        </p:style>
-        <p:txBody>
-          <a:bodyPr rtlCol="0" anchor="ctr"/>
-          <a:lstStyle/>
-          <a:p>
-            <a:pPr algn="ctr"/>
-          </a:p>
-        </p:txBody>
-      </p:sp>
-      <p:sp>
-        <p:nvSpPr>
-          <p:cNvPr id="19" name="Rectangle 18"/>
-          <p:cNvSpPr/>
-          <p:nvPr/>
-        </p:nvSpPr>
-        <p:spPr>
-          <a:xfrm>
-            <a:off x="457200" y="3227832"/>
-            <a:ext cx="1600200" cy="1051560"/>
-          </a:xfrm>
-          <a:prstGeom prst="rect">
-            <a:avLst/>
-          </a:prstGeom>
-          <a:solidFill>
-            <a:srgbClr val="7C3AED"/>
-          </a:solidFill>
-          <a:ln>
-            <a:noFill/>
-          </a:ln>
-          <a:effectLst/>
-        </p:spPr>
-        <p:style>
-          <a:lnRef idx="1">
-            <a:schemeClr val="accent1"/>
-          </a:lnRef>
-          <a:fillRef idx="3">
-            <a:schemeClr val="accent1"/>
-          </a:fillRef>
-          <a:effectRef idx="2">
-            <a:schemeClr val="accent1"/>
-          </a:effectRef>
-          <a:fontRef idx="minor">
-            <a:schemeClr val="lt1"/>
-          </a:fontRef>
-        </p:style>
-        <p:txBody>
-          <a:bodyPr rtlCol="0" anchor="ctr"/>
-          <a:lstStyle/>
-          <a:p>
-            <a:pPr algn="ctr"/>
-          </a:p>
-        </p:txBody>
-      </p:sp>
-      <p:sp>
-        <p:nvSpPr>
-          <p:cNvPr id="20" name="TextBox 19"/>
-          <p:cNvSpPr txBox="1"/>
-          <p:nvPr/>
-        </p:nvSpPr>
-        <p:spPr>
-          <a:xfrm>
-            <a:off x="457200" y="3374136"/>
-            <a:ext cx="1600200" cy="365760"/>
-          </a:xfrm>
-          <a:prstGeom prst="rect">
-            <a:avLst/>
-          </a:prstGeom>
-          <a:noFill/>
-        </p:spPr>
-        <p:txBody>
-          <a:bodyPr wrap="square" anchor="t">
-            <a:spAutoFit/>
-          </a:bodyPr>
-          <a:lstStyle/>
-          <a:p>
-            <a:pPr algn="ctr"/>
-            <a:r>
-              <a:rPr sz="1100" b="1" i="0">
-                <a:solidFill>
-                  <a:srgbClr val="FFFFFF"/>
-                </a:solidFill>
-              </a:rPr>
-              <a:t>3 → 6 months</a:t>
-            </a:r>
-          </a:p>
-        </p:txBody>
-      </p:sp>
-      <p:sp>
-        <p:nvSpPr>
-          <p:cNvPr id="21" name="TextBox 20"/>
-          <p:cNvSpPr txBox="1"/>
-          <p:nvPr/>
-        </p:nvSpPr>
-        <p:spPr>
-          <a:xfrm>
-            <a:off x="457200" y="3730752"/>
-            <a:ext cx="1600200" cy="457200"/>
-          </a:xfrm>
-          <a:prstGeom prst="rect">
-            <a:avLst/>
-          </a:prstGeom>
-          <a:noFill/>
-        </p:spPr>
-        <p:txBody>
-          <a:bodyPr wrap="square" anchor="t">
-            <a:spAutoFit/>
-          </a:bodyPr>
-          <a:lstStyle/>
-          <a:p>
-            <a:pPr algn="ctr"/>
-            <a:r>
-              <a:rPr sz="1000" b="0" i="0">
-                <a:solidFill>
-                  <a:srgbClr val="FFFFFF"/>
-                </a:solidFill>
-              </a:rPr>
-              <a:t>HITL: ~80 %</a:t>
-            </a:r>
-          </a:p>
-        </p:txBody>
-      </p:sp>
-      <p:sp>
-        <p:nvSpPr>
-          <p:cNvPr id="22" name="TextBox 21"/>
-          <p:cNvSpPr txBox="1"/>
-          <p:nvPr/>
-        </p:nvSpPr>
-        <p:spPr>
-          <a:xfrm>
-            <a:off x="2194560" y="3319272"/>
-            <a:ext cx="9326880" cy="365760"/>
-          </a:xfrm>
-          <a:prstGeom prst="rect">
-            <a:avLst/>
-          </a:prstGeom>
-          <a:noFill/>
-        </p:spPr>
-        <p:txBody>
-          <a:bodyPr wrap="square" anchor="t">
-            <a:spAutoFit/>
-          </a:bodyPr>
-          <a:lstStyle/>
-          <a:p>
-            <a:pPr algn="l"/>
-            <a:r>
-              <a:rPr sz="1400" b="1" i="0">
-                <a:solidFill>
-                  <a:srgbClr val="041E42"/>
-                </a:solidFill>
-              </a:rPr>
-              <a:t>Walmart-trained model + shared DB</a:t>
-            </a:r>
-          </a:p>
-        </p:txBody>
-      </p:sp>
-      <p:sp>
-        <p:nvSpPr>
-          <p:cNvPr id="23" name="TextBox 22"/>
-          <p:cNvSpPr txBox="1"/>
-          <p:nvPr/>
-        </p:nvSpPr>
-        <p:spPr>
-          <a:xfrm>
-            <a:off x="2194560" y="3685032"/>
-            <a:ext cx="9326880" cy="594360"/>
-          </a:xfrm>
-          <a:prstGeom prst="rect">
-            <a:avLst/>
-          </a:prstGeom>
-          <a:noFill/>
-        </p:spPr>
-        <p:txBody>
-          <a:bodyPr wrap="square" anchor="t">
-            <a:spAutoFit/>
-          </a:bodyPr>
-          <a:lstStyle/>
-          <a:p>
-            <a:pPr algn="l"/>
-            <a:r>
-              <a:rPr sz="1050" b="0" i="0">
-                <a:solidFill>
-                  <a:srgbClr val="333333"/>
-                </a:solidFill>
-              </a:rPr>
-              <a:t>Fine-tune Mistral 7B on our own posted-reply corpus  →  a Walmart-trained replier that drops the paid GPT-4o dependency, runs fully in-house, and can be self-hosted.  Move the feedback table to a shared managed database so multiple analysts can work concurrently.</a:t>
-            </a:r>
-          </a:p>
-        </p:txBody>
-      </p:sp>
-      <p:sp>
-        <p:nvSpPr>
-          <p:cNvPr id="24" name="Rectangle 23"/>
-          <p:cNvSpPr/>
-          <p:nvPr/>
-        </p:nvSpPr>
-        <p:spPr>
-          <a:xfrm>
-            <a:off x="457200" y="4361688"/>
-            <a:ext cx="11247120" cy="1051560"/>
-          </a:xfrm>
-          <a:prstGeom prst="rect">
-            <a:avLst/>
-          </a:prstGeom>
-          <a:solidFill>
-            <a:srgbClr val="F5F5F5"/>
+            <a:srgbClr val="FEF3C7"/>
           </a:solidFill>
           <a:ln>
             <a:solidFill>
@@ -17829,194 +18231,146 @@
       </p:sp>
       <p:sp>
         <p:nvSpPr>
-          <p:cNvPr id="25" name="Rectangle 24"/>
+          <p:cNvPr id="10" name="TextBox 9"/>
+          <p:cNvSpPr txBox="1"/>
+          <p:nvPr/>
+        </p:nvSpPr>
+        <p:spPr>
+          <a:xfrm>
+            <a:off x="6355080" y="1097280"/>
+            <a:ext cx="5212080" cy="365760"/>
+          </a:xfrm>
+          <a:prstGeom prst="rect">
+            <a:avLst/>
+          </a:prstGeom>
+          <a:noFill/>
+        </p:spPr>
+        <p:txBody>
+          <a:bodyPr wrap="square" anchor="t">
+            <a:spAutoFit/>
+          </a:bodyPr>
+          <a:lstStyle/>
+          <a:p>
+            <a:pPr algn="l"/>
+            <a:r>
+              <a:rPr sz="1300" b="1" i="0">
+                <a:solidFill>
+                  <a:srgbClr val="D97706"/>
+                </a:solidFill>
+              </a:rPr>
+              <a:t>WHAT'S STILL OPEN  (honest)</a:t>
+            </a:r>
+          </a:p>
+        </p:txBody>
+      </p:sp>
+      <p:sp>
+        <p:nvSpPr>
+          <p:cNvPr id="11" name="TextBox 10"/>
+          <p:cNvSpPr txBox="1"/>
+          <p:nvPr/>
+        </p:nvSpPr>
+        <p:spPr>
+          <a:xfrm>
+            <a:off x="6355080" y="1508760"/>
+            <a:ext cx="5212080" cy="3794760"/>
+          </a:xfrm>
+          <a:prstGeom prst="rect">
+            <a:avLst/>
+          </a:prstGeom>
+          <a:noFill/>
+        </p:spPr>
+        <p:txBody>
+          <a:bodyPr wrap="square">
+            <a:spAutoFit/>
+          </a:bodyPr>
+          <a:lstStyle/>
+          <a:p>
+            <a:pPr>
+              <a:spcAft>
+                <a:spcPts val="400"/>
+              </a:spcAft>
+            </a:pPr>
+            <a:r>
+              <a:rPr sz="1100" b="0">
+                <a:solidFill>
+                  <a:srgbClr val="333333"/>
+                </a:solidFill>
+              </a:rPr>
+              <a:t>•  200-post gold set is small.  Numbers are OOF-CV, but a bigger blind held-out set is needed before I'd claim generalisation.</a:t>
+            </a:r>
+          </a:p>
+          <a:p>
+            <a:pPr>
+              <a:spcAft>
+                <a:spcPts val="400"/>
+              </a:spcAft>
+            </a:pPr>
+            <a:r>
+              <a:rPr sz="1100" b="0">
+                <a:solidFill>
+                  <a:srgbClr val="333333"/>
+                </a:solidFill>
+              </a:rPr>
+              <a:t>•  Vision eval is 32 images  —  enough to sanity-check the mechanism, not enough to claim production-grade quality.</a:t>
+            </a:r>
+          </a:p>
+          <a:p>
+            <a:pPr>
+              <a:spcAft>
+                <a:spcPts val="400"/>
+              </a:spcAft>
+            </a:pPr>
+            <a:r>
+              <a:rPr sz="1100" b="0">
+                <a:solidFill>
+                  <a:srgbClr val="333333"/>
+                </a:solidFill>
+              </a:rPr>
+              <a:t>•  Long bucket has only 7 posts and they are all negative-class  —  7/7 correct is evidence the truncation ceiling is gone, not proof of long-text mastery.</a:t>
+            </a:r>
+          </a:p>
+          <a:p>
+            <a:pPr>
+              <a:spcAft>
+                <a:spcPts val="400"/>
+              </a:spcAft>
+            </a:pPr>
+            <a:r>
+              <a:rPr sz="1100" b="0">
+                <a:solidFill>
+                  <a:srgbClr val="333333"/>
+                </a:solidFill>
+              </a:rPr>
+              <a:t>•  Reply drafts still need an analyst edit  —  we track edit-distance but haven't shown it dropping consistently yet.</a:t>
+            </a:r>
+          </a:p>
+          <a:p>
+            <a:pPr>
+              <a:spcAft>
+                <a:spcPts val="400"/>
+              </a:spcAft>
+            </a:pPr>
+            <a:r>
+              <a:rPr sz="1100" b="0">
+                <a:solidFill>
+                  <a:srgbClr val="333333"/>
+                </a:solidFill>
+              </a:rPr>
+              <a:t>•  Everything runs on one Mac. Multi-analyst concurrency and retraining automation aren't done  —  in the roadmap on next slide.</a:t>
+            </a:r>
+          </a:p>
+        </p:txBody>
+      </p:sp>
+      <p:sp>
+        <p:nvSpPr>
+          <p:cNvPr id="12" name="Rectangle 11"/>
           <p:cNvSpPr/>
           <p:nvPr/>
         </p:nvSpPr>
         <p:spPr>
           <a:xfrm>
-            <a:off x="457200" y="4361688"/>
-            <a:ext cx="1600200" cy="1051560"/>
-          </a:xfrm>
-          <a:prstGeom prst="rect">
-            <a:avLst/>
-          </a:prstGeom>
-          <a:solidFill>
-            <a:srgbClr val="D97706"/>
-          </a:solidFill>
-          <a:ln>
-            <a:noFill/>
-          </a:ln>
-          <a:effectLst/>
-        </p:spPr>
-        <p:style>
-          <a:lnRef idx="1">
-            <a:schemeClr val="accent1"/>
-          </a:lnRef>
-          <a:fillRef idx="3">
-            <a:schemeClr val="accent1"/>
-          </a:fillRef>
-          <a:effectRef idx="2">
-            <a:schemeClr val="accent1"/>
-          </a:effectRef>
-          <a:fontRef idx="minor">
-            <a:schemeClr val="lt1"/>
-          </a:fontRef>
-        </p:style>
-        <p:txBody>
-          <a:bodyPr rtlCol="0" anchor="ctr"/>
-          <a:lstStyle/>
-          <a:p>
-            <a:pPr algn="ctr"/>
-          </a:p>
-        </p:txBody>
-      </p:sp>
-      <p:sp>
-        <p:nvSpPr>
-          <p:cNvPr id="26" name="TextBox 25"/>
-          <p:cNvSpPr txBox="1"/>
-          <p:nvPr/>
-        </p:nvSpPr>
-        <p:spPr>
-          <a:xfrm>
-            <a:off x="457200" y="4507992"/>
-            <a:ext cx="1600200" cy="365760"/>
-          </a:xfrm>
-          <a:prstGeom prst="rect">
-            <a:avLst/>
-          </a:prstGeom>
-          <a:noFill/>
-        </p:spPr>
-        <p:txBody>
-          <a:bodyPr wrap="square" anchor="t">
-            <a:spAutoFit/>
-          </a:bodyPr>
-          <a:lstStyle/>
-          <a:p>
-            <a:pPr algn="ctr"/>
-            <a:r>
-              <a:rPr sz="1100" b="1" i="0">
-                <a:solidFill>
-                  <a:srgbClr val="FFFFFF"/>
-                </a:solidFill>
-              </a:rPr>
-              <a:t>6 → 12 months</a:t>
-            </a:r>
-          </a:p>
-        </p:txBody>
-      </p:sp>
-      <p:sp>
-        <p:nvSpPr>
-          <p:cNvPr id="27" name="TextBox 26"/>
-          <p:cNvSpPr txBox="1"/>
-          <p:nvPr/>
-        </p:nvSpPr>
-        <p:spPr>
-          <a:xfrm>
-            <a:off x="457200" y="4864608"/>
-            <a:ext cx="1600200" cy="457200"/>
-          </a:xfrm>
-          <a:prstGeom prst="rect">
-            <a:avLst/>
-          </a:prstGeom>
-          <a:noFill/>
-        </p:spPr>
-        <p:txBody>
-          <a:bodyPr wrap="square" anchor="t">
-            <a:spAutoFit/>
-          </a:bodyPr>
-          <a:lstStyle/>
-          <a:p>
-            <a:pPr algn="ctr"/>
-            <a:r>
-              <a:rPr sz="1000" b="0" i="0">
-                <a:solidFill>
-                  <a:srgbClr val="FFFFFF"/>
-                </a:solidFill>
-              </a:rPr>
-              <a:t>HITL: ~30 %  →  eventually 0 %</a:t>
-            </a:r>
-          </a:p>
-        </p:txBody>
-      </p:sp>
-      <p:sp>
-        <p:nvSpPr>
-          <p:cNvPr id="28" name="TextBox 27"/>
-          <p:cNvSpPr txBox="1"/>
-          <p:nvPr/>
-        </p:nvSpPr>
-        <p:spPr>
-          <a:xfrm>
-            <a:off x="2194560" y="4453128"/>
-            <a:ext cx="9326880" cy="365760"/>
-          </a:xfrm>
-          <a:prstGeom prst="rect">
-            <a:avLst/>
-          </a:prstGeom>
-          <a:noFill/>
-        </p:spPr>
-        <p:txBody>
-          <a:bodyPr wrap="square" anchor="t">
-            <a:spAutoFit/>
-          </a:bodyPr>
-          <a:lstStyle/>
-          <a:p>
-            <a:pPr algn="l"/>
-            <a:r>
-              <a:rPr sz="1400" b="1" i="0">
-                <a:solidFill>
-                  <a:srgbClr val="041E42"/>
-                </a:solidFill>
-              </a:rPr>
-              <a:t>Confidence-gated auto-reply</a:t>
-            </a:r>
-          </a:p>
-        </p:txBody>
-      </p:sp>
-      <p:sp>
-        <p:nvSpPr>
-          <p:cNvPr id="29" name="TextBox 28"/>
-          <p:cNvSpPr txBox="1"/>
-          <p:nvPr/>
-        </p:nvSpPr>
-        <p:spPr>
-          <a:xfrm>
-            <a:off x="2194560" y="4818888"/>
-            <a:ext cx="9326880" cy="594360"/>
-          </a:xfrm>
-          <a:prstGeom prst="rect">
-            <a:avLst/>
-          </a:prstGeom>
-          <a:noFill/>
-        </p:spPr>
-        <p:txBody>
-          <a:bodyPr wrap="square" anchor="t">
-            <a:spAutoFit/>
-          </a:bodyPr>
-          <a:lstStyle/>
-          <a:p>
-            <a:pPr algn="l"/>
-            <a:r>
-              <a:rPr sz="1050" b="0" i="0">
-                <a:solidFill>
-                  <a:srgbClr val="333333"/>
-                </a:solidFill>
-              </a:rPr>
-              <a:t>Introduce a confidence gate on the reply generator: top-confidence drafts are queued for auto-send and the analyst only reviews the mid- and low-confidence tail.  As agreement stays high, gradually raise the auto-send threshold — HITL winds down to sampling / audit only.</a:t>
-            </a:r>
-          </a:p>
-        </p:txBody>
-      </p:sp>
-      <p:sp>
-        <p:nvSpPr>
-          <p:cNvPr id="30" name="Rectangle 29"/>
-          <p:cNvSpPr/>
-          <p:nvPr/>
-        </p:nvSpPr>
-        <p:spPr>
-          <a:xfrm>
-            <a:off x="457200" y="5440680"/>
-            <a:ext cx="11247120" cy="868680"/>
+            <a:off x="457200" y="5577840"/>
+            <a:ext cx="11247120" cy="822960"/>
           </a:xfrm>
           <a:prstGeom prst="rect">
             <a:avLst/>
@@ -18055,13 +18409,13 @@
       </p:sp>
       <p:sp>
         <p:nvSpPr>
-          <p:cNvPr id="31" name="TextBox 30"/>
-          <p:cNvSpPr txBox="1"/>
-          <p:nvPr/>
-        </p:nvSpPr>
-        <p:spPr>
-          <a:xfrm>
-            <a:off x="640080" y="5532120"/>
+          <p:cNvPr id="13" name="TextBox 12"/>
+          <p:cNvSpPr txBox="1"/>
+          <p:nvPr/>
+        </p:nvSpPr>
+        <p:spPr>
+          <a:xfrm>
+            <a:off x="640080" y="5669280"/>
             <a:ext cx="10972800" cy="320040"/>
           </a:xfrm>
           <a:prstGeom prst="rect">
@@ -18082,21 +18436,21 @@
                   <a:srgbClr val="0071DC"/>
                 </a:solidFill>
               </a:rPr>
-              <a:t>GUIDING PRINCIPLE</a:t>
-            </a:r>
-          </a:p>
-        </p:txBody>
-      </p:sp>
-      <p:sp>
-        <p:nvSpPr>
-          <p:cNvPr id="32" name="TextBox 31"/>
-          <p:cNvSpPr txBox="1"/>
-          <p:nvPr/>
-        </p:nvSpPr>
-        <p:spPr>
-          <a:xfrm>
-            <a:off x="640080" y="5852160"/>
-            <a:ext cx="10972800" cy="457200"/>
+              <a:t>THE TAKEAWAY</a:t>
+            </a:r>
+          </a:p>
+        </p:txBody>
+      </p:sp>
+      <p:sp>
+        <p:nvSpPr>
+          <p:cNvPr id="14" name="TextBox 13"/>
+          <p:cNvSpPr txBox="1"/>
+          <p:nvPr/>
+        </p:nvSpPr>
+        <p:spPr>
+          <a:xfrm>
+            <a:off x="640080" y="5989320"/>
+            <a:ext cx="10972800" cy="365760"/>
           </a:xfrm>
           <a:prstGeom prst="rect">
             <a:avLst/>
@@ -18116,14 +18470,14 @@
                   <a:srgbClr val="333333"/>
                 </a:solidFill>
               </a:rPr>
-              <a:t>HITL is the ladder, not the ceiling — every stage produces the training signal that lets the next stage automate more.  Each horizon is admissible only when the previous one is measurably successful.</a:t>
-            </a:r>
-          </a:p>
-        </p:txBody>
-      </p:sp>
-      <p:sp>
-        <p:nvSpPr>
-          <p:cNvPr id="33" name="TextBox 32"/>
+              <a:t>Mechanism-level wins are what carry the argument; sample-size caveats are what the next horizon of work has to close.</a:t>
+            </a:r>
+          </a:p>
+        </p:txBody>
+      </p:sp>
+      <p:sp>
+        <p:nvSpPr>
+          <p:cNvPr id="15" name="TextBox 14"/>
           <p:cNvSpPr txBox="1"/>
           <p:nvPr/>
         </p:nvSpPr>
@@ -18157,7 +18511,7 @@
       </p:sp>
       <p:sp>
         <p:nvSpPr>
-          <p:cNvPr id="34" name="TextBox 33"/>
+          <p:cNvPr id="16" name="TextBox 15"/>
           <p:cNvSpPr txBox="1"/>
           <p:nvPr/>
         </p:nvSpPr>
@@ -18184,7 +18538,7 @@
                   <a:srgbClr val="666666"/>
                 </a:solidFill>
               </a:rPr>
-              <a:t>20 / 23</a:t>
+              <a:t>20 / 24</a:t>
             </a:r>
           </a:p>
         </p:txBody>
@@ -18280,7 +18634,7 @@
                   <a:srgbClr val="FFFFFF"/>
                 </a:solidFill>
               </a:rPr>
-              <a:t>Future Work  —  Track 2  ·  Bilingual   +   Track 3  ·  Multi-Platform</a:t>
+              <a:t>Future Work  —  Track 1  ·  HITL Reduction (4 Horizons)</a:t>
             </a:r>
           </a:p>
         </p:txBody>
@@ -18314,7 +18668,7 @@
                   <a:srgbClr val="E8F4FD"/>
                 </a:solidFill>
               </a:rPr>
-              <a:t>The other two tracks that widen the pipeline's coverage while Track 1 winds HITL down</a:t>
+              <a:t>One of three tracks:  Track 1 HITL  ·  Track 2 Bilingual  ·  Track 3 Multi-Platform  (Tracks 2 &amp; 3 on next slide)</a:t>
             </a:r>
           </a:p>
         </p:txBody>
@@ -18372,13 +18726,59 @@
         <p:spPr>
           <a:xfrm>
             <a:off x="457200" y="960120"/>
-            <a:ext cx="5532120" cy="502920"/>
+            <a:ext cx="11247120" cy="1051560"/>
           </a:xfrm>
           <a:prstGeom prst="rect">
             <a:avLst/>
           </a:prstGeom>
           <a:solidFill>
-            <a:srgbClr val="0071DC"/>
+            <a:srgbClr val="F5F5F5"/>
+          </a:solidFill>
+          <a:ln>
+            <a:solidFill>
+              <a:srgbClr val="10B981"/>
+            </a:solidFill>
+          </a:ln>
+          <a:effectLst/>
+        </p:spPr>
+        <p:style>
+          <a:lnRef idx="1">
+            <a:schemeClr val="accent1"/>
+          </a:lnRef>
+          <a:fillRef idx="3">
+            <a:schemeClr val="accent1"/>
+          </a:fillRef>
+          <a:effectRef idx="2">
+            <a:schemeClr val="accent1"/>
+          </a:effectRef>
+          <a:fontRef idx="minor">
+            <a:schemeClr val="lt1"/>
+          </a:fontRef>
+        </p:style>
+        <p:txBody>
+          <a:bodyPr rtlCol="0" anchor="ctr"/>
+          <a:lstStyle/>
+          <a:p>
+            <a:pPr algn="ctr"/>
+          </a:p>
+        </p:txBody>
+      </p:sp>
+      <p:sp>
+        <p:nvSpPr>
+          <p:cNvPr id="7" name="Rectangle 6"/>
+          <p:cNvSpPr/>
+          <p:nvPr/>
+        </p:nvSpPr>
+        <p:spPr>
+          <a:xfrm>
+            <a:off x="457200" y="960120"/>
+            <a:ext cx="1600200" cy="1051560"/>
+          </a:xfrm>
+          <a:prstGeom prst="rect">
+            <a:avLst/>
+          </a:prstGeom>
+          <a:solidFill>
+            <a:srgbClr val="10B981"/>
           </a:solidFill>
           <a:ln>
             <a:noFill/>
@@ -18409,14 +18809,82 @@
       </p:sp>
       <p:sp>
         <p:nvSpPr>
-          <p:cNvPr id="7" name="TextBox 6"/>
-          <p:cNvSpPr txBox="1"/>
-          <p:nvPr/>
-        </p:nvSpPr>
-        <p:spPr>
-          <a:xfrm>
-            <a:off x="594360" y="1005840"/>
-            <a:ext cx="5257800" cy="411480"/>
+          <p:cNvPr id="8" name="TextBox 7"/>
+          <p:cNvSpPr txBox="1"/>
+          <p:nvPr/>
+        </p:nvSpPr>
+        <p:spPr>
+          <a:xfrm>
+            <a:off x="457200" y="1106424"/>
+            <a:ext cx="1600200" cy="365760"/>
+          </a:xfrm>
+          <a:prstGeom prst="rect">
+            <a:avLst/>
+          </a:prstGeom>
+          <a:noFill/>
+        </p:spPr>
+        <p:txBody>
+          <a:bodyPr wrap="square" anchor="t">
+            <a:spAutoFit/>
+          </a:bodyPr>
+          <a:lstStyle/>
+          <a:p>
+            <a:pPr algn="ctr"/>
+            <a:r>
+              <a:rPr sz="1100" b="1" i="0">
+                <a:solidFill>
+                  <a:srgbClr val="FFFFFF"/>
+                </a:solidFill>
+              </a:rPr>
+              <a:t>Now → 1 month</a:t>
+            </a:r>
+          </a:p>
+        </p:txBody>
+      </p:sp>
+      <p:sp>
+        <p:nvSpPr>
+          <p:cNvPr id="9" name="TextBox 8"/>
+          <p:cNvSpPr txBox="1"/>
+          <p:nvPr/>
+        </p:nvSpPr>
+        <p:spPr>
+          <a:xfrm>
+            <a:off x="457200" y="1463040"/>
+            <a:ext cx="1600200" cy="457200"/>
+          </a:xfrm>
+          <a:prstGeom prst="rect">
+            <a:avLst/>
+          </a:prstGeom>
+          <a:noFill/>
+        </p:spPr>
+        <p:txBody>
+          <a:bodyPr wrap="square" anchor="t">
+            <a:spAutoFit/>
+          </a:bodyPr>
+          <a:lstStyle/>
+          <a:p>
+            <a:pPr algn="ctr"/>
+            <a:r>
+              <a:rPr sz="1000" b="0" i="0">
+                <a:solidFill>
+                  <a:srgbClr val="FFFFFF"/>
+                </a:solidFill>
+              </a:rPr>
+              <a:t>HITL: 100 %</a:t>
+            </a:r>
+          </a:p>
+        </p:txBody>
+      </p:sp>
+      <p:sp>
+        <p:nvSpPr>
+          <p:cNvPr id="10" name="TextBox 9"/>
+          <p:cNvSpPr txBox="1"/>
+          <p:nvPr/>
+        </p:nvSpPr>
+        <p:spPr>
+          <a:xfrm>
+            <a:off x="2194560" y="1051560"/>
+            <a:ext cx="9326880" cy="365760"/>
           </a:xfrm>
           <a:prstGeom prst="rect">
             <a:avLst/>
@@ -18433,24 +18901,58 @@
             <a:r>
               <a:rPr sz="1400" b="1" i="0">
                 <a:solidFill>
-                  <a:srgbClr val="FFFFFF"/>
-                </a:solidFill>
-              </a:rPr>
-              <a:t>TRACK 2  ·  BILINGUAL  →  MULTILINGUAL</a:t>
-            </a:r>
-          </a:p>
-        </p:txBody>
-      </p:sp>
-      <p:sp>
-        <p:nvSpPr>
-          <p:cNvPr id="8" name="Rectangle 7"/>
+                  <a:srgbClr val="041E42"/>
+                </a:solidFill>
+              </a:rPr>
+              <a:t>Grow the gold set</a:t>
+            </a:r>
+          </a:p>
+        </p:txBody>
+      </p:sp>
+      <p:sp>
+        <p:nvSpPr>
+          <p:cNvPr id="11" name="TextBox 10"/>
+          <p:cNvSpPr txBox="1"/>
+          <p:nvPr/>
+        </p:nvSpPr>
+        <p:spPr>
+          <a:xfrm>
+            <a:off x="2194560" y="1417320"/>
+            <a:ext cx="9326880" cy="594360"/>
+          </a:xfrm>
+          <a:prstGeom prst="rect">
+            <a:avLst/>
+          </a:prstGeom>
+          <a:noFill/>
+        </p:spPr>
+        <p:txBody>
+          <a:bodyPr wrap="square" anchor="t">
+            <a:spAutoFit/>
+          </a:bodyPr>
+          <a:lstStyle/>
+          <a:p>
+            <a:pPr algn="l"/>
+            <a:r>
+              <a:rPr sz="1050" b="0" i="0">
+                <a:solidFill>
+                  <a:srgbClr val="333333"/>
+                </a:solidFill>
+              </a:rPr>
+              <a:t>Grow the labelled gold set to ~500 posts using the HITL feedback the team is already producing; rerun 5-fold OOF to check the F1 delta.</a:t>
+            </a:r>
+          </a:p>
+        </p:txBody>
+      </p:sp>
+      <p:sp>
+        <p:nvSpPr>
+          <p:cNvPr id="12" name="Rectangle 11"/>
           <p:cNvSpPr/>
           <p:nvPr/>
         </p:nvSpPr>
         <p:spPr>
           <a:xfrm>
-            <a:off x="457200" y="1463040"/>
-            <a:ext cx="5532120" cy="5074920"/>
+            <a:off x="457200" y="2093976"/>
+            <a:ext cx="11247120" cy="1051560"/>
           </a:xfrm>
           <a:prstGeom prst="rect">
             <a:avLst/>
@@ -18489,14 +18991,126 @@
       </p:sp>
       <p:sp>
         <p:nvSpPr>
-          <p:cNvPr id="9" name="TextBox 8"/>
-          <p:cNvSpPr txBox="1"/>
-          <p:nvPr/>
-        </p:nvSpPr>
-        <p:spPr>
-          <a:xfrm>
-            <a:off x="640080" y="1554480"/>
-            <a:ext cx="5166360" cy="365760"/>
+          <p:cNvPr id="13" name="Rectangle 12"/>
+          <p:cNvSpPr/>
+          <p:nvPr/>
+        </p:nvSpPr>
+        <p:spPr>
+          <a:xfrm>
+            <a:off x="457200" y="2093976"/>
+            <a:ext cx="1600200" cy="1051560"/>
+          </a:xfrm>
+          <a:prstGeom prst="rect">
+            <a:avLst/>
+          </a:prstGeom>
+          <a:solidFill>
+            <a:srgbClr val="0071DC"/>
+          </a:solidFill>
+          <a:ln>
+            <a:noFill/>
+          </a:ln>
+          <a:effectLst/>
+        </p:spPr>
+        <p:style>
+          <a:lnRef idx="1">
+            <a:schemeClr val="accent1"/>
+          </a:lnRef>
+          <a:fillRef idx="3">
+            <a:schemeClr val="accent1"/>
+          </a:fillRef>
+          <a:effectRef idx="2">
+            <a:schemeClr val="accent1"/>
+          </a:effectRef>
+          <a:fontRef idx="minor">
+            <a:schemeClr val="lt1"/>
+          </a:fontRef>
+        </p:style>
+        <p:txBody>
+          <a:bodyPr rtlCol="0" anchor="ctr"/>
+          <a:lstStyle/>
+          <a:p>
+            <a:pPr algn="ctr"/>
+          </a:p>
+        </p:txBody>
+      </p:sp>
+      <p:sp>
+        <p:nvSpPr>
+          <p:cNvPr id="14" name="TextBox 13"/>
+          <p:cNvSpPr txBox="1"/>
+          <p:nvPr/>
+        </p:nvSpPr>
+        <p:spPr>
+          <a:xfrm>
+            <a:off x="457200" y="2240280"/>
+            <a:ext cx="1600200" cy="365760"/>
+          </a:xfrm>
+          <a:prstGeom prst="rect">
+            <a:avLst/>
+          </a:prstGeom>
+          <a:noFill/>
+        </p:spPr>
+        <p:txBody>
+          <a:bodyPr wrap="square" anchor="t">
+            <a:spAutoFit/>
+          </a:bodyPr>
+          <a:lstStyle/>
+          <a:p>
+            <a:pPr algn="ctr"/>
+            <a:r>
+              <a:rPr sz="1100" b="1" i="0">
+                <a:solidFill>
+                  <a:srgbClr val="FFFFFF"/>
+                </a:solidFill>
+              </a:rPr>
+              <a:t>1 → 3 months</a:t>
+            </a:r>
+          </a:p>
+        </p:txBody>
+      </p:sp>
+      <p:sp>
+        <p:nvSpPr>
+          <p:cNvPr id="15" name="TextBox 14"/>
+          <p:cNvSpPr txBox="1"/>
+          <p:nvPr/>
+        </p:nvSpPr>
+        <p:spPr>
+          <a:xfrm>
+            <a:off x="457200" y="2596896"/>
+            <a:ext cx="1600200" cy="457200"/>
+          </a:xfrm>
+          <a:prstGeom prst="rect">
+            <a:avLst/>
+          </a:prstGeom>
+          <a:noFill/>
+        </p:spPr>
+        <p:txBody>
+          <a:bodyPr wrap="square" anchor="t">
+            <a:spAutoFit/>
+          </a:bodyPr>
+          <a:lstStyle/>
+          <a:p>
+            <a:pPr algn="ctr"/>
+            <a:r>
+              <a:rPr sz="1000" b="0" i="0">
+                <a:solidFill>
+                  <a:srgbClr val="FFFFFF"/>
+                </a:solidFill>
+              </a:rPr>
+              <a:t>HITL: 100 %</a:t>
+            </a:r>
+          </a:p>
+        </p:txBody>
+      </p:sp>
+      <p:sp>
+        <p:nvSpPr>
+          <p:cNvPr id="16" name="TextBox 15"/>
+          <p:cNvSpPr txBox="1"/>
+          <p:nvPr/>
+        </p:nvSpPr>
+        <p:spPr>
+          <a:xfrm>
+            <a:off x="2194560" y="2185416"/>
+            <a:ext cx="9326880" cy="365760"/>
           </a:xfrm>
           <a:prstGeom prst="rect">
             <a:avLst/>
@@ -18511,319 +19125,93 @@
           <a:p>
             <a:pPr algn="l"/>
             <a:r>
+              <a:rPr sz="1400" b="1" i="0">
+                <a:solidFill>
+                  <a:srgbClr val="041E42"/>
+                </a:solidFill>
+              </a:rPr>
+              <a:t>Automate the retrain loop</a:t>
+            </a:r>
+          </a:p>
+        </p:txBody>
+      </p:sp>
+      <p:sp>
+        <p:nvSpPr>
+          <p:cNvPr id="17" name="TextBox 16"/>
+          <p:cNvSpPr txBox="1"/>
+          <p:nvPr/>
+        </p:nvSpPr>
+        <p:spPr>
+          <a:xfrm>
+            <a:off x="2194560" y="2551176"/>
+            <a:ext cx="9326880" cy="594360"/>
+          </a:xfrm>
+          <a:prstGeom prst="rect">
+            <a:avLst/>
+          </a:prstGeom>
+          <a:noFill/>
+        </p:spPr>
+        <p:txBody>
+          <a:bodyPr wrap="square" anchor="t">
+            <a:spAutoFit/>
+          </a:bodyPr>
+          <a:lstStyle/>
+          <a:p>
+            <a:pPr algn="l"/>
+            <a:r>
               <a:rPr sz="1050" b="0" i="0">
                 <a:solidFill>
                   <a:srgbClr val="333333"/>
                 </a:solidFill>
               </a:rPr>
-              <a:t>Why:  Indian retail subreddits are ~30 % of Walmart-family mentions but the current  langdetect  →  English-only  filter silently drops them.</a:t>
-            </a:r>
-          </a:p>
-        </p:txBody>
-      </p:sp>
-      <p:sp>
-        <p:nvSpPr>
-          <p:cNvPr id="10" name="TextBox 9"/>
-          <p:cNvSpPr txBox="1"/>
-          <p:nvPr/>
-        </p:nvSpPr>
-        <p:spPr>
-          <a:xfrm>
-            <a:off x="640080" y="1965960"/>
-            <a:ext cx="5166360" cy="274320"/>
-          </a:xfrm>
-          <a:prstGeom prst="rect">
-            <a:avLst/>
-          </a:prstGeom>
-          <a:noFill/>
-        </p:spPr>
-        <p:txBody>
-          <a:bodyPr wrap="square" anchor="t">
-            <a:spAutoFit/>
-          </a:bodyPr>
-          <a:lstStyle/>
-          <a:p>
-            <a:pPr algn="l"/>
-            <a:r>
-              <a:rPr sz="1150" b="1" i="0">
-                <a:solidFill>
-                  <a:srgbClr val="0071DC"/>
-                </a:solidFill>
-              </a:rPr>
-              <a:t>Concrete deliverables</a:t>
-            </a:r>
-          </a:p>
-        </p:txBody>
-      </p:sp>
-      <p:sp>
-        <p:nvSpPr>
-          <p:cNvPr id="11" name="TextBox 10"/>
-          <p:cNvSpPr txBox="1"/>
-          <p:nvPr/>
-        </p:nvSpPr>
-        <p:spPr>
-          <a:xfrm>
-            <a:off x="685800" y="2286000"/>
-            <a:ext cx="228600" cy="274320"/>
-          </a:xfrm>
-          <a:prstGeom prst="rect">
-            <a:avLst/>
-          </a:prstGeom>
-          <a:noFill/>
-        </p:spPr>
-        <p:txBody>
-          <a:bodyPr wrap="square" anchor="t">
-            <a:spAutoFit/>
-          </a:bodyPr>
-          <a:lstStyle/>
-          <a:p>
-            <a:pPr algn="l"/>
-            <a:r>
-              <a:rPr sz="1100" b="1" i="0">
-                <a:solidFill>
-                  <a:srgbClr val="0071DC"/>
-                </a:solidFill>
-              </a:rPr>
-              <a:t>•</a:t>
-            </a:r>
-          </a:p>
-        </p:txBody>
-      </p:sp>
-      <p:sp>
-        <p:nvSpPr>
-          <p:cNvPr id="12" name="TextBox 11"/>
-          <p:cNvSpPr txBox="1"/>
-          <p:nvPr/>
-        </p:nvSpPr>
-        <p:spPr>
-          <a:xfrm>
-            <a:off x="868680" y="2286000"/>
-            <a:ext cx="4983480" cy="777240"/>
-          </a:xfrm>
-          <a:prstGeom prst="rect">
-            <a:avLst/>
-          </a:prstGeom>
-          <a:noFill/>
-        </p:spPr>
-        <p:txBody>
-          <a:bodyPr wrap="square" anchor="t">
-            <a:spAutoFit/>
-          </a:bodyPr>
-          <a:lstStyle/>
-          <a:p>
-            <a:pPr algn="l"/>
-            <a:r>
-              <a:rPr sz="1000" b="0" i="0">
-                <a:solidFill>
-                  <a:srgbClr val="333333"/>
-                </a:solidFill>
-              </a:rPr>
-              <a:t>Extend  langdetect  to  hi + en  (later  ta / te / bn);  code-mixed 'Hinglish' handled with a mixed-script tokenizer.</a:t>
-            </a:r>
-          </a:p>
-        </p:txBody>
-      </p:sp>
-      <p:sp>
-        <p:nvSpPr>
-          <p:cNvPr id="13" name="TextBox 12"/>
-          <p:cNvSpPr txBox="1"/>
-          <p:nvPr/>
-        </p:nvSpPr>
-        <p:spPr>
-          <a:xfrm>
-            <a:off x="685800" y="3108960"/>
-            <a:ext cx="228600" cy="274320"/>
-          </a:xfrm>
-          <a:prstGeom prst="rect">
-            <a:avLst/>
-          </a:prstGeom>
-          <a:noFill/>
-        </p:spPr>
-        <p:txBody>
-          <a:bodyPr wrap="square" anchor="t">
-            <a:spAutoFit/>
-          </a:bodyPr>
-          <a:lstStyle/>
-          <a:p>
-            <a:pPr algn="l"/>
-            <a:r>
-              <a:rPr sz="1100" b="1" i="0">
-                <a:solidFill>
-                  <a:srgbClr val="0071DC"/>
-                </a:solidFill>
-              </a:rPr>
-              <a:t>•</a:t>
-            </a:r>
-          </a:p>
-        </p:txBody>
-      </p:sp>
-      <p:sp>
-        <p:nvSpPr>
-          <p:cNvPr id="14" name="TextBox 13"/>
-          <p:cNvSpPr txBox="1"/>
-          <p:nvPr/>
-        </p:nvSpPr>
-        <p:spPr>
-          <a:xfrm>
-            <a:off x="868680" y="3108960"/>
-            <a:ext cx="4983480" cy="777240"/>
-          </a:xfrm>
-          <a:prstGeom prst="rect">
-            <a:avLst/>
-          </a:prstGeom>
-          <a:noFill/>
-        </p:spPr>
-        <p:txBody>
-          <a:bodyPr wrap="square" anchor="t">
-            <a:spAutoFit/>
-          </a:bodyPr>
-          <a:lstStyle/>
-          <a:p>
-            <a:pPr algn="l"/>
-            <a:r>
-              <a:rPr sz="1000" b="0" i="0">
-                <a:solidFill>
-                  <a:srgbClr val="333333"/>
-                </a:solidFill>
-              </a:rPr>
-              <a:t>Ingestion-time translation via NLLB-200 (open-weights, 3.3 B) so downstream models stay English-only —  or —  fine-tune ModernBERT on native scripts.</a:t>
-            </a:r>
-          </a:p>
-        </p:txBody>
-      </p:sp>
-      <p:sp>
-        <p:nvSpPr>
-          <p:cNvPr id="15" name="TextBox 14"/>
-          <p:cNvSpPr txBox="1"/>
-          <p:nvPr/>
-        </p:nvSpPr>
-        <p:spPr>
-          <a:xfrm>
-            <a:off x="685800" y="3931920"/>
-            <a:ext cx="228600" cy="274320"/>
-          </a:xfrm>
-          <a:prstGeom prst="rect">
-            <a:avLst/>
-          </a:prstGeom>
-          <a:noFill/>
-        </p:spPr>
-        <p:txBody>
-          <a:bodyPr wrap="square" anchor="t">
-            <a:spAutoFit/>
-          </a:bodyPr>
-          <a:lstStyle/>
-          <a:p>
-            <a:pPr algn="l"/>
-            <a:r>
-              <a:rPr sz="1100" b="1" i="0">
-                <a:solidFill>
-                  <a:srgbClr val="0071DC"/>
-                </a:solidFill>
-              </a:rPr>
-              <a:t>•</a:t>
-            </a:r>
-          </a:p>
-        </p:txBody>
-      </p:sp>
-      <p:sp>
-        <p:nvSpPr>
-          <p:cNvPr id="16" name="TextBox 15"/>
-          <p:cNvSpPr txBox="1"/>
-          <p:nvPr/>
-        </p:nvSpPr>
-        <p:spPr>
-          <a:xfrm>
-            <a:off x="868680" y="3931920"/>
-            <a:ext cx="4983480" cy="777240"/>
-          </a:xfrm>
-          <a:prstGeom prst="rect">
-            <a:avLst/>
-          </a:prstGeom>
-          <a:noFill/>
-        </p:spPr>
-        <p:txBody>
-          <a:bodyPr wrap="square" anchor="t">
-            <a:spAutoFit/>
-          </a:bodyPr>
-          <a:lstStyle/>
-          <a:p>
-            <a:pPr algn="l"/>
-            <a:r>
-              <a:rPr sz="1000" b="0" i="0">
-                <a:solidFill>
-                  <a:srgbClr val="333333"/>
-                </a:solidFill>
-              </a:rPr>
-              <a:t>Extend aspect taxonomy for Indic retail idioms (“bill karo” for billing, “delivery kab” for late shipping).</a:t>
-            </a:r>
-          </a:p>
-        </p:txBody>
-      </p:sp>
-      <p:sp>
-        <p:nvSpPr>
-          <p:cNvPr id="17" name="TextBox 16"/>
-          <p:cNvSpPr txBox="1"/>
-          <p:nvPr/>
-        </p:nvSpPr>
-        <p:spPr>
-          <a:xfrm>
-            <a:off x="685800" y="4754880"/>
-            <a:ext cx="228600" cy="274320"/>
-          </a:xfrm>
-          <a:prstGeom prst="rect">
-            <a:avLst/>
-          </a:prstGeom>
-          <a:noFill/>
-        </p:spPr>
-        <p:txBody>
-          <a:bodyPr wrap="square" anchor="t">
-            <a:spAutoFit/>
-          </a:bodyPr>
-          <a:lstStyle/>
-          <a:p>
-            <a:pPr algn="l"/>
-            <a:r>
-              <a:rPr sz="1100" b="1" i="0">
-                <a:solidFill>
-                  <a:srgbClr val="0071DC"/>
-                </a:solidFill>
-              </a:rPr>
-              <a:t>•</a:t>
-            </a:r>
-          </a:p>
-        </p:txBody>
-      </p:sp>
-      <p:sp>
-        <p:nvSpPr>
-          <p:cNvPr id="18" name="TextBox 17"/>
-          <p:cNvSpPr txBox="1"/>
-          <p:nvPr/>
-        </p:nvSpPr>
-        <p:spPr>
-          <a:xfrm>
-            <a:off x="868680" y="4754880"/>
-            <a:ext cx="4983480" cy="777240"/>
-          </a:xfrm>
-          <a:prstGeom prst="rect">
-            <a:avLst/>
-          </a:prstGeom>
-          <a:noFill/>
-        </p:spPr>
-        <p:txBody>
-          <a:bodyPr wrap="square" anchor="t">
-            <a:spAutoFit/>
-          </a:bodyPr>
-          <a:lstStyle/>
-          <a:p>
-            <a:pPr algn="l"/>
-            <a:r>
-              <a:rPr sz="1000" b="0" i="0">
-                <a:solidFill>
-                  <a:srgbClr val="333333"/>
-                </a:solidFill>
-              </a:rPr>
-              <a:t>Native-speaker analyst validation loop —  same HITL flow, new language pool.</a:t>
-            </a:r>
+              <a:t>Wire the monthly ModernBERT retrain into a Cron / Airflow job with an OOF-F1 promotion gate — new checkpoints ship only when they beat the current one on held-out folds.</a:t>
+            </a:r>
+          </a:p>
+        </p:txBody>
+      </p:sp>
+      <p:sp>
+        <p:nvSpPr>
+          <p:cNvPr id="18" name="Rectangle 17"/>
+          <p:cNvSpPr/>
+          <p:nvPr/>
+        </p:nvSpPr>
+        <p:spPr>
+          <a:xfrm>
+            <a:off x="457200" y="3227832"/>
+            <a:ext cx="11247120" cy="1051560"/>
+          </a:xfrm>
+          <a:prstGeom prst="rect">
+            <a:avLst/>
+          </a:prstGeom>
+          <a:solidFill>
+            <a:srgbClr val="F5F5F5"/>
+          </a:solidFill>
+          <a:ln>
+            <a:solidFill>
+              <a:srgbClr val="7C3AED"/>
+            </a:solidFill>
+          </a:ln>
+          <a:effectLst/>
+        </p:spPr>
+        <p:style>
+          <a:lnRef idx="1">
+            <a:schemeClr val="accent1"/>
+          </a:lnRef>
+          <a:fillRef idx="3">
+            <a:schemeClr val="accent1"/>
+          </a:fillRef>
+          <a:effectRef idx="2">
+            <a:schemeClr val="accent1"/>
+          </a:effectRef>
+          <a:fontRef idx="minor">
+            <a:schemeClr val="lt1"/>
+          </a:fontRef>
+        </p:style>
+        <p:txBody>
+          <a:bodyPr rtlCol="0" anchor="ctr"/>
+          <a:lstStyle/>
+          <a:p>
+            <a:pPr algn="ctr"/>
           </a:p>
         </p:txBody>
       </p:sp>
@@ -18835,8 +19223,414 @@
         </p:nvSpPr>
         <p:spPr>
           <a:xfrm>
-            <a:off x="457200" y="5989320"/>
-            <a:ext cx="5532120" cy="548640"/>
+            <a:off x="457200" y="3227832"/>
+            <a:ext cx="1600200" cy="1051560"/>
+          </a:xfrm>
+          <a:prstGeom prst="rect">
+            <a:avLst/>
+          </a:prstGeom>
+          <a:solidFill>
+            <a:srgbClr val="7C3AED"/>
+          </a:solidFill>
+          <a:ln>
+            <a:noFill/>
+          </a:ln>
+          <a:effectLst/>
+        </p:spPr>
+        <p:style>
+          <a:lnRef idx="1">
+            <a:schemeClr val="accent1"/>
+          </a:lnRef>
+          <a:fillRef idx="3">
+            <a:schemeClr val="accent1"/>
+          </a:fillRef>
+          <a:effectRef idx="2">
+            <a:schemeClr val="accent1"/>
+          </a:effectRef>
+          <a:fontRef idx="minor">
+            <a:schemeClr val="lt1"/>
+          </a:fontRef>
+        </p:style>
+        <p:txBody>
+          <a:bodyPr rtlCol="0" anchor="ctr"/>
+          <a:lstStyle/>
+          <a:p>
+            <a:pPr algn="ctr"/>
+          </a:p>
+        </p:txBody>
+      </p:sp>
+      <p:sp>
+        <p:nvSpPr>
+          <p:cNvPr id="20" name="TextBox 19"/>
+          <p:cNvSpPr txBox="1"/>
+          <p:nvPr/>
+        </p:nvSpPr>
+        <p:spPr>
+          <a:xfrm>
+            <a:off x="457200" y="3374136"/>
+            <a:ext cx="1600200" cy="365760"/>
+          </a:xfrm>
+          <a:prstGeom prst="rect">
+            <a:avLst/>
+          </a:prstGeom>
+          <a:noFill/>
+        </p:spPr>
+        <p:txBody>
+          <a:bodyPr wrap="square" anchor="t">
+            <a:spAutoFit/>
+          </a:bodyPr>
+          <a:lstStyle/>
+          <a:p>
+            <a:pPr algn="ctr"/>
+            <a:r>
+              <a:rPr sz="1100" b="1" i="0">
+                <a:solidFill>
+                  <a:srgbClr val="FFFFFF"/>
+                </a:solidFill>
+              </a:rPr>
+              <a:t>3 → 6 months</a:t>
+            </a:r>
+          </a:p>
+        </p:txBody>
+      </p:sp>
+      <p:sp>
+        <p:nvSpPr>
+          <p:cNvPr id="21" name="TextBox 20"/>
+          <p:cNvSpPr txBox="1"/>
+          <p:nvPr/>
+        </p:nvSpPr>
+        <p:spPr>
+          <a:xfrm>
+            <a:off x="457200" y="3730752"/>
+            <a:ext cx="1600200" cy="457200"/>
+          </a:xfrm>
+          <a:prstGeom prst="rect">
+            <a:avLst/>
+          </a:prstGeom>
+          <a:noFill/>
+        </p:spPr>
+        <p:txBody>
+          <a:bodyPr wrap="square" anchor="t">
+            <a:spAutoFit/>
+          </a:bodyPr>
+          <a:lstStyle/>
+          <a:p>
+            <a:pPr algn="ctr"/>
+            <a:r>
+              <a:rPr sz="1000" b="0" i="0">
+                <a:solidFill>
+                  <a:srgbClr val="FFFFFF"/>
+                </a:solidFill>
+              </a:rPr>
+              <a:t>HITL: ~80 %</a:t>
+            </a:r>
+          </a:p>
+        </p:txBody>
+      </p:sp>
+      <p:sp>
+        <p:nvSpPr>
+          <p:cNvPr id="22" name="TextBox 21"/>
+          <p:cNvSpPr txBox="1"/>
+          <p:nvPr/>
+        </p:nvSpPr>
+        <p:spPr>
+          <a:xfrm>
+            <a:off x="2194560" y="3319272"/>
+            <a:ext cx="9326880" cy="365760"/>
+          </a:xfrm>
+          <a:prstGeom prst="rect">
+            <a:avLst/>
+          </a:prstGeom>
+          <a:noFill/>
+        </p:spPr>
+        <p:txBody>
+          <a:bodyPr wrap="square" anchor="t">
+            <a:spAutoFit/>
+          </a:bodyPr>
+          <a:lstStyle/>
+          <a:p>
+            <a:pPr algn="l"/>
+            <a:r>
+              <a:rPr sz="1400" b="1" i="0">
+                <a:solidFill>
+                  <a:srgbClr val="041E42"/>
+                </a:solidFill>
+              </a:rPr>
+              <a:t>Walmart-trained model + shared DB</a:t>
+            </a:r>
+          </a:p>
+        </p:txBody>
+      </p:sp>
+      <p:sp>
+        <p:nvSpPr>
+          <p:cNvPr id="23" name="TextBox 22"/>
+          <p:cNvSpPr txBox="1"/>
+          <p:nvPr/>
+        </p:nvSpPr>
+        <p:spPr>
+          <a:xfrm>
+            <a:off x="2194560" y="3685032"/>
+            <a:ext cx="9326880" cy="594360"/>
+          </a:xfrm>
+          <a:prstGeom prst="rect">
+            <a:avLst/>
+          </a:prstGeom>
+          <a:noFill/>
+        </p:spPr>
+        <p:txBody>
+          <a:bodyPr wrap="square" anchor="t">
+            <a:spAutoFit/>
+          </a:bodyPr>
+          <a:lstStyle/>
+          <a:p>
+            <a:pPr algn="l"/>
+            <a:r>
+              <a:rPr sz="1050" b="0" i="0">
+                <a:solidFill>
+                  <a:srgbClr val="333333"/>
+                </a:solidFill>
+              </a:rPr>
+              <a:t>Fine-tune Mistral 7B on our own posted-reply corpus  →  a Walmart-trained replier that drops the paid GPT-4o dependency, runs fully in-house, and can be self-hosted.  Move the feedback table to a shared managed database so multiple analysts can work concurrently.</a:t>
+            </a:r>
+          </a:p>
+        </p:txBody>
+      </p:sp>
+      <p:sp>
+        <p:nvSpPr>
+          <p:cNvPr id="24" name="Rectangle 23"/>
+          <p:cNvSpPr/>
+          <p:nvPr/>
+        </p:nvSpPr>
+        <p:spPr>
+          <a:xfrm>
+            <a:off x="457200" y="4361688"/>
+            <a:ext cx="11247120" cy="1051560"/>
+          </a:xfrm>
+          <a:prstGeom prst="rect">
+            <a:avLst/>
+          </a:prstGeom>
+          <a:solidFill>
+            <a:srgbClr val="F5F5F5"/>
+          </a:solidFill>
+          <a:ln>
+            <a:solidFill>
+              <a:srgbClr val="D97706"/>
+            </a:solidFill>
+          </a:ln>
+          <a:effectLst/>
+        </p:spPr>
+        <p:style>
+          <a:lnRef idx="1">
+            <a:schemeClr val="accent1"/>
+          </a:lnRef>
+          <a:fillRef idx="3">
+            <a:schemeClr val="accent1"/>
+          </a:fillRef>
+          <a:effectRef idx="2">
+            <a:schemeClr val="accent1"/>
+          </a:effectRef>
+          <a:fontRef idx="minor">
+            <a:schemeClr val="lt1"/>
+          </a:fontRef>
+        </p:style>
+        <p:txBody>
+          <a:bodyPr rtlCol="0" anchor="ctr"/>
+          <a:lstStyle/>
+          <a:p>
+            <a:pPr algn="ctr"/>
+          </a:p>
+        </p:txBody>
+      </p:sp>
+      <p:sp>
+        <p:nvSpPr>
+          <p:cNvPr id="25" name="Rectangle 24"/>
+          <p:cNvSpPr/>
+          <p:nvPr/>
+        </p:nvSpPr>
+        <p:spPr>
+          <a:xfrm>
+            <a:off x="457200" y="4361688"/>
+            <a:ext cx="1600200" cy="1051560"/>
+          </a:xfrm>
+          <a:prstGeom prst="rect">
+            <a:avLst/>
+          </a:prstGeom>
+          <a:solidFill>
+            <a:srgbClr val="D97706"/>
+          </a:solidFill>
+          <a:ln>
+            <a:noFill/>
+          </a:ln>
+          <a:effectLst/>
+        </p:spPr>
+        <p:style>
+          <a:lnRef idx="1">
+            <a:schemeClr val="accent1"/>
+          </a:lnRef>
+          <a:fillRef idx="3">
+            <a:schemeClr val="accent1"/>
+          </a:fillRef>
+          <a:effectRef idx="2">
+            <a:schemeClr val="accent1"/>
+          </a:effectRef>
+          <a:fontRef idx="minor">
+            <a:schemeClr val="lt1"/>
+          </a:fontRef>
+        </p:style>
+        <p:txBody>
+          <a:bodyPr rtlCol="0" anchor="ctr"/>
+          <a:lstStyle/>
+          <a:p>
+            <a:pPr algn="ctr"/>
+          </a:p>
+        </p:txBody>
+      </p:sp>
+      <p:sp>
+        <p:nvSpPr>
+          <p:cNvPr id="26" name="TextBox 25"/>
+          <p:cNvSpPr txBox="1"/>
+          <p:nvPr/>
+        </p:nvSpPr>
+        <p:spPr>
+          <a:xfrm>
+            <a:off x="457200" y="4507992"/>
+            <a:ext cx="1600200" cy="365760"/>
+          </a:xfrm>
+          <a:prstGeom prst="rect">
+            <a:avLst/>
+          </a:prstGeom>
+          <a:noFill/>
+        </p:spPr>
+        <p:txBody>
+          <a:bodyPr wrap="square" anchor="t">
+            <a:spAutoFit/>
+          </a:bodyPr>
+          <a:lstStyle/>
+          <a:p>
+            <a:pPr algn="ctr"/>
+            <a:r>
+              <a:rPr sz="1100" b="1" i="0">
+                <a:solidFill>
+                  <a:srgbClr val="FFFFFF"/>
+                </a:solidFill>
+              </a:rPr>
+              <a:t>6 → 12 months</a:t>
+            </a:r>
+          </a:p>
+        </p:txBody>
+      </p:sp>
+      <p:sp>
+        <p:nvSpPr>
+          <p:cNvPr id="27" name="TextBox 26"/>
+          <p:cNvSpPr txBox="1"/>
+          <p:nvPr/>
+        </p:nvSpPr>
+        <p:spPr>
+          <a:xfrm>
+            <a:off x="457200" y="4864608"/>
+            <a:ext cx="1600200" cy="457200"/>
+          </a:xfrm>
+          <a:prstGeom prst="rect">
+            <a:avLst/>
+          </a:prstGeom>
+          <a:noFill/>
+        </p:spPr>
+        <p:txBody>
+          <a:bodyPr wrap="square" anchor="t">
+            <a:spAutoFit/>
+          </a:bodyPr>
+          <a:lstStyle/>
+          <a:p>
+            <a:pPr algn="ctr"/>
+            <a:r>
+              <a:rPr sz="1000" b="0" i="0">
+                <a:solidFill>
+                  <a:srgbClr val="FFFFFF"/>
+                </a:solidFill>
+              </a:rPr>
+              <a:t>HITL: ~30 %  →  eventually 0 %</a:t>
+            </a:r>
+          </a:p>
+        </p:txBody>
+      </p:sp>
+      <p:sp>
+        <p:nvSpPr>
+          <p:cNvPr id="28" name="TextBox 27"/>
+          <p:cNvSpPr txBox="1"/>
+          <p:nvPr/>
+        </p:nvSpPr>
+        <p:spPr>
+          <a:xfrm>
+            <a:off x="2194560" y="4453128"/>
+            <a:ext cx="9326880" cy="365760"/>
+          </a:xfrm>
+          <a:prstGeom prst="rect">
+            <a:avLst/>
+          </a:prstGeom>
+          <a:noFill/>
+        </p:spPr>
+        <p:txBody>
+          <a:bodyPr wrap="square" anchor="t">
+            <a:spAutoFit/>
+          </a:bodyPr>
+          <a:lstStyle/>
+          <a:p>
+            <a:pPr algn="l"/>
+            <a:r>
+              <a:rPr sz="1400" b="1" i="0">
+                <a:solidFill>
+                  <a:srgbClr val="041E42"/>
+                </a:solidFill>
+              </a:rPr>
+              <a:t>Confidence-gated auto-reply</a:t>
+            </a:r>
+          </a:p>
+        </p:txBody>
+      </p:sp>
+      <p:sp>
+        <p:nvSpPr>
+          <p:cNvPr id="29" name="TextBox 28"/>
+          <p:cNvSpPr txBox="1"/>
+          <p:nvPr/>
+        </p:nvSpPr>
+        <p:spPr>
+          <a:xfrm>
+            <a:off x="2194560" y="4818888"/>
+            <a:ext cx="9326880" cy="594360"/>
+          </a:xfrm>
+          <a:prstGeom prst="rect">
+            <a:avLst/>
+          </a:prstGeom>
+          <a:noFill/>
+        </p:spPr>
+        <p:txBody>
+          <a:bodyPr wrap="square" anchor="t">
+            <a:spAutoFit/>
+          </a:bodyPr>
+          <a:lstStyle/>
+          <a:p>
+            <a:pPr algn="l"/>
+            <a:r>
+              <a:rPr sz="1050" b="0" i="0">
+                <a:solidFill>
+                  <a:srgbClr val="333333"/>
+                </a:solidFill>
+              </a:rPr>
+              <a:t>Introduce a confidence gate on the reply generator: top-confidence drafts are queued for auto-send and the analyst only reviews the mid- and low-confidence tail.  As agreement stays high, gradually raise the auto-send threshold — HITL winds down to sampling / audit only.</a:t>
+            </a:r>
+          </a:p>
+        </p:txBody>
+      </p:sp>
+      <p:sp>
+        <p:nvSpPr>
+          <p:cNvPr id="30" name="Rectangle 29"/>
+          <p:cNvSpPr/>
+          <p:nvPr/>
+        </p:nvSpPr>
+        <p:spPr>
+          <a:xfrm>
+            <a:off x="457200" y="5440680"/>
+            <a:ext cx="11247120" cy="868680"/>
           </a:xfrm>
           <a:prstGeom prst="rect">
             <a:avLst/>
@@ -18875,6 +19669,826 @@
       </p:sp>
       <p:sp>
         <p:nvSpPr>
+          <p:cNvPr id="31" name="TextBox 30"/>
+          <p:cNvSpPr txBox="1"/>
+          <p:nvPr/>
+        </p:nvSpPr>
+        <p:spPr>
+          <a:xfrm>
+            <a:off x="640080" y="5532120"/>
+            <a:ext cx="10972800" cy="320040"/>
+          </a:xfrm>
+          <a:prstGeom prst="rect">
+            <a:avLst/>
+          </a:prstGeom>
+          <a:noFill/>
+        </p:spPr>
+        <p:txBody>
+          <a:bodyPr wrap="square" anchor="t">
+            <a:spAutoFit/>
+          </a:bodyPr>
+          <a:lstStyle/>
+          <a:p>
+            <a:pPr algn="l"/>
+            <a:r>
+              <a:rPr sz="1100" b="1" i="0">
+                <a:solidFill>
+                  <a:srgbClr val="0071DC"/>
+                </a:solidFill>
+              </a:rPr>
+              <a:t>GUIDING PRINCIPLE</a:t>
+            </a:r>
+          </a:p>
+        </p:txBody>
+      </p:sp>
+      <p:sp>
+        <p:nvSpPr>
+          <p:cNvPr id="32" name="TextBox 31"/>
+          <p:cNvSpPr txBox="1"/>
+          <p:nvPr/>
+        </p:nvSpPr>
+        <p:spPr>
+          <a:xfrm>
+            <a:off x="640080" y="5852160"/>
+            <a:ext cx="10972800" cy="457200"/>
+          </a:xfrm>
+          <a:prstGeom prst="rect">
+            <a:avLst/>
+          </a:prstGeom>
+          <a:noFill/>
+        </p:spPr>
+        <p:txBody>
+          <a:bodyPr wrap="square" anchor="t">
+            <a:spAutoFit/>
+          </a:bodyPr>
+          <a:lstStyle/>
+          <a:p>
+            <a:pPr algn="l"/>
+            <a:r>
+              <a:rPr sz="1100" b="0" i="0">
+                <a:solidFill>
+                  <a:srgbClr val="333333"/>
+                </a:solidFill>
+              </a:rPr>
+              <a:t>HITL is the ladder, not the ceiling — every stage produces the training signal that lets the next stage automate more.  Each horizon is admissible only when the previous one is measurably successful.</a:t>
+            </a:r>
+          </a:p>
+        </p:txBody>
+      </p:sp>
+      <p:sp>
+        <p:nvSpPr>
+          <p:cNvPr id="33" name="TextBox 32"/>
+          <p:cNvSpPr txBox="1"/>
+          <p:nvPr/>
+        </p:nvSpPr>
+        <p:spPr>
+          <a:xfrm>
+            <a:off x="365760" y="6537960"/>
+            <a:ext cx="8229600" cy="274320"/>
+          </a:xfrm>
+          <a:prstGeom prst="rect">
+            <a:avLst/>
+          </a:prstGeom>
+          <a:noFill/>
+        </p:spPr>
+        <p:txBody>
+          <a:bodyPr wrap="square" anchor="t">
+            <a:spAutoFit/>
+          </a:bodyPr>
+          <a:lstStyle/>
+          <a:p>
+            <a:pPr algn="l"/>
+            <a:r>
+              <a:rPr sz="900" b="0" i="0">
+                <a:solidFill>
+                  <a:srgbClr val="666666"/>
+                </a:solidFill>
+              </a:rPr>
+              <a:t>Retail Sentiment Intelligence  ·  BITS ZG628T Dissertation  ·  Vishal Singh  ·  Post Mid-Semester Presentation</a:t>
+            </a:r>
+          </a:p>
+        </p:txBody>
+      </p:sp>
+      <p:sp>
+        <p:nvSpPr>
+          <p:cNvPr id="34" name="TextBox 33"/>
+          <p:cNvSpPr txBox="1"/>
+          <p:nvPr/>
+        </p:nvSpPr>
+        <p:spPr>
+          <a:xfrm>
+            <a:off x="10972800" y="6537960"/>
+            <a:ext cx="1097280" cy="274320"/>
+          </a:xfrm>
+          <a:prstGeom prst="rect">
+            <a:avLst/>
+          </a:prstGeom>
+          <a:noFill/>
+        </p:spPr>
+        <p:txBody>
+          <a:bodyPr wrap="square" anchor="t">
+            <a:spAutoFit/>
+          </a:bodyPr>
+          <a:lstStyle/>
+          <a:p>
+            <a:pPr algn="r"/>
+            <a:r>
+              <a:rPr sz="900" b="0" i="0">
+                <a:solidFill>
+                  <a:srgbClr val="666666"/>
+                </a:solidFill>
+              </a:rPr>
+              <a:t>21 / 24</a:t>
+            </a:r>
+          </a:p>
+        </p:txBody>
+      </p:sp>
+    </p:spTree>
+  </p:cSld>
+  <p:clrMapOvr>
+    <a:masterClrMapping/>
+  </p:clrMapOvr>
+</p:sld>
+</file>
+
+<file path=ppt/slides/slide22.xml><?xml version="1.0" encoding="utf-8"?>
+<p:sld xmlns:a="http://schemas.openxmlformats.org/drawingml/2006/main" xmlns:p="http://schemas.openxmlformats.org/presentationml/2006/main" xmlns:r="http://schemas.openxmlformats.org/officeDocument/2006/relationships">
+  <p:cSld>
+    <p:spTree>
+      <p:nvGrpSpPr>
+        <p:cNvPr id="1" name=""/>
+        <p:cNvGrpSpPr/>
+        <p:nvPr/>
+      </p:nvGrpSpPr>
+      <p:grpSpPr/>
+      <p:sp>
+        <p:nvSpPr>
+          <p:cNvPr id="2" name="Rectangle 1"/>
+          <p:cNvSpPr/>
+          <p:nvPr/>
+        </p:nvSpPr>
+        <p:spPr>
+          <a:xfrm>
+            <a:off x="0" y="0"/>
+            <a:ext cx="12191695" cy="777240"/>
+          </a:xfrm>
+          <a:prstGeom prst="rect">
+            <a:avLst/>
+          </a:prstGeom>
+          <a:solidFill>
+            <a:srgbClr val="041E42"/>
+          </a:solidFill>
+          <a:ln>
+            <a:noFill/>
+          </a:ln>
+          <a:effectLst/>
+        </p:spPr>
+        <p:style>
+          <a:lnRef idx="1">
+            <a:schemeClr val="accent1"/>
+          </a:lnRef>
+          <a:fillRef idx="3">
+            <a:schemeClr val="accent1"/>
+          </a:fillRef>
+          <a:effectRef idx="2">
+            <a:schemeClr val="accent1"/>
+          </a:effectRef>
+          <a:fontRef idx="minor">
+            <a:schemeClr val="lt1"/>
+          </a:fontRef>
+        </p:style>
+        <p:txBody>
+          <a:bodyPr rtlCol="0" anchor="ctr"/>
+          <a:lstStyle/>
+          <a:p>
+            <a:pPr algn="ctr"/>
+          </a:p>
+        </p:txBody>
+      </p:sp>
+      <p:sp>
+        <p:nvSpPr>
+          <p:cNvPr id="3" name="TextBox 2"/>
+          <p:cNvSpPr txBox="1"/>
+          <p:nvPr/>
+        </p:nvSpPr>
+        <p:spPr>
+          <a:xfrm>
+            <a:off x="365760" y="109728"/>
+            <a:ext cx="11430000" cy="457200"/>
+          </a:xfrm>
+          <a:prstGeom prst="rect">
+            <a:avLst/>
+          </a:prstGeom>
+          <a:noFill/>
+        </p:spPr>
+        <p:txBody>
+          <a:bodyPr wrap="square" anchor="t">
+            <a:spAutoFit/>
+          </a:bodyPr>
+          <a:lstStyle/>
+          <a:p>
+            <a:pPr algn="l"/>
+            <a:r>
+              <a:rPr sz="2600" b="1" i="0">
+                <a:solidFill>
+                  <a:srgbClr val="FFFFFF"/>
+                </a:solidFill>
+              </a:rPr>
+              <a:t>Future Work  —  Track 2  ·  Bilingual   +   Track 3  ·  Multi-Platform</a:t>
+            </a:r>
+          </a:p>
+        </p:txBody>
+      </p:sp>
+      <p:sp>
+        <p:nvSpPr>
+          <p:cNvPr id="4" name="TextBox 3"/>
+          <p:cNvSpPr txBox="1"/>
+          <p:nvPr/>
+        </p:nvSpPr>
+        <p:spPr>
+          <a:xfrm>
+            <a:off x="365760" y="457200"/>
+            <a:ext cx="11430000" cy="320040"/>
+          </a:xfrm>
+          <a:prstGeom prst="rect">
+            <a:avLst/>
+          </a:prstGeom>
+          <a:noFill/>
+        </p:spPr>
+        <p:txBody>
+          <a:bodyPr wrap="square" anchor="t">
+            <a:spAutoFit/>
+          </a:bodyPr>
+          <a:lstStyle/>
+          <a:p>
+            <a:pPr algn="l"/>
+            <a:r>
+              <a:rPr sz="1200" b="0" i="0">
+                <a:solidFill>
+                  <a:srgbClr val="E8F4FD"/>
+                </a:solidFill>
+              </a:rPr>
+              <a:t>The other two tracks that widen the pipeline's coverage while Track 1 winds HITL down</a:t>
+            </a:r>
+          </a:p>
+        </p:txBody>
+      </p:sp>
+      <p:sp>
+        <p:nvSpPr>
+          <p:cNvPr id="5" name="Rectangle 4"/>
+          <p:cNvSpPr/>
+          <p:nvPr/>
+        </p:nvSpPr>
+        <p:spPr>
+          <a:xfrm>
+            <a:off x="0" y="777240"/>
+            <a:ext cx="12191695" cy="45720"/>
+          </a:xfrm>
+          <a:prstGeom prst="rect">
+            <a:avLst/>
+          </a:prstGeom>
+          <a:solidFill>
+            <a:srgbClr val="FFC220"/>
+          </a:solidFill>
+          <a:ln>
+            <a:noFill/>
+          </a:ln>
+          <a:effectLst/>
+        </p:spPr>
+        <p:style>
+          <a:lnRef idx="1">
+            <a:schemeClr val="accent1"/>
+          </a:lnRef>
+          <a:fillRef idx="3">
+            <a:schemeClr val="accent1"/>
+          </a:fillRef>
+          <a:effectRef idx="2">
+            <a:schemeClr val="accent1"/>
+          </a:effectRef>
+          <a:fontRef idx="minor">
+            <a:schemeClr val="lt1"/>
+          </a:fontRef>
+        </p:style>
+        <p:txBody>
+          <a:bodyPr rtlCol="0" anchor="ctr"/>
+          <a:lstStyle/>
+          <a:p>
+            <a:pPr algn="ctr"/>
+          </a:p>
+        </p:txBody>
+      </p:sp>
+      <p:sp>
+        <p:nvSpPr>
+          <p:cNvPr id="6" name="Rectangle 5"/>
+          <p:cNvSpPr/>
+          <p:nvPr/>
+        </p:nvSpPr>
+        <p:spPr>
+          <a:xfrm>
+            <a:off x="457200" y="960120"/>
+            <a:ext cx="5532120" cy="502920"/>
+          </a:xfrm>
+          <a:prstGeom prst="rect">
+            <a:avLst/>
+          </a:prstGeom>
+          <a:solidFill>
+            <a:srgbClr val="0071DC"/>
+          </a:solidFill>
+          <a:ln>
+            <a:noFill/>
+          </a:ln>
+          <a:effectLst/>
+        </p:spPr>
+        <p:style>
+          <a:lnRef idx="1">
+            <a:schemeClr val="accent1"/>
+          </a:lnRef>
+          <a:fillRef idx="3">
+            <a:schemeClr val="accent1"/>
+          </a:fillRef>
+          <a:effectRef idx="2">
+            <a:schemeClr val="accent1"/>
+          </a:effectRef>
+          <a:fontRef idx="minor">
+            <a:schemeClr val="lt1"/>
+          </a:fontRef>
+        </p:style>
+        <p:txBody>
+          <a:bodyPr rtlCol="0" anchor="ctr"/>
+          <a:lstStyle/>
+          <a:p>
+            <a:pPr algn="ctr"/>
+          </a:p>
+        </p:txBody>
+      </p:sp>
+      <p:sp>
+        <p:nvSpPr>
+          <p:cNvPr id="7" name="TextBox 6"/>
+          <p:cNvSpPr txBox="1"/>
+          <p:nvPr/>
+        </p:nvSpPr>
+        <p:spPr>
+          <a:xfrm>
+            <a:off x="594360" y="1005840"/>
+            <a:ext cx="5257800" cy="411480"/>
+          </a:xfrm>
+          <a:prstGeom prst="rect">
+            <a:avLst/>
+          </a:prstGeom>
+          <a:noFill/>
+        </p:spPr>
+        <p:txBody>
+          <a:bodyPr wrap="square" anchor="t">
+            <a:spAutoFit/>
+          </a:bodyPr>
+          <a:lstStyle/>
+          <a:p>
+            <a:pPr algn="l"/>
+            <a:r>
+              <a:rPr sz="1400" b="1" i="0">
+                <a:solidFill>
+                  <a:srgbClr val="FFFFFF"/>
+                </a:solidFill>
+              </a:rPr>
+              <a:t>TRACK 2  ·  BILINGUAL  →  MULTILINGUAL</a:t>
+            </a:r>
+          </a:p>
+        </p:txBody>
+      </p:sp>
+      <p:sp>
+        <p:nvSpPr>
+          <p:cNvPr id="8" name="Rectangle 7"/>
+          <p:cNvSpPr/>
+          <p:nvPr/>
+        </p:nvSpPr>
+        <p:spPr>
+          <a:xfrm>
+            <a:off x="457200" y="1463040"/>
+            <a:ext cx="5532120" cy="5074920"/>
+          </a:xfrm>
+          <a:prstGeom prst="rect">
+            <a:avLst/>
+          </a:prstGeom>
+          <a:solidFill>
+            <a:srgbClr val="F5F5F5"/>
+          </a:solidFill>
+          <a:ln>
+            <a:solidFill>
+              <a:srgbClr val="0071DC"/>
+            </a:solidFill>
+          </a:ln>
+          <a:effectLst/>
+        </p:spPr>
+        <p:style>
+          <a:lnRef idx="1">
+            <a:schemeClr val="accent1"/>
+          </a:lnRef>
+          <a:fillRef idx="3">
+            <a:schemeClr val="accent1"/>
+          </a:fillRef>
+          <a:effectRef idx="2">
+            <a:schemeClr val="accent1"/>
+          </a:effectRef>
+          <a:fontRef idx="minor">
+            <a:schemeClr val="lt1"/>
+          </a:fontRef>
+        </p:style>
+        <p:txBody>
+          <a:bodyPr rtlCol="0" anchor="ctr"/>
+          <a:lstStyle/>
+          <a:p>
+            <a:pPr algn="ctr"/>
+          </a:p>
+        </p:txBody>
+      </p:sp>
+      <p:sp>
+        <p:nvSpPr>
+          <p:cNvPr id="9" name="TextBox 8"/>
+          <p:cNvSpPr txBox="1"/>
+          <p:nvPr/>
+        </p:nvSpPr>
+        <p:spPr>
+          <a:xfrm>
+            <a:off x="640080" y="1554480"/>
+            <a:ext cx="5166360" cy="365760"/>
+          </a:xfrm>
+          <a:prstGeom prst="rect">
+            <a:avLst/>
+          </a:prstGeom>
+          <a:noFill/>
+        </p:spPr>
+        <p:txBody>
+          <a:bodyPr wrap="square" anchor="t">
+            <a:spAutoFit/>
+          </a:bodyPr>
+          <a:lstStyle/>
+          <a:p>
+            <a:pPr algn="l"/>
+            <a:r>
+              <a:rPr sz="1050" b="0" i="0">
+                <a:solidFill>
+                  <a:srgbClr val="333333"/>
+                </a:solidFill>
+              </a:rPr>
+              <a:t>Why:  Indian retail subreddits are ~30 % of Walmart-family mentions but the current  langdetect  →  English-only  filter silently drops them.</a:t>
+            </a:r>
+          </a:p>
+        </p:txBody>
+      </p:sp>
+      <p:sp>
+        <p:nvSpPr>
+          <p:cNvPr id="10" name="TextBox 9"/>
+          <p:cNvSpPr txBox="1"/>
+          <p:nvPr/>
+        </p:nvSpPr>
+        <p:spPr>
+          <a:xfrm>
+            <a:off x="640080" y="1965960"/>
+            <a:ext cx="5166360" cy="274320"/>
+          </a:xfrm>
+          <a:prstGeom prst="rect">
+            <a:avLst/>
+          </a:prstGeom>
+          <a:noFill/>
+        </p:spPr>
+        <p:txBody>
+          <a:bodyPr wrap="square" anchor="t">
+            <a:spAutoFit/>
+          </a:bodyPr>
+          <a:lstStyle/>
+          <a:p>
+            <a:pPr algn="l"/>
+            <a:r>
+              <a:rPr sz="1150" b="1" i="0">
+                <a:solidFill>
+                  <a:srgbClr val="0071DC"/>
+                </a:solidFill>
+              </a:rPr>
+              <a:t>Concrete deliverables</a:t>
+            </a:r>
+          </a:p>
+        </p:txBody>
+      </p:sp>
+      <p:sp>
+        <p:nvSpPr>
+          <p:cNvPr id="11" name="TextBox 10"/>
+          <p:cNvSpPr txBox="1"/>
+          <p:nvPr/>
+        </p:nvSpPr>
+        <p:spPr>
+          <a:xfrm>
+            <a:off x="685800" y="2286000"/>
+            <a:ext cx="228600" cy="274320"/>
+          </a:xfrm>
+          <a:prstGeom prst="rect">
+            <a:avLst/>
+          </a:prstGeom>
+          <a:noFill/>
+        </p:spPr>
+        <p:txBody>
+          <a:bodyPr wrap="square" anchor="t">
+            <a:spAutoFit/>
+          </a:bodyPr>
+          <a:lstStyle/>
+          <a:p>
+            <a:pPr algn="l"/>
+            <a:r>
+              <a:rPr sz="1100" b="1" i="0">
+                <a:solidFill>
+                  <a:srgbClr val="0071DC"/>
+                </a:solidFill>
+              </a:rPr>
+              <a:t>•</a:t>
+            </a:r>
+          </a:p>
+        </p:txBody>
+      </p:sp>
+      <p:sp>
+        <p:nvSpPr>
+          <p:cNvPr id="12" name="TextBox 11"/>
+          <p:cNvSpPr txBox="1"/>
+          <p:nvPr/>
+        </p:nvSpPr>
+        <p:spPr>
+          <a:xfrm>
+            <a:off x="868680" y="2286000"/>
+            <a:ext cx="4983480" cy="777240"/>
+          </a:xfrm>
+          <a:prstGeom prst="rect">
+            <a:avLst/>
+          </a:prstGeom>
+          <a:noFill/>
+        </p:spPr>
+        <p:txBody>
+          <a:bodyPr wrap="square" anchor="t">
+            <a:spAutoFit/>
+          </a:bodyPr>
+          <a:lstStyle/>
+          <a:p>
+            <a:pPr algn="l"/>
+            <a:r>
+              <a:rPr sz="1000" b="0" i="0">
+                <a:solidFill>
+                  <a:srgbClr val="333333"/>
+                </a:solidFill>
+              </a:rPr>
+              <a:t>Extend  langdetect  to  hi + en  (later  ta / te / bn);  code-mixed 'Hinglish' handled with a mixed-script tokenizer.</a:t>
+            </a:r>
+          </a:p>
+        </p:txBody>
+      </p:sp>
+      <p:sp>
+        <p:nvSpPr>
+          <p:cNvPr id="13" name="TextBox 12"/>
+          <p:cNvSpPr txBox="1"/>
+          <p:nvPr/>
+        </p:nvSpPr>
+        <p:spPr>
+          <a:xfrm>
+            <a:off x="685800" y="3108960"/>
+            <a:ext cx="228600" cy="274320"/>
+          </a:xfrm>
+          <a:prstGeom prst="rect">
+            <a:avLst/>
+          </a:prstGeom>
+          <a:noFill/>
+        </p:spPr>
+        <p:txBody>
+          <a:bodyPr wrap="square" anchor="t">
+            <a:spAutoFit/>
+          </a:bodyPr>
+          <a:lstStyle/>
+          <a:p>
+            <a:pPr algn="l"/>
+            <a:r>
+              <a:rPr sz="1100" b="1" i="0">
+                <a:solidFill>
+                  <a:srgbClr val="0071DC"/>
+                </a:solidFill>
+              </a:rPr>
+              <a:t>•</a:t>
+            </a:r>
+          </a:p>
+        </p:txBody>
+      </p:sp>
+      <p:sp>
+        <p:nvSpPr>
+          <p:cNvPr id="14" name="TextBox 13"/>
+          <p:cNvSpPr txBox="1"/>
+          <p:nvPr/>
+        </p:nvSpPr>
+        <p:spPr>
+          <a:xfrm>
+            <a:off x="868680" y="3108960"/>
+            <a:ext cx="4983480" cy="777240"/>
+          </a:xfrm>
+          <a:prstGeom prst="rect">
+            <a:avLst/>
+          </a:prstGeom>
+          <a:noFill/>
+        </p:spPr>
+        <p:txBody>
+          <a:bodyPr wrap="square" anchor="t">
+            <a:spAutoFit/>
+          </a:bodyPr>
+          <a:lstStyle/>
+          <a:p>
+            <a:pPr algn="l"/>
+            <a:r>
+              <a:rPr sz="1000" b="0" i="0">
+                <a:solidFill>
+                  <a:srgbClr val="333333"/>
+                </a:solidFill>
+              </a:rPr>
+              <a:t>Ingestion-time translation via NLLB-200 (open-weights, 3.3 B) so downstream models stay English-only —  or —  fine-tune ModernBERT on native scripts.</a:t>
+            </a:r>
+          </a:p>
+        </p:txBody>
+      </p:sp>
+      <p:sp>
+        <p:nvSpPr>
+          <p:cNvPr id="15" name="TextBox 14"/>
+          <p:cNvSpPr txBox="1"/>
+          <p:nvPr/>
+        </p:nvSpPr>
+        <p:spPr>
+          <a:xfrm>
+            <a:off x="685800" y="3931920"/>
+            <a:ext cx="228600" cy="274320"/>
+          </a:xfrm>
+          <a:prstGeom prst="rect">
+            <a:avLst/>
+          </a:prstGeom>
+          <a:noFill/>
+        </p:spPr>
+        <p:txBody>
+          <a:bodyPr wrap="square" anchor="t">
+            <a:spAutoFit/>
+          </a:bodyPr>
+          <a:lstStyle/>
+          <a:p>
+            <a:pPr algn="l"/>
+            <a:r>
+              <a:rPr sz="1100" b="1" i="0">
+                <a:solidFill>
+                  <a:srgbClr val="0071DC"/>
+                </a:solidFill>
+              </a:rPr>
+              <a:t>•</a:t>
+            </a:r>
+          </a:p>
+        </p:txBody>
+      </p:sp>
+      <p:sp>
+        <p:nvSpPr>
+          <p:cNvPr id="16" name="TextBox 15"/>
+          <p:cNvSpPr txBox="1"/>
+          <p:nvPr/>
+        </p:nvSpPr>
+        <p:spPr>
+          <a:xfrm>
+            <a:off x="868680" y="3931920"/>
+            <a:ext cx="4983480" cy="777240"/>
+          </a:xfrm>
+          <a:prstGeom prst="rect">
+            <a:avLst/>
+          </a:prstGeom>
+          <a:noFill/>
+        </p:spPr>
+        <p:txBody>
+          <a:bodyPr wrap="square" anchor="t">
+            <a:spAutoFit/>
+          </a:bodyPr>
+          <a:lstStyle/>
+          <a:p>
+            <a:pPr algn="l"/>
+            <a:r>
+              <a:rPr sz="1000" b="0" i="0">
+                <a:solidFill>
+                  <a:srgbClr val="333333"/>
+                </a:solidFill>
+              </a:rPr>
+              <a:t>Extend aspect taxonomy for Indic retail idioms (“bill karo” for billing, “delivery kab” for late shipping).</a:t>
+            </a:r>
+          </a:p>
+        </p:txBody>
+      </p:sp>
+      <p:sp>
+        <p:nvSpPr>
+          <p:cNvPr id="17" name="TextBox 16"/>
+          <p:cNvSpPr txBox="1"/>
+          <p:nvPr/>
+        </p:nvSpPr>
+        <p:spPr>
+          <a:xfrm>
+            <a:off x="685800" y="4754880"/>
+            <a:ext cx="228600" cy="274320"/>
+          </a:xfrm>
+          <a:prstGeom prst="rect">
+            <a:avLst/>
+          </a:prstGeom>
+          <a:noFill/>
+        </p:spPr>
+        <p:txBody>
+          <a:bodyPr wrap="square" anchor="t">
+            <a:spAutoFit/>
+          </a:bodyPr>
+          <a:lstStyle/>
+          <a:p>
+            <a:pPr algn="l"/>
+            <a:r>
+              <a:rPr sz="1100" b="1" i="0">
+                <a:solidFill>
+                  <a:srgbClr val="0071DC"/>
+                </a:solidFill>
+              </a:rPr>
+              <a:t>•</a:t>
+            </a:r>
+          </a:p>
+        </p:txBody>
+      </p:sp>
+      <p:sp>
+        <p:nvSpPr>
+          <p:cNvPr id="18" name="TextBox 17"/>
+          <p:cNvSpPr txBox="1"/>
+          <p:nvPr/>
+        </p:nvSpPr>
+        <p:spPr>
+          <a:xfrm>
+            <a:off x="868680" y="4754880"/>
+            <a:ext cx="4983480" cy="777240"/>
+          </a:xfrm>
+          <a:prstGeom prst="rect">
+            <a:avLst/>
+          </a:prstGeom>
+          <a:noFill/>
+        </p:spPr>
+        <p:txBody>
+          <a:bodyPr wrap="square" anchor="t">
+            <a:spAutoFit/>
+          </a:bodyPr>
+          <a:lstStyle/>
+          <a:p>
+            <a:pPr algn="l"/>
+            <a:r>
+              <a:rPr sz="1000" b="0" i="0">
+                <a:solidFill>
+                  <a:srgbClr val="333333"/>
+                </a:solidFill>
+              </a:rPr>
+              <a:t>Native-speaker analyst validation loop —  same HITL flow, new language pool.</a:t>
+            </a:r>
+          </a:p>
+        </p:txBody>
+      </p:sp>
+      <p:sp>
+        <p:nvSpPr>
+          <p:cNvPr id="19" name="Rectangle 18"/>
+          <p:cNvSpPr/>
+          <p:nvPr/>
+        </p:nvSpPr>
+        <p:spPr>
+          <a:xfrm>
+            <a:off x="457200" y="5989320"/>
+            <a:ext cx="5532120" cy="548640"/>
+          </a:xfrm>
+          <a:prstGeom prst="rect">
+            <a:avLst/>
+          </a:prstGeom>
+          <a:solidFill>
+            <a:srgbClr val="E8F4FD"/>
+          </a:solidFill>
+          <a:ln>
+            <a:solidFill>
+              <a:srgbClr val="0071DC"/>
+            </a:solidFill>
+          </a:ln>
+          <a:effectLst/>
+        </p:spPr>
+        <p:style>
+          <a:lnRef idx="1">
+            <a:schemeClr val="accent1"/>
+          </a:lnRef>
+          <a:fillRef idx="3">
+            <a:schemeClr val="accent1"/>
+          </a:fillRef>
+          <a:effectRef idx="2">
+            <a:schemeClr val="accent1"/>
+          </a:effectRef>
+          <a:fontRef idx="minor">
+            <a:schemeClr val="lt1"/>
+          </a:fontRef>
+        </p:style>
+        <p:txBody>
+          <a:bodyPr rtlCol="0" anchor="ctr"/>
+          <a:lstStyle/>
+          <a:p>
+            <a:pPr algn="ctr"/>
+          </a:p>
+        </p:txBody>
+      </p:sp>
+      <p:sp>
+        <p:nvSpPr>
           <p:cNvPr id="20" name="TextBox 19"/>
           <p:cNvSpPr txBox="1"/>
           <p:nvPr/>
@@ -19514,7 +21128,7 @@
                   <a:srgbClr val="666666"/>
                 </a:solidFill>
               </a:rPr>
-              <a:t>21 / 23</a:t>
+              <a:t>22 / 24</a:t>
             </a:r>
           </a:p>
         </p:txBody>
@@ -19527,7 +21141,7 @@
 </p:sld>
 </file>
 
-<file path=ppt/slides/slide22.xml><?xml version="1.0" encoding="utf-8"?>
+<file path=ppt/slides/slide23.xml><?xml version="1.0" encoding="utf-8"?>
 <p:sld xmlns:a="http://schemas.openxmlformats.org/drawingml/2006/main" xmlns:p="http://schemas.openxmlformats.org/presentationml/2006/main" xmlns:r="http://schemas.openxmlformats.org/officeDocument/2006/relationships">
   <p:cSld>
     <p:spTree>
@@ -20497,7 +22111,7 @@
                   <a:srgbClr val="666666"/>
                 </a:solidFill>
               </a:rPr>
-              <a:t>22 / 23</a:t>
+              <a:t>23 / 24</a:t>
             </a:r>
           </a:p>
         </p:txBody>
@@ -20510,7 +22124,7 @@
 </p:sld>
 </file>
 
-<file path=ppt/slides/slide23.xml><?xml version="1.0" encoding="utf-8"?>
+<file path=ppt/slides/slide24.xml><?xml version="1.0" encoding="utf-8"?>
 <p:sld xmlns:a="http://schemas.openxmlformats.org/drawingml/2006/main" xmlns:p="http://schemas.openxmlformats.org/presentationml/2006/main" xmlns:r="http://schemas.openxmlformats.org/officeDocument/2006/relationships">
   <p:cSld>
     <p:bg>
@@ -21628,7 +23242,7 @@
                   <a:srgbClr val="666666"/>
                 </a:solidFill>
               </a:rPr>
-              <a:t>3 / 23</a:t>
+              <a:t>3 / 24</a:t>
             </a:r>
           </a:p>
         </p:txBody>
@@ -22269,7 +23883,7 @@
                   <a:srgbClr val="666666"/>
                 </a:solidFill>
               </a:rPr>
-              <a:t>4 / 23</a:t>
+              <a:t>4 / 24</a:t>
             </a:r>
           </a:p>
         </p:txBody>
@@ -23583,7 +25197,7 @@
                   <a:srgbClr val="666666"/>
                 </a:solidFill>
               </a:rPr>
-              <a:t>5 / 23</a:t>
+              <a:t>5 / 24</a:t>
             </a:r>
           </a:p>
         </p:txBody>
@@ -24822,7 +26436,7 @@
                   <a:srgbClr val="666666"/>
                 </a:solidFill>
               </a:rPr>
-              <a:t>6 / 23</a:t>
+              <a:t>6 / 24</a:t>
             </a:r>
           </a:p>
         </p:txBody>
@@ -25869,7 +27483,7 @@
                   <a:srgbClr val="666666"/>
                 </a:solidFill>
               </a:rPr>
-              <a:t>7 / 23</a:t>
+              <a:t>7 / 24</a:t>
             </a:r>
           </a:p>
         </p:txBody>
@@ -27293,7 +28907,7 @@
                   <a:srgbClr val="666666"/>
                 </a:solidFill>
               </a:rPr>
-              <a:t>8 / 23</a:t>
+              <a:t>8 / 24</a:t>
             </a:r>
           </a:p>
         </p:txBody>
@@ -27949,7 +29563,7 @@
                   <a:srgbClr val="666666"/>
                 </a:solidFill>
               </a:rPr>
-              <a:t>9 / 23</a:t>
+              <a:t>9 / 24</a:t>
             </a:r>
           </a:p>
         </p:txBody>

--- a/docs/Sem_4/FINAL_PRESENTATION_VishalSingh_2020AA05641.pptx
+++ b/docs/Sem_4/FINAL_PRESENTATION_VishalSingh_2020AA05641.pptx
@@ -4931,7 +4931,7 @@
                   <a:srgbClr val="E8F4FD"/>
                 </a:solidFill>
               </a:rPr>
-              <a:t>Deterministic aggregation over the 8-aspect taxonomy — no LLM in the loop</a:t>
+              <a:t>Four-step pipeline over the 8-aspect taxonomy — deterministic, no LLM in the loop</a:t>
             </a:r>
           </a:p>
         </p:txBody>
@@ -4988,8 +4988,8 @@
         </p:nvSpPr>
         <p:spPr>
           <a:xfrm>
-            <a:off x="457200" y="960120"/>
-            <a:ext cx="3749039" cy="2011680"/>
+            <a:off x="457200" y="1005840"/>
+            <a:ext cx="2743200" cy="3291840"/>
           </a:xfrm>
           <a:prstGeom prst="rect">
             <a:avLst/>
@@ -5034,8 +5034,8 @@
         </p:nvSpPr>
         <p:spPr>
           <a:xfrm>
-            <a:off x="457200" y="960120"/>
-            <a:ext cx="3749039" cy="411480"/>
+            <a:off x="457200" y="1005840"/>
+            <a:ext cx="2743200" cy="548640"/>
           </a:xfrm>
           <a:prstGeom prst="rect">
             <a:avLst/>
@@ -5078,28 +5078,28 @@
         </p:nvSpPr>
         <p:spPr>
           <a:xfrm>
-            <a:off x="457200" y="1014984"/>
-            <a:ext cx="3749039" cy="320040"/>
-          </a:xfrm>
-          <a:prstGeom prst="rect">
-            <a:avLst/>
-          </a:prstGeom>
-          <a:noFill/>
-        </p:spPr>
-        <p:txBody>
-          <a:bodyPr wrap="square" anchor="t">
+            <a:off x="548640" y="1078992"/>
+            <a:ext cx="411480" cy="411480"/>
+          </a:xfrm>
+          <a:prstGeom prst="rect">
+            <a:avLst/>
+          </a:prstGeom>
+          <a:noFill/>
+        </p:spPr>
+        <p:txBody>
+          <a:bodyPr wrap="square" anchor="ctr">
             <a:spAutoFit/>
           </a:bodyPr>
           <a:lstStyle/>
           <a:p>
             <a:pPr algn="ctr"/>
             <a:r>
-              <a:rPr sz="1300" b="1" i="0">
+              <a:rPr sz="2000" b="1" i="0">
                 <a:solidFill>
                   <a:srgbClr val="FFFFFF"/>
                 </a:solidFill>
               </a:rPr>
-              <a:t>Pain Points</a:t>
+              <a:t>1</a:t>
             </a:r>
           </a:p>
         </p:txBody>
@@ -5112,8 +5112,8 @@
         </p:nvSpPr>
         <p:spPr>
           <a:xfrm>
-            <a:off x="594360" y="1417320"/>
-            <a:ext cx="3474720" cy="1463040"/>
+            <a:off x="1005840" y="1051560"/>
+            <a:ext cx="2103120" cy="502920"/>
           </a:xfrm>
           <a:prstGeom prst="rect">
             <a:avLst/>
@@ -5126,50 +5126,276 @@
           </a:bodyPr>
           <a:lstStyle/>
           <a:p>
+            <a:pPr algn="l"/>
+            <a:r>
+              <a:rPr sz="1250" b="1" i="0">
+                <a:solidFill>
+                  <a:srgbClr val="FFFFFF"/>
+                </a:solidFill>
+              </a:rPr>
+              <a:t>Group posts</a:t>
+            </a:r>
+          </a:p>
+          <a:p>
+            <a:pPr algn="l"/>
+            <a:r>
+              <a:rPr sz="1250" b="1" i="0">
+                <a:solidFill>
+                  <a:srgbClr val="FFFFFF"/>
+                </a:solidFill>
+              </a:rPr>
+              <a:t>by aspect</a:t>
+            </a:r>
+          </a:p>
+        </p:txBody>
+      </p:sp>
+      <p:sp>
+        <p:nvSpPr>
+          <p:cNvPr id="10" name="TextBox 9"/>
+          <p:cNvSpPr txBox="1"/>
+          <p:nvPr/>
+        </p:nvSpPr>
+        <p:spPr>
+          <a:xfrm>
+            <a:off x="594360" y="1664208"/>
+            <a:ext cx="2468880" cy="1234440"/>
+          </a:xfrm>
+          <a:prstGeom prst="rect">
+            <a:avLst/>
+          </a:prstGeom>
+          <a:noFill/>
+        </p:spPr>
+        <p:txBody>
+          <a:bodyPr wrap="square" anchor="t">
+            <a:spAutoFit/>
+          </a:bodyPr>
+          <a:lstStyle/>
+          <a:p>
+            <a:pPr algn="l"/>
+            <a:r>
+              <a:rPr sz="1050" b="0" i="0">
+                <a:solidFill>
+                  <a:srgbClr val="333333"/>
+                </a:solidFill>
+              </a:rPr>
+              <a:t>For each retail aspect,</a:t>
+            </a:r>
+          </a:p>
+          <a:p>
+            <a:pPr algn="l"/>
+            <a:r>
+              <a:rPr sz="1050" b="0" i="0">
+                <a:solidFill>
+                  <a:srgbClr val="333333"/>
+                </a:solidFill>
+              </a:rPr>
+              <a:t>count posts from competitor</a:t>
+            </a:r>
+          </a:p>
+          <a:p>
+            <a:pPr algn="l"/>
+            <a:r>
+              <a:rPr sz="1050" b="0" i="0">
+                <a:solidFill>
+                  <a:srgbClr val="333333"/>
+                </a:solidFill>
+              </a:rPr>
+              <a:t>subs by sentiment:</a:t>
+            </a:r>
+          </a:p>
+          <a:p>
+            <a:pPr algn="l"/>
+            <a:r>
+              <a:rPr sz="1050" b="0" i="0">
+                <a:solidFill>
+                  <a:srgbClr val="333333"/>
+                </a:solidFill>
+              </a:rPr>
+              <a:t>negative · positive · neutral</a:t>
+            </a:r>
+          </a:p>
+        </p:txBody>
+      </p:sp>
+      <p:sp>
+        <p:nvSpPr>
+          <p:cNvPr id="11" name="Rectangle 10"/>
+          <p:cNvSpPr/>
+          <p:nvPr/>
+        </p:nvSpPr>
+        <p:spPr>
+          <a:xfrm>
+            <a:off x="594360" y="2926080"/>
+            <a:ext cx="2468880" cy="411480"/>
+          </a:xfrm>
+          <a:prstGeom prst="rect">
+            <a:avLst/>
+          </a:prstGeom>
+          <a:solidFill>
+            <a:srgbClr val="E8F4FD"/>
+          </a:solidFill>
+          <a:ln>
+            <a:solidFill>
+              <a:srgbClr val="0071DC"/>
+            </a:solidFill>
+          </a:ln>
+          <a:effectLst/>
+        </p:spPr>
+        <p:style>
+          <a:lnRef idx="1">
+            <a:schemeClr val="accent1"/>
+          </a:lnRef>
+          <a:fillRef idx="3">
+            <a:schemeClr val="accent1"/>
+          </a:fillRef>
+          <a:effectRef idx="2">
+            <a:schemeClr val="accent1"/>
+          </a:effectRef>
+          <a:fontRef idx="minor">
+            <a:schemeClr val="lt1"/>
+          </a:fontRef>
+        </p:style>
+        <p:txBody>
+          <a:bodyPr rtlCol="0" anchor="ctr"/>
+          <a:lstStyle/>
+          <a:p>
             <a:pPr algn="ctr"/>
-            <a:r>
-              <a:rPr sz="1150" b="0" i="0">
-                <a:solidFill>
-                  <a:srgbClr val="333333"/>
-                </a:solidFill>
-              </a:rPr>
-              <a:t>Ranked table of competitor</a:t>
-            </a:r>
-          </a:p>
+          </a:p>
+        </p:txBody>
+      </p:sp>
+      <p:sp>
+        <p:nvSpPr>
+          <p:cNvPr id="12" name="TextBox 11"/>
+          <p:cNvSpPr txBox="1"/>
+          <p:nvPr/>
+        </p:nvSpPr>
+        <p:spPr>
+          <a:xfrm>
+            <a:off x="594360" y="2926080"/>
+            <a:ext cx="2468880" cy="411480"/>
+          </a:xfrm>
+          <a:prstGeom prst="rect">
+            <a:avLst/>
+          </a:prstGeom>
+          <a:noFill/>
+        </p:spPr>
+        <p:txBody>
+          <a:bodyPr wrap="square" anchor="ctr">
+            <a:spAutoFit/>
+          </a:bodyPr>
+          <a:lstStyle/>
           <a:p>
             <a:pPr algn="ctr"/>
             <a:r>
-              <a:rPr sz="1150" b="0" i="0">
-                <a:solidFill>
-                  <a:srgbClr val="333333"/>
-                </a:solidFill>
-              </a:rPr>
-              <a:t>aspects by negative-ratio</a:t>
-            </a:r>
-          </a:p>
+              <a:rPr sz="1050" b="1" i="0">
+                <a:solidFill>
+                  <a:srgbClr val="041E42"/>
+                </a:solidFill>
+              </a:rPr>
+              <a:t>— counter aggregate —</a:t>
+            </a:r>
+          </a:p>
+        </p:txBody>
+      </p:sp>
+      <p:sp>
+        <p:nvSpPr>
+          <p:cNvPr id="13" name="TextBox 12"/>
+          <p:cNvSpPr txBox="1"/>
+          <p:nvPr/>
+        </p:nvSpPr>
+        <p:spPr>
+          <a:xfrm>
+            <a:off x="594360" y="3401568"/>
+            <a:ext cx="2468880" cy="822960"/>
+          </a:xfrm>
+          <a:prstGeom prst="rect">
+            <a:avLst/>
+          </a:prstGeom>
+          <a:noFill/>
+        </p:spPr>
+        <p:txBody>
+          <a:bodyPr wrap="square" anchor="t">
+            <a:spAutoFit/>
+          </a:bodyPr>
+          <a:lstStyle/>
+          <a:p>
+            <a:pPr algn="l"/>
+            <a:r>
+              <a:rPr sz="1000" b="0" i="1">
+                <a:solidFill>
+                  <a:srgbClr val="041E42"/>
+                </a:solidFill>
+              </a:rPr>
+              <a:t>delivery/pickup:</a:t>
+            </a:r>
+          </a:p>
+          <a:p>
+            <a:pPr algn="l"/>
+            <a:r>
+              <a:rPr sz="1000" b="0" i="1">
+                <a:solidFill>
+                  <a:srgbClr val="041E42"/>
+                </a:solidFill>
+              </a:rPr>
+              <a:t>3,546  posts total</a:t>
+            </a:r>
+          </a:p>
+          <a:p>
+            <a:pPr algn="l"/>
+            <a:r>
+              <a:rPr sz="1000" b="0" i="1">
+                <a:solidFill>
+                  <a:srgbClr val="041E42"/>
+                </a:solidFill>
+              </a:rPr>
+              <a:t>1,377 neg  ·  128 pos  ·  2,041 neu</a:t>
+            </a:r>
+          </a:p>
+        </p:txBody>
+      </p:sp>
+      <p:sp>
+        <p:nvSpPr>
+          <p:cNvPr id="14" name="TextBox 13"/>
+          <p:cNvSpPr txBox="1"/>
+          <p:nvPr/>
+        </p:nvSpPr>
+        <p:spPr>
+          <a:xfrm>
+            <a:off x="3200400" y="2468880"/>
+            <a:ext cx="182880" cy="365760"/>
+          </a:xfrm>
+          <a:prstGeom prst="rect">
+            <a:avLst/>
+          </a:prstGeom>
+          <a:noFill/>
+        </p:spPr>
+        <p:txBody>
+          <a:bodyPr wrap="square" anchor="ctr">
+            <a:spAutoFit/>
+          </a:bodyPr>
+          <a:lstStyle/>
           <a:p>
             <a:pPr algn="ctr"/>
             <a:r>
-              <a:rPr sz="1150" b="0" i="0">
-                <a:solidFill>
-                  <a:srgbClr val="333333"/>
-                </a:solidFill>
-              </a:rPr>
-              <a:t>(top 10, floor ≥ 8 posts)</a:t>
-            </a:r>
-          </a:p>
-        </p:txBody>
-      </p:sp>
-      <p:sp>
-        <p:nvSpPr>
-          <p:cNvPr id="10" name="Rectangle 9"/>
+              <a:rPr sz="2200" b="1" i="0">
+                <a:solidFill>
+                  <a:srgbClr val="0071DC"/>
+                </a:solidFill>
+              </a:rPr>
+              <a:t>▸</a:t>
+            </a:r>
+          </a:p>
+        </p:txBody>
+      </p:sp>
+      <p:sp>
+        <p:nvSpPr>
+          <p:cNvPr id="15" name="Rectangle 14"/>
           <p:cNvSpPr/>
           <p:nvPr/>
         </p:nvSpPr>
         <p:spPr>
           <a:xfrm>
-            <a:off x="4389120" y="960120"/>
-            <a:ext cx="3749039" cy="2011680"/>
+            <a:off x="3291840" y="1005840"/>
+            <a:ext cx="2743200" cy="3291840"/>
           </a:xfrm>
           <a:prstGeom prst="rect">
             <a:avLst/>
@@ -5208,14 +5434,14 @@
       </p:sp>
       <p:sp>
         <p:nvSpPr>
-          <p:cNvPr id="11" name="Rectangle 10"/>
+          <p:cNvPr id="16" name="Rectangle 15"/>
           <p:cNvSpPr/>
           <p:nvPr/>
         </p:nvSpPr>
         <p:spPr>
           <a:xfrm>
-            <a:off x="4389120" y="960120"/>
-            <a:ext cx="3749039" cy="411480"/>
+            <a:off x="3291840" y="1005840"/>
+            <a:ext cx="2743200" cy="548640"/>
           </a:xfrm>
           <a:prstGeom prst="rect">
             <a:avLst/>
@@ -5252,48 +5478,48 @@
       </p:sp>
       <p:sp>
         <p:nvSpPr>
-          <p:cNvPr id="12" name="TextBox 11"/>
-          <p:cNvSpPr txBox="1"/>
-          <p:nvPr/>
-        </p:nvSpPr>
-        <p:spPr>
-          <a:xfrm>
-            <a:off x="4389120" y="1014984"/>
-            <a:ext cx="3749039" cy="320040"/>
-          </a:xfrm>
-          <a:prstGeom prst="rect">
-            <a:avLst/>
-          </a:prstGeom>
-          <a:noFill/>
-        </p:spPr>
-        <p:txBody>
-          <a:bodyPr wrap="square" anchor="t">
+          <p:cNvPr id="17" name="TextBox 16"/>
+          <p:cNvSpPr txBox="1"/>
+          <p:nvPr/>
+        </p:nvSpPr>
+        <p:spPr>
+          <a:xfrm>
+            <a:off x="3383280" y="1078992"/>
+            <a:ext cx="411480" cy="411480"/>
+          </a:xfrm>
+          <a:prstGeom prst="rect">
+            <a:avLst/>
+          </a:prstGeom>
+          <a:noFill/>
+        </p:spPr>
+        <p:txBody>
+          <a:bodyPr wrap="square" anchor="ctr">
             <a:spAutoFit/>
           </a:bodyPr>
           <a:lstStyle/>
           <a:p>
             <a:pPr algn="ctr"/>
             <a:r>
-              <a:rPr sz="1300" b="1" i="0">
+              <a:rPr sz="2000" b="1" i="0">
                 <a:solidFill>
                   <a:srgbClr val="FFFFFF"/>
                 </a:solidFill>
               </a:rPr>
-              <a:t>Walmart Comparison</a:t>
-            </a:r>
-          </a:p>
-        </p:txBody>
-      </p:sp>
-      <p:sp>
-        <p:nvSpPr>
-          <p:cNvPr id="13" name="TextBox 12"/>
-          <p:cNvSpPr txBox="1"/>
-          <p:nvPr/>
-        </p:nvSpPr>
-        <p:spPr>
-          <a:xfrm>
-            <a:off x="4526280" y="1417320"/>
-            <a:ext cx="3474720" cy="1463040"/>
+              <a:t>2</a:t>
+            </a:r>
+          </a:p>
+        </p:txBody>
+      </p:sp>
+      <p:sp>
+        <p:nvSpPr>
+          <p:cNvPr id="18" name="TextBox 17"/>
+          <p:cNvSpPr txBox="1"/>
+          <p:nvPr/>
+        </p:nvSpPr>
+        <p:spPr>
+          <a:xfrm>
+            <a:off x="3840480" y="1051560"/>
+            <a:ext cx="2103120" cy="502920"/>
           </a:xfrm>
           <a:prstGeom prst="rect">
             <a:avLst/>
@@ -5306,50 +5532,276 @@
           </a:bodyPr>
           <a:lstStyle/>
           <a:p>
+            <a:pPr algn="l"/>
+            <a:r>
+              <a:rPr sz="1250" b="1" i="0">
+                <a:solidFill>
+                  <a:srgbClr val="FFFFFF"/>
+                </a:solidFill>
+              </a:rPr>
+              <a:t>Compute</a:t>
+            </a:r>
+          </a:p>
+          <a:p>
+            <a:pPr algn="l"/>
+            <a:r>
+              <a:rPr sz="1250" b="1" i="0">
+                <a:solidFill>
+                  <a:srgbClr val="FFFFFF"/>
+                </a:solidFill>
+              </a:rPr>
+              <a:t>negative rate</a:t>
+            </a:r>
+          </a:p>
+        </p:txBody>
+      </p:sp>
+      <p:sp>
+        <p:nvSpPr>
+          <p:cNvPr id="19" name="TextBox 18"/>
+          <p:cNvSpPr txBox="1"/>
+          <p:nvPr/>
+        </p:nvSpPr>
+        <p:spPr>
+          <a:xfrm>
+            <a:off x="3429000" y="1664208"/>
+            <a:ext cx="2468880" cy="1234440"/>
+          </a:xfrm>
+          <a:prstGeom prst="rect">
+            <a:avLst/>
+          </a:prstGeom>
+          <a:noFill/>
+        </p:spPr>
+        <p:txBody>
+          <a:bodyPr wrap="square" anchor="t">
+            <a:spAutoFit/>
+          </a:bodyPr>
+          <a:lstStyle/>
+          <a:p>
+            <a:pPr algn="l"/>
+            <a:r>
+              <a:rPr sz="1050" b="0" i="0">
+                <a:solidFill>
+                  <a:srgbClr val="333333"/>
+                </a:solidFill>
+              </a:rPr>
+              <a:t>Divide negatives by total to</a:t>
+            </a:r>
+          </a:p>
+          <a:p>
+            <a:pPr algn="l"/>
+            <a:r>
+              <a:rPr sz="1050" b="0" i="0">
+                <a:solidFill>
+                  <a:srgbClr val="333333"/>
+                </a:solidFill>
+              </a:rPr>
+              <a:t>get the complaint-rate on</a:t>
+            </a:r>
+          </a:p>
+          <a:p>
+            <a:pPr algn="l"/>
+            <a:r>
+              <a:rPr sz="1050" b="0" i="0">
+                <a:solidFill>
+                  <a:srgbClr val="333333"/>
+                </a:solidFill>
+              </a:rPr>
+              <a:t>that aspect.</a:t>
+            </a:r>
+          </a:p>
+          <a:p>
+            <a:pPr algn="l"/>
+            <a:r>
+              <a:rPr sz="1050" b="0" i="0">
+                <a:solidFill>
+                  <a:srgbClr val="333333"/>
+                </a:solidFill>
+              </a:rPr>
+              <a:t>Floor: total ≥ 8 posts</a:t>
+            </a:r>
+          </a:p>
+        </p:txBody>
+      </p:sp>
+      <p:sp>
+        <p:nvSpPr>
+          <p:cNvPr id="20" name="Rectangle 19"/>
+          <p:cNvSpPr/>
+          <p:nvPr/>
+        </p:nvSpPr>
+        <p:spPr>
+          <a:xfrm>
+            <a:off x="3429000" y="2926080"/>
+            <a:ext cx="2468880" cy="411480"/>
+          </a:xfrm>
+          <a:prstGeom prst="rect">
+            <a:avLst/>
+          </a:prstGeom>
+          <a:solidFill>
+            <a:srgbClr val="EDE9FE"/>
+          </a:solidFill>
+          <a:ln>
+            <a:solidFill>
+              <a:srgbClr val="7C3AED"/>
+            </a:solidFill>
+          </a:ln>
+          <a:effectLst/>
+        </p:spPr>
+        <p:style>
+          <a:lnRef idx="1">
+            <a:schemeClr val="accent1"/>
+          </a:lnRef>
+          <a:fillRef idx="3">
+            <a:schemeClr val="accent1"/>
+          </a:fillRef>
+          <a:effectRef idx="2">
+            <a:schemeClr val="accent1"/>
+          </a:effectRef>
+          <a:fontRef idx="minor">
+            <a:schemeClr val="lt1"/>
+          </a:fontRef>
+        </p:style>
+        <p:txBody>
+          <a:bodyPr rtlCol="0" anchor="ctr"/>
+          <a:lstStyle/>
+          <a:p>
             <a:pPr algn="ctr"/>
-            <a:r>
-              <a:rPr sz="1150" b="0" i="0">
-                <a:solidFill>
-                  <a:srgbClr val="333333"/>
-                </a:solidFill>
-              </a:rPr>
-              <a:t>Radar chart:  Walmart neg-ratio</a:t>
-            </a:r>
-          </a:p>
+          </a:p>
+        </p:txBody>
+      </p:sp>
+      <p:sp>
+        <p:nvSpPr>
+          <p:cNvPr id="21" name="TextBox 20"/>
+          <p:cNvSpPr txBox="1"/>
+          <p:nvPr/>
+        </p:nvSpPr>
+        <p:spPr>
+          <a:xfrm>
+            <a:off x="3429000" y="2926080"/>
+            <a:ext cx="2468880" cy="411480"/>
+          </a:xfrm>
+          <a:prstGeom prst="rect">
+            <a:avLst/>
+          </a:prstGeom>
+          <a:noFill/>
+        </p:spPr>
+        <p:txBody>
+          <a:bodyPr wrap="square" anchor="ctr">
+            <a:spAutoFit/>
+          </a:bodyPr>
+          <a:lstStyle/>
           <a:p>
             <a:pPr algn="ctr"/>
             <a:r>
-              <a:rPr sz="1150" b="0" i="0">
-                <a:solidFill>
-                  <a:srgbClr val="333333"/>
-                </a:solidFill>
-              </a:rPr>
-              <a:t>vs competitors on the same</a:t>
-            </a:r>
-          </a:p>
+              <a:rPr sz="1050" b="1" i="0">
+                <a:solidFill>
+                  <a:srgbClr val="041E42"/>
+                </a:solidFill>
+              </a:rPr>
+              <a:t>negative_ratio = neg / total</a:t>
+            </a:r>
+          </a:p>
+        </p:txBody>
+      </p:sp>
+      <p:sp>
+        <p:nvSpPr>
+          <p:cNvPr id="22" name="TextBox 21"/>
+          <p:cNvSpPr txBox="1"/>
+          <p:nvPr/>
+        </p:nvSpPr>
+        <p:spPr>
+          <a:xfrm>
+            <a:off x="3429000" y="3401568"/>
+            <a:ext cx="2468880" cy="822960"/>
+          </a:xfrm>
+          <a:prstGeom prst="rect">
+            <a:avLst/>
+          </a:prstGeom>
+          <a:noFill/>
+        </p:spPr>
+        <p:txBody>
+          <a:bodyPr wrap="square" anchor="t">
+            <a:spAutoFit/>
+          </a:bodyPr>
+          <a:lstStyle/>
+          <a:p>
+            <a:pPr algn="l"/>
+            <a:r>
+              <a:rPr sz="1000" b="0" i="1">
+                <a:solidFill>
+                  <a:srgbClr val="041E42"/>
+                </a:solidFill>
+              </a:rPr>
+              <a:t>1,377 / 3,546  =  0.388</a:t>
+            </a:r>
+          </a:p>
+          <a:p>
+            <a:pPr algn="l"/>
+            <a:r>
+              <a:rPr sz="1000" b="0" i="1">
+                <a:solidFill>
+                  <a:srgbClr val="041E42"/>
+                </a:solidFill>
+              </a:rPr>
+              <a:t>=  38.8 %  complaint-rate</a:t>
+            </a:r>
+          </a:p>
+          <a:p>
+            <a:pPr algn="l"/>
+            <a:r>
+              <a:rPr sz="1000" b="0" i="1">
+                <a:solidFill>
+                  <a:srgbClr val="041E42"/>
+                </a:solidFill>
+              </a:rPr>
+              <a:t>(highest of any aspect)</a:t>
+            </a:r>
+          </a:p>
+        </p:txBody>
+      </p:sp>
+      <p:sp>
+        <p:nvSpPr>
+          <p:cNvPr id="23" name="TextBox 22"/>
+          <p:cNvSpPr txBox="1"/>
+          <p:nvPr/>
+        </p:nvSpPr>
+        <p:spPr>
+          <a:xfrm>
+            <a:off x="6035040" y="2468880"/>
+            <a:ext cx="182880" cy="365760"/>
+          </a:xfrm>
+          <a:prstGeom prst="rect">
+            <a:avLst/>
+          </a:prstGeom>
+          <a:noFill/>
+        </p:spPr>
+        <p:txBody>
+          <a:bodyPr wrap="square" anchor="ctr">
+            <a:spAutoFit/>
+          </a:bodyPr>
+          <a:lstStyle/>
           <a:p>
             <a:pPr algn="ctr"/>
             <a:r>
-              <a:rPr sz="1150" b="0" i="0">
-                <a:solidFill>
-                  <a:srgbClr val="333333"/>
-                </a:solidFill>
-              </a:rPr>
-              <a:t>aspects  →  gives  delta</a:t>
-            </a:r>
-          </a:p>
-        </p:txBody>
-      </p:sp>
-      <p:sp>
-        <p:nvSpPr>
-          <p:cNvPr id="14" name="Rectangle 13"/>
+              <a:rPr sz="2200" b="1" i="0">
+                <a:solidFill>
+                  <a:srgbClr val="7C3AED"/>
+                </a:solidFill>
+              </a:rPr>
+              <a:t>▸</a:t>
+            </a:r>
+          </a:p>
+        </p:txBody>
+      </p:sp>
+      <p:sp>
+        <p:nvSpPr>
+          <p:cNvPr id="24" name="Rectangle 23"/>
           <p:cNvSpPr/>
           <p:nvPr/>
         </p:nvSpPr>
         <p:spPr>
           <a:xfrm>
-            <a:off x="8321040" y="960120"/>
-            <a:ext cx="3749039" cy="2011680"/>
+            <a:off x="6126480" y="1005840"/>
+            <a:ext cx="2743200" cy="3291840"/>
           </a:xfrm>
           <a:prstGeom prst="rect">
             <a:avLst/>
@@ -5388,14 +5840,14 @@
       </p:sp>
       <p:sp>
         <p:nvSpPr>
-          <p:cNvPr id="15" name="Rectangle 14"/>
+          <p:cNvPr id="25" name="Rectangle 24"/>
           <p:cNvSpPr/>
           <p:nvPr/>
         </p:nvSpPr>
         <p:spPr>
           <a:xfrm>
-            <a:off x="8321040" y="960120"/>
-            <a:ext cx="3749039" cy="411480"/>
+            <a:off x="6126480" y="1005840"/>
+            <a:ext cx="2743200" cy="548640"/>
           </a:xfrm>
           <a:prstGeom prst="rect">
             <a:avLst/>
@@ -5432,48 +5884,48 @@
       </p:sp>
       <p:sp>
         <p:nvSpPr>
-          <p:cNvPr id="16" name="TextBox 15"/>
-          <p:cNvSpPr txBox="1"/>
-          <p:nvPr/>
-        </p:nvSpPr>
-        <p:spPr>
-          <a:xfrm>
-            <a:off x="8321040" y="1014984"/>
-            <a:ext cx="3749039" cy="320040"/>
-          </a:xfrm>
-          <a:prstGeom prst="rect">
-            <a:avLst/>
-          </a:prstGeom>
-          <a:noFill/>
-        </p:spPr>
-        <p:txBody>
-          <a:bodyPr wrap="square" anchor="t">
+          <p:cNvPr id="26" name="TextBox 25"/>
+          <p:cNvSpPr txBox="1"/>
+          <p:nvPr/>
+        </p:nvSpPr>
+        <p:spPr>
+          <a:xfrm>
+            <a:off x="6217920" y="1078992"/>
+            <a:ext cx="411480" cy="411480"/>
+          </a:xfrm>
+          <a:prstGeom prst="rect">
+            <a:avLst/>
+          </a:prstGeom>
+          <a:noFill/>
+        </p:spPr>
+        <p:txBody>
+          <a:bodyPr wrap="square" anchor="ctr">
             <a:spAutoFit/>
           </a:bodyPr>
           <a:lstStyle/>
           <a:p>
             <a:pPr algn="ctr"/>
             <a:r>
-              <a:rPr sz="1300" b="1" i="0">
+              <a:rPr sz="2000" b="1" i="0">
                 <a:solidFill>
                   <a:srgbClr val="FFFFFF"/>
                 </a:solidFill>
               </a:rPr>
-              <a:t>Recommendations</a:t>
-            </a:r>
-          </a:p>
-        </p:txBody>
-      </p:sp>
-      <p:sp>
-        <p:nvSpPr>
-          <p:cNvPr id="17" name="TextBox 16"/>
-          <p:cNvSpPr txBox="1"/>
-          <p:nvPr/>
-        </p:nvSpPr>
-        <p:spPr>
-          <a:xfrm>
-            <a:off x="8458200" y="1417320"/>
-            <a:ext cx="3474720" cy="1463040"/>
+              <a:t>3</a:t>
+            </a:r>
+          </a:p>
+        </p:txBody>
+      </p:sp>
+      <p:sp>
+        <p:nvSpPr>
+          <p:cNvPr id="27" name="TextBox 26"/>
+          <p:cNvSpPr txBox="1"/>
+          <p:nvPr/>
+        </p:nvSpPr>
+        <p:spPr>
+          <a:xfrm>
+            <a:off x="6675120" y="1051560"/>
+            <a:ext cx="2103120" cy="502920"/>
           </a:xfrm>
           <a:prstGeom prst="rect">
             <a:avLst/>
@@ -5486,50 +5938,648 @@
           </a:bodyPr>
           <a:lstStyle/>
           <a:p>
+            <a:pPr algn="l"/>
+            <a:r>
+              <a:rPr sz="1250" b="1" i="0">
+                <a:solidFill>
+                  <a:srgbClr val="FFFFFF"/>
+                </a:solidFill>
+              </a:rPr>
+              <a:t>Compare</a:t>
+            </a:r>
+          </a:p>
+          <a:p>
+            <a:pPr algn="l"/>
+            <a:r>
+              <a:rPr sz="1250" b="1" i="0">
+                <a:solidFill>
+                  <a:srgbClr val="FFFFFF"/>
+                </a:solidFill>
+              </a:rPr>
+              <a:t>to Walmart</a:t>
+            </a:r>
+          </a:p>
+        </p:txBody>
+      </p:sp>
+      <p:sp>
+        <p:nvSpPr>
+          <p:cNvPr id="28" name="TextBox 27"/>
+          <p:cNvSpPr txBox="1"/>
+          <p:nvPr/>
+        </p:nvSpPr>
+        <p:spPr>
+          <a:xfrm>
+            <a:off x="6263640" y="1664208"/>
+            <a:ext cx="2468880" cy="1234440"/>
+          </a:xfrm>
+          <a:prstGeom prst="rect">
+            <a:avLst/>
+          </a:prstGeom>
+          <a:noFill/>
+        </p:spPr>
+        <p:txBody>
+          <a:bodyPr wrap="square" anchor="t">
+            <a:spAutoFit/>
+          </a:bodyPr>
+          <a:lstStyle/>
+          <a:p>
+            <a:pPr algn="l"/>
+            <a:r>
+              <a:rPr sz="1050" b="0" i="0">
+                <a:solidFill>
+                  <a:srgbClr val="333333"/>
+                </a:solidFill>
+              </a:rPr>
+              <a:t>Same recipe on Walmart subs</a:t>
+            </a:r>
+          </a:p>
+          <a:p>
+            <a:pPr algn="l"/>
+            <a:r>
+              <a:rPr sz="1050" b="0" i="0">
+                <a:solidFill>
+                  <a:srgbClr val="333333"/>
+                </a:solidFill>
+              </a:rPr>
+              <a:t>for the same aspect —</a:t>
+            </a:r>
+          </a:p>
+          <a:p>
+            <a:pPr algn="l"/>
+            <a:r>
+              <a:rPr sz="1050" b="0" i="0">
+                <a:solidFill>
+                  <a:srgbClr val="333333"/>
+                </a:solidFill>
+              </a:rPr>
+              <a:t>then take the gap.</a:t>
+            </a:r>
+          </a:p>
+          <a:p>
+            <a:pPr algn="l"/>
+            <a:r>
+              <a:rPr sz="1050" b="0" i="0">
+                <a:solidFill>
+                  <a:srgbClr val="333333"/>
+                </a:solidFill>
+              </a:rPr>
+              <a:t>Catches 'are we better or worse?'</a:t>
+            </a:r>
+          </a:p>
+        </p:txBody>
+      </p:sp>
+      <p:sp>
+        <p:nvSpPr>
+          <p:cNvPr id="29" name="Rectangle 28"/>
+          <p:cNvSpPr/>
+          <p:nvPr/>
+        </p:nvSpPr>
+        <p:spPr>
+          <a:xfrm>
+            <a:off x="6263640" y="2926080"/>
+            <a:ext cx="2468880" cy="411480"/>
+          </a:xfrm>
+          <a:prstGeom prst="rect">
+            <a:avLst/>
+          </a:prstGeom>
+          <a:solidFill>
+            <a:srgbClr val="DCFCE7"/>
+          </a:solidFill>
+          <a:ln>
+            <a:solidFill>
+              <a:srgbClr val="10B981"/>
+            </a:solidFill>
+          </a:ln>
+          <a:effectLst/>
+        </p:spPr>
+        <p:style>
+          <a:lnRef idx="1">
+            <a:schemeClr val="accent1"/>
+          </a:lnRef>
+          <a:fillRef idx="3">
+            <a:schemeClr val="accent1"/>
+          </a:fillRef>
+          <a:effectRef idx="2">
+            <a:schemeClr val="accent1"/>
+          </a:effectRef>
+          <a:fontRef idx="minor">
+            <a:schemeClr val="lt1"/>
+          </a:fontRef>
+        </p:style>
+        <p:txBody>
+          <a:bodyPr rtlCol="0" anchor="ctr"/>
+          <a:lstStyle/>
+          <a:p>
             <a:pPr algn="ctr"/>
-            <a:r>
-              <a:rPr sz="1150" b="0" i="0">
+          </a:p>
+        </p:txBody>
+      </p:sp>
+      <p:sp>
+        <p:nvSpPr>
+          <p:cNvPr id="30" name="TextBox 29"/>
+          <p:cNvSpPr txBox="1"/>
+          <p:nvPr/>
+        </p:nvSpPr>
+        <p:spPr>
+          <a:xfrm>
+            <a:off x="6263640" y="2926080"/>
+            <a:ext cx="2468880" cy="411480"/>
+          </a:xfrm>
+          <a:prstGeom prst="rect">
+            <a:avLst/>
+          </a:prstGeom>
+          <a:noFill/>
+        </p:spPr>
+        <p:txBody>
+          <a:bodyPr wrap="square" anchor="ctr">
+            <a:spAutoFit/>
+          </a:bodyPr>
+          <a:lstStyle/>
+          <a:p>
+            <a:pPr algn="ctr"/>
+            <a:r>
+              <a:rPr sz="1050" b="1" i="0">
+                <a:solidFill>
+                  <a:srgbClr val="041E42"/>
+                </a:solidFill>
+              </a:rPr>
+              <a:t>delta  =  competitor – Walmart</a:t>
+            </a:r>
+          </a:p>
+        </p:txBody>
+      </p:sp>
+      <p:sp>
+        <p:nvSpPr>
+          <p:cNvPr id="31" name="TextBox 30"/>
+          <p:cNvSpPr txBox="1"/>
+          <p:nvPr/>
+        </p:nvSpPr>
+        <p:spPr>
+          <a:xfrm>
+            <a:off x="6263640" y="3401568"/>
+            <a:ext cx="2468880" cy="822960"/>
+          </a:xfrm>
+          <a:prstGeom prst="rect">
+            <a:avLst/>
+          </a:prstGeom>
+          <a:noFill/>
+        </p:spPr>
+        <p:txBody>
+          <a:bodyPr wrap="square" anchor="t">
+            <a:spAutoFit/>
+          </a:bodyPr>
+          <a:lstStyle/>
+          <a:p>
+            <a:pPr algn="l"/>
+            <a:r>
+              <a:rPr sz="1000" b="0" i="1">
+                <a:solidFill>
+                  <a:srgbClr val="041E42"/>
+                </a:solidFill>
+              </a:rPr>
+              <a:t>Walmart delivery neg-rate ≈ 24 %</a:t>
+            </a:r>
+          </a:p>
+          <a:p>
+            <a:pPr algn="l"/>
+            <a:r>
+              <a:rPr sz="1000" b="0" i="1">
+                <a:solidFill>
+                  <a:srgbClr val="041E42"/>
+                </a:solidFill>
+              </a:rPr>
+              <a:t>delta = 38.8 % – 24 %</a:t>
+            </a:r>
+          </a:p>
+          <a:p>
+            <a:pPr algn="l"/>
+            <a:r>
+              <a:rPr sz="1000" b="0" i="1">
+                <a:solidFill>
+                  <a:srgbClr val="041E42"/>
+                </a:solidFill>
+              </a:rPr>
+              <a:t>=  +14.8 %</a:t>
+            </a:r>
+          </a:p>
+        </p:txBody>
+      </p:sp>
+      <p:sp>
+        <p:nvSpPr>
+          <p:cNvPr id="32" name="TextBox 31"/>
+          <p:cNvSpPr txBox="1"/>
+          <p:nvPr/>
+        </p:nvSpPr>
+        <p:spPr>
+          <a:xfrm>
+            <a:off x="8869680" y="2468880"/>
+            <a:ext cx="182880" cy="365760"/>
+          </a:xfrm>
+          <a:prstGeom prst="rect">
+            <a:avLst/>
+          </a:prstGeom>
+          <a:noFill/>
+        </p:spPr>
+        <p:txBody>
+          <a:bodyPr wrap="square" anchor="ctr">
+            <a:spAutoFit/>
+          </a:bodyPr>
+          <a:lstStyle/>
+          <a:p>
+            <a:pPr algn="ctr"/>
+            <a:r>
+              <a:rPr sz="2200" b="1" i="0">
+                <a:solidFill>
+                  <a:srgbClr val="10B981"/>
+                </a:solidFill>
+              </a:rPr>
+              <a:t>▸</a:t>
+            </a:r>
+          </a:p>
+        </p:txBody>
+      </p:sp>
+      <p:sp>
+        <p:nvSpPr>
+          <p:cNvPr id="33" name="Rectangle 32"/>
+          <p:cNvSpPr/>
+          <p:nvPr/>
+        </p:nvSpPr>
+        <p:spPr>
+          <a:xfrm>
+            <a:off x="8961120" y="1005840"/>
+            <a:ext cx="2743200" cy="3291840"/>
+          </a:xfrm>
+          <a:prstGeom prst="rect">
+            <a:avLst/>
+          </a:prstGeom>
+          <a:solidFill>
+            <a:srgbClr val="F5F5F5"/>
+          </a:solidFill>
+          <a:ln>
+            <a:solidFill>
+              <a:srgbClr val="D97706"/>
+            </a:solidFill>
+          </a:ln>
+          <a:effectLst/>
+        </p:spPr>
+        <p:style>
+          <a:lnRef idx="1">
+            <a:schemeClr val="accent1"/>
+          </a:lnRef>
+          <a:fillRef idx="3">
+            <a:schemeClr val="accent1"/>
+          </a:fillRef>
+          <a:effectRef idx="2">
+            <a:schemeClr val="accent1"/>
+          </a:effectRef>
+          <a:fontRef idx="minor">
+            <a:schemeClr val="lt1"/>
+          </a:fontRef>
+        </p:style>
+        <p:txBody>
+          <a:bodyPr rtlCol="0" anchor="ctr"/>
+          <a:lstStyle/>
+          <a:p>
+            <a:pPr algn="ctr"/>
+          </a:p>
+        </p:txBody>
+      </p:sp>
+      <p:sp>
+        <p:nvSpPr>
+          <p:cNvPr id="34" name="Rectangle 33"/>
+          <p:cNvSpPr/>
+          <p:nvPr/>
+        </p:nvSpPr>
+        <p:spPr>
+          <a:xfrm>
+            <a:off x="8961120" y="1005840"/>
+            <a:ext cx="2743200" cy="548640"/>
+          </a:xfrm>
+          <a:prstGeom prst="rect">
+            <a:avLst/>
+          </a:prstGeom>
+          <a:solidFill>
+            <a:srgbClr val="D97706"/>
+          </a:solidFill>
+          <a:ln>
+            <a:noFill/>
+          </a:ln>
+          <a:effectLst/>
+        </p:spPr>
+        <p:style>
+          <a:lnRef idx="1">
+            <a:schemeClr val="accent1"/>
+          </a:lnRef>
+          <a:fillRef idx="3">
+            <a:schemeClr val="accent1"/>
+          </a:fillRef>
+          <a:effectRef idx="2">
+            <a:schemeClr val="accent1"/>
+          </a:effectRef>
+          <a:fontRef idx="minor">
+            <a:schemeClr val="lt1"/>
+          </a:fontRef>
+        </p:style>
+        <p:txBody>
+          <a:bodyPr rtlCol="0" anchor="ctr"/>
+          <a:lstStyle/>
+          <a:p>
+            <a:pPr algn="ctr"/>
+          </a:p>
+        </p:txBody>
+      </p:sp>
+      <p:sp>
+        <p:nvSpPr>
+          <p:cNvPr id="35" name="TextBox 34"/>
+          <p:cNvSpPr txBox="1"/>
+          <p:nvPr/>
+        </p:nvSpPr>
+        <p:spPr>
+          <a:xfrm>
+            <a:off x="9052560" y="1078992"/>
+            <a:ext cx="411480" cy="411480"/>
+          </a:xfrm>
+          <a:prstGeom prst="rect">
+            <a:avLst/>
+          </a:prstGeom>
+          <a:noFill/>
+        </p:spPr>
+        <p:txBody>
+          <a:bodyPr wrap="square" anchor="ctr">
+            <a:spAutoFit/>
+          </a:bodyPr>
+          <a:lstStyle/>
+          <a:p>
+            <a:pPr algn="ctr"/>
+            <a:r>
+              <a:rPr sz="2000" b="1" i="0">
+                <a:solidFill>
+                  <a:srgbClr val="FFFFFF"/>
+                </a:solidFill>
+              </a:rPr>
+              <a:t>4</a:t>
+            </a:r>
+          </a:p>
+        </p:txBody>
+      </p:sp>
+      <p:sp>
+        <p:nvSpPr>
+          <p:cNvPr id="36" name="TextBox 35"/>
+          <p:cNvSpPr txBox="1"/>
+          <p:nvPr/>
+        </p:nvSpPr>
+        <p:spPr>
+          <a:xfrm>
+            <a:off x="9509760" y="1051560"/>
+            <a:ext cx="2103120" cy="502920"/>
+          </a:xfrm>
+          <a:prstGeom prst="rect">
+            <a:avLst/>
+          </a:prstGeom>
+          <a:noFill/>
+        </p:spPr>
+        <p:txBody>
+          <a:bodyPr wrap="square" anchor="ctr">
+            <a:spAutoFit/>
+          </a:bodyPr>
+          <a:lstStyle/>
+          <a:p>
+            <a:pPr algn="l"/>
+            <a:r>
+              <a:rPr sz="1250" b="1" i="0">
+                <a:solidFill>
+                  <a:srgbClr val="FFFFFF"/>
+                </a:solidFill>
+              </a:rPr>
+              <a:t>Priority tag</a:t>
+            </a:r>
+          </a:p>
+          <a:p>
+            <a:pPr algn="l"/>
+            <a:r>
+              <a:rPr sz="1250" b="1" i="0">
+                <a:solidFill>
+                  <a:srgbClr val="FFFFFF"/>
+                </a:solidFill>
+              </a:rPr>
+              <a:t>+ action angle</a:t>
+            </a:r>
+          </a:p>
+        </p:txBody>
+      </p:sp>
+      <p:sp>
+        <p:nvSpPr>
+          <p:cNvPr id="37" name="TextBox 36"/>
+          <p:cNvSpPr txBox="1"/>
+          <p:nvPr/>
+        </p:nvSpPr>
+        <p:spPr>
+          <a:xfrm>
+            <a:off x="9098280" y="1664208"/>
+            <a:ext cx="2468880" cy="1234440"/>
+          </a:xfrm>
+          <a:prstGeom prst="rect">
+            <a:avLst/>
+          </a:prstGeom>
+          <a:noFill/>
+        </p:spPr>
+        <p:txBody>
+          <a:bodyPr wrap="square" anchor="t">
+            <a:spAutoFit/>
+          </a:bodyPr>
+          <a:lstStyle/>
+          <a:p>
+            <a:pPr algn="l"/>
+            <a:r>
+              <a:rPr sz="1050" b="0" i="0">
                 <a:solidFill>
                   <a:srgbClr val="333333"/>
                 </a:solidFill>
               </a:rPr>
-              <a:t>Template cards:  priority tag</a:t>
-            </a:r>
-          </a:p>
+              <a:t>Two threshold checks:</a:t>
+            </a:r>
+          </a:p>
+          <a:p>
+            <a:pPr algn="l"/>
+            <a:r>
+              <a:rPr sz="1050" b="0" i="0">
+                <a:solidFill>
+                  <a:srgbClr val="333333"/>
+                </a:solidFill>
+              </a:rPr>
+              <a:t>• competitor rate → urgency</a:t>
+            </a:r>
+          </a:p>
+          <a:p>
+            <a:pPr algn="l"/>
+            <a:r>
+              <a:rPr sz="1050" b="0" i="0">
+                <a:solidFill>
+                  <a:srgbClr val="333333"/>
+                </a:solidFill>
+              </a:rPr>
+              <a:t>• delta → what to do about it</a:t>
+            </a:r>
+          </a:p>
+          <a:p>
+            <a:pPr algn="l"/>
+            <a:r>
+              <a:rPr sz="1050" b="0" i="0">
+                <a:solidFill>
+                  <a:srgbClr val="333333"/>
+                </a:solidFill>
+              </a:rPr>
+              <a:t>Emit one recommendation card</a:t>
+            </a:r>
+          </a:p>
+        </p:txBody>
+      </p:sp>
+      <p:sp>
+        <p:nvSpPr>
+          <p:cNvPr id="38" name="Rectangle 37"/>
+          <p:cNvSpPr/>
+          <p:nvPr/>
+        </p:nvSpPr>
+        <p:spPr>
+          <a:xfrm>
+            <a:off x="9098280" y="2926080"/>
+            <a:ext cx="2468880" cy="411480"/>
+          </a:xfrm>
+          <a:prstGeom prst="rect">
+            <a:avLst/>
+          </a:prstGeom>
+          <a:solidFill>
+            <a:srgbClr val="FEF3C7"/>
+          </a:solidFill>
+          <a:ln>
+            <a:solidFill>
+              <a:srgbClr val="D97706"/>
+            </a:solidFill>
+          </a:ln>
+          <a:effectLst/>
+        </p:spPr>
+        <p:style>
+          <a:lnRef idx="1">
+            <a:schemeClr val="accent1"/>
+          </a:lnRef>
+          <a:fillRef idx="3">
+            <a:schemeClr val="accent1"/>
+          </a:fillRef>
+          <a:effectRef idx="2">
+            <a:schemeClr val="accent1"/>
+          </a:effectRef>
+          <a:fontRef idx="minor">
+            <a:schemeClr val="lt1"/>
+          </a:fontRef>
+        </p:style>
+        <p:txBody>
+          <a:bodyPr rtlCol="0" anchor="ctr"/>
+          <a:lstStyle/>
           <a:p>
             <a:pPr algn="ctr"/>
-            <a:r>
-              <a:rPr sz="1150" b="0" i="0">
-                <a:solidFill>
-                  <a:srgbClr val="333333"/>
-                </a:solidFill>
-              </a:rPr>
-              <a:t>+ action angle chosen from</a:t>
-            </a:r>
-          </a:p>
+          </a:p>
+        </p:txBody>
+      </p:sp>
+      <p:sp>
+        <p:nvSpPr>
+          <p:cNvPr id="39" name="TextBox 38"/>
+          <p:cNvSpPr txBox="1"/>
+          <p:nvPr/>
+        </p:nvSpPr>
+        <p:spPr>
+          <a:xfrm>
+            <a:off x="9098280" y="2926080"/>
+            <a:ext cx="2468880" cy="411480"/>
+          </a:xfrm>
+          <a:prstGeom prst="rect">
+            <a:avLst/>
+          </a:prstGeom>
+          <a:noFill/>
+        </p:spPr>
+        <p:txBody>
+          <a:bodyPr wrap="square" anchor="ctr">
+            <a:spAutoFit/>
+          </a:bodyPr>
+          <a:lstStyle/>
           <a:p>
             <a:pPr algn="ctr"/>
             <a:r>
-              <a:rPr sz="1150" b="0" i="0">
-                <a:solidFill>
-                  <a:srgbClr val="333333"/>
-                </a:solidFill>
-              </a:rPr>
-              <a:t>ratio and delta thresholds</a:t>
-            </a:r>
-          </a:p>
-        </p:txBody>
-      </p:sp>
-      <p:sp>
-        <p:nvSpPr>
-          <p:cNvPr id="18" name="Rectangle 17"/>
+              <a:rPr sz="1050" b="1" i="0">
+                <a:solidFill>
+                  <a:srgbClr val="041E42"/>
+                </a:solidFill>
+              </a:rPr>
+              <a:t>60 / 40 %  and  ± 5 %  cutoffs</a:t>
+            </a:r>
+          </a:p>
+        </p:txBody>
+      </p:sp>
+      <p:sp>
+        <p:nvSpPr>
+          <p:cNvPr id="40" name="TextBox 39"/>
+          <p:cNvSpPr txBox="1"/>
+          <p:nvPr/>
+        </p:nvSpPr>
+        <p:spPr>
+          <a:xfrm>
+            <a:off x="9098280" y="3401568"/>
+            <a:ext cx="2468880" cy="822960"/>
+          </a:xfrm>
+          <a:prstGeom prst="rect">
+            <a:avLst/>
+          </a:prstGeom>
+          <a:noFill/>
+        </p:spPr>
+        <p:txBody>
+          <a:bodyPr wrap="square" anchor="t">
+            <a:spAutoFit/>
+          </a:bodyPr>
+          <a:lstStyle/>
+          <a:p>
+            <a:pPr algn="l"/>
+            <a:r>
+              <a:rPr sz="1000" b="0" i="1">
+                <a:solidFill>
+                  <a:srgbClr val="041E42"/>
+                </a:solidFill>
+              </a:rPr>
+              <a:t>Priority = MEDIUM (40 % ≤ 39 % &lt; 60 %)</a:t>
+            </a:r>
+          </a:p>
+          <a:p>
+            <a:pPr algn="l"/>
+            <a:r>
+              <a:rPr sz="1000" b="0" i="1">
+                <a:solidFill>
+                  <a:srgbClr val="041E42"/>
+                </a:solidFill>
+              </a:rPr>
+              <a:t>Angle    = 'Marketing angle'</a:t>
+            </a:r>
+          </a:p>
+          <a:p>
+            <a:pPr algn="l"/>
+            <a:r>
+              <a:rPr sz="1000" b="0" i="1">
+                <a:solidFill>
+                  <a:srgbClr val="041E42"/>
+                </a:solidFill>
+              </a:rPr>
+              <a:t>           (delta +14.8 % &gt; +5 %)</a:t>
+            </a:r>
+          </a:p>
+        </p:txBody>
+      </p:sp>
+      <p:sp>
+        <p:nvSpPr>
+          <p:cNvPr id="41" name="Rectangle 40"/>
           <p:cNvSpPr/>
           <p:nvPr/>
         </p:nvSpPr>
         <p:spPr>
           <a:xfrm>
-            <a:off x="457200" y="3154680"/>
-            <a:ext cx="5760720" cy="3337560"/>
+            <a:off x="457200" y="4480560"/>
+            <a:ext cx="11247120" cy="1005840"/>
           </a:xfrm>
           <a:prstGeom prst="rect">
             <a:avLst/>
@@ -5568,23 +6618,93 @@
       </p:sp>
       <p:sp>
         <p:nvSpPr>
-          <p:cNvPr id="19" name="Rectangle 18"/>
+          <p:cNvPr id="42" name="TextBox 41"/>
+          <p:cNvSpPr txBox="1"/>
+          <p:nvPr/>
+        </p:nvSpPr>
+        <p:spPr>
+          <a:xfrm>
+            <a:off x="640080" y="4553712"/>
+            <a:ext cx="10881360" cy="320040"/>
+          </a:xfrm>
+          <a:prstGeom prst="rect">
+            <a:avLst/>
+          </a:prstGeom>
+          <a:noFill/>
+        </p:spPr>
+        <p:txBody>
+          <a:bodyPr wrap="square" anchor="t">
+            <a:spAutoFit/>
+          </a:bodyPr>
+          <a:lstStyle/>
+          <a:p>
+            <a:pPr algn="l"/>
+            <a:r>
+              <a:rPr sz="1100" b="1" i="0">
+                <a:solidFill>
+                  <a:srgbClr val="0071DC"/>
+                </a:solidFill>
+              </a:rPr>
+              <a:t>WORKED EXAMPLE  →  the recommendation card the analyst sees</a:t>
+            </a:r>
+          </a:p>
+        </p:txBody>
+      </p:sp>
+      <p:sp>
+        <p:nvSpPr>
+          <p:cNvPr id="43" name="TextBox 42"/>
+          <p:cNvSpPr txBox="1"/>
+          <p:nvPr/>
+        </p:nvSpPr>
+        <p:spPr>
+          <a:xfrm>
+            <a:off x="640080" y="4892040"/>
+            <a:ext cx="10881360" cy="594360"/>
+          </a:xfrm>
+          <a:prstGeom prst="rect">
+            <a:avLst/>
+          </a:prstGeom>
+          <a:noFill/>
+        </p:spPr>
+        <p:txBody>
+          <a:bodyPr wrap="square" anchor="ctr">
+            <a:spAutoFit/>
+          </a:bodyPr>
+          <a:lstStyle/>
+          <a:p>
+            <a:pPr algn="l"/>
+            <a:r>
+              <a:rPr sz="1200" b="0" i="1">
+                <a:solidFill>
+                  <a:srgbClr val="041E42"/>
+                </a:solidFill>
+              </a:rPr>
+              <a:t>“Competitors are struggling with delivery/pickup (39 % negative) much more than Walmart (24 %). Lean into this as a competitive marketing angle.”   —   priority: MEDIUM   ·   supporting: 3,546 posts</a:t>
+            </a:r>
+          </a:p>
+        </p:txBody>
+      </p:sp>
+      <p:sp>
+        <p:nvSpPr>
+          <p:cNvPr id="44" name="Rectangle 43"/>
           <p:cNvSpPr/>
           <p:nvPr/>
         </p:nvSpPr>
         <p:spPr>
           <a:xfrm>
-            <a:off x="457200" y="3154680"/>
-            <a:ext cx="5760720" cy="411480"/>
+            <a:off x="457200" y="5623560"/>
+            <a:ext cx="11247120" cy="822960"/>
           </a:xfrm>
           <a:prstGeom prst="rect">
             <a:avLst/>
           </a:prstGeom>
           <a:solidFill>
-            <a:srgbClr val="0071DC"/>
+            <a:srgbClr val="DCFCE7"/>
           </a:solidFill>
           <a:ln>
-            <a:noFill/>
+            <a:solidFill>
+              <a:srgbClr val="10B981"/>
+            </a:solidFill>
           </a:ln>
           <a:effectLst/>
         </p:spPr>
@@ -5612,48 +6732,14 @@
       </p:sp>
       <p:sp>
         <p:nvSpPr>
-          <p:cNvPr id="20" name="TextBox 19"/>
-          <p:cNvSpPr txBox="1"/>
-          <p:nvPr/>
-        </p:nvSpPr>
-        <p:spPr>
-          <a:xfrm>
-            <a:off x="457200" y="3209544"/>
-            <a:ext cx="5760720" cy="320040"/>
-          </a:xfrm>
-          <a:prstGeom prst="rect">
-            <a:avLst/>
-          </a:prstGeom>
-          <a:noFill/>
-        </p:spPr>
-        <p:txBody>
-          <a:bodyPr wrap="square" anchor="t">
-            <a:spAutoFit/>
-          </a:bodyPr>
-          <a:lstStyle/>
-          <a:p>
-            <a:pPr algn="ctr"/>
-            <a:r>
-              <a:rPr sz="1150" b="1" i="0">
-                <a:solidFill>
-                  <a:srgbClr val="FFFFFF"/>
-                </a:solidFill>
-              </a:rPr>
-              <a:t>FORMULAS  ·  what every number on the page is</a:t>
-            </a:r>
-          </a:p>
-        </p:txBody>
-      </p:sp>
-      <p:sp>
-        <p:nvSpPr>
-          <p:cNvPr id="21" name="TextBox 20"/>
-          <p:cNvSpPr txBox="1"/>
-          <p:nvPr/>
-        </p:nvSpPr>
-        <p:spPr>
-          <a:xfrm>
-            <a:off x="640080" y="3611880"/>
-            <a:ext cx="5486400" cy="274320"/>
+          <p:cNvPr id="45" name="TextBox 44"/>
+          <p:cNvSpPr txBox="1"/>
+          <p:nvPr/>
+        </p:nvSpPr>
+        <p:spPr>
+          <a:xfrm>
+            <a:off x="640080" y="5687568"/>
+            <a:ext cx="10881360" cy="320040"/>
           </a:xfrm>
           <a:prstGeom prst="rect">
             <a:avLst/>
@@ -5670,104 +6756,24 @@
             <a:r>
               <a:rPr sz="1100" b="1" i="0">
                 <a:solidFill>
-                  <a:srgbClr val="041E42"/>
-                </a:solidFill>
-              </a:rPr>
-              <a:t>1. Per-aspect negative rate  (drives ranking + priority)</a:t>
-            </a:r>
-          </a:p>
-        </p:txBody>
-      </p:sp>
-      <p:sp>
-        <p:nvSpPr>
-          <p:cNvPr id="22" name="Rectangle 21"/>
-          <p:cNvSpPr/>
-          <p:nvPr/>
-        </p:nvSpPr>
-        <p:spPr>
-          <a:xfrm>
-            <a:off x="640080" y="3913632"/>
-            <a:ext cx="5486400" cy="457200"/>
-          </a:xfrm>
-          <a:prstGeom prst="rect">
-            <a:avLst/>
-          </a:prstGeom>
-          <a:solidFill>
-            <a:srgbClr val="FFFFFF"/>
-          </a:solidFill>
-          <a:ln>
-            <a:solidFill>
-              <a:srgbClr val="0071DC"/>
-            </a:solidFill>
-          </a:ln>
-          <a:effectLst/>
-        </p:spPr>
-        <p:style>
-          <a:lnRef idx="1">
-            <a:schemeClr val="accent1"/>
-          </a:lnRef>
-          <a:fillRef idx="3">
-            <a:schemeClr val="accent1"/>
-          </a:fillRef>
-          <a:effectRef idx="2">
-            <a:schemeClr val="accent1"/>
-          </a:effectRef>
-          <a:fontRef idx="minor">
-            <a:schemeClr val="lt1"/>
-          </a:fontRef>
-        </p:style>
-        <p:txBody>
-          <a:bodyPr rtlCol="0" anchor="ctr"/>
-          <a:lstStyle/>
-          <a:p>
-            <a:pPr algn="ctr"/>
-          </a:p>
-        </p:txBody>
-      </p:sp>
-      <p:sp>
-        <p:nvSpPr>
-          <p:cNvPr id="23" name="TextBox 22"/>
-          <p:cNvSpPr txBox="1"/>
-          <p:nvPr/>
-        </p:nvSpPr>
-        <p:spPr>
-          <a:xfrm>
-            <a:off x="640080" y="3913632"/>
-            <a:ext cx="5486400" cy="457200"/>
-          </a:xfrm>
-          <a:prstGeom prst="rect">
-            <a:avLst/>
-          </a:prstGeom>
-          <a:noFill/>
-        </p:spPr>
-        <p:txBody>
-          <a:bodyPr wrap="square" anchor="ctr">
-            <a:spAutoFit/>
-          </a:bodyPr>
-          <a:lstStyle/>
-          <a:p>
-            <a:pPr algn="ctr"/>
-            <a:r>
-              <a:rPr sz="1200" b="1" i="0">
-                <a:solidFill>
-                  <a:srgbClr val="041E42"/>
-                </a:solidFill>
-              </a:rPr>
-              <a:t>negative_ratio(aspect) = neg / total     (floor: total ≥ 8 posts)</a:t>
-            </a:r>
-          </a:p>
-        </p:txBody>
-      </p:sp>
-      <p:sp>
-        <p:nvSpPr>
-          <p:cNvPr id="24" name="TextBox 23"/>
-          <p:cNvSpPr txBox="1"/>
-          <p:nvPr/>
-        </p:nvSpPr>
-        <p:spPr>
-          <a:xfrm>
-            <a:off x="640080" y="4480560"/>
-            <a:ext cx="5486400" cy="274320"/>
+                  <a:srgbClr val="10B981"/>
+                </a:solidFill>
+              </a:rPr>
+              <a:t>DESIGN PRINCIPLE  ·  why this is defensible</a:t>
+            </a:r>
+          </a:p>
+        </p:txBody>
+      </p:sp>
+      <p:sp>
+        <p:nvSpPr>
+          <p:cNvPr id="46" name="TextBox 45"/>
+          <p:cNvSpPr txBox="1"/>
+          <p:nvPr/>
+        </p:nvSpPr>
+        <p:spPr>
+          <a:xfrm>
+            <a:off x="640080" y="5989320"/>
+            <a:ext cx="10881360" cy="411480"/>
           </a:xfrm>
           <a:prstGeom prst="rect">
             <a:avLst/>
@@ -5782,483 +6788,19 @@
           <a:p>
             <a:pPr algn="l"/>
             <a:r>
-              <a:rPr sz="1100" b="1" i="0">
-                <a:solidFill>
-                  <a:srgbClr val="041E42"/>
-                </a:solidFill>
-              </a:rPr>
-              <a:t>2. Walmart-vs-competitor gap  (drives action angle)</a:t>
-            </a:r>
-          </a:p>
-        </p:txBody>
-      </p:sp>
-      <p:sp>
-        <p:nvSpPr>
-          <p:cNvPr id="25" name="Rectangle 24"/>
-          <p:cNvSpPr/>
-          <p:nvPr/>
-        </p:nvSpPr>
-        <p:spPr>
-          <a:xfrm>
-            <a:off x="640080" y="4782312"/>
-            <a:ext cx="5486400" cy="457200"/>
-          </a:xfrm>
-          <a:prstGeom prst="rect">
-            <a:avLst/>
-          </a:prstGeom>
-          <a:solidFill>
-            <a:srgbClr val="FFFFFF"/>
-          </a:solidFill>
-          <a:ln>
-            <a:solidFill>
-              <a:srgbClr val="0071DC"/>
-            </a:solidFill>
-          </a:ln>
-          <a:effectLst/>
-        </p:spPr>
-        <p:style>
-          <a:lnRef idx="1">
-            <a:schemeClr val="accent1"/>
-          </a:lnRef>
-          <a:fillRef idx="3">
-            <a:schemeClr val="accent1"/>
-          </a:fillRef>
-          <a:effectRef idx="2">
-            <a:schemeClr val="accent1"/>
-          </a:effectRef>
-          <a:fontRef idx="minor">
-            <a:schemeClr val="lt1"/>
-          </a:fontRef>
-        </p:style>
-        <p:txBody>
-          <a:bodyPr rtlCol="0" anchor="ctr"/>
-          <a:lstStyle/>
-          <a:p>
-            <a:pPr algn="ctr"/>
-          </a:p>
-        </p:txBody>
-      </p:sp>
-      <p:sp>
-        <p:nvSpPr>
-          <p:cNvPr id="26" name="TextBox 25"/>
-          <p:cNvSpPr txBox="1"/>
-          <p:nvPr/>
-        </p:nvSpPr>
-        <p:spPr>
-          <a:xfrm>
-            <a:off x="640080" y="4782312"/>
-            <a:ext cx="5486400" cy="457200"/>
-          </a:xfrm>
-          <a:prstGeom prst="rect">
-            <a:avLst/>
-          </a:prstGeom>
-          <a:noFill/>
-        </p:spPr>
-        <p:txBody>
-          <a:bodyPr wrap="square" anchor="ctr">
-            <a:spAutoFit/>
-          </a:bodyPr>
-          <a:lstStyle/>
-          <a:p>
-            <a:pPr algn="ctr"/>
-            <a:r>
-              <a:rPr sz="1200" b="1" i="0">
-                <a:solidFill>
-                  <a:srgbClr val="041E42"/>
-                </a:solidFill>
-              </a:rPr>
-              <a:t>delta(aspect) = competitor negative_ratio  –  Walmart negative_ratio</a:t>
-            </a:r>
-          </a:p>
-        </p:txBody>
-      </p:sp>
-      <p:sp>
-        <p:nvSpPr>
-          <p:cNvPr id="27" name="TextBox 26"/>
-          <p:cNvSpPr txBox="1"/>
-          <p:nvPr/>
-        </p:nvSpPr>
-        <p:spPr>
-          <a:xfrm>
-            <a:off x="640080" y="5394960"/>
-            <a:ext cx="5486400" cy="1051560"/>
-          </a:xfrm>
-          <a:prstGeom prst="rect">
-            <a:avLst/>
-          </a:prstGeom>
-          <a:noFill/>
-        </p:spPr>
-        <p:txBody>
-          <a:bodyPr wrap="square" anchor="t">
-            <a:spAutoFit/>
-          </a:bodyPr>
-          <a:lstStyle/>
-          <a:p>
-            <a:pPr algn="l"/>
-            <a:r>
-              <a:rPr sz="950" b="0" i="1">
+              <a:rPr sz="1050" b="0" i="1">
                 <a:solidFill>
                   <a:srgbClr val="333333"/>
                 </a:solidFill>
               </a:rPr>
-              <a:t>neg / total  =  fraction of that aspect's competitor posts labelled negative by ModernBERT.</a:t>
-            </a:r>
-          </a:p>
-          <a:p>
-            <a:pPr algn="l"/>
-            <a:r>
-              <a:rPr sz="950" b="0" i="1">
-                <a:solidFill>
-                  <a:srgbClr val="333333"/>
-                </a:solidFill>
-              </a:rPr>
-              <a:t>delta &gt; 0  →  competitors are worse than Walmart on this topic.</a:t>
-            </a:r>
-          </a:p>
-          <a:p>
-            <a:pPr algn="l"/>
-            <a:r>
-              <a:rPr sz="950" b="0" i="1">
-                <a:solidFill>
-                  <a:srgbClr val="333333"/>
-                </a:solidFill>
-              </a:rPr>
-              <a:t>Zero LLM cost — every value is a  Counter  aggregate on top of ModernBERT + DeBERTa-NLI outputs.</a:t>
-            </a:r>
-          </a:p>
-        </p:txBody>
-      </p:sp>
-      <p:sp>
-        <p:nvSpPr>
-          <p:cNvPr id="28" name="Rectangle 27"/>
-          <p:cNvSpPr/>
-          <p:nvPr/>
-        </p:nvSpPr>
-        <p:spPr>
-          <a:xfrm>
-            <a:off x="6355080" y="3154680"/>
-            <a:ext cx="5349240" cy="3337560"/>
-          </a:xfrm>
-          <a:prstGeom prst="rect">
-            <a:avLst/>
-          </a:prstGeom>
-          <a:solidFill>
-            <a:srgbClr val="FEF3C7"/>
-          </a:solidFill>
-          <a:ln>
-            <a:solidFill>
-              <a:srgbClr val="D97706"/>
-            </a:solidFill>
-          </a:ln>
-          <a:effectLst/>
-        </p:spPr>
-        <p:style>
-          <a:lnRef idx="1">
-            <a:schemeClr val="accent1"/>
-          </a:lnRef>
-          <a:fillRef idx="3">
-            <a:schemeClr val="accent1"/>
-          </a:fillRef>
-          <a:effectRef idx="2">
-            <a:schemeClr val="accent1"/>
-          </a:effectRef>
-          <a:fontRef idx="minor">
-            <a:schemeClr val="lt1"/>
-          </a:fontRef>
-        </p:style>
-        <p:txBody>
-          <a:bodyPr rtlCol="0" anchor="ctr"/>
-          <a:lstStyle/>
-          <a:p>
-            <a:pPr algn="ctr"/>
-          </a:p>
-        </p:txBody>
-      </p:sp>
-      <p:sp>
-        <p:nvSpPr>
-          <p:cNvPr id="29" name="Rectangle 28"/>
-          <p:cNvSpPr/>
-          <p:nvPr/>
-        </p:nvSpPr>
-        <p:spPr>
-          <a:xfrm>
-            <a:off x="6355080" y="3154680"/>
-            <a:ext cx="5349240" cy="411480"/>
-          </a:xfrm>
-          <a:prstGeom prst="rect">
-            <a:avLst/>
-          </a:prstGeom>
-          <a:solidFill>
-            <a:srgbClr val="D97706"/>
-          </a:solidFill>
-          <a:ln>
-            <a:noFill/>
-          </a:ln>
-          <a:effectLst/>
-        </p:spPr>
-        <p:style>
-          <a:lnRef idx="1">
-            <a:schemeClr val="accent1"/>
-          </a:lnRef>
-          <a:fillRef idx="3">
-            <a:schemeClr val="accent1"/>
-          </a:fillRef>
-          <a:effectRef idx="2">
-            <a:schemeClr val="accent1"/>
-          </a:effectRef>
-          <a:fontRef idx="minor">
-            <a:schemeClr val="lt1"/>
-          </a:fontRef>
-        </p:style>
-        <p:txBody>
-          <a:bodyPr rtlCol="0" anchor="ctr"/>
-          <a:lstStyle/>
-          <a:p>
-            <a:pPr algn="ctr"/>
-          </a:p>
-        </p:txBody>
-      </p:sp>
-      <p:sp>
-        <p:nvSpPr>
-          <p:cNvPr id="30" name="TextBox 29"/>
-          <p:cNvSpPr txBox="1"/>
-          <p:nvPr/>
-        </p:nvSpPr>
-        <p:spPr>
-          <a:xfrm>
-            <a:off x="6355080" y="3209544"/>
-            <a:ext cx="5349240" cy="320040"/>
-          </a:xfrm>
-          <a:prstGeom prst="rect">
-            <a:avLst/>
-          </a:prstGeom>
-          <a:noFill/>
-        </p:spPr>
-        <p:txBody>
-          <a:bodyPr wrap="square" anchor="t">
-            <a:spAutoFit/>
-          </a:bodyPr>
-          <a:lstStyle/>
-          <a:p>
-            <a:pPr algn="ctr"/>
-            <a:r>
-              <a:rPr sz="1150" b="1" i="0">
-                <a:solidFill>
-                  <a:srgbClr val="FFFFFF"/>
-                </a:solidFill>
-              </a:rPr>
-              <a:t>THRESHOLDS  ·  what the numbers become on the card</a:t>
-            </a:r>
-          </a:p>
-        </p:txBody>
-      </p:sp>
-      <p:sp>
-        <p:nvSpPr>
-          <p:cNvPr id="31" name="TextBox 30"/>
-          <p:cNvSpPr txBox="1"/>
-          <p:nvPr/>
-        </p:nvSpPr>
-        <p:spPr>
-          <a:xfrm>
-            <a:off x="6537960" y="3611880"/>
-            <a:ext cx="5029200" cy="274320"/>
-          </a:xfrm>
-          <a:prstGeom prst="rect">
-            <a:avLst/>
-          </a:prstGeom>
-          <a:noFill/>
-        </p:spPr>
-        <p:txBody>
-          <a:bodyPr wrap="square" anchor="t">
-            <a:spAutoFit/>
-          </a:bodyPr>
-          <a:lstStyle/>
-          <a:p>
-            <a:pPr algn="l"/>
-            <a:r>
-              <a:rPr sz="1100" b="1" i="0">
-                <a:solidFill>
-                  <a:srgbClr val="041E42"/>
-                </a:solidFill>
-              </a:rPr>
-              <a:t>Priority tag  (uses  competitor negative_ratio)</a:t>
-            </a:r>
-          </a:p>
-        </p:txBody>
-      </p:sp>
-      <p:sp>
-        <p:nvSpPr>
-          <p:cNvPr id="32" name="TextBox 31"/>
-          <p:cNvSpPr txBox="1"/>
-          <p:nvPr/>
-        </p:nvSpPr>
-        <p:spPr>
-          <a:xfrm>
-            <a:off x="6537960" y="3913632"/>
-            <a:ext cx="5029200" cy="822960"/>
-          </a:xfrm>
-          <a:prstGeom prst="rect">
-            <a:avLst/>
-          </a:prstGeom>
-          <a:noFill/>
-        </p:spPr>
-        <p:txBody>
-          <a:bodyPr wrap="square">
-            <a:spAutoFit/>
-          </a:bodyPr>
-          <a:lstStyle/>
-          <a:p>
-            <a:pPr>
-              <a:spcAft>
-                <a:spcPts val="400"/>
-              </a:spcAft>
-            </a:pPr>
-            <a:r>
-              <a:rPr sz="1100" b="0">
-                <a:solidFill>
-                  <a:srgbClr val="333333"/>
-                </a:solidFill>
-              </a:rPr>
-              <a:t>•  ratio  ≥  60 %   →   High priority</a:t>
-            </a:r>
-          </a:p>
-          <a:p>
-            <a:pPr>
-              <a:spcAft>
-                <a:spcPts val="400"/>
-              </a:spcAft>
-            </a:pPr>
-            <a:r>
-              <a:rPr sz="1100" b="0">
-                <a:solidFill>
-                  <a:srgbClr val="333333"/>
-                </a:solidFill>
-              </a:rPr>
-              <a:t>•  ratio  ≥  40 %   →   Medium</a:t>
-            </a:r>
-          </a:p>
-          <a:p>
-            <a:pPr>
-              <a:spcAft>
-                <a:spcPts val="400"/>
-              </a:spcAft>
-            </a:pPr>
-            <a:r>
-              <a:rPr sz="1100" b="0">
-                <a:solidFill>
-                  <a:srgbClr val="333333"/>
-                </a:solidFill>
-              </a:rPr>
-              <a:t>•  otherwise       →   Low</a:t>
-            </a:r>
-          </a:p>
-        </p:txBody>
-      </p:sp>
-      <p:sp>
-        <p:nvSpPr>
-          <p:cNvPr id="33" name="TextBox 32"/>
-          <p:cNvSpPr txBox="1"/>
-          <p:nvPr/>
-        </p:nvSpPr>
-        <p:spPr>
-          <a:xfrm>
-            <a:off x="6537960" y="4800600"/>
-            <a:ext cx="5029200" cy="274320"/>
-          </a:xfrm>
-          <a:prstGeom prst="rect">
-            <a:avLst/>
-          </a:prstGeom>
-          <a:noFill/>
-        </p:spPr>
-        <p:txBody>
-          <a:bodyPr wrap="square" anchor="t">
-            <a:spAutoFit/>
-          </a:bodyPr>
-          <a:lstStyle/>
-          <a:p>
-            <a:pPr algn="l"/>
-            <a:r>
-              <a:rPr sz="1100" b="1" i="0">
-                <a:solidFill>
-                  <a:srgbClr val="041E42"/>
-                </a:solidFill>
-              </a:rPr>
-              <a:t>Action angle  (uses  delta)</a:t>
-            </a:r>
-          </a:p>
-        </p:txBody>
-      </p:sp>
-      <p:sp>
-        <p:nvSpPr>
-          <p:cNvPr id="34" name="TextBox 33"/>
-          <p:cNvSpPr txBox="1"/>
-          <p:nvPr/>
-        </p:nvSpPr>
-        <p:spPr>
-          <a:xfrm>
-            <a:off x="6537960" y="5102352"/>
-            <a:ext cx="5029200" cy="1325880"/>
-          </a:xfrm>
-          <a:prstGeom prst="rect">
-            <a:avLst/>
-          </a:prstGeom>
-          <a:noFill/>
-        </p:spPr>
-        <p:txBody>
-          <a:bodyPr wrap="square">
-            <a:spAutoFit/>
-          </a:bodyPr>
-          <a:lstStyle/>
-          <a:p>
-            <a:pPr>
-              <a:spcAft>
-                <a:spcPts val="400"/>
-              </a:spcAft>
-            </a:pPr>
-            <a:r>
-              <a:rPr sz="1100" b="0">
-                <a:solidFill>
-                  <a:srgbClr val="333333"/>
-                </a:solidFill>
-              </a:rPr>
-              <a:t>•  delta  &gt;  +5 %   →   'Marketing angle'   (Walmart is better)</a:t>
-            </a:r>
-          </a:p>
-          <a:p>
-            <a:pPr>
-              <a:spcAft>
-                <a:spcPts val="400"/>
-              </a:spcAft>
-            </a:pPr>
-            <a:r>
-              <a:rPr sz="1100" b="0">
-                <a:solidFill>
-                  <a:srgbClr val="333333"/>
-                </a:solidFill>
-              </a:rPr>
-              <a:t>•  delta  &lt;  –5 %   →   'Investigate'       (Walmart is worse)</a:t>
-            </a:r>
-          </a:p>
-          <a:p>
-            <a:pPr>
-              <a:spcAft>
-                <a:spcPts val="400"/>
-              </a:spcAft>
-            </a:pPr>
-            <a:r>
-              <a:rPr sz="1100" b="0">
-                <a:solidFill>
-                  <a:srgbClr val="333333"/>
-                </a:solidFill>
-              </a:rPr>
-              <a:t>•  within ± 5 %     →   'Industry-wide friction'</a:t>
-            </a:r>
-          </a:p>
-        </p:txBody>
-      </p:sp>
-      <p:sp>
-        <p:nvSpPr>
-          <p:cNvPr id="35" name="TextBox 34"/>
+              <a:t>Every number is a Counter aggregate over ModernBERT + DeBERTa-v3-NLI outputs — zero LLM cost, reproducible, and each recommendation traces to specific counts the analyst can click into.</a:t>
+            </a:r>
+          </a:p>
+        </p:txBody>
+      </p:sp>
+      <p:sp>
+        <p:nvSpPr>
+          <p:cNvPr id="47" name="TextBox 46"/>
           <p:cNvSpPr txBox="1"/>
           <p:nvPr/>
         </p:nvSpPr>
@@ -6292,7 +6834,7 @@
       </p:sp>
       <p:sp>
         <p:nvSpPr>
-          <p:cNvPr id="36" name="TextBox 35"/>
+          <p:cNvPr id="48" name="TextBox 47"/>
           <p:cNvSpPr txBox="1"/>
           <p:nvPr/>
         </p:nvSpPr>

--- a/docs/Sem_4/FINAL_PRESENTATION_VishalSingh_2020AA05641.pptx
+++ b/docs/Sem_4/FINAL_PRESENTATION_VishalSingh_2020AA05641.pptx
@@ -28,6 +28,7 @@
     <p:sldId id="276" r:id="rId27"/>
     <p:sldId id="277" r:id="rId28"/>
     <p:sldId id="278" r:id="rId29"/>
+    <p:sldId id="279" r:id="rId30"/>
   </p:sldIdLst>
   <p:sldSz cx="12191695" cy="6858000" type="screen4x3"/>
   <p:notesSz cx="6858000" cy="9144000"/>
@@ -4801,7 +4802,7 @@
                   <a:srgbClr val="666666"/>
                 </a:solidFill>
               </a:rPr>
-              <a:t>10 / 23</a:t>
+              <a:t>10 / 24</a:t>
             </a:r>
           </a:p>
         </p:txBody>
@@ -6861,7 +6862,7 @@
                   <a:srgbClr val="666666"/>
                 </a:solidFill>
               </a:rPr>
-              <a:t>11 / 23</a:t>
+              <a:t>11 / 24</a:t>
             </a:r>
           </a:p>
         </p:txBody>
@@ -6957,7 +6958,7 @@
                   <a:srgbClr val="FFFFFF"/>
                 </a:solidFill>
               </a:rPr>
-              <a:t>Notification Centre</a:t>
+              <a:t>Alert Feed</a:t>
             </a:r>
           </a:p>
         </p:txBody>
@@ -6991,7 +6992,7 @@
                   <a:srgbClr val="E8F4FD"/>
                 </a:solidFill>
               </a:rPr>
-              <a:t>In-app mirror of the group-routed email / Slack digest</a:t>
+              <a:t>Live risk detection at /alerts  —  stored history + WebSocket push, merged and deduped</a:t>
             </a:r>
           </a:p>
         </p:txBody>
@@ -7083,7 +7084,7 @@
         <p:spPr>
           <a:xfrm>
             <a:off x="457200" y="1234440"/>
-            <a:ext cx="5486400" cy="2286000"/>
+            <a:ext cx="5486400" cy="2468880"/>
           </a:xfrm>
           <a:prstGeom prst="rect">
             <a:avLst/>
@@ -7107,7 +7108,7 @@
                   <a:srgbClr val="333333"/>
                 </a:solidFill>
               </a:rPr>
-              <a:t>•  Every P1 / P2 email or Slack alert is mirrored in the app</a:t>
+              <a:t>•  4 alert types  ·  volume_spike · sentiment_crash · emerging_topic · competitor_negative</a:t>
             </a:r>
           </a:p>
           <a:p>
@@ -7122,7 +7123,7 @@
                   <a:srgbClr val="333333"/>
                 </a:solidFill>
               </a:rPr>
-              <a:t>•  Notifications grouped by  subreddit ↔ business team</a:t>
+              <a:t>•  3 severities  ·  high / medium / low  with 30-day stacked timeline</a:t>
             </a:r>
           </a:p>
           <a:p>
@@ -7137,7 +7138,7 @@
                   <a:srgbClr val="333333"/>
                 </a:solidFill>
               </a:rPr>
-              <a:t>•  Read / unread state persisted per analyst</a:t>
+              <a:t>•  State machine  ·  new  →  acknowledged  →  investigating  →  resolved</a:t>
             </a:r>
           </a:p>
           <a:p>
@@ -7152,7 +7153,7 @@
                   <a:srgbClr val="333333"/>
                 </a:solidFill>
               </a:rPr>
-              <a:t>•  Deep-links open the post in Review &amp; Validate</a:t>
+              <a:t>•  Filters  ·  range · severity · type · state</a:t>
             </a:r>
           </a:p>
           <a:p>
@@ -7167,14 +7168,29 @@
                   <a:srgbClr val="333333"/>
                 </a:solidFill>
               </a:rPr>
-              <a:t>•  Powered by the same  alerts  rows that drive email/Slack</a:t>
+              <a:t>•  Inline rule editor updates thresholds live (no redeploy)</a:t>
+            </a:r>
+          </a:p>
+          <a:p>
+            <a:pPr>
+              <a:spcAft>
+                <a:spcPts val="400"/>
+              </a:spcAft>
+            </a:pPr>
+            <a:r>
+              <a:rPr sz="1200" b="0">
+                <a:solidFill>
+                  <a:srgbClr val="333333"/>
+                </a:solidFill>
+              </a:rPr>
+              <a:t>•  sentiment_crash enriched with macro group + WoW deltas + top subs</a:t>
             </a:r>
           </a:p>
         </p:txBody>
       </p:sp>
       <p:pic>
         <p:nvPicPr>
-          <p:cNvPr id="8" name="Picture 7" descr="notifications.png"/>
+          <p:cNvPr id="8" name="Picture 7" descr="alert_feed.png"/>
           <p:cNvPicPr>
             <a:picLocks noChangeAspect="1"/>
           </p:cNvPicPr>
@@ -7189,7 +7205,7 @@
         <p:spPr>
           <a:xfrm>
             <a:off x="6172200" y="914400"/>
-            <a:ext cx="5669280" cy="4265083"/>
+            <a:ext cx="5669280" cy="4272957"/>
           </a:xfrm>
           <a:prstGeom prst="rect">
             <a:avLst/>
@@ -7204,7 +7220,7 @@
         </p:nvSpPr>
         <p:spPr>
           <a:xfrm>
-            <a:off x="457200" y="3703320"/>
+            <a:off x="457200" y="3840480"/>
             <a:ext cx="5486400" cy="1371600"/>
           </a:xfrm>
           <a:prstGeom prst="rect">
@@ -7250,7 +7266,7 @@
         </p:nvSpPr>
         <p:spPr>
           <a:xfrm>
-            <a:off x="640080" y="3794760"/>
+            <a:off x="640080" y="3931920"/>
             <a:ext cx="5120640" cy="320040"/>
           </a:xfrm>
           <a:prstGeom prst="rect">
@@ -7271,7 +7287,7 @@
                   <a:srgbClr val="0071DC"/>
                 </a:solidFill>
               </a:rPr>
-              <a:t>PRIORITY THRESHOLDS</a:t>
+              <a:t>EDITABLE RULE THRESHOLDS</a:t>
             </a:r>
           </a:p>
         </p:txBody>
@@ -7284,7 +7300,7 @@
         </p:nvSpPr>
         <p:spPr>
           <a:xfrm>
-            <a:off x="640080" y="4114800"/>
+            <a:off x="640080" y="4251960"/>
             <a:ext cx="5120640" cy="914400"/>
           </a:xfrm>
           <a:prstGeom prst="rect">
@@ -7305,7 +7321,7 @@
                   <a:srgbClr val="333333"/>
                 </a:solidFill>
               </a:rPr>
-              <a:t>P1 — trust ≥ 0.70  and  confidence ≥ 0.80</a:t>
+              <a:t>sigma_threshold  ·  drop_threshold  ·  min_posts  ·  window_hours</a:t>
             </a:r>
           </a:p>
           <a:p>
@@ -7316,7 +7332,7 @@
                   <a:srgbClr val="333333"/>
                 </a:solidFill>
               </a:rPr>
-              <a:t>P2 — trust ≥ 0.50  and  confidence ≥ 0.60</a:t>
+              <a:t>delta_threshold  ·  min_posts_per_window</a:t>
             </a:r>
           </a:p>
           <a:p>
@@ -7327,7 +7343,7 @@
                   <a:srgbClr val="333333"/>
                 </a:solidFill>
               </a:rPr>
-              <a:t>Source: config/models.yaml + dispatcher.py</a:t>
+              <a:t>Saved via  POST /api/alerts/rules  and read by the alert engine.</a:t>
             </a:r>
           </a:p>
         </p:txBody>
@@ -7340,7 +7356,7 @@
         </p:nvSpPr>
         <p:spPr>
           <a:xfrm>
-            <a:off x="457200" y="5212080"/>
+            <a:off x="457200" y="5349240"/>
             <a:ext cx="5486400" cy="1234440"/>
           </a:xfrm>
           <a:prstGeom prst="rect">
@@ -7386,7 +7402,7 @@
         </p:nvSpPr>
         <p:spPr>
           <a:xfrm>
-            <a:off x="640080" y="5321808"/>
+            <a:off x="640080" y="5458968"/>
             <a:ext cx="5120640" cy="320040"/>
           </a:xfrm>
           <a:prstGeom prst="rect">
@@ -7407,7 +7423,7 @@
                   <a:srgbClr val="10B981"/>
                 </a:solidFill>
               </a:rPr>
-              <a:t>GROUPS TODAY  (live capture)</a:t>
+              <a:t>COMPETITOR-NEGATIVE RULE  ·  worked example</a:t>
             </a:r>
           </a:p>
         </p:txBody>
@@ -7420,7 +7436,7 @@
         </p:nvSpPr>
         <p:spPr>
           <a:xfrm>
-            <a:off x="640080" y="5623560"/>
+            <a:off x="640080" y="5760720"/>
             <a:ext cx="5120640" cy="777240"/>
           </a:xfrm>
           <a:prstGeom prst="rect">
@@ -7436,12 +7452,23 @@
           <a:p>
             <a:pPr algn="l"/>
             <a:r>
-              <a:rPr sz="1100" b="0" i="0">
+              <a:rPr sz="1050" b="0" i="0">
                 <a:solidFill>
                   <a:srgbClr val="333333"/>
                 </a:solidFill>
               </a:rPr>
-              <a:t>4 routing groups configured  ·  DriverRelatedPost, GIF_, SAMSClub, W+ Membership  ·  delivery status tracked per row in  notification_log.</a:t>
+              <a:t>r/target  ·  prev 7 d: 9 / 30 = 0.30   →   last 7 d: 20 / 40 = 0.50   →   Δ = +0.20</a:t>
+            </a:r>
+          </a:p>
+          <a:p>
+            <a:pPr algn="l"/>
+            <a:r>
+              <a:rPr sz="1050" b="0" i="0">
+                <a:solidFill>
+                  <a:srgbClr val="333333"/>
+                </a:solidFill>
+              </a:rPr>
+              <a:t>Δ ≥ 0.15  and  both windows ≥ 25 posts  →  fires  (severity high if Δ ≥ 0.25).</a:t>
             </a:r>
           </a:p>
         </p:txBody>
@@ -7509,7 +7536,7 @@
                   <a:srgbClr val="666666"/>
                 </a:solidFill>
               </a:rPr>
-              <a:t>12 / 23</a:t>
+              <a:t>12 / 24</a:t>
             </a:r>
           </a:p>
         </p:txBody>
@@ -7523,6 +7550,654 @@
 </file>
 
 <file path=ppt/slides/slide13.xml><?xml version="1.0" encoding="utf-8"?>
+<p:sld xmlns:a="http://schemas.openxmlformats.org/drawingml/2006/main" xmlns:p="http://schemas.openxmlformats.org/presentationml/2006/main" xmlns:r="http://schemas.openxmlformats.org/officeDocument/2006/relationships">
+  <p:cSld>
+    <p:spTree>
+      <p:nvGrpSpPr>
+        <p:cNvPr id="1" name=""/>
+        <p:cNvGrpSpPr/>
+        <p:nvPr/>
+      </p:nvGrpSpPr>
+      <p:grpSpPr/>
+      <p:sp>
+        <p:nvSpPr>
+          <p:cNvPr id="2" name="Rectangle 1"/>
+          <p:cNvSpPr/>
+          <p:nvPr/>
+        </p:nvSpPr>
+        <p:spPr>
+          <a:xfrm>
+            <a:off x="0" y="0"/>
+            <a:ext cx="12191695" cy="777240"/>
+          </a:xfrm>
+          <a:prstGeom prst="rect">
+            <a:avLst/>
+          </a:prstGeom>
+          <a:solidFill>
+            <a:srgbClr val="041E42"/>
+          </a:solidFill>
+          <a:ln>
+            <a:noFill/>
+          </a:ln>
+          <a:effectLst/>
+        </p:spPr>
+        <p:style>
+          <a:lnRef idx="1">
+            <a:schemeClr val="accent1"/>
+          </a:lnRef>
+          <a:fillRef idx="3">
+            <a:schemeClr val="accent1"/>
+          </a:fillRef>
+          <a:effectRef idx="2">
+            <a:schemeClr val="accent1"/>
+          </a:effectRef>
+          <a:fontRef idx="minor">
+            <a:schemeClr val="lt1"/>
+          </a:fontRef>
+        </p:style>
+        <p:txBody>
+          <a:bodyPr rtlCol="0" anchor="ctr"/>
+          <a:lstStyle/>
+          <a:p>
+            <a:pPr algn="ctr"/>
+          </a:p>
+        </p:txBody>
+      </p:sp>
+      <p:sp>
+        <p:nvSpPr>
+          <p:cNvPr id="3" name="TextBox 2"/>
+          <p:cNvSpPr txBox="1"/>
+          <p:nvPr/>
+        </p:nvSpPr>
+        <p:spPr>
+          <a:xfrm>
+            <a:off x="365760" y="109728"/>
+            <a:ext cx="11430000" cy="457200"/>
+          </a:xfrm>
+          <a:prstGeom prst="rect">
+            <a:avLst/>
+          </a:prstGeom>
+          <a:noFill/>
+        </p:spPr>
+        <p:txBody>
+          <a:bodyPr wrap="square" anchor="t">
+            <a:spAutoFit/>
+          </a:bodyPr>
+          <a:lstStyle/>
+          <a:p>
+            <a:pPr algn="l"/>
+            <a:r>
+              <a:rPr sz="2600" b="1" i="0">
+                <a:solidFill>
+                  <a:srgbClr val="FFFFFF"/>
+                </a:solidFill>
+              </a:rPr>
+              <a:t>Notification Centre</a:t>
+            </a:r>
+          </a:p>
+        </p:txBody>
+      </p:sp>
+      <p:sp>
+        <p:nvSpPr>
+          <p:cNvPr id="4" name="TextBox 3"/>
+          <p:cNvSpPr txBox="1"/>
+          <p:nvPr/>
+        </p:nvSpPr>
+        <p:spPr>
+          <a:xfrm>
+            <a:off x="365760" y="457200"/>
+            <a:ext cx="11430000" cy="320040"/>
+          </a:xfrm>
+          <a:prstGeom prst="rect">
+            <a:avLst/>
+          </a:prstGeom>
+          <a:noFill/>
+        </p:spPr>
+        <p:txBody>
+          <a:bodyPr wrap="square" anchor="t">
+            <a:spAutoFit/>
+          </a:bodyPr>
+          <a:lstStyle/>
+          <a:p>
+            <a:pPr algn="l"/>
+            <a:r>
+              <a:rPr sz="1200" b="0" i="0">
+                <a:solidFill>
+                  <a:srgbClr val="E8F4FD"/>
+                </a:solidFill>
+              </a:rPr>
+              <a:t>In-app mirror of the group-routed email / Slack digest</a:t>
+            </a:r>
+          </a:p>
+        </p:txBody>
+      </p:sp>
+      <p:sp>
+        <p:nvSpPr>
+          <p:cNvPr id="5" name="Rectangle 4"/>
+          <p:cNvSpPr/>
+          <p:nvPr/>
+        </p:nvSpPr>
+        <p:spPr>
+          <a:xfrm>
+            <a:off x="0" y="777240"/>
+            <a:ext cx="12191695" cy="45720"/>
+          </a:xfrm>
+          <a:prstGeom prst="rect">
+            <a:avLst/>
+          </a:prstGeom>
+          <a:solidFill>
+            <a:srgbClr val="FFC220"/>
+          </a:solidFill>
+          <a:ln>
+            <a:noFill/>
+          </a:ln>
+          <a:effectLst/>
+        </p:spPr>
+        <p:style>
+          <a:lnRef idx="1">
+            <a:schemeClr val="accent1"/>
+          </a:lnRef>
+          <a:fillRef idx="3">
+            <a:schemeClr val="accent1"/>
+          </a:fillRef>
+          <a:effectRef idx="2">
+            <a:schemeClr val="accent1"/>
+          </a:effectRef>
+          <a:fontRef idx="minor">
+            <a:schemeClr val="lt1"/>
+          </a:fontRef>
+        </p:style>
+        <p:txBody>
+          <a:bodyPr rtlCol="0" anchor="ctr"/>
+          <a:lstStyle/>
+          <a:p>
+            <a:pPr algn="ctr"/>
+          </a:p>
+        </p:txBody>
+      </p:sp>
+      <p:sp>
+        <p:nvSpPr>
+          <p:cNvPr id="6" name="TextBox 5"/>
+          <p:cNvSpPr txBox="1"/>
+          <p:nvPr/>
+        </p:nvSpPr>
+        <p:spPr>
+          <a:xfrm>
+            <a:off x="457200" y="914400"/>
+            <a:ext cx="5486400" cy="320040"/>
+          </a:xfrm>
+          <a:prstGeom prst="rect">
+            <a:avLst/>
+          </a:prstGeom>
+          <a:noFill/>
+        </p:spPr>
+        <p:txBody>
+          <a:bodyPr wrap="square" anchor="t">
+            <a:spAutoFit/>
+          </a:bodyPr>
+          <a:lstStyle/>
+          <a:p>
+            <a:pPr algn="l"/>
+            <a:r>
+              <a:rPr sz="1100" b="1" i="0">
+                <a:solidFill>
+                  <a:srgbClr val="0071DC"/>
+                </a:solidFill>
+              </a:rPr>
+              <a:t>WHAT IT DOES</a:t>
+            </a:r>
+          </a:p>
+        </p:txBody>
+      </p:sp>
+      <p:sp>
+        <p:nvSpPr>
+          <p:cNvPr id="7" name="TextBox 6"/>
+          <p:cNvSpPr txBox="1"/>
+          <p:nvPr/>
+        </p:nvSpPr>
+        <p:spPr>
+          <a:xfrm>
+            <a:off x="457200" y="1234440"/>
+            <a:ext cx="5486400" cy="2286000"/>
+          </a:xfrm>
+          <a:prstGeom prst="rect">
+            <a:avLst/>
+          </a:prstGeom>
+          <a:noFill/>
+        </p:spPr>
+        <p:txBody>
+          <a:bodyPr wrap="square">
+            <a:spAutoFit/>
+          </a:bodyPr>
+          <a:lstStyle/>
+          <a:p>
+            <a:pPr>
+              <a:spcAft>
+                <a:spcPts val="400"/>
+              </a:spcAft>
+            </a:pPr>
+            <a:r>
+              <a:rPr sz="1200" b="0">
+                <a:solidFill>
+                  <a:srgbClr val="333333"/>
+                </a:solidFill>
+              </a:rPr>
+              <a:t>•  Every P1 / P2 email or Slack alert is mirrored in the app</a:t>
+            </a:r>
+          </a:p>
+          <a:p>
+            <a:pPr>
+              <a:spcAft>
+                <a:spcPts val="400"/>
+              </a:spcAft>
+            </a:pPr>
+            <a:r>
+              <a:rPr sz="1200" b="0">
+                <a:solidFill>
+                  <a:srgbClr val="333333"/>
+                </a:solidFill>
+              </a:rPr>
+              <a:t>•  Notifications grouped by  subreddit ↔ business team</a:t>
+            </a:r>
+          </a:p>
+          <a:p>
+            <a:pPr>
+              <a:spcAft>
+                <a:spcPts val="400"/>
+              </a:spcAft>
+            </a:pPr>
+            <a:r>
+              <a:rPr sz="1200" b="0">
+                <a:solidFill>
+                  <a:srgbClr val="333333"/>
+                </a:solidFill>
+              </a:rPr>
+              <a:t>•  Read / unread state persisted per analyst</a:t>
+            </a:r>
+          </a:p>
+          <a:p>
+            <a:pPr>
+              <a:spcAft>
+                <a:spcPts val="400"/>
+              </a:spcAft>
+            </a:pPr>
+            <a:r>
+              <a:rPr sz="1200" b="0">
+                <a:solidFill>
+                  <a:srgbClr val="333333"/>
+                </a:solidFill>
+              </a:rPr>
+              <a:t>•  Deep-links open the post in Review &amp; Validate</a:t>
+            </a:r>
+          </a:p>
+          <a:p>
+            <a:pPr>
+              <a:spcAft>
+                <a:spcPts val="400"/>
+              </a:spcAft>
+            </a:pPr>
+            <a:r>
+              <a:rPr sz="1200" b="0">
+                <a:solidFill>
+                  <a:srgbClr val="333333"/>
+                </a:solidFill>
+              </a:rPr>
+              <a:t>•  Powered by the same  alerts  rows that drive email/Slack</a:t>
+            </a:r>
+          </a:p>
+        </p:txBody>
+      </p:sp>
+      <p:pic>
+        <p:nvPicPr>
+          <p:cNvPr id="8" name="Picture 7" descr="notifications.png"/>
+          <p:cNvPicPr>
+            <a:picLocks noChangeAspect="1"/>
+          </p:cNvPicPr>
+          <p:nvPr/>
+        </p:nvPicPr>
+        <p:blipFill>
+          <a:blip r:embed="rId2"/>
+          <a:stretch>
+            <a:fillRect/>
+          </a:stretch>
+        </p:blipFill>
+        <p:spPr>
+          <a:xfrm>
+            <a:off x="6172200" y="914400"/>
+            <a:ext cx="5669280" cy="4265083"/>
+          </a:xfrm>
+          <a:prstGeom prst="rect">
+            <a:avLst/>
+          </a:prstGeom>
+        </p:spPr>
+      </p:pic>
+      <p:sp>
+        <p:nvSpPr>
+          <p:cNvPr id="9" name="Rectangle 8"/>
+          <p:cNvSpPr/>
+          <p:nvPr/>
+        </p:nvSpPr>
+        <p:spPr>
+          <a:xfrm>
+            <a:off x="457200" y="3703320"/>
+            <a:ext cx="5486400" cy="1371600"/>
+          </a:xfrm>
+          <a:prstGeom prst="rect">
+            <a:avLst/>
+          </a:prstGeom>
+          <a:solidFill>
+            <a:srgbClr val="E8F4FD"/>
+          </a:solidFill>
+          <a:ln>
+            <a:solidFill>
+              <a:srgbClr val="0071DC"/>
+            </a:solidFill>
+          </a:ln>
+          <a:effectLst/>
+        </p:spPr>
+        <p:style>
+          <a:lnRef idx="1">
+            <a:schemeClr val="accent1"/>
+          </a:lnRef>
+          <a:fillRef idx="3">
+            <a:schemeClr val="accent1"/>
+          </a:fillRef>
+          <a:effectRef idx="2">
+            <a:schemeClr val="accent1"/>
+          </a:effectRef>
+          <a:fontRef idx="minor">
+            <a:schemeClr val="lt1"/>
+          </a:fontRef>
+        </p:style>
+        <p:txBody>
+          <a:bodyPr rtlCol="0" anchor="ctr"/>
+          <a:lstStyle/>
+          <a:p>
+            <a:pPr algn="ctr"/>
+          </a:p>
+        </p:txBody>
+      </p:sp>
+      <p:sp>
+        <p:nvSpPr>
+          <p:cNvPr id="10" name="TextBox 9"/>
+          <p:cNvSpPr txBox="1"/>
+          <p:nvPr/>
+        </p:nvSpPr>
+        <p:spPr>
+          <a:xfrm>
+            <a:off x="640080" y="3794760"/>
+            <a:ext cx="5120640" cy="320040"/>
+          </a:xfrm>
+          <a:prstGeom prst="rect">
+            <a:avLst/>
+          </a:prstGeom>
+          <a:noFill/>
+        </p:spPr>
+        <p:txBody>
+          <a:bodyPr wrap="square" anchor="t">
+            <a:spAutoFit/>
+          </a:bodyPr>
+          <a:lstStyle/>
+          <a:p>
+            <a:pPr algn="l"/>
+            <a:r>
+              <a:rPr sz="1100" b="1" i="0">
+                <a:solidFill>
+                  <a:srgbClr val="0071DC"/>
+                </a:solidFill>
+              </a:rPr>
+              <a:t>PRIORITY THRESHOLDS</a:t>
+            </a:r>
+          </a:p>
+        </p:txBody>
+      </p:sp>
+      <p:sp>
+        <p:nvSpPr>
+          <p:cNvPr id="11" name="TextBox 10"/>
+          <p:cNvSpPr txBox="1"/>
+          <p:nvPr/>
+        </p:nvSpPr>
+        <p:spPr>
+          <a:xfrm>
+            <a:off x="640080" y="4114800"/>
+            <a:ext cx="5120640" cy="914400"/>
+          </a:xfrm>
+          <a:prstGeom prst="rect">
+            <a:avLst/>
+          </a:prstGeom>
+          <a:noFill/>
+        </p:spPr>
+        <p:txBody>
+          <a:bodyPr wrap="square" anchor="t">
+            <a:spAutoFit/>
+          </a:bodyPr>
+          <a:lstStyle/>
+          <a:p>
+            <a:pPr algn="l"/>
+            <a:r>
+              <a:rPr sz="1100" b="0" i="0">
+                <a:solidFill>
+                  <a:srgbClr val="333333"/>
+                </a:solidFill>
+              </a:rPr>
+              <a:t>P1 — trust ≥ 0.70  and  confidence ≥ 0.80</a:t>
+            </a:r>
+          </a:p>
+          <a:p>
+            <a:pPr algn="l"/>
+            <a:r>
+              <a:rPr sz="1100" b="0" i="0">
+                <a:solidFill>
+                  <a:srgbClr val="333333"/>
+                </a:solidFill>
+              </a:rPr>
+              <a:t>P2 — trust ≥ 0.50  and  confidence ≥ 0.60</a:t>
+            </a:r>
+          </a:p>
+          <a:p>
+            <a:pPr algn="l"/>
+            <a:r>
+              <a:rPr sz="1100" b="0" i="0">
+                <a:solidFill>
+                  <a:srgbClr val="333333"/>
+                </a:solidFill>
+              </a:rPr>
+              <a:t>Source: config/models.yaml + dispatcher.py</a:t>
+            </a:r>
+          </a:p>
+        </p:txBody>
+      </p:sp>
+      <p:sp>
+        <p:nvSpPr>
+          <p:cNvPr id="12" name="Rectangle 11"/>
+          <p:cNvSpPr/>
+          <p:nvPr/>
+        </p:nvSpPr>
+        <p:spPr>
+          <a:xfrm>
+            <a:off x="457200" y="5212080"/>
+            <a:ext cx="5486400" cy="1234440"/>
+          </a:xfrm>
+          <a:prstGeom prst="rect">
+            <a:avLst/>
+          </a:prstGeom>
+          <a:solidFill>
+            <a:srgbClr val="DCFCE7"/>
+          </a:solidFill>
+          <a:ln>
+            <a:solidFill>
+              <a:srgbClr val="10B981"/>
+            </a:solidFill>
+          </a:ln>
+          <a:effectLst/>
+        </p:spPr>
+        <p:style>
+          <a:lnRef idx="1">
+            <a:schemeClr val="accent1"/>
+          </a:lnRef>
+          <a:fillRef idx="3">
+            <a:schemeClr val="accent1"/>
+          </a:fillRef>
+          <a:effectRef idx="2">
+            <a:schemeClr val="accent1"/>
+          </a:effectRef>
+          <a:fontRef idx="minor">
+            <a:schemeClr val="lt1"/>
+          </a:fontRef>
+        </p:style>
+        <p:txBody>
+          <a:bodyPr rtlCol="0" anchor="ctr"/>
+          <a:lstStyle/>
+          <a:p>
+            <a:pPr algn="ctr"/>
+          </a:p>
+        </p:txBody>
+      </p:sp>
+      <p:sp>
+        <p:nvSpPr>
+          <p:cNvPr id="13" name="TextBox 12"/>
+          <p:cNvSpPr txBox="1"/>
+          <p:nvPr/>
+        </p:nvSpPr>
+        <p:spPr>
+          <a:xfrm>
+            <a:off x="640080" y="5321808"/>
+            <a:ext cx="5120640" cy="320040"/>
+          </a:xfrm>
+          <a:prstGeom prst="rect">
+            <a:avLst/>
+          </a:prstGeom>
+          <a:noFill/>
+        </p:spPr>
+        <p:txBody>
+          <a:bodyPr wrap="square" anchor="t">
+            <a:spAutoFit/>
+          </a:bodyPr>
+          <a:lstStyle/>
+          <a:p>
+            <a:pPr algn="l"/>
+            <a:r>
+              <a:rPr sz="1100" b="1" i="0">
+                <a:solidFill>
+                  <a:srgbClr val="10B981"/>
+                </a:solidFill>
+              </a:rPr>
+              <a:t>GROUPS TODAY  (live capture)</a:t>
+            </a:r>
+          </a:p>
+        </p:txBody>
+      </p:sp>
+      <p:sp>
+        <p:nvSpPr>
+          <p:cNvPr id="14" name="TextBox 13"/>
+          <p:cNvSpPr txBox="1"/>
+          <p:nvPr/>
+        </p:nvSpPr>
+        <p:spPr>
+          <a:xfrm>
+            <a:off x="640080" y="5623560"/>
+            <a:ext cx="5120640" cy="777240"/>
+          </a:xfrm>
+          <a:prstGeom prst="rect">
+            <a:avLst/>
+          </a:prstGeom>
+          <a:noFill/>
+        </p:spPr>
+        <p:txBody>
+          <a:bodyPr wrap="square" anchor="t">
+            <a:spAutoFit/>
+          </a:bodyPr>
+          <a:lstStyle/>
+          <a:p>
+            <a:pPr algn="l"/>
+            <a:r>
+              <a:rPr sz="1100" b="0" i="0">
+                <a:solidFill>
+                  <a:srgbClr val="333333"/>
+                </a:solidFill>
+              </a:rPr>
+              <a:t>4 routing groups configured  ·  DriverRelatedPost, GIF_, SAMSClub, W+ Membership  ·  delivery status tracked per row in  notification_log.</a:t>
+            </a:r>
+          </a:p>
+        </p:txBody>
+      </p:sp>
+      <p:sp>
+        <p:nvSpPr>
+          <p:cNvPr id="15" name="TextBox 14"/>
+          <p:cNvSpPr txBox="1"/>
+          <p:nvPr/>
+        </p:nvSpPr>
+        <p:spPr>
+          <a:xfrm>
+            <a:off x="365760" y="6537960"/>
+            <a:ext cx="8229600" cy="274320"/>
+          </a:xfrm>
+          <a:prstGeom prst="rect">
+            <a:avLst/>
+          </a:prstGeom>
+          <a:noFill/>
+        </p:spPr>
+        <p:txBody>
+          <a:bodyPr wrap="square" anchor="t">
+            <a:spAutoFit/>
+          </a:bodyPr>
+          <a:lstStyle/>
+          <a:p>
+            <a:pPr algn="l"/>
+            <a:r>
+              <a:rPr sz="900" b="0" i="0">
+                <a:solidFill>
+                  <a:srgbClr val="666666"/>
+                </a:solidFill>
+              </a:rPr>
+              <a:t>Retail Sentiment Intelligence  ·  BITS ZG628T Dissertation  ·  Vishal Singh  ·  Post Mid-Semester Presentation</a:t>
+            </a:r>
+          </a:p>
+        </p:txBody>
+      </p:sp>
+      <p:sp>
+        <p:nvSpPr>
+          <p:cNvPr id="16" name="TextBox 15"/>
+          <p:cNvSpPr txBox="1"/>
+          <p:nvPr/>
+        </p:nvSpPr>
+        <p:spPr>
+          <a:xfrm>
+            <a:off x="10972800" y="6537960"/>
+            <a:ext cx="1097280" cy="274320"/>
+          </a:xfrm>
+          <a:prstGeom prst="rect">
+            <a:avLst/>
+          </a:prstGeom>
+          <a:noFill/>
+        </p:spPr>
+        <p:txBody>
+          <a:bodyPr wrap="square" anchor="t">
+            <a:spAutoFit/>
+          </a:bodyPr>
+          <a:lstStyle/>
+          <a:p>
+            <a:pPr algn="r"/>
+            <a:r>
+              <a:rPr sz="900" b="0" i="0">
+                <a:solidFill>
+                  <a:srgbClr val="666666"/>
+                </a:solidFill>
+              </a:rPr>
+              <a:t>13 / 24</a:t>
+            </a:r>
+          </a:p>
+        </p:txBody>
+      </p:sp>
+    </p:spTree>
+  </p:cSld>
+  <p:clrMapOvr>
+    <a:masterClrMapping/>
+  </p:clrMapOvr>
+</p:sld>
+</file>
+
+<file path=ppt/slides/slide14.xml><?xml version="1.0" encoding="utf-8"?>
 <p:sld xmlns:a="http://schemas.openxmlformats.org/drawingml/2006/main" xmlns:p="http://schemas.openxmlformats.org/presentationml/2006/main" xmlns:r="http://schemas.openxmlformats.org/officeDocument/2006/relationships">
   <p:cSld>
     <p:spTree>
@@ -8905,7 +9580,7 @@
                   <a:srgbClr val="666666"/>
                 </a:solidFill>
               </a:rPr>
-              <a:t>13 / 23</a:t>
+              <a:t>14 / 24</a:t>
             </a:r>
           </a:p>
         </p:txBody>
@@ -8918,7 +9593,7 @@
 </p:sld>
 </file>
 
-<file path=ppt/slides/slide14.xml><?xml version="1.0" encoding="utf-8"?>
+<file path=ppt/slides/slide15.xml><?xml version="1.0" encoding="utf-8"?>
 <p:sld xmlns:a="http://schemas.openxmlformats.org/drawingml/2006/main" xmlns:p="http://schemas.openxmlformats.org/presentationml/2006/main" xmlns:r="http://schemas.openxmlformats.org/officeDocument/2006/relationships">
   <p:cSld>
     <p:spTree>
@@ -10710,7 +11385,7 @@
                   <a:srgbClr val="666666"/>
                 </a:solidFill>
               </a:rPr>
-              <a:t>14 / 23</a:t>
+              <a:t>15 / 24</a:t>
             </a:r>
           </a:p>
         </p:txBody>
@@ -10723,7 +11398,7 @@
 </p:sld>
 </file>
 
-<file path=ppt/slides/slide15.xml><?xml version="1.0" encoding="utf-8"?>
+<file path=ppt/slides/slide16.xml><?xml version="1.0" encoding="utf-8"?>
 <p:sld xmlns:a="http://schemas.openxmlformats.org/drawingml/2006/main" xmlns:p="http://schemas.openxmlformats.org/presentationml/2006/main" xmlns:r="http://schemas.openxmlformats.org/officeDocument/2006/relationships">
   <p:cSld>
     <p:spTree>
@@ -11685,7 +12360,7 @@
                   <a:srgbClr val="666666"/>
                 </a:solidFill>
               </a:rPr>
-              <a:t>15 / 23</a:t>
+              <a:t>16 / 24</a:t>
             </a:r>
           </a:p>
         </p:txBody>
@@ -11698,7 +12373,7 @@
 </p:sld>
 </file>
 
-<file path=ppt/slides/slide16.xml><?xml version="1.0" encoding="utf-8"?>
+<file path=ppt/slides/slide17.xml><?xml version="1.0" encoding="utf-8"?>
 <p:sld xmlns:a="http://schemas.openxmlformats.org/drawingml/2006/main" xmlns:p="http://schemas.openxmlformats.org/presentationml/2006/main" xmlns:r="http://schemas.openxmlformats.org/officeDocument/2006/relationships">
   <p:cSld>
     <p:spTree>
@@ -12987,1209 +13662,7 @@
                   <a:srgbClr val="666666"/>
                 </a:solidFill>
               </a:rPr>
-              <a:t>16 / 23</a:t>
-            </a:r>
-          </a:p>
-        </p:txBody>
-      </p:sp>
-    </p:spTree>
-  </p:cSld>
-  <p:clrMapOvr>
-    <a:masterClrMapping/>
-  </p:clrMapOvr>
-</p:sld>
-</file>
-
-<file path=ppt/slides/slide17.xml><?xml version="1.0" encoding="utf-8"?>
-<p:sld xmlns:a="http://schemas.openxmlformats.org/drawingml/2006/main" xmlns:p="http://schemas.openxmlformats.org/presentationml/2006/main" xmlns:r="http://schemas.openxmlformats.org/officeDocument/2006/relationships">
-  <p:cSld>
-    <p:spTree>
-      <p:nvGrpSpPr>
-        <p:cNvPr id="1" name=""/>
-        <p:cNvGrpSpPr/>
-        <p:nvPr/>
-      </p:nvGrpSpPr>
-      <p:grpSpPr/>
-      <p:sp>
-        <p:nvSpPr>
-          <p:cNvPr id="2" name="Rectangle 1"/>
-          <p:cNvSpPr/>
-          <p:nvPr/>
-        </p:nvSpPr>
-        <p:spPr>
-          <a:xfrm>
-            <a:off x="0" y="0"/>
-            <a:ext cx="12191695" cy="777240"/>
-          </a:xfrm>
-          <a:prstGeom prst="rect">
-            <a:avLst/>
-          </a:prstGeom>
-          <a:solidFill>
-            <a:srgbClr val="041E42"/>
-          </a:solidFill>
-          <a:ln>
-            <a:noFill/>
-          </a:ln>
-          <a:effectLst/>
-        </p:spPr>
-        <p:style>
-          <a:lnRef idx="1">
-            <a:schemeClr val="accent1"/>
-          </a:lnRef>
-          <a:fillRef idx="3">
-            <a:schemeClr val="accent1"/>
-          </a:fillRef>
-          <a:effectRef idx="2">
-            <a:schemeClr val="accent1"/>
-          </a:effectRef>
-          <a:fontRef idx="minor">
-            <a:schemeClr val="lt1"/>
-          </a:fontRef>
-        </p:style>
-        <p:txBody>
-          <a:bodyPr rtlCol="0" anchor="ctr"/>
-          <a:lstStyle/>
-          <a:p>
-            <a:pPr algn="ctr"/>
-          </a:p>
-        </p:txBody>
-      </p:sp>
-      <p:sp>
-        <p:nvSpPr>
-          <p:cNvPr id="3" name="TextBox 2"/>
-          <p:cNvSpPr txBox="1"/>
-          <p:nvPr/>
-        </p:nvSpPr>
-        <p:spPr>
-          <a:xfrm>
-            <a:off x="365760" y="109728"/>
-            <a:ext cx="11430000" cy="457200"/>
-          </a:xfrm>
-          <a:prstGeom prst="rect">
-            <a:avLst/>
-          </a:prstGeom>
-          <a:noFill/>
-        </p:spPr>
-        <p:txBody>
-          <a:bodyPr wrap="square" anchor="t">
-            <a:spAutoFit/>
-          </a:bodyPr>
-          <a:lstStyle/>
-          <a:p>
-            <a:pPr algn="l"/>
-            <a:r>
-              <a:rPr sz="2600" b="1" i="0">
-                <a:solidFill>
-                  <a:srgbClr val="FFFFFF"/>
-                </a:solidFill>
-              </a:rPr>
-              <a:t>Principal Contributions</a:t>
-            </a:r>
-          </a:p>
-        </p:txBody>
-      </p:sp>
-      <p:sp>
-        <p:nvSpPr>
-          <p:cNvPr id="4" name="TextBox 3"/>
-          <p:cNvSpPr txBox="1"/>
-          <p:nvPr/>
-        </p:nvSpPr>
-        <p:spPr>
-          <a:xfrm>
-            <a:off x="365760" y="457200"/>
-            <a:ext cx="11430000" cy="320040"/>
-          </a:xfrm>
-          <a:prstGeom prst="rect">
-            <a:avLst/>
-          </a:prstGeom>
-          <a:noFill/>
-        </p:spPr>
-        <p:txBody>
-          <a:bodyPr wrap="square" anchor="t">
-            <a:spAutoFit/>
-          </a:bodyPr>
-          <a:lstStyle/>
-          <a:p>
-            <a:pPr algn="l"/>
-            <a:r>
-              <a:rPr sz="1200" b="0" i="0">
-                <a:solidFill>
-                  <a:srgbClr val="E8F4FD"/>
-                </a:solidFill>
-              </a:rPr>
-              <a:t>What this dissertation delivered — end to end</a:t>
-            </a:r>
-          </a:p>
-        </p:txBody>
-      </p:sp>
-      <p:sp>
-        <p:nvSpPr>
-          <p:cNvPr id="5" name="Rectangle 4"/>
-          <p:cNvSpPr/>
-          <p:nvPr/>
-        </p:nvSpPr>
-        <p:spPr>
-          <a:xfrm>
-            <a:off x="0" y="777240"/>
-            <a:ext cx="12191695" cy="45720"/>
-          </a:xfrm>
-          <a:prstGeom prst="rect">
-            <a:avLst/>
-          </a:prstGeom>
-          <a:solidFill>
-            <a:srgbClr val="FFC220"/>
-          </a:solidFill>
-          <a:ln>
-            <a:noFill/>
-          </a:ln>
-          <a:effectLst/>
-        </p:spPr>
-        <p:style>
-          <a:lnRef idx="1">
-            <a:schemeClr val="accent1"/>
-          </a:lnRef>
-          <a:fillRef idx="3">
-            <a:schemeClr val="accent1"/>
-          </a:fillRef>
-          <a:effectRef idx="2">
-            <a:schemeClr val="accent1"/>
-          </a:effectRef>
-          <a:fontRef idx="minor">
-            <a:schemeClr val="lt1"/>
-          </a:fontRef>
-        </p:style>
-        <p:txBody>
-          <a:bodyPr rtlCol="0" anchor="ctr"/>
-          <a:lstStyle/>
-          <a:p>
-            <a:pPr algn="ctr"/>
-          </a:p>
-        </p:txBody>
-      </p:sp>
-      <p:sp>
-        <p:nvSpPr>
-          <p:cNvPr id="6" name="Rectangle 5"/>
-          <p:cNvSpPr/>
-          <p:nvPr/>
-        </p:nvSpPr>
-        <p:spPr>
-          <a:xfrm>
-            <a:off x="457200" y="960120"/>
-            <a:ext cx="11247120" cy="960120"/>
-          </a:xfrm>
-          <a:prstGeom prst="rect">
-            <a:avLst/>
-          </a:prstGeom>
-          <a:solidFill>
-            <a:srgbClr val="F5F5F5"/>
-          </a:solidFill>
-          <a:ln>
-            <a:solidFill>
-              <a:srgbClr val="0071DC"/>
-            </a:solidFill>
-          </a:ln>
-          <a:effectLst/>
-        </p:spPr>
-        <p:style>
-          <a:lnRef idx="1">
-            <a:schemeClr val="accent1"/>
-          </a:lnRef>
-          <a:fillRef idx="3">
-            <a:schemeClr val="accent1"/>
-          </a:fillRef>
-          <a:effectRef idx="2">
-            <a:schemeClr val="accent1"/>
-          </a:effectRef>
-          <a:fontRef idx="minor">
-            <a:schemeClr val="lt1"/>
-          </a:fontRef>
-        </p:style>
-        <p:txBody>
-          <a:bodyPr rtlCol="0" anchor="ctr"/>
-          <a:lstStyle/>
-          <a:p>
-            <a:pPr algn="ctr"/>
-          </a:p>
-        </p:txBody>
-      </p:sp>
-      <p:sp>
-        <p:nvSpPr>
-          <p:cNvPr id="7" name="Rectangle 6"/>
-          <p:cNvSpPr/>
-          <p:nvPr/>
-        </p:nvSpPr>
-        <p:spPr>
-          <a:xfrm>
-            <a:off x="457200" y="960120"/>
-            <a:ext cx="822960" cy="960120"/>
-          </a:xfrm>
-          <a:prstGeom prst="rect">
-            <a:avLst/>
-          </a:prstGeom>
-          <a:solidFill>
-            <a:srgbClr val="0071DC"/>
-          </a:solidFill>
-          <a:ln>
-            <a:noFill/>
-          </a:ln>
-          <a:effectLst/>
-        </p:spPr>
-        <p:style>
-          <a:lnRef idx="1">
-            <a:schemeClr val="accent1"/>
-          </a:lnRef>
-          <a:fillRef idx="3">
-            <a:schemeClr val="accent1"/>
-          </a:fillRef>
-          <a:effectRef idx="2">
-            <a:schemeClr val="accent1"/>
-          </a:effectRef>
-          <a:fontRef idx="minor">
-            <a:schemeClr val="lt1"/>
-          </a:fontRef>
-        </p:style>
-        <p:txBody>
-          <a:bodyPr rtlCol="0" anchor="ctr"/>
-          <a:lstStyle/>
-          <a:p>
-            <a:pPr algn="ctr"/>
-          </a:p>
-        </p:txBody>
-      </p:sp>
-      <p:sp>
-        <p:nvSpPr>
-          <p:cNvPr id="8" name="TextBox 7"/>
-          <p:cNvSpPr txBox="1"/>
-          <p:nvPr/>
-        </p:nvSpPr>
-        <p:spPr>
-          <a:xfrm>
-            <a:off x="457200" y="960120"/>
-            <a:ext cx="822960" cy="960120"/>
-          </a:xfrm>
-          <a:prstGeom prst="rect">
-            <a:avLst/>
-          </a:prstGeom>
-          <a:noFill/>
-        </p:spPr>
-        <p:txBody>
-          <a:bodyPr wrap="square" anchor="ctr">
-            <a:spAutoFit/>
-          </a:bodyPr>
-          <a:lstStyle/>
-          <a:p>
-            <a:pPr algn="ctr"/>
-            <a:r>
-              <a:rPr sz="2000" b="1" i="0">
-                <a:solidFill>
-                  <a:srgbClr val="FFFFFF"/>
-                </a:solidFill>
-              </a:rPr>
-              <a:t>C1</a:t>
-            </a:r>
-          </a:p>
-        </p:txBody>
-      </p:sp>
-      <p:sp>
-        <p:nvSpPr>
-          <p:cNvPr id="9" name="TextBox 8"/>
-          <p:cNvSpPr txBox="1"/>
-          <p:nvPr/>
-        </p:nvSpPr>
-        <p:spPr>
-          <a:xfrm>
-            <a:off x="1417320" y="1005840"/>
-            <a:ext cx="10058400" cy="320040"/>
-          </a:xfrm>
-          <a:prstGeom prst="rect">
-            <a:avLst/>
-          </a:prstGeom>
-          <a:noFill/>
-        </p:spPr>
-        <p:txBody>
-          <a:bodyPr wrap="square" anchor="t">
-            <a:spAutoFit/>
-          </a:bodyPr>
-          <a:lstStyle/>
-          <a:p>
-            <a:pPr algn="l"/>
-            <a:r>
-              <a:rPr sz="1300" b="1" i="0">
-                <a:solidFill>
-                  <a:srgbClr val="041E42"/>
-                </a:solidFill>
-              </a:rPr>
-              <a:t>Offline-first RSI pipeline</a:t>
-            </a:r>
-          </a:p>
-        </p:txBody>
-      </p:sp>
-      <p:sp>
-        <p:nvSpPr>
-          <p:cNvPr id="10" name="TextBox 9"/>
-          <p:cNvSpPr txBox="1"/>
-          <p:nvPr/>
-        </p:nvSpPr>
-        <p:spPr>
-          <a:xfrm>
-            <a:off x="1417320" y="1325880"/>
-            <a:ext cx="10058400" cy="594360"/>
-          </a:xfrm>
-          <a:prstGeom prst="rect">
-            <a:avLst/>
-          </a:prstGeom>
-          <a:noFill/>
-        </p:spPr>
-        <p:txBody>
-          <a:bodyPr wrap="square" anchor="t">
-            <a:spAutoFit/>
-          </a:bodyPr>
-          <a:lstStyle/>
-          <a:p>
-            <a:pPr algn="l"/>
-            <a:r>
-              <a:rPr sz="1100" b="0" i="0">
-                <a:solidFill>
-                  <a:srgbClr val="333333"/>
-                </a:solidFill>
-              </a:rPr>
-              <a:t>Ingestion → trust → sentiment → aspects → vision → aggregation → alerts → dashboard.  Zero API cost, modular, deployable to Azure.</a:t>
-            </a:r>
-          </a:p>
-        </p:txBody>
-      </p:sp>
-      <p:sp>
-        <p:nvSpPr>
-          <p:cNvPr id="11" name="Rectangle 10"/>
-          <p:cNvSpPr/>
-          <p:nvPr/>
-        </p:nvSpPr>
-        <p:spPr>
-          <a:xfrm>
-            <a:off x="457200" y="2002535"/>
-            <a:ext cx="11247120" cy="960120"/>
-          </a:xfrm>
-          <a:prstGeom prst="rect">
-            <a:avLst/>
-          </a:prstGeom>
-          <a:solidFill>
-            <a:srgbClr val="F5F5F5"/>
-          </a:solidFill>
-          <a:ln>
-            <a:solidFill>
-              <a:srgbClr val="0071DC"/>
-            </a:solidFill>
-          </a:ln>
-          <a:effectLst/>
-        </p:spPr>
-        <p:style>
-          <a:lnRef idx="1">
-            <a:schemeClr val="accent1"/>
-          </a:lnRef>
-          <a:fillRef idx="3">
-            <a:schemeClr val="accent1"/>
-          </a:fillRef>
-          <a:effectRef idx="2">
-            <a:schemeClr val="accent1"/>
-          </a:effectRef>
-          <a:fontRef idx="minor">
-            <a:schemeClr val="lt1"/>
-          </a:fontRef>
-        </p:style>
-        <p:txBody>
-          <a:bodyPr rtlCol="0" anchor="ctr"/>
-          <a:lstStyle/>
-          <a:p>
-            <a:pPr algn="ctr"/>
-          </a:p>
-        </p:txBody>
-      </p:sp>
-      <p:sp>
-        <p:nvSpPr>
-          <p:cNvPr id="12" name="Rectangle 11"/>
-          <p:cNvSpPr/>
-          <p:nvPr/>
-        </p:nvSpPr>
-        <p:spPr>
-          <a:xfrm>
-            <a:off x="457200" y="2002535"/>
-            <a:ext cx="822960" cy="960120"/>
-          </a:xfrm>
-          <a:prstGeom prst="rect">
-            <a:avLst/>
-          </a:prstGeom>
-          <a:solidFill>
-            <a:srgbClr val="0071DC"/>
-          </a:solidFill>
-          <a:ln>
-            <a:noFill/>
-          </a:ln>
-          <a:effectLst/>
-        </p:spPr>
-        <p:style>
-          <a:lnRef idx="1">
-            <a:schemeClr val="accent1"/>
-          </a:lnRef>
-          <a:fillRef idx="3">
-            <a:schemeClr val="accent1"/>
-          </a:fillRef>
-          <a:effectRef idx="2">
-            <a:schemeClr val="accent1"/>
-          </a:effectRef>
-          <a:fontRef idx="minor">
-            <a:schemeClr val="lt1"/>
-          </a:fontRef>
-        </p:style>
-        <p:txBody>
-          <a:bodyPr rtlCol="0" anchor="ctr"/>
-          <a:lstStyle/>
-          <a:p>
-            <a:pPr algn="ctr"/>
-          </a:p>
-        </p:txBody>
-      </p:sp>
-      <p:sp>
-        <p:nvSpPr>
-          <p:cNvPr id="13" name="TextBox 12"/>
-          <p:cNvSpPr txBox="1"/>
-          <p:nvPr/>
-        </p:nvSpPr>
-        <p:spPr>
-          <a:xfrm>
-            <a:off x="457200" y="2002535"/>
-            <a:ext cx="822960" cy="960120"/>
-          </a:xfrm>
-          <a:prstGeom prst="rect">
-            <a:avLst/>
-          </a:prstGeom>
-          <a:noFill/>
-        </p:spPr>
-        <p:txBody>
-          <a:bodyPr wrap="square" anchor="ctr">
-            <a:spAutoFit/>
-          </a:bodyPr>
-          <a:lstStyle/>
-          <a:p>
-            <a:pPr algn="ctr"/>
-            <a:r>
-              <a:rPr sz="2000" b="1" i="0">
-                <a:solidFill>
-                  <a:srgbClr val="FFFFFF"/>
-                </a:solidFill>
-              </a:rPr>
-              <a:t>C2</a:t>
-            </a:r>
-          </a:p>
-        </p:txBody>
-      </p:sp>
-      <p:sp>
-        <p:nvSpPr>
-          <p:cNvPr id="14" name="TextBox 13"/>
-          <p:cNvSpPr txBox="1"/>
-          <p:nvPr/>
-        </p:nvSpPr>
-        <p:spPr>
-          <a:xfrm>
-            <a:off x="1417320" y="2048255"/>
-            <a:ext cx="10058400" cy="320040"/>
-          </a:xfrm>
-          <a:prstGeom prst="rect">
-            <a:avLst/>
-          </a:prstGeom>
-          <a:noFill/>
-        </p:spPr>
-        <p:txBody>
-          <a:bodyPr wrap="square" anchor="t">
-            <a:spAutoFit/>
-          </a:bodyPr>
-          <a:lstStyle/>
-          <a:p>
-            <a:pPr algn="l"/>
-            <a:r>
-              <a:rPr sz="1300" b="1" i="0">
-                <a:solidFill>
-                  <a:srgbClr val="041E42"/>
-                </a:solidFill>
-              </a:rPr>
-              <a:t>Fine-tuned ModernBERT (3-stage curriculum)</a:t>
-            </a:r>
-          </a:p>
-        </p:txBody>
-      </p:sp>
-      <p:sp>
-        <p:nvSpPr>
-          <p:cNvPr id="15" name="TextBox 14"/>
-          <p:cNvSpPr txBox="1"/>
-          <p:nvPr/>
-        </p:nvSpPr>
-        <p:spPr>
-          <a:xfrm>
-            <a:off x="1417320" y="2368295"/>
-            <a:ext cx="10058400" cy="594360"/>
-          </a:xfrm>
-          <a:prstGeom prst="rect">
-            <a:avLst/>
-          </a:prstGeom>
-          <a:noFill/>
-        </p:spPr>
-        <p:txBody>
-          <a:bodyPr wrap="square" anchor="t">
-            <a:spAutoFit/>
-          </a:bodyPr>
-          <a:lstStyle/>
-          <a:p>
-            <a:pPr algn="l"/>
-            <a:r>
-              <a:rPr sz="1100" b="0" i="0">
-                <a:solidFill>
-                  <a:srgbClr val="333333"/>
-                </a:solidFill>
-              </a:rPr>
-              <a:t>Macro-F1 0.6272 → 0.7642 overall; recovers all long posts (≥ 512 tok, n = 7): RoBERTa 5/7 vs ModernBERT 7/7 correct.  5-fold OOF cross-validation, offline training.</a:t>
-            </a:r>
-          </a:p>
-        </p:txBody>
-      </p:sp>
-      <p:sp>
-        <p:nvSpPr>
-          <p:cNvPr id="16" name="Rectangle 15"/>
-          <p:cNvSpPr/>
-          <p:nvPr/>
-        </p:nvSpPr>
-        <p:spPr>
-          <a:xfrm>
-            <a:off x="457200" y="3044950"/>
-            <a:ext cx="11247120" cy="960120"/>
-          </a:xfrm>
-          <a:prstGeom prst="rect">
-            <a:avLst/>
-          </a:prstGeom>
-          <a:solidFill>
-            <a:srgbClr val="F5F5F5"/>
-          </a:solidFill>
-          <a:ln>
-            <a:solidFill>
-              <a:srgbClr val="0071DC"/>
-            </a:solidFill>
-          </a:ln>
-          <a:effectLst/>
-        </p:spPr>
-        <p:style>
-          <a:lnRef idx="1">
-            <a:schemeClr val="accent1"/>
-          </a:lnRef>
-          <a:fillRef idx="3">
-            <a:schemeClr val="accent1"/>
-          </a:fillRef>
-          <a:effectRef idx="2">
-            <a:schemeClr val="accent1"/>
-          </a:effectRef>
-          <a:fontRef idx="minor">
-            <a:schemeClr val="lt1"/>
-          </a:fontRef>
-        </p:style>
-        <p:txBody>
-          <a:bodyPr rtlCol="0" anchor="ctr"/>
-          <a:lstStyle/>
-          <a:p>
-            <a:pPr algn="ctr"/>
-          </a:p>
-        </p:txBody>
-      </p:sp>
-      <p:sp>
-        <p:nvSpPr>
-          <p:cNvPr id="17" name="Rectangle 16"/>
-          <p:cNvSpPr/>
-          <p:nvPr/>
-        </p:nvSpPr>
-        <p:spPr>
-          <a:xfrm>
-            <a:off x="457200" y="3044950"/>
-            <a:ext cx="822960" cy="960120"/>
-          </a:xfrm>
-          <a:prstGeom prst="rect">
-            <a:avLst/>
-          </a:prstGeom>
-          <a:solidFill>
-            <a:srgbClr val="0071DC"/>
-          </a:solidFill>
-          <a:ln>
-            <a:noFill/>
-          </a:ln>
-          <a:effectLst/>
-        </p:spPr>
-        <p:style>
-          <a:lnRef idx="1">
-            <a:schemeClr val="accent1"/>
-          </a:lnRef>
-          <a:fillRef idx="3">
-            <a:schemeClr val="accent1"/>
-          </a:fillRef>
-          <a:effectRef idx="2">
-            <a:schemeClr val="accent1"/>
-          </a:effectRef>
-          <a:fontRef idx="minor">
-            <a:schemeClr val="lt1"/>
-          </a:fontRef>
-        </p:style>
-        <p:txBody>
-          <a:bodyPr rtlCol="0" anchor="ctr"/>
-          <a:lstStyle/>
-          <a:p>
-            <a:pPr algn="ctr"/>
-          </a:p>
-        </p:txBody>
-      </p:sp>
-      <p:sp>
-        <p:nvSpPr>
-          <p:cNvPr id="18" name="TextBox 17"/>
-          <p:cNvSpPr txBox="1"/>
-          <p:nvPr/>
-        </p:nvSpPr>
-        <p:spPr>
-          <a:xfrm>
-            <a:off x="457200" y="3044950"/>
-            <a:ext cx="822960" cy="960120"/>
-          </a:xfrm>
-          <a:prstGeom prst="rect">
-            <a:avLst/>
-          </a:prstGeom>
-          <a:noFill/>
-        </p:spPr>
-        <p:txBody>
-          <a:bodyPr wrap="square" anchor="ctr">
-            <a:spAutoFit/>
-          </a:bodyPr>
-          <a:lstStyle/>
-          <a:p>
-            <a:pPr algn="ctr"/>
-            <a:r>
-              <a:rPr sz="2000" b="1" i="0">
-                <a:solidFill>
-                  <a:srgbClr val="FFFFFF"/>
-                </a:solidFill>
-              </a:rPr>
-              <a:t>C3</a:t>
-            </a:r>
-          </a:p>
-        </p:txBody>
-      </p:sp>
-      <p:sp>
-        <p:nvSpPr>
-          <p:cNvPr id="19" name="TextBox 18"/>
-          <p:cNvSpPr txBox="1"/>
-          <p:nvPr/>
-        </p:nvSpPr>
-        <p:spPr>
-          <a:xfrm>
-            <a:off x="1417320" y="3090670"/>
-            <a:ext cx="10058400" cy="320040"/>
-          </a:xfrm>
-          <a:prstGeom prst="rect">
-            <a:avLst/>
-          </a:prstGeom>
-          <a:noFill/>
-        </p:spPr>
-        <p:txBody>
-          <a:bodyPr wrap="square" anchor="t">
-            <a:spAutoFit/>
-          </a:bodyPr>
-          <a:lstStyle/>
-          <a:p>
-            <a:pPr algn="l"/>
-            <a:r>
-              <a:rPr sz="1300" b="1" i="0">
-                <a:solidFill>
-                  <a:srgbClr val="041E42"/>
-                </a:solidFill>
-              </a:rPr>
-              <a:t>Multi-pass vision technique on Gemma 3 4B</a:t>
-            </a:r>
-          </a:p>
-        </p:txBody>
-      </p:sp>
-      <p:sp>
-        <p:nvSpPr>
-          <p:cNvPr id="20" name="TextBox 19"/>
-          <p:cNvSpPr txBox="1"/>
-          <p:nvPr/>
-        </p:nvSpPr>
-        <p:spPr>
-          <a:xfrm>
-            <a:off x="1417320" y="3410710"/>
-            <a:ext cx="10058400" cy="594360"/>
-          </a:xfrm>
-          <a:prstGeom prst="rect">
-            <a:avLst/>
-          </a:prstGeom>
-          <a:noFill/>
-        </p:spPr>
-        <p:txBody>
-          <a:bodyPr wrap="square" anchor="t">
-            <a:spAutoFit/>
-          </a:bodyPr>
-          <a:lstStyle/>
-          <a:p>
-            <a:pPr algn="l"/>
-            <a:r>
-              <a:rPr sz="1100" b="0" i="0">
-                <a:solidFill>
-                  <a:srgbClr val="333333"/>
-                </a:solidFill>
-              </a:rPr>
-              <a:t>Hallucination 50 % → 0 %,  extraction 25 % → 75 %.  Adapts techniques from 5 recent VLM papers without vendor-blocked models.</a:t>
-            </a:r>
-          </a:p>
-        </p:txBody>
-      </p:sp>
-      <p:sp>
-        <p:nvSpPr>
-          <p:cNvPr id="21" name="Rectangle 20"/>
-          <p:cNvSpPr/>
-          <p:nvPr/>
-        </p:nvSpPr>
-        <p:spPr>
-          <a:xfrm>
-            <a:off x="457200" y="4087365"/>
-            <a:ext cx="11247120" cy="960120"/>
-          </a:xfrm>
-          <a:prstGeom prst="rect">
-            <a:avLst/>
-          </a:prstGeom>
-          <a:solidFill>
-            <a:srgbClr val="F5F5F5"/>
-          </a:solidFill>
-          <a:ln>
-            <a:solidFill>
-              <a:srgbClr val="0071DC"/>
-            </a:solidFill>
-          </a:ln>
-          <a:effectLst/>
-        </p:spPr>
-        <p:style>
-          <a:lnRef idx="1">
-            <a:schemeClr val="accent1"/>
-          </a:lnRef>
-          <a:fillRef idx="3">
-            <a:schemeClr val="accent1"/>
-          </a:fillRef>
-          <a:effectRef idx="2">
-            <a:schemeClr val="accent1"/>
-          </a:effectRef>
-          <a:fontRef idx="minor">
-            <a:schemeClr val="lt1"/>
-          </a:fontRef>
-        </p:style>
-        <p:txBody>
-          <a:bodyPr rtlCol="0" anchor="ctr"/>
-          <a:lstStyle/>
-          <a:p>
-            <a:pPr algn="ctr"/>
-          </a:p>
-        </p:txBody>
-      </p:sp>
-      <p:sp>
-        <p:nvSpPr>
-          <p:cNvPr id="22" name="Rectangle 21"/>
-          <p:cNvSpPr/>
-          <p:nvPr/>
-        </p:nvSpPr>
-        <p:spPr>
-          <a:xfrm>
-            <a:off x="457200" y="4087365"/>
-            <a:ext cx="822960" cy="960120"/>
-          </a:xfrm>
-          <a:prstGeom prst="rect">
-            <a:avLst/>
-          </a:prstGeom>
-          <a:solidFill>
-            <a:srgbClr val="0071DC"/>
-          </a:solidFill>
-          <a:ln>
-            <a:noFill/>
-          </a:ln>
-          <a:effectLst/>
-        </p:spPr>
-        <p:style>
-          <a:lnRef idx="1">
-            <a:schemeClr val="accent1"/>
-          </a:lnRef>
-          <a:fillRef idx="3">
-            <a:schemeClr val="accent1"/>
-          </a:fillRef>
-          <a:effectRef idx="2">
-            <a:schemeClr val="accent1"/>
-          </a:effectRef>
-          <a:fontRef idx="minor">
-            <a:schemeClr val="lt1"/>
-          </a:fontRef>
-        </p:style>
-        <p:txBody>
-          <a:bodyPr rtlCol="0" anchor="ctr"/>
-          <a:lstStyle/>
-          <a:p>
-            <a:pPr algn="ctr"/>
-          </a:p>
-        </p:txBody>
-      </p:sp>
-      <p:sp>
-        <p:nvSpPr>
-          <p:cNvPr id="23" name="TextBox 22"/>
-          <p:cNvSpPr txBox="1"/>
-          <p:nvPr/>
-        </p:nvSpPr>
-        <p:spPr>
-          <a:xfrm>
-            <a:off x="457200" y="4087365"/>
-            <a:ext cx="822960" cy="960120"/>
-          </a:xfrm>
-          <a:prstGeom prst="rect">
-            <a:avLst/>
-          </a:prstGeom>
-          <a:noFill/>
-        </p:spPr>
-        <p:txBody>
-          <a:bodyPr wrap="square" anchor="ctr">
-            <a:spAutoFit/>
-          </a:bodyPr>
-          <a:lstStyle/>
-          <a:p>
-            <a:pPr algn="ctr"/>
-            <a:r>
-              <a:rPr sz="2000" b="1" i="0">
-                <a:solidFill>
-                  <a:srgbClr val="FFFFFF"/>
-                </a:solidFill>
-              </a:rPr>
-              <a:t>C4</a:t>
-            </a:r>
-          </a:p>
-        </p:txBody>
-      </p:sp>
-      <p:sp>
-        <p:nvSpPr>
-          <p:cNvPr id="24" name="TextBox 23"/>
-          <p:cNvSpPr txBox="1"/>
-          <p:nvPr/>
-        </p:nvSpPr>
-        <p:spPr>
-          <a:xfrm>
-            <a:off x="1417320" y="4133085"/>
-            <a:ext cx="10058400" cy="320040"/>
-          </a:xfrm>
-          <a:prstGeom prst="rect">
-            <a:avLst/>
-          </a:prstGeom>
-          <a:noFill/>
-        </p:spPr>
-        <p:txBody>
-          <a:bodyPr wrap="square" anchor="t">
-            <a:spAutoFit/>
-          </a:bodyPr>
-          <a:lstStyle/>
-          <a:p>
-            <a:pPr algn="l"/>
-            <a:r>
-              <a:rPr sz="1300" b="1" i="0">
-                <a:solidFill>
-                  <a:srgbClr val="041E42"/>
-                </a:solidFill>
-              </a:rPr>
-              <a:t>Interpretable trust score + admission gate</a:t>
-            </a:r>
-          </a:p>
-        </p:txBody>
-      </p:sp>
-      <p:sp>
-        <p:nvSpPr>
-          <p:cNvPr id="25" name="TextBox 24"/>
-          <p:cNvSpPr txBox="1"/>
-          <p:nvPr/>
-        </p:nvSpPr>
-        <p:spPr>
-          <a:xfrm>
-            <a:off x="1417320" y="4453125"/>
-            <a:ext cx="10058400" cy="594360"/>
-          </a:xfrm>
-          <a:prstGeom prst="rect">
-            <a:avLst/>
-          </a:prstGeom>
-          <a:noFill/>
-        </p:spPr>
-        <p:txBody>
-          <a:bodyPr wrap="square" anchor="t">
-            <a:spAutoFit/>
-          </a:bodyPr>
-          <a:lstStyle/>
-          <a:p>
-            <a:pPr algn="l"/>
-            <a:r>
-              <a:rPr sz="1100" b="0" i="0">
-                <a:solidFill>
-                  <a:srgbClr val="333333"/>
-                </a:solidFill>
-              </a:rPr>
-              <a:t>trust × confidence gate flags rather than drops low-credibility posts.  Every constant traceable to English rationale in config.</a:t>
-            </a:r>
-          </a:p>
-        </p:txBody>
-      </p:sp>
-      <p:sp>
-        <p:nvSpPr>
-          <p:cNvPr id="26" name="Rectangle 25"/>
-          <p:cNvSpPr/>
-          <p:nvPr/>
-        </p:nvSpPr>
-        <p:spPr>
-          <a:xfrm>
-            <a:off x="457200" y="5129780"/>
-            <a:ext cx="11247120" cy="960120"/>
-          </a:xfrm>
-          <a:prstGeom prst="rect">
-            <a:avLst/>
-          </a:prstGeom>
-          <a:solidFill>
-            <a:srgbClr val="F5F5F5"/>
-          </a:solidFill>
-          <a:ln>
-            <a:solidFill>
-              <a:srgbClr val="0071DC"/>
-            </a:solidFill>
-          </a:ln>
-          <a:effectLst/>
-        </p:spPr>
-        <p:style>
-          <a:lnRef idx="1">
-            <a:schemeClr val="accent1"/>
-          </a:lnRef>
-          <a:fillRef idx="3">
-            <a:schemeClr val="accent1"/>
-          </a:fillRef>
-          <a:effectRef idx="2">
-            <a:schemeClr val="accent1"/>
-          </a:effectRef>
-          <a:fontRef idx="minor">
-            <a:schemeClr val="lt1"/>
-          </a:fontRef>
-        </p:style>
-        <p:txBody>
-          <a:bodyPr rtlCol="0" anchor="ctr"/>
-          <a:lstStyle/>
-          <a:p>
-            <a:pPr algn="ctr"/>
-          </a:p>
-        </p:txBody>
-      </p:sp>
-      <p:sp>
-        <p:nvSpPr>
-          <p:cNvPr id="27" name="Rectangle 26"/>
-          <p:cNvSpPr/>
-          <p:nvPr/>
-        </p:nvSpPr>
-        <p:spPr>
-          <a:xfrm>
-            <a:off x="457200" y="5129780"/>
-            <a:ext cx="822960" cy="960120"/>
-          </a:xfrm>
-          <a:prstGeom prst="rect">
-            <a:avLst/>
-          </a:prstGeom>
-          <a:solidFill>
-            <a:srgbClr val="0071DC"/>
-          </a:solidFill>
-          <a:ln>
-            <a:noFill/>
-          </a:ln>
-          <a:effectLst/>
-        </p:spPr>
-        <p:style>
-          <a:lnRef idx="1">
-            <a:schemeClr val="accent1"/>
-          </a:lnRef>
-          <a:fillRef idx="3">
-            <a:schemeClr val="accent1"/>
-          </a:fillRef>
-          <a:effectRef idx="2">
-            <a:schemeClr val="accent1"/>
-          </a:effectRef>
-          <a:fontRef idx="minor">
-            <a:schemeClr val="lt1"/>
-          </a:fontRef>
-        </p:style>
-        <p:txBody>
-          <a:bodyPr rtlCol="0" anchor="ctr"/>
-          <a:lstStyle/>
-          <a:p>
-            <a:pPr algn="ctr"/>
-          </a:p>
-        </p:txBody>
-      </p:sp>
-      <p:sp>
-        <p:nvSpPr>
-          <p:cNvPr id="28" name="TextBox 27"/>
-          <p:cNvSpPr txBox="1"/>
-          <p:nvPr/>
-        </p:nvSpPr>
-        <p:spPr>
-          <a:xfrm>
-            <a:off x="457200" y="5129780"/>
-            <a:ext cx="822960" cy="960120"/>
-          </a:xfrm>
-          <a:prstGeom prst="rect">
-            <a:avLst/>
-          </a:prstGeom>
-          <a:noFill/>
-        </p:spPr>
-        <p:txBody>
-          <a:bodyPr wrap="square" anchor="ctr">
-            <a:spAutoFit/>
-          </a:bodyPr>
-          <a:lstStyle/>
-          <a:p>
-            <a:pPr algn="ctr"/>
-            <a:r>
-              <a:rPr sz="2000" b="1" i="0">
-                <a:solidFill>
-                  <a:srgbClr val="FFFFFF"/>
-                </a:solidFill>
-              </a:rPr>
-              <a:t>C5</a:t>
-            </a:r>
-          </a:p>
-        </p:txBody>
-      </p:sp>
-      <p:sp>
-        <p:nvSpPr>
-          <p:cNvPr id="29" name="TextBox 28"/>
-          <p:cNvSpPr txBox="1"/>
-          <p:nvPr/>
-        </p:nvSpPr>
-        <p:spPr>
-          <a:xfrm>
-            <a:off x="1417320" y="5175500"/>
-            <a:ext cx="10058400" cy="320040"/>
-          </a:xfrm>
-          <a:prstGeom prst="rect">
-            <a:avLst/>
-          </a:prstGeom>
-          <a:noFill/>
-        </p:spPr>
-        <p:txBody>
-          <a:bodyPr wrap="square" anchor="t">
-            <a:spAutoFit/>
-          </a:bodyPr>
-          <a:lstStyle/>
-          <a:p>
-            <a:pPr algn="l"/>
-            <a:r>
-              <a:rPr sz="1300" b="1" i="0">
-                <a:solidFill>
-                  <a:srgbClr val="041E42"/>
-                </a:solidFill>
-              </a:rPr>
-              <a:t>HITL learning-loop dashboard</a:t>
-            </a:r>
-          </a:p>
-        </p:txBody>
-      </p:sp>
-      <p:sp>
-        <p:nvSpPr>
-          <p:cNvPr id="30" name="TextBox 29"/>
-          <p:cNvSpPr txBox="1"/>
-          <p:nvPr/>
-        </p:nvSpPr>
-        <p:spPr>
-          <a:xfrm>
-            <a:off x="1417320" y="5495540"/>
-            <a:ext cx="10058400" cy="594360"/>
-          </a:xfrm>
-          <a:prstGeom prst="rect">
-            <a:avLst/>
-          </a:prstGeom>
-          <a:noFill/>
-        </p:spPr>
-        <p:txBody>
-          <a:bodyPr wrap="square" anchor="t">
-            <a:spAutoFit/>
-          </a:bodyPr>
-          <a:lstStyle/>
-          <a:p>
-            <a:pPr algn="l"/>
-            <a:r>
-              <a:rPr sz="1100" b="0" i="0">
-                <a:solidFill>
-                  <a:srgbClr val="333333"/>
-                </a:solidFill>
-              </a:rPr>
-              <a:t>Review &amp; Validate, Lifecycle Kanban, Insights, Notification centre.  Corrections &amp; posted replies feed few-shot reply generation and future retraining.</a:t>
-            </a:r>
-          </a:p>
-        </p:txBody>
-      </p:sp>
-      <p:sp>
-        <p:nvSpPr>
-          <p:cNvPr id="31" name="TextBox 30"/>
-          <p:cNvSpPr txBox="1"/>
-          <p:nvPr/>
-        </p:nvSpPr>
-        <p:spPr>
-          <a:xfrm>
-            <a:off x="365760" y="6537960"/>
-            <a:ext cx="8229600" cy="274320"/>
-          </a:xfrm>
-          <a:prstGeom prst="rect">
-            <a:avLst/>
-          </a:prstGeom>
-          <a:noFill/>
-        </p:spPr>
-        <p:txBody>
-          <a:bodyPr wrap="square" anchor="t">
-            <a:spAutoFit/>
-          </a:bodyPr>
-          <a:lstStyle/>
-          <a:p>
-            <a:pPr algn="l"/>
-            <a:r>
-              <a:rPr sz="900" b="0" i="0">
-                <a:solidFill>
-                  <a:srgbClr val="666666"/>
-                </a:solidFill>
-              </a:rPr>
-              <a:t>Retail Sentiment Intelligence  ·  BITS ZG628T Dissertation  ·  Vishal Singh  ·  Post Mid-Semester Presentation</a:t>
-            </a:r>
-          </a:p>
-        </p:txBody>
-      </p:sp>
-      <p:sp>
-        <p:nvSpPr>
-          <p:cNvPr id="32" name="TextBox 31"/>
-          <p:cNvSpPr txBox="1"/>
-          <p:nvPr/>
-        </p:nvSpPr>
-        <p:spPr>
-          <a:xfrm>
-            <a:off x="10972800" y="6537960"/>
-            <a:ext cx="1097280" cy="274320"/>
-          </a:xfrm>
-          <a:prstGeom prst="rect">
-            <a:avLst/>
-          </a:prstGeom>
-          <a:noFill/>
-        </p:spPr>
-        <p:txBody>
-          <a:bodyPr wrap="square" anchor="t">
-            <a:spAutoFit/>
-          </a:bodyPr>
-          <a:lstStyle/>
-          <a:p>
-            <a:pPr algn="r"/>
-            <a:r>
-              <a:rPr sz="900" b="0" i="0">
-                <a:solidFill>
-                  <a:srgbClr val="666666"/>
-                </a:solidFill>
-              </a:rPr>
-              <a:t>17 / 23</a:t>
+              <a:t>17 / 24</a:t>
             </a:r>
           </a:p>
         </p:txBody>
@@ -14285,7 +13758,7 @@
                   <a:srgbClr val="FFFFFF"/>
                 </a:solidFill>
               </a:rPr>
-              <a:t>Live Demo  —  Dashboard Walkthrough</a:t>
+              <a:t>Principal Contributions</a:t>
             </a:r>
           </a:p>
         </p:txBody>
@@ -14319,7 +13792,7 @@
                   <a:srgbClr val="E8F4FD"/>
                 </a:solidFill>
               </a:rPr>
-              <a:t>One post → alert → review → reply → lifecycle → resolved</a:t>
+              <a:t>What this dissertation delivered — end to end</a:t>
             </a:r>
           </a:p>
         </p:txBody>
@@ -14368,357 +13841,969 @@
           </a:p>
         </p:txBody>
       </p:sp>
-      <p:pic>
-        <p:nvPicPr>
-          <p:cNvPr id="6" name="Picture 5" descr="brand_health.png"/>
-          <p:cNvPicPr>
-            <a:picLocks noChangeAspect="1"/>
-          </p:cNvPicPr>
-          <p:nvPr/>
-        </p:nvPicPr>
-        <p:blipFill>
-          <a:blip r:embed="rId2"/>
-          <a:stretch>
-            <a:fillRect/>
-          </a:stretch>
-        </p:blipFill>
-        <p:spPr>
-          <a:xfrm>
-            <a:off x="320040" y="960120"/>
-            <a:ext cx="3794760" cy="2331720"/>
-          </a:xfrm>
-          <a:prstGeom prst="rect">
-            <a:avLst/>
-          </a:prstGeom>
-        </p:spPr>
-      </p:pic>
-      <p:sp>
-        <p:nvSpPr>
-          <p:cNvPr id="7" name="TextBox 6"/>
-          <p:cNvSpPr txBox="1"/>
-          <p:nvPr/>
-        </p:nvSpPr>
-        <p:spPr>
-          <a:xfrm>
-            <a:off x="320040" y="3310128"/>
-            <a:ext cx="3794760" cy="228600"/>
-          </a:xfrm>
-          <a:prstGeom prst="rect">
-            <a:avLst/>
-          </a:prstGeom>
-          <a:noFill/>
-        </p:spPr>
-        <p:txBody>
-          <a:bodyPr wrap="square" anchor="t">
-            <a:spAutoFit/>
-          </a:bodyPr>
+      <p:sp>
+        <p:nvSpPr>
+          <p:cNvPr id="6" name="Rectangle 5"/>
+          <p:cNvSpPr/>
+          <p:nvPr/>
+        </p:nvSpPr>
+        <p:spPr>
+          <a:xfrm>
+            <a:off x="457200" y="960120"/>
+            <a:ext cx="11247120" cy="960120"/>
+          </a:xfrm>
+          <a:prstGeom prst="rect">
+            <a:avLst/>
+          </a:prstGeom>
+          <a:solidFill>
+            <a:srgbClr val="F5F5F5"/>
+          </a:solidFill>
+          <a:ln>
+            <a:solidFill>
+              <a:srgbClr val="0071DC"/>
+            </a:solidFill>
+          </a:ln>
+          <a:effectLst/>
+        </p:spPr>
+        <p:style>
+          <a:lnRef idx="1">
+            <a:schemeClr val="accent1"/>
+          </a:lnRef>
+          <a:fillRef idx="3">
+            <a:schemeClr val="accent1"/>
+          </a:fillRef>
+          <a:effectRef idx="2">
+            <a:schemeClr val="accent1"/>
+          </a:effectRef>
+          <a:fontRef idx="minor">
+            <a:schemeClr val="lt1"/>
+          </a:fontRef>
+        </p:style>
+        <p:txBody>
+          <a:bodyPr rtlCol="0" anchor="ctr"/>
           <a:lstStyle/>
           <a:p>
             <a:pPr algn="ctr"/>
-            <a:r>
-              <a:rPr sz="1100" b="1" i="0">
+          </a:p>
+        </p:txBody>
+      </p:sp>
+      <p:sp>
+        <p:nvSpPr>
+          <p:cNvPr id="7" name="Rectangle 6"/>
+          <p:cNvSpPr/>
+          <p:nvPr/>
+        </p:nvSpPr>
+        <p:spPr>
+          <a:xfrm>
+            <a:off x="457200" y="960120"/>
+            <a:ext cx="822960" cy="960120"/>
+          </a:xfrm>
+          <a:prstGeom prst="rect">
+            <a:avLst/>
+          </a:prstGeom>
+          <a:solidFill>
+            <a:srgbClr val="0071DC"/>
+          </a:solidFill>
+          <a:ln>
+            <a:noFill/>
+          </a:ln>
+          <a:effectLst/>
+        </p:spPr>
+        <p:style>
+          <a:lnRef idx="1">
+            <a:schemeClr val="accent1"/>
+          </a:lnRef>
+          <a:fillRef idx="3">
+            <a:schemeClr val="accent1"/>
+          </a:fillRef>
+          <a:effectRef idx="2">
+            <a:schemeClr val="accent1"/>
+          </a:effectRef>
+          <a:fontRef idx="minor">
+            <a:schemeClr val="lt1"/>
+          </a:fontRef>
+        </p:style>
+        <p:txBody>
+          <a:bodyPr rtlCol="0" anchor="ctr"/>
+          <a:lstStyle/>
+          <a:p>
+            <a:pPr algn="ctr"/>
+          </a:p>
+        </p:txBody>
+      </p:sp>
+      <p:sp>
+        <p:nvSpPr>
+          <p:cNvPr id="8" name="TextBox 7"/>
+          <p:cNvSpPr txBox="1"/>
+          <p:nvPr/>
+        </p:nvSpPr>
+        <p:spPr>
+          <a:xfrm>
+            <a:off x="457200" y="960120"/>
+            <a:ext cx="822960" cy="960120"/>
+          </a:xfrm>
+          <a:prstGeom prst="rect">
+            <a:avLst/>
+          </a:prstGeom>
+          <a:noFill/>
+        </p:spPr>
+        <p:txBody>
+          <a:bodyPr wrap="square" anchor="ctr">
+            <a:spAutoFit/>
+          </a:bodyPr>
+          <a:lstStyle/>
+          <a:p>
+            <a:pPr algn="ctr"/>
+            <a:r>
+              <a:rPr sz="2000" b="1" i="0">
+                <a:solidFill>
+                  <a:srgbClr val="FFFFFF"/>
+                </a:solidFill>
+              </a:rPr>
+              <a:t>C1</a:t>
+            </a:r>
+          </a:p>
+        </p:txBody>
+      </p:sp>
+      <p:sp>
+        <p:nvSpPr>
+          <p:cNvPr id="9" name="TextBox 8"/>
+          <p:cNvSpPr txBox="1"/>
+          <p:nvPr/>
+        </p:nvSpPr>
+        <p:spPr>
+          <a:xfrm>
+            <a:off x="1417320" y="1005840"/>
+            <a:ext cx="10058400" cy="320040"/>
+          </a:xfrm>
+          <a:prstGeom prst="rect">
+            <a:avLst/>
+          </a:prstGeom>
+          <a:noFill/>
+        </p:spPr>
+        <p:txBody>
+          <a:bodyPr wrap="square" anchor="t">
+            <a:spAutoFit/>
+          </a:bodyPr>
+          <a:lstStyle/>
+          <a:p>
+            <a:pPr algn="l"/>
+            <a:r>
+              <a:rPr sz="1300" b="1" i="0">
                 <a:solidFill>
                   <a:srgbClr val="041E42"/>
                 </a:solidFill>
               </a:rPr>
-              <a:t>Brand Health</a:t>
-            </a:r>
-          </a:p>
-        </p:txBody>
-      </p:sp>
-      <p:pic>
-        <p:nvPicPr>
-          <p:cNvPr id="8" name="Picture 7" descr="alert_feed.png"/>
-          <p:cNvPicPr>
-            <a:picLocks noChangeAspect="1"/>
-          </p:cNvPicPr>
-          <p:nvPr/>
-        </p:nvPicPr>
-        <p:blipFill>
-          <a:blip r:embed="rId3"/>
-          <a:stretch>
-            <a:fillRect/>
-          </a:stretch>
-        </p:blipFill>
-        <p:spPr>
-          <a:xfrm>
-            <a:off x="4206240" y="960120"/>
-            <a:ext cx="3794760" cy="2331720"/>
-          </a:xfrm>
-          <a:prstGeom prst="rect">
-            <a:avLst/>
-          </a:prstGeom>
-        </p:spPr>
-      </p:pic>
-      <p:sp>
-        <p:nvSpPr>
-          <p:cNvPr id="9" name="TextBox 8"/>
-          <p:cNvSpPr txBox="1"/>
-          <p:nvPr/>
-        </p:nvSpPr>
-        <p:spPr>
-          <a:xfrm>
-            <a:off x="4206240" y="3310128"/>
-            <a:ext cx="3794760" cy="228600"/>
-          </a:xfrm>
-          <a:prstGeom prst="rect">
-            <a:avLst/>
-          </a:prstGeom>
-          <a:noFill/>
-        </p:spPr>
-        <p:txBody>
-          <a:bodyPr wrap="square" anchor="t">
-            <a:spAutoFit/>
-          </a:bodyPr>
+              <a:t>Offline-first RSI pipeline</a:t>
+            </a:r>
+          </a:p>
+        </p:txBody>
+      </p:sp>
+      <p:sp>
+        <p:nvSpPr>
+          <p:cNvPr id="10" name="TextBox 9"/>
+          <p:cNvSpPr txBox="1"/>
+          <p:nvPr/>
+        </p:nvSpPr>
+        <p:spPr>
+          <a:xfrm>
+            <a:off x="1417320" y="1325880"/>
+            <a:ext cx="10058400" cy="594360"/>
+          </a:xfrm>
+          <a:prstGeom prst="rect">
+            <a:avLst/>
+          </a:prstGeom>
+          <a:noFill/>
+        </p:spPr>
+        <p:txBody>
+          <a:bodyPr wrap="square" anchor="t">
+            <a:spAutoFit/>
+          </a:bodyPr>
+          <a:lstStyle/>
+          <a:p>
+            <a:pPr algn="l"/>
+            <a:r>
+              <a:rPr sz="1100" b="0" i="0">
+                <a:solidFill>
+                  <a:srgbClr val="333333"/>
+                </a:solidFill>
+              </a:rPr>
+              <a:t>Ingestion → trust → sentiment → aspects → vision → aggregation → alerts → dashboard.  Zero API cost, modular, deployable to Azure.</a:t>
+            </a:r>
+          </a:p>
+        </p:txBody>
+      </p:sp>
+      <p:sp>
+        <p:nvSpPr>
+          <p:cNvPr id="11" name="Rectangle 10"/>
+          <p:cNvSpPr/>
+          <p:nvPr/>
+        </p:nvSpPr>
+        <p:spPr>
+          <a:xfrm>
+            <a:off x="457200" y="2002535"/>
+            <a:ext cx="11247120" cy="960120"/>
+          </a:xfrm>
+          <a:prstGeom prst="rect">
+            <a:avLst/>
+          </a:prstGeom>
+          <a:solidFill>
+            <a:srgbClr val="F5F5F5"/>
+          </a:solidFill>
+          <a:ln>
+            <a:solidFill>
+              <a:srgbClr val="0071DC"/>
+            </a:solidFill>
+          </a:ln>
+          <a:effectLst/>
+        </p:spPr>
+        <p:style>
+          <a:lnRef idx="1">
+            <a:schemeClr val="accent1"/>
+          </a:lnRef>
+          <a:fillRef idx="3">
+            <a:schemeClr val="accent1"/>
+          </a:fillRef>
+          <a:effectRef idx="2">
+            <a:schemeClr val="accent1"/>
+          </a:effectRef>
+          <a:fontRef idx="minor">
+            <a:schemeClr val="lt1"/>
+          </a:fontRef>
+        </p:style>
+        <p:txBody>
+          <a:bodyPr rtlCol="0" anchor="ctr"/>
           <a:lstStyle/>
           <a:p>
             <a:pPr algn="ctr"/>
-            <a:r>
-              <a:rPr sz="1100" b="1" i="0">
+          </a:p>
+        </p:txBody>
+      </p:sp>
+      <p:sp>
+        <p:nvSpPr>
+          <p:cNvPr id="12" name="Rectangle 11"/>
+          <p:cNvSpPr/>
+          <p:nvPr/>
+        </p:nvSpPr>
+        <p:spPr>
+          <a:xfrm>
+            <a:off x="457200" y="2002535"/>
+            <a:ext cx="822960" cy="960120"/>
+          </a:xfrm>
+          <a:prstGeom prst="rect">
+            <a:avLst/>
+          </a:prstGeom>
+          <a:solidFill>
+            <a:srgbClr val="0071DC"/>
+          </a:solidFill>
+          <a:ln>
+            <a:noFill/>
+          </a:ln>
+          <a:effectLst/>
+        </p:spPr>
+        <p:style>
+          <a:lnRef idx="1">
+            <a:schemeClr val="accent1"/>
+          </a:lnRef>
+          <a:fillRef idx="3">
+            <a:schemeClr val="accent1"/>
+          </a:fillRef>
+          <a:effectRef idx="2">
+            <a:schemeClr val="accent1"/>
+          </a:effectRef>
+          <a:fontRef idx="minor">
+            <a:schemeClr val="lt1"/>
+          </a:fontRef>
+        </p:style>
+        <p:txBody>
+          <a:bodyPr rtlCol="0" anchor="ctr"/>
+          <a:lstStyle/>
+          <a:p>
+            <a:pPr algn="ctr"/>
+          </a:p>
+        </p:txBody>
+      </p:sp>
+      <p:sp>
+        <p:nvSpPr>
+          <p:cNvPr id="13" name="TextBox 12"/>
+          <p:cNvSpPr txBox="1"/>
+          <p:nvPr/>
+        </p:nvSpPr>
+        <p:spPr>
+          <a:xfrm>
+            <a:off x="457200" y="2002535"/>
+            <a:ext cx="822960" cy="960120"/>
+          </a:xfrm>
+          <a:prstGeom prst="rect">
+            <a:avLst/>
+          </a:prstGeom>
+          <a:noFill/>
+        </p:spPr>
+        <p:txBody>
+          <a:bodyPr wrap="square" anchor="ctr">
+            <a:spAutoFit/>
+          </a:bodyPr>
+          <a:lstStyle/>
+          <a:p>
+            <a:pPr algn="ctr"/>
+            <a:r>
+              <a:rPr sz="2000" b="1" i="0">
+                <a:solidFill>
+                  <a:srgbClr val="FFFFFF"/>
+                </a:solidFill>
+              </a:rPr>
+              <a:t>C2</a:t>
+            </a:r>
+          </a:p>
+        </p:txBody>
+      </p:sp>
+      <p:sp>
+        <p:nvSpPr>
+          <p:cNvPr id="14" name="TextBox 13"/>
+          <p:cNvSpPr txBox="1"/>
+          <p:nvPr/>
+        </p:nvSpPr>
+        <p:spPr>
+          <a:xfrm>
+            <a:off x="1417320" y="2048255"/>
+            <a:ext cx="10058400" cy="320040"/>
+          </a:xfrm>
+          <a:prstGeom prst="rect">
+            <a:avLst/>
+          </a:prstGeom>
+          <a:noFill/>
+        </p:spPr>
+        <p:txBody>
+          <a:bodyPr wrap="square" anchor="t">
+            <a:spAutoFit/>
+          </a:bodyPr>
+          <a:lstStyle/>
+          <a:p>
+            <a:pPr algn="l"/>
+            <a:r>
+              <a:rPr sz="1300" b="1" i="0">
                 <a:solidFill>
                   <a:srgbClr val="041E42"/>
                 </a:solidFill>
               </a:rPr>
-              <a:t>Alert Feed</a:t>
-            </a:r>
-          </a:p>
-        </p:txBody>
-      </p:sp>
-      <p:pic>
-        <p:nvPicPr>
-          <p:cNvPr id="10" name="Picture 9" descr="post_explorer.png"/>
-          <p:cNvPicPr>
-            <a:picLocks noChangeAspect="1"/>
-          </p:cNvPicPr>
-          <p:nvPr/>
-        </p:nvPicPr>
-        <p:blipFill>
-          <a:blip r:embed="rId4"/>
-          <a:stretch>
-            <a:fillRect/>
-          </a:stretch>
-        </p:blipFill>
-        <p:spPr>
-          <a:xfrm>
-            <a:off x="8092440" y="960120"/>
-            <a:ext cx="3794760" cy="2331720"/>
-          </a:xfrm>
-          <a:prstGeom prst="rect">
-            <a:avLst/>
-          </a:prstGeom>
-        </p:spPr>
-      </p:pic>
-      <p:sp>
-        <p:nvSpPr>
-          <p:cNvPr id="11" name="TextBox 10"/>
-          <p:cNvSpPr txBox="1"/>
-          <p:nvPr/>
-        </p:nvSpPr>
-        <p:spPr>
-          <a:xfrm>
-            <a:off x="8092440" y="3310128"/>
-            <a:ext cx="3794760" cy="228600"/>
-          </a:xfrm>
-          <a:prstGeom prst="rect">
-            <a:avLst/>
-          </a:prstGeom>
-          <a:noFill/>
-        </p:spPr>
-        <p:txBody>
-          <a:bodyPr wrap="square" anchor="t">
-            <a:spAutoFit/>
-          </a:bodyPr>
+              <a:t>Fine-tuned ModernBERT (3-stage curriculum)</a:t>
+            </a:r>
+          </a:p>
+        </p:txBody>
+      </p:sp>
+      <p:sp>
+        <p:nvSpPr>
+          <p:cNvPr id="15" name="TextBox 14"/>
+          <p:cNvSpPr txBox="1"/>
+          <p:nvPr/>
+        </p:nvSpPr>
+        <p:spPr>
+          <a:xfrm>
+            <a:off x="1417320" y="2368295"/>
+            <a:ext cx="10058400" cy="594360"/>
+          </a:xfrm>
+          <a:prstGeom prst="rect">
+            <a:avLst/>
+          </a:prstGeom>
+          <a:noFill/>
+        </p:spPr>
+        <p:txBody>
+          <a:bodyPr wrap="square" anchor="t">
+            <a:spAutoFit/>
+          </a:bodyPr>
+          <a:lstStyle/>
+          <a:p>
+            <a:pPr algn="l"/>
+            <a:r>
+              <a:rPr sz="1100" b="0" i="0">
+                <a:solidFill>
+                  <a:srgbClr val="333333"/>
+                </a:solidFill>
+              </a:rPr>
+              <a:t>Macro-F1 0.6272 → 0.7642 overall; recovers all long posts (≥ 512 tok, n = 7): RoBERTa 5/7 vs ModernBERT 7/7 correct.  5-fold OOF cross-validation, offline training.</a:t>
+            </a:r>
+          </a:p>
+        </p:txBody>
+      </p:sp>
+      <p:sp>
+        <p:nvSpPr>
+          <p:cNvPr id="16" name="Rectangle 15"/>
+          <p:cNvSpPr/>
+          <p:nvPr/>
+        </p:nvSpPr>
+        <p:spPr>
+          <a:xfrm>
+            <a:off x="457200" y="3044950"/>
+            <a:ext cx="11247120" cy="960120"/>
+          </a:xfrm>
+          <a:prstGeom prst="rect">
+            <a:avLst/>
+          </a:prstGeom>
+          <a:solidFill>
+            <a:srgbClr val="F5F5F5"/>
+          </a:solidFill>
+          <a:ln>
+            <a:solidFill>
+              <a:srgbClr val="0071DC"/>
+            </a:solidFill>
+          </a:ln>
+          <a:effectLst/>
+        </p:spPr>
+        <p:style>
+          <a:lnRef idx="1">
+            <a:schemeClr val="accent1"/>
+          </a:lnRef>
+          <a:fillRef idx="3">
+            <a:schemeClr val="accent1"/>
+          </a:fillRef>
+          <a:effectRef idx="2">
+            <a:schemeClr val="accent1"/>
+          </a:effectRef>
+          <a:fontRef idx="minor">
+            <a:schemeClr val="lt1"/>
+          </a:fontRef>
+        </p:style>
+        <p:txBody>
+          <a:bodyPr rtlCol="0" anchor="ctr"/>
           <a:lstStyle/>
           <a:p>
             <a:pPr algn="ctr"/>
-            <a:r>
-              <a:rPr sz="1100" b="1" i="0">
+          </a:p>
+        </p:txBody>
+      </p:sp>
+      <p:sp>
+        <p:nvSpPr>
+          <p:cNvPr id="17" name="Rectangle 16"/>
+          <p:cNvSpPr/>
+          <p:nvPr/>
+        </p:nvSpPr>
+        <p:spPr>
+          <a:xfrm>
+            <a:off x="457200" y="3044950"/>
+            <a:ext cx="822960" cy="960120"/>
+          </a:xfrm>
+          <a:prstGeom prst="rect">
+            <a:avLst/>
+          </a:prstGeom>
+          <a:solidFill>
+            <a:srgbClr val="0071DC"/>
+          </a:solidFill>
+          <a:ln>
+            <a:noFill/>
+          </a:ln>
+          <a:effectLst/>
+        </p:spPr>
+        <p:style>
+          <a:lnRef idx="1">
+            <a:schemeClr val="accent1"/>
+          </a:lnRef>
+          <a:fillRef idx="3">
+            <a:schemeClr val="accent1"/>
+          </a:fillRef>
+          <a:effectRef idx="2">
+            <a:schemeClr val="accent1"/>
+          </a:effectRef>
+          <a:fontRef idx="minor">
+            <a:schemeClr val="lt1"/>
+          </a:fontRef>
+        </p:style>
+        <p:txBody>
+          <a:bodyPr rtlCol="0" anchor="ctr"/>
+          <a:lstStyle/>
+          <a:p>
+            <a:pPr algn="ctr"/>
+          </a:p>
+        </p:txBody>
+      </p:sp>
+      <p:sp>
+        <p:nvSpPr>
+          <p:cNvPr id="18" name="TextBox 17"/>
+          <p:cNvSpPr txBox="1"/>
+          <p:nvPr/>
+        </p:nvSpPr>
+        <p:spPr>
+          <a:xfrm>
+            <a:off x="457200" y="3044950"/>
+            <a:ext cx="822960" cy="960120"/>
+          </a:xfrm>
+          <a:prstGeom prst="rect">
+            <a:avLst/>
+          </a:prstGeom>
+          <a:noFill/>
+        </p:spPr>
+        <p:txBody>
+          <a:bodyPr wrap="square" anchor="ctr">
+            <a:spAutoFit/>
+          </a:bodyPr>
+          <a:lstStyle/>
+          <a:p>
+            <a:pPr algn="ctr"/>
+            <a:r>
+              <a:rPr sz="2000" b="1" i="0">
+                <a:solidFill>
+                  <a:srgbClr val="FFFFFF"/>
+                </a:solidFill>
+              </a:rPr>
+              <a:t>C3</a:t>
+            </a:r>
+          </a:p>
+        </p:txBody>
+      </p:sp>
+      <p:sp>
+        <p:nvSpPr>
+          <p:cNvPr id="19" name="TextBox 18"/>
+          <p:cNvSpPr txBox="1"/>
+          <p:nvPr/>
+        </p:nvSpPr>
+        <p:spPr>
+          <a:xfrm>
+            <a:off x="1417320" y="3090670"/>
+            <a:ext cx="10058400" cy="320040"/>
+          </a:xfrm>
+          <a:prstGeom prst="rect">
+            <a:avLst/>
+          </a:prstGeom>
+          <a:noFill/>
+        </p:spPr>
+        <p:txBody>
+          <a:bodyPr wrap="square" anchor="t">
+            <a:spAutoFit/>
+          </a:bodyPr>
+          <a:lstStyle/>
+          <a:p>
+            <a:pPr algn="l"/>
+            <a:r>
+              <a:rPr sz="1300" b="1" i="0">
                 <a:solidFill>
                   <a:srgbClr val="041E42"/>
                 </a:solidFill>
               </a:rPr>
-              <a:t>Post Explorer</a:t>
-            </a:r>
-          </a:p>
-        </p:txBody>
-      </p:sp>
-      <p:pic>
-        <p:nvPicPr>
-          <p:cNvPr id="12" name="Picture 11" descr="review_validate.png"/>
-          <p:cNvPicPr>
-            <a:picLocks noChangeAspect="1"/>
-          </p:cNvPicPr>
-          <p:nvPr/>
-        </p:nvPicPr>
-        <p:blipFill>
-          <a:blip r:embed="rId5"/>
-          <a:stretch>
-            <a:fillRect/>
-          </a:stretch>
-        </p:blipFill>
-        <p:spPr>
-          <a:xfrm>
-            <a:off x="320040" y="3566160"/>
-            <a:ext cx="3794760" cy="2331720"/>
-          </a:xfrm>
-          <a:prstGeom prst="rect">
-            <a:avLst/>
-          </a:prstGeom>
-        </p:spPr>
-      </p:pic>
-      <p:sp>
-        <p:nvSpPr>
-          <p:cNvPr id="13" name="TextBox 12"/>
-          <p:cNvSpPr txBox="1"/>
-          <p:nvPr/>
-        </p:nvSpPr>
-        <p:spPr>
-          <a:xfrm>
-            <a:off x="320040" y="5916168"/>
-            <a:ext cx="3794760" cy="228600"/>
-          </a:xfrm>
-          <a:prstGeom prst="rect">
-            <a:avLst/>
-          </a:prstGeom>
-          <a:noFill/>
-        </p:spPr>
-        <p:txBody>
-          <a:bodyPr wrap="square" anchor="t">
-            <a:spAutoFit/>
-          </a:bodyPr>
+              <a:t>Multi-pass vision technique on Gemma 3 4B</a:t>
+            </a:r>
+          </a:p>
+        </p:txBody>
+      </p:sp>
+      <p:sp>
+        <p:nvSpPr>
+          <p:cNvPr id="20" name="TextBox 19"/>
+          <p:cNvSpPr txBox="1"/>
+          <p:nvPr/>
+        </p:nvSpPr>
+        <p:spPr>
+          <a:xfrm>
+            <a:off x="1417320" y="3410710"/>
+            <a:ext cx="10058400" cy="594360"/>
+          </a:xfrm>
+          <a:prstGeom prst="rect">
+            <a:avLst/>
+          </a:prstGeom>
+          <a:noFill/>
+        </p:spPr>
+        <p:txBody>
+          <a:bodyPr wrap="square" anchor="t">
+            <a:spAutoFit/>
+          </a:bodyPr>
+          <a:lstStyle/>
+          <a:p>
+            <a:pPr algn="l"/>
+            <a:r>
+              <a:rPr sz="1100" b="0" i="0">
+                <a:solidFill>
+                  <a:srgbClr val="333333"/>
+                </a:solidFill>
+              </a:rPr>
+              <a:t>Hallucination 50 % → 0 %,  extraction 25 % → 75 %.  Adapts techniques from 5 recent VLM papers without vendor-blocked models.</a:t>
+            </a:r>
+          </a:p>
+        </p:txBody>
+      </p:sp>
+      <p:sp>
+        <p:nvSpPr>
+          <p:cNvPr id="21" name="Rectangle 20"/>
+          <p:cNvSpPr/>
+          <p:nvPr/>
+        </p:nvSpPr>
+        <p:spPr>
+          <a:xfrm>
+            <a:off x="457200" y="4087365"/>
+            <a:ext cx="11247120" cy="960120"/>
+          </a:xfrm>
+          <a:prstGeom prst="rect">
+            <a:avLst/>
+          </a:prstGeom>
+          <a:solidFill>
+            <a:srgbClr val="F5F5F5"/>
+          </a:solidFill>
+          <a:ln>
+            <a:solidFill>
+              <a:srgbClr val="0071DC"/>
+            </a:solidFill>
+          </a:ln>
+          <a:effectLst/>
+        </p:spPr>
+        <p:style>
+          <a:lnRef idx="1">
+            <a:schemeClr val="accent1"/>
+          </a:lnRef>
+          <a:fillRef idx="3">
+            <a:schemeClr val="accent1"/>
+          </a:fillRef>
+          <a:effectRef idx="2">
+            <a:schemeClr val="accent1"/>
+          </a:effectRef>
+          <a:fontRef idx="minor">
+            <a:schemeClr val="lt1"/>
+          </a:fontRef>
+        </p:style>
+        <p:txBody>
+          <a:bodyPr rtlCol="0" anchor="ctr"/>
           <a:lstStyle/>
           <a:p>
             <a:pPr algn="ctr"/>
-            <a:r>
-              <a:rPr sz="1100" b="1" i="0">
+          </a:p>
+        </p:txBody>
+      </p:sp>
+      <p:sp>
+        <p:nvSpPr>
+          <p:cNvPr id="22" name="Rectangle 21"/>
+          <p:cNvSpPr/>
+          <p:nvPr/>
+        </p:nvSpPr>
+        <p:spPr>
+          <a:xfrm>
+            <a:off x="457200" y="4087365"/>
+            <a:ext cx="822960" cy="960120"/>
+          </a:xfrm>
+          <a:prstGeom prst="rect">
+            <a:avLst/>
+          </a:prstGeom>
+          <a:solidFill>
+            <a:srgbClr val="0071DC"/>
+          </a:solidFill>
+          <a:ln>
+            <a:noFill/>
+          </a:ln>
+          <a:effectLst/>
+        </p:spPr>
+        <p:style>
+          <a:lnRef idx="1">
+            <a:schemeClr val="accent1"/>
+          </a:lnRef>
+          <a:fillRef idx="3">
+            <a:schemeClr val="accent1"/>
+          </a:fillRef>
+          <a:effectRef idx="2">
+            <a:schemeClr val="accent1"/>
+          </a:effectRef>
+          <a:fontRef idx="minor">
+            <a:schemeClr val="lt1"/>
+          </a:fontRef>
+        </p:style>
+        <p:txBody>
+          <a:bodyPr rtlCol="0" anchor="ctr"/>
+          <a:lstStyle/>
+          <a:p>
+            <a:pPr algn="ctr"/>
+          </a:p>
+        </p:txBody>
+      </p:sp>
+      <p:sp>
+        <p:nvSpPr>
+          <p:cNvPr id="23" name="TextBox 22"/>
+          <p:cNvSpPr txBox="1"/>
+          <p:nvPr/>
+        </p:nvSpPr>
+        <p:spPr>
+          <a:xfrm>
+            <a:off x="457200" y="4087365"/>
+            <a:ext cx="822960" cy="960120"/>
+          </a:xfrm>
+          <a:prstGeom prst="rect">
+            <a:avLst/>
+          </a:prstGeom>
+          <a:noFill/>
+        </p:spPr>
+        <p:txBody>
+          <a:bodyPr wrap="square" anchor="ctr">
+            <a:spAutoFit/>
+          </a:bodyPr>
+          <a:lstStyle/>
+          <a:p>
+            <a:pPr algn="ctr"/>
+            <a:r>
+              <a:rPr sz="2000" b="1" i="0">
+                <a:solidFill>
+                  <a:srgbClr val="FFFFFF"/>
+                </a:solidFill>
+              </a:rPr>
+              <a:t>C4</a:t>
+            </a:r>
+          </a:p>
+        </p:txBody>
+      </p:sp>
+      <p:sp>
+        <p:nvSpPr>
+          <p:cNvPr id="24" name="TextBox 23"/>
+          <p:cNvSpPr txBox="1"/>
+          <p:nvPr/>
+        </p:nvSpPr>
+        <p:spPr>
+          <a:xfrm>
+            <a:off x="1417320" y="4133085"/>
+            <a:ext cx="10058400" cy="320040"/>
+          </a:xfrm>
+          <a:prstGeom prst="rect">
+            <a:avLst/>
+          </a:prstGeom>
+          <a:noFill/>
+        </p:spPr>
+        <p:txBody>
+          <a:bodyPr wrap="square" anchor="t">
+            <a:spAutoFit/>
+          </a:bodyPr>
+          <a:lstStyle/>
+          <a:p>
+            <a:pPr algn="l"/>
+            <a:r>
+              <a:rPr sz="1300" b="1" i="0">
                 <a:solidFill>
                   <a:srgbClr val="041E42"/>
                 </a:solidFill>
               </a:rPr>
-              <a:t>Review &amp; Validate</a:t>
-            </a:r>
-          </a:p>
-        </p:txBody>
-      </p:sp>
-      <p:pic>
-        <p:nvPicPr>
-          <p:cNvPr id="14" name="Picture 13" descr="lifecycle_kanban.png"/>
-          <p:cNvPicPr>
-            <a:picLocks noChangeAspect="1"/>
-          </p:cNvPicPr>
-          <p:nvPr/>
-        </p:nvPicPr>
-        <p:blipFill>
-          <a:blip r:embed="rId6"/>
-          <a:stretch>
-            <a:fillRect/>
-          </a:stretch>
-        </p:blipFill>
-        <p:spPr>
-          <a:xfrm>
-            <a:off x="4206240" y="3566160"/>
-            <a:ext cx="3794760" cy="2331720"/>
-          </a:xfrm>
-          <a:prstGeom prst="rect">
-            <a:avLst/>
-          </a:prstGeom>
-        </p:spPr>
-      </p:pic>
-      <p:sp>
-        <p:nvSpPr>
-          <p:cNvPr id="15" name="TextBox 14"/>
-          <p:cNvSpPr txBox="1"/>
-          <p:nvPr/>
-        </p:nvSpPr>
-        <p:spPr>
-          <a:xfrm>
-            <a:off x="4206240" y="5916168"/>
-            <a:ext cx="3794760" cy="228600"/>
-          </a:xfrm>
-          <a:prstGeom prst="rect">
-            <a:avLst/>
-          </a:prstGeom>
-          <a:noFill/>
-        </p:spPr>
-        <p:txBody>
-          <a:bodyPr wrap="square" anchor="t">
-            <a:spAutoFit/>
-          </a:bodyPr>
+              <a:t>Interpretable trust score + admission gate</a:t>
+            </a:r>
+          </a:p>
+        </p:txBody>
+      </p:sp>
+      <p:sp>
+        <p:nvSpPr>
+          <p:cNvPr id="25" name="TextBox 24"/>
+          <p:cNvSpPr txBox="1"/>
+          <p:nvPr/>
+        </p:nvSpPr>
+        <p:spPr>
+          <a:xfrm>
+            <a:off x="1417320" y="4453125"/>
+            <a:ext cx="10058400" cy="594360"/>
+          </a:xfrm>
+          <a:prstGeom prst="rect">
+            <a:avLst/>
+          </a:prstGeom>
+          <a:noFill/>
+        </p:spPr>
+        <p:txBody>
+          <a:bodyPr wrap="square" anchor="t">
+            <a:spAutoFit/>
+          </a:bodyPr>
+          <a:lstStyle/>
+          <a:p>
+            <a:pPr algn="l"/>
+            <a:r>
+              <a:rPr sz="1100" b="0" i="0">
+                <a:solidFill>
+                  <a:srgbClr val="333333"/>
+                </a:solidFill>
+              </a:rPr>
+              <a:t>trust × confidence gate flags rather than drops low-credibility posts.  Every constant traceable to English rationale in config.</a:t>
+            </a:r>
+          </a:p>
+        </p:txBody>
+      </p:sp>
+      <p:sp>
+        <p:nvSpPr>
+          <p:cNvPr id="26" name="Rectangle 25"/>
+          <p:cNvSpPr/>
+          <p:nvPr/>
+        </p:nvSpPr>
+        <p:spPr>
+          <a:xfrm>
+            <a:off x="457200" y="5129780"/>
+            <a:ext cx="11247120" cy="960120"/>
+          </a:xfrm>
+          <a:prstGeom prst="rect">
+            <a:avLst/>
+          </a:prstGeom>
+          <a:solidFill>
+            <a:srgbClr val="F5F5F5"/>
+          </a:solidFill>
+          <a:ln>
+            <a:solidFill>
+              <a:srgbClr val="0071DC"/>
+            </a:solidFill>
+          </a:ln>
+          <a:effectLst/>
+        </p:spPr>
+        <p:style>
+          <a:lnRef idx="1">
+            <a:schemeClr val="accent1"/>
+          </a:lnRef>
+          <a:fillRef idx="3">
+            <a:schemeClr val="accent1"/>
+          </a:fillRef>
+          <a:effectRef idx="2">
+            <a:schemeClr val="accent1"/>
+          </a:effectRef>
+          <a:fontRef idx="minor">
+            <a:schemeClr val="lt1"/>
+          </a:fontRef>
+        </p:style>
+        <p:txBody>
+          <a:bodyPr rtlCol="0" anchor="ctr"/>
           <a:lstStyle/>
           <a:p>
             <a:pPr algn="ctr"/>
-            <a:r>
-              <a:rPr sz="1100" b="1" i="0">
+          </a:p>
+        </p:txBody>
+      </p:sp>
+      <p:sp>
+        <p:nvSpPr>
+          <p:cNvPr id="27" name="Rectangle 26"/>
+          <p:cNvSpPr/>
+          <p:nvPr/>
+        </p:nvSpPr>
+        <p:spPr>
+          <a:xfrm>
+            <a:off x="457200" y="5129780"/>
+            <a:ext cx="822960" cy="960120"/>
+          </a:xfrm>
+          <a:prstGeom prst="rect">
+            <a:avLst/>
+          </a:prstGeom>
+          <a:solidFill>
+            <a:srgbClr val="0071DC"/>
+          </a:solidFill>
+          <a:ln>
+            <a:noFill/>
+          </a:ln>
+          <a:effectLst/>
+        </p:spPr>
+        <p:style>
+          <a:lnRef idx="1">
+            <a:schemeClr val="accent1"/>
+          </a:lnRef>
+          <a:fillRef idx="3">
+            <a:schemeClr val="accent1"/>
+          </a:fillRef>
+          <a:effectRef idx="2">
+            <a:schemeClr val="accent1"/>
+          </a:effectRef>
+          <a:fontRef idx="minor">
+            <a:schemeClr val="lt1"/>
+          </a:fontRef>
+        </p:style>
+        <p:txBody>
+          <a:bodyPr rtlCol="0" anchor="ctr"/>
+          <a:lstStyle/>
+          <a:p>
+            <a:pPr algn="ctr"/>
+          </a:p>
+        </p:txBody>
+      </p:sp>
+      <p:sp>
+        <p:nvSpPr>
+          <p:cNvPr id="28" name="TextBox 27"/>
+          <p:cNvSpPr txBox="1"/>
+          <p:nvPr/>
+        </p:nvSpPr>
+        <p:spPr>
+          <a:xfrm>
+            <a:off x="457200" y="5129780"/>
+            <a:ext cx="822960" cy="960120"/>
+          </a:xfrm>
+          <a:prstGeom prst="rect">
+            <a:avLst/>
+          </a:prstGeom>
+          <a:noFill/>
+        </p:spPr>
+        <p:txBody>
+          <a:bodyPr wrap="square" anchor="ctr">
+            <a:spAutoFit/>
+          </a:bodyPr>
+          <a:lstStyle/>
+          <a:p>
+            <a:pPr algn="ctr"/>
+            <a:r>
+              <a:rPr sz="2000" b="1" i="0">
+                <a:solidFill>
+                  <a:srgbClr val="FFFFFF"/>
+                </a:solidFill>
+              </a:rPr>
+              <a:t>C5</a:t>
+            </a:r>
+          </a:p>
+        </p:txBody>
+      </p:sp>
+      <p:sp>
+        <p:nvSpPr>
+          <p:cNvPr id="29" name="TextBox 28"/>
+          <p:cNvSpPr txBox="1"/>
+          <p:nvPr/>
+        </p:nvSpPr>
+        <p:spPr>
+          <a:xfrm>
+            <a:off x="1417320" y="5175500"/>
+            <a:ext cx="10058400" cy="320040"/>
+          </a:xfrm>
+          <a:prstGeom prst="rect">
+            <a:avLst/>
+          </a:prstGeom>
+          <a:noFill/>
+        </p:spPr>
+        <p:txBody>
+          <a:bodyPr wrap="square" anchor="t">
+            <a:spAutoFit/>
+          </a:bodyPr>
+          <a:lstStyle/>
+          <a:p>
+            <a:pPr algn="l"/>
+            <a:r>
+              <a:rPr sz="1300" b="1" i="0">
                 <a:solidFill>
                   <a:srgbClr val="041E42"/>
                 </a:solidFill>
               </a:rPr>
-              <a:t>Lifecycle Kanban</a:t>
-            </a:r>
-          </a:p>
-        </p:txBody>
-      </p:sp>
-      <p:pic>
-        <p:nvPicPr>
-          <p:cNvPr id="16" name="Picture 15" descr="insights_competitor.png"/>
-          <p:cNvPicPr>
-            <a:picLocks noChangeAspect="1"/>
-          </p:cNvPicPr>
-          <p:nvPr/>
-        </p:nvPicPr>
-        <p:blipFill>
-          <a:blip r:embed="rId7"/>
-          <a:stretch>
-            <a:fillRect/>
-          </a:stretch>
-        </p:blipFill>
-        <p:spPr>
-          <a:xfrm>
-            <a:off x="8092440" y="3566160"/>
-            <a:ext cx="3794760" cy="2331720"/>
-          </a:xfrm>
-          <a:prstGeom prst="rect">
-            <a:avLst/>
-          </a:prstGeom>
-        </p:spPr>
-      </p:pic>
-      <p:sp>
-        <p:nvSpPr>
-          <p:cNvPr id="17" name="TextBox 16"/>
-          <p:cNvSpPr txBox="1"/>
-          <p:nvPr/>
-        </p:nvSpPr>
-        <p:spPr>
-          <a:xfrm>
-            <a:off x="8092440" y="5916168"/>
-            <a:ext cx="3794760" cy="228600"/>
-          </a:xfrm>
-          <a:prstGeom prst="rect">
-            <a:avLst/>
-          </a:prstGeom>
-          <a:noFill/>
-        </p:spPr>
-        <p:txBody>
-          <a:bodyPr wrap="square" anchor="t">
-            <a:spAutoFit/>
-          </a:bodyPr>
-          <a:lstStyle/>
-          <a:p>
-            <a:pPr algn="ctr"/>
-            <a:r>
-              <a:rPr sz="1100" b="1" i="0">
-                <a:solidFill>
-                  <a:srgbClr val="041E42"/>
-                </a:solidFill>
-              </a:rPr>
-              <a:t>Insights</a:t>
-            </a:r>
-          </a:p>
-        </p:txBody>
-      </p:sp>
-      <p:sp>
-        <p:nvSpPr>
-          <p:cNvPr id="18" name="TextBox 17"/>
+              <a:t>HITL learning-loop dashboard</a:t>
+            </a:r>
+          </a:p>
+        </p:txBody>
+      </p:sp>
+      <p:sp>
+        <p:nvSpPr>
+          <p:cNvPr id="30" name="TextBox 29"/>
+          <p:cNvSpPr txBox="1"/>
+          <p:nvPr/>
+        </p:nvSpPr>
+        <p:spPr>
+          <a:xfrm>
+            <a:off x="1417320" y="5495540"/>
+            <a:ext cx="10058400" cy="594360"/>
+          </a:xfrm>
+          <a:prstGeom prst="rect">
+            <a:avLst/>
+          </a:prstGeom>
+          <a:noFill/>
+        </p:spPr>
+        <p:txBody>
+          <a:bodyPr wrap="square" anchor="t">
+            <a:spAutoFit/>
+          </a:bodyPr>
+          <a:lstStyle/>
+          <a:p>
+            <a:pPr algn="l"/>
+            <a:r>
+              <a:rPr sz="1100" b="0" i="0">
+                <a:solidFill>
+                  <a:srgbClr val="333333"/>
+                </a:solidFill>
+              </a:rPr>
+              <a:t>Review &amp; Validate, Lifecycle Kanban, Insights, Notification centre.  Corrections &amp; posted replies feed few-shot reply generation and future retraining.</a:t>
+            </a:r>
+          </a:p>
+        </p:txBody>
+      </p:sp>
+      <p:sp>
+        <p:nvSpPr>
+          <p:cNvPr id="31" name="TextBox 30"/>
           <p:cNvSpPr txBox="1"/>
           <p:nvPr/>
         </p:nvSpPr>
@@ -14752,7 +14837,7 @@
       </p:sp>
       <p:sp>
         <p:nvSpPr>
-          <p:cNvPr id="19" name="TextBox 18"/>
+          <p:cNvPr id="32" name="TextBox 31"/>
           <p:cNvSpPr txBox="1"/>
           <p:nvPr/>
         </p:nvSpPr>
@@ -14779,7 +14864,7 @@
                   <a:srgbClr val="666666"/>
                 </a:solidFill>
               </a:rPr>
-              <a:t>18 / 23</a:t>
+              <a:t>18 / 24</a:t>
             </a:r>
           </a:p>
         </p:txBody>
@@ -14875,7 +14960,7 @@
                   <a:srgbClr val="FFFFFF"/>
                 </a:solidFill>
               </a:rPr>
-              <a:t>Conclusions  —  What Worked, What's Still Open</a:t>
+              <a:t>Live Demo  —  Dashboard Walkthrough</a:t>
             </a:r>
           </a:p>
         </p:txBody>
@@ -14909,7 +14994,7 @@
                   <a:srgbClr val="E8F4FD"/>
                 </a:solidFill>
               </a:rPr>
-              <a:t>Honest read on 5 months of post-midsem work</a:t>
+              <a:t>One post → alert → review → reply → lifecycle → resolved</a:t>
             </a:r>
           </a:p>
         </p:txBody>
@@ -14958,264 +15043,146 @@
           </a:p>
         </p:txBody>
       </p:sp>
-      <p:sp>
-        <p:nvSpPr>
-          <p:cNvPr id="6" name="Rectangle 5"/>
-          <p:cNvSpPr/>
-          <p:nvPr/>
-        </p:nvSpPr>
-        <p:spPr>
-          <a:xfrm>
-            <a:off x="457200" y="960120"/>
-            <a:ext cx="5532120" cy="4480560"/>
-          </a:xfrm>
-          <a:prstGeom prst="rect">
-            <a:avLst/>
-          </a:prstGeom>
-          <a:solidFill>
-            <a:srgbClr val="DCFCE7"/>
-          </a:solidFill>
-          <a:ln>
-            <a:solidFill>
-              <a:srgbClr val="10B981"/>
-            </a:solidFill>
-          </a:ln>
-          <a:effectLst/>
-        </p:spPr>
-        <p:style>
-          <a:lnRef idx="1">
-            <a:schemeClr val="accent1"/>
-          </a:lnRef>
-          <a:fillRef idx="3">
-            <a:schemeClr val="accent1"/>
-          </a:fillRef>
-          <a:effectRef idx="2">
-            <a:schemeClr val="accent1"/>
-          </a:effectRef>
-          <a:fontRef idx="minor">
-            <a:schemeClr val="lt1"/>
-          </a:fontRef>
-        </p:style>
-        <p:txBody>
-          <a:bodyPr rtlCol="0" anchor="ctr"/>
+      <p:pic>
+        <p:nvPicPr>
+          <p:cNvPr id="6" name="Picture 5" descr="brand_health.png"/>
+          <p:cNvPicPr>
+            <a:picLocks noChangeAspect="1"/>
+          </p:cNvPicPr>
+          <p:nvPr/>
+        </p:nvPicPr>
+        <p:blipFill>
+          <a:blip r:embed="rId2"/>
+          <a:stretch>
+            <a:fillRect/>
+          </a:stretch>
+        </p:blipFill>
+        <p:spPr>
+          <a:xfrm>
+            <a:off x="320040" y="960120"/>
+            <a:ext cx="3794760" cy="2331720"/>
+          </a:xfrm>
+          <a:prstGeom prst="rect">
+            <a:avLst/>
+          </a:prstGeom>
+        </p:spPr>
+      </p:pic>
+      <p:sp>
+        <p:nvSpPr>
+          <p:cNvPr id="7" name="TextBox 6"/>
+          <p:cNvSpPr txBox="1"/>
+          <p:nvPr/>
+        </p:nvSpPr>
+        <p:spPr>
+          <a:xfrm>
+            <a:off x="320040" y="3310128"/>
+            <a:ext cx="3794760" cy="228600"/>
+          </a:xfrm>
+          <a:prstGeom prst="rect">
+            <a:avLst/>
+          </a:prstGeom>
+          <a:noFill/>
+        </p:spPr>
+        <p:txBody>
+          <a:bodyPr wrap="square" anchor="t">
+            <a:spAutoFit/>
+          </a:bodyPr>
           <a:lstStyle/>
           <a:p>
             <a:pPr algn="ctr"/>
-          </a:p>
-        </p:txBody>
-      </p:sp>
-      <p:sp>
-        <p:nvSpPr>
-          <p:cNvPr id="7" name="TextBox 6"/>
-          <p:cNvSpPr txBox="1"/>
-          <p:nvPr/>
-        </p:nvSpPr>
-        <p:spPr>
-          <a:xfrm>
-            <a:off x="640080" y="1097280"/>
-            <a:ext cx="5212080" cy="365760"/>
-          </a:xfrm>
-          <a:prstGeom prst="rect">
-            <a:avLst/>
-          </a:prstGeom>
-          <a:noFill/>
-        </p:spPr>
-        <p:txBody>
-          <a:bodyPr wrap="square" anchor="t">
-            <a:spAutoFit/>
-          </a:bodyPr>
-          <a:lstStyle/>
-          <a:p>
-            <a:pPr algn="l"/>
-            <a:r>
-              <a:rPr sz="1300" b="1" i="0">
-                <a:solidFill>
-                  <a:srgbClr val="10B981"/>
-                </a:solidFill>
-              </a:rPr>
-              <a:t>WHAT WORKED</a:t>
-            </a:r>
-          </a:p>
-        </p:txBody>
-      </p:sp>
-      <p:sp>
-        <p:nvSpPr>
-          <p:cNvPr id="8" name="TextBox 7"/>
-          <p:cNvSpPr txBox="1"/>
-          <p:nvPr/>
-        </p:nvSpPr>
-        <p:spPr>
-          <a:xfrm>
-            <a:off x="640080" y="1508760"/>
-            <a:ext cx="5212080" cy="3794760"/>
-          </a:xfrm>
-          <a:prstGeom prst="rect">
-            <a:avLst/>
-          </a:prstGeom>
-          <a:noFill/>
-        </p:spPr>
-        <p:txBody>
-          <a:bodyPr wrap="square">
-            <a:spAutoFit/>
-          </a:bodyPr>
-          <a:lstStyle/>
-          <a:p>
-            <a:pPr>
-              <a:spcAft>
-                <a:spcPts val="400"/>
-              </a:spcAft>
-            </a:pPr>
-            <a:r>
-              <a:rPr sz="1100" b="0">
-                <a:solidFill>
-                  <a:srgbClr val="333333"/>
-                </a:solidFill>
-              </a:rPr>
-              <a:t>•  3-stage ModernBERT curriculum landed the sentiment win we set out for  (Macro-F1 0.62 → 0.76 on 5-fold OOF).</a:t>
-            </a:r>
-          </a:p>
-          <a:p>
-            <a:pPr>
-              <a:spcAft>
-                <a:spcPts val="400"/>
-              </a:spcAft>
-            </a:pPr>
-            <a:r>
-              <a:rPr sz="1100" b="0">
-                <a:solidFill>
-                  <a:srgbClr val="333333"/>
-                </a:solidFill>
-              </a:rPr>
-              <a:t>•  Long-post recovery came for free once we switched off truncation  (≥1024-tok context):  5/7 → 7/7 correct on the ≥ 512-tok bucket.</a:t>
-            </a:r>
-          </a:p>
-          <a:p>
-            <a:pPr>
-              <a:spcAft>
-                <a:spcPts val="400"/>
-              </a:spcAft>
-            </a:pPr>
-            <a:r>
-              <a:rPr sz="1100" b="0">
-                <a:solidFill>
-                  <a:srgbClr val="333333"/>
-                </a:solidFill>
-              </a:rPr>
-              <a:t>•  Removing the image on the final vision merge step ended the 50 % hallucination problem — the mechanism, not just the number, makes it credible.</a:t>
-            </a:r>
-          </a:p>
-          <a:p>
-            <a:pPr>
-              <a:spcAft>
-                <a:spcPts val="400"/>
-              </a:spcAft>
-            </a:pPr>
-            <a:r>
-              <a:rPr sz="1100" b="0">
-                <a:solidFill>
-                  <a:srgbClr val="333333"/>
-                </a:solidFill>
-              </a:rPr>
-              <a:t>•  Trust score as flag-not-drop  matched the human annotator on 12 / 15 low-trust posts. Analysts trust it because they can override it.</a:t>
-            </a:r>
-          </a:p>
-          <a:p>
-            <a:pPr>
-              <a:spcAft>
-                <a:spcPts val="400"/>
-              </a:spcAft>
-            </a:pPr>
-            <a:r>
-              <a:rPr sz="1100" b="0">
-                <a:solidFill>
-                  <a:srgbClr val="333333"/>
-                </a:solidFill>
-              </a:rPr>
-              <a:t>•  HITL feedback table quietly turned into the most useful piece of infrastructure — drives few-shot on every click today, retraining tomorrow.</a:t>
-            </a:r>
-          </a:p>
-        </p:txBody>
-      </p:sp>
-      <p:sp>
-        <p:nvSpPr>
-          <p:cNvPr id="9" name="Rectangle 8"/>
-          <p:cNvSpPr/>
-          <p:nvPr/>
-        </p:nvSpPr>
-        <p:spPr>
-          <a:xfrm>
-            <a:off x="6172200" y="960120"/>
-            <a:ext cx="5532120" cy="4480560"/>
-          </a:xfrm>
-          <a:prstGeom prst="rect">
-            <a:avLst/>
-          </a:prstGeom>
-          <a:solidFill>
-            <a:srgbClr val="FEF3C7"/>
-          </a:solidFill>
-          <a:ln>
-            <a:solidFill>
-              <a:srgbClr val="D97706"/>
-            </a:solidFill>
-          </a:ln>
-          <a:effectLst/>
-        </p:spPr>
-        <p:style>
-          <a:lnRef idx="1">
-            <a:schemeClr val="accent1"/>
-          </a:lnRef>
-          <a:fillRef idx="3">
-            <a:schemeClr val="accent1"/>
-          </a:fillRef>
-          <a:effectRef idx="2">
-            <a:schemeClr val="accent1"/>
-          </a:effectRef>
-          <a:fontRef idx="minor">
-            <a:schemeClr val="lt1"/>
-          </a:fontRef>
-        </p:style>
-        <p:txBody>
-          <a:bodyPr rtlCol="0" anchor="ctr"/>
+            <a:r>
+              <a:rPr sz="1100" b="1" i="0">
+                <a:solidFill>
+                  <a:srgbClr val="041E42"/>
+                </a:solidFill>
+              </a:rPr>
+              <a:t>Brand Health</a:t>
+            </a:r>
+          </a:p>
+        </p:txBody>
+      </p:sp>
+      <p:pic>
+        <p:nvPicPr>
+          <p:cNvPr id="8" name="Picture 7" descr="alert_feed.png"/>
+          <p:cNvPicPr>
+            <a:picLocks noChangeAspect="1"/>
+          </p:cNvPicPr>
+          <p:nvPr/>
+        </p:nvPicPr>
+        <p:blipFill>
+          <a:blip r:embed="rId3"/>
+          <a:stretch>
+            <a:fillRect/>
+          </a:stretch>
+        </p:blipFill>
+        <p:spPr>
+          <a:xfrm>
+            <a:off x="4206240" y="960120"/>
+            <a:ext cx="3794760" cy="2331720"/>
+          </a:xfrm>
+          <a:prstGeom prst="rect">
+            <a:avLst/>
+          </a:prstGeom>
+        </p:spPr>
+      </p:pic>
+      <p:sp>
+        <p:nvSpPr>
+          <p:cNvPr id="9" name="TextBox 8"/>
+          <p:cNvSpPr txBox="1"/>
+          <p:nvPr/>
+        </p:nvSpPr>
+        <p:spPr>
+          <a:xfrm>
+            <a:off x="4206240" y="3310128"/>
+            <a:ext cx="3794760" cy="228600"/>
+          </a:xfrm>
+          <a:prstGeom prst="rect">
+            <a:avLst/>
+          </a:prstGeom>
+          <a:noFill/>
+        </p:spPr>
+        <p:txBody>
+          <a:bodyPr wrap="square" anchor="t">
+            <a:spAutoFit/>
+          </a:bodyPr>
           <a:lstStyle/>
           <a:p>
             <a:pPr algn="ctr"/>
-          </a:p>
-        </p:txBody>
-      </p:sp>
-      <p:sp>
-        <p:nvSpPr>
-          <p:cNvPr id="10" name="TextBox 9"/>
-          <p:cNvSpPr txBox="1"/>
-          <p:nvPr/>
-        </p:nvSpPr>
-        <p:spPr>
-          <a:xfrm>
-            <a:off x="6355080" y="1097280"/>
-            <a:ext cx="5212080" cy="365760"/>
-          </a:xfrm>
-          <a:prstGeom prst="rect">
-            <a:avLst/>
-          </a:prstGeom>
-          <a:noFill/>
-        </p:spPr>
-        <p:txBody>
-          <a:bodyPr wrap="square" anchor="t">
-            <a:spAutoFit/>
-          </a:bodyPr>
-          <a:lstStyle/>
-          <a:p>
-            <a:pPr algn="l"/>
-            <a:r>
-              <a:rPr sz="1300" b="1" i="0">
-                <a:solidFill>
-                  <a:srgbClr val="D97706"/>
-                </a:solidFill>
-              </a:rPr>
-              <a:t>WHAT'S STILL OPEN  (honest)</a:t>
-            </a:r>
-          </a:p>
-        </p:txBody>
-      </p:sp>
+            <a:r>
+              <a:rPr sz="1100" b="1" i="0">
+                <a:solidFill>
+                  <a:srgbClr val="041E42"/>
+                </a:solidFill>
+              </a:rPr>
+              <a:t>Alert Feed</a:t>
+            </a:r>
+          </a:p>
+        </p:txBody>
+      </p:sp>
+      <p:pic>
+        <p:nvPicPr>
+          <p:cNvPr id="10" name="Picture 9" descr="post_explorer.png"/>
+          <p:cNvPicPr>
+            <a:picLocks noChangeAspect="1"/>
+          </p:cNvPicPr>
+          <p:nvPr/>
+        </p:nvPicPr>
+        <p:blipFill>
+          <a:blip r:embed="rId4"/>
+          <a:stretch>
+            <a:fillRect/>
+          </a:stretch>
+        </p:blipFill>
+        <p:spPr>
+          <a:xfrm>
+            <a:off x="8092440" y="960120"/>
+            <a:ext cx="3794760" cy="2331720"/>
+          </a:xfrm>
+          <a:prstGeom prst="rect">
+            <a:avLst/>
+          </a:prstGeom>
+        </p:spPr>
+      </p:pic>
       <p:sp>
         <p:nvSpPr>
           <p:cNvPr id="11" name="TextBox 10"/>
@@ -15224,142 +15191,56 @@
         </p:nvSpPr>
         <p:spPr>
           <a:xfrm>
-            <a:off x="6355080" y="1508760"/>
-            <a:ext cx="5212080" cy="3794760"/>
-          </a:xfrm>
-          <a:prstGeom prst="rect">
-            <a:avLst/>
-          </a:prstGeom>
-          <a:noFill/>
-        </p:spPr>
-        <p:txBody>
-          <a:bodyPr wrap="square">
-            <a:spAutoFit/>
-          </a:bodyPr>
-          <a:lstStyle/>
-          <a:p>
-            <a:pPr>
-              <a:spcAft>
-                <a:spcPts val="400"/>
-              </a:spcAft>
-            </a:pPr>
-            <a:r>
-              <a:rPr sz="1100" b="0">
-                <a:solidFill>
-                  <a:srgbClr val="333333"/>
-                </a:solidFill>
-              </a:rPr>
-              <a:t>•  200-post gold set is small.  Numbers are OOF-CV, but a bigger blind held-out set is needed before I'd claim generalisation.</a:t>
-            </a:r>
-          </a:p>
-          <a:p>
-            <a:pPr>
-              <a:spcAft>
-                <a:spcPts val="400"/>
-              </a:spcAft>
-            </a:pPr>
-            <a:r>
-              <a:rPr sz="1100" b="0">
-                <a:solidFill>
-                  <a:srgbClr val="333333"/>
-                </a:solidFill>
-              </a:rPr>
-              <a:t>•  Vision eval is 32 images  —  enough to sanity-check the mechanism, not enough to claim production-grade quality.</a:t>
-            </a:r>
-          </a:p>
-          <a:p>
-            <a:pPr>
-              <a:spcAft>
-                <a:spcPts val="400"/>
-              </a:spcAft>
-            </a:pPr>
-            <a:r>
-              <a:rPr sz="1100" b="0">
-                <a:solidFill>
-                  <a:srgbClr val="333333"/>
-                </a:solidFill>
-              </a:rPr>
-              <a:t>•  Long bucket has only 7 posts and they are all negative-class  —  7/7 correct is evidence the truncation ceiling is gone, not proof of long-text mastery.</a:t>
-            </a:r>
-          </a:p>
-          <a:p>
-            <a:pPr>
-              <a:spcAft>
-                <a:spcPts val="400"/>
-              </a:spcAft>
-            </a:pPr>
-            <a:r>
-              <a:rPr sz="1100" b="0">
-                <a:solidFill>
-                  <a:srgbClr val="333333"/>
-                </a:solidFill>
-              </a:rPr>
-              <a:t>•  Reply drafts still need an analyst edit  —  we track edit-distance but haven't shown it dropping consistently yet.</a:t>
-            </a:r>
-          </a:p>
-          <a:p>
-            <a:pPr>
-              <a:spcAft>
-                <a:spcPts val="400"/>
-              </a:spcAft>
-            </a:pPr>
-            <a:r>
-              <a:rPr sz="1100" b="0">
-                <a:solidFill>
-                  <a:srgbClr val="333333"/>
-                </a:solidFill>
-              </a:rPr>
-              <a:t>•  Everything runs on one Mac. Multi-analyst concurrency and retraining automation aren't done  —  in the roadmap on next slide.</a:t>
-            </a:r>
-          </a:p>
-        </p:txBody>
-      </p:sp>
-      <p:sp>
-        <p:nvSpPr>
-          <p:cNvPr id="12" name="Rectangle 11"/>
-          <p:cNvSpPr/>
-          <p:nvPr/>
-        </p:nvSpPr>
-        <p:spPr>
-          <a:xfrm>
-            <a:off x="457200" y="5577840"/>
-            <a:ext cx="11247120" cy="822960"/>
-          </a:xfrm>
-          <a:prstGeom prst="rect">
-            <a:avLst/>
-          </a:prstGeom>
-          <a:solidFill>
-            <a:srgbClr val="E8F4FD"/>
-          </a:solidFill>
-          <a:ln>
-            <a:solidFill>
-              <a:srgbClr val="0071DC"/>
-            </a:solidFill>
-          </a:ln>
-          <a:effectLst/>
-        </p:spPr>
-        <p:style>
-          <a:lnRef idx="1">
-            <a:schemeClr val="accent1"/>
-          </a:lnRef>
-          <a:fillRef idx="3">
-            <a:schemeClr val="accent1"/>
-          </a:fillRef>
-          <a:effectRef idx="2">
-            <a:schemeClr val="accent1"/>
-          </a:effectRef>
-          <a:fontRef idx="minor">
-            <a:schemeClr val="lt1"/>
-          </a:fontRef>
-        </p:style>
-        <p:txBody>
-          <a:bodyPr rtlCol="0" anchor="ctr"/>
+            <a:off x="8092440" y="3310128"/>
+            <a:ext cx="3794760" cy="228600"/>
+          </a:xfrm>
+          <a:prstGeom prst="rect">
+            <a:avLst/>
+          </a:prstGeom>
+          <a:noFill/>
+        </p:spPr>
+        <p:txBody>
+          <a:bodyPr wrap="square" anchor="t">
+            <a:spAutoFit/>
+          </a:bodyPr>
           <a:lstStyle/>
           <a:p>
             <a:pPr algn="ctr"/>
-          </a:p>
-        </p:txBody>
-      </p:sp>
+            <a:r>
+              <a:rPr sz="1100" b="1" i="0">
+                <a:solidFill>
+                  <a:srgbClr val="041E42"/>
+                </a:solidFill>
+              </a:rPr>
+              <a:t>Post Explorer</a:t>
+            </a:r>
+          </a:p>
+        </p:txBody>
+      </p:sp>
+      <p:pic>
+        <p:nvPicPr>
+          <p:cNvPr id="12" name="Picture 11" descr="review_validate.png"/>
+          <p:cNvPicPr>
+            <a:picLocks noChangeAspect="1"/>
+          </p:cNvPicPr>
+          <p:nvPr/>
+        </p:nvPicPr>
+        <p:blipFill>
+          <a:blip r:embed="rId5"/>
+          <a:stretch>
+            <a:fillRect/>
+          </a:stretch>
+        </p:blipFill>
+        <p:spPr>
+          <a:xfrm>
+            <a:off x="320040" y="3566160"/>
+            <a:ext cx="3794760" cy="2331720"/>
+          </a:xfrm>
+          <a:prstGeom prst="rect">
+            <a:avLst/>
+          </a:prstGeom>
+        </p:spPr>
+      </p:pic>
       <p:sp>
         <p:nvSpPr>
           <p:cNvPr id="13" name="TextBox 12"/>
@@ -15368,69 +15249,151 @@
         </p:nvSpPr>
         <p:spPr>
           <a:xfrm>
-            <a:off x="640080" y="5669280"/>
-            <a:ext cx="10972800" cy="320040"/>
-          </a:xfrm>
-          <a:prstGeom prst="rect">
-            <a:avLst/>
-          </a:prstGeom>
-          <a:noFill/>
-        </p:spPr>
-        <p:txBody>
-          <a:bodyPr wrap="square" anchor="t">
-            <a:spAutoFit/>
-          </a:bodyPr>
-          <a:lstStyle/>
-          <a:p>
-            <a:pPr algn="l"/>
+            <a:off x="320040" y="5916168"/>
+            <a:ext cx="3794760" cy="228600"/>
+          </a:xfrm>
+          <a:prstGeom prst="rect">
+            <a:avLst/>
+          </a:prstGeom>
+          <a:noFill/>
+        </p:spPr>
+        <p:txBody>
+          <a:bodyPr wrap="square" anchor="t">
+            <a:spAutoFit/>
+          </a:bodyPr>
+          <a:lstStyle/>
+          <a:p>
+            <a:pPr algn="ctr"/>
             <a:r>
               <a:rPr sz="1100" b="1" i="0">
                 <a:solidFill>
-                  <a:srgbClr val="0071DC"/>
-                </a:solidFill>
-              </a:rPr>
-              <a:t>THE TAKEAWAY</a:t>
-            </a:r>
-          </a:p>
-        </p:txBody>
-      </p:sp>
-      <p:sp>
-        <p:nvSpPr>
-          <p:cNvPr id="14" name="TextBox 13"/>
-          <p:cNvSpPr txBox="1"/>
-          <p:nvPr/>
-        </p:nvSpPr>
-        <p:spPr>
-          <a:xfrm>
-            <a:off x="640080" y="5989320"/>
-            <a:ext cx="10972800" cy="365760"/>
-          </a:xfrm>
-          <a:prstGeom prst="rect">
-            <a:avLst/>
-          </a:prstGeom>
-          <a:noFill/>
-        </p:spPr>
-        <p:txBody>
-          <a:bodyPr wrap="square" anchor="t">
-            <a:spAutoFit/>
-          </a:bodyPr>
-          <a:lstStyle/>
-          <a:p>
-            <a:pPr algn="l"/>
-            <a:r>
-              <a:rPr sz="1100" b="0" i="0">
-                <a:solidFill>
-                  <a:srgbClr val="333333"/>
-                </a:solidFill>
-              </a:rPr>
-              <a:t>Mechanism-level wins are what carry the argument; sample-size caveats are what the next horizon of work has to close.</a:t>
-            </a:r>
-          </a:p>
-        </p:txBody>
-      </p:sp>
+                  <a:srgbClr val="041E42"/>
+                </a:solidFill>
+              </a:rPr>
+              <a:t>Review &amp; Validate</a:t>
+            </a:r>
+          </a:p>
+        </p:txBody>
+      </p:sp>
+      <p:pic>
+        <p:nvPicPr>
+          <p:cNvPr id="14" name="Picture 13" descr="lifecycle_kanban.png"/>
+          <p:cNvPicPr>
+            <a:picLocks noChangeAspect="1"/>
+          </p:cNvPicPr>
+          <p:nvPr/>
+        </p:nvPicPr>
+        <p:blipFill>
+          <a:blip r:embed="rId6"/>
+          <a:stretch>
+            <a:fillRect/>
+          </a:stretch>
+        </p:blipFill>
+        <p:spPr>
+          <a:xfrm>
+            <a:off x="4206240" y="3566160"/>
+            <a:ext cx="3794760" cy="2331720"/>
+          </a:xfrm>
+          <a:prstGeom prst="rect">
+            <a:avLst/>
+          </a:prstGeom>
+        </p:spPr>
+      </p:pic>
       <p:sp>
         <p:nvSpPr>
           <p:cNvPr id="15" name="TextBox 14"/>
+          <p:cNvSpPr txBox="1"/>
+          <p:nvPr/>
+        </p:nvSpPr>
+        <p:spPr>
+          <a:xfrm>
+            <a:off x="4206240" y="5916168"/>
+            <a:ext cx="3794760" cy="228600"/>
+          </a:xfrm>
+          <a:prstGeom prst="rect">
+            <a:avLst/>
+          </a:prstGeom>
+          <a:noFill/>
+        </p:spPr>
+        <p:txBody>
+          <a:bodyPr wrap="square" anchor="t">
+            <a:spAutoFit/>
+          </a:bodyPr>
+          <a:lstStyle/>
+          <a:p>
+            <a:pPr algn="ctr"/>
+            <a:r>
+              <a:rPr sz="1100" b="1" i="0">
+                <a:solidFill>
+                  <a:srgbClr val="041E42"/>
+                </a:solidFill>
+              </a:rPr>
+              <a:t>Lifecycle Kanban</a:t>
+            </a:r>
+          </a:p>
+        </p:txBody>
+      </p:sp>
+      <p:pic>
+        <p:nvPicPr>
+          <p:cNvPr id="16" name="Picture 15" descr="insights_competitor.png"/>
+          <p:cNvPicPr>
+            <a:picLocks noChangeAspect="1"/>
+          </p:cNvPicPr>
+          <p:nvPr/>
+        </p:nvPicPr>
+        <p:blipFill>
+          <a:blip r:embed="rId7"/>
+          <a:stretch>
+            <a:fillRect/>
+          </a:stretch>
+        </p:blipFill>
+        <p:spPr>
+          <a:xfrm>
+            <a:off x="8092440" y="3566160"/>
+            <a:ext cx="3794760" cy="2331720"/>
+          </a:xfrm>
+          <a:prstGeom prst="rect">
+            <a:avLst/>
+          </a:prstGeom>
+        </p:spPr>
+      </p:pic>
+      <p:sp>
+        <p:nvSpPr>
+          <p:cNvPr id="17" name="TextBox 16"/>
+          <p:cNvSpPr txBox="1"/>
+          <p:nvPr/>
+        </p:nvSpPr>
+        <p:spPr>
+          <a:xfrm>
+            <a:off x="8092440" y="5916168"/>
+            <a:ext cx="3794760" cy="228600"/>
+          </a:xfrm>
+          <a:prstGeom prst="rect">
+            <a:avLst/>
+          </a:prstGeom>
+          <a:noFill/>
+        </p:spPr>
+        <p:txBody>
+          <a:bodyPr wrap="square" anchor="t">
+            <a:spAutoFit/>
+          </a:bodyPr>
+          <a:lstStyle/>
+          <a:p>
+            <a:pPr algn="ctr"/>
+            <a:r>
+              <a:rPr sz="1100" b="1" i="0">
+                <a:solidFill>
+                  <a:srgbClr val="041E42"/>
+                </a:solidFill>
+              </a:rPr>
+              <a:t>Insights</a:t>
+            </a:r>
+          </a:p>
+        </p:txBody>
+      </p:sp>
+      <p:sp>
+        <p:nvSpPr>
+          <p:cNvPr id="18" name="TextBox 17"/>
           <p:cNvSpPr txBox="1"/>
           <p:nvPr/>
         </p:nvSpPr>
@@ -15464,7 +15427,7 @@
       </p:sp>
       <p:sp>
         <p:nvSpPr>
-          <p:cNvPr id="16" name="TextBox 15"/>
+          <p:cNvPr id="19" name="TextBox 18"/>
           <p:cNvSpPr txBox="1"/>
           <p:nvPr/>
         </p:nvSpPr>
@@ -15491,7 +15454,7 @@
                   <a:srgbClr val="666666"/>
                 </a:solidFill>
               </a:rPr>
-              <a:t>19 / 23</a:t>
+              <a:t>19 / 24</a:t>
             </a:r>
           </a:p>
         </p:txBody>
@@ -17111,7 +17074,7 @@
                   <a:srgbClr val="041E42"/>
                 </a:solidFill>
               </a:rPr>
-              <a:t>Notification Centre</a:t>
+              <a:t>Alert Feed</a:t>
             </a:r>
           </a:p>
         </p:txBody>
@@ -17145,7 +17108,7 @@
                   <a:srgbClr val="666666"/>
                 </a:solidFill>
               </a:rPr>
-              <a:t>In-app + email + Slack, group-routed</a:t>
+              <a:t>Live risk detection + editable rule thresholds</a:t>
             </a:r>
           </a:p>
         </p:txBody>
@@ -17259,7 +17222,7 @@
                   <a:srgbClr val="041E42"/>
                 </a:solidFill>
               </a:rPr>
-              <a:t>ModernBERT — Final Results</a:t>
+              <a:t>Notification Centre</a:t>
             </a:r>
           </a:p>
         </p:txBody>
@@ -17293,7 +17256,7 @@
                   <a:srgbClr val="666666"/>
                 </a:solidFill>
               </a:rPr>
-              <a:t>Macro-F1  0.6272 → 0.7642  (+13.7 pts)</a:t>
+              <a:t>In-app + email + Slack, group-routed</a:t>
             </a:r>
           </a:p>
         </p:txBody>
@@ -17407,7 +17370,7 @@
                   <a:srgbClr val="041E42"/>
                 </a:solidFill>
               </a:rPr>
-              <a:t>Vision — Multi-Pass Payoff</a:t>
+              <a:t>ModernBERT — Final Results</a:t>
             </a:r>
           </a:p>
         </p:txBody>
@@ -17441,7 +17404,7 @@
                   <a:srgbClr val="666666"/>
                 </a:solidFill>
               </a:rPr>
-              <a:t>Hallucination  50% → 0%,  extraction 25% → 75%</a:t>
+              <a:t>Macro-F1  0.6272 → 0.7642  (+13.7 pts)</a:t>
             </a:r>
           </a:p>
         </p:txBody>
@@ -17555,7 +17518,7 @@
                   <a:srgbClr val="041E42"/>
                 </a:solidFill>
               </a:rPr>
-              <a:t>Trust-Score Evaluation</a:t>
+              <a:t>Vision — Multi-Pass Payoff</a:t>
             </a:r>
           </a:p>
         </p:txBody>
@@ -17589,7 +17552,7 @@
                   <a:srgbClr val="666666"/>
                 </a:solidFill>
               </a:rPr>
-              <a:t>15% flagged; 12 of 15 confirmed by annotator</a:t>
+              <a:t>Hallucination  50% → 0%,  extraction 25% → 75%</a:t>
             </a:r>
           </a:p>
         </p:txBody>
@@ -17703,7 +17666,7 @@
                   <a:srgbClr val="041E42"/>
                 </a:solidFill>
               </a:rPr>
-              <a:t>Live Demo</a:t>
+              <a:t>Trust-Score Evaluation</a:t>
             </a:r>
           </a:p>
         </p:txBody>
@@ -17737,7 +17700,7 @@
                   <a:srgbClr val="666666"/>
                 </a:solidFill>
               </a:rPr>
-              <a:t>Dashboard walkthrough (screenshots)</a:t>
+              <a:t>15% flagged; 12 of 15 confirmed by annotator</a:t>
             </a:r>
           </a:p>
         </p:txBody>
@@ -17851,7 +17814,7 @@
                   <a:srgbClr val="041E42"/>
                 </a:solidFill>
               </a:rPr>
-              <a:t>Conclusions &amp; Future Work</a:t>
+              <a:t>Live Demo</a:t>
             </a:r>
           </a:p>
         </p:txBody>
@@ -17885,6 +17848,154 @@
                   <a:srgbClr val="666666"/>
                 </a:solidFill>
               </a:rPr>
+              <a:t>Dashboard walkthrough (screenshots)</a:t>
+            </a:r>
+          </a:p>
+        </p:txBody>
+      </p:sp>
+      <p:sp>
+        <p:nvSpPr>
+          <p:cNvPr id="66" name="Rectangle 65"/>
+          <p:cNvSpPr/>
+          <p:nvPr/>
+        </p:nvSpPr>
+        <p:spPr>
+          <a:xfrm>
+            <a:off x="6217920" y="5696712"/>
+            <a:ext cx="5623560" cy="566928"/>
+          </a:xfrm>
+          <a:prstGeom prst="rect">
+            <a:avLst/>
+          </a:prstGeom>
+          <a:solidFill>
+            <a:srgbClr val="E8F4FD"/>
+          </a:solidFill>
+          <a:ln>
+            <a:solidFill>
+              <a:srgbClr val="0071DC"/>
+            </a:solidFill>
+          </a:ln>
+          <a:effectLst/>
+        </p:spPr>
+        <p:style>
+          <a:lnRef idx="1">
+            <a:schemeClr val="accent1"/>
+          </a:lnRef>
+          <a:fillRef idx="3">
+            <a:schemeClr val="accent1"/>
+          </a:fillRef>
+          <a:effectRef idx="2">
+            <a:schemeClr val="accent1"/>
+          </a:effectRef>
+          <a:fontRef idx="minor">
+            <a:schemeClr val="lt1"/>
+          </a:fontRef>
+        </p:style>
+        <p:txBody>
+          <a:bodyPr rtlCol="0" anchor="ctr"/>
+          <a:lstStyle/>
+          <a:p>
+            <a:pPr algn="ctr"/>
+          </a:p>
+        </p:txBody>
+      </p:sp>
+      <p:sp>
+        <p:nvSpPr>
+          <p:cNvPr id="67" name="TextBox 66"/>
+          <p:cNvSpPr txBox="1"/>
+          <p:nvPr/>
+        </p:nvSpPr>
+        <p:spPr>
+          <a:xfrm>
+            <a:off x="6309360" y="5696712"/>
+            <a:ext cx="548640" cy="566928"/>
+          </a:xfrm>
+          <a:prstGeom prst="rect">
+            <a:avLst/>
+          </a:prstGeom>
+          <a:noFill/>
+        </p:spPr>
+        <p:txBody>
+          <a:bodyPr wrap="square" anchor="ctr">
+            <a:spAutoFit/>
+          </a:bodyPr>
+          <a:lstStyle/>
+          <a:p>
+            <a:pPr algn="l"/>
+            <a:r>
+              <a:rPr sz="1400" b="1" i="0">
+                <a:solidFill>
+                  <a:srgbClr val="0071DC"/>
+                </a:solidFill>
+              </a:rPr>
+              <a:t>16</a:t>
+            </a:r>
+          </a:p>
+        </p:txBody>
+      </p:sp>
+      <p:sp>
+        <p:nvSpPr>
+          <p:cNvPr id="68" name="TextBox 67"/>
+          <p:cNvSpPr txBox="1"/>
+          <p:nvPr/>
+        </p:nvSpPr>
+        <p:spPr>
+          <a:xfrm>
+            <a:off x="6903720" y="5760720"/>
+            <a:ext cx="4846320" cy="256032"/>
+          </a:xfrm>
+          <a:prstGeom prst="rect">
+            <a:avLst/>
+          </a:prstGeom>
+          <a:noFill/>
+        </p:spPr>
+        <p:txBody>
+          <a:bodyPr wrap="square" anchor="t">
+            <a:spAutoFit/>
+          </a:bodyPr>
+          <a:lstStyle/>
+          <a:p>
+            <a:pPr algn="l"/>
+            <a:r>
+              <a:rPr sz="1200" b="1" i="0">
+                <a:solidFill>
+                  <a:srgbClr val="041E42"/>
+                </a:solidFill>
+              </a:rPr>
+              <a:t>Conclusions &amp; Future Work</a:t>
+            </a:r>
+          </a:p>
+        </p:txBody>
+      </p:sp>
+      <p:sp>
+        <p:nvSpPr>
+          <p:cNvPr id="69" name="TextBox 68"/>
+          <p:cNvSpPr txBox="1"/>
+          <p:nvPr/>
+        </p:nvSpPr>
+        <p:spPr>
+          <a:xfrm>
+            <a:off x="6903720" y="6007608"/>
+            <a:ext cx="4846320" cy="237744"/>
+          </a:xfrm>
+          <a:prstGeom prst="rect">
+            <a:avLst/>
+          </a:prstGeom>
+          <a:noFill/>
+        </p:spPr>
+        <p:txBody>
+          <a:bodyPr wrap="square" anchor="t">
+            <a:spAutoFit/>
+          </a:bodyPr>
+          <a:lstStyle/>
+          <a:p>
+            <a:pPr algn="l"/>
+            <a:r>
+              <a:rPr sz="1000" b="0" i="0">
+                <a:solidFill>
+                  <a:srgbClr val="666666"/>
+                </a:solidFill>
+              </a:rPr>
               <a:t>RQ1–RQ4 outcomes + realistic roadmap</a:t>
             </a:r>
           </a:p>
@@ -17892,7 +18003,7 @@
       </p:sp>
       <p:sp>
         <p:nvSpPr>
-          <p:cNvPr id="66" name="TextBox 65"/>
+          <p:cNvPr id="70" name="TextBox 69"/>
           <p:cNvSpPr txBox="1"/>
           <p:nvPr/>
         </p:nvSpPr>
@@ -17926,7 +18037,7 @@
       </p:sp>
       <p:sp>
         <p:nvSpPr>
-          <p:cNvPr id="67" name="TextBox 66"/>
+          <p:cNvPr id="71" name="TextBox 70"/>
           <p:cNvSpPr txBox="1"/>
           <p:nvPr/>
         </p:nvSpPr>
@@ -17953,7 +18064,7 @@
                   <a:srgbClr val="666666"/>
                 </a:solidFill>
               </a:rPr>
-              <a:t>2 / 23</a:t>
+              <a:t>2 / 24</a:t>
             </a:r>
           </a:p>
         </p:txBody>
@@ -18049,7 +18160,7 @@
                   <a:srgbClr val="FFFFFF"/>
                 </a:solidFill>
               </a:rPr>
-              <a:t>Future Work  —  Track 1  ·  HITL Reduction (4 Horizons)</a:t>
+              <a:t>Conclusions  —  What Worked, What's Still Open</a:t>
             </a:r>
           </a:p>
         </p:txBody>
@@ -18083,7 +18194,7 @@
                   <a:srgbClr val="E8F4FD"/>
                 </a:solidFill>
               </a:rPr>
-              <a:t>One of three tracks:  Track 1 HITL  ·  Track 2 Bilingual  ·  Track 3 Multi-Platform  (Tracks 2 &amp; 3 on next slide)</a:t>
+              <a:t>Honest read on 5 months of post-midsem work</a:t>
             </a:r>
           </a:p>
         </p:txBody>
@@ -18141,13 +18252,13 @@
         <p:spPr>
           <a:xfrm>
             <a:off x="457200" y="960120"/>
-            <a:ext cx="11247120" cy="1051560"/>
+            <a:ext cx="5532120" cy="4480560"/>
           </a:xfrm>
           <a:prstGeom prst="rect">
             <a:avLst/>
           </a:prstGeom>
           <a:solidFill>
-            <a:srgbClr val="F5F5F5"/>
+            <a:srgbClr val="DCFCE7"/>
           </a:solidFill>
           <a:ln>
             <a:solidFill>
@@ -18180,652 +18291,152 @@
       </p:sp>
       <p:sp>
         <p:nvSpPr>
-          <p:cNvPr id="7" name="Rectangle 6"/>
+          <p:cNvPr id="7" name="TextBox 6"/>
+          <p:cNvSpPr txBox="1"/>
+          <p:nvPr/>
+        </p:nvSpPr>
+        <p:spPr>
+          <a:xfrm>
+            <a:off x="640080" y="1097280"/>
+            <a:ext cx="5212080" cy="365760"/>
+          </a:xfrm>
+          <a:prstGeom prst="rect">
+            <a:avLst/>
+          </a:prstGeom>
+          <a:noFill/>
+        </p:spPr>
+        <p:txBody>
+          <a:bodyPr wrap="square" anchor="t">
+            <a:spAutoFit/>
+          </a:bodyPr>
+          <a:lstStyle/>
+          <a:p>
+            <a:pPr algn="l"/>
+            <a:r>
+              <a:rPr sz="1300" b="1" i="0">
+                <a:solidFill>
+                  <a:srgbClr val="10B981"/>
+                </a:solidFill>
+              </a:rPr>
+              <a:t>WHAT WORKED</a:t>
+            </a:r>
+          </a:p>
+        </p:txBody>
+      </p:sp>
+      <p:sp>
+        <p:nvSpPr>
+          <p:cNvPr id="8" name="TextBox 7"/>
+          <p:cNvSpPr txBox="1"/>
+          <p:nvPr/>
+        </p:nvSpPr>
+        <p:spPr>
+          <a:xfrm>
+            <a:off x="640080" y="1508760"/>
+            <a:ext cx="5212080" cy="3794760"/>
+          </a:xfrm>
+          <a:prstGeom prst="rect">
+            <a:avLst/>
+          </a:prstGeom>
+          <a:noFill/>
+        </p:spPr>
+        <p:txBody>
+          <a:bodyPr wrap="square">
+            <a:spAutoFit/>
+          </a:bodyPr>
+          <a:lstStyle/>
+          <a:p>
+            <a:pPr>
+              <a:spcAft>
+                <a:spcPts val="400"/>
+              </a:spcAft>
+            </a:pPr>
+            <a:r>
+              <a:rPr sz="1100" b="0">
+                <a:solidFill>
+                  <a:srgbClr val="333333"/>
+                </a:solidFill>
+              </a:rPr>
+              <a:t>•  3-stage ModernBERT curriculum landed the sentiment win we set out for  (Macro-F1 0.62 → 0.76 on 5-fold OOF).</a:t>
+            </a:r>
+          </a:p>
+          <a:p>
+            <a:pPr>
+              <a:spcAft>
+                <a:spcPts val="400"/>
+              </a:spcAft>
+            </a:pPr>
+            <a:r>
+              <a:rPr sz="1100" b="0">
+                <a:solidFill>
+                  <a:srgbClr val="333333"/>
+                </a:solidFill>
+              </a:rPr>
+              <a:t>•  Long-post recovery came for free once we switched off truncation  (≥1024-tok context):  5/7 → 7/7 correct on the ≥ 512-tok bucket.</a:t>
+            </a:r>
+          </a:p>
+          <a:p>
+            <a:pPr>
+              <a:spcAft>
+                <a:spcPts val="400"/>
+              </a:spcAft>
+            </a:pPr>
+            <a:r>
+              <a:rPr sz="1100" b="0">
+                <a:solidFill>
+                  <a:srgbClr val="333333"/>
+                </a:solidFill>
+              </a:rPr>
+              <a:t>•  Removing the image on the final vision merge step ended the 50 % hallucination problem — the mechanism, not just the number, makes it credible.</a:t>
+            </a:r>
+          </a:p>
+          <a:p>
+            <a:pPr>
+              <a:spcAft>
+                <a:spcPts val="400"/>
+              </a:spcAft>
+            </a:pPr>
+            <a:r>
+              <a:rPr sz="1100" b="0">
+                <a:solidFill>
+                  <a:srgbClr val="333333"/>
+                </a:solidFill>
+              </a:rPr>
+              <a:t>•  Trust score as flag-not-drop  matched the human annotator on 12 / 15 low-trust posts. Analysts trust it because they can override it.</a:t>
+            </a:r>
+          </a:p>
+          <a:p>
+            <a:pPr>
+              <a:spcAft>
+                <a:spcPts val="400"/>
+              </a:spcAft>
+            </a:pPr>
+            <a:r>
+              <a:rPr sz="1100" b="0">
+                <a:solidFill>
+                  <a:srgbClr val="333333"/>
+                </a:solidFill>
+              </a:rPr>
+              <a:t>•  HITL feedback table quietly turned into the most useful piece of infrastructure — drives few-shot on every click today, retraining tomorrow.</a:t>
+            </a:r>
+          </a:p>
+        </p:txBody>
+      </p:sp>
+      <p:sp>
+        <p:nvSpPr>
+          <p:cNvPr id="9" name="Rectangle 8"/>
           <p:cNvSpPr/>
           <p:nvPr/>
         </p:nvSpPr>
         <p:spPr>
           <a:xfrm>
-            <a:off x="457200" y="960120"/>
-            <a:ext cx="1600200" cy="1051560"/>
+            <a:off x="6172200" y="960120"/>
+            <a:ext cx="5532120" cy="4480560"/>
           </a:xfrm>
           <a:prstGeom prst="rect">
             <a:avLst/>
           </a:prstGeom>
           <a:solidFill>
-            <a:srgbClr val="10B981"/>
-          </a:solidFill>
-          <a:ln>
-            <a:noFill/>
-          </a:ln>
-          <a:effectLst/>
-        </p:spPr>
-        <p:style>
-          <a:lnRef idx="1">
-            <a:schemeClr val="accent1"/>
-          </a:lnRef>
-          <a:fillRef idx="3">
-            <a:schemeClr val="accent1"/>
-          </a:fillRef>
-          <a:effectRef idx="2">
-            <a:schemeClr val="accent1"/>
-          </a:effectRef>
-          <a:fontRef idx="minor">
-            <a:schemeClr val="lt1"/>
-          </a:fontRef>
-        </p:style>
-        <p:txBody>
-          <a:bodyPr rtlCol="0" anchor="ctr"/>
-          <a:lstStyle/>
-          <a:p>
-            <a:pPr algn="ctr"/>
-          </a:p>
-        </p:txBody>
-      </p:sp>
-      <p:sp>
-        <p:nvSpPr>
-          <p:cNvPr id="8" name="TextBox 7"/>
-          <p:cNvSpPr txBox="1"/>
-          <p:nvPr/>
-        </p:nvSpPr>
-        <p:spPr>
-          <a:xfrm>
-            <a:off x="457200" y="1106424"/>
-            <a:ext cx="1600200" cy="365760"/>
-          </a:xfrm>
-          <a:prstGeom prst="rect">
-            <a:avLst/>
-          </a:prstGeom>
-          <a:noFill/>
-        </p:spPr>
-        <p:txBody>
-          <a:bodyPr wrap="square" anchor="t">
-            <a:spAutoFit/>
-          </a:bodyPr>
-          <a:lstStyle/>
-          <a:p>
-            <a:pPr algn="ctr"/>
-            <a:r>
-              <a:rPr sz="1100" b="1" i="0">
-                <a:solidFill>
-                  <a:srgbClr val="FFFFFF"/>
-                </a:solidFill>
-              </a:rPr>
-              <a:t>Now → 1 month</a:t>
-            </a:r>
-          </a:p>
-        </p:txBody>
-      </p:sp>
-      <p:sp>
-        <p:nvSpPr>
-          <p:cNvPr id="9" name="TextBox 8"/>
-          <p:cNvSpPr txBox="1"/>
-          <p:nvPr/>
-        </p:nvSpPr>
-        <p:spPr>
-          <a:xfrm>
-            <a:off x="457200" y="1463040"/>
-            <a:ext cx="1600200" cy="457200"/>
-          </a:xfrm>
-          <a:prstGeom prst="rect">
-            <a:avLst/>
-          </a:prstGeom>
-          <a:noFill/>
-        </p:spPr>
-        <p:txBody>
-          <a:bodyPr wrap="square" anchor="t">
-            <a:spAutoFit/>
-          </a:bodyPr>
-          <a:lstStyle/>
-          <a:p>
-            <a:pPr algn="ctr"/>
-            <a:r>
-              <a:rPr sz="1000" b="0" i="0">
-                <a:solidFill>
-                  <a:srgbClr val="FFFFFF"/>
-                </a:solidFill>
-              </a:rPr>
-              <a:t>HITL: 100 %</a:t>
-            </a:r>
-          </a:p>
-        </p:txBody>
-      </p:sp>
-      <p:sp>
-        <p:nvSpPr>
-          <p:cNvPr id="10" name="TextBox 9"/>
-          <p:cNvSpPr txBox="1"/>
-          <p:nvPr/>
-        </p:nvSpPr>
-        <p:spPr>
-          <a:xfrm>
-            <a:off x="2194560" y="1051560"/>
-            <a:ext cx="9326880" cy="365760"/>
-          </a:xfrm>
-          <a:prstGeom prst="rect">
-            <a:avLst/>
-          </a:prstGeom>
-          <a:noFill/>
-        </p:spPr>
-        <p:txBody>
-          <a:bodyPr wrap="square" anchor="t">
-            <a:spAutoFit/>
-          </a:bodyPr>
-          <a:lstStyle/>
-          <a:p>
-            <a:pPr algn="l"/>
-            <a:r>
-              <a:rPr sz="1400" b="1" i="0">
-                <a:solidFill>
-                  <a:srgbClr val="041E42"/>
-                </a:solidFill>
-              </a:rPr>
-              <a:t>Grow the gold set</a:t>
-            </a:r>
-          </a:p>
-        </p:txBody>
-      </p:sp>
-      <p:sp>
-        <p:nvSpPr>
-          <p:cNvPr id="11" name="TextBox 10"/>
-          <p:cNvSpPr txBox="1"/>
-          <p:nvPr/>
-        </p:nvSpPr>
-        <p:spPr>
-          <a:xfrm>
-            <a:off x="2194560" y="1417320"/>
-            <a:ext cx="9326880" cy="594360"/>
-          </a:xfrm>
-          <a:prstGeom prst="rect">
-            <a:avLst/>
-          </a:prstGeom>
-          <a:noFill/>
-        </p:spPr>
-        <p:txBody>
-          <a:bodyPr wrap="square" anchor="t">
-            <a:spAutoFit/>
-          </a:bodyPr>
-          <a:lstStyle/>
-          <a:p>
-            <a:pPr algn="l"/>
-            <a:r>
-              <a:rPr sz="1050" b="0" i="0">
-                <a:solidFill>
-                  <a:srgbClr val="333333"/>
-                </a:solidFill>
-              </a:rPr>
-              <a:t>Grow the labelled gold set to ~500 posts using the HITL feedback the team is already producing; rerun 5-fold OOF to check the F1 delta.</a:t>
-            </a:r>
-          </a:p>
-        </p:txBody>
-      </p:sp>
-      <p:sp>
-        <p:nvSpPr>
-          <p:cNvPr id="12" name="Rectangle 11"/>
-          <p:cNvSpPr/>
-          <p:nvPr/>
-        </p:nvSpPr>
-        <p:spPr>
-          <a:xfrm>
-            <a:off x="457200" y="2093976"/>
-            <a:ext cx="11247120" cy="1051560"/>
-          </a:xfrm>
-          <a:prstGeom prst="rect">
-            <a:avLst/>
-          </a:prstGeom>
-          <a:solidFill>
-            <a:srgbClr val="F5F5F5"/>
-          </a:solidFill>
-          <a:ln>
-            <a:solidFill>
-              <a:srgbClr val="0071DC"/>
-            </a:solidFill>
-          </a:ln>
-          <a:effectLst/>
-        </p:spPr>
-        <p:style>
-          <a:lnRef idx="1">
-            <a:schemeClr val="accent1"/>
-          </a:lnRef>
-          <a:fillRef idx="3">
-            <a:schemeClr val="accent1"/>
-          </a:fillRef>
-          <a:effectRef idx="2">
-            <a:schemeClr val="accent1"/>
-          </a:effectRef>
-          <a:fontRef idx="minor">
-            <a:schemeClr val="lt1"/>
-          </a:fontRef>
-        </p:style>
-        <p:txBody>
-          <a:bodyPr rtlCol="0" anchor="ctr"/>
-          <a:lstStyle/>
-          <a:p>
-            <a:pPr algn="ctr"/>
-          </a:p>
-        </p:txBody>
-      </p:sp>
-      <p:sp>
-        <p:nvSpPr>
-          <p:cNvPr id="13" name="Rectangle 12"/>
-          <p:cNvSpPr/>
-          <p:nvPr/>
-        </p:nvSpPr>
-        <p:spPr>
-          <a:xfrm>
-            <a:off x="457200" y="2093976"/>
-            <a:ext cx="1600200" cy="1051560"/>
-          </a:xfrm>
-          <a:prstGeom prst="rect">
-            <a:avLst/>
-          </a:prstGeom>
-          <a:solidFill>
-            <a:srgbClr val="0071DC"/>
-          </a:solidFill>
-          <a:ln>
-            <a:noFill/>
-          </a:ln>
-          <a:effectLst/>
-        </p:spPr>
-        <p:style>
-          <a:lnRef idx="1">
-            <a:schemeClr val="accent1"/>
-          </a:lnRef>
-          <a:fillRef idx="3">
-            <a:schemeClr val="accent1"/>
-          </a:fillRef>
-          <a:effectRef idx="2">
-            <a:schemeClr val="accent1"/>
-          </a:effectRef>
-          <a:fontRef idx="minor">
-            <a:schemeClr val="lt1"/>
-          </a:fontRef>
-        </p:style>
-        <p:txBody>
-          <a:bodyPr rtlCol="0" anchor="ctr"/>
-          <a:lstStyle/>
-          <a:p>
-            <a:pPr algn="ctr"/>
-          </a:p>
-        </p:txBody>
-      </p:sp>
-      <p:sp>
-        <p:nvSpPr>
-          <p:cNvPr id="14" name="TextBox 13"/>
-          <p:cNvSpPr txBox="1"/>
-          <p:nvPr/>
-        </p:nvSpPr>
-        <p:spPr>
-          <a:xfrm>
-            <a:off x="457200" y="2240280"/>
-            <a:ext cx="1600200" cy="365760"/>
-          </a:xfrm>
-          <a:prstGeom prst="rect">
-            <a:avLst/>
-          </a:prstGeom>
-          <a:noFill/>
-        </p:spPr>
-        <p:txBody>
-          <a:bodyPr wrap="square" anchor="t">
-            <a:spAutoFit/>
-          </a:bodyPr>
-          <a:lstStyle/>
-          <a:p>
-            <a:pPr algn="ctr"/>
-            <a:r>
-              <a:rPr sz="1100" b="1" i="0">
-                <a:solidFill>
-                  <a:srgbClr val="FFFFFF"/>
-                </a:solidFill>
-              </a:rPr>
-              <a:t>1 → 3 months</a:t>
-            </a:r>
-          </a:p>
-        </p:txBody>
-      </p:sp>
-      <p:sp>
-        <p:nvSpPr>
-          <p:cNvPr id="15" name="TextBox 14"/>
-          <p:cNvSpPr txBox="1"/>
-          <p:nvPr/>
-        </p:nvSpPr>
-        <p:spPr>
-          <a:xfrm>
-            <a:off x="457200" y="2596896"/>
-            <a:ext cx="1600200" cy="457200"/>
-          </a:xfrm>
-          <a:prstGeom prst="rect">
-            <a:avLst/>
-          </a:prstGeom>
-          <a:noFill/>
-        </p:spPr>
-        <p:txBody>
-          <a:bodyPr wrap="square" anchor="t">
-            <a:spAutoFit/>
-          </a:bodyPr>
-          <a:lstStyle/>
-          <a:p>
-            <a:pPr algn="ctr"/>
-            <a:r>
-              <a:rPr sz="1000" b="0" i="0">
-                <a:solidFill>
-                  <a:srgbClr val="FFFFFF"/>
-                </a:solidFill>
-              </a:rPr>
-              <a:t>HITL: 100 %</a:t>
-            </a:r>
-          </a:p>
-        </p:txBody>
-      </p:sp>
-      <p:sp>
-        <p:nvSpPr>
-          <p:cNvPr id="16" name="TextBox 15"/>
-          <p:cNvSpPr txBox="1"/>
-          <p:nvPr/>
-        </p:nvSpPr>
-        <p:spPr>
-          <a:xfrm>
-            <a:off x="2194560" y="2185416"/>
-            <a:ext cx="9326880" cy="365760"/>
-          </a:xfrm>
-          <a:prstGeom prst="rect">
-            <a:avLst/>
-          </a:prstGeom>
-          <a:noFill/>
-        </p:spPr>
-        <p:txBody>
-          <a:bodyPr wrap="square" anchor="t">
-            <a:spAutoFit/>
-          </a:bodyPr>
-          <a:lstStyle/>
-          <a:p>
-            <a:pPr algn="l"/>
-            <a:r>
-              <a:rPr sz="1400" b="1" i="0">
-                <a:solidFill>
-                  <a:srgbClr val="041E42"/>
-                </a:solidFill>
-              </a:rPr>
-              <a:t>Automate the retrain loop</a:t>
-            </a:r>
-          </a:p>
-        </p:txBody>
-      </p:sp>
-      <p:sp>
-        <p:nvSpPr>
-          <p:cNvPr id="17" name="TextBox 16"/>
-          <p:cNvSpPr txBox="1"/>
-          <p:nvPr/>
-        </p:nvSpPr>
-        <p:spPr>
-          <a:xfrm>
-            <a:off x="2194560" y="2551176"/>
-            <a:ext cx="9326880" cy="594360"/>
-          </a:xfrm>
-          <a:prstGeom prst="rect">
-            <a:avLst/>
-          </a:prstGeom>
-          <a:noFill/>
-        </p:spPr>
-        <p:txBody>
-          <a:bodyPr wrap="square" anchor="t">
-            <a:spAutoFit/>
-          </a:bodyPr>
-          <a:lstStyle/>
-          <a:p>
-            <a:pPr algn="l"/>
-            <a:r>
-              <a:rPr sz="1050" b="0" i="0">
-                <a:solidFill>
-                  <a:srgbClr val="333333"/>
-                </a:solidFill>
-              </a:rPr>
-              <a:t>Wire the monthly ModernBERT retrain into a Cron / Airflow job with an OOF-F1 promotion gate — new checkpoints ship only when they beat the current one on held-out folds.</a:t>
-            </a:r>
-          </a:p>
-        </p:txBody>
-      </p:sp>
-      <p:sp>
-        <p:nvSpPr>
-          <p:cNvPr id="18" name="Rectangle 17"/>
-          <p:cNvSpPr/>
-          <p:nvPr/>
-        </p:nvSpPr>
-        <p:spPr>
-          <a:xfrm>
-            <a:off x="457200" y="3227832"/>
-            <a:ext cx="11247120" cy="1051560"/>
-          </a:xfrm>
-          <a:prstGeom prst="rect">
-            <a:avLst/>
-          </a:prstGeom>
-          <a:solidFill>
-            <a:srgbClr val="F5F5F5"/>
-          </a:solidFill>
-          <a:ln>
-            <a:solidFill>
-              <a:srgbClr val="7C3AED"/>
-            </a:solidFill>
-          </a:ln>
-          <a:effectLst/>
-        </p:spPr>
-        <p:style>
-          <a:lnRef idx="1">
-            <a:schemeClr val="accent1"/>
-          </a:lnRef>
-          <a:fillRef idx="3">
-            <a:schemeClr val="accent1"/>
-          </a:fillRef>
-          <a:effectRef idx="2">
-            <a:schemeClr val="accent1"/>
-          </a:effectRef>
-          <a:fontRef idx="minor">
-            <a:schemeClr val="lt1"/>
-          </a:fontRef>
-        </p:style>
-        <p:txBody>
-          <a:bodyPr rtlCol="0" anchor="ctr"/>
-          <a:lstStyle/>
-          <a:p>
-            <a:pPr algn="ctr"/>
-          </a:p>
-        </p:txBody>
-      </p:sp>
-      <p:sp>
-        <p:nvSpPr>
-          <p:cNvPr id="19" name="Rectangle 18"/>
-          <p:cNvSpPr/>
-          <p:nvPr/>
-        </p:nvSpPr>
-        <p:spPr>
-          <a:xfrm>
-            <a:off x="457200" y="3227832"/>
-            <a:ext cx="1600200" cy="1051560"/>
-          </a:xfrm>
-          <a:prstGeom prst="rect">
-            <a:avLst/>
-          </a:prstGeom>
-          <a:solidFill>
-            <a:srgbClr val="7C3AED"/>
-          </a:solidFill>
-          <a:ln>
-            <a:noFill/>
-          </a:ln>
-          <a:effectLst/>
-        </p:spPr>
-        <p:style>
-          <a:lnRef idx="1">
-            <a:schemeClr val="accent1"/>
-          </a:lnRef>
-          <a:fillRef idx="3">
-            <a:schemeClr val="accent1"/>
-          </a:fillRef>
-          <a:effectRef idx="2">
-            <a:schemeClr val="accent1"/>
-          </a:effectRef>
-          <a:fontRef idx="minor">
-            <a:schemeClr val="lt1"/>
-          </a:fontRef>
-        </p:style>
-        <p:txBody>
-          <a:bodyPr rtlCol="0" anchor="ctr"/>
-          <a:lstStyle/>
-          <a:p>
-            <a:pPr algn="ctr"/>
-          </a:p>
-        </p:txBody>
-      </p:sp>
-      <p:sp>
-        <p:nvSpPr>
-          <p:cNvPr id="20" name="TextBox 19"/>
-          <p:cNvSpPr txBox="1"/>
-          <p:nvPr/>
-        </p:nvSpPr>
-        <p:spPr>
-          <a:xfrm>
-            <a:off x="457200" y="3374136"/>
-            <a:ext cx="1600200" cy="365760"/>
-          </a:xfrm>
-          <a:prstGeom prst="rect">
-            <a:avLst/>
-          </a:prstGeom>
-          <a:noFill/>
-        </p:spPr>
-        <p:txBody>
-          <a:bodyPr wrap="square" anchor="t">
-            <a:spAutoFit/>
-          </a:bodyPr>
-          <a:lstStyle/>
-          <a:p>
-            <a:pPr algn="ctr"/>
-            <a:r>
-              <a:rPr sz="1100" b="1" i="0">
-                <a:solidFill>
-                  <a:srgbClr val="FFFFFF"/>
-                </a:solidFill>
-              </a:rPr>
-              <a:t>3 → 6 months</a:t>
-            </a:r>
-          </a:p>
-        </p:txBody>
-      </p:sp>
-      <p:sp>
-        <p:nvSpPr>
-          <p:cNvPr id="21" name="TextBox 20"/>
-          <p:cNvSpPr txBox="1"/>
-          <p:nvPr/>
-        </p:nvSpPr>
-        <p:spPr>
-          <a:xfrm>
-            <a:off x="457200" y="3730752"/>
-            <a:ext cx="1600200" cy="457200"/>
-          </a:xfrm>
-          <a:prstGeom prst="rect">
-            <a:avLst/>
-          </a:prstGeom>
-          <a:noFill/>
-        </p:spPr>
-        <p:txBody>
-          <a:bodyPr wrap="square" anchor="t">
-            <a:spAutoFit/>
-          </a:bodyPr>
-          <a:lstStyle/>
-          <a:p>
-            <a:pPr algn="ctr"/>
-            <a:r>
-              <a:rPr sz="1000" b="0" i="0">
-                <a:solidFill>
-                  <a:srgbClr val="FFFFFF"/>
-                </a:solidFill>
-              </a:rPr>
-              <a:t>HITL: ~80 %</a:t>
-            </a:r>
-          </a:p>
-        </p:txBody>
-      </p:sp>
-      <p:sp>
-        <p:nvSpPr>
-          <p:cNvPr id="22" name="TextBox 21"/>
-          <p:cNvSpPr txBox="1"/>
-          <p:nvPr/>
-        </p:nvSpPr>
-        <p:spPr>
-          <a:xfrm>
-            <a:off x="2194560" y="3319272"/>
-            <a:ext cx="9326880" cy="365760"/>
-          </a:xfrm>
-          <a:prstGeom prst="rect">
-            <a:avLst/>
-          </a:prstGeom>
-          <a:noFill/>
-        </p:spPr>
-        <p:txBody>
-          <a:bodyPr wrap="square" anchor="t">
-            <a:spAutoFit/>
-          </a:bodyPr>
-          <a:lstStyle/>
-          <a:p>
-            <a:pPr algn="l"/>
-            <a:r>
-              <a:rPr sz="1400" b="1" i="0">
-                <a:solidFill>
-                  <a:srgbClr val="041E42"/>
-                </a:solidFill>
-              </a:rPr>
-              <a:t>Walmart-trained model + shared DB</a:t>
-            </a:r>
-          </a:p>
-        </p:txBody>
-      </p:sp>
-      <p:sp>
-        <p:nvSpPr>
-          <p:cNvPr id="23" name="TextBox 22"/>
-          <p:cNvSpPr txBox="1"/>
-          <p:nvPr/>
-        </p:nvSpPr>
-        <p:spPr>
-          <a:xfrm>
-            <a:off x="2194560" y="3685032"/>
-            <a:ext cx="9326880" cy="594360"/>
-          </a:xfrm>
-          <a:prstGeom prst="rect">
-            <a:avLst/>
-          </a:prstGeom>
-          <a:noFill/>
-        </p:spPr>
-        <p:txBody>
-          <a:bodyPr wrap="square" anchor="t">
-            <a:spAutoFit/>
-          </a:bodyPr>
-          <a:lstStyle/>
-          <a:p>
-            <a:pPr algn="l"/>
-            <a:r>
-              <a:rPr sz="1050" b="0" i="0">
-                <a:solidFill>
-                  <a:srgbClr val="333333"/>
-                </a:solidFill>
-              </a:rPr>
-              <a:t>Fine-tune Mistral 7B on our own posted-reply corpus  →  a Walmart-trained replier that drops the paid GPT-4o dependency, runs fully in-house, and can be self-hosted.  Move the feedback table to a shared managed database so multiple analysts can work concurrently.</a:t>
-            </a:r>
-          </a:p>
-        </p:txBody>
-      </p:sp>
-      <p:sp>
-        <p:nvSpPr>
-          <p:cNvPr id="24" name="Rectangle 23"/>
-          <p:cNvSpPr/>
-          <p:nvPr/>
-        </p:nvSpPr>
-        <p:spPr>
-          <a:xfrm>
-            <a:off x="457200" y="4361688"/>
-            <a:ext cx="11247120" cy="1051560"/>
-          </a:xfrm>
-          <a:prstGeom prst="rect">
-            <a:avLst/>
-          </a:prstGeom>
-          <a:solidFill>
-            <a:srgbClr val="F5F5F5"/>
+            <a:srgbClr val="FEF3C7"/>
           </a:solidFill>
           <a:ln>
             <a:solidFill>
@@ -18858,194 +18469,146 @@
       </p:sp>
       <p:sp>
         <p:nvSpPr>
-          <p:cNvPr id="25" name="Rectangle 24"/>
+          <p:cNvPr id="10" name="TextBox 9"/>
+          <p:cNvSpPr txBox="1"/>
+          <p:nvPr/>
+        </p:nvSpPr>
+        <p:spPr>
+          <a:xfrm>
+            <a:off x="6355080" y="1097280"/>
+            <a:ext cx="5212080" cy="365760"/>
+          </a:xfrm>
+          <a:prstGeom prst="rect">
+            <a:avLst/>
+          </a:prstGeom>
+          <a:noFill/>
+        </p:spPr>
+        <p:txBody>
+          <a:bodyPr wrap="square" anchor="t">
+            <a:spAutoFit/>
+          </a:bodyPr>
+          <a:lstStyle/>
+          <a:p>
+            <a:pPr algn="l"/>
+            <a:r>
+              <a:rPr sz="1300" b="1" i="0">
+                <a:solidFill>
+                  <a:srgbClr val="D97706"/>
+                </a:solidFill>
+              </a:rPr>
+              <a:t>WHAT'S STILL OPEN  (honest)</a:t>
+            </a:r>
+          </a:p>
+        </p:txBody>
+      </p:sp>
+      <p:sp>
+        <p:nvSpPr>
+          <p:cNvPr id="11" name="TextBox 10"/>
+          <p:cNvSpPr txBox="1"/>
+          <p:nvPr/>
+        </p:nvSpPr>
+        <p:spPr>
+          <a:xfrm>
+            <a:off x="6355080" y="1508760"/>
+            <a:ext cx="5212080" cy="3794760"/>
+          </a:xfrm>
+          <a:prstGeom prst="rect">
+            <a:avLst/>
+          </a:prstGeom>
+          <a:noFill/>
+        </p:spPr>
+        <p:txBody>
+          <a:bodyPr wrap="square">
+            <a:spAutoFit/>
+          </a:bodyPr>
+          <a:lstStyle/>
+          <a:p>
+            <a:pPr>
+              <a:spcAft>
+                <a:spcPts val="400"/>
+              </a:spcAft>
+            </a:pPr>
+            <a:r>
+              <a:rPr sz="1100" b="0">
+                <a:solidFill>
+                  <a:srgbClr val="333333"/>
+                </a:solidFill>
+              </a:rPr>
+              <a:t>•  200-post gold set is small.  Numbers are OOF-CV, but a bigger blind held-out set is needed before I'd claim generalisation.</a:t>
+            </a:r>
+          </a:p>
+          <a:p>
+            <a:pPr>
+              <a:spcAft>
+                <a:spcPts val="400"/>
+              </a:spcAft>
+            </a:pPr>
+            <a:r>
+              <a:rPr sz="1100" b="0">
+                <a:solidFill>
+                  <a:srgbClr val="333333"/>
+                </a:solidFill>
+              </a:rPr>
+              <a:t>•  Vision eval is 32 images  —  enough to sanity-check the mechanism, not enough to claim production-grade quality.</a:t>
+            </a:r>
+          </a:p>
+          <a:p>
+            <a:pPr>
+              <a:spcAft>
+                <a:spcPts val="400"/>
+              </a:spcAft>
+            </a:pPr>
+            <a:r>
+              <a:rPr sz="1100" b="0">
+                <a:solidFill>
+                  <a:srgbClr val="333333"/>
+                </a:solidFill>
+              </a:rPr>
+              <a:t>•  Long bucket has only 7 posts and they are all negative-class  —  7/7 correct is evidence the truncation ceiling is gone, not proof of long-text mastery.</a:t>
+            </a:r>
+          </a:p>
+          <a:p>
+            <a:pPr>
+              <a:spcAft>
+                <a:spcPts val="400"/>
+              </a:spcAft>
+            </a:pPr>
+            <a:r>
+              <a:rPr sz="1100" b="0">
+                <a:solidFill>
+                  <a:srgbClr val="333333"/>
+                </a:solidFill>
+              </a:rPr>
+              <a:t>•  Reply drafts still need an analyst edit  —  we track edit-distance but haven't shown it dropping consistently yet.</a:t>
+            </a:r>
+          </a:p>
+          <a:p>
+            <a:pPr>
+              <a:spcAft>
+                <a:spcPts val="400"/>
+              </a:spcAft>
+            </a:pPr>
+            <a:r>
+              <a:rPr sz="1100" b="0">
+                <a:solidFill>
+                  <a:srgbClr val="333333"/>
+                </a:solidFill>
+              </a:rPr>
+              <a:t>•  Everything runs on one Mac. Multi-analyst concurrency and retraining automation aren't done  —  in the roadmap on next slide.</a:t>
+            </a:r>
+          </a:p>
+        </p:txBody>
+      </p:sp>
+      <p:sp>
+        <p:nvSpPr>
+          <p:cNvPr id="12" name="Rectangle 11"/>
           <p:cNvSpPr/>
           <p:nvPr/>
         </p:nvSpPr>
         <p:spPr>
           <a:xfrm>
-            <a:off x="457200" y="4361688"/>
-            <a:ext cx="1600200" cy="1051560"/>
-          </a:xfrm>
-          <a:prstGeom prst="rect">
-            <a:avLst/>
-          </a:prstGeom>
-          <a:solidFill>
-            <a:srgbClr val="D97706"/>
-          </a:solidFill>
-          <a:ln>
-            <a:noFill/>
-          </a:ln>
-          <a:effectLst/>
-        </p:spPr>
-        <p:style>
-          <a:lnRef idx="1">
-            <a:schemeClr val="accent1"/>
-          </a:lnRef>
-          <a:fillRef idx="3">
-            <a:schemeClr val="accent1"/>
-          </a:fillRef>
-          <a:effectRef idx="2">
-            <a:schemeClr val="accent1"/>
-          </a:effectRef>
-          <a:fontRef idx="minor">
-            <a:schemeClr val="lt1"/>
-          </a:fontRef>
-        </p:style>
-        <p:txBody>
-          <a:bodyPr rtlCol="0" anchor="ctr"/>
-          <a:lstStyle/>
-          <a:p>
-            <a:pPr algn="ctr"/>
-          </a:p>
-        </p:txBody>
-      </p:sp>
-      <p:sp>
-        <p:nvSpPr>
-          <p:cNvPr id="26" name="TextBox 25"/>
-          <p:cNvSpPr txBox="1"/>
-          <p:nvPr/>
-        </p:nvSpPr>
-        <p:spPr>
-          <a:xfrm>
-            <a:off x="457200" y="4507992"/>
-            <a:ext cx="1600200" cy="365760"/>
-          </a:xfrm>
-          <a:prstGeom prst="rect">
-            <a:avLst/>
-          </a:prstGeom>
-          <a:noFill/>
-        </p:spPr>
-        <p:txBody>
-          <a:bodyPr wrap="square" anchor="t">
-            <a:spAutoFit/>
-          </a:bodyPr>
-          <a:lstStyle/>
-          <a:p>
-            <a:pPr algn="ctr"/>
-            <a:r>
-              <a:rPr sz="1100" b="1" i="0">
-                <a:solidFill>
-                  <a:srgbClr val="FFFFFF"/>
-                </a:solidFill>
-              </a:rPr>
-              <a:t>6 → 12 months</a:t>
-            </a:r>
-          </a:p>
-        </p:txBody>
-      </p:sp>
-      <p:sp>
-        <p:nvSpPr>
-          <p:cNvPr id="27" name="TextBox 26"/>
-          <p:cNvSpPr txBox="1"/>
-          <p:nvPr/>
-        </p:nvSpPr>
-        <p:spPr>
-          <a:xfrm>
-            <a:off x="457200" y="4864608"/>
-            <a:ext cx="1600200" cy="457200"/>
-          </a:xfrm>
-          <a:prstGeom prst="rect">
-            <a:avLst/>
-          </a:prstGeom>
-          <a:noFill/>
-        </p:spPr>
-        <p:txBody>
-          <a:bodyPr wrap="square" anchor="t">
-            <a:spAutoFit/>
-          </a:bodyPr>
-          <a:lstStyle/>
-          <a:p>
-            <a:pPr algn="ctr"/>
-            <a:r>
-              <a:rPr sz="1000" b="0" i="0">
-                <a:solidFill>
-                  <a:srgbClr val="FFFFFF"/>
-                </a:solidFill>
-              </a:rPr>
-              <a:t>HITL: ~30 %  →  eventually 0 %</a:t>
-            </a:r>
-          </a:p>
-        </p:txBody>
-      </p:sp>
-      <p:sp>
-        <p:nvSpPr>
-          <p:cNvPr id="28" name="TextBox 27"/>
-          <p:cNvSpPr txBox="1"/>
-          <p:nvPr/>
-        </p:nvSpPr>
-        <p:spPr>
-          <a:xfrm>
-            <a:off x="2194560" y="4453128"/>
-            <a:ext cx="9326880" cy="365760"/>
-          </a:xfrm>
-          <a:prstGeom prst="rect">
-            <a:avLst/>
-          </a:prstGeom>
-          <a:noFill/>
-        </p:spPr>
-        <p:txBody>
-          <a:bodyPr wrap="square" anchor="t">
-            <a:spAutoFit/>
-          </a:bodyPr>
-          <a:lstStyle/>
-          <a:p>
-            <a:pPr algn="l"/>
-            <a:r>
-              <a:rPr sz="1400" b="1" i="0">
-                <a:solidFill>
-                  <a:srgbClr val="041E42"/>
-                </a:solidFill>
-              </a:rPr>
-              <a:t>Confidence-gated auto-reply</a:t>
-            </a:r>
-          </a:p>
-        </p:txBody>
-      </p:sp>
-      <p:sp>
-        <p:nvSpPr>
-          <p:cNvPr id="29" name="TextBox 28"/>
-          <p:cNvSpPr txBox="1"/>
-          <p:nvPr/>
-        </p:nvSpPr>
-        <p:spPr>
-          <a:xfrm>
-            <a:off x="2194560" y="4818888"/>
-            <a:ext cx="9326880" cy="594360"/>
-          </a:xfrm>
-          <a:prstGeom prst="rect">
-            <a:avLst/>
-          </a:prstGeom>
-          <a:noFill/>
-        </p:spPr>
-        <p:txBody>
-          <a:bodyPr wrap="square" anchor="t">
-            <a:spAutoFit/>
-          </a:bodyPr>
-          <a:lstStyle/>
-          <a:p>
-            <a:pPr algn="l"/>
-            <a:r>
-              <a:rPr sz="1050" b="0" i="0">
-                <a:solidFill>
-                  <a:srgbClr val="333333"/>
-                </a:solidFill>
-              </a:rPr>
-              <a:t>Introduce a confidence gate on the reply generator: top-confidence drafts are queued for auto-send and the analyst only reviews the mid- and low-confidence tail.  As agreement stays high, gradually raise the auto-send threshold — HITL winds down to sampling / audit only.</a:t>
-            </a:r>
-          </a:p>
-        </p:txBody>
-      </p:sp>
-      <p:sp>
-        <p:nvSpPr>
-          <p:cNvPr id="30" name="Rectangle 29"/>
-          <p:cNvSpPr/>
-          <p:nvPr/>
-        </p:nvSpPr>
-        <p:spPr>
-          <a:xfrm>
-            <a:off x="457200" y="5440680"/>
-            <a:ext cx="11247120" cy="868680"/>
+            <a:off x="457200" y="5577840"/>
+            <a:ext cx="11247120" cy="822960"/>
           </a:xfrm>
           <a:prstGeom prst="rect">
             <a:avLst/>
@@ -19084,13 +18647,13 @@
       </p:sp>
       <p:sp>
         <p:nvSpPr>
-          <p:cNvPr id="31" name="TextBox 30"/>
-          <p:cNvSpPr txBox="1"/>
-          <p:nvPr/>
-        </p:nvSpPr>
-        <p:spPr>
-          <a:xfrm>
-            <a:off x="640080" y="5532120"/>
+          <p:cNvPr id="13" name="TextBox 12"/>
+          <p:cNvSpPr txBox="1"/>
+          <p:nvPr/>
+        </p:nvSpPr>
+        <p:spPr>
+          <a:xfrm>
+            <a:off x="640080" y="5669280"/>
             <a:ext cx="10972800" cy="320040"/>
           </a:xfrm>
           <a:prstGeom prst="rect">
@@ -19111,21 +18674,21 @@
                   <a:srgbClr val="0071DC"/>
                 </a:solidFill>
               </a:rPr>
-              <a:t>GUIDING PRINCIPLE</a:t>
-            </a:r>
-          </a:p>
-        </p:txBody>
-      </p:sp>
-      <p:sp>
-        <p:nvSpPr>
-          <p:cNvPr id="32" name="TextBox 31"/>
-          <p:cNvSpPr txBox="1"/>
-          <p:nvPr/>
-        </p:nvSpPr>
-        <p:spPr>
-          <a:xfrm>
-            <a:off x="640080" y="5852160"/>
-            <a:ext cx="10972800" cy="457200"/>
+              <a:t>THE TAKEAWAY</a:t>
+            </a:r>
+          </a:p>
+        </p:txBody>
+      </p:sp>
+      <p:sp>
+        <p:nvSpPr>
+          <p:cNvPr id="14" name="TextBox 13"/>
+          <p:cNvSpPr txBox="1"/>
+          <p:nvPr/>
+        </p:nvSpPr>
+        <p:spPr>
+          <a:xfrm>
+            <a:off x="640080" y="5989320"/>
+            <a:ext cx="10972800" cy="365760"/>
           </a:xfrm>
           <a:prstGeom prst="rect">
             <a:avLst/>
@@ -19145,14 +18708,14 @@
                   <a:srgbClr val="333333"/>
                 </a:solidFill>
               </a:rPr>
-              <a:t>HITL is the ladder, not the ceiling — every stage produces the training signal that lets the next stage automate more.  Each horizon is admissible only when the previous one is measurably successful.</a:t>
-            </a:r>
-          </a:p>
-        </p:txBody>
-      </p:sp>
-      <p:sp>
-        <p:nvSpPr>
-          <p:cNvPr id="33" name="TextBox 32"/>
+              <a:t>Mechanism-level wins are what carry the argument; sample-size caveats are what the next horizon of work has to close.</a:t>
+            </a:r>
+          </a:p>
+        </p:txBody>
+      </p:sp>
+      <p:sp>
+        <p:nvSpPr>
+          <p:cNvPr id="15" name="TextBox 14"/>
           <p:cNvSpPr txBox="1"/>
           <p:nvPr/>
         </p:nvSpPr>
@@ -19186,7 +18749,7 @@
       </p:sp>
       <p:sp>
         <p:nvSpPr>
-          <p:cNvPr id="34" name="TextBox 33"/>
+          <p:cNvPr id="16" name="TextBox 15"/>
           <p:cNvSpPr txBox="1"/>
           <p:nvPr/>
         </p:nvSpPr>
@@ -19213,7 +18776,7 @@
                   <a:srgbClr val="666666"/>
                 </a:solidFill>
               </a:rPr>
-              <a:t>20 / 23</a:t>
+              <a:t>20 / 24</a:t>
             </a:r>
           </a:p>
         </p:txBody>
@@ -19309,7 +18872,7 @@
                   <a:srgbClr val="FFFFFF"/>
                 </a:solidFill>
               </a:rPr>
-              <a:t>Future Work  —  Track 2  ·  Bilingual   +   Track 3  ·  Multi-Platform</a:t>
+              <a:t>Future Work  —  Track 1  ·  HITL Reduction (4 Horizons)</a:t>
             </a:r>
           </a:p>
         </p:txBody>
@@ -19343,7 +18906,7 @@
                   <a:srgbClr val="E8F4FD"/>
                 </a:solidFill>
               </a:rPr>
-              <a:t>The other two tracks that widen the pipeline's coverage while Track 1 winds HITL down</a:t>
+              <a:t>One of three tracks:  Track 1 HITL  ·  Track 2 Bilingual  ·  Track 3 Multi-Platform  (Tracks 2 &amp; 3 on next slide)</a:t>
             </a:r>
           </a:p>
         </p:txBody>
@@ -19401,13 +18964,59 @@
         <p:spPr>
           <a:xfrm>
             <a:off x="457200" y="960120"/>
-            <a:ext cx="5532120" cy="502920"/>
+            <a:ext cx="11247120" cy="1051560"/>
           </a:xfrm>
           <a:prstGeom prst="rect">
             <a:avLst/>
           </a:prstGeom>
           <a:solidFill>
-            <a:srgbClr val="0071DC"/>
+            <a:srgbClr val="F5F5F5"/>
+          </a:solidFill>
+          <a:ln>
+            <a:solidFill>
+              <a:srgbClr val="10B981"/>
+            </a:solidFill>
+          </a:ln>
+          <a:effectLst/>
+        </p:spPr>
+        <p:style>
+          <a:lnRef idx="1">
+            <a:schemeClr val="accent1"/>
+          </a:lnRef>
+          <a:fillRef idx="3">
+            <a:schemeClr val="accent1"/>
+          </a:fillRef>
+          <a:effectRef idx="2">
+            <a:schemeClr val="accent1"/>
+          </a:effectRef>
+          <a:fontRef idx="minor">
+            <a:schemeClr val="lt1"/>
+          </a:fontRef>
+        </p:style>
+        <p:txBody>
+          <a:bodyPr rtlCol="0" anchor="ctr"/>
+          <a:lstStyle/>
+          <a:p>
+            <a:pPr algn="ctr"/>
+          </a:p>
+        </p:txBody>
+      </p:sp>
+      <p:sp>
+        <p:nvSpPr>
+          <p:cNvPr id="7" name="Rectangle 6"/>
+          <p:cNvSpPr/>
+          <p:nvPr/>
+        </p:nvSpPr>
+        <p:spPr>
+          <a:xfrm>
+            <a:off x="457200" y="960120"/>
+            <a:ext cx="1600200" cy="1051560"/>
+          </a:xfrm>
+          <a:prstGeom prst="rect">
+            <a:avLst/>
+          </a:prstGeom>
+          <a:solidFill>
+            <a:srgbClr val="10B981"/>
           </a:solidFill>
           <a:ln>
             <a:noFill/>
@@ -19438,14 +19047,82 @@
       </p:sp>
       <p:sp>
         <p:nvSpPr>
-          <p:cNvPr id="7" name="TextBox 6"/>
-          <p:cNvSpPr txBox="1"/>
-          <p:nvPr/>
-        </p:nvSpPr>
-        <p:spPr>
-          <a:xfrm>
-            <a:off x="594360" y="1005840"/>
-            <a:ext cx="5257800" cy="411480"/>
+          <p:cNvPr id="8" name="TextBox 7"/>
+          <p:cNvSpPr txBox="1"/>
+          <p:nvPr/>
+        </p:nvSpPr>
+        <p:spPr>
+          <a:xfrm>
+            <a:off x="457200" y="1106424"/>
+            <a:ext cx="1600200" cy="365760"/>
+          </a:xfrm>
+          <a:prstGeom prst="rect">
+            <a:avLst/>
+          </a:prstGeom>
+          <a:noFill/>
+        </p:spPr>
+        <p:txBody>
+          <a:bodyPr wrap="square" anchor="t">
+            <a:spAutoFit/>
+          </a:bodyPr>
+          <a:lstStyle/>
+          <a:p>
+            <a:pPr algn="ctr"/>
+            <a:r>
+              <a:rPr sz="1100" b="1" i="0">
+                <a:solidFill>
+                  <a:srgbClr val="FFFFFF"/>
+                </a:solidFill>
+              </a:rPr>
+              <a:t>Now → 1 month</a:t>
+            </a:r>
+          </a:p>
+        </p:txBody>
+      </p:sp>
+      <p:sp>
+        <p:nvSpPr>
+          <p:cNvPr id="9" name="TextBox 8"/>
+          <p:cNvSpPr txBox="1"/>
+          <p:nvPr/>
+        </p:nvSpPr>
+        <p:spPr>
+          <a:xfrm>
+            <a:off x="457200" y="1463040"/>
+            <a:ext cx="1600200" cy="457200"/>
+          </a:xfrm>
+          <a:prstGeom prst="rect">
+            <a:avLst/>
+          </a:prstGeom>
+          <a:noFill/>
+        </p:spPr>
+        <p:txBody>
+          <a:bodyPr wrap="square" anchor="t">
+            <a:spAutoFit/>
+          </a:bodyPr>
+          <a:lstStyle/>
+          <a:p>
+            <a:pPr algn="ctr"/>
+            <a:r>
+              <a:rPr sz="1000" b="0" i="0">
+                <a:solidFill>
+                  <a:srgbClr val="FFFFFF"/>
+                </a:solidFill>
+              </a:rPr>
+              <a:t>HITL: 100 %</a:t>
+            </a:r>
+          </a:p>
+        </p:txBody>
+      </p:sp>
+      <p:sp>
+        <p:nvSpPr>
+          <p:cNvPr id="10" name="TextBox 9"/>
+          <p:cNvSpPr txBox="1"/>
+          <p:nvPr/>
+        </p:nvSpPr>
+        <p:spPr>
+          <a:xfrm>
+            <a:off x="2194560" y="1051560"/>
+            <a:ext cx="9326880" cy="365760"/>
           </a:xfrm>
           <a:prstGeom prst="rect">
             <a:avLst/>
@@ -19462,24 +19139,58 @@
             <a:r>
               <a:rPr sz="1400" b="1" i="0">
                 <a:solidFill>
-                  <a:srgbClr val="FFFFFF"/>
-                </a:solidFill>
-              </a:rPr>
-              <a:t>TRACK 2  ·  BILINGUAL  →  MULTILINGUAL</a:t>
-            </a:r>
-          </a:p>
-        </p:txBody>
-      </p:sp>
-      <p:sp>
-        <p:nvSpPr>
-          <p:cNvPr id="8" name="Rectangle 7"/>
+                  <a:srgbClr val="041E42"/>
+                </a:solidFill>
+              </a:rPr>
+              <a:t>Grow the gold set</a:t>
+            </a:r>
+          </a:p>
+        </p:txBody>
+      </p:sp>
+      <p:sp>
+        <p:nvSpPr>
+          <p:cNvPr id="11" name="TextBox 10"/>
+          <p:cNvSpPr txBox="1"/>
+          <p:nvPr/>
+        </p:nvSpPr>
+        <p:spPr>
+          <a:xfrm>
+            <a:off x="2194560" y="1417320"/>
+            <a:ext cx="9326880" cy="594360"/>
+          </a:xfrm>
+          <a:prstGeom prst="rect">
+            <a:avLst/>
+          </a:prstGeom>
+          <a:noFill/>
+        </p:spPr>
+        <p:txBody>
+          <a:bodyPr wrap="square" anchor="t">
+            <a:spAutoFit/>
+          </a:bodyPr>
+          <a:lstStyle/>
+          <a:p>
+            <a:pPr algn="l"/>
+            <a:r>
+              <a:rPr sz="1050" b="0" i="0">
+                <a:solidFill>
+                  <a:srgbClr val="333333"/>
+                </a:solidFill>
+              </a:rPr>
+              <a:t>Grow the labelled gold set to ~500 posts using the HITL feedback the team is already producing; rerun 5-fold OOF to check the F1 delta.</a:t>
+            </a:r>
+          </a:p>
+        </p:txBody>
+      </p:sp>
+      <p:sp>
+        <p:nvSpPr>
+          <p:cNvPr id="12" name="Rectangle 11"/>
           <p:cNvSpPr/>
           <p:nvPr/>
         </p:nvSpPr>
         <p:spPr>
           <a:xfrm>
-            <a:off x="457200" y="1463040"/>
-            <a:ext cx="5532120" cy="5074920"/>
+            <a:off x="457200" y="2093976"/>
+            <a:ext cx="11247120" cy="1051560"/>
           </a:xfrm>
           <a:prstGeom prst="rect">
             <a:avLst/>
@@ -19518,14 +19229,126 @@
       </p:sp>
       <p:sp>
         <p:nvSpPr>
-          <p:cNvPr id="9" name="TextBox 8"/>
-          <p:cNvSpPr txBox="1"/>
-          <p:nvPr/>
-        </p:nvSpPr>
-        <p:spPr>
-          <a:xfrm>
-            <a:off x="640080" y="1554480"/>
-            <a:ext cx="5166360" cy="365760"/>
+          <p:cNvPr id="13" name="Rectangle 12"/>
+          <p:cNvSpPr/>
+          <p:nvPr/>
+        </p:nvSpPr>
+        <p:spPr>
+          <a:xfrm>
+            <a:off x="457200" y="2093976"/>
+            <a:ext cx="1600200" cy="1051560"/>
+          </a:xfrm>
+          <a:prstGeom prst="rect">
+            <a:avLst/>
+          </a:prstGeom>
+          <a:solidFill>
+            <a:srgbClr val="0071DC"/>
+          </a:solidFill>
+          <a:ln>
+            <a:noFill/>
+          </a:ln>
+          <a:effectLst/>
+        </p:spPr>
+        <p:style>
+          <a:lnRef idx="1">
+            <a:schemeClr val="accent1"/>
+          </a:lnRef>
+          <a:fillRef idx="3">
+            <a:schemeClr val="accent1"/>
+          </a:fillRef>
+          <a:effectRef idx="2">
+            <a:schemeClr val="accent1"/>
+          </a:effectRef>
+          <a:fontRef idx="minor">
+            <a:schemeClr val="lt1"/>
+          </a:fontRef>
+        </p:style>
+        <p:txBody>
+          <a:bodyPr rtlCol="0" anchor="ctr"/>
+          <a:lstStyle/>
+          <a:p>
+            <a:pPr algn="ctr"/>
+          </a:p>
+        </p:txBody>
+      </p:sp>
+      <p:sp>
+        <p:nvSpPr>
+          <p:cNvPr id="14" name="TextBox 13"/>
+          <p:cNvSpPr txBox="1"/>
+          <p:nvPr/>
+        </p:nvSpPr>
+        <p:spPr>
+          <a:xfrm>
+            <a:off x="457200" y="2240280"/>
+            <a:ext cx="1600200" cy="365760"/>
+          </a:xfrm>
+          <a:prstGeom prst="rect">
+            <a:avLst/>
+          </a:prstGeom>
+          <a:noFill/>
+        </p:spPr>
+        <p:txBody>
+          <a:bodyPr wrap="square" anchor="t">
+            <a:spAutoFit/>
+          </a:bodyPr>
+          <a:lstStyle/>
+          <a:p>
+            <a:pPr algn="ctr"/>
+            <a:r>
+              <a:rPr sz="1100" b="1" i="0">
+                <a:solidFill>
+                  <a:srgbClr val="FFFFFF"/>
+                </a:solidFill>
+              </a:rPr>
+              <a:t>1 → 3 months</a:t>
+            </a:r>
+          </a:p>
+        </p:txBody>
+      </p:sp>
+      <p:sp>
+        <p:nvSpPr>
+          <p:cNvPr id="15" name="TextBox 14"/>
+          <p:cNvSpPr txBox="1"/>
+          <p:nvPr/>
+        </p:nvSpPr>
+        <p:spPr>
+          <a:xfrm>
+            <a:off x="457200" y="2596896"/>
+            <a:ext cx="1600200" cy="457200"/>
+          </a:xfrm>
+          <a:prstGeom prst="rect">
+            <a:avLst/>
+          </a:prstGeom>
+          <a:noFill/>
+        </p:spPr>
+        <p:txBody>
+          <a:bodyPr wrap="square" anchor="t">
+            <a:spAutoFit/>
+          </a:bodyPr>
+          <a:lstStyle/>
+          <a:p>
+            <a:pPr algn="ctr"/>
+            <a:r>
+              <a:rPr sz="1000" b="0" i="0">
+                <a:solidFill>
+                  <a:srgbClr val="FFFFFF"/>
+                </a:solidFill>
+              </a:rPr>
+              <a:t>HITL: 100 %</a:t>
+            </a:r>
+          </a:p>
+        </p:txBody>
+      </p:sp>
+      <p:sp>
+        <p:nvSpPr>
+          <p:cNvPr id="16" name="TextBox 15"/>
+          <p:cNvSpPr txBox="1"/>
+          <p:nvPr/>
+        </p:nvSpPr>
+        <p:spPr>
+          <a:xfrm>
+            <a:off x="2194560" y="2185416"/>
+            <a:ext cx="9326880" cy="365760"/>
           </a:xfrm>
           <a:prstGeom prst="rect">
             <a:avLst/>
@@ -19540,319 +19363,93 @@
           <a:p>
             <a:pPr algn="l"/>
             <a:r>
+              <a:rPr sz="1400" b="1" i="0">
+                <a:solidFill>
+                  <a:srgbClr val="041E42"/>
+                </a:solidFill>
+              </a:rPr>
+              <a:t>Automate the retrain loop</a:t>
+            </a:r>
+          </a:p>
+        </p:txBody>
+      </p:sp>
+      <p:sp>
+        <p:nvSpPr>
+          <p:cNvPr id="17" name="TextBox 16"/>
+          <p:cNvSpPr txBox="1"/>
+          <p:nvPr/>
+        </p:nvSpPr>
+        <p:spPr>
+          <a:xfrm>
+            <a:off x="2194560" y="2551176"/>
+            <a:ext cx="9326880" cy="594360"/>
+          </a:xfrm>
+          <a:prstGeom prst="rect">
+            <a:avLst/>
+          </a:prstGeom>
+          <a:noFill/>
+        </p:spPr>
+        <p:txBody>
+          <a:bodyPr wrap="square" anchor="t">
+            <a:spAutoFit/>
+          </a:bodyPr>
+          <a:lstStyle/>
+          <a:p>
+            <a:pPr algn="l"/>
+            <a:r>
               <a:rPr sz="1050" b="0" i="0">
                 <a:solidFill>
                   <a:srgbClr val="333333"/>
                 </a:solidFill>
               </a:rPr>
-              <a:t>Why:  Indian retail subreddits are ~30 % of Walmart-family mentions but the current  langdetect  →  English-only  filter silently drops them.</a:t>
-            </a:r>
-          </a:p>
-        </p:txBody>
-      </p:sp>
-      <p:sp>
-        <p:nvSpPr>
-          <p:cNvPr id="10" name="TextBox 9"/>
-          <p:cNvSpPr txBox="1"/>
-          <p:nvPr/>
-        </p:nvSpPr>
-        <p:spPr>
-          <a:xfrm>
-            <a:off x="640080" y="1965960"/>
-            <a:ext cx="5166360" cy="274320"/>
-          </a:xfrm>
-          <a:prstGeom prst="rect">
-            <a:avLst/>
-          </a:prstGeom>
-          <a:noFill/>
-        </p:spPr>
-        <p:txBody>
-          <a:bodyPr wrap="square" anchor="t">
-            <a:spAutoFit/>
-          </a:bodyPr>
-          <a:lstStyle/>
-          <a:p>
-            <a:pPr algn="l"/>
-            <a:r>
-              <a:rPr sz="1150" b="1" i="0">
-                <a:solidFill>
-                  <a:srgbClr val="0071DC"/>
-                </a:solidFill>
-              </a:rPr>
-              <a:t>Concrete deliverables</a:t>
-            </a:r>
-          </a:p>
-        </p:txBody>
-      </p:sp>
-      <p:sp>
-        <p:nvSpPr>
-          <p:cNvPr id="11" name="TextBox 10"/>
-          <p:cNvSpPr txBox="1"/>
-          <p:nvPr/>
-        </p:nvSpPr>
-        <p:spPr>
-          <a:xfrm>
-            <a:off x="685800" y="2286000"/>
-            <a:ext cx="228600" cy="274320"/>
-          </a:xfrm>
-          <a:prstGeom prst="rect">
-            <a:avLst/>
-          </a:prstGeom>
-          <a:noFill/>
-        </p:spPr>
-        <p:txBody>
-          <a:bodyPr wrap="square" anchor="t">
-            <a:spAutoFit/>
-          </a:bodyPr>
-          <a:lstStyle/>
-          <a:p>
-            <a:pPr algn="l"/>
-            <a:r>
-              <a:rPr sz="1100" b="1" i="0">
-                <a:solidFill>
-                  <a:srgbClr val="0071DC"/>
-                </a:solidFill>
-              </a:rPr>
-              <a:t>•</a:t>
-            </a:r>
-          </a:p>
-        </p:txBody>
-      </p:sp>
-      <p:sp>
-        <p:nvSpPr>
-          <p:cNvPr id="12" name="TextBox 11"/>
-          <p:cNvSpPr txBox="1"/>
-          <p:nvPr/>
-        </p:nvSpPr>
-        <p:spPr>
-          <a:xfrm>
-            <a:off x="868680" y="2286000"/>
-            <a:ext cx="4983480" cy="777240"/>
-          </a:xfrm>
-          <a:prstGeom prst="rect">
-            <a:avLst/>
-          </a:prstGeom>
-          <a:noFill/>
-        </p:spPr>
-        <p:txBody>
-          <a:bodyPr wrap="square" anchor="t">
-            <a:spAutoFit/>
-          </a:bodyPr>
-          <a:lstStyle/>
-          <a:p>
-            <a:pPr algn="l"/>
-            <a:r>
-              <a:rPr sz="1000" b="0" i="0">
-                <a:solidFill>
-                  <a:srgbClr val="333333"/>
-                </a:solidFill>
-              </a:rPr>
-              <a:t>Extend  langdetect  to  hi + en  (later  ta / te / bn);  code-mixed 'Hinglish' handled with a mixed-script tokenizer.</a:t>
-            </a:r>
-          </a:p>
-        </p:txBody>
-      </p:sp>
-      <p:sp>
-        <p:nvSpPr>
-          <p:cNvPr id="13" name="TextBox 12"/>
-          <p:cNvSpPr txBox="1"/>
-          <p:nvPr/>
-        </p:nvSpPr>
-        <p:spPr>
-          <a:xfrm>
-            <a:off x="685800" y="3108960"/>
-            <a:ext cx="228600" cy="274320"/>
-          </a:xfrm>
-          <a:prstGeom prst="rect">
-            <a:avLst/>
-          </a:prstGeom>
-          <a:noFill/>
-        </p:spPr>
-        <p:txBody>
-          <a:bodyPr wrap="square" anchor="t">
-            <a:spAutoFit/>
-          </a:bodyPr>
-          <a:lstStyle/>
-          <a:p>
-            <a:pPr algn="l"/>
-            <a:r>
-              <a:rPr sz="1100" b="1" i="0">
-                <a:solidFill>
-                  <a:srgbClr val="0071DC"/>
-                </a:solidFill>
-              </a:rPr>
-              <a:t>•</a:t>
-            </a:r>
-          </a:p>
-        </p:txBody>
-      </p:sp>
-      <p:sp>
-        <p:nvSpPr>
-          <p:cNvPr id="14" name="TextBox 13"/>
-          <p:cNvSpPr txBox="1"/>
-          <p:nvPr/>
-        </p:nvSpPr>
-        <p:spPr>
-          <a:xfrm>
-            <a:off x="868680" y="3108960"/>
-            <a:ext cx="4983480" cy="777240"/>
-          </a:xfrm>
-          <a:prstGeom prst="rect">
-            <a:avLst/>
-          </a:prstGeom>
-          <a:noFill/>
-        </p:spPr>
-        <p:txBody>
-          <a:bodyPr wrap="square" anchor="t">
-            <a:spAutoFit/>
-          </a:bodyPr>
-          <a:lstStyle/>
-          <a:p>
-            <a:pPr algn="l"/>
-            <a:r>
-              <a:rPr sz="1000" b="0" i="0">
-                <a:solidFill>
-                  <a:srgbClr val="333333"/>
-                </a:solidFill>
-              </a:rPr>
-              <a:t>Ingestion-time translation via NLLB-200 (open-weights, 3.3 B) so downstream models stay English-only —  or —  fine-tune ModernBERT on native scripts.</a:t>
-            </a:r>
-          </a:p>
-        </p:txBody>
-      </p:sp>
-      <p:sp>
-        <p:nvSpPr>
-          <p:cNvPr id="15" name="TextBox 14"/>
-          <p:cNvSpPr txBox="1"/>
-          <p:nvPr/>
-        </p:nvSpPr>
-        <p:spPr>
-          <a:xfrm>
-            <a:off x="685800" y="3931920"/>
-            <a:ext cx="228600" cy="274320"/>
-          </a:xfrm>
-          <a:prstGeom prst="rect">
-            <a:avLst/>
-          </a:prstGeom>
-          <a:noFill/>
-        </p:spPr>
-        <p:txBody>
-          <a:bodyPr wrap="square" anchor="t">
-            <a:spAutoFit/>
-          </a:bodyPr>
-          <a:lstStyle/>
-          <a:p>
-            <a:pPr algn="l"/>
-            <a:r>
-              <a:rPr sz="1100" b="1" i="0">
-                <a:solidFill>
-                  <a:srgbClr val="0071DC"/>
-                </a:solidFill>
-              </a:rPr>
-              <a:t>•</a:t>
-            </a:r>
-          </a:p>
-        </p:txBody>
-      </p:sp>
-      <p:sp>
-        <p:nvSpPr>
-          <p:cNvPr id="16" name="TextBox 15"/>
-          <p:cNvSpPr txBox="1"/>
-          <p:nvPr/>
-        </p:nvSpPr>
-        <p:spPr>
-          <a:xfrm>
-            <a:off x="868680" y="3931920"/>
-            <a:ext cx="4983480" cy="777240"/>
-          </a:xfrm>
-          <a:prstGeom prst="rect">
-            <a:avLst/>
-          </a:prstGeom>
-          <a:noFill/>
-        </p:spPr>
-        <p:txBody>
-          <a:bodyPr wrap="square" anchor="t">
-            <a:spAutoFit/>
-          </a:bodyPr>
-          <a:lstStyle/>
-          <a:p>
-            <a:pPr algn="l"/>
-            <a:r>
-              <a:rPr sz="1000" b="0" i="0">
-                <a:solidFill>
-                  <a:srgbClr val="333333"/>
-                </a:solidFill>
-              </a:rPr>
-              <a:t>Extend aspect taxonomy for Indic retail idioms (“bill karo” for billing, “delivery kab” for late shipping).</a:t>
-            </a:r>
-          </a:p>
-        </p:txBody>
-      </p:sp>
-      <p:sp>
-        <p:nvSpPr>
-          <p:cNvPr id="17" name="TextBox 16"/>
-          <p:cNvSpPr txBox="1"/>
-          <p:nvPr/>
-        </p:nvSpPr>
-        <p:spPr>
-          <a:xfrm>
-            <a:off x="685800" y="4754880"/>
-            <a:ext cx="228600" cy="274320"/>
-          </a:xfrm>
-          <a:prstGeom prst="rect">
-            <a:avLst/>
-          </a:prstGeom>
-          <a:noFill/>
-        </p:spPr>
-        <p:txBody>
-          <a:bodyPr wrap="square" anchor="t">
-            <a:spAutoFit/>
-          </a:bodyPr>
-          <a:lstStyle/>
-          <a:p>
-            <a:pPr algn="l"/>
-            <a:r>
-              <a:rPr sz="1100" b="1" i="0">
-                <a:solidFill>
-                  <a:srgbClr val="0071DC"/>
-                </a:solidFill>
-              </a:rPr>
-              <a:t>•</a:t>
-            </a:r>
-          </a:p>
-        </p:txBody>
-      </p:sp>
-      <p:sp>
-        <p:nvSpPr>
-          <p:cNvPr id="18" name="TextBox 17"/>
-          <p:cNvSpPr txBox="1"/>
-          <p:nvPr/>
-        </p:nvSpPr>
-        <p:spPr>
-          <a:xfrm>
-            <a:off x="868680" y="4754880"/>
-            <a:ext cx="4983480" cy="777240"/>
-          </a:xfrm>
-          <a:prstGeom prst="rect">
-            <a:avLst/>
-          </a:prstGeom>
-          <a:noFill/>
-        </p:spPr>
-        <p:txBody>
-          <a:bodyPr wrap="square" anchor="t">
-            <a:spAutoFit/>
-          </a:bodyPr>
-          <a:lstStyle/>
-          <a:p>
-            <a:pPr algn="l"/>
-            <a:r>
-              <a:rPr sz="1000" b="0" i="0">
-                <a:solidFill>
-                  <a:srgbClr val="333333"/>
-                </a:solidFill>
-              </a:rPr>
-              <a:t>Native-speaker analyst validation loop —  same HITL flow, new language pool.</a:t>
-            </a:r>
+              <a:t>Wire the monthly ModernBERT retrain into a Cron / Airflow job with an OOF-F1 promotion gate — new checkpoints ship only when they beat the current one on held-out folds.</a:t>
+            </a:r>
+          </a:p>
+        </p:txBody>
+      </p:sp>
+      <p:sp>
+        <p:nvSpPr>
+          <p:cNvPr id="18" name="Rectangle 17"/>
+          <p:cNvSpPr/>
+          <p:nvPr/>
+        </p:nvSpPr>
+        <p:spPr>
+          <a:xfrm>
+            <a:off x="457200" y="3227832"/>
+            <a:ext cx="11247120" cy="1051560"/>
+          </a:xfrm>
+          <a:prstGeom prst="rect">
+            <a:avLst/>
+          </a:prstGeom>
+          <a:solidFill>
+            <a:srgbClr val="F5F5F5"/>
+          </a:solidFill>
+          <a:ln>
+            <a:solidFill>
+              <a:srgbClr val="7C3AED"/>
+            </a:solidFill>
+          </a:ln>
+          <a:effectLst/>
+        </p:spPr>
+        <p:style>
+          <a:lnRef idx="1">
+            <a:schemeClr val="accent1"/>
+          </a:lnRef>
+          <a:fillRef idx="3">
+            <a:schemeClr val="accent1"/>
+          </a:fillRef>
+          <a:effectRef idx="2">
+            <a:schemeClr val="accent1"/>
+          </a:effectRef>
+          <a:fontRef idx="minor">
+            <a:schemeClr val="lt1"/>
+          </a:fontRef>
+        </p:style>
+        <p:txBody>
+          <a:bodyPr rtlCol="0" anchor="ctr"/>
+          <a:lstStyle/>
+          <a:p>
+            <a:pPr algn="ctr"/>
           </a:p>
         </p:txBody>
       </p:sp>
@@ -19864,8 +19461,414 @@
         </p:nvSpPr>
         <p:spPr>
           <a:xfrm>
-            <a:off x="457200" y="5989320"/>
-            <a:ext cx="5532120" cy="548640"/>
+            <a:off x="457200" y="3227832"/>
+            <a:ext cx="1600200" cy="1051560"/>
+          </a:xfrm>
+          <a:prstGeom prst="rect">
+            <a:avLst/>
+          </a:prstGeom>
+          <a:solidFill>
+            <a:srgbClr val="7C3AED"/>
+          </a:solidFill>
+          <a:ln>
+            <a:noFill/>
+          </a:ln>
+          <a:effectLst/>
+        </p:spPr>
+        <p:style>
+          <a:lnRef idx="1">
+            <a:schemeClr val="accent1"/>
+          </a:lnRef>
+          <a:fillRef idx="3">
+            <a:schemeClr val="accent1"/>
+          </a:fillRef>
+          <a:effectRef idx="2">
+            <a:schemeClr val="accent1"/>
+          </a:effectRef>
+          <a:fontRef idx="minor">
+            <a:schemeClr val="lt1"/>
+          </a:fontRef>
+        </p:style>
+        <p:txBody>
+          <a:bodyPr rtlCol="0" anchor="ctr"/>
+          <a:lstStyle/>
+          <a:p>
+            <a:pPr algn="ctr"/>
+          </a:p>
+        </p:txBody>
+      </p:sp>
+      <p:sp>
+        <p:nvSpPr>
+          <p:cNvPr id="20" name="TextBox 19"/>
+          <p:cNvSpPr txBox="1"/>
+          <p:nvPr/>
+        </p:nvSpPr>
+        <p:spPr>
+          <a:xfrm>
+            <a:off x="457200" y="3374136"/>
+            <a:ext cx="1600200" cy="365760"/>
+          </a:xfrm>
+          <a:prstGeom prst="rect">
+            <a:avLst/>
+          </a:prstGeom>
+          <a:noFill/>
+        </p:spPr>
+        <p:txBody>
+          <a:bodyPr wrap="square" anchor="t">
+            <a:spAutoFit/>
+          </a:bodyPr>
+          <a:lstStyle/>
+          <a:p>
+            <a:pPr algn="ctr"/>
+            <a:r>
+              <a:rPr sz="1100" b="1" i="0">
+                <a:solidFill>
+                  <a:srgbClr val="FFFFFF"/>
+                </a:solidFill>
+              </a:rPr>
+              <a:t>3 → 6 months</a:t>
+            </a:r>
+          </a:p>
+        </p:txBody>
+      </p:sp>
+      <p:sp>
+        <p:nvSpPr>
+          <p:cNvPr id="21" name="TextBox 20"/>
+          <p:cNvSpPr txBox="1"/>
+          <p:nvPr/>
+        </p:nvSpPr>
+        <p:spPr>
+          <a:xfrm>
+            <a:off x="457200" y="3730752"/>
+            <a:ext cx="1600200" cy="457200"/>
+          </a:xfrm>
+          <a:prstGeom prst="rect">
+            <a:avLst/>
+          </a:prstGeom>
+          <a:noFill/>
+        </p:spPr>
+        <p:txBody>
+          <a:bodyPr wrap="square" anchor="t">
+            <a:spAutoFit/>
+          </a:bodyPr>
+          <a:lstStyle/>
+          <a:p>
+            <a:pPr algn="ctr"/>
+            <a:r>
+              <a:rPr sz="1000" b="0" i="0">
+                <a:solidFill>
+                  <a:srgbClr val="FFFFFF"/>
+                </a:solidFill>
+              </a:rPr>
+              <a:t>HITL: ~80 %</a:t>
+            </a:r>
+          </a:p>
+        </p:txBody>
+      </p:sp>
+      <p:sp>
+        <p:nvSpPr>
+          <p:cNvPr id="22" name="TextBox 21"/>
+          <p:cNvSpPr txBox="1"/>
+          <p:nvPr/>
+        </p:nvSpPr>
+        <p:spPr>
+          <a:xfrm>
+            <a:off x="2194560" y="3319272"/>
+            <a:ext cx="9326880" cy="365760"/>
+          </a:xfrm>
+          <a:prstGeom prst="rect">
+            <a:avLst/>
+          </a:prstGeom>
+          <a:noFill/>
+        </p:spPr>
+        <p:txBody>
+          <a:bodyPr wrap="square" anchor="t">
+            <a:spAutoFit/>
+          </a:bodyPr>
+          <a:lstStyle/>
+          <a:p>
+            <a:pPr algn="l"/>
+            <a:r>
+              <a:rPr sz="1400" b="1" i="0">
+                <a:solidFill>
+                  <a:srgbClr val="041E42"/>
+                </a:solidFill>
+              </a:rPr>
+              <a:t>Walmart-trained model + shared DB</a:t>
+            </a:r>
+          </a:p>
+        </p:txBody>
+      </p:sp>
+      <p:sp>
+        <p:nvSpPr>
+          <p:cNvPr id="23" name="TextBox 22"/>
+          <p:cNvSpPr txBox="1"/>
+          <p:nvPr/>
+        </p:nvSpPr>
+        <p:spPr>
+          <a:xfrm>
+            <a:off x="2194560" y="3685032"/>
+            <a:ext cx="9326880" cy="594360"/>
+          </a:xfrm>
+          <a:prstGeom prst="rect">
+            <a:avLst/>
+          </a:prstGeom>
+          <a:noFill/>
+        </p:spPr>
+        <p:txBody>
+          <a:bodyPr wrap="square" anchor="t">
+            <a:spAutoFit/>
+          </a:bodyPr>
+          <a:lstStyle/>
+          <a:p>
+            <a:pPr algn="l"/>
+            <a:r>
+              <a:rPr sz="1050" b="0" i="0">
+                <a:solidFill>
+                  <a:srgbClr val="333333"/>
+                </a:solidFill>
+              </a:rPr>
+              <a:t>Fine-tune Mistral 7B on our own posted-reply corpus  →  a Walmart-trained replier that drops the paid GPT-4o dependency, runs fully in-house, and can be self-hosted.  Move the feedback table to a shared managed database so multiple analysts can work concurrently.</a:t>
+            </a:r>
+          </a:p>
+        </p:txBody>
+      </p:sp>
+      <p:sp>
+        <p:nvSpPr>
+          <p:cNvPr id="24" name="Rectangle 23"/>
+          <p:cNvSpPr/>
+          <p:nvPr/>
+        </p:nvSpPr>
+        <p:spPr>
+          <a:xfrm>
+            <a:off x="457200" y="4361688"/>
+            <a:ext cx="11247120" cy="1051560"/>
+          </a:xfrm>
+          <a:prstGeom prst="rect">
+            <a:avLst/>
+          </a:prstGeom>
+          <a:solidFill>
+            <a:srgbClr val="F5F5F5"/>
+          </a:solidFill>
+          <a:ln>
+            <a:solidFill>
+              <a:srgbClr val="D97706"/>
+            </a:solidFill>
+          </a:ln>
+          <a:effectLst/>
+        </p:spPr>
+        <p:style>
+          <a:lnRef idx="1">
+            <a:schemeClr val="accent1"/>
+          </a:lnRef>
+          <a:fillRef idx="3">
+            <a:schemeClr val="accent1"/>
+          </a:fillRef>
+          <a:effectRef idx="2">
+            <a:schemeClr val="accent1"/>
+          </a:effectRef>
+          <a:fontRef idx="minor">
+            <a:schemeClr val="lt1"/>
+          </a:fontRef>
+        </p:style>
+        <p:txBody>
+          <a:bodyPr rtlCol="0" anchor="ctr"/>
+          <a:lstStyle/>
+          <a:p>
+            <a:pPr algn="ctr"/>
+          </a:p>
+        </p:txBody>
+      </p:sp>
+      <p:sp>
+        <p:nvSpPr>
+          <p:cNvPr id="25" name="Rectangle 24"/>
+          <p:cNvSpPr/>
+          <p:nvPr/>
+        </p:nvSpPr>
+        <p:spPr>
+          <a:xfrm>
+            <a:off x="457200" y="4361688"/>
+            <a:ext cx="1600200" cy="1051560"/>
+          </a:xfrm>
+          <a:prstGeom prst="rect">
+            <a:avLst/>
+          </a:prstGeom>
+          <a:solidFill>
+            <a:srgbClr val="D97706"/>
+          </a:solidFill>
+          <a:ln>
+            <a:noFill/>
+          </a:ln>
+          <a:effectLst/>
+        </p:spPr>
+        <p:style>
+          <a:lnRef idx="1">
+            <a:schemeClr val="accent1"/>
+          </a:lnRef>
+          <a:fillRef idx="3">
+            <a:schemeClr val="accent1"/>
+          </a:fillRef>
+          <a:effectRef idx="2">
+            <a:schemeClr val="accent1"/>
+          </a:effectRef>
+          <a:fontRef idx="minor">
+            <a:schemeClr val="lt1"/>
+          </a:fontRef>
+        </p:style>
+        <p:txBody>
+          <a:bodyPr rtlCol="0" anchor="ctr"/>
+          <a:lstStyle/>
+          <a:p>
+            <a:pPr algn="ctr"/>
+          </a:p>
+        </p:txBody>
+      </p:sp>
+      <p:sp>
+        <p:nvSpPr>
+          <p:cNvPr id="26" name="TextBox 25"/>
+          <p:cNvSpPr txBox="1"/>
+          <p:nvPr/>
+        </p:nvSpPr>
+        <p:spPr>
+          <a:xfrm>
+            <a:off x="457200" y="4507992"/>
+            <a:ext cx="1600200" cy="365760"/>
+          </a:xfrm>
+          <a:prstGeom prst="rect">
+            <a:avLst/>
+          </a:prstGeom>
+          <a:noFill/>
+        </p:spPr>
+        <p:txBody>
+          <a:bodyPr wrap="square" anchor="t">
+            <a:spAutoFit/>
+          </a:bodyPr>
+          <a:lstStyle/>
+          <a:p>
+            <a:pPr algn="ctr"/>
+            <a:r>
+              <a:rPr sz="1100" b="1" i="0">
+                <a:solidFill>
+                  <a:srgbClr val="FFFFFF"/>
+                </a:solidFill>
+              </a:rPr>
+              <a:t>6 → 12 months</a:t>
+            </a:r>
+          </a:p>
+        </p:txBody>
+      </p:sp>
+      <p:sp>
+        <p:nvSpPr>
+          <p:cNvPr id="27" name="TextBox 26"/>
+          <p:cNvSpPr txBox="1"/>
+          <p:nvPr/>
+        </p:nvSpPr>
+        <p:spPr>
+          <a:xfrm>
+            <a:off x="457200" y="4864608"/>
+            <a:ext cx="1600200" cy="457200"/>
+          </a:xfrm>
+          <a:prstGeom prst="rect">
+            <a:avLst/>
+          </a:prstGeom>
+          <a:noFill/>
+        </p:spPr>
+        <p:txBody>
+          <a:bodyPr wrap="square" anchor="t">
+            <a:spAutoFit/>
+          </a:bodyPr>
+          <a:lstStyle/>
+          <a:p>
+            <a:pPr algn="ctr"/>
+            <a:r>
+              <a:rPr sz="1000" b="0" i="0">
+                <a:solidFill>
+                  <a:srgbClr val="FFFFFF"/>
+                </a:solidFill>
+              </a:rPr>
+              <a:t>HITL: ~30 %  →  eventually 0 %</a:t>
+            </a:r>
+          </a:p>
+        </p:txBody>
+      </p:sp>
+      <p:sp>
+        <p:nvSpPr>
+          <p:cNvPr id="28" name="TextBox 27"/>
+          <p:cNvSpPr txBox="1"/>
+          <p:nvPr/>
+        </p:nvSpPr>
+        <p:spPr>
+          <a:xfrm>
+            <a:off x="2194560" y="4453128"/>
+            <a:ext cx="9326880" cy="365760"/>
+          </a:xfrm>
+          <a:prstGeom prst="rect">
+            <a:avLst/>
+          </a:prstGeom>
+          <a:noFill/>
+        </p:spPr>
+        <p:txBody>
+          <a:bodyPr wrap="square" anchor="t">
+            <a:spAutoFit/>
+          </a:bodyPr>
+          <a:lstStyle/>
+          <a:p>
+            <a:pPr algn="l"/>
+            <a:r>
+              <a:rPr sz="1400" b="1" i="0">
+                <a:solidFill>
+                  <a:srgbClr val="041E42"/>
+                </a:solidFill>
+              </a:rPr>
+              <a:t>Confidence-gated auto-reply</a:t>
+            </a:r>
+          </a:p>
+        </p:txBody>
+      </p:sp>
+      <p:sp>
+        <p:nvSpPr>
+          <p:cNvPr id="29" name="TextBox 28"/>
+          <p:cNvSpPr txBox="1"/>
+          <p:nvPr/>
+        </p:nvSpPr>
+        <p:spPr>
+          <a:xfrm>
+            <a:off x="2194560" y="4818888"/>
+            <a:ext cx="9326880" cy="594360"/>
+          </a:xfrm>
+          <a:prstGeom prst="rect">
+            <a:avLst/>
+          </a:prstGeom>
+          <a:noFill/>
+        </p:spPr>
+        <p:txBody>
+          <a:bodyPr wrap="square" anchor="t">
+            <a:spAutoFit/>
+          </a:bodyPr>
+          <a:lstStyle/>
+          <a:p>
+            <a:pPr algn="l"/>
+            <a:r>
+              <a:rPr sz="1050" b="0" i="0">
+                <a:solidFill>
+                  <a:srgbClr val="333333"/>
+                </a:solidFill>
+              </a:rPr>
+              <a:t>Introduce a confidence gate on the reply generator: top-confidence drafts are queued for auto-send and the analyst only reviews the mid- and low-confidence tail.  As agreement stays high, gradually raise the auto-send threshold — HITL winds down to sampling / audit only.</a:t>
+            </a:r>
+          </a:p>
+        </p:txBody>
+      </p:sp>
+      <p:sp>
+        <p:nvSpPr>
+          <p:cNvPr id="30" name="Rectangle 29"/>
+          <p:cNvSpPr/>
+          <p:nvPr/>
+        </p:nvSpPr>
+        <p:spPr>
+          <a:xfrm>
+            <a:off x="457200" y="5440680"/>
+            <a:ext cx="11247120" cy="868680"/>
           </a:xfrm>
           <a:prstGeom prst="rect">
             <a:avLst/>
@@ -19904,6 +19907,826 @@
       </p:sp>
       <p:sp>
         <p:nvSpPr>
+          <p:cNvPr id="31" name="TextBox 30"/>
+          <p:cNvSpPr txBox="1"/>
+          <p:nvPr/>
+        </p:nvSpPr>
+        <p:spPr>
+          <a:xfrm>
+            <a:off x="640080" y="5532120"/>
+            <a:ext cx="10972800" cy="320040"/>
+          </a:xfrm>
+          <a:prstGeom prst="rect">
+            <a:avLst/>
+          </a:prstGeom>
+          <a:noFill/>
+        </p:spPr>
+        <p:txBody>
+          <a:bodyPr wrap="square" anchor="t">
+            <a:spAutoFit/>
+          </a:bodyPr>
+          <a:lstStyle/>
+          <a:p>
+            <a:pPr algn="l"/>
+            <a:r>
+              <a:rPr sz="1100" b="1" i="0">
+                <a:solidFill>
+                  <a:srgbClr val="0071DC"/>
+                </a:solidFill>
+              </a:rPr>
+              <a:t>GUIDING PRINCIPLE</a:t>
+            </a:r>
+          </a:p>
+        </p:txBody>
+      </p:sp>
+      <p:sp>
+        <p:nvSpPr>
+          <p:cNvPr id="32" name="TextBox 31"/>
+          <p:cNvSpPr txBox="1"/>
+          <p:nvPr/>
+        </p:nvSpPr>
+        <p:spPr>
+          <a:xfrm>
+            <a:off x="640080" y="5852160"/>
+            <a:ext cx="10972800" cy="457200"/>
+          </a:xfrm>
+          <a:prstGeom prst="rect">
+            <a:avLst/>
+          </a:prstGeom>
+          <a:noFill/>
+        </p:spPr>
+        <p:txBody>
+          <a:bodyPr wrap="square" anchor="t">
+            <a:spAutoFit/>
+          </a:bodyPr>
+          <a:lstStyle/>
+          <a:p>
+            <a:pPr algn="l"/>
+            <a:r>
+              <a:rPr sz="1100" b="0" i="0">
+                <a:solidFill>
+                  <a:srgbClr val="333333"/>
+                </a:solidFill>
+              </a:rPr>
+              <a:t>HITL is the ladder, not the ceiling — every stage produces the training signal that lets the next stage automate more.  Each horizon is admissible only when the previous one is measurably successful.</a:t>
+            </a:r>
+          </a:p>
+        </p:txBody>
+      </p:sp>
+      <p:sp>
+        <p:nvSpPr>
+          <p:cNvPr id="33" name="TextBox 32"/>
+          <p:cNvSpPr txBox="1"/>
+          <p:nvPr/>
+        </p:nvSpPr>
+        <p:spPr>
+          <a:xfrm>
+            <a:off x="365760" y="6537960"/>
+            <a:ext cx="8229600" cy="274320"/>
+          </a:xfrm>
+          <a:prstGeom prst="rect">
+            <a:avLst/>
+          </a:prstGeom>
+          <a:noFill/>
+        </p:spPr>
+        <p:txBody>
+          <a:bodyPr wrap="square" anchor="t">
+            <a:spAutoFit/>
+          </a:bodyPr>
+          <a:lstStyle/>
+          <a:p>
+            <a:pPr algn="l"/>
+            <a:r>
+              <a:rPr sz="900" b="0" i="0">
+                <a:solidFill>
+                  <a:srgbClr val="666666"/>
+                </a:solidFill>
+              </a:rPr>
+              <a:t>Retail Sentiment Intelligence  ·  BITS ZG628T Dissertation  ·  Vishal Singh  ·  Post Mid-Semester Presentation</a:t>
+            </a:r>
+          </a:p>
+        </p:txBody>
+      </p:sp>
+      <p:sp>
+        <p:nvSpPr>
+          <p:cNvPr id="34" name="TextBox 33"/>
+          <p:cNvSpPr txBox="1"/>
+          <p:nvPr/>
+        </p:nvSpPr>
+        <p:spPr>
+          <a:xfrm>
+            <a:off x="10972800" y="6537960"/>
+            <a:ext cx="1097280" cy="274320"/>
+          </a:xfrm>
+          <a:prstGeom prst="rect">
+            <a:avLst/>
+          </a:prstGeom>
+          <a:noFill/>
+        </p:spPr>
+        <p:txBody>
+          <a:bodyPr wrap="square" anchor="t">
+            <a:spAutoFit/>
+          </a:bodyPr>
+          <a:lstStyle/>
+          <a:p>
+            <a:pPr algn="r"/>
+            <a:r>
+              <a:rPr sz="900" b="0" i="0">
+                <a:solidFill>
+                  <a:srgbClr val="666666"/>
+                </a:solidFill>
+              </a:rPr>
+              <a:t>21 / 24</a:t>
+            </a:r>
+          </a:p>
+        </p:txBody>
+      </p:sp>
+    </p:spTree>
+  </p:cSld>
+  <p:clrMapOvr>
+    <a:masterClrMapping/>
+  </p:clrMapOvr>
+</p:sld>
+</file>
+
+<file path=ppt/slides/slide22.xml><?xml version="1.0" encoding="utf-8"?>
+<p:sld xmlns:a="http://schemas.openxmlformats.org/drawingml/2006/main" xmlns:p="http://schemas.openxmlformats.org/presentationml/2006/main" xmlns:r="http://schemas.openxmlformats.org/officeDocument/2006/relationships">
+  <p:cSld>
+    <p:spTree>
+      <p:nvGrpSpPr>
+        <p:cNvPr id="1" name=""/>
+        <p:cNvGrpSpPr/>
+        <p:nvPr/>
+      </p:nvGrpSpPr>
+      <p:grpSpPr/>
+      <p:sp>
+        <p:nvSpPr>
+          <p:cNvPr id="2" name="Rectangle 1"/>
+          <p:cNvSpPr/>
+          <p:nvPr/>
+        </p:nvSpPr>
+        <p:spPr>
+          <a:xfrm>
+            <a:off x="0" y="0"/>
+            <a:ext cx="12191695" cy="777240"/>
+          </a:xfrm>
+          <a:prstGeom prst="rect">
+            <a:avLst/>
+          </a:prstGeom>
+          <a:solidFill>
+            <a:srgbClr val="041E42"/>
+          </a:solidFill>
+          <a:ln>
+            <a:noFill/>
+          </a:ln>
+          <a:effectLst/>
+        </p:spPr>
+        <p:style>
+          <a:lnRef idx="1">
+            <a:schemeClr val="accent1"/>
+          </a:lnRef>
+          <a:fillRef idx="3">
+            <a:schemeClr val="accent1"/>
+          </a:fillRef>
+          <a:effectRef idx="2">
+            <a:schemeClr val="accent1"/>
+          </a:effectRef>
+          <a:fontRef idx="minor">
+            <a:schemeClr val="lt1"/>
+          </a:fontRef>
+        </p:style>
+        <p:txBody>
+          <a:bodyPr rtlCol="0" anchor="ctr"/>
+          <a:lstStyle/>
+          <a:p>
+            <a:pPr algn="ctr"/>
+          </a:p>
+        </p:txBody>
+      </p:sp>
+      <p:sp>
+        <p:nvSpPr>
+          <p:cNvPr id="3" name="TextBox 2"/>
+          <p:cNvSpPr txBox="1"/>
+          <p:nvPr/>
+        </p:nvSpPr>
+        <p:spPr>
+          <a:xfrm>
+            <a:off x="365760" y="109728"/>
+            <a:ext cx="11430000" cy="457200"/>
+          </a:xfrm>
+          <a:prstGeom prst="rect">
+            <a:avLst/>
+          </a:prstGeom>
+          <a:noFill/>
+        </p:spPr>
+        <p:txBody>
+          <a:bodyPr wrap="square" anchor="t">
+            <a:spAutoFit/>
+          </a:bodyPr>
+          <a:lstStyle/>
+          <a:p>
+            <a:pPr algn="l"/>
+            <a:r>
+              <a:rPr sz="2600" b="1" i="0">
+                <a:solidFill>
+                  <a:srgbClr val="FFFFFF"/>
+                </a:solidFill>
+              </a:rPr>
+              <a:t>Future Work  —  Track 2  ·  Bilingual   +   Track 3  ·  Multi-Platform</a:t>
+            </a:r>
+          </a:p>
+        </p:txBody>
+      </p:sp>
+      <p:sp>
+        <p:nvSpPr>
+          <p:cNvPr id="4" name="TextBox 3"/>
+          <p:cNvSpPr txBox="1"/>
+          <p:nvPr/>
+        </p:nvSpPr>
+        <p:spPr>
+          <a:xfrm>
+            <a:off x="365760" y="457200"/>
+            <a:ext cx="11430000" cy="320040"/>
+          </a:xfrm>
+          <a:prstGeom prst="rect">
+            <a:avLst/>
+          </a:prstGeom>
+          <a:noFill/>
+        </p:spPr>
+        <p:txBody>
+          <a:bodyPr wrap="square" anchor="t">
+            <a:spAutoFit/>
+          </a:bodyPr>
+          <a:lstStyle/>
+          <a:p>
+            <a:pPr algn="l"/>
+            <a:r>
+              <a:rPr sz="1200" b="0" i="0">
+                <a:solidFill>
+                  <a:srgbClr val="E8F4FD"/>
+                </a:solidFill>
+              </a:rPr>
+              <a:t>The other two tracks that widen the pipeline's coverage while Track 1 winds HITL down</a:t>
+            </a:r>
+          </a:p>
+        </p:txBody>
+      </p:sp>
+      <p:sp>
+        <p:nvSpPr>
+          <p:cNvPr id="5" name="Rectangle 4"/>
+          <p:cNvSpPr/>
+          <p:nvPr/>
+        </p:nvSpPr>
+        <p:spPr>
+          <a:xfrm>
+            <a:off x="0" y="777240"/>
+            <a:ext cx="12191695" cy="45720"/>
+          </a:xfrm>
+          <a:prstGeom prst="rect">
+            <a:avLst/>
+          </a:prstGeom>
+          <a:solidFill>
+            <a:srgbClr val="FFC220"/>
+          </a:solidFill>
+          <a:ln>
+            <a:noFill/>
+          </a:ln>
+          <a:effectLst/>
+        </p:spPr>
+        <p:style>
+          <a:lnRef idx="1">
+            <a:schemeClr val="accent1"/>
+          </a:lnRef>
+          <a:fillRef idx="3">
+            <a:schemeClr val="accent1"/>
+          </a:fillRef>
+          <a:effectRef idx="2">
+            <a:schemeClr val="accent1"/>
+          </a:effectRef>
+          <a:fontRef idx="minor">
+            <a:schemeClr val="lt1"/>
+          </a:fontRef>
+        </p:style>
+        <p:txBody>
+          <a:bodyPr rtlCol="0" anchor="ctr"/>
+          <a:lstStyle/>
+          <a:p>
+            <a:pPr algn="ctr"/>
+          </a:p>
+        </p:txBody>
+      </p:sp>
+      <p:sp>
+        <p:nvSpPr>
+          <p:cNvPr id="6" name="Rectangle 5"/>
+          <p:cNvSpPr/>
+          <p:nvPr/>
+        </p:nvSpPr>
+        <p:spPr>
+          <a:xfrm>
+            <a:off x="457200" y="960120"/>
+            <a:ext cx="5532120" cy="502920"/>
+          </a:xfrm>
+          <a:prstGeom prst="rect">
+            <a:avLst/>
+          </a:prstGeom>
+          <a:solidFill>
+            <a:srgbClr val="0071DC"/>
+          </a:solidFill>
+          <a:ln>
+            <a:noFill/>
+          </a:ln>
+          <a:effectLst/>
+        </p:spPr>
+        <p:style>
+          <a:lnRef idx="1">
+            <a:schemeClr val="accent1"/>
+          </a:lnRef>
+          <a:fillRef idx="3">
+            <a:schemeClr val="accent1"/>
+          </a:fillRef>
+          <a:effectRef idx="2">
+            <a:schemeClr val="accent1"/>
+          </a:effectRef>
+          <a:fontRef idx="minor">
+            <a:schemeClr val="lt1"/>
+          </a:fontRef>
+        </p:style>
+        <p:txBody>
+          <a:bodyPr rtlCol="0" anchor="ctr"/>
+          <a:lstStyle/>
+          <a:p>
+            <a:pPr algn="ctr"/>
+          </a:p>
+        </p:txBody>
+      </p:sp>
+      <p:sp>
+        <p:nvSpPr>
+          <p:cNvPr id="7" name="TextBox 6"/>
+          <p:cNvSpPr txBox="1"/>
+          <p:nvPr/>
+        </p:nvSpPr>
+        <p:spPr>
+          <a:xfrm>
+            <a:off x="594360" y="1005840"/>
+            <a:ext cx="5257800" cy="411480"/>
+          </a:xfrm>
+          <a:prstGeom prst="rect">
+            <a:avLst/>
+          </a:prstGeom>
+          <a:noFill/>
+        </p:spPr>
+        <p:txBody>
+          <a:bodyPr wrap="square" anchor="t">
+            <a:spAutoFit/>
+          </a:bodyPr>
+          <a:lstStyle/>
+          <a:p>
+            <a:pPr algn="l"/>
+            <a:r>
+              <a:rPr sz="1400" b="1" i="0">
+                <a:solidFill>
+                  <a:srgbClr val="FFFFFF"/>
+                </a:solidFill>
+              </a:rPr>
+              <a:t>TRACK 2  ·  BILINGUAL  →  MULTILINGUAL</a:t>
+            </a:r>
+          </a:p>
+        </p:txBody>
+      </p:sp>
+      <p:sp>
+        <p:nvSpPr>
+          <p:cNvPr id="8" name="Rectangle 7"/>
+          <p:cNvSpPr/>
+          <p:nvPr/>
+        </p:nvSpPr>
+        <p:spPr>
+          <a:xfrm>
+            <a:off x="457200" y="1463040"/>
+            <a:ext cx="5532120" cy="5074920"/>
+          </a:xfrm>
+          <a:prstGeom prst="rect">
+            <a:avLst/>
+          </a:prstGeom>
+          <a:solidFill>
+            <a:srgbClr val="F5F5F5"/>
+          </a:solidFill>
+          <a:ln>
+            <a:solidFill>
+              <a:srgbClr val="0071DC"/>
+            </a:solidFill>
+          </a:ln>
+          <a:effectLst/>
+        </p:spPr>
+        <p:style>
+          <a:lnRef idx="1">
+            <a:schemeClr val="accent1"/>
+          </a:lnRef>
+          <a:fillRef idx="3">
+            <a:schemeClr val="accent1"/>
+          </a:fillRef>
+          <a:effectRef idx="2">
+            <a:schemeClr val="accent1"/>
+          </a:effectRef>
+          <a:fontRef idx="minor">
+            <a:schemeClr val="lt1"/>
+          </a:fontRef>
+        </p:style>
+        <p:txBody>
+          <a:bodyPr rtlCol="0" anchor="ctr"/>
+          <a:lstStyle/>
+          <a:p>
+            <a:pPr algn="ctr"/>
+          </a:p>
+        </p:txBody>
+      </p:sp>
+      <p:sp>
+        <p:nvSpPr>
+          <p:cNvPr id="9" name="TextBox 8"/>
+          <p:cNvSpPr txBox="1"/>
+          <p:nvPr/>
+        </p:nvSpPr>
+        <p:spPr>
+          <a:xfrm>
+            <a:off x="640080" y="1554480"/>
+            <a:ext cx="5166360" cy="365760"/>
+          </a:xfrm>
+          <a:prstGeom prst="rect">
+            <a:avLst/>
+          </a:prstGeom>
+          <a:noFill/>
+        </p:spPr>
+        <p:txBody>
+          <a:bodyPr wrap="square" anchor="t">
+            <a:spAutoFit/>
+          </a:bodyPr>
+          <a:lstStyle/>
+          <a:p>
+            <a:pPr algn="l"/>
+            <a:r>
+              <a:rPr sz="1050" b="0" i="0">
+                <a:solidFill>
+                  <a:srgbClr val="333333"/>
+                </a:solidFill>
+              </a:rPr>
+              <a:t>Why:  Indian retail subreddits are ~30 % of Walmart-family mentions but the current  langdetect  →  English-only  filter silently drops them.</a:t>
+            </a:r>
+          </a:p>
+        </p:txBody>
+      </p:sp>
+      <p:sp>
+        <p:nvSpPr>
+          <p:cNvPr id="10" name="TextBox 9"/>
+          <p:cNvSpPr txBox="1"/>
+          <p:nvPr/>
+        </p:nvSpPr>
+        <p:spPr>
+          <a:xfrm>
+            <a:off x="640080" y="1965960"/>
+            <a:ext cx="5166360" cy="274320"/>
+          </a:xfrm>
+          <a:prstGeom prst="rect">
+            <a:avLst/>
+          </a:prstGeom>
+          <a:noFill/>
+        </p:spPr>
+        <p:txBody>
+          <a:bodyPr wrap="square" anchor="t">
+            <a:spAutoFit/>
+          </a:bodyPr>
+          <a:lstStyle/>
+          <a:p>
+            <a:pPr algn="l"/>
+            <a:r>
+              <a:rPr sz="1150" b="1" i="0">
+                <a:solidFill>
+                  <a:srgbClr val="0071DC"/>
+                </a:solidFill>
+              </a:rPr>
+              <a:t>Concrete deliverables</a:t>
+            </a:r>
+          </a:p>
+        </p:txBody>
+      </p:sp>
+      <p:sp>
+        <p:nvSpPr>
+          <p:cNvPr id="11" name="TextBox 10"/>
+          <p:cNvSpPr txBox="1"/>
+          <p:nvPr/>
+        </p:nvSpPr>
+        <p:spPr>
+          <a:xfrm>
+            <a:off x="685800" y="2286000"/>
+            <a:ext cx="228600" cy="274320"/>
+          </a:xfrm>
+          <a:prstGeom prst="rect">
+            <a:avLst/>
+          </a:prstGeom>
+          <a:noFill/>
+        </p:spPr>
+        <p:txBody>
+          <a:bodyPr wrap="square" anchor="t">
+            <a:spAutoFit/>
+          </a:bodyPr>
+          <a:lstStyle/>
+          <a:p>
+            <a:pPr algn="l"/>
+            <a:r>
+              <a:rPr sz="1100" b="1" i="0">
+                <a:solidFill>
+                  <a:srgbClr val="0071DC"/>
+                </a:solidFill>
+              </a:rPr>
+              <a:t>•</a:t>
+            </a:r>
+          </a:p>
+        </p:txBody>
+      </p:sp>
+      <p:sp>
+        <p:nvSpPr>
+          <p:cNvPr id="12" name="TextBox 11"/>
+          <p:cNvSpPr txBox="1"/>
+          <p:nvPr/>
+        </p:nvSpPr>
+        <p:spPr>
+          <a:xfrm>
+            <a:off x="868680" y="2286000"/>
+            <a:ext cx="4983480" cy="777240"/>
+          </a:xfrm>
+          <a:prstGeom prst="rect">
+            <a:avLst/>
+          </a:prstGeom>
+          <a:noFill/>
+        </p:spPr>
+        <p:txBody>
+          <a:bodyPr wrap="square" anchor="t">
+            <a:spAutoFit/>
+          </a:bodyPr>
+          <a:lstStyle/>
+          <a:p>
+            <a:pPr algn="l"/>
+            <a:r>
+              <a:rPr sz="1000" b="0" i="0">
+                <a:solidFill>
+                  <a:srgbClr val="333333"/>
+                </a:solidFill>
+              </a:rPr>
+              <a:t>Extend  langdetect  to  hi + en  (later  ta / te / bn);  code-mixed 'Hinglish' handled with a mixed-script tokenizer.</a:t>
+            </a:r>
+          </a:p>
+        </p:txBody>
+      </p:sp>
+      <p:sp>
+        <p:nvSpPr>
+          <p:cNvPr id="13" name="TextBox 12"/>
+          <p:cNvSpPr txBox="1"/>
+          <p:nvPr/>
+        </p:nvSpPr>
+        <p:spPr>
+          <a:xfrm>
+            <a:off x="685800" y="3108960"/>
+            <a:ext cx="228600" cy="274320"/>
+          </a:xfrm>
+          <a:prstGeom prst="rect">
+            <a:avLst/>
+          </a:prstGeom>
+          <a:noFill/>
+        </p:spPr>
+        <p:txBody>
+          <a:bodyPr wrap="square" anchor="t">
+            <a:spAutoFit/>
+          </a:bodyPr>
+          <a:lstStyle/>
+          <a:p>
+            <a:pPr algn="l"/>
+            <a:r>
+              <a:rPr sz="1100" b="1" i="0">
+                <a:solidFill>
+                  <a:srgbClr val="0071DC"/>
+                </a:solidFill>
+              </a:rPr>
+              <a:t>•</a:t>
+            </a:r>
+          </a:p>
+        </p:txBody>
+      </p:sp>
+      <p:sp>
+        <p:nvSpPr>
+          <p:cNvPr id="14" name="TextBox 13"/>
+          <p:cNvSpPr txBox="1"/>
+          <p:nvPr/>
+        </p:nvSpPr>
+        <p:spPr>
+          <a:xfrm>
+            <a:off x="868680" y="3108960"/>
+            <a:ext cx="4983480" cy="777240"/>
+          </a:xfrm>
+          <a:prstGeom prst="rect">
+            <a:avLst/>
+          </a:prstGeom>
+          <a:noFill/>
+        </p:spPr>
+        <p:txBody>
+          <a:bodyPr wrap="square" anchor="t">
+            <a:spAutoFit/>
+          </a:bodyPr>
+          <a:lstStyle/>
+          <a:p>
+            <a:pPr algn="l"/>
+            <a:r>
+              <a:rPr sz="1000" b="0" i="0">
+                <a:solidFill>
+                  <a:srgbClr val="333333"/>
+                </a:solidFill>
+              </a:rPr>
+              <a:t>Ingestion-time translation via NLLB-200 (open-weights, 3.3 B) so downstream models stay English-only —  or —  fine-tune ModernBERT on native scripts.</a:t>
+            </a:r>
+          </a:p>
+        </p:txBody>
+      </p:sp>
+      <p:sp>
+        <p:nvSpPr>
+          <p:cNvPr id="15" name="TextBox 14"/>
+          <p:cNvSpPr txBox="1"/>
+          <p:nvPr/>
+        </p:nvSpPr>
+        <p:spPr>
+          <a:xfrm>
+            <a:off x="685800" y="3931920"/>
+            <a:ext cx="228600" cy="274320"/>
+          </a:xfrm>
+          <a:prstGeom prst="rect">
+            <a:avLst/>
+          </a:prstGeom>
+          <a:noFill/>
+        </p:spPr>
+        <p:txBody>
+          <a:bodyPr wrap="square" anchor="t">
+            <a:spAutoFit/>
+          </a:bodyPr>
+          <a:lstStyle/>
+          <a:p>
+            <a:pPr algn="l"/>
+            <a:r>
+              <a:rPr sz="1100" b="1" i="0">
+                <a:solidFill>
+                  <a:srgbClr val="0071DC"/>
+                </a:solidFill>
+              </a:rPr>
+              <a:t>•</a:t>
+            </a:r>
+          </a:p>
+        </p:txBody>
+      </p:sp>
+      <p:sp>
+        <p:nvSpPr>
+          <p:cNvPr id="16" name="TextBox 15"/>
+          <p:cNvSpPr txBox="1"/>
+          <p:nvPr/>
+        </p:nvSpPr>
+        <p:spPr>
+          <a:xfrm>
+            <a:off x="868680" y="3931920"/>
+            <a:ext cx="4983480" cy="777240"/>
+          </a:xfrm>
+          <a:prstGeom prst="rect">
+            <a:avLst/>
+          </a:prstGeom>
+          <a:noFill/>
+        </p:spPr>
+        <p:txBody>
+          <a:bodyPr wrap="square" anchor="t">
+            <a:spAutoFit/>
+          </a:bodyPr>
+          <a:lstStyle/>
+          <a:p>
+            <a:pPr algn="l"/>
+            <a:r>
+              <a:rPr sz="1000" b="0" i="0">
+                <a:solidFill>
+                  <a:srgbClr val="333333"/>
+                </a:solidFill>
+              </a:rPr>
+              <a:t>Extend aspect taxonomy for Indic retail idioms (“bill karo” for billing, “delivery kab” for late shipping).</a:t>
+            </a:r>
+          </a:p>
+        </p:txBody>
+      </p:sp>
+      <p:sp>
+        <p:nvSpPr>
+          <p:cNvPr id="17" name="TextBox 16"/>
+          <p:cNvSpPr txBox="1"/>
+          <p:nvPr/>
+        </p:nvSpPr>
+        <p:spPr>
+          <a:xfrm>
+            <a:off x="685800" y="4754880"/>
+            <a:ext cx="228600" cy="274320"/>
+          </a:xfrm>
+          <a:prstGeom prst="rect">
+            <a:avLst/>
+          </a:prstGeom>
+          <a:noFill/>
+        </p:spPr>
+        <p:txBody>
+          <a:bodyPr wrap="square" anchor="t">
+            <a:spAutoFit/>
+          </a:bodyPr>
+          <a:lstStyle/>
+          <a:p>
+            <a:pPr algn="l"/>
+            <a:r>
+              <a:rPr sz="1100" b="1" i="0">
+                <a:solidFill>
+                  <a:srgbClr val="0071DC"/>
+                </a:solidFill>
+              </a:rPr>
+              <a:t>•</a:t>
+            </a:r>
+          </a:p>
+        </p:txBody>
+      </p:sp>
+      <p:sp>
+        <p:nvSpPr>
+          <p:cNvPr id="18" name="TextBox 17"/>
+          <p:cNvSpPr txBox="1"/>
+          <p:nvPr/>
+        </p:nvSpPr>
+        <p:spPr>
+          <a:xfrm>
+            <a:off x="868680" y="4754880"/>
+            <a:ext cx="4983480" cy="777240"/>
+          </a:xfrm>
+          <a:prstGeom prst="rect">
+            <a:avLst/>
+          </a:prstGeom>
+          <a:noFill/>
+        </p:spPr>
+        <p:txBody>
+          <a:bodyPr wrap="square" anchor="t">
+            <a:spAutoFit/>
+          </a:bodyPr>
+          <a:lstStyle/>
+          <a:p>
+            <a:pPr algn="l"/>
+            <a:r>
+              <a:rPr sz="1000" b="0" i="0">
+                <a:solidFill>
+                  <a:srgbClr val="333333"/>
+                </a:solidFill>
+              </a:rPr>
+              <a:t>Native-speaker analyst validation loop —  same HITL flow, new language pool.</a:t>
+            </a:r>
+          </a:p>
+        </p:txBody>
+      </p:sp>
+      <p:sp>
+        <p:nvSpPr>
+          <p:cNvPr id="19" name="Rectangle 18"/>
+          <p:cNvSpPr/>
+          <p:nvPr/>
+        </p:nvSpPr>
+        <p:spPr>
+          <a:xfrm>
+            <a:off x="457200" y="5989320"/>
+            <a:ext cx="5532120" cy="548640"/>
+          </a:xfrm>
+          <a:prstGeom prst="rect">
+            <a:avLst/>
+          </a:prstGeom>
+          <a:solidFill>
+            <a:srgbClr val="E8F4FD"/>
+          </a:solidFill>
+          <a:ln>
+            <a:solidFill>
+              <a:srgbClr val="0071DC"/>
+            </a:solidFill>
+          </a:ln>
+          <a:effectLst/>
+        </p:spPr>
+        <p:style>
+          <a:lnRef idx="1">
+            <a:schemeClr val="accent1"/>
+          </a:lnRef>
+          <a:fillRef idx="3">
+            <a:schemeClr val="accent1"/>
+          </a:fillRef>
+          <a:effectRef idx="2">
+            <a:schemeClr val="accent1"/>
+          </a:effectRef>
+          <a:fontRef idx="minor">
+            <a:schemeClr val="lt1"/>
+          </a:fontRef>
+        </p:style>
+        <p:txBody>
+          <a:bodyPr rtlCol="0" anchor="ctr"/>
+          <a:lstStyle/>
+          <a:p>
+            <a:pPr algn="ctr"/>
+          </a:p>
+        </p:txBody>
+      </p:sp>
+      <p:sp>
+        <p:nvSpPr>
           <p:cNvPr id="20" name="TextBox 19"/>
           <p:cNvSpPr txBox="1"/>
           <p:nvPr/>
@@ -20543,7 +21366,7 @@
                   <a:srgbClr val="666666"/>
                 </a:solidFill>
               </a:rPr>
-              <a:t>21 / 23</a:t>
+              <a:t>22 / 24</a:t>
             </a:r>
           </a:p>
         </p:txBody>
@@ -20556,7 +21379,7 @@
 </p:sld>
 </file>
 
-<file path=ppt/slides/slide22.xml><?xml version="1.0" encoding="utf-8"?>
+<file path=ppt/slides/slide23.xml><?xml version="1.0" encoding="utf-8"?>
 <p:sld xmlns:a="http://schemas.openxmlformats.org/drawingml/2006/main" xmlns:p="http://schemas.openxmlformats.org/presentationml/2006/main" xmlns:r="http://schemas.openxmlformats.org/officeDocument/2006/relationships">
   <p:cSld>
     <p:spTree>
@@ -21526,7 +22349,7 @@
                   <a:srgbClr val="666666"/>
                 </a:solidFill>
               </a:rPr>
-              <a:t>22 / 23</a:t>
+              <a:t>23 / 24</a:t>
             </a:r>
           </a:p>
         </p:txBody>
@@ -21539,7 +22362,7 @@
 </p:sld>
 </file>
 
-<file path=ppt/slides/slide23.xml><?xml version="1.0" encoding="utf-8"?>
+<file path=ppt/slides/slide24.xml><?xml version="1.0" encoding="utf-8"?>
 <p:sld xmlns:a="http://schemas.openxmlformats.org/drawingml/2006/main" xmlns:p="http://schemas.openxmlformats.org/presentationml/2006/main" xmlns:r="http://schemas.openxmlformats.org/officeDocument/2006/relationships">
   <p:cSld>
     <p:bg>
@@ -22657,7 +23480,7 @@
                   <a:srgbClr val="666666"/>
                 </a:solidFill>
               </a:rPr>
-              <a:t>3 / 23</a:t>
+              <a:t>3 / 24</a:t>
             </a:r>
           </a:p>
         </p:txBody>
@@ -23298,7 +24121,7 @@
                   <a:srgbClr val="666666"/>
                 </a:solidFill>
               </a:rPr>
-              <a:t>4 / 23</a:t>
+              <a:t>4 / 24</a:t>
             </a:r>
           </a:p>
         </p:txBody>
@@ -24612,7 +25435,7 @@
                   <a:srgbClr val="666666"/>
                 </a:solidFill>
               </a:rPr>
-              <a:t>5 / 23</a:t>
+              <a:t>5 / 24</a:t>
             </a:r>
           </a:p>
         </p:txBody>
@@ -25851,7 +26674,7 @@
                   <a:srgbClr val="666666"/>
                 </a:solidFill>
               </a:rPr>
-              <a:t>6 / 23</a:t>
+              <a:t>6 / 24</a:t>
             </a:r>
           </a:p>
         </p:txBody>
@@ -26898,7 +27721,7 @@
                   <a:srgbClr val="666666"/>
                 </a:solidFill>
               </a:rPr>
-              <a:t>7 / 23</a:t>
+              <a:t>7 / 24</a:t>
             </a:r>
           </a:p>
         </p:txBody>
@@ -28322,7 +29145,7 @@
                   <a:srgbClr val="666666"/>
                 </a:solidFill>
               </a:rPr>
-              <a:t>8 / 23</a:t>
+              <a:t>8 / 24</a:t>
             </a:r>
           </a:p>
         </p:txBody>
@@ -28978,7 +29801,7 @@
                   <a:srgbClr val="666666"/>
                 </a:solidFill>
               </a:rPr>
-              <a:t>9 / 23</a:t>
+              <a:t>9 / 24</a:t>
             </a:r>
           </a:p>
         </p:txBody>
